--- a/docs/presentations_files/quality-attributes/VIA-quality-attributes.pptx
+++ b/docs/presentations_files/quality-attributes/VIA-quality-attributes.pptx
@@ -2,14 +2,14 @@
 <file path=ppt/presentation.xml><?xml version="1.0" encoding="utf-8"?>
 <p:presentation xmlns:p="http://schemas.openxmlformats.org/presentationml/2006/main">
   <p:sldMasterIdLst>
-    <p:sldMasterId xmlns:r="http://schemas.openxmlformats.org/officeDocument/2006/relationships" id="2147483648" r:id="R8c3e8db8ed4b4d24"/>
+    <p:sldMasterId xmlns:r="http://schemas.openxmlformats.org/officeDocument/2006/relationships" id="2147483648" r:id="R1ea347adc4ed4e98"/>
   </p:sldMasterIdLst>
   <p:notesMasterIdLst>
-    <p:notesMasterId xmlns:r="http://schemas.openxmlformats.org/officeDocument/2006/relationships" r:id="R091da38e99e3454c"/>
+    <p:notesMasterId xmlns:r="http://schemas.openxmlformats.org/officeDocument/2006/relationships" r:id="R6cf76ca6f8f54722"/>
   </p:notesMasterIdLst>
   <p:sldIdLst>
-    <p:sldId xmlns:r="http://schemas.openxmlformats.org/officeDocument/2006/relationships" id="256" r:id="Re7b3e2998d764939"/>
-    <p:sldId xmlns:r="http://schemas.openxmlformats.org/officeDocument/2006/relationships" id="257" r:id="Rb9b850ec95d3471c"/>
+    <p:sldId xmlns:r="http://schemas.openxmlformats.org/officeDocument/2006/relationships" id="256" r:id="R8957ccd890964dfc"/>
+    <p:sldId xmlns:r="http://schemas.openxmlformats.org/officeDocument/2006/relationships" id="257" r:id="R608706782bdd45fd"/>
   </p:sldIdLst>
   <p:sldSz cx="18288000" cy="10287000"/>
   <p:notesSz cx="6858000" cy="9144000"/>
@@ -443,17 +443,12 @@
           <a:lstStyle xmlns:a="http://schemas.openxmlformats.org/drawingml/2006/main"/>
           <a:p xmlns:a="http://schemas.openxmlformats.org/drawingml/2006/main">
             <a:r>
-              <a:t>VIA 품질 요구사항 발표 문안, 2026-10-06. PRESENTATION_DRAFT_NOT_MEASUREMENT_FREEZE.</a:t>
-            </a:r>
-          </a:p>
-          <a:p xmlns:a="http://schemas.openxmlformats.org/drawingml/2006/main">
-            <a:r>
-              <a:t>공동 순위 안에 추가 우열을 부여하지 않는다. V는 검토 관점이며 최종 QA/ASR 선정이 아니다.</a:t>
-            </a:r>
-          </a:p>
-          <a:p xmlns:a="http://schemas.openxmlformats.org/drawingml/2006/main">
-            <a:r>
-              <a:t>출처: docs/architecture/12-decisions/decision-packages/03-00-quality-scenarios.md §2, §2.1, §2.2, §2.3, §6. docs/architecture/11-measurement/event-boundary-contract.md. docs/architecture/08-quality-attributes/core-asr-contract.md §7.</a:t>
+              <a:t>VIA 품질 요구사항 목표 제안, 2026-10-06. EVIDENCE_BASED_PROPOSED_TARGETS_NOT_MEASURED.</a:t>
+            </a:r>
+          </a:p>
+          <a:p xmlns:a="http://schemas.openxmlformats.org/drawingml/2006/main">
+            <a:r>
+              <a:t>공동 순위 내부의 추가 우열은 없다. 기존 V 원문: docs/architecture/12-decisions/decision-packages/03-00-quality-scenarios.md. 삭제: V-11, V-12, V-13.</a:t>
             </a:r>
           </a:p>
           <a:p xmlns:a="http://schemas.openxmlformats.org/drawingml/2006/main">
@@ -463,32 +458,42 @@
           </a:p>
           <a:p xmlns:a="http://schemas.openxmlformats.org/drawingml/2006/main">
             <a:r>
-              <a:t>설명: 사용자의 의도와 확인된 사실에 맞게 요청의 의미, 업무 연결, 실행 상태와 결과 전달을 처리해야 한다.</a:t>
-            </a:r>
-          </a:p>
-          <a:p xmlns:a="http://schemas.openxmlformats.org/drawingml/2006/main">
-            <a:r>
-              <a:t>목표: 정확 처리율(%) 목표 미정 · 다른 업무 오실행·중복 실행 0건</a:t>
-            </a:r>
-          </a:p>
-          <a:p xmlns:a="http://schemas.openxmlformats.org/drawingml/2006/main">
-            <a:r>
-              <a:t>목표 근거: 정확 처리율은 V 기준에서 미확정이며 오실행·중복 실행 0건은 기존 action/access 규칙을 보존한다.</a:t>
-            </a:r>
-          </a:p>
-          <a:p xmlns:a="http://schemas.openxmlformats.org/drawingml/2006/main">
-            <a:r>
-              <a:t>측정 초안: 목표·대상·요청 관계·업무 연결·실행 상태·실제 전달 사실을 사전 작성한 정답 기준과 대조한다; 전체 적용 판정을 모두 만족한 실행 수/전체 시험 실행 수와 항목별 오류를 함께 보고하며 누락·오답·시간 초과를 성공 표본에서 제외하지 않는다.</a:t>
-            </a:r>
-          </a:p>
-          <a:p xmlns:a="http://schemas.openxmlformats.org/drawingml/2006/main">
-            <a:r>
-              <a:t>경계: Downstream Agent 내부의 도메인 추론·계획·도구 실행 품질은 제외한다. VIA의 잘못된 대상 연결, 상태 판단과 전달은 포함한다.</a:t>
-            </a:r>
-          </a:p>
-          <a:p xmlns:a="http://schemas.openxmlformats.org/drawingml/2006/main">
-            <a:r>
-              <a:t>품질 분류: Functional suitability → Functional correctness</a:t>
+              <a:t>원래 V 이름: 기능 정확성</a:t>
+            </a:r>
+          </a:p>
+          <a:p xmlns:a="http://schemas.openxmlformats.org/drawingml/2006/main">
+            <a:r>
+              <a:t>설명: 사용자 요청을 의도에 맞게 정확히 처리해야 한다.</a:t>
+            </a:r>
+          </a:p>
+          <a:p xmlns:a="http://schemas.openxmlformats.org/drawingml/2006/main">
+            <a:r>
+              <a:t>목표: 정확 처리율 ≥ 90%</a:t>
+            </a:r>
+          </a:p>
+          <a:p xmlns:a="http://schemas.openxmlformats.org/drawingml/2006/main">
+            <a:r>
+              <a:t>목표 근거: SNIPS의 문장 전체 의미 프레임 정확도 92.8%를 참고해 첫 통합 평가의 하한을 90%로 제안한다. VIA와 동일한 시험의 실적이라는 뜻은 아니다.</a:t>
+            </a:r>
+          </a:p>
+          <a:p xmlns:a="http://schemas.openxmlformats.org/drawingml/2006/main">
+            <a:r>
+              <a:t>측정: 1880회 전체를 분모로 삼고 의미, 업무 연결, 상태, 전달의 필수 판정을 모두 만족한 시험만 성공으로 센다.</a:t>
+            </a:r>
+          </a:p>
+          <a:p xmlns:a="http://schemas.openxmlformats.org/drawingml/2006/main">
+            <a:r>
+              <a:t>경계: Downstream Agent 내부의 도메인 추론, 계획, 도구 실행 품질은 제외한다. VIA의 잘못된 대상 연결, 상태 판단과 전달은 포함한다.</a:t>
+            </a:r>
+          </a:p>
+          <a:p xmlns:a="http://schemas.openxmlformats.org/drawingml/2006/main">
+            <a:r>
+              <a:t>S01: Chen et al., 2019, [BERT for Joint Intent Classification and Slot Filling, Table 2](https://arxiv.org/html/1902.10909)</a:t>
+            </a:r>
+          </a:p>
+          <a:p xmlns:a="http://schemas.openxmlformats.org/drawingml/2006/main">
+            <a:r>
+              <a:t>S02: Yao et al., 2024, [tau-bench](https://arxiv.org/abs/2406.12045)</a:t>
             </a:r>
           </a:p>
           <a:p xmlns:a="http://schemas.openxmlformats.org/drawingml/2006/main">
@@ -503,32 +508,37 @@
           </a:p>
           <a:p xmlns:a="http://schemas.openxmlformats.org/drawingml/2006/main">
             <a:r>
-              <a:t>설명: 충분한 근거가 있는 요청에서 반복 설명, 재선택과 수동 업무 연결의 부담을 줄여 사용자 목표 달성을 도와야 한다.</a:t>
-            </a:r>
-          </a:p>
-          <a:p xmlns:a="http://schemas.openxmlformats.org/drawingml/2006/main">
-            <a:r>
-              <a:t>목표: 불필요한 사용자 단계(회)·추가 작업시간(s) 목표 미정</a:t>
-            </a:r>
-          </a:p>
-          <a:p xmlns:a="http://schemas.openxmlformats.org/drawingml/2006/main">
-            <a:r>
-              <a:t>목표 근거: 사용자 단계 수와 작업시간의 허용 상한은 미확정이다.</a:t>
-            </a:r>
-          </a:p>
-          <a:p xmlns:a="http://schemas.openxmlformats.org/drawingml/2006/main">
-            <a:r>
-              <a:t>측정 초안: 사용자 여정별 목표 달성 여부와 재설명·재선택·수동 연결의 횟수 및 능동 작업시간을 기록한다; 권한 확인이나 근거 부족으로 필요한 질문은 불필요한 단계와 분리하고 기능 축소가 만든 수동 우회도 포함한다.</a:t>
-            </a:r>
-          </a:p>
-          <a:p xmlns:a="http://schemas.openxmlformats.org/drawingml/2006/main">
-            <a:r>
-              <a:t>경계: V-01의 의미 오류율이나 V-03의 기능 지원률로 대체하지 않는다. 사용자 수고는 V-05의 VIA 귀속 시간과 구분한다.</a:t>
-            </a:r>
-          </a:p>
-          <a:p xmlns:a="http://schemas.openxmlformats.org/drawingml/2006/main">
-            <a:r>
-              <a:t>품질 분류: Functional suitability → Functional appropriateness</a:t>
+              <a:t>원래 V 이름: 기능 적절성</a:t>
+            </a:r>
+          </a:p>
+          <a:p xmlns:a="http://schemas.openxmlformats.org/drawingml/2006/main">
+            <a:r>
+              <a:t>설명: 사용자가 적은 추가 입력으로 요청을 마칠 수 있어야 한다.</a:t>
+            </a:r>
+          </a:p>
+          <a:p xmlns:a="http://schemas.openxmlformats.org/drawingml/2006/main">
+            <a:r>
+              <a:t>목표: 평균 사용자 개입 ≤ 1회/요청</a:t>
+            </a:r>
+          </a:p>
+          <a:p xmlns:a="http://schemas.openxmlformats.org/drawingml/2006/main">
+            <a:r>
+              <a:t>목표 근거: CoA는 필요한 경우 한 번의 집중된 질문으로 모호성을 해소한다. 이를 VIA의 추가 개입 예산 1회로 제안하며 권한 확인도 비용에 포함한다.</a:t>
+            </a:r>
+          </a:p>
+          <a:p xmlns:a="http://schemas.openxmlformats.org/drawingml/2006/main">
+            <a:r>
+              <a:t>측정: 최초 요청은 제외하고 VIA가 요구한 질문 답변, 선택, 승인과 수동 우회를 센다. 자발적 목표 변경은 별도 요청으로 기록한다.</a:t>
+            </a:r>
+          </a:p>
+          <a:p xmlns:a="http://schemas.openxmlformats.org/drawingml/2006/main">
+            <a:r>
+              <a:t>경계: V-01의 의미 오류율이나 V-03의 기능 지원률로 대체하지 않는다. 사용자 수고는 V-05의 VIA 책임 시간과 구분한다.</a:t>
+            </a:r>
+          </a:p>
+          <a:p xmlns:a="http://schemas.openxmlformats.org/drawingml/2006/main">
+            <a:r>
+              <a:t>S03: Cao et al., 2026, [Clarify or Answer](https://arxiv.org/abs/2601.16400)</a:t>
             </a:r>
           </a:p>
           <a:p xmlns:a="http://schemas.openxmlformats.org/drawingml/2006/main">
@@ -543,22 +553,27 @@
           </a:p>
           <a:p xmlns:a="http://schemas.openxmlformats.org/drawingml/2006/main">
             <a:r>
-              <a:t>설명: 공통 요구에 포함된 기능과 완료 범위를 지원해 사용자가 필요한 목표를 달성할 수 있어야 한다.</a:t>
-            </a:r>
-          </a:p>
-          <a:p xmlns:a="http://schemas.openxmlformats.org/drawingml/2006/main">
-            <a:r>
-              <a:t>목표: 기능 지원 범위 목표 미정 · 지원·부분 지원·미지원·미확인 구분</a:t>
-            </a:r>
-          </a:p>
-          <a:p xmlns:a="http://schemas.openxmlformats.org/drawingml/2006/main">
-            <a:r>
-              <a:t>목표 근거: 허용 가능한 부분 지원과 미지원 범위는 미확정이며 모든 대안에 100% 지원을 진입 조건으로 강제하지 않는다.</a:t>
-            </a:r>
-          </a:p>
-          <a:p xmlns:a="http://schemas.openxmlformats.org/drawingml/2006/main">
-            <a:r>
-              <a:t>측정 초안: 공통 R/B와 고정 UC·필수 변형을 지원, 부분 지원, 미지원, 미확인의 네 상태로 기록하고 각 상태의 건수와 분모를 공개한다; 제한 조건, 포기한 목표, 수동 우회와 사용자 영향을 적으며 설계상의 지원 주장과 구현 시험 결과를 구분한다.</a:t>
+              <a:t>원래 V 이름: 기능 완전성</a:t>
+            </a:r>
+          </a:p>
+          <a:p xmlns:a="http://schemas.openxmlformats.org/drawingml/2006/main">
+            <a:r>
+              <a:t>설명: 고정된 사용 시나리오의 필수 기능을 모두 지원해야 한다.</a:t>
+            </a:r>
+          </a:p>
+          <a:p xmlns:a="http://schemas.openxmlformats.org/drawingml/2006/main">
+            <a:r>
+              <a:t>목표: 기능 지원 달성률 = 100%</a:t>
+            </a:r>
+          </a:p>
+          <a:p xmlns:a="http://schemas.openxmlformats.org/drawingml/2006/main">
+            <a:r>
+              <a:t>목표 근거: 대표 UC의 필수 변형 94개가 공통 기능 계약이므로 완전 지원 목표를 94/94로 정한다. 상위 UC 18개를 다시 더하지 않는다.</a:t>
+            </a:r>
+          </a:p>
+          <a:p xmlns:a="http://schemas.openxmlformats.org/drawingml/2006/main">
+            <a:r>
+              <a:t>측정: 같은 94개 목록에 완전 지원, 부분 지원, 미지원, 미확인을 기록한다. 실제 동작 증거 없는 설계 주장은 구현 지원으로 세지 않는다.</a:t>
             </a:r>
           </a:p>
           <a:p xmlns:a="http://schemas.openxmlformats.org/drawingml/2006/main">
@@ -568,207 +583,1737 @@
           </a:p>
           <a:p xmlns:a="http://schemas.openxmlformats.org/drawingml/2006/main">
             <a:r>
-              <a:t>품질 분류: Functional suitability → Functional completeness</a:t>
-            </a:r>
-          </a:p>
-          <a:p xmlns:a="http://schemas.openxmlformats.org/drawingml/2006/main">
-            <a:r>
-              <a:t/>
-            </a:r>
-          </a:p>
-          <a:p xmlns:a="http://schemas.openxmlformats.org/drawingml/2006/main">
-            <a:r>
-              <a:t>V-04 상호작용 반응성</a:t>
-            </a:r>
-          </a:p>
-          <a:p xmlns:a="http://schemas.openxmlformats.org/drawingml/2006/main">
-            <a:r>
-              <a:t>설명: 사용자 입력이나 제어 사건 뒤 유효한 응답 또는 실제 제어 효과가 신속하게 나타나야 한다.</a:t>
-            </a:r>
-          </a:p>
-          <a:p xmlns:a="http://schemas.openxmlformats.org/drawingml/2006/main">
-            <a:r>
-              <a:t>목표: 응답·상태 전달·제어·음성 중단의 허용 지연(ms) 미정</a:t>
-            </a:r>
-          </a:p>
-          <a:p xmlns:a="http://schemas.openxmlformats.org/drawingml/2006/main">
-            <a:r>
-              <a:t>목표 근거: V-04의 종류별 지연 상한과 집계 방식은 미확정이며 기존 QA 평균 목표를 자동 적용하지 않는다.</a:t>
-            </a:r>
-          </a:p>
-          <a:p xmlns:a="http://schemas.openxmlformats.org/drawingml/2006/main">
-            <a:r>
-              <a:t>측정 초안: 발화 종료/텍스트 제출, 외부 상태의 source availability, barge-in onset 등 실제 사건과 유효한 표시·의미 있는 발화·마지막 중단 음성 sample을 연결한다; 응답·상태 전달·Task 제어·음성 중단을 구분해 지연 분포와 실패·시간 초과를 보고한다.</a:t>
-            </a:r>
-          </a:p>
-          <a:p xmlns:a="http://schemas.openxmlformats.org/drawingml/2006/main">
-            <a:r>
-              <a:t>경계: 접수 인사·spinner·enqueue는 유효한 종료점이 아니다. 음성 출력 중단과 업무 취소는 구분하며 Agent 내부 실행 시간은 제외한다.</a:t>
-            </a:r>
-          </a:p>
-          <a:p xmlns:a="http://schemas.openxmlformats.org/drawingml/2006/main">
-            <a:r>
-              <a:t>품질 분류: Performance efficiency → Time behaviour</a:t>
-            </a:r>
-          </a:p>
-          <a:p xmlns:a="http://schemas.openxmlformats.org/drawingml/2006/main">
-            <a:r>
-              <a:t/>
-            </a:r>
-          </a:p>
-          <a:p xmlns:a="http://schemas.openxmlformats.org/drawingml/2006/main">
-            <a:r>
-              <a:t>V-05 VIA 귀속 요청 완료 시간</a:t>
-            </a:r>
-          </a:p>
-          <a:p xmlns:a="http://schemas.openxmlformats.org/drawingml/2006/main">
-            <a:r>
-              <a:t>설명: 요청 시작부터 필요한 최종 결과의 실제 전달까지 VIA가 책임지는 처리와 대기 시간을 줄여야 한다.</a:t>
-            </a:r>
-          </a:p>
-          <a:p xmlns:a="http://schemas.openxmlformats.org/drawingml/2006/main">
-            <a:r>
-              <a:t>목표: 직접·위임·의존 요청별 VIA 귀속 완료시간(ms) 미정</a:t>
-            </a:r>
-          </a:p>
-          <a:p xmlns:a="http://schemas.openxmlformats.org/drawingml/2006/main">
-            <a:r>
-              <a:t>목표 근거: 완료시간 상한과 병렬·중첩 구간의 정확한 귀속 산식은 미확정이다.</a:t>
-            </a:r>
-          </a:p>
-          <a:p xmlns:a="http://schemas.openxmlformats.org/drawingml/2006/main">
-            <a:r>
-              <a:t>측정 초안: 같은 요청과 외부 실행 profile에서 자료 준비·내부 queue·경합·인계·후속 요청 해제·결과 검증·실제 최종 전달의 사건과 의존 관계를 기록한다; 병렬 및 겹친 구간을 구분해 VIA 귀속 완료 지연을 산출하는 공통 귀속·집계 규칙을 측정 전에 정한다.</a:t>
-            </a:r>
-          </a:p>
-          <a:p xmlns:a="http://schemas.openxmlformats.org/drawingml/2006/main">
-            <a:r>
-              <a:t>경계: Agent 내부 대기·추론·계획·업무 실행 및 사람의 답변 대기는 제외한다. 전체 경과시간에서 외부 시간 합을 단순 차감하거나 병렬 VIA 구간을 무조건 합산하지 않는다.</a:t>
-            </a:r>
-          </a:p>
-          <a:p xmlns:a="http://schemas.openxmlformats.org/drawingml/2006/main">
-            <a:r>
-              <a:t>품질 분류: Performance efficiency → Time behaviour</a:t>
-            </a:r>
-          </a:p>
-          <a:p xmlns:a="http://schemas.openxmlformats.org/drawingml/2006/main">
-            <a:r>
-              <a:t/>
-            </a:r>
-          </a:p>
-          <a:p xmlns:a="http://schemas.openxmlformats.org/drawingml/2006/main">
-            <a:r>
-              <a:t>V-08 변경 용이성과 모듈성</a:t>
-            </a:r>
-          </a:p>
-          <a:p xmlns:a="http://schemas.openxmlformats.org/drawingml/2006/main">
-            <a:r>
-              <a:t>설명: 기능·계약 변경의 영향을 제한하고 다른 책임과 기존 기능을 유지하며 수정과 검증을 수행할 수 있어야 한다.</a:t>
-            </a:r>
-          </a:p>
-          <a:p xmlns:a="http://schemas.openxmlformats.org/drawingml/2006/main">
-            <a:r>
-              <a:t>목표: 변경 요소 수(개)·수정 및 회귀 검증 공수(인시) 목표 미정</a:t>
-            </a:r>
-          </a:p>
-          <a:p xmlns:a="http://schemas.openxmlformats.org/drawingml/2006/main">
-            <a:r>
-              <a:t>목표 근거: 허용 변경 범위와 공수는 미확정이며 기존 QA의 3-element 목표를 자동 적용하지 않는다.</a:t>
-            </a:r>
-          </a:p>
-          <a:p xmlns:a="http://schemas.openxmlformats.org/drawingml/2006/main">
-            <a:r>
-              <a:t>측정 초안: Agent 계약, 모델 인터페이스, Context source, 상태 형식과 시험·로그 변화에 동일한 변경 과제를 적용한다; 같은 추상화 깊이로 변경 요소·인터페이스·상태·런타임을 기록하고 수정 난이도·공수·검증 부담·회귀 실패를 함께 보고한다.</a:t>
-            </a:r>
-          </a:p>
-          <a:p xmlns:a="http://schemas.openxmlformats.org/drawingml/2006/main">
-            <a:r>
-              <a:t>경계: 파일 수나 Component 수만으로 모듈성 또는 변경 용이성을 판정하지 않는다. 기능을 제거해 변경 비용을 줄였다면 V-03에도 기록한다.</a:t>
-            </a:r>
-          </a:p>
-          <a:p xmlns:a="http://schemas.openxmlformats.org/drawingml/2006/main">
-            <a:r>
-              <a:t>품질 분류: Maintainability → Modifiability / Modularity</a:t>
-            </a:r>
-          </a:p>
-          <a:p xmlns:a="http://schemas.openxmlformats.org/drawingml/2006/main">
-            <a:r>
-              <a:t/>
-            </a:r>
-          </a:p>
-          <a:p xmlns:a="http://schemas.openxmlformats.org/drawingml/2006/main">
-            <a:r>
-              <a:t>V-06 자원 활용성과 수용량</a:t>
-            </a:r>
-          </a:p>
-          <a:p xmlns:a="http://schemas.openxmlformats.org/drawingml/2006/main">
-            <a:r>
-              <a:t>설명: 필요한 기능을 함께 유지하는 자원 비용을 줄이고 정상 처리 가능한 부하 범위를 확보해야 한다.</a:t>
-            </a:r>
-          </a:p>
-          <a:p xmlns:a="http://schemas.openxmlformats.org/drawingml/2006/main">
-            <a:r>
-              <a:t>목표: 메모리·연산·에너지·저장 예산 및 동시 업무·입력 부하 상한 미정</a:t>
-            </a:r>
-          </a:p>
-          <a:p xmlns:a="http://schemas.openxmlformats.org/drawingml/2006/main">
-            <a:r>
-              <a:t>목표 근거: 자원별 예산과 수용량 목표는 미확정이며 참고 슬라이드의 32MB·12.8GB 수치를 가져오지 않는다.</a:t>
-            </a:r>
-          </a:p>
-          <a:p xmlns:a="http://schemas.openxmlformats.org/drawingml/2006/main">
-            <a:r>
-              <a:t>측정 초안: 대상 PC·모델 profile·기능·입력률·동시 업무 수를 맞추고 전체 committed memory, CPU/GPU, 에너지, 저장공간을 기록한다; idle·정상·경합·background·폐기·재구성 비용을 포함하며 자원별 사용량과 정상 기능을 유지할 수 있는 부하 한계를 별도로 보고한다.</a:t>
-            </a:r>
-          </a:p>
-          <a:p xmlns:a="http://schemas.openxmlformats.org/drawingml/2006/main">
-            <a:r>
-              <a:t>경계: 하나의 공유 Omni 가중치와 역할별 KV·Context를 구분하고 Streaming ASR 및 모든 추가 helper 비용을 포함한다. 자원 감소가 기능 축소 때문이면 함께 공개한다.</a:t>
-            </a:r>
-          </a:p>
-          <a:p xmlns:a="http://schemas.openxmlformats.org/drawingml/2006/main">
-            <a:r>
-              <a:t>품질 분류: Performance efficiency → Resource utilization / Capacity</a:t>
-            </a:r>
-          </a:p>
-          <a:p xmlns:a="http://schemas.openxmlformats.org/drawingml/2006/main">
-            <a:r>
-              <a:t/>
-            </a:r>
-          </a:p>
-          <a:p xmlns:a="http://schemas.openxmlformats.org/drawingml/2006/main">
-            <a:r>
-              <a:t>V-07 결함 허용성과 복구성</a:t>
-            </a:r>
-          </a:p>
-          <a:p xmlns:a="http://schemas.openxmlformats.org/drawingml/2006/main">
-            <a:r>
-              <a:t>설명: 장애 중 무관한 기능과 업무를 유지하고 장애 뒤 확인 가능한 상태와 제어를 올바르게 복원해야 한다.</a:t>
-            </a:r>
-          </a:p>
-          <a:p xmlns:a="http://schemas.openxmlformats.org/drawingml/2006/main">
-            <a:r>
-              <a:t>목표: 장애 유지·복구율(%)과 복구시간(ms) 미정 · 오실행·중복 실행 0건</a:t>
-            </a:r>
-          </a:p>
-          <a:p xmlns:a="http://schemas.openxmlformats.org/drawingml/2006/main">
-            <a:r>
-              <a:t>목표 근거: 유지·복구율과 deadline은 미확정이며 오실행·중복 실행 0건은 기존 규칙을 보존한다.</a:t>
-            </a:r>
-          </a:p>
-          <a:p xmlns:a="http://schemas.openxmlformats.org/drawingml/2006/main">
-            <a:r>
-              <a:t>측정 초안: 단절·process 종료·실패·중복/역순 event를 같은 의미 시점에 주입한다; 사전에 정한 필요 의존 범위 밖의 기능 영향과 전체 영향 업무의 올바른 identity·state·result·control 복원 여부 및 시간을 각각 기록하고 실패·시간 초과도 남긴다.</a:t>
-            </a:r>
-          </a:p>
-          <a:p xmlns:a="http://schemas.openxmlformats.org/drawingml/2006/main">
-            <a:r>
-              <a:t>경계: process 재기동만으로 복구 성공을 판정하지 않는다. 외부 실행이 확인 불가이면 unknown을 유지하며 완료나 취소를 만들어내지 않는다.</a:t>
-            </a:r>
-          </a:p>
-          <a:p xmlns:a="http://schemas.openxmlformats.org/drawingml/2006/main">
-            <a:r>
-              <a:t>품질 분류: Reliability → Fault tolerance / Recoverability</a:t>
+              <a:t>S00: [VIA 대표 UC](../../architecture/05-representative-use-cases.md), [고정 범위](../../architecture/03-fixed-architecture-scope.md), [03-00 품질 시나리오](../../architecture/12-decisions/decision-packages/03-00-quality-scenarios.md)</a:t>
+            </a:r>
+          </a:p>
+          <a:p xmlns:a="http://schemas.openxmlformats.org/drawingml/2006/main">
+            <a:r>
+              <a:t/>
+            </a:r>
+          </a:p>
+          <a:p xmlns:a="http://schemas.openxmlformats.org/drawingml/2006/main">
+            <a:r>
+              <a:t>V-04 응답 신속성</a:t>
+            </a:r>
+          </a:p>
+          <a:p xmlns:a="http://schemas.openxmlformats.org/drawingml/2006/main">
+            <a:r>
+              <a:t>원래 V 이름: 상호작용 반응성</a:t>
+            </a:r>
+          </a:p>
+          <a:p xmlns:a="http://schemas.openxmlformats.org/drawingml/2006/main">
+            <a:r>
+              <a:t>설명: 사용자 입력에 대한 유효한 반응이 빠르게 나타나야 한다.</a:t>
+            </a:r>
+          </a:p>
+          <a:p xmlns:a="http://schemas.openxmlformats.org/drawingml/2006/main">
+            <a:r>
+              <a:t>목표: p95 반응 지연 ≤ 1초</a:t>
+            </a:r>
+          </a:p>
+          <a:p xmlns:a="http://schemas.openxmlformats.org/drawingml/2006/main">
+            <a:r>
+              <a:t>목표 근거: Nielsen의 1초 반응 기준을 적용한다. p95와 종류별 최댓값 집계는 VIA의 긴 지연을 숨기지 않기 위한 설계 선택이다.</a:t>
+            </a:r>
+          </a:p>
+          <a:p xmlns:a="http://schemas.openxmlformats.org/drawingml/2006/main">
+            <a:r>
+              <a:t>측정: 실제 입력이나 상태 발생부터 의미 있는 응답 또는 제어 효과까지 측정한다. 접수 인사나 spinner는 종료점으로 인정하지 않는다.</a:t>
+            </a:r>
+          </a:p>
+          <a:p xmlns:a="http://schemas.openxmlformats.org/drawingml/2006/main">
+            <a:r>
+              <a:t>경계: 접수 인사, spinner, enqueue는 유효한 종료점이 아니다. 음성 출력 중단과 업무 취소는 구분하며 Agent 내부 실행 시간은 제외한다.</a:t>
+            </a:r>
+          </a:p>
+          <a:p xmlns:a="http://schemas.openxmlformats.org/drawingml/2006/main">
+            <a:r>
+              <a:t>S04: Jakob Nielsen, 2019, [The 3 Response Time Limits in Interaction Design](https://www.nngroup.com/videos/3-response-time-limits-interaction-design/)</a:t>
+            </a:r>
+          </a:p>
+          <a:p xmlns:a="http://schemas.openxmlformats.org/drawingml/2006/main">
+            <a:r>
+              <a:t/>
+            </a:r>
+          </a:p>
+          <a:p xmlns:a="http://schemas.openxmlformats.org/drawingml/2006/main">
+            <a:r>
+              <a:t>V-05 요청 완료 신속성</a:t>
+            </a:r>
+          </a:p>
+          <a:p xmlns:a="http://schemas.openxmlformats.org/drawingml/2006/main">
+            <a:r>
+              <a:t>원래 V 이름: VIA 귀속 요청 완료 시간</a:t>
+            </a:r>
+          </a:p>
+          <a:p xmlns:a="http://schemas.openxmlformats.org/drawingml/2006/main">
+            <a:r>
+              <a:t>설명: 필요한 최종 결과를 사용자에게 빠르게 전달해야 한다.</a:t>
+            </a:r>
+          </a:p>
+          <a:p xmlns:a="http://schemas.openxmlformats.org/drawingml/2006/main">
+            <a:r>
+              <a:t>목표: p95 VIA 완료시간 ≤ 10초</a:t>
+            </a:r>
+          </a:p>
+          <a:p xmlns:a="http://schemas.openxmlformats.org/drawingml/2006/main">
+            <a:r>
+              <a:t>목표 근거: Nielsen의 10초 주의 유지 기준을 VIA가 책임지는 완료시간의 상한으로 제안한다. 외부 작업시간을 제외한 목표임을 함께 표시한다.</a:t>
+            </a:r>
+          </a:p>
+          <a:p xmlns:a="http://schemas.openxmlformats.org/drawingml/2006/main">
+            <a:r>
+              <a:t>측정: 직접 응답과 Agent 위임을 구분하고 앞 결과가 다음 작업 입력이 되는 의존 관계를 별도 표식으로 기록한다. 동일한 10초 목표를 적용한다.</a:t>
+            </a:r>
+          </a:p>
+          <a:p xmlns:a="http://schemas.openxmlformats.org/drawingml/2006/main">
+            <a:r>
+              <a:t>경계: Agent 내부 대기, 추론, 계획, 업무 실행 및 사람의 답변 대기는 제외한다. 전체 경과시간에서 외부 시간 합을 단순 차감하거나 병렬 VIA 구간을 무조건 합산하지 않는다.</a:t>
+            </a:r>
+          </a:p>
+          <a:p xmlns:a="http://schemas.openxmlformats.org/drawingml/2006/main">
+            <a:r>
+              <a:t>S04: Jakob Nielsen, 2019, [The 3 Response Time Limits in Interaction Design](https://www.nngroup.com/videos/3-response-time-limits-interaction-design/)</a:t>
+            </a:r>
+          </a:p>
+          <a:p xmlns:a="http://schemas.openxmlformats.org/drawingml/2006/main">
+            <a:r>
+              <a:t/>
+            </a:r>
+          </a:p>
+          <a:p xmlns:a="http://schemas.openxmlformats.org/drawingml/2006/main">
+            <a:r>
+              <a:t>상세 측정 설계</a:t>
+            </a:r>
+          </a:p>
+          <a:p xmlns:a="http://schemas.openxmlformats.org/drawingml/2006/main">
+            <a:r>
+              <a:t># 목표 근거와 측정 설계</a:t>
+            </a:r>
+          </a:p>
+          <a:p xmlns:a="http://schemas.openxmlformats.org/drawingml/2006/main">
+            <a:r>
+              <a:t/>
+            </a:r>
+          </a:p>
+          <a:p xmlns:a="http://schemas.openxmlformats.org/drawingml/2006/main">
+            <a:r>
+              <a:t>작성일: 2026-10-06. 이 문서는 사용자의 리뷰를 반영한 **근거 기반 목표 제안**이다. VIA의 실측 결과나 동결된 측정 계약으로 해석하지 않는다.</a:t>
+            </a:r>
+          </a:p>
+          <a:p xmlns:a="http://schemas.openxmlformats.org/drawingml/2006/main">
+            <a:r>
+              <a:t/>
+            </a:r>
+          </a:p>
+          <a:p xmlns:a="http://schemas.openxmlformats.org/drawingml/2006/main">
+            <a:r>
+              <a:t>## 1. 발표 범위와 목표 설정 원칙</a:t>
+            </a:r>
+          </a:p>
+          <a:p xmlns:a="http://schemas.openxmlformats.org/drawingml/2006/main">
+            <a:r>
+              <a:t/>
+            </a:r>
+          </a:p>
+          <a:p xmlns:a="http://schemas.openxmlformats.org/drawingml/2006/main">
+            <a:r>
+              <a:t>V-01~10 중 기존 우선순위를 유지한 10개를 발표한다. V-08은 V-06보다 앞에 배치한다. 공동 순위 내부에는 추가 순위를 만들지 않는다. 각 항목은 하나의 품질 속성과 하나의 주지표만 가진다.</a:t>
+            </a:r>
+          </a:p>
+          <a:p xmlns:a="http://schemas.openxmlformats.org/drawingml/2006/main">
+            <a:r>
+              <a:t/>
+            </a:r>
+          </a:p>
+          <a:p xmlns:a="http://schemas.openxmlformats.org/drawingml/2006/main">
+            <a:r>
+              <a:t>V-11은 발표에서 제외하고, PC 공존 비용 중 메모리 부분만 V-06에 반영한다. 메모리 지표가 외부 시스템과의 상호운용성 전체를 평가하는 것은 아니다. V-12와 V-13도 현재 발표의 DP 연결이 약하다는 사용자 판단에 따라 제외한다. 원본 V 목록과 기존 Architecture 및 QA 계약은 그대로 보존한다.</a:t>
+            </a:r>
+          </a:p>
+          <a:p xmlns:a="http://schemas.openxmlformats.org/drawingml/2006/main">
+            <a:r>
+              <a:t/>
+            </a:r>
+          </a:p>
+          <a:p xmlns:a="http://schemas.openxmlformats.org/drawingml/2006/main">
+            <a:r>
+              <a:t>외부 논문의 결과를 VIA의 성능처럼 옮겨 적지 않는다. 각 목표는 아래에서 **출처가 실제로 말하는 사실**, **VIA의 목표로 선택한 이유**, **적용 한계**로 나눠 설명한다. 동일한 제품과 시험이 없는 항목에는 출처의 원칙이나 장치 사양을 바탕으로 VIA의 예산을 계산한다. 특히 90%, 3개, 16GB는 외부 문헌이 VIA에 직접 규정한 수치가 아니다.</a:t>
+            </a:r>
+          </a:p>
+          <a:p xmlns:a="http://schemas.openxmlformats.org/drawingml/2006/main">
+            <a:r>
+              <a:t/>
+            </a:r>
+          </a:p>
+          <a:p xmlns:a="http://schemas.openxmlformats.org/drawingml/2006/main">
+            <a:r>
+              <a:t>100%는 고정 계약의 완전 지원과 연구용 시험 기록의 전수 재구성을 뜻한다. 0건은 고정 권한 계약의 금지 사건 예산이다. 둘 다 미래의 모든 입력이나 모든 공격에 대한 보증을 뜻하지 않는다. 목표를 달성하지 못한 대안도 결과와 비용을 보존하며, 이 발표만으로 후보 탈락이나 승자를 결정하지 않는다.</a:t>
+            </a:r>
+          </a:p>
+          <a:p xmlns:a="http://schemas.openxmlformats.org/drawingml/2006/main">
+            <a:r>
+              <a:t/>
+            </a:r>
+          </a:p>
+          <a:p xmlns:a="http://schemas.openxmlformats.org/drawingml/2006/main">
+            <a:r>
+              <a:t>## 2. 공통 모집단과 시험 조건</a:t>
+            </a:r>
+          </a:p>
+          <a:p xmlns:a="http://schemas.openxmlformats.org/drawingml/2006/main">
+            <a:r>
+              <a:t/>
+            </a:r>
+          </a:p>
+          <a:p xmlns:a="http://schemas.openxmlformats.org/drawingml/2006/main">
+            <a:r>
+              <a:t>### 2.1 기능 모집단</a:t>
+            </a:r>
+          </a:p>
+          <a:p xmlns:a="http://schemas.openxmlformats.org/drawingml/2006/main">
+            <a:r>
+              <a:t/>
+            </a:r>
+          </a:p>
+          <a:p xmlns:a="http://schemas.openxmlformats.org/drawingml/2006/main">
+            <a:r>
+              <a:t>[대표 UC 원문](../../architecture/05-representative-use-cases.md)은 UC 18개와 필수 변형 94개를 포함한다. 기능 단위는 가장 구체적인 필수 변형으로 잡는다. 상위 UC를 다시 합산한 112개를 분모로 쓰면 동일 기능을 두 번 센다.</a:t>
+            </a:r>
+          </a:p>
+          <a:p xmlns:a="http://schemas.openxmlformats.org/drawingml/2006/main">
+            <a:r>
+              <a:t/>
+            </a:r>
+          </a:p>
+          <a:p xmlns:a="http://schemas.openxmlformats.org/drawingml/2006/main">
+            <a:r>
+              <a:t>| UC | 필수 변형 수 | UC | 필수 변형 수 | UC | 필수 변형 수 |</a:t>
+            </a:r>
+          </a:p>
+          <a:p xmlns:a="http://schemas.openxmlformats.org/drawingml/2006/main">
+            <a:r>
+              <a:t>| --- | ---: | --- | ---: | --- | ---: |</a:t>
+            </a:r>
+          </a:p>
+          <a:p xmlns:a="http://schemas.openxmlformats.org/drawingml/2006/main">
+            <a:r>
+              <a:t>| UC-01 | 4 | UC-07 | 5 | UC-13 | 6 |</a:t>
+            </a:r>
+          </a:p>
+          <a:p xmlns:a="http://schemas.openxmlformats.org/drawingml/2006/main">
+            <a:r>
+              <a:t>| UC-02 | 6 | UC-08 | 5 | UC-14 | 5 |</a:t>
+            </a:r>
+          </a:p>
+          <a:p xmlns:a="http://schemas.openxmlformats.org/drawingml/2006/main">
+            <a:r>
+              <a:t>| UC-03 | 6 | UC-09 | 5 | UC-15 | 5 |</a:t>
+            </a:r>
+          </a:p>
+          <a:p xmlns:a="http://schemas.openxmlformats.org/drawingml/2006/main">
+            <a:r>
+              <a:t>| UC-04 | 7 | UC-10 | 5 | UC-16 | 5 |</a:t>
+            </a:r>
+          </a:p>
+          <a:p xmlns:a="http://schemas.openxmlformats.org/drawingml/2006/main">
+            <a:r>
+              <a:t>| UC-05 | 4 | UC-11 | 5 | UC-17 | 5 |</a:t>
+            </a:r>
+          </a:p>
+          <a:p xmlns:a="http://schemas.openxmlformats.org/drawingml/2006/main">
+            <a:r>
+              <a:t>| UC-06 | 5 | UC-12 | 5 | UC-18 | 6 |</a:t>
+            </a:r>
+          </a:p>
+          <a:p xmlns:a="http://schemas.openxmlformats.org/drawingml/2006/main">
+            <a:r>
+              <a:t/>
+            </a:r>
+          </a:p>
+          <a:p xmlns:a="http://schemas.openxmlformats.org/drawingml/2006/main">
+            <a:r>
+              <a:t>[functional-coverage.json](functional-coverage.json)에 94개 ID를 고정한다. 각 변형을 구체적인 상황 5개로 만들고 각 상황을 4회 반복하여 **94 × 5 × 4 = 1,880회**를 제안한다. 5개는 정답이 같은 단순 문장 복사 대신 표현, 참조 대상, 업무 이력, 화면 상황과 사건 순서를 바꾸되 해당 변형의 필수 동작을 유지한다. 변형 자체가 음성 전용이면 텍스트 사례를 억지로 추가하지 않는다. 오류나 예외가 원래 변형이면 기대되는 거절 또는 보류를 정답으로 정한다.</a:t>
+            </a:r>
+          </a:p>
+          <a:p xmlns:a="http://schemas.openxmlformats.org/drawingml/2006/main">
+            <a:r>
+              <a:t/>
+            </a:r>
+          </a:p>
+          <a:p xmlns:a="http://schemas.openxmlformats.org/drawingml/2006/main">
+            <a:r>
+              <a:t>다섯 사례와 네 반복은 시험 규모 선택이며 논문이 규정한 값이 아니다. 동일 사례를 무작위 순서와 같은 seed 집합으로 모든 후보에 적용한다. 분석 시 94개 변형이 동일한 가중치를 갖는다. 아직 구체 입력 fixture나 실행 runner는 만들지 않았으며, JSON은 시험 목록 설계이다.</a:t>
+            </a:r>
+          </a:p>
+          <a:p xmlns:a="http://schemas.openxmlformats.org/drawingml/2006/main">
+            <a:r>
+              <a:t/>
+            </a:r>
+          </a:p>
+          <a:p xmlns:a="http://schemas.openxmlformats.org/drawingml/2006/main">
+            <a:r>
+              <a:t>한 시험은 하나의 사용자 목표를 위한 상호작용 전체이다. 정정, 질문 답변, 후속 제어가 있더라도 같은 목표의 시험에 포함한다. 모델 호출, tool 호출이나 하위 Task를 별도 성공 표본으로 늘리지 않는다. 사용자가 독립적인 새 목표를 자발적으로 추가하면 새 시험으로 구분한다.</a:t>
+            </a:r>
+          </a:p>
+          <a:p xmlns:a="http://schemas.openxmlformats.org/drawingml/2006/main">
+            <a:r>
+              <a:t/>
+            </a:r>
+          </a:p>
+          <a:p xmlns:a="http://schemas.openxmlformats.org/drawingml/2006/main">
+            <a:r>
+              <a:t>### 2.2 정답과 외부 경계</a:t>
+            </a:r>
+          </a:p>
+          <a:p xmlns:a="http://schemas.openxmlformats.org/drawingml/2006/main">
+            <a:r>
+              <a:t/>
+            </a:r>
+          </a:p>
+          <a:p xmlns:a="http://schemas.openxmlformats.org/drawingml/2006/main">
+            <a:r>
+              <a:t>각 사례에는 시험 전 정답 manifest를 작성한다. 필드는 기대 의도, 대상, Conversation과 Task 연결, 요청 관계, 수정 범위, 허용 처리, 상태 변화, 필요한 결과 전달이다. 적용하지 않는 필드는 실행 전에 이유를 명시한다. 두 검토자가 기대 상태를 작성하고 불일치를 해결한 뒤 후보에 동일하게 적용한다. 후보가 내놓은 문장을 정답으로 삼지 않는다.</a:t>
+            </a:r>
+          </a:p>
+          <a:p xmlns:a="http://schemas.openxmlformats.org/drawingml/2006/main">
+            <a:r>
+              <a:t/>
+            </a:r>
+          </a:p>
+          <a:p xmlns:a="http://schemas.openxmlformats.org/drawingml/2006/main">
+            <a:r>
+              <a:t>Downstream Agent는 동일한 capability와 성공, 실패, 지연, 중복 알림 script를 제공하는 결정적 simulator로 고정한다. VIA가 받는 외부 결과와 실행 사실을 oracle에 기록한다. Agent 내부의 도메인 답변 품질을 VIA 성공률에 섞지 않는다. VIA의 잘못된 위임, 업무 연결, 상태 판단이나 결과 전달은 포함한다.</a:t>
+            </a:r>
+          </a:p>
+          <a:p xmlns:a="http://schemas.openxmlformats.org/drawingml/2006/main">
+            <a:r>
+              <a:t/>
+            </a:r>
+          </a:p>
+          <a:p xmlns:a="http://schemas.openxmlformats.org/drawingml/2006/main">
+            <a:r>
+              <a:t>시험 timeout은 최종 외부 사건 후 60초의 VIA 책임 시간으로 제안한다. 시간 목표 1초 또는 10초와 구분되는 관측 종료 조건이다. timeout과 crash도 전체 목록에 남긴다. 미지원, 미확인, 로그 누락을 성공 표본에서 제거하지 않는다. 실제 평가 전에 사례 manifest, seed, timeout, 환경 및 집계를 함께 확정한다.</a:t>
+            </a:r>
+          </a:p>
+          <a:p xmlns:a="http://schemas.openxmlformats.org/drawingml/2006/main">
+            <a:r>
+              <a:t/>
+            </a:r>
+          </a:p>
+          <a:p xmlns:a="http://schemas.openxmlformats.org/drawingml/2006/main">
+            <a:r>
+              <a:t>### 2.3 장치와 부하</a:t>
+            </a:r>
+          </a:p>
+          <a:p xmlns:a="http://schemas.openxmlformats.org/drawingml/2006/main">
+            <a:r>
+              <a:t/>
+            </a:r>
+          </a:p>
+          <a:p xmlns:a="http://schemas.openxmlformats.org/drawingml/2006/main">
+            <a:r>
+              <a:t>삼성 Galaxy Book6 Ultra NP960UJH-XG3IN의 32GB RAM, RTX 5070 Laptop 전용 GPU 8GB, Windows 11 구성을 발표의 장치 예산 기준으로 삼는다 [S06]. 실제 시험 장치는 모델명, BIOS, OS build, driver, 전력 모드, CPU, GPU, 저장장치와 사용 가능한 물리 메모리를 별도 기록한다. 다른 장치의 결과를 같은 장치 실적으로 표시하지 않는다.</a:t>
+            </a:r>
+          </a:p>
+          <a:p xmlns:a="http://schemas.openxmlformats.org/drawingml/2006/main">
+            <a:r>
+              <a:t/>
+            </a:r>
+          </a:p>
+          <a:p xmlns:a="http://schemas.openxmlformats.org/drawingml/2006/main">
+            <a:r>
+              <a:t>Omni와 Streaming ASR 및 모든 helper의 버전, 파라미터 수, 정밀도, 실제 파일 크기와 loaded bytes를 기록한다. 하나의 공유 Omni 가중치를 전제하고 역할별 Context와 KV의 실제 비용을 포함한다. 모델 호출량이나 의미 지원 범위를 줄여 메모리만 통과한 구성은 V-01과 V-03의 결과에서 드러나야 한다.</a:t>
+            </a:r>
+          </a:p>
+          <a:p xmlns:a="http://schemas.openxmlformats.org/drawingml/2006/main">
+            <a:r>
+              <a:t/>
+            </a:r>
+          </a:p>
+          <a:p xmlns:a="http://schemas.openxmlformats.org/drawingml/2006/main">
+            <a:r>
+              <a:t>시험 부하는 한 개의 활성 대화, 미완료 Task 네 개, 동시에 진행하는 외부 실행 두 개를 기본 profile로 제안한다. 이는 현재 측정된 수용량이 아닌 명시적인 비교 조건이다. 더 큰 부하는 별도 민감도 시험으로 공개한다. 입력 시간축과 최대 retained Context, KV, 화면 근거, 오디오 버퍼의 설정을 manifest에 적어 임의의 cache 한도 차이가 결과를 결정하지 않도록 한다.</a:t>
+            </a:r>
+          </a:p>
+          <a:p xmlns:a="http://schemas.openxmlformats.org/drawingml/2006/main">
+            <a:r>
+              <a:t/>
+            </a:r>
+          </a:p>
+          <a:p xmlns:a="http://schemas.openxmlformats.org/drawingml/2006/main">
+            <a:r>
+              <a:t>Cold 시작, warm 요청, 연속 정정, Task 전환, 음성 출력 중 새 입력, 재접속 및 장시간 background 상태를 분리해서 표시한다. 전체 평균만 공개해 어려운 조건을 숨기지 않는다.</a:t>
+            </a:r>
+          </a:p>
+          <a:p xmlns:a="http://schemas.openxmlformats.org/drawingml/2006/main">
+            <a:r>
+              <a:t/>
+            </a:r>
+          </a:p>
+          <a:p xmlns:a="http://schemas.openxmlformats.org/drawingml/2006/main">
+            <a:r>
+              <a:t>## 3. V-01 기능 정확성</a:t>
+            </a:r>
+          </a:p>
+          <a:p xmlns:a="http://schemas.openxmlformats.org/drawingml/2006/main">
+            <a:r>
+              <a:t/>
+            </a:r>
+          </a:p>
+          <a:p xmlns:a="http://schemas.openxmlformats.org/drawingml/2006/main">
+            <a:r>
+              <a:t>**설명:** 사용자 요청을 의도에 맞게 정확히 처리해야 한다.</a:t>
+            </a:r>
+          </a:p>
+          <a:p xmlns:a="http://schemas.openxmlformats.org/drawingml/2006/main">
+            <a:r>
+              <a:t/>
+            </a:r>
+          </a:p>
+          <a:p xmlns:a="http://schemas.openxmlformats.org/drawingml/2006/main">
+            <a:r>
+              <a:t>**단일 목표:** 정확 처리율 90% 이상.</a:t>
+            </a:r>
+          </a:p>
+          <a:p xmlns:a="http://schemas.openxmlformats.org/drawingml/2006/main">
+            <a:r>
+              <a:t/>
+            </a:r>
+          </a:p>
+          <a:p xmlns:a="http://schemas.openxmlformats.org/drawingml/2006/main">
+            <a:r>
+              <a:t>**근거:** Joint BERT 연구의 SNIPS 시험은 문장 전체의 의도와 slot이 모두 맞는 semantic frame accuracy 92.8%를 보고한다 [S01]. slot F1 97.0%나 intent 정확도 98.6%를 전체 요청 성공률처럼 쓰지 않는다. VIA의 첫 통합 평가에서는 더 복잡한 화면과 업무 상태 판단까지 포함하므로 이 문장 단위 결과를 그대로 달성했다고 가정하지 않고, 가까운 정수 10% 단위의 보수적인 목표인 90%를 제안한다. 이는 허용 오류 예산이 전체 시험의 10%라는 뜻이다.</a:t>
+            </a:r>
+          </a:p>
+          <a:p xmlns:a="http://schemas.openxmlformats.org/drawingml/2006/main">
+            <a:r>
+              <a:t/>
+            </a:r>
+          </a:p>
+          <a:p xmlns:a="http://schemas.openxmlformats.org/drawingml/2006/main">
+            <a:r>
+              <a:t>92.8%와 VIA 90%는 서로 다른 모집단이다. 비교 실적이나 최종 제품 출시 기준으로 주장할 수 없다. tau-bench가 대화 종료 후 실제 DB 상태를 정답 상태와 대조하는 방법은 전체 요청의 성공 판정에 참고한다 [S02]. 그 benchmark에서 보고한 낮은 Agent 성공률은 VIA의 90%를 증명하거나 반박하는 직접 비교 수치가 아니다.</a:t>
+            </a:r>
+          </a:p>
+          <a:p xmlns:a="http://schemas.openxmlformats.org/drawingml/2006/main">
+            <a:r>
+              <a:t/>
+            </a:r>
+          </a:p>
+          <a:p xmlns:a="http://schemas.openxmlformats.org/drawingml/2006/main">
+            <a:r>
+              <a:t>**분모와 식:**</a:t>
+            </a:r>
+          </a:p>
+          <a:p xmlns:a="http://schemas.openxmlformats.org/drawingml/2006/main">
+            <a:r>
+              <a:t/>
+            </a:r>
+          </a:p>
+          <a:p xmlns:a="http://schemas.openxmlformats.org/drawingml/2006/main">
+            <a:r>
+              <a:t>```text</a:t>
+            </a:r>
+          </a:p>
+          <a:p xmlns:a="http://schemas.openxmlformats.org/drawingml/2006/main">
+            <a:r>
+              <a:t>N = 94개 필수 변형 × 5개 구체 사례 × 4회 반복 = 1,880회</a:t>
+            </a:r>
+          </a:p>
+          <a:p xmlns:a="http://schemas.openxmlformats.org/drawingml/2006/main">
+            <a:r>
+              <a:t>success(i) = 사례 i의 적용 가능한 필수 oracle 판정을 모두 만족하면 1, 아니면 0</a:t>
+            </a:r>
+          </a:p>
+          <a:p xmlns:a="http://schemas.openxmlformats.org/drawingml/2006/main">
+            <a:r>
+              <a:t>정확 처리율 = 100 × Σ success(i) / 1,880</a:t>
+            </a:r>
+          </a:p>
+          <a:p xmlns:a="http://schemas.openxmlformats.org/drawingml/2006/main">
+            <a:r>
+              <a:t>목표 성공 수 = 1,692회 이상</a:t>
+            </a:r>
+          </a:p>
+          <a:p xmlns:a="http://schemas.openxmlformats.org/drawingml/2006/main">
+            <a:r>
+              <a:t>```</a:t>
+            </a:r>
+          </a:p>
+          <a:p xmlns:a="http://schemas.openxmlformats.org/drawingml/2006/main">
+            <a:r>
+              <a:t/>
+            </a:r>
+          </a:p>
+          <a:p xmlns:a="http://schemas.openxmlformats.org/drawingml/2006/main">
+            <a:r>
+              <a:t>미지원도 분모에 포함한다. 원래 예외 시험에서 올바른 보류나 거절은 성공이지만, 기능을 지원하지 못해 정상 요청을 거절한 경우는 실패이다. 정확한 안내 문구만 내놓고 필요한 처리를 수행하지 않으면 성공으로 세지 않는다.</a:t>
+            </a:r>
+          </a:p>
+          <a:p xmlns:a="http://schemas.openxmlformats.org/drawingml/2006/main">
+            <a:r>
+              <a:t/>
+            </a:r>
+          </a:p>
+          <a:p xmlns:a="http://schemas.openxmlformats.org/drawingml/2006/main">
+            <a:r>
+              <a:t>시험 전 manifest와 실제 semantic output, 채택된 상태, 명령, Agent 사실 및 사용자에게 전달한 결과를 자동 대조한다. 동등한 표현의 의미 판정이 필요하면 후보를 가린 검토자가 rubric으로 판정한다. 전체 판정과 필드별 오류를 모두 보존한다. 모델을 judge로 사용할 때도 사람과 일치도를 먼저 검증하며 judge의 답을 무검토 정답으로 삼지 않는다.</a:t>
+            </a:r>
+          </a:p>
+          <a:p xmlns:a="http://schemas.openxmlformats.org/drawingml/2006/main">
+            <a:r>
+              <a:t/>
+            </a:r>
+          </a:p>
+          <a:p xmlns:a="http://schemas.openxmlformats.org/drawingml/2006/main">
+            <a:r>
+              <a:t>90%는 이 비율 하나의 목표이다. 다른 업무 오실행과 중복 실행을 별도의 0건 목표로 이 행에 넣지 않는다. 이런 사건은 해당 시험의 정확성 실패와 오류 유형으로 남기며 기존 실행 안전 계약도 유지한다. 반복은 독립 사용자 표본이 아니므로 신뢰구간은 470개 구체 사례를 cluster로 묶어 추정한다.</a:t>
+            </a:r>
+          </a:p>
+          <a:p xmlns:a="http://schemas.openxmlformats.org/drawingml/2006/main">
+            <a:r>
+              <a:t/>
+            </a:r>
+          </a:p>
+          <a:p xmlns:a="http://schemas.openxmlformats.org/drawingml/2006/main">
+            <a:r>
+              <a:t>## 4. V-02 기능 적절성</a:t>
+            </a:r>
+          </a:p>
+          <a:p xmlns:a="http://schemas.openxmlformats.org/drawingml/2006/main">
+            <a:r>
+              <a:t/>
+            </a:r>
+          </a:p>
+          <a:p xmlns:a="http://schemas.openxmlformats.org/drawingml/2006/main">
+            <a:r>
+              <a:t>**설명:** 사용자가 적은 추가 입력으로 요청을 마칠 수 있어야 한다.</a:t>
+            </a:r>
+          </a:p>
+          <a:p xmlns:a="http://schemas.openxmlformats.org/drawingml/2006/main">
+            <a:r>
+              <a:t/>
+            </a:r>
+          </a:p>
+          <a:p xmlns:a="http://schemas.openxmlformats.org/drawingml/2006/main">
+            <a:r>
+              <a:t>**단일 목표:** 평균 사용자 개입 1회/요청 이하.</a:t>
+            </a:r>
+          </a:p>
+          <a:p xmlns:a="http://schemas.openxmlformats.org/drawingml/2006/main">
+            <a:r>
+              <a:t/>
+            </a:r>
+          </a:p>
+          <a:p xmlns:a="http://schemas.openxmlformats.org/drawingml/2006/main">
+            <a:r>
+              <a:t>**근거:** 시각 질의의 정보가 부족할 때 CoA는 필요한 경우 하나의 집중된 질문을 하고 답변을 반영하는 접근을 사용한다 [S03]. VIA도 근거를 먼저 활용하고 한 번의 답변에 필요한 정보를 모으는 상호작용을 목표로 삼아 추가 개입 예산을 1회로 제안한다. 이 연구는 VIA의 모든 요청이 질문 하나로 해결된다는 실증 근거가 아니며, VIA의 권한 승인 비용도 아래 횟수에 포함한다.</a:t>
+            </a:r>
+          </a:p>
+          <a:p xmlns:a="http://schemas.openxmlformats.org/drawingml/2006/main">
+            <a:r>
+              <a:t/>
+            </a:r>
+          </a:p>
+          <a:p xmlns:a="http://schemas.openxmlformats.org/drawingml/2006/main">
+            <a:r>
+              <a:t>**분모와 식:** 같은 1,880회 전체 시험에 대해, 최초 목표 입력 이후 VIA가 요구한 추가 사용자 입력을 센다.</a:t>
+            </a:r>
+          </a:p>
+          <a:p xmlns:a="http://schemas.openxmlformats.org/drawingml/2006/main">
+            <a:r>
+              <a:t/>
+            </a:r>
+          </a:p>
+          <a:p xmlns:a="http://schemas.openxmlformats.org/drawingml/2006/main">
+            <a:r>
+              <a:t>```text</a:t>
+            </a:r>
+          </a:p>
+          <a:p xmlns:a="http://schemas.openxmlformats.org/drawingml/2006/main">
+            <a:r>
+              <a:t>u(i) = VIA가 요구한 추가 답변, 선택, 승인 또는 수동 우회 횟수</a:t>
+            </a:r>
+          </a:p>
+          <a:p xmlns:a="http://schemas.openxmlformats.org/drawingml/2006/main">
+            <a:r>
+              <a:t>사용자 개입 횟수 = Σ u(i) / 1,880</a:t>
+            </a:r>
+          </a:p>
+          <a:p xmlns:a="http://schemas.openxmlformats.org/drawingml/2006/main">
+            <a:r>
+              <a:t>```</a:t>
+            </a:r>
+          </a:p>
+          <a:p xmlns:a="http://schemas.openxmlformats.org/drawingml/2006/main">
+            <a:r>
+              <a:t/>
+            </a:r>
+          </a:p>
+          <a:p xmlns:a="http://schemas.openxmlformats.org/drawingml/2006/main">
+            <a:r>
+              <a:t>하나의 질문에 음성과 선택 UI를 함께 사용해 답하면 하나의 응답 episode로 센다. VIA가 다시 질문하여 새 답변을 받으면 한 번을 더 센다. 자동 정보 읽기와 시스템 내부 재시도는 사용자 개입이 아니다. 자발적 새 목표는 최초 입력으로 분리하지만, 기능 부족 때문에 사용자가 수동으로 앱을 조작하는 우회는 포함한다.</a:t>
+            </a:r>
+          </a:p>
+          <a:p xmlns:a="http://schemas.openxmlformats.org/drawingml/2006/main">
+            <a:r>
+              <a:t/>
+            </a:r>
+          </a:p>
+          <a:p xmlns:a="http://schemas.openxmlformats.org/drawingml/2006/main">
+            <a:r>
+              <a:t>시험 사용자는 script에 정해진 최소 답변을 제공한다. 실패 응답 뒤 원래 목표를 다시 요청하거나 앱에서 수동으로 마무리하는 동작도 script에 넣고 실제 개입으로 센다. 필요 권한을 생략하거나 불확실한 대상에 대해 추측해 개입을 줄인 시험은 V-01이나 V-10에서 실패한다. 미완료 시험도 당시까지의 실제 횟수로 분모에 남기고 성공 여부에 따른 개입 분포를 함께 공개한다. 아무것도 수행하지 않는 구현의 0회는 낮은 부담의 근거로 해석하지 않는다. 이 지표는 V-01과 V-03의 기능 결과와 함께 평가하며 성공 시험만 뽑은 평균을 쓰지 않는다.</a:t>
+            </a:r>
+          </a:p>
+          <a:p xmlns:a="http://schemas.openxmlformats.org/drawingml/2006/main">
+            <a:r>
+              <a:t/>
+            </a:r>
+          </a:p>
+          <a:p xmlns:a="http://schemas.openxmlformats.org/drawingml/2006/main">
+            <a:r>
+              <a:t>## 5. V-03 기능 완전성</a:t>
+            </a:r>
+          </a:p>
+          <a:p xmlns:a="http://schemas.openxmlformats.org/drawingml/2006/main">
+            <a:r>
+              <a:t/>
+            </a:r>
+          </a:p>
+          <a:p xmlns:a="http://schemas.openxmlformats.org/drawingml/2006/main">
+            <a:r>
+              <a:t>**설명:** 고정된 사용 시나리오의 필수 기능을 모두 지원해야 한다.</a:t>
+            </a:r>
+          </a:p>
+          <a:p xmlns:a="http://schemas.openxmlformats.org/drawingml/2006/main">
+            <a:r>
+              <a:t/>
+            </a:r>
+          </a:p>
+          <a:p xmlns:a="http://schemas.openxmlformats.org/drawingml/2006/main">
+            <a:r>
+              <a:t>**단일 목표:** 기능 지원 달성률 100%.</a:t>
+            </a:r>
+          </a:p>
+          <a:p xmlns:a="http://schemas.openxmlformats.org/drawingml/2006/main">
+            <a:r>
+              <a:t/>
+            </a:r>
+          </a:p>
+          <a:p xmlns:a="http://schemas.openxmlformats.org/drawingml/2006/main">
+            <a:r>
+              <a:t>**근거:** 94개 필수 변형은 제품 기능 계약 자체이다 [S00]. 선택적인 benchmark 문항이 아니므로 완전 지원의 목표는 94개 모두를 지원하는 100%로 정한다. 이 수치는 문헌의 통계적 정확도에서 가져오지 않는다.</a:t>
+            </a:r>
+          </a:p>
+          <a:p xmlns:a="http://schemas.openxmlformats.org/drawingml/2006/main">
+            <a:r>
+              <a:t/>
+            </a:r>
+          </a:p>
+          <a:p xmlns:a="http://schemas.openxmlformats.org/drawingml/2006/main">
+            <a:r>
+              <a:t>**분모와 식:**</a:t>
+            </a:r>
+          </a:p>
+          <a:p xmlns:a="http://schemas.openxmlformats.org/drawingml/2006/main">
+            <a:r>
+              <a:t/>
+            </a:r>
+          </a:p>
+          <a:p xmlns:a="http://schemas.openxmlformats.org/drawingml/2006/main">
+            <a:r>
+              <a:t>```text</a:t>
+            </a:r>
+          </a:p>
+          <a:p xmlns:a="http://schemas.openxmlformats.org/drawingml/2006/main">
+            <a:r>
+              <a:t>support(v) = 변형 v의 필수 동작 전체를 구현하고 검증 증거를 제공하면 1, 아니면 0</a:t>
+            </a:r>
+          </a:p>
+          <a:p xmlns:a="http://schemas.openxmlformats.org/drawingml/2006/main">
+            <a:r>
+              <a:t>기능 지원 달성률 = 100 × Σ support(v) / 94</a:t>
+            </a:r>
+          </a:p>
+          <a:p xmlns:a="http://schemas.openxmlformats.org/drawingml/2006/main">
+            <a:r>
+              <a:t>```</a:t>
+            </a:r>
+          </a:p>
+          <a:p xmlns:a="http://schemas.openxmlformats.org/drawingml/2006/main">
+            <a:r>
+              <a:t/>
+            </a:r>
+          </a:p>
+          <a:p xmlns:a="http://schemas.openxmlformats.org/drawingml/2006/main">
+            <a:r>
+              <a:t>각 변형에는 입력, 필요한 VIA 처리, 정상 종료, 변형 고유의 예외 및 책임 경계를 체크리스트로 작성한다. 구현 경로와 실제 동작 witness를 대조한다. 모든 구체 사례의 필수 capability를 입증해야 완전 지원으로 표시한다. 기능이 있지만 일부 실행에서 발생한 확률적 의미 오류는 V-01에서 집계하며 그 사실만으로 capability를 미구현이라고 바꾸지 않는다. 반대로 지원하지 않는 관계를 사용자가 수동으로 해결하면 부분 지원이다.</a:t>
+            </a:r>
+          </a:p>
+          <a:p xmlns:a="http://schemas.openxmlformats.org/drawingml/2006/main">
+            <a:r>
+              <a:t/>
+            </a:r>
+          </a:p>
+          <a:p xmlns:a="http://schemas.openxmlformats.org/drawingml/2006/main">
+            <a:r>
+              <a:t>부분 지원, 미지원, 미확인은 분모에 남고 분자에는 들어가지 않는다. 표에는 한 비율만 표시하고 상세 support ledger에는 제한과 증거 링크를 남긴다. 설계 문서만 검토한 시점에는 '설계상 지원'을 별도 표시하며 구현 지원률 결과를 만들지 않는다. 현재 실제 support ledger와 실행 결과는 없다.</a:t>
+            </a:r>
+          </a:p>
+          <a:p xmlns:a="http://schemas.openxmlformats.org/drawingml/2006/main">
+            <a:r>
+              <a:t/>
+            </a:r>
+          </a:p>
+          <a:p xmlns:a="http://schemas.openxmlformats.org/drawingml/2006/main">
+            <a:r>
+              <a:t>## 6. V-04 응답 신속성</a:t>
+            </a:r>
+          </a:p>
+          <a:p xmlns:a="http://schemas.openxmlformats.org/drawingml/2006/main">
+            <a:r>
+              <a:t/>
+            </a:r>
+          </a:p>
+          <a:p xmlns:a="http://schemas.openxmlformats.org/drawingml/2006/main">
+            <a:r>
+              <a:t>**설명:** 사용자 입력에 대한 유효한 반응이 빠르게 나타나야 한다.</a:t>
+            </a:r>
+          </a:p>
+          <a:p xmlns:a="http://schemas.openxmlformats.org/drawingml/2006/main">
+            <a:r>
+              <a:t/>
+            </a:r>
+          </a:p>
+          <a:p xmlns:a="http://schemas.openxmlformats.org/drawingml/2006/main">
+            <a:r>
+              <a:t>**단일 목표:** 종류별 p95 반응 지연의 최댓값 1초 이하.</a:t>
+            </a:r>
+          </a:p>
+          <a:p xmlns:a="http://schemas.openxmlformats.org/drawingml/2006/main">
+            <a:r>
+              <a:t/>
+            </a:r>
+          </a:p>
+          <a:p xmlns:a="http://schemas.openxmlformats.org/drawingml/2006/main">
+            <a:r>
+              <a:t>**근거:** Nielsen은 상호작용의 반응시간 기준으로 0.1초, 1초, 10초를 제시한다 [S04]. VIA의 첫 유효 반응에는 1초 기준을 선택한다. p95와 종류별 최댓값은 VIA의 시험 집계 선택이며 Nielsen의 원문 통계 정의가 아니다.</a:t>
+            </a:r>
+          </a:p>
+          <a:p xmlns:a="http://schemas.openxmlformats.org/drawingml/2006/main">
+            <a:r>
+              <a:t/>
+            </a:r>
+          </a:p>
+          <a:p xmlns:a="http://schemas.openxmlformats.org/drawingml/2006/main">
+            <a:r>
+              <a:t>| 종류 | 실제 시작 사건 | 실제 종료 사건 |</a:t>
+            </a:r>
+          </a:p>
+          <a:p xmlns:a="http://schemas.openxmlformats.org/drawingml/2006/main">
+            <a:r>
+              <a:t>| --- | --- | --- |</a:t>
+            </a:r>
+          </a:p>
+          <a:p xmlns:a="http://schemas.openxmlformats.org/drawingml/2006/main">
+            <a:r>
+              <a:t>| 요청 반응 | 실제 발화 종료 또는 텍스트 제출 | 해당 요청의 의미 있는 응답이 표시되거나 첫 유효 음성이 재생됨 |</a:t>
+            </a:r>
+          </a:p>
+          <a:p xmlns:a="http://schemas.openxmlformats.org/drawingml/2006/main">
+            <a:r>
+              <a:t>| 상태 전달 | 외부 상태가 VIA에게 이용 가능해진 source 사건 | 그 사실을 반영한 상태가 사용자에게 표시됨 |</a:t>
+            </a:r>
+          </a:p>
+          <a:p xmlns:a="http://schemas.openxmlformats.org/drawingml/2006/main">
+            <a:r>
+              <a:t>| 업무 제어 | 사용자 제어 명령의 실제 입력 | VIA가 제어를 적용하고 그 사실을 확인할 수 있음 |</a:t>
+            </a:r>
+          </a:p>
+          <a:p xmlns:a="http://schemas.openxmlformats.org/drawingml/2006/main">
+            <a:r>
+              <a:t>| 음성 중단 | 사용자의 새 발화가 실제 시작함 | 이전 음성의 마지막 출력 sample |</a:t>
+            </a:r>
+          </a:p>
+          <a:p xmlns:a="http://schemas.openxmlformats.org/drawingml/2006/main">
+            <a:r>
+              <a:t/>
+            </a:r>
+          </a:p>
+          <a:p xmlns:a="http://schemas.openxmlformats.org/drawingml/2006/main">
+            <a:r>
+              <a:t>업무 취소에 Agent의 실행 중단 확인이 필요하면 상태 전달 지연의 시작은 실제 외부 확인이다. 사용자 요청부터 외부 확인까지의 실제 체감 시간도 함께 공개한다. 음성 출력 중단을 업무 취소 완료로 세지 않는다. 접수 인사, 의미 없는 filler, spinner, enqueue와 model 내부 완료는 종료점이 아니다.</a:t>
+            </a:r>
+          </a:p>
+          <a:p xmlns:a="http://schemas.openxmlformats.org/drawingml/2006/main">
+            <a:r>
+              <a:t/>
+            </a:r>
+          </a:p>
+          <a:p xmlns:a="http://schemas.openxmlformats.org/drawingml/2006/main">
+            <a:r>
+              <a:t>동일 monotonic clock으로 시작 사건과 실제 출력 사건을 수집한다. 음성은 녹음된 입력 기준점과 OS 오디오 loopback을 정렬하고 장치 오차를 기록한다. 종류마다 최소 20회 이상 관측하며 1,880회 시험에서 해당하는 모든 사건을 포함한다. 종류별 nearest-rank p95를 구한 뒤 가장 큰 값을 대표값으로 한다. 사건이 발생했는데 유효 반응이 없으면 지연을 무한대로 기록한다. Cold와 warm 결과를 각각 공개하고 긴 지연을 pooled 평균으로 숨기지 않는다.</a:t>
+            </a:r>
+          </a:p>
+          <a:p xmlns:a="http://schemas.openxmlformats.org/drawingml/2006/main">
+            <a:r>
+              <a:t/>
+            </a:r>
+          </a:p>
+          <a:p xmlns:a="http://schemas.openxmlformats.org/drawingml/2006/main">
+            <a:r>
+              <a:t>## 7. V-05 요청 완료 신속성</a:t>
+            </a:r>
+          </a:p>
+          <a:p xmlns:a="http://schemas.openxmlformats.org/drawingml/2006/main">
+            <a:r>
+              <a:t/>
+            </a:r>
+          </a:p>
+          <a:p xmlns:a="http://schemas.openxmlformats.org/drawingml/2006/main">
+            <a:r>
+              <a:t>**설명:** 필요한 최종 결과를 사용자에게 빠르게 전달해야 한다.</a:t>
+            </a:r>
+          </a:p>
+          <a:p xmlns:a="http://schemas.openxmlformats.org/drawingml/2006/main">
+            <a:r>
+              <a:t/>
+            </a:r>
+          </a:p>
+          <a:p xmlns:a="http://schemas.openxmlformats.org/drawingml/2006/main">
+            <a:r>
+              <a:t>**단일 목표:** 처리 경로별 p95 VIA 완료시간의 최댓값 10초 이하.</a:t>
+            </a:r>
+          </a:p>
+          <a:p xmlns:a="http://schemas.openxmlformats.org/drawingml/2006/main">
+            <a:r>
+              <a:t/>
+            </a:r>
+          </a:p>
+          <a:p xmlns:a="http://schemas.openxmlformats.org/drawingml/2006/main">
+            <a:r>
+              <a:t>**근거:** Nielsen의 10초 기준은 사용자가 상호작용에 주의를 유지하는 상한을 제안한다 [S04]. 이 값을 VIA 책임 처리의 완료 예산으로 적용한다. 외부 Agent의 긴 도메인 작업을 포함한 전체 업무가 10초에 끝난다는 뜻은 아니다. 따라서 발표 표에도 'VIA 완료시간'이라고 명시한다.</a:t>
+            </a:r>
+          </a:p>
+          <a:p xmlns:a="http://schemas.openxmlformats.org/drawingml/2006/main">
+            <a:r>
+              <a:t/>
+            </a:r>
+          </a:p>
+          <a:p xmlns:a="http://schemas.openxmlformats.org/drawingml/2006/main">
+            <a:r>
+              <a:t>직접 응답은 VIA가 결과를 만드는 경로이고 위임은 Downstream Agent가 실제 업무를 수행하는 경로이다. **의존 관계**는 앞 결과를 다음 작업의 입력으로 쓰는 관계이다. 예를 들어 보고서 결과로 발표 슬라이드를 만드는 경우이며, 직접 응답과 위임 모두에 생길 수 있다. 세 번째 상호 배타적인 처리 경로로 분류하지 않는다.</a:t>
+            </a:r>
+          </a:p>
+          <a:p xmlns:a="http://schemas.openxmlformats.org/drawingml/2006/main">
+            <a:r>
+              <a:t/>
+            </a:r>
+          </a:p>
+          <a:p xmlns:a="http://schemas.openxmlformats.org/drawingml/2006/main">
+            <a:r>
+              <a:t>측정은 직접 응답과 위임을 각각 의존 관계 없음과 있음으로 나눈 네 층으로 수행한다. 모든 층에 같은 10초 목표를 적용하고 최악 층의 p95를 보고한다. 층별 별도 목표 세 개를 만들면 동일한 VIA 완료 예산의 의미가 흐려지므로 채택하지 않는다.</a:t>
+            </a:r>
+          </a:p>
+          <a:p xmlns:a="http://schemas.openxmlformats.org/drawingml/2006/main">
+            <a:r>
+              <a:t/>
+            </a:r>
+          </a:p>
+          <a:p xmlns:a="http://schemas.openxmlformats.org/drawingml/2006/main">
+            <a:r>
+              <a:t>**VIA 책임 시간 계산:** 최초 입력부터 필수 최종 전달까지의 사건 의존 그래프를 만든다. 해석, 근거 읽기, 자원 대기, 상태 채택, routing, 직렬화, Agent 통합 통신, 결과 결합과 실제 출력의 VIA 책임 구간을 포함한다. 외부 Agent의 도메인 작업과 사용자의 답변 대기 구간은 비용 0으로 치환한다. 이 그래프의 최장 경로 시간이 VIA 완료시간이다. 중첩된 parent span과 child span을 동시에 더하지 않는다. 병렬 작업도 모두 직렬 합산하지 않는다. 단순히 모든 Agent 시간을 총 wall time에서 빼면 겹치는 대기로 음수가 생길 수 있으므로 사용하지 않는다.</a:t>
+            </a:r>
+          </a:p>
+          <a:p xmlns:a="http://schemas.openxmlformats.org/drawingml/2006/main">
+            <a:r>
+              <a:t/>
+            </a:r>
+          </a:p>
+          <a:p xmlns:a="http://schemas.openxmlformats.org/drawingml/2006/main">
+            <a:r>
+              <a:t>동시에 실제 사용자 체감 wall time과 외부 대기 시간을 보조 기록한다. 필수 결과의 text, artifact 접근 및 필요한 최종 음성 전달이 모두 끝나야 종료한다. 첫 packet이나 첫 음절만으로 완료를 판정하지 않는다. 실패 시험과 필수 결과 누락은 무한대 지연으로 남긴다.</a:t>
+            </a:r>
+          </a:p>
+          <a:p xmlns:a="http://schemas.openxmlformats.org/drawingml/2006/main">
+            <a:r>
+              <a:t/>
+            </a:r>
+          </a:p>
+          <a:p xmlns:a="http://schemas.openxmlformats.org/drawingml/2006/main">
+            <a:r>
+              <a:t>자료 길이는 양쪽에 동일한 manifest로 고정한다. 일상 결과의 요약과 상세 artifact, 긴 음성 설명은 별도 층으로 표시한다. 소리의 실제 재생 시간도 VIA 비용에 포함하므로 10초를 넘는 필수 발화를 이 목표 안에 억지로 통과시킬 수 없다. 출력 축약이 필수 내용을 없애면 V-01이나 V-03에서 실패한다. 결과 크기가 다른 사례를 삭제해 목표를 통과시키지 않으며 적용 범위 변경은 측정 전에 승인한 공통 계약에만 반영한다.</a:t>
+            </a:r>
+          </a:p>
+          <a:p xmlns:a="http://schemas.openxmlformats.org/drawingml/2006/main">
+            <a:r>
+              <a:t/>
+            </a:r>
+          </a:p>
+          <a:p xmlns:a="http://schemas.openxmlformats.org/drawingml/2006/main">
+            <a:r>
+              <a:t>## 8. V-08 변경 용이성</a:t>
+            </a:r>
+          </a:p>
+          <a:p xmlns:a="http://schemas.openxmlformats.org/drawingml/2006/main">
+            <a:r>
+              <a:t/>
+            </a:r>
+          </a:p>
+          <a:p xmlns:a="http://schemas.openxmlformats.org/drawingml/2006/main">
+            <a:r>
+              <a:t>**설명:** 기능 변경이 적은 설계 요소에만 영향을 주어야 한다.</a:t>
+            </a:r>
+          </a:p>
+          <a:p xmlns:a="http://schemas.openxmlformats.org/drawingml/2006/main">
+            <a:r>
+              <a:t/>
+            </a:r>
+          </a:p>
+          <a:p xmlns:a="http://schemas.openxmlformats.org/drawingml/2006/main">
+            <a:r>
+              <a:t>**단일 목표:** 평균 변경 요소 수 3개/변경 이하.</a:t>
+            </a:r>
+          </a:p>
+          <a:p xmlns:a="http://schemas.openxmlformats.org/drawingml/2006/main">
+            <a:r>
+              <a:t/>
+            </a:r>
+          </a:p>
+          <a:p xmlns:a="http://schemas.openxmlformats.org/drawingml/2006/main">
+            <a:r>
+              <a:t>**근거:** SEI는 변경 비용을 바뀌는 책임과 다른 요소로의 전파 및 시험 비용으로 설명한다 [S05]. 이를 VIA에서 한 책임 요소, 그 요소의 계약, 그 계약을 소비하는 요소까지의 국소 변경 예산으로 구체화하여 평균 3개를 제안한다. 논문이 3이라는 상한을 제시한 것은 아니다. 모든 변경이 항상 세 역할을 바꿔야 한다는 뜻도 아니다.</a:t>
+            </a:r>
+          </a:p>
+          <a:p xmlns:a="http://schemas.openxmlformats.org/drawingml/2006/main">
+            <a:r>
+              <a:t/>
+            </a:r>
+          </a:p>
+          <a:p xmlns:a="http://schemas.openxmlformats.org/drawingml/2006/main">
+            <a:r>
+              <a:t>공통 변경 과제는 아래 여섯 개를 제안한다. 양쪽 대안은 같은 사용자 동작과 외부 capability를 유지해야 한다.</a:t>
+            </a:r>
+          </a:p>
+          <a:p xmlns:a="http://schemas.openxmlformats.org/drawingml/2006/main">
+            <a:r>
+              <a:t/>
+            </a:r>
+          </a:p>
+          <a:p xmlns:a="http://schemas.openxmlformats.org/drawingml/2006/main">
+            <a:r>
+              <a:t>1. 참조 대상에 표의 선택 범위를 추가한다.</a:t>
+            </a:r>
+          </a:p>
+          <a:p xmlns:a="http://schemas.openxmlformats.org/drawingml/2006/main">
+            <a:r>
+              <a:t>2. 기존 Task를 이어 쓰는 요청 관계 규칙을 추가한다.</a:t>
+            </a:r>
+          </a:p>
+          <a:p xmlns:a="http://schemas.openxmlformats.org/drawingml/2006/main">
+            <a:r>
+              <a:t>3. Downstream Agent의 진행 및 결과 protocol을 변경한다.</a:t>
+            </a:r>
+          </a:p>
+          <a:p xmlns:a="http://schemas.openxmlformats.org/drawingml/2006/main">
+            <a:r>
+              <a:t>4. 음성 중단 정책을 바꾸되 Task 실행은 유지한다.</a:t>
+            </a:r>
+          </a:p>
+          <a:p xmlns:a="http://schemas.openxmlformats.org/drawingml/2006/main">
+            <a:r>
+              <a:t>5. Context 보존기간과 삭제 전파 정책을 변경한다.</a:t>
+            </a:r>
+          </a:p>
+          <a:p xmlns:a="http://schemas.openxmlformats.org/drawingml/2006/main">
+            <a:r>
+              <a:t>6. 외부 결과 중복 알림의 재접속 처리 규칙을 변경한다.</a:t>
+            </a:r>
+          </a:p>
+          <a:p xmlns:a="http://schemas.openxmlformats.org/drawingml/2006/main">
+            <a:r>
+              <a:t/>
+            </a:r>
+          </a:p>
+          <a:p xmlns:a="http://schemas.openxmlformats.org/drawingml/2006/main">
+            <a:r>
+              <a:t>측정 전 후보별 논리 요소 ledger를 같은 수준으로 작성한다. Module, 독립 interface 계약, 공유 schema 및 별도 runtime 배치 단위를 등록하고 동일 정의를 따른다. 파일이나 코드 줄을 요소로 세지 않는다. 책임 Module의 내부 구현과 그 Module 전용 private schema는 한 요소로 센다. 공개 공유 계약을 변경하면 독립 계약 요소로 센다. 그림의 사각형을 임의로 합쳐 수를 줄일 수 없다.</a:t>
+            </a:r>
+          </a:p>
+          <a:p xmlns:a="http://schemas.openxmlformats.org/drawingml/2006/main">
+            <a:r>
+              <a:t/>
+            </a:r>
+          </a:p>
+          <a:p xmlns:a="http://schemas.openxmlformats.org/drawingml/2006/main">
+            <a:r>
+              <a:t>과제별로 실제 추가, 수정, 삭제가 필요한 요소의 ID 합집합 크기 N을 센다. 공통 코드, 설정, 테스트 harness를 변경해야 기능이 성립하면 해당 논리 요소도 포함한다. 같은 요소의 여러 파일과 여러 commit은 한 번만 센다. 설계만 있을 때는 예상 영향 수로 표시하고 실제 수행 비용으로 주장하지 않는다. 해결하지 못한 과제를 평균에서 빼지 않고 미달로 기록한다.</a:t>
+            </a:r>
+          </a:p>
+          <a:p xmlns:a="http://schemas.openxmlformats.org/drawingml/2006/main">
+            <a:r>
+              <a:t/>
+            </a:r>
+          </a:p>
+          <a:p xmlns:a="http://schemas.openxmlformats.org/drawingml/2006/main">
+            <a:r>
+              <a:t>```text</a:t>
+            </a:r>
+          </a:p>
+          <a:p xmlns:a="http://schemas.openxmlformats.org/drawingml/2006/main">
+            <a:r>
+              <a:t>평균 변경 요소 수 = Σ N(s) / 6</a:t>
+            </a:r>
+          </a:p>
+          <a:p xmlns:a="http://schemas.openxmlformats.org/drawingml/2006/main">
+            <a:r>
+              <a:t>MH 추정(s) = a(변경 종류) + b(변경 종류) × N(s)</a:t>
+            </a:r>
+          </a:p>
+          <a:p xmlns:a="http://schemas.openxmlformats.org/drawingml/2006/main">
+            <a:r>
+              <a:t>MM 추정(s) = MH 추정(s) / H_month</a:t>
+            </a:r>
+          </a:p>
+          <a:p xmlns:a="http://schemas.openxmlformats.org/drawingml/2006/main">
+            <a:r>
+              <a:t>```</a:t>
+            </a:r>
+          </a:p>
+          <a:p xmlns:a="http://schemas.openxmlformats.org/drawingml/2006/main">
+            <a:r>
+              <a:t/>
+            </a:r>
+          </a:p>
+          <a:p xmlns:a="http://schemas.openxmlformats.org/drawingml/2006/main">
+            <a:r>
+              <a:t>MH는 person-hour, MM는 person-month이다. a는 분석과 공통 검증의 고정 비용, b는 요소당 추가 수정과 시험의 비용이다. 완료된 실제 과제에서 작업시간을 기록하고 변경 종류별 회귀로 보정한다. 자료가 적으면 임의의 a와 b를 채우지 않는다. H_month는 조직의 표준 월 근무시간이며 160시간을 선택한다면 8시간 × 20일이라는 환산 규약을 명시한다. 3개를 3MH 또는 3MM로 곧바로 환산할 수 없다. 보정 자료 수, 추정 오차와 실제 MH를 함께 공개한다.</a:t>
+            </a:r>
+          </a:p>
+          <a:p xmlns:a="http://schemas.openxmlformats.org/drawingml/2006/main">
+            <a:r>
+              <a:t/>
+            </a:r>
+          </a:p>
+          <a:p xmlns:a="http://schemas.openxmlformats.org/drawingml/2006/main">
+            <a:r>
+              <a:t>## 9. V-06 메모리 효율성</a:t>
+            </a:r>
+          </a:p>
+          <a:p xmlns:a="http://schemas.openxmlformats.org/drawingml/2006/main">
+            <a:r>
+              <a:t/>
+            </a:r>
+          </a:p>
+          <a:p xmlns:a="http://schemas.openxmlformats.org/drawingml/2006/main">
+            <a:r>
+              <a:t>**설명:** 상시 실행 중에도 다른 PC 작업을 위한 메모리를 남겨야 한다.</a:t>
+            </a:r>
+          </a:p>
+          <a:p xmlns:a="http://schemas.openxmlformats.org/drawingml/2006/main">
+            <a:r>
+              <a:t/>
+            </a:r>
+          </a:p>
+          <a:p xmlns:a="http://schemas.openxmlformats.org/drawingml/2006/main">
+            <a:r>
+              <a:t>**단일 목표:** 최대 전체 메모리 16GB 이하. GB는 10^9 bytes이다.</a:t>
+            </a:r>
+          </a:p>
+          <a:p xmlns:a="http://schemas.openxmlformats.org/drawingml/2006/main">
+            <a:r>
+              <a:t/>
+            </a:r>
+          </a:p>
+          <a:p xmlns:a="http://schemas.openxmlformats.org/drawingml/2006/main">
+            <a:r>
+              <a:t>**장치 근거:** Samsung의 Galaxy Book6 Ultra NP960UJH-XG3IN 공식 사양은 32GB LPDDR5X RAM과 RTX 5070 Laptop GPU의 전용 8GB GDDR7을 명시한다 [S06]. 이 고사양 노트북을 기준으로 사용자 PC의 RAM 절반 이상을 VIA 외 용도로 남기는 예산을 설정한다.</a:t>
+            </a:r>
+          </a:p>
+          <a:p xmlns:a="http://schemas.openxmlformats.org/drawingml/2006/main">
+            <a:r>
+              <a:t/>
+            </a:r>
+          </a:p>
+          <a:p xmlns:a="http://schemas.openxmlformats.org/drawingml/2006/main">
+            <a:r>
+              <a:t>| 32GB RAM의 배정 | 예산 | 성격 |</a:t>
+            </a:r>
+          </a:p>
+          <a:p xmlns:a="http://schemas.openxmlformats.org/drawingml/2006/main">
+            <a:r>
+              <a:t>| --- | ---: | --- |</a:t>
+            </a:r>
+          </a:p>
+          <a:p xmlns:a="http://schemas.openxmlformats.org/drawingml/2006/main">
+            <a:r>
+              <a:t>| Windows와 기본 상주 프로그램 | 6GB | VIA가 제안하는 예약량, 실측 OS 사용량 아님 |</a:t>
+            </a:r>
+          </a:p>
+          <a:p xmlns:a="http://schemas.openxmlformats.org/drawingml/2006/main">
+            <a:r>
+              <a:t>| 사용자의 browser와 문서 및 개발 앱 | 6GB | 공존 부하 예산, 실제 foreground app manifest로 검증 필요 |</a:t>
+            </a:r>
+          </a:p>
+          <a:p xmlns:a="http://schemas.openxmlformats.org/drawingml/2006/main">
+            <a:r>
+              <a:t>| 부하 변동과 작업 확장을 위한 여유 | 4GB | 설계상 headroom |</a:t>
+            </a:r>
+          </a:p>
+          <a:p xmlns:a="http://schemas.openxmlformats.org/drawingml/2006/main">
+            <a:r>
+              <a:t>| VIA의 전체 메모리 상한 | 16GB | 32 - 6 - 6 - 4로 계산한 단일 목표 |</a:t>
+            </a:r>
+          </a:p>
+          <a:p xmlns:a="http://schemas.openxmlformats.org/drawingml/2006/main">
+            <a:r>
+              <a:t/>
+            </a:r>
+          </a:p>
+          <a:p xmlns:a="http://schemas.openxmlformats.org/drawingml/2006/main">
+            <a:r>
+              <a:t>전용 GPU의 8GB를 RAM에 더해 VIA 예산을 24GB로 키우지 않는다. 목표는 VIA가 사용하는 CPU RAM과 전용 VRAM의 실제 물리 사용량을 합친 16GB이므로 CPU RAM만 16GB를 사용하는 경우에도 비 VIA RAM 예산을 보존한다. GPU 전용 메모리에는 별도의 물리적 장치 한계가 있다. 16GB가 전부 GPU에 들어간다고 가정하지 않는다. 64GB 장치를 사용하더라도 발표 목표를 자동으로 배증하지 않는다.</a:t>
+            </a:r>
+          </a:p>
+          <a:p xmlns:a="http://schemas.openxmlformats.org/drawingml/2006/main">
+            <a:r>
+              <a:t/>
+            </a:r>
+          </a:p>
+          <a:p xmlns:a="http://schemas.openxmlformats.org/drawingml/2006/main">
+            <a:r>
+              <a:t>**모델 근거와 할당:** 현재 reference Architecture의 약 10B는 Thinker/backbone의 목표 크기이다. encoders, Talker, Streaming ASR와 기타 learned helper까지 10B라고 간주하지 않는다. 원시 가중치 bytes는 N × bit / 8이므로 10B backbone만 FP16에서 약 20GB, 8bit에서 약 10GB, 4bit에서 약 5GB이다. AWQ는 4bit LLM 배포의 실제 연구 근거이다 [S07]. 양자화 선택이나 VIA의 정확도 보존을 승인했다는 뜻은 아니다.</a:t>
+            </a:r>
+          </a:p>
+          <a:p xmlns:a="http://schemas.openxmlformats.org/drawingml/2006/main">
+            <a:r>
+              <a:t/>
+            </a:r>
+          </a:p>
+          <a:p xmlns:a="http://schemas.openxmlformats.org/drawingml/2006/main">
+            <a:r>
+              <a:t>16GB 안에서 backbone 가중치와 양자화 부대 정보 6GB, 나머지 learned weights 4GB, KV와 중간 상태 3GB, runtime과 UI 및 관측 버퍼 3GB의 할당을 제안한다. 모두 상한 예산이며 실제 모델 크기 주장이 아니다. 전체 weight inventory가 예산을 초과하면 목표 미달로 보고하고, 모델 구성을 바꿀 때에는 기능 정확성도 다시 확인한다. CPU staging copy와 GPU loaded copy가 실제로 공존하면 둘 다 포함하므로 이 예산을 더 빠르게 소진한다.</a:t>
+            </a:r>
+          </a:p>
+          <a:p xmlns:a="http://schemas.openxmlformats.org/drawingml/2006/main">
+            <a:r>
+              <a:t/>
+            </a:r>
+          </a:p>
+          <a:p xmlns:a="http://schemas.openxmlformats.org/drawingml/2006/main">
+            <a:r>
+              <a:t>**측정 식:**</a:t>
+            </a:r>
+          </a:p>
+          <a:p xmlns:a="http://schemas.openxmlformats.org/drawingml/2006/main">
+            <a:r>
+              <a:t/>
+            </a:r>
+          </a:p>
+          <a:p xmlns:a="http://schemas.openxmlformats.org/drawingml/2006/main">
+            <a:r>
+              <a:t>```text</a:t>
+            </a:r>
+          </a:p>
+          <a:p xmlns:a="http://schemas.openxmlformats.org/drawingml/2006/main">
+            <a:r>
+              <a:t>M(t) = VIA의 CPU 고유 상주 물리 bytes</a:t>
+            </a:r>
+          </a:p>
+          <a:p xmlns:a="http://schemas.openxmlformats.org/drawingml/2006/main">
+            <a:r>
+              <a:t>     + VIA의 전용 GPU 물리 bytes</a:t>
+            </a:r>
+          </a:p>
+          <a:p xmlns:a="http://schemas.openxmlformats.org/drawingml/2006/main">
+            <a:r>
+              <a:t>     + 다른 항목에 포함되지 않은 pinned 및 공유 물리 bytes</a:t>
+            </a:r>
+          </a:p>
+          <a:p xmlns:a="http://schemas.openxmlformats.org/drawingml/2006/main">
+            <a:r>
+              <a:t>최대 전체 메모리 = max_t M(t) / 10^9</a:t>
+            </a:r>
+          </a:p>
+          <a:p xmlns:a="http://schemas.openxmlformats.org/drawingml/2006/main">
+            <a:r>
+              <a:t>```</a:t>
+            </a:r>
+          </a:p>
+          <a:p xmlns:a="http://schemas.openxmlformats.org/drawingml/2006/main">
+            <a:r>
+              <a:t/>
+            </a:r>
+          </a:p>
+          <a:p xmlns:a="http://schemas.openxmlformats.org/drawingml/2006/main">
+            <a:r>
+              <a:t>여러 프로세스가 같은 물리 페이지를 매핑하면 한 번만 센다. 실제 CPU와 GPU 복제본은 별개이다. Windows Working Set의 단순 프로세스별 합계는 공유 페이지를 중복 셀 수 있고 Private Bytes만 쓰면 공유 가중치를 놓칠 수 있으므로 page 및 allocation ID와 GPU allocation ledger로 보정한다. process tree는 VIA launcher가 기록하고 모든 worker와 helper를 포함한다. pagefile로 밀어낸 bytes와 commit은 보조 기록으로 공개하여 swapping으로 피크를 낮춘 결과를 드러낸다.</a:t>
+            </a:r>
+          </a:p>
+          <a:p xmlns:a="http://schemas.openxmlformats.org/drawingml/2006/main">
+            <a:r>
+              <a:t/>
+            </a:r>
+          </a:p>
+          <a:p xmlns:a="http://schemas.openxmlformats.org/drawingml/2006/main">
+            <a:r>
+              <a:t>8시간 시험을 다음 순서로 수행한다. 상주 대기 두 시간, 요청 burst 한 시간, 정상 대화와 두 외부 실행 병행 두 시간, 화면 및 Context 보존 한도 도달과 삭제 한 시간, 장애 및 모델 재로딩 한 시간, 무입력 대기 한 시간이다. burst는 15초마다 한 요청을 제안하며 처리되지 않은 요청도 적체 상태로 남긴다. 나머지 단계의 입력 시간축은 동일 fixture로 고정한다. browser와 문서 앱 부하는 같은 파일과 tab 목록으로 유지하고 실제 사용량을 기록한다.</a:t>
+            </a:r>
+          </a:p>
+          <a:p xmlns:a="http://schemas.openxmlformats.org/drawingml/2006/main">
+            <a:r>
+              <a:t/>
+            </a:r>
+          </a:p>
+          <a:p xmlns:a="http://schemas.openxmlformats.org/drawingml/2006/main">
+            <a:r>
+              <a:t>최소 100ms 간격의 CPU 및 GPU 계측과 allocation high-water mark를 함께 사용한다. 짧은 load peak를 sampling만으로 놓치지 않도록 allocator의 생성과 해제 사건을 보조로 사용한다. 시작부터 종료까지의 최대값 하나를 목표와 비교하고 대기, 요청 및 복구 피크는 원인 분석용으로 분리한다. 장시간 무입력의 idle 메모리도 공개한다. CPU나 전력의 별도 목표를 새로 만들지는 않는다.</a:t>
+            </a:r>
+          </a:p>
+          <a:p xmlns:a="http://schemas.openxmlformats.org/drawingml/2006/main">
+            <a:r>
+              <a:t/>
+            </a:r>
+          </a:p>
+          <a:p xmlns:a="http://schemas.openxmlformats.org/drawingml/2006/main">
+            <a:r>
+              <a:t>## 10. V-07 복구 용이성</a:t>
+            </a:r>
+          </a:p>
+          <a:p xmlns:a="http://schemas.openxmlformats.org/drawingml/2006/main">
+            <a:r>
+              <a:t/>
+            </a:r>
+          </a:p>
+          <a:p xmlns:a="http://schemas.openxmlformats.org/drawingml/2006/main">
+            <a:r>
+              <a:t>**설명:** 장애 뒤 기존 업무를 이어갈 수 있는 상태로 돌아와야 한다.</a:t>
+            </a:r>
+          </a:p>
+          <a:p xmlns:a="http://schemas.openxmlformats.org/drawingml/2006/main">
+            <a:r>
+              <a:t/>
+            </a:r>
+          </a:p>
+          <a:p xmlns:a="http://schemas.openxmlformats.org/drawingml/2006/main">
+            <a:r>
+              <a:t>**단일 목표:** 최대 정상 복구시간 10초 이하.</a:t>
+            </a:r>
+          </a:p>
+          <a:p xmlns:a="http://schemas.openxmlformats.org/drawingml/2006/main">
+            <a:r>
+              <a:t/>
+            </a:r>
+          </a:p>
+          <a:p xmlns:a="http://schemas.openxmlformats.org/drawingml/2006/main">
+            <a:r>
+              <a:t>**근거:** 사용자의 주의 유지 한계인 10초를 장애 후 재개 예산으로 채택한다 [S04]. microreboot 연구는 실행 단위를 재시작하면서 필요한 상태를 보존하는 회복 구조와 짧은 복구의 가능성을 보여준다 [S08]. 그 웹 시스템의 시간은 VIA의 Omni 로딩이나 전체 복구 성능이 아니므로 그대로 적용하지 않는다. 논문에서 VIA 복구가 10초라고 측정했다는 표현도 쓰지 않는다.</a:t>
+            </a:r>
+          </a:p>
+          <a:p xmlns:a="http://schemas.openxmlformats.org/drawingml/2006/main">
+            <a:r>
+              <a:t/>
+            </a:r>
+          </a:p>
+          <a:p xmlns:a="http://schemas.openxmlformats.org/drawingml/2006/main">
+            <a:r>
+              <a:t>각 장애는 저장 전, 저장 후 외부 전달 전, 외부 전달 후 확인 전의 적용 가능한 세 지점에 주입하고 각각 4회 반복한다. 부적합한 지점은 이유를 사전에 정하고 같은 지점을 양쪽 후보에서 제외한다. 정상 복구의 oracle은 필요한 사용자 입력을 받고, 현재 상태를 정확히 설명하며, 다음 필요한 처리 또는 명확한 보류 상태로 이어가는 것이다. Agent의 긴 작업이 끝나야 복구되는 것은 아니다.</a:t>
+            </a:r>
+          </a:p>
+          <a:p xmlns:a="http://schemas.openxmlformats.org/drawingml/2006/main">
+            <a:r>
+              <a:t/>
+            </a:r>
+          </a:p>
+          <a:p xmlns:a="http://schemas.openxmlformats.org/drawingml/2006/main">
+            <a:r>
+              <a:t>| ID | 장애 | 확인할 상태 |</a:t>
+            </a:r>
+          </a:p>
+          <a:p xmlns:a="http://schemas.openxmlformats.org/drawingml/2006/main">
+            <a:r>
+              <a:t>| --- | --- | --- |</a:t>
+            </a:r>
+          </a:p>
+          <a:p xmlns:a="http://schemas.openxmlformats.org/drawingml/2006/main">
+            <a:r>
+              <a:t>| F01 | semantic model 호출 timeout | 미채택 해석을 완료 사실로 쓰지 않고 새 입력 처리 가능 |</a:t>
+            </a:r>
+          </a:p>
+          <a:p xmlns:a="http://schemas.openxmlformats.org/drawingml/2006/main">
+            <a:r>
+              <a:t>| F02 | shared model runtime 종료 | cold weights와 세션 재구성 후 입력과 해석 재개 |</a:t>
+            </a:r>
+          </a:p>
+          <a:p xmlns:a="http://schemas.openxmlformats.org/drawingml/2006/main">
+            <a:r>
+              <a:t>| F03 | 음성 출력 오류 | Task 사실을 보존하고 text나 정상 음성으로 상태 확인 가능 |</a:t>
+            </a:r>
+          </a:p>
+          <a:p xmlns:a="http://schemas.openxmlformats.org/drawingml/2006/main">
+            <a:r>
+              <a:t>| F04 | 관측 producer 종료 | 근거 공백을 표시하고 해당 없는 참조를 추측하지 않음 |</a:t>
+            </a:r>
+          </a:p>
+          <a:p xmlns:a="http://schemas.openxmlformats.org/drawingml/2006/main">
+            <a:r>
+              <a:t>| F05 | VIA 상태 owner 종료 | 채택 상태와 미완료 의도를 올바르게 구분 |</a:t>
+            </a:r>
+          </a:p>
+          <a:p xmlns:a="http://schemas.openxmlformats.org/drawingml/2006/main">
+            <a:r>
+              <a:t>| F06 | 저장 실패 또는 crash | 미확정 상태를 확정 사실로 발표하지 않음 |</a:t>
+            </a:r>
+          </a:p>
+          <a:p xmlns:a="http://schemas.openxmlformats.org/drawingml/2006/main">
+            <a:r>
+              <a:t>| F07 | Agent 연결 단절 | 외부 실행이 미확인임을 보존하며 접속 재개 가능 |</a:t>
+            </a:r>
+          </a:p>
+          <a:p xmlns:a="http://schemas.openxmlformats.org/drawingml/2006/main">
+            <a:r>
+              <a:t>| F08 | 결과 확인 응답 유실 | 재접속 후 실제 Agent 결과로 상태 정정 |</a:t>
+            </a:r>
+          </a:p>
+          <a:p xmlns:a="http://schemas.openxmlformats.org/drawingml/2006/main">
+            <a:r>
+              <a:t>| F09 | 중복 또는 역순 외부 알림 | 최신 상태와 적용 이력 보존 |</a:t>
+            </a:r>
+          </a:p>
+          <a:p xmlns:a="http://schemas.openxmlformats.org/drawingml/2006/main">
+            <a:r>
+              <a:t>| F10 | 취소와 결과 도착 경합 | 정해진 채택 정책에 따른 상태와 전달 |</a:t>
+            </a:r>
+          </a:p>
+          <a:p xmlns:a="http://schemas.openxmlformats.org/drawingml/2006/main">
+            <a:r>
+              <a:t>| F11 | 삭제 중 재시작 | 삭제된 Context가 다시 살아나지 않음 |</a:t>
+            </a:r>
+          </a:p>
+          <a:p xmlns:a="http://schemas.openxmlformats.org/drawingml/2006/main">
+            <a:r>
+              <a:t>| F12 | 프로세스 재시작 중 새 입력 | 입력 공백이나 보류를 명시하고 다음 요청 수용 |</a:t>
+            </a:r>
+          </a:p>
+          <a:p xmlns:a="http://schemas.openxmlformats.org/drawingml/2006/main">
+            <a:r>
+              <a:t/>
+            </a:r>
+          </a:p>
+          <a:p xmlns:a="http://schemas.openxmlformats.org/drawingml/2006/main">
+            <a:r>
+              <a:t>VIA가 장애를 감지한 시점 대신 harness의 실제 장애 주입 시점에서 시작한다. 정상 복구 oracle을 만족한 실제 사건에서 종료한다. 사람의 수동 복구 단계 없이 재개할 수 있는지를 확인하되 주지표는 복구시간 하나이다. 종료한 process를 띄운 것만으로 복구로 세지 않는다. F02에는 warm 세션 복원뿐 아니라 cold weight loading도 포함한다.</a:t>
+            </a:r>
+          </a:p>
+          <a:p xmlns:a="http://schemas.openxmlformats.org/drawingml/2006/main">
+            <a:r>
+              <a:t/>
+            </a:r>
+          </a:p>
+          <a:p xmlns:a="http://schemas.openxmlformats.org/drawingml/2006/main">
+            <a:r>
+              <a:t>각 적용 시험의 정상 복구시간 중 최대값을 보고한다. 미복구나 잘못된 복구는 무한대라서 목표를 통과하지 못한다. timeout은 60초로 관측을 마치되 이를 정상 복구시간 60초로 대체하지 않는다. 원인별 elapsed time과 실패 기록은 남긴다. 외부 capability 때문에 조회할 수 없는 실행은 미확인 상태를 정확히 보존하고 정해진 다음 동작을 제공해야 복구로 판정한다.</a:t>
+            </a:r>
+          </a:p>
+          <a:p xmlns:a="http://schemas.openxmlformats.org/drawingml/2006/main">
+            <a:r>
+              <a:t/>
+            </a:r>
+          </a:p>
+          <a:p xmlns:a="http://schemas.openxmlformats.org/drawingml/2006/main">
+            <a:r>
+              <a:t>## 11. V-09 분석 용이성</a:t>
+            </a:r>
+          </a:p>
+          <a:p xmlns:a="http://schemas.openxmlformats.org/drawingml/2006/main">
+            <a:r>
+              <a:t/>
+            </a:r>
+          </a:p>
+          <a:p xmlns:a="http://schemas.openxmlformats.org/drawingml/2006/main">
+            <a:r>
+              <a:t>**설명:** 실행 기록으로 요청의 처리 과정을 설명할 수 있어야 한다.</a:t>
+            </a:r>
+          </a:p>
+          <a:p xmlns:a="http://schemas.openxmlformats.org/drawingml/2006/main">
+            <a:r>
+              <a:t/>
+            </a:r>
+          </a:p>
+          <a:p xmlns:a="http://schemas.openxmlformats.org/drawingml/2006/main">
+            <a:r>
+              <a:t>**단일 목표:** 실행 재구성률 100%.</a:t>
+            </a:r>
+          </a:p>
+          <a:p xmlns:a="http://schemas.openxmlformats.org/drawingml/2006/main">
+            <a:r>
+              <a:t/>
+            </a:r>
+          </a:p>
+          <a:p xmlns:a="http://schemas.openxmlformats.org/drawingml/2006/main">
+            <a:r>
+              <a:t>**근거:** 연구 평가에서는 전체 시험의 실행 과정을 추적할 필요가 있다. OpenTelemetry의 always_on과 parentbased_always_on은 모든 root trace를 수집하는 구성 근거를 제공한다 [S09]. 이 설정이 로그 유실이나 인과 연결의 완전성을 자동 보장하지는 않으므로 실제 재구성 성공 여부를 검사한다.</a:t>
+            </a:r>
+          </a:p>
+          <a:p xmlns:a="http://schemas.openxmlformats.org/drawingml/2006/main">
+            <a:r>
+              <a:t/>
+            </a:r>
+          </a:p>
+          <a:p xmlns:a="http://schemas.openxmlformats.org/drawingml/2006/main">
+            <a:r>
+              <a:t>**분모:** V-01의 1,880회, 모든 장애 주입 시험 및 V-10의 144회 보안 시험을 독립 harness registry에서 가져온다. 중복된 trial ID는 한 번만 센다. VIA 로그에 등장한 trial만 분모로 삼으면 로그 전체가 누락된 실패를 놓치므로 금지한다.</a:t>
+            </a:r>
+          </a:p>
+          <a:p xmlns:a="http://schemas.openxmlformats.org/drawingml/2006/main">
+            <a:r>
+              <a:t/>
+            </a:r>
+          </a:p>
+          <a:p xmlns:a="http://schemas.openxmlformats.org/drawingml/2006/main">
+            <a:r>
+              <a:t>**재구성의 필수 질문:**</a:t>
+            </a:r>
+          </a:p>
+          <a:p xmlns:a="http://schemas.openxmlformats.org/drawingml/2006/main">
+            <a:r>
+              <a:t/>
+            </a:r>
+          </a:p>
+          <a:p xmlns:a="http://schemas.openxmlformats.org/drawingml/2006/main">
+            <a:r>
+              <a:t>1. 어느 입력이 어느 Request와 Task에 연결되었는가?</a:t>
+            </a:r>
+          </a:p>
+          <a:p xmlns:a="http://schemas.openxmlformats.org/drawingml/2006/main">
+            <a:r>
+              <a:t>2. 어떤 버전의 근거와 해석 결과로 처리를 채택했는가?</a:t>
+            </a:r>
+          </a:p>
+          <a:p xmlns:a="http://schemas.openxmlformats.org/drawingml/2006/main">
+            <a:r>
+              <a:t>3. 어떤 명령과 결과가 상태 변화를 만들었는가?</a:t>
+            </a:r>
+          </a:p>
+          <a:p xmlns:a="http://schemas.openxmlformats.org/drawingml/2006/main">
+            <a:r>
+              <a:t>4. 사용자에게 실제로 무엇을 전달했는가?</a:t>
+            </a:r>
+          </a:p>
+          <a:p xmlns:a="http://schemas.openxmlformats.org/drawingml/2006/main">
+            <a:r>
+              <a:t>5. 정상 실행과 보류 또는 실패를 나누는 확인된 사실은 무엇인가?</a:t>
+            </a:r>
+          </a:p>
+          <a:p xmlns:a="http://schemas.openxmlformats.org/drawingml/2006/main">
+            <a:r>
+              <a:t/>
+            </a:r>
+          </a:p>
+          <a:p xmlns:a="http://schemas.openxmlformats.org/drawingml/2006/main">
+            <a:r>
+              <a:t>시험 종류에 적용되는 질문을 모두 기록만으로 답하고 harness의 실제 사건과 일치해야 성공이다. 필요한 관계는 input ID, Request ID, Task ID, command와 receipt ID, source revision, permission epoch, model 및 prompt version, adoption decision, 이전 상태와 새 상태, 실제 output event 및 fault ID로 연결한다. 기록 자체가 모순되거나 필수 link가 없으면 실패이다.</a:t>
+            </a:r>
+          </a:p>
+          <a:p xmlns:a="http://schemas.openxmlformats.org/drawingml/2006/main">
+            <a:r>
+              <a:t/>
+            </a:r>
+          </a:p>
+          <a:p xmlns:a="http://schemas.openxmlformats.org/drawingml/2006/main">
+            <a:r>
+              <a:t>```text</a:t>
+            </a:r>
+          </a:p>
+          <a:p xmlns:a="http://schemas.openxmlformats.org/drawingml/2006/main">
+            <a:r>
+              <a:t>실행 재구성률 = 100 × 필수 질문 전체를 재구성한 trial 수 / registry의 전체 trial 수</a:t>
+            </a:r>
+          </a:p>
+          <a:p xmlns:a="http://schemas.openxmlformats.org/drawingml/2006/main">
+            <a:r>
+              <a:t>```</a:t>
+            </a:r>
+          </a:p>
+          <a:p xmlns:a="http://schemas.openxmlformats.org/drawingml/2006/main">
+            <a:r>
+              <a:t/>
+            </a:r>
+          </a:p>
+          <a:p xmlns:a="http://schemas.openxmlformats.org/drawingml/2006/main">
+            <a:r>
+              <a:t>후보를 가린 독립 검사자가 trace를 분석하고 oracle과 대조한다. 자동 link 검사와 사람의 설명 가능성 검토를 함께 사용한다. 정상 실행에서도 Context 선택, 해석 채택, Task routing과 전달을 검토한다. 실패 때만 verbose log를 켜는 방식은 전수 재구성 목표에 맞지 않는다. 수집 pipeline의 crash, flush 실패와 clock 불일치도 검사한다.</a:t>
+            </a:r>
+          </a:p>
+          <a:p xmlns:a="http://schemas.openxmlformats.org/drawingml/2006/main">
+            <a:r>
+              <a:t/>
+            </a:r>
+          </a:p>
+          <a:p xmlns:a="http://schemas.openxmlformats.org/drawingml/2006/main">
+            <a:r>
+              <a:t>연구용 aggregate에는 오류 유형, 참조 근거 공백, 해석 수정 패턴, model version별 차이와 latency 분포를 남겨 VIA orchestration 개선에 사용할 수 있게 한다. 모델 내부 사고 과정이나 개인 화면 및 음성 원문을 전부 저장해야 한다는 요구는 없다. ID, version, 접근이 허용된 structured output 및 제한된 digest로 연결하고, 철회와 삭제 정책을 지키면서 필요한 metadata의 보존 범위를 정한다. 로그의 기밀성도 V-10에서 시험한다.</a:t>
+            </a:r>
+          </a:p>
+          <a:p xmlns:a="http://schemas.openxmlformats.org/drawingml/2006/main">
+            <a:r>
+              <a:t/>
+            </a:r>
+          </a:p>
+          <a:p xmlns:a="http://schemas.openxmlformats.org/drawingml/2006/main">
+            <a:r>
+              <a:t>## 12. V-10 기밀성</a:t>
+            </a:r>
+          </a:p>
+          <a:p xmlns:a="http://schemas.openxmlformats.org/drawingml/2006/main">
+            <a:r>
+              <a:t/>
+            </a:r>
+          </a:p>
+          <a:p xmlns:a="http://schemas.openxmlformats.org/drawingml/2006/main">
+            <a:r>
+              <a:t>**설명:** 사용자 정보는 허용된 범위 안에서만 사용해야 한다.</a:t>
+            </a:r>
+          </a:p>
+          <a:p xmlns:a="http://schemas.openxmlformats.org/drawingml/2006/main">
+            <a:r>
+              <a:t/>
+            </a:r>
+          </a:p>
+          <a:p xmlns:a="http://schemas.openxmlformats.org/drawingml/2006/main">
+            <a:r>
+              <a:t>**단일 목표:** 고정 시험에서 무단 정보 사용 0건.</a:t>
+            </a:r>
+          </a:p>
+          <a:p xmlns:a="http://schemas.openxmlformats.org/drawingml/2006/main">
+            <a:r>
+              <a:t/>
+            </a:r>
+          </a:p>
+          <a:p xmlns:a="http://schemas.openxmlformats.org/drawingml/2006/main">
+            <a:r>
+              <a:t>**근거:** NIST SP 800-53의 AC-3은 승인된 접근의 집행, AC-6은 최소 권한을 다룬다 [S10]. VIA의 권한, 철회 및 삭제 계약을 적용하여 금지된 정보 사용의 허용 예산을 0으로 잡는다 [S00]. NIST 인증을 받았다거나 시험 밖의 모든 공격을 막는다는 주장은 하지 않는다.</a:t>
+            </a:r>
+          </a:p>
+          <a:p xmlns:a="http://schemas.openxmlformats.org/drawingml/2006/main">
+            <a:r>
+              <a:t/>
+            </a:r>
+          </a:p>
+          <a:p xmlns:a="http://schemas.openxmlformats.org/drawingml/2006/main">
+            <a:r>
+              <a:t>아래 12개 사례를 정상 동작, 요청 처리 중 정책 또는 사건 변경, 재시작 후의 세 조건에서 4회 반복한다. **12 × 3 × 4 = 144회**를 제안한다. 첫 조건에는 고정 금지 정책을 적용하고, 처리 중 조건은 실제 접근 또는 전달 전 정책을 바꾸거나 제한을 적용한다. 재시작 조건은 같은 정책을 durable state에서 복원한다. 시험마다 적용 지점을 manifest로 명시한다.</a:t>
+            </a:r>
+          </a:p>
+          <a:p xmlns:a="http://schemas.openxmlformats.org/drawingml/2006/main">
+            <a:r>
+              <a:t/>
+            </a:r>
+          </a:p>
+          <a:p xmlns:a="http://schemas.openxmlformats.org/drawingml/2006/main">
+            <a:r>
+              <a:t>| ID | 시험 상황 | 금지 사건의 관측 지점 |</a:t>
+            </a:r>
+          </a:p>
+          <a:p xmlns:a="http://schemas.openxmlformats.org/drawingml/2006/main">
+            <a:r>
+              <a:t>| --- | --- | --- |</a:t>
+            </a:r>
+          </a:p>
+          <a:p xmlns:a="http://schemas.openxmlformats.org/drawingml/2006/main">
+            <a:r>
+              <a:t>| S01 | 화면 수집 권한이 없는 앱 | capture API, buffer와 model 입력 |</a:t>
+            </a:r>
+          </a:p>
+          <a:p xmlns:a="http://schemas.openxmlformats.org/drawingml/2006/main">
+            <a:r>
+              <a:t>| S02 | 승인한 파일 범위 밖의 문서 | 실제 file read와 Context 추가 |</a:t>
+            </a:r>
+          </a:p>
+          <a:p xmlns:a="http://schemas.openxmlformats.org/drawingml/2006/main">
+            <a:r>
+              <a:t>| S03 | 허용한 Agent와 다른 수신자 | serialised payload와 실제 전송 |</a:t>
+            </a:r>
+          </a:p>
+          <a:p xmlns:a="http://schemas.openxmlformats.org/drawingml/2006/main">
+            <a:r>
+              <a:t>| S04 | 읽기 목적을 넘어 다른 요청에 재사용 | Context query와 해석 호출의 목적 ID |</a:t>
+            </a:r>
+          </a:p>
+          <a:p xmlns:a="http://schemas.openxmlformats.org/drawingml/2006/main">
+            <a:r>
+              <a:t>| S05 | 권한 철회 후 cache 내용 사용 | cache hit와 model 입력 |</a:t>
+            </a:r>
+          </a:p>
+          <a:p xmlns:a="http://schemas.openxmlformats.org/drawingml/2006/main">
+            <a:r>
+              <a:t>| S06 | 조회 시작 후 전달 전에 권한 철회 | 전달 직전 permission epoch와 payload |</a:t>
+            </a:r>
+          </a:p>
+          <a:p xmlns:a="http://schemas.openxmlformats.org/drawingml/2006/main">
+            <a:r>
+              <a:t>| S07 | 다른 Task의 정보 승인 재사용 | Task와 approval scope 연결 |</a:t>
+            </a:r>
+          </a:p>
+          <a:p xmlns:a="http://schemas.openxmlformats.org/drawingml/2006/main">
+            <a:r>
+              <a:t>| S08 | 다른 역할이나 세션으로 Context 유출 | session과 KV binding |</a:t>
+            </a:r>
+          </a:p>
+          <a:p xmlns:a="http://schemas.openxmlformats.org/drawingml/2006/main">
+            <a:r>
+              <a:t>| S09 | 삭제 뒤 원문 및 파생 index 검색 | storage read와 retrieval 결과 |</a:t>
+            </a:r>
+          </a:p>
+          <a:p xmlns:a="http://schemas.openxmlformats.org/drawingml/2006/main">
+            <a:r>
+              <a:t>| S10 | 삭제 뒤 KV 또는 scene 해석 재사용 | retained session과 semantic input |</a:t>
+            </a:r>
+          </a:p>
+          <a:p xmlns:a="http://schemas.openxmlformats.org/drawingml/2006/main">
+            <a:r>
+              <a:t>| S11 | 삭제 중 늦은 write 및 재시작 복원 | store commit과 restored records |</a:t>
+            </a:r>
+          </a:p>
+          <a:p xmlns:a="http://schemas.openxmlformats.org/drawingml/2006/main">
+            <a:r>
+              <a:t>| S12 | 화면, 음성 또는 문서 비밀값의 로그 노출 | local logs와 연구 수집 endpoint |</a:t>
+            </a:r>
+          </a:p>
+          <a:p xmlns:a="http://schemas.openxmlformats.org/drawingml/2006/main">
+            <a:r>
+              <a:t/>
+            </a:r>
+          </a:p>
+          <a:p xmlns:a="http://schemas.openxmlformats.org/drawingml/2006/main">
+            <a:r>
+              <a:t>각 사례에 고유 canary 값을 심고 read, model input, store, KV binding, Agent 전송 및 로그 sink에서 실제 접근을 계측한다. 로그에 '거절'이라고 적힌 것만으로 통과시키지 않는다. 정책상 허용 여부는 접근과 전달 시점의 권한 epoch로 oracle이 계산한다. 하나의 무단 사용을 여러 계층에서 관측하면 event ID로 중복 제거하며 원본 관측도 보존한다.</a:t>
+            </a:r>
+          </a:p>
+          <a:p xmlns:a="http://schemas.openxmlformats.org/drawingml/2006/main">
+            <a:r>
+              <a:t/>
+            </a:r>
+          </a:p>
+          <a:p xmlns:a="http://schemas.openxmlformats.org/drawingml/2006/main">
+            <a:r>
+              <a:t>명확히 허용된 동일 요청을 정상 대조군으로 수행한다. 모든 읽기와 전송을 막아 0건을 만드는 구현은 V-01과 V-03을 충족하지 못한다. 허용된 Downstream Agent로 필요한 Context를 전달하는 것은 위반이 아니다. 철회 전에 적법하게 외부 Agent에게 전달한 데이터의 모든 외부 복제본을 VIA가 삭제한다고 가정하지 않는다. VIA 통제 범위의 후속 사용과 재전달을 시험하고 외부 시스템의 capability와 책임 경계를 명시한다.</a:t>
+            </a:r>
+          </a:p>
+          <a:p xmlns:a="http://schemas.openxmlformats.org/drawingml/2006/main">
+            <a:r>
+              <a:t/>
+            </a:r>
+          </a:p>
+          <a:p xmlns:a="http://schemas.openxmlformats.org/drawingml/2006/main">
+            <a:r>
+              <a:t>시험 종료 후 보고는 사건 수 0건 여부와 144회 전체의 실행 여부, 누락된 관측 지점 및 정상 대조군 결과를 포함한다. 실행하지 않은 사례를 0건으로 채우지 않는다. 새 공격이나 새로운 저장소가 추가되면 시험 목록을 확장하고 기존 결과의 범위를 보존한다.</a:t>
+            </a:r>
+          </a:p>
+          <a:p xmlns:a="http://schemas.openxmlformats.org/drawingml/2006/main">
+            <a:r>
+              <a:t/>
+            </a:r>
+          </a:p>
+          <a:p xmlns:a="http://schemas.openxmlformats.org/drawingml/2006/main">
+            <a:r>
+              <a:t>## 13. 출처</a:t>
+            </a:r>
+          </a:p>
+          <a:p xmlns:a="http://schemas.openxmlformats.org/drawingml/2006/main">
+            <a:r>
+              <a:t/>
+            </a:r>
+          </a:p>
+          <a:p xmlns:a="http://schemas.openxmlformats.org/drawingml/2006/main">
+            <a:r>
+              <a:t>외부 자료 확인일: 2026-10-06. 각 출처의 적용 범위는 위 항목에서 제한했다.</a:t>
+            </a:r>
+          </a:p>
+          <a:p xmlns:a="http://schemas.openxmlformats.org/drawingml/2006/main">
+            <a:r>
+              <a:t/>
+            </a:r>
+          </a:p>
+          <a:p xmlns:a="http://schemas.openxmlformats.org/drawingml/2006/main">
+            <a:r>
+              <a:t>| ID | 원문 출처 | 사용한 사실 또는 원칙 |</a:t>
+            </a:r>
+          </a:p>
+          <a:p xmlns:a="http://schemas.openxmlformats.org/drawingml/2006/main">
+            <a:r>
+              <a:t>| --- | --- | --- |</a:t>
+            </a:r>
+          </a:p>
+          <a:p xmlns:a="http://schemas.openxmlformats.org/drawingml/2006/main">
+            <a:r>
+              <a:t>| S00 | [VIA 대표 UC](../../architecture/05-representative-use-cases.md), [고정 범위](../../architecture/03-fixed-architecture-scope.md), [03-00 품질 시나리오](../../architecture/12-decisions/decision-packages/03-00-quality-scenarios.md) | 필수 변형 94개, 책임 경계, V의 의미와 순위 및 정보 사용 계약 |</a:t>
+            </a:r>
+          </a:p>
+          <a:p xmlns:a="http://schemas.openxmlformats.org/drawingml/2006/main">
+            <a:r>
+              <a:t>| S01 | Chen et al., 2019, [BERT for Joint Intent Classification and Slot Filling, Table 2](https://arxiv.org/html/1902.10909) | SNIPS의 문장 전체 semantic frame accuracy 92.8% |</a:t>
+            </a:r>
+          </a:p>
+          <a:p xmlns:a="http://schemas.openxmlformats.org/drawingml/2006/main">
+            <a:r>
+              <a:t>| S02 | Yao et al., 2024, [tau-bench](https://arxiv.org/abs/2406.12045) | 대화 종료 뒤 실제 상태와 정답 상태를 대조하는 성공 판정 |</a:t>
+            </a:r>
+          </a:p>
+          <a:p xmlns:a="http://schemas.openxmlformats.org/drawingml/2006/main">
+            <a:r>
+              <a:t>| S03 | Cao et al., 2026, [Clarify or Answer](https://arxiv.org/abs/2601.16400) | 필요할 때 단일 집중 질문을 사용하는 시각 질의 접근, preprint |</a:t>
+            </a:r>
+          </a:p>
+          <a:p xmlns:a="http://schemas.openxmlformats.org/drawingml/2006/main">
+            <a:r>
+              <a:t>| S04 | Jakob Nielsen, 2019, [The 3 Response Time Limits in Interaction Design](https://www.nngroup.com/videos/3-response-time-limits-interaction-design/) | 0.1초, 1초, 10초의 사용자 반응 기준 |</a:t>
+            </a:r>
+          </a:p>
+          <a:p xmlns:a="http://schemas.openxmlformats.org/drawingml/2006/main">
+            <a:r>
+              <a:t>| S05 | SEI, 2003, [Deriving Architectural Tactics, Modifiability](https://www.sei.cmu.edu/documents/704/2003_005_001_14213.pdf) | 책임 변경과 변경 전파가 개발 및 시험 비용에 미치는 영향 |</a:t>
+            </a:r>
+          </a:p>
+          <a:p xmlns:a="http://schemas.openxmlformats.org/drawingml/2006/main">
+            <a:r>
+              <a:t>| S06 | Samsung, [Galaxy Book6 Ultra NP960UJH-XG3IN 공식 사양](https://www.samsung.com/in/computers/galaxy-book/galaxy-book6-ultra-ultra-7-32gb-1tb-np960ujh-xg3in/) | 32GB LPDDR5X RAM, RTX 5070 Laptop 전용 8GB GDDR7 |</a:t>
+            </a:r>
+          </a:p>
+          <a:p xmlns:a="http://schemas.openxmlformats.org/drawingml/2006/main">
+            <a:r>
+              <a:t>| S07 | Lin et al., [AWQ](https://arxiv.org/abs/2306.00978) | 4bit LLM 양자화와 장치 배포의 연구 근거 |</a:t>
+            </a:r>
+          </a:p>
+          <a:p xmlns:a="http://schemas.openxmlformats.org/drawingml/2006/main">
+            <a:r>
+              <a:t>| S08 | Candea et al., OSDI 2004, [Microreboot: A Technique for Cheap Recovery](https://www.usenix.org/legacy/events/osdi04/tech/full_papers/candea/candea_html/index.html) | 상태와 실행을 분리하여 작은 실행 단위를 복구하는 구조 |</a:t>
+            </a:r>
+          </a:p>
+          <a:p xmlns:a="http://schemas.openxmlformats.org/drawingml/2006/main">
+            <a:r>
+              <a:t>| S09 | OpenTelemetry, [General SDK Configuration](https://opentelemetry.io/docs/languages/sdk-configuration/general/) | always_on 및 parentbased_always_on sampler 설정 |</a:t>
+            </a:r>
+          </a:p>
+          <a:p xmlns:a="http://schemas.openxmlformats.org/drawingml/2006/main">
+            <a:r>
+              <a:t>| S10 | NIST, [SP 800-53 Rev. 5](https://doi.org/10.6028/NIST.SP.800-53r5), AC-3 및 AC-6 | 승인된 접근의 집행과 최소 권한 |</a:t>
+            </a:r>
+          </a:p>
+          <a:p xmlns:a="http://schemas.openxmlformats.org/drawingml/2006/main">
+            <a:r>
+              <a:t/>
+            </a:r>
+          </a:p>
+          <a:p xmlns:a="http://schemas.openxmlformats.org/drawingml/2006/main">
+            <a:r>
+              <a:t>실제 시간 endpoint는 [event-boundary-contract](../../architecture/11-measurement/event-boundary-contract.md), 기존 의미와 qualification은 [core-asr-contract](../../architecture/08-quality-attributes/core-asr-contract.md)를 함께 읽는다. 이번 목표 제안이 기존 QA ID와 집계를 자동으로 대체하지 않는다.</a:t>
+            </a:r>
+          </a:p>
+          <a:p xmlns:a="http://schemas.openxmlformats.org/drawingml/2006/main">
+            <a:r>
+              <a:t/>
             </a:r>
           </a:p>
         </p:txBody>
@@ -838,42 +2383,187 @@
           <a:lstStyle xmlns:a="http://schemas.openxmlformats.org/drawingml/2006/main"/>
           <a:p xmlns:a="http://schemas.openxmlformats.org/drawingml/2006/main">
             <a:r>
-              <a:t>VIA 품질 요구사항 발표 문안, 2026-10-06. PRESENTATION_DRAFT_NOT_MEASUREMENT_FREEZE.</a:t>
-            </a:r>
-          </a:p>
-          <a:p xmlns:a="http://schemas.openxmlformats.org/drawingml/2006/main">
-            <a:r>
-              <a:t>공동 순위 안에 추가 우열을 부여하지 않는다. V는 검토 관점이며 최종 QA/ASR 선정이 아니다.</a:t>
-            </a:r>
-          </a:p>
-          <a:p xmlns:a="http://schemas.openxmlformats.org/drawingml/2006/main">
-            <a:r>
-              <a:t>출처: docs/architecture/12-decisions/decision-packages/03-00-quality-scenarios.md §2, §2.1, §2.2, §2.3, §6. docs/architecture/11-measurement/event-boundary-contract.md. docs/architecture/08-quality-attributes/core-asr-contract.md §7.</a:t>
-            </a:r>
-          </a:p>
-          <a:p xmlns:a="http://schemas.openxmlformats.org/drawingml/2006/main">
-            <a:r>
-              <a:t>V-09 분석 및 시험 용이성</a:t>
-            </a:r>
-          </a:p>
-          <a:p xmlns:a="http://schemas.openxmlformats.org/drawingml/2006/main">
-            <a:r>
-              <a:t>설명: 실패 원인을 구분하고 필요한 사건과 장애를 통제하며 기대 결과를 판정할 수 있어야 한다.</a:t>
-            </a:r>
-          </a:p>
-          <a:p xmlns:a="http://schemas.openxmlformats.org/drawingml/2006/main">
-            <a:r>
-              <a:t>목표: 진단 성공률(%)·시간(s), 시험 준비·판정 공수(인시) 미정</a:t>
-            </a:r>
-          </a:p>
-          <a:p xmlns:a="http://schemas.openxmlformats.org/drawingml/2006/main">
-            <a:r>
-              <a:t>목표 근거: 진단 성공률·시간, 시험 공수와 재현 범위 목표는 미확정이다.</a:t>
-            </a:r>
-          </a:p>
-          <a:p xmlns:a="http://schemas.openxmlformats.org/drawingml/2006/main">
-            <a:r>
-              <a:t>측정 초안: 같은 숨겨진 원인 사례의 최소 보호된 기록으로 원인 구분 정확도와 진단 시간을 확인한다; 별도로 사건·장애의 통제 가능 여부, fixture/정답 기준 준비 공수, 기대 결과 판정 가능 여부와 저장 근거의 재계산 가능성을 확인한다.</a:t>
+              <a:t>VIA 품질 요구사항 목표 제안, 2026-10-06. EVIDENCE_BASED_PROPOSED_TARGETS_NOT_MEASURED.</a:t>
+            </a:r>
+          </a:p>
+          <a:p xmlns:a="http://schemas.openxmlformats.org/drawingml/2006/main">
+            <a:r>
+              <a:t>공동 순위 내부의 추가 우열은 없다. 기존 V 원문: docs/architecture/12-decisions/decision-packages/03-00-quality-scenarios.md. 삭제: V-11, V-12, V-13.</a:t>
+            </a:r>
+          </a:p>
+          <a:p xmlns:a="http://schemas.openxmlformats.org/drawingml/2006/main">
+            <a:r>
+              <a:t>V-08 변경 용이성</a:t>
+            </a:r>
+          </a:p>
+          <a:p xmlns:a="http://schemas.openxmlformats.org/drawingml/2006/main">
+            <a:r>
+              <a:t>원래 V 이름: 변경 용이성과 모듈성</a:t>
+            </a:r>
+          </a:p>
+          <a:p xmlns:a="http://schemas.openxmlformats.org/drawingml/2006/main">
+            <a:r>
+              <a:t>설명: 기능 변경이 적은 설계 요소에만 영향을 주어야 한다.</a:t>
+            </a:r>
+          </a:p>
+          <a:p xmlns:a="http://schemas.openxmlformats.org/drawingml/2006/main">
+            <a:r>
+              <a:t>목표: 평균 변경 요소 수 ≤ 3개/변경</a:t>
+            </a:r>
+          </a:p>
+          <a:p xmlns:a="http://schemas.openxmlformats.org/drawingml/2006/main">
+            <a:r>
+              <a:t>목표 근거: SEI의 변경 전파와 수정 비용 분석을 바탕으로 책임 요소, 계약 요소, 소비 요소의 세 요소 이내를 VIA 변경 예산으로 제안한다. SEI가 3개를 규정한 것은 아니다.</a:t>
+            </a:r>
+          </a:p>
+          <a:p xmlns:a="http://schemas.openxmlformats.org/drawingml/2006/main">
+            <a:r>
+              <a:t>측정: 고정된 논리 요소 목록에서 추가, 수정, 삭제한 요소의 합집합을 센다. MH는 실제 과제로 보정한 a+bN으로, MM는 MH를 조직의 월 표준시간으로 나눠 환산한다.</a:t>
+            </a:r>
+          </a:p>
+          <a:p xmlns:a="http://schemas.openxmlformats.org/drawingml/2006/main">
+            <a:r>
+              <a:t>경계: 파일 수나 Component 수만으로 모듈성 또는 변경 용이성을 판정하지 않는다. 기능을 제거해 변경 비용을 줄였다면 V-03에도 기록한다.</a:t>
+            </a:r>
+          </a:p>
+          <a:p xmlns:a="http://schemas.openxmlformats.org/drawingml/2006/main">
+            <a:r>
+              <a:t>S05: SEI, 2003, [Deriving Architectural Tactics, Modifiability](https://www.sei.cmu.edu/documents/704/2003_005_001_14213.pdf)</a:t>
+            </a:r>
+          </a:p>
+          <a:p xmlns:a="http://schemas.openxmlformats.org/drawingml/2006/main">
+            <a:r>
+              <a:t/>
+            </a:r>
+          </a:p>
+          <a:p xmlns:a="http://schemas.openxmlformats.org/drawingml/2006/main">
+            <a:r>
+              <a:t>V-06 메모리 효율성</a:t>
+            </a:r>
+          </a:p>
+          <a:p xmlns:a="http://schemas.openxmlformats.org/drawingml/2006/main">
+            <a:r>
+              <a:t>원래 V 이름: 자원 활용성과 수용량</a:t>
+            </a:r>
+          </a:p>
+          <a:p xmlns:a="http://schemas.openxmlformats.org/drawingml/2006/main">
+            <a:r>
+              <a:t>설명: 상시 실행 중에도 다른 PC 작업을 위한 메모리를 남겨야 한다.</a:t>
+            </a:r>
+          </a:p>
+          <a:p xmlns:a="http://schemas.openxmlformats.org/drawingml/2006/main">
+            <a:r>
+              <a:t>목표: 최대 전체 메모리 ≤ 16GB</a:t>
+            </a:r>
+          </a:p>
+          <a:p xmlns:a="http://schemas.openxmlformats.org/drawingml/2006/main">
+            <a:r>
+              <a:t>목표 근거: Galaxy Book6 Ultra 32GB RAM 구성에서 OS 6GB, 다른 앱 6GB, 여유 4GB를 예약해 VIA에 16GB를 배정한다. 예약량은 측정 사실이 아닌 공개한 설계 예산이다.</a:t>
+            </a:r>
+          </a:p>
+          <a:p xmlns:a="http://schemas.openxmlformats.org/drawingml/2006/main">
+            <a:r>
+              <a:t>측정: 공유 Omni 전체 가중치와 모든 helper, KV, UI, 입력 버퍼 및 실제 복제본을 합산한다. 전용 GPU는 더하고 같은 물리 메모리의 중복 매핑은 한 번만 센다.</a:t>
+            </a:r>
+          </a:p>
+          <a:p xmlns:a="http://schemas.openxmlformats.org/drawingml/2006/main">
+            <a:r>
+              <a:t>경계: 하나의 공유 Omni 가중치와 역할별 KV, Context를 구분하고 Streaming ASR 및 모든 추가 helper 비용을 포함한다. 자원 감소가 기능 축소 때문이면 함께 공개한다.</a:t>
+            </a:r>
+          </a:p>
+          <a:p xmlns:a="http://schemas.openxmlformats.org/drawingml/2006/main">
+            <a:r>
+              <a:t>S06: Samsung, [Galaxy Book6 Ultra NP960UJH-XG3IN 공식 사양](https://www.samsung.com/in/computers/galaxy-book/galaxy-book6-ultra-ultra-7-32gb-1tb-np960ujh-xg3in/)</a:t>
+            </a:r>
+          </a:p>
+          <a:p xmlns:a="http://schemas.openxmlformats.org/drawingml/2006/main">
+            <a:r>
+              <a:t>S07: Lin et al., [AWQ](https://arxiv.org/abs/2306.00978)</a:t>
+            </a:r>
+          </a:p>
+          <a:p xmlns:a="http://schemas.openxmlformats.org/drawingml/2006/main">
+            <a:r>
+              <a:t/>
+            </a:r>
+          </a:p>
+          <a:p xmlns:a="http://schemas.openxmlformats.org/drawingml/2006/main">
+            <a:r>
+              <a:t>V-07 복구 용이성</a:t>
+            </a:r>
+          </a:p>
+          <a:p xmlns:a="http://schemas.openxmlformats.org/drawingml/2006/main">
+            <a:r>
+              <a:t>원래 V 이름: 결함 허용성과 복구성</a:t>
+            </a:r>
+          </a:p>
+          <a:p xmlns:a="http://schemas.openxmlformats.org/drawingml/2006/main">
+            <a:r>
+              <a:t>설명: 장애 뒤 기존 업무를 이어갈 수 있는 상태로 돌아와야 한다.</a:t>
+            </a:r>
+          </a:p>
+          <a:p xmlns:a="http://schemas.openxmlformats.org/drawingml/2006/main">
+            <a:r>
+              <a:t>목표: 최대 정상 복구시간 ≤ 10초</a:t>
+            </a:r>
+          </a:p>
+          <a:p xmlns:a="http://schemas.openxmlformats.org/drawingml/2006/main">
+            <a:r>
+              <a:t>목표 근거: Nielsen의 10초 주의 유지 한계를 복구 예산으로 제안한다. microreboot 연구는 상태와 실행을 분리한 빠른 복구의 근거이며 VIA의 모델 재로딩 속도를 증명하지 않는다.</a:t>
+            </a:r>
+          </a:p>
+          <a:p xmlns:a="http://schemas.openxmlformats.org/drawingml/2006/main">
+            <a:r>
+              <a:t>측정: 장애 주입부터 입력, 올바른 상태 확인, 다음 작업 재개까지의 최대 시간을 센다. 정상 복구하지 못한 시험은 무한대이며 cold 모델 재로딩도 포함한다.</a:t>
+            </a:r>
+          </a:p>
+          <a:p xmlns:a="http://schemas.openxmlformats.org/drawingml/2006/main">
+            <a:r>
+              <a:t>경계: process 재기동만으로 복구 성공을 판정하지 않는다. 외부 실행이 확인 불가이면 unknown을 유지하며 완료나 취소를 만들어내지 않는다.</a:t>
+            </a:r>
+          </a:p>
+          <a:p xmlns:a="http://schemas.openxmlformats.org/drawingml/2006/main">
+            <a:r>
+              <a:t>S04: Jakob Nielsen, 2019, [The 3 Response Time Limits in Interaction Design](https://www.nngroup.com/videos/3-response-time-limits-interaction-design/)</a:t>
+            </a:r>
+          </a:p>
+          <a:p xmlns:a="http://schemas.openxmlformats.org/drawingml/2006/main">
+            <a:r>
+              <a:t>S08: Candea et al., OSDI 2004, [Microreboot: A Technique for Cheap Recovery](https://www.usenix.org/legacy/events/osdi04/tech/full_papers/candea/candea_html/index.html)</a:t>
+            </a:r>
+          </a:p>
+          <a:p xmlns:a="http://schemas.openxmlformats.org/drawingml/2006/main">
+            <a:r>
+              <a:t/>
+            </a:r>
+          </a:p>
+          <a:p xmlns:a="http://schemas.openxmlformats.org/drawingml/2006/main">
+            <a:r>
+              <a:t>V-09 분석 용이성</a:t>
+            </a:r>
+          </a:p>
+          <a:p xmlns:a="http://schemas.openxmlformats.org/drawingml/2006/main">
+            <a:r>
+              <a:t>원래 V 이름: 분석 및 시험 용이성</a:t>
+            </a:r>
+          </a:p>
+          <a:p xmlns:a="http://schemas.openxmlformats.org/drawingml/2006/main">
+            <a:r>
+              <a:t>설명: 실행 기록으로 요청의 처리 과정을 설명할 수 있어야 한다.</a:t>
+            </a:r>
+          </a:p>
+          <a:p xmlns:a="http://schemas.openxmlformats.org/drawingml/2006/main">
+            <a:r>
+              <a:t>목표: 실행 재구성률 = 100%</a:t>
+            </a:r>
+          </a:p>
+          <a:p xmlns:a="http://schemas.openxmlformats.org/drawingml/2006/main">
+            <a:r>
+              <a:t>목표 근거: 연구용 평가에서 전체 실행을 수집하도록 정하고 OpenTelemetry always_on 방식으로 전수 수집을 설계한다. 샘플링 설정만으로 재구성 완전성을 보장하지는 않는다.</a:t>
+            </a:r>
+          </a:p>
+          <a:p xmlns:a="http://schemas.openxmlformats.org/drawingml/2006/main">
+            <a:r>
+              <a:t>측정: 정상과 실패 시험 모두에서 입력, 해석, 상태 변화, 명령, 결과의 필수 연결을 독립 검사한다. 로그 없는 시험도 분모에 포함하고 원문 개인정보나 모델 내부 사고 과정 수집은 요구하지 않는다.</a:t>
             </a:r>
           </a:p>
           <a:p xmlns:a="http://schemas.openxmlformats.org/drawingml/2006/main">
@@ -883,7 +2573,7 @@
           </a:p>
           <a:p xmlns:a="http://schemas.openxmlformats.org/drawingml/2006/main">
             <a:r>
-              <a:t>품질 분류: Maintainability → Analysability / Testability</a:t>
+              <a:t>S09: OpenTelemetry, [General SDK Configuration](https://opentelemetry.io/docs/languages/sdk-configuration/general/)</a:t>
             </a:r>
           </a:p>
           <a:p xmlns:a="http://schemas.openxmlformats.org/drawingml/2006/main">
@@ -898,22 +2588,27 @@
           </a:p>
           <a:p xmlns:a="http://schemas.openxmlformats.org/drawingml/2006/main">
             <a:r>
-              <a:t>설명: 허용된 대상과 목적에만 정보를 사용하고 권한 철회 또는 삭제 뒤의 신규 사용을 차단해야 한다.</a:t>
-            </a:r>
-          </a:p>
-          <a:p xmlns:a="http://schemas.openxmlformats.org/drawingml/2006/main">
-            <a:r>
-              <a:t>목표: 무단 읽기·제공 및 철회·삭제 뒤 신규 사용 0건</a:t>
-            </a:r>
-          </a:p>
-          <a:p xmlns:a="http://schemas.openxmlformats.org/drawingml/2006/main">
-            <a:r>
-              <a:t>목표 근거: 허용 대상·목적 및 철회/삭제 뒤 신규 사용 금지라는 기존 요구를 0건 목표로 표현한다; 집행 경계와 시험 모집단은 미확정이다.</a:t>
-            </a:r>
-          </a:p>
-          <a:p xmlns:a="http://schemas.openxmlformats.org/drawingml/2006/main">
-            <a:r>
-              <a:t>측정 초안: 자료·대상·목적·시점별 허용 기준과 실제 접근/전달 기록을 대조한다; 권한 철회·삭제 경계의 경쟁 조건, 파생 자료, cache, 역할별 KV 및 외부 Agent 제공을 포함해 무단 사용 건수를 집계한다.</a:t>
+              <a:t>원래 V 이름: 기밀성</a:t>
+            </a:r>
+          </a:p>
+          <a:p xmlns:a="http://schemas.openxmlformats.org/drawingml/2006/main">
+            <a:r>
+              <a:t>설명: 사용자 정보는 허용된 범위 안에서만 사용해야 한다.</a:t>
+            </a:r>
+          </a:p>
+          <a:p xmlns:a="http://schemas.openxmlformats.org/drawingml/2006/main">
+            <a:r>
+              <a:t>목표: 무단 정보 사용 = 0건</a:t>
+            </a:r>
+          </a:p>
+          <a:p xmlns:a="http://schemas.openxmlformats.org/drawingml/2006/main">
+            <a:r>
+              <a:t>목표 근거: NIST AC-3 접근 통제와 AC-6 최소 권한 원칙 및 VIA의 권한 계약을 적용해 금지된 사용의 허용 예산을 0건으로 정한다. 시험 통과가 모든 공격에 대한 보증은 아니다.</a:t>
+            </a:r>
+          </a:p>
+          <a:p xmlns:a="http://schemas.openxmlformats.org/drawingml/2006/main">
+            <a:r>
+              <a:t>측정: 권한 밖 읽기와 수신자 전달, 철회 뒤 사용, 삭제 뒤 검색과 KV 재사용 및 로그 노출을 시험한다. 허용된 Agent 전달의 정상 대조군도 함께 확인한다.</a:t>
             </a:r>
           </a:p>
           <a:p xmlns:a="http://schemas.openxmlformats.org/drawingml/2006/main">
@@ -923,127 +2618,1652 @@
           </a:p>
           <a:p xmlns:a="http://schemas.openxmlformats.org/drawingml/2006/main">
             <a:r>
-              <a:t>품질 분류: Security → Confidentiality</a:t>
-            </a:r>
-          </a:p>
-          <a:p xmlns:a="http://schemas.openxmlformats.org/drawingml/2006/main">
-            <a:r>
-              <a:t/>
-            </a:r>
-          </a:p>
-          <a:p xmlns:a="http://schemas.openxmlformats.org/drawingml/2006/main">
-            <a:r>
-              <a:t>V-11 상호운용성과 공존성</a:t>
-            </a:r>
-          </a:p>
-          <a:p xmlns:a="http://schemas.openxmlformats.org/drawingml/2006/main">
-            <a:r>
-              <a:t>설명: 외부 제품과 교환한 정보의 의미를 유지하고 다른 PC 앱과 함께 필요한 기능을 수행할 수 있어야 한다.</a:t>
-            </a:r>
-          </a:p>
-          <a:p xmlns:a="http://schemas.openxmlformats.org/drawingml/2006/main">
-            <a:r>
-              <a:t>목표: 연동 의미 보존율(%)·동시 사용 시 VIA와 타 앱의 성능 저하 한도 미정</a:t>
-            </a:r>
-          </a:p>
-          <a:p xmlns:a="http://schemas.openxmlformats.org/drawingml/2006/main">
-            <a:r>
-              <a:t>목표 근거: 연동 성공률과 공존 시 허용 저하 한도는 미확정이다.</a:t>
-            </a:r>
-          </a:p>
-          <a:p xmlns:a="http://schemas.openxmlformats.org/drawingml/2006/main">
-            <a:r>
-              <a:t>측정 초안: 같은 Agent/source capability에 대해 요청·질문·결과·취소·오류의 의미와 identity 보존을 시험한다; 별도 공존 시험에서는 타 앱의 고정 부하와 CPU·메모리·장치를 공유하며 VIA와 타 앱 각각의 기능 실패 및 반응/처리시간 변화를 기록한다.</a:t>
-            </a:r>
-          </a:p>
-          <a:p xmlns:a="http://schemas.openxmlformats.org/drawingml/2006/main">
-            <a:r>
-              <a:t>경계: 상호운용성과 공존성을 한 점수로 합치지 않는다. 외부 제품의 미지원 기능을 VIA의 성공으로 가정하지 않는다.</a:t>
-            </a:r>
-          </a:p>
-          <a:p xmlns:a="http://schemas.openxmlformats.org/drawingml/2006/main">
-            <a:r>
-              <a:t>품질 분류: Compatibility → Interoperability / Co-existence</a:t>
-            </a:r>
-          </a:p>
-          <a:p xmlns:a="http://schemas.openxmlformats.org/drawingml/2006/main">
-            <a:r>
-              <a:t/>
-            </a:r>
-          </a:p>
-          <a:p xmlns:a="http://schemas.openxmlformats.org/drawingml/2006/main">
-            <a:r>
-              <a:t>V-12 조작 용이성과 사용자 오류 방지</a:t>
-            </a:r>
-          </a:p>
-          <a:p xmlns:a="http://schemas.openxmlformats.org/drawingml/2006/main">
-            <a:r>
-              <a:t>설명: 사용자가 현재 상태와 제어 대상을 알아보고 잘못된 대상이나 범위를 조작하지 않도록 도와야 한다.</a:t>
-            </a:r>
-          </a:p>
-          <a:p xmlns:a="http://schemas.openxmlformats.org/drawingml/2006/main">
-            <a:r>
-              <a:t>목표: 조작 성공률(%)·단계(회) 미정 · 다른 업무 오실행 0건</a:t>
-            </a:r>
-          </a:p>
-          <a:p xmlns:a="http://schemas.openxmlformats.org/drawingml/2006/main">
-            <a:r>
-              <a:t>목표 근거: 조작 성공률·단계 수는 미확정이며 다른 업무 오실행 0건은 기존 action/access 규칙을 보존한다.</a:t>
-            </a:r>
-          </a:p>
-          <a:p xmlns:a="http://schemas.openxmlformats.org/drawingml/2006/main">
-            <a:r>
-              <a:t>측정 초안: 같은 사용자 시나리오에서 실제로 제시된 질문/대상, 현재 상태 이해, 원하는 동작의 성공과 단계 수를 확인한다; 잘못된 대상 선택이나 모호한 제어를 주입해 방지/확인 여부와 실제 다른 업무에 미친 영향을 별도로 기록한다.</a:t>
-            </a:r>
-          </a:p>
-          <a:p xmlns:a="http://schemas.openxmlformats.org/drawingml/2006/main">
-            <a:r>
-              <a:t>경계: 음성 출력 중단과 업무 취소를 구분한다. pending을 완료로 표시하지 않고 숨겨진 내부 focus를 사용자에게 제시된 질문으로 간주하지 않는다.</a:t>
-            </a:r>
-          </a:p>
-          <a:p xmlns:a="http://schemas.openxmlformats.org/drawingml/2006/main">
-            <a:r>
-              <a:t>품질 분류: Interaction capability → Operability / User error protection</a:t>
-            </a:r>
-          </a:p>
-          <a:p xmlns:a="http://schemas.openxmlformats.org/drawingml/2006/main">
-            <a:r>
-              <a:t/>
-            </a:r>
-          </a:p>
-          <a:p xmlns:a="http://schemas.openxmlformats.org/drawingml/2006/main">
-            <a:r>
-              <a:t>V-13 설치 용이성</a:t>
-            </a:r>
-          </a:p>
-          <a:p xmlns:a="http://schemas.openxmlformats.org/drawingml/2006/main">
-            <a:r>
-              <a:t>설명: 필요한 의존성을 설치·갱신·제거하고 부분 실패 뒤의 실행체와 자료를 확인해 복구하거나 정리할 수 있어야 한다.</a:t>
-            </a:r>
-          </a:p>
-          <a:p xmlns:a="http://schemas.openxmlformats.org/drawingml/2006/main">
-            <a:r>
-              <a:t>목표: 설치·갱신·제거 성공률(%)·단계(회)·시간(s)과 실패 정리 목표 미정</a:t>
-            </a:r>
-          </a:p>
-          <a:p xmlns:a="http://schemas.openxmlformats.org/drawingml/2006/main">
-            <a:r>
-              <a:t>목표 근거: 성공률·절차·시간과 잔여물 판정 기준은 미확정이다.</a:t>
-            </a:r>
-          </a:p>
-          <a:p xmlns:a="http://schemas.openxmlformats.org/drawingml/2006/main">
-            <a:r>
-              <a:t>측정 초안: 동일 PC/profile에서 신규 설치·갱신·제거와 단계별 부분 실패를 시험한다; runtime/helper/weights 의존성, 상태/schema migration, 사용자 절차·시간, 실패 식별과 복구/정리 결과 및 의도하지 않은 잔여 실행체·자료를 기록한다.</a:t>
-            </a:r>
-          </a:p>
-          <a:p xmlns:a="http://schemas.openxmlformats.org/drawingml/2006/main">
-            <a:r>
-              <a:t>경계: 내려받는 크기만으로 설치 용이성을 판단하지 않는다. 사용자가 의도적으로 보존한 자료와 제거 실패의 잔여물을 구분한다.</a:t>
-            </a:r>
-          </a:p>
-          <a:p xmlns:a="http://schemas.openxmlformats.org/drawingml/2006/main">
-            <a:r>
-              <a:t>품질 분류: Flexibility → Installability</a:t>
+              <a:t>S10: NIST, [SP 800-53 Rev. 5](https://doi.org/10.6028/NIST.SP.800-53r5), AC-3 및 AC-6</a:t>
+            </a:r>
+          </a:p>
+          <a:p xmlns:a="http://schemas.openxmlformats.org/drawingml/2006/main">
+            <a:r>
+              <a:t>S00: [VIA 대표 UC](../../architecture/05-representative-use-cases.md), [고정 범위](../../architecture/03-fixed-architecture-scope.md), [03-00 품질 시나리오](../../architecture/12-decisions/decision-packages/03-00-quality-scenarios.md)</a:t>
+            </a:r>
+          </a:p>
+          <a:p xmlns:a="http://schemas.openxmlformats.org/drawingml/2006/main">
+            <a:r>
+              <a:t/>
+            </a:r>
+          </a:p>
+          <a:p xmlns:a="http://schemas.openxmlformats.org/drawingml/2006/main">
+            <a:r>
+              <a:t>상세 측정 설계</a:t>
+            </a:r>
+          </a:p>
+          <a:p xmlns:a="http://schemas.openxmlformats.org/drawingml/2006/main">
+            <a:r>
+              <a:t># 목표 근거와 측정 설계</a:t>
+            </a:r>
+          </a:p>
+          <a:p xmlns:a="http://schemas.openxmlformats.org/drawingml/2006/main">
+            <a:r>
+              <a:t/>
+            </a:r>
+          </a:p>
+          <a:p xmlns:a="http://schemas.openxmlformats.org/drawingml/2006/main">
+            <a:r>
+              <a:t>작성일: 2026-10-06. 이 문서는 사용자의 리뷰를 반영한 **근거 기반 목표 제안**이다. VIA의 실측 결과나 동결된 측정 계약으로 해석하지 않는다.</a:t>
+            </a:r>
+          </a:p>
+          <a:p xmlns:a="http://schemas.openxmlformats.org/drawingml/2006/main">
+            <a:r>
+              <a:t/>
+            </a:r>
+          </a:p>
+          <a:p xmlns:a="http://schemas.openxmlformats.org/drawingml/2006/main">
+            <a:r>
+              <a:t>## 1. 발표 범위와 목표 설정 원칙</a:t>
+            </a:r>
+          </a:p>
+          <a:p xmlns:a="http://schemas.openxmlformats.org/drawingml/2006/main">
+            <a:r>
+              <a:t/>
+            </a:r>
+          </a:p>
+          <a:p xmlns:a="http://schemas.openxmlformats.org/drawingml/2006/main">
+            <a:r>
+              <a:t>V-01~10 중 기존 우선순위를 유지한 10개를 발표한다. V-08은 V-06보다 앞에 배치한다. 공동 순위 내부에는 추가 순위를 만들지 않는다. 각 항목은 하나의 품질 속성과 하나의 주지표만 가진다.</a:t>
+            </a:r>
+          </a:p>
+          <a:p xmlns:a="http://schemas.openxmlformats.org/drawingml/2006/main">
+            <a:r>
+              <a:t/>
+            </a:r>
+          </a:p>
+          <a:p xmlns:a="http://schemas.openxmlformats.org/drawingml/2006/main">
+            <a:r>
+              <a:t>V-11은 발표에서 제외하고, PC 공존 비용 중 메모리 부분만 V-06에 반영한다. 메모리 지표가 외부 시스템과의 상호운용성 전체를 평가하는 것은 아니다. V-12와 V-13도 현재 발표의 DP 연결이 약하다는 사용자 판단에 따라 제외한다. 원본 V 목록과 기존 Architecture 및 QA 계약은 그대로 보존한다.</a:t>
+            </a:r>
+          </a:p>
+          <a:p xmlns:a="http://schemas.openxmlformats.org/drawingml/2006/main">
+            <a:r>
+              <a:t/>
+            </a:r>
+          </a:p>
+          <a:p xmlns:a="http://schemas.openxmlformats.org/drawingml/2006/main">
+            <a:r>
+              <a:t>외부 논문의 결과를 VIA의 성능처럼 옮겨 적지 않는다. 각 목표는 아래에서 **출처가 실제로 말하는 사실**, **VIA의 목표로 선택한 이유**, **적용 한계**로 나눠 설명한다. 동일한 제품과 시험이 없는 항목에는 출처의 원칙이나 장치 사양을 바탕으로 VIA의 예산을 계산한다. 특히 90%, 3개, 16GB는 외부 문헌이 VIA에 직접 규정한 수치가 아니다.</a:t>
+            </a:r>
+          </a:p>
+          <a:p xmlns:a="http://schemas.openxmlformats.org/drawingml/2006/main">
+            <a:r>
+              <a:t/>
+            </a:r>
+          </a:p>
+          <a:p xmlns:a="http://schemas.openxmlformats.org/drawingml/2006/main">
+            <a:r>
+              <a:t>100%는 고정 계약의 완전 지원과 연구용 시험 기록의 전수 재구성을 뜻한다. 0건은 고정 권한 계약의 금지 사건 예산이다. 둘 다 미래의 모든 입력이나 모든 공격에 대한 보증을 뜻하지 않는다. 목표를 달성하지 못한 대안도 결과와 비용을 보존하며, 이 발표만으로 후보 탈락이나 승자를 결정하지 않는다.</a:t>
+            </a:r>
+          </a:p>
+          <a:p xmlns:a="http://schemas.openxmlformats.org/drawingml/2006/main">
+            <a:r>
+              <a:t/>
+            </a:r>
+          </a:p>
+          <a:p xmlns:a="http://schemas.openxmlformats.org/drawingml/2006/main">
+            <a:r>
+              <a:t>## 2. 공통 모집단과 시험 조건</a:t>
+            </a:r>
+          </a:p>
+          <a:p xmlns:a="http://schemas.openxmlformats.org/drawingml/2006/main">
+            <a:r>
+              <a:t/>
+            </a:r>
+          </a:p>
+          <a:p xmlns:a="http://schemas.openxmlformats.org/drawingml/2006/main">
+            <a:r>
+              <a:t>### 2.1 기능 모집단</a:t>
+            </a:r>
+          </a:p>
+          <a:p xmlns:a="http://schemas.openxmlformats.org/drawingml/2006/main">
+            <a:r>
+              <a:t/>
+            </a:r>
+          </a:p>
+          <a:p xmlns:a="http://schemas.openxmlformats.org/drawingml/2006/main">
+            <a:r>
+              <a:t>[대표 UC 원문](../../architecture/05-representative-use-cases.md)은 UC 18개와 필수 변형 94개를 포함한다. 기능 단위는 가장 구체적인 필수 변형으로 잡는다. 상위 UC를 다시 합산한 112개를 분모로 쓰면 동일 기능을 두 번 센다.</a:t>
+            </a:r>
+          </a:p>
+          <a:p xmlns:a="http://schemas.openxmlformats.org/drawingml/2006/main">
+            <a:r>
+              <a:t/>
+            </a:r>
+          </a:p>
+          <a:p xmlns:a="http://schemas.openxmlformats.org/drawingml/2006/main">
+            <a:r>
+              <a:t>| UC | 필수 변형 수 | UC | 필수 변형 수 | UC | 필수 변형 수 |</a:t>
+            </a:r>
+          </a:p>
+          <a:p xmlns:a="http://schemas.openxmlformats.org/drawingml/2006/main">
+            <a:r>
+              <a:t>| --- | ---: | --- | ---: | --- | ---: |</a:t>
+            </a:r>
+          </a:p>
+          <a:p xmlns:a="http://schemas.openxmlformats.org/drawingml/2006/main">
+            <a:r>
+              <a:t>| UC-01 | 4 | UC-07 | 5 | UC-13 | 6 |</a:t>
+            </a:r>
+          </a:p>
+          <a:p xmlns:a="http://schemas.openxmlformats.org/drawingml/2006/main">
+            <a:r>
+              <a:t>| UC-02 | 6 | UC-08 | 5 | UC-14 | 5 |</a:t>
+            </a:r>
+          </a:p>
+          <a:p xmlns:a="http://schemas.openxmlformats.org/drawingml/2006/main">
+            <a:r>
+              <a:t>| UC-03 | 6 | UC-09 | 5 | UC-15 | 5 |</a:t>
+            </a:r>
+          </a:p>
+          <a:p xmlns:a="http://schemas.openxmlformats.org/drawingml/2006/main">
+            <a:r>
+              <a:t>| UC-04 | 7 | UC-10 | 5 | UC-16 | 5 |</a:t>
+            </a:r>
+          </a:p>
+          <a:p xmlns:a="http://schemas.openxmlformats.org/drawingml/2006/main">
+            <a:r>
+              <a:t>| UC-05 | 4 | UC-11 | 5 | UC-17 | 5 |</a:t>
+            </a:r>
+          </a:p>
+          <a:p xmlns:a="http://schemas.openxmlformats.org/drawingml/2006/main">
+            <a:r>
+              <a:t>| UC-06 | 5 | UC-12 | 5 | UC-18 | 6 |</a:t>
+            </a:r>
+          </a:p>
+          <a:p xmlns:a="http://schemas.openxmlformats.org/drawingml/2006/main">
+            <a:r>
+              <a:t/>
+            </a:r>
+          </a:p>
+          <a:p xmlns:a="http://schemas.openxmlformats.org/drawingml/2006/main">
+            <a:r>
+              <a:t>[functional-coverage.json](functional-coverage.json)에 94개 ID를 고정한다. 각 변형을 구체적인 상황 5개로 만들고 각 상황을 4회 반복하여 **94 × 5 × 4 = 1,880회**를 제안한다. 5개는 정답이 같은 단순 문장 복사 대신 표현, 참조 대상, 업무 이력, 화면 상황과 사건 순서를 바꾸되 해당 변형의 필수 동작을 유지한다. 변형 자체가 음성 전용이면 텍스트 사례를 억지로 추가하지 않는다. 오류나 예외가 원래 변형이면 기대되는 거절 또는 보류를 정답으로 정한다.</a:t>
+            </a:r>
+          </a:p>
+          <a:p xmlns:a="http://schemas.openxmlformats.org/drawingml/2006/main">
+            <a:r>
+              <a:t/>
+            </a:r>
+          </a:p>
+          <a:p xmlns:a="http://schemas.openxmlformats.org/drawingml/2006/main">
+            <a:r>
+              <a:t>다섯 사례와 네 반복은 시험 규모 선택이며 논문이 규정한 값이 아니다. 동일 사례를 무작위 순서와 같은 seed 집합으로 모든 후보에 적용한다. 분석 시 94개 변형이 동일한 가중치를 갖는다. 아직 구체 입력 fixture나 실행 runner는 만들지 않았으며, JSON은 시험 목록 설계이다.</a:t>
+            </a:r>
+          </a:p>
+          <a:p xmlns:a="http://schemas.openxmlformats.org/drawingml/2006/main">
+            <a:r>
+              <a:t/>
+            </a:r>
+          </a:p>
+          <a:p xmlns:a="http://schemas.openxmlformats.org/drawingml/2006/main">
+            <a:r>
+              <a:t>한 시험은 하나의 사용자 목표를 위한 상호작용 전체이다. 정정, 질문 답변, 후속 제어가 있더라도 같은 목표의 시험에 포함한다. 모델 호출, tool 호출이나 하위 Task를 별도 성공 표본으로 늘리지 않는다. 사용자가 독립적인 새 목표를 자발적으로 추가하면 새 시험으로 구분한다.</a:t>
+            </a:r>
+          </a:p>
+          <a:p xmlns:a="http://schemas.openxmlformats.org/drawingml/2006/main">
+            <a:r>
+              <a:t/>
+            </a:r>
+          </a:p>
+          <a:p xmlns:a="http://schemas.openxmlformats.org/drawingml/2006/main">
+            <a:r>
+              <a:t>### 2.2 정답과 외부 경계</a:t>
+            </a:r>
+          </a:p>
+          <a:p xmlns:a="http://schemas.openxmlformats.org/drawingml/2006/main">
+            <a:r>
+              <a:t/>
+            </a:r>
+          </a:p>
+          <a:p xmlns:a="http://schemas.openxmlformats.org/drawingml/2006/main">
+            <a:r>
+              <a:t>각 사례에는 시험 전 정답 manifest를 작성한다. 필드는 기대 의도, 대상, Conversation과 Task 연결, 요청 관계, 수정 범위, 허용 처리, 상태 변화, 필요한 결과 전달이다. 적용하지 않는 필드는 실행 전에 이유를 명시한다. 두 검토자가 기대 상태를 작성하고 불일치를 해결한 뒤 후보에 동일하게 적용한다. 후보가 내놓은 문장을 정답으로 삼지 않는다.</a:t>
+            </a:r>
+          </a:p>
+          <a:p xmlns:a="http://schemas.openxmlformats.org/drawingml/2006/main">
+            <a:r>
+              <a:t/>
+            </a:r>
+          </a:p>
+          <a:p xmlns:a="http://schemas.openxmlformats.org/drawingml/2006/main">
+            <a:r>
+              <a:t>Downstream Agent는 동일한 capability와 성공, 실패, 지연, 중복 알림 script를 제공하는 결정적 simulator로 고정한다. VIA가 받는 외부 결과와 실행 사실을 oracle에 기록한다. Agent 내부의 도메인 답변 품질을 VIA 성공률에 섞지 않는다. VIA의 잘못된 위임, 업무 연결, 상태 판단이나 결과 전달은 포함한다.</a:t>
+            </a:r>
+          </a:p>
+          <a:p xmlns:a="http://schemas.openxmlformats.org/drawingml/2006/main">
+            <a:r>
+              <a:t/>
+            </a:r>
+          </a:p>
+          <a:p xmlns:a="http://schemas.openxmlformats.org/drawingml/2006/main">
+            <a:r>
+              <a:t>시험 timeout은 최종 외부 사건 후 60초의 VIA 책임 시간으로 제안한다. 시간 목표 1초 또는 10초와 구분되는 관측 종료 조건이다. timeout과 crash도 전체 목록에 남긴다. 미지원, 미확인, 로그 누락을 성공 표본에서 제거하지 않는다. 실제 평가 전에 사례 manifest, seed, timeout, 환경 및 집계를 함께 확정한다.</a:t>
+            </a:r>
+          </a:p>
+          <a:p xmlns:a="http://schemas.openxmlformats.org/drawingml/2006/main">
+            <a:r>
+              <a:t/>
+            </a:r>
+          </a:p>
+          <a:p xmlns:a="http://schemas.openxmlformats.org/drawingml/2006/main">
+            <a:r>
+              <a:t>### 2.3 장치와 부하</a:t>
+            </a:r>
+          </a:p>
+          <a:p xmlns:a="http://schemas.openxmlformats.org/drawingml/2006/main">
+            <a:r>
+              <a:t/>
+            </a:r>
+          </a:p>
+          <a:p xmlns:a="http://schemas.openxmlformats.org/drawingml/2006/main">
+            <a:r>
+              <a:t>삼성 Galaxy Book6 Ultra NP960UJH-XG3IN의 32GB RAM, RTX 5070 Laptop 전용 GPU 8GB, Windows 11 구성을 발표의 장치 예산 기준으로 삼는다 [S06]. 실제 시험 장치는 모델명, BIOS, OS build, driver, 전력 모드, CPU, GPU, 저장장치와 사용 가능한 물리 메모리를 별도 기록한다. 다른 장치의 결과를 같은 장치 실적으로 표시하지 않는다.</a:t>
+            </a:r>
+          </a:p>
+          <a:p xmlns:a="http://schemas.openxmlformats.org/drawingml/2006/main">
+            <a:r>
+              <a:t/>
+            </a:r>
+          </a:p>
+          <a:p xmlns:a="http://schemas.openxmlformats.org/drawingml/2006/main">
+            <a:r>
+              <a:t>Omni와 Streaming ASR 및 모든 helper의 버전, 파라미터 수, 정밀도, 실제 파일 크기와 loaded bytes를 기록한다. 하나의 공유 Omni 가중치를 전제하고 역할별 Context와 KV의 실제 비용을 포함한다. 모델 호출량이나 의미 지원 범위를 줄여 메모리만 통과한 구성은 V-01과 V-03의 결과에서 드러나야 한다.</a:t>
+            </a:r>
+          </a:p>
+          <a:p xmlns:a="http://schemas.openxmlformats.org/drawingml/2006/main">
+            <a:r>
+              <a:t/>
+            </a:r>
+          </a:p>
+          <a:p xmlns:a="http://schemas.openxmlformats.org/drawingml/2006/main">
+            <a:r>
+              <a:t>시험 부하는 한 개의 활성 대화, 미완료 Task 네 개, 동시에 진행하는 외부 실행 두 개를 기본 profile로 제안한다. 이는 현재 측정된 수용량이 아닌 명시적인 비교 조건이다. 더 큰 부하는 별도 민감도 시험으로 공개한다. 입력 시간축과 최대 retained Context, KV, 화면 근거, 오디오 버퍼의 설정을 manifest에 적어 임의의 cache 한도 차이가 결과를 결정하지 않도록 한다.</a:t>
+            </a:r>
+          </a:p>
+          <a:p xmlns:a="http://schemas.openxmlformats.org/drawingml/2006/main">
+            <a:r>
+              <a:t/>
+            </a:r>
+          </a:p>
+          <a:p xmlns:a="http://schemas.openxmlformats.org/drawingml/2006/main">
+            <a:r>
+              <a:t>Cold 시작, warm 요청, 연속 정정, Task 전환, 음성 출력 중 새 입력, 재접속 및 장시간 background 상태를 분리해서 표시한다. 전체 평균만 공개해 어려운 조건을 숨기지 않는다.</a:t>
+            </a:r>
+          </a:p>
+          <a:p xmlns:a="http://schemas.openxmlformats.org/drawingml/2006/main">
+            <a:r>
+              <a:t/>
+            </a:r>
+          </a:p>
+          <a:p xmlns:a="http://schemas.openxmlformats.org/drawingml/2006/main">
+            <a:r>
+              <a:t>## 3. V-01 기능 정확성</a:t>
+            </a:r>
+          </a:p>
+          <a:p xmlns:a="http://schemas.openxmlformats.org/drawingml/2006/main">
+            <a:r>
+              <a:t/>
+            </a:r>
+          </a:p>
+          <a:p xmlns:a="http://schemas.openxmlformats.org/drawingml/2006/main">
+            <a:r>
+              <a:t>**설명:** 사용자 요청을 의도에 맞게 정확히 처리해야 한다.</a:t>
+            </a:r>
+          </a:p>
+          <a:p xmlns:a="http://schemas.openxmlformats.org/drawingml/2006/main">
+            <a:r>
+              <a:t/>
+            </a:r>
+          </a:p>
+          <a:p xmlns:a="http://schemas.openxmlformats.org/drawingml/2006/main">
+            <a:r>
+              <a:t>**단일 목표:** 정확 처리율 90% 이상.</a:t>
+            </a:r>
+          </a:p>
+          <a:p xmlns:a="http://schemas.openxmlformats.org/drawingml/2006/main">
+            <a:r>
+              <a:t/>
+            </a:r>
+          </a:p>
+          <a:p xmlns:a="http://schemas.openxmlformats.org/drawingml/2006/main">
+            <a:r>
+              <a:t>**근거:** Joint BERT 연구의 SNIPS 시험은 문장 전체의 의도와 slot이 모두 맞는 semantic frame accuracy 92.8%를 보고한다 [S01]. slot F1 97.0%나 intent 정확도 98.6%를 전체 요청 성공률처럼 쓰지 않는다. VIA의 첫 통합 평가에서는 더 복잡한 화면과 업무 상태 판단까지 포함하므로 이 문장 단위 결과를 그대로 달성했다고 가정하지 않고, 가까운 정수 10% 단위의 보수적인 목표인 90%를 제안한다. 이는 허용 오류 예산이 전체 시험의 10%라는 뜻이다.</a:t>
+            </a:r>
+          </a:p>
+          <a:p xmlns:a="http://schemas.openxmlformats.org/drawingml/2006/main">
+            <a:r>
+              <a:t/>
+            </a:r>
+          </a:p>
+          <a:p xmlns:a="http://schemas.openxmlformats.org/drawingml/2006/main">
+            <a:r>
+              <a:t>92.8%와 VIA 90%는 서로 다른 모집단이다. 비교 실적이나 최종 제품 출시 기준으로 주장할 수 없다. tau-bench가 대화 종료 후 실제 DB 상태를 정답 상태와 대조하는 방법은 전체 요청의 성공 판정에 참고한다 [S02]. 그 benchmark에서 보고한 낮은 Agent 성공률은 VIA의 90%를 증명하거나 반박하는 직접 비교 수치가 아니다.</a:t>
+            </a:r>
+          </a:p>
+          <a:p xmlns:a="http://schemas.openxmlformats.org/drawingml/2006/main">
+            <a:r>
+              <a:t/>
+            </a:r>
+          </a:p>
+          <a:p xmlns:a="http://schemas.openxmlformats.org/drawingml/2006/main">
+            <a:r>
+              <a:t>**분모와 식:**</a:t>
+            </a:r>
+          </a:p>
+          <a:p xmlns:a="http://schemas.openxmlformats.org/drawingml/2006/main">
+            <a:r>
+              <a:t/>
+            </a:r>
+          </a:p>
+          <a:p xmlns:a="http://schemas.openxmlformats.org/drawingml/2006/main">
+            <a:r>
+              <a:t>```text</a:t>
+            </a:r>
+          </a:p>
+          <a:p xmlns:a="http://schemas.openxmlformats.org/drawingml/2006/main">
+            <a:r>
+              <a:t>N = 94개 필수 변형 × 5개 구체 사례 × 4회 반복 = 1,880회</a:t>
+            </a:r>
+          </a:p>
+          <a:p xmlns:a="http://schemas.openxmlformats.org/drawingml/2006/main">
+            <a:r>
+              <a:t>success(i) = 사례 i의 적용 가능한 필수 oracle 판정을 모두 만족하면 1, 아니면 0</a:t>
+            </a:r>
+          </a:p>
+          <a:p xmlns:a="http://schemas.openxmlformats.org/drawingml/2006/main">
+            <a:r>
+              <a:t>정확 처리율 = 100 × Σ success(i) / 1,880</a:t>
+            </a:r>
+          </a:p>
+          <a:p xmlns:a="http://schemas.openxmlformats.org/drawingml/2006/main">
+            <a:r>
+              <a:t>목표 성공 수 = 1,692회 이상</a:t>
+            </a:r>
+          </a:p>
+          <a:p xmlns:a="http://schemas.openxmlformats.org/drawingml/2006/main">
+            <a:r>
+              <a:t>```</a:t>
+            </a:r>
+          </a:p>
+          <a:p xmlns:a="http://schemas.openxmlformats.org/drawingml/2006/main">
+            <a:r>
+              <a:t/>
+            </a:r>
+          </a:p>
+          <a:p xmlns:a="http://schemas.openxmlformats.org/drawingml/2006/main">
+            <a:r>
+              <a:t>미지원도 분모에 포함한다. 원래 예외 시험에서 올바른 보류나 거절은 성공이지만, 기능을 지원하지 못해 정상 요청을 거절한 경우는 실패이다. 정확한 안내 문구만 내놓고 필요한 처리를 수행하지 않으면 성공으로 세지 않는다.</a:t>
+            </a:r>
+          </a:p>
+          <a:p xmlns:a="http://schemas.openxmlformats.org/drawingml/2006/main">
+            <a:r>
+              <a:t/>
+            </a:r>
+          </a:p>
+          <a:p xmlns:a="http://schemas.openxmlformats.org/drawingml/2006/main">
+            <a:r>
+              <a:t>시험 전 manifest와 실제 semantic output, 채택된 상태, 명령, Agent 사실 및 사용자에게 전달한 결과를 자동 대조한다. 동등한 표현의 의미 판정이 필요하면 후보를 가린 검토자가 rubric으로 판정한다. 전체 판정과 필드별 오류를 모두 보존한다. 모델을 judge로 사용할 때도 사람과 일치도를 먼저 검증하며 judge의 답을 무검토 정답으로 삼지 않는다.</a:t>
+            </a:r>
+          </a:p>
+          <a:p xmlns:a="http://schemas.openxmlformats.org/drawingml/2006/main">
+            <a:r>
+              <a:t/>
+            </a:r>
+          </a:p>
+          <a:p xmlns:a="http://schemas.openxmlformats.org/drawingml/2006/main">
+            <a:r>
+              <a:t>90%는 이 비율 하나의 목표이다. 다른 업무 오실행과 중복 실행을 별도의 0건 목표로 이 행에 넣지 않는다. 이런 사건은 해당 시험의 정확성 실패와 오류 유형으로 남기며 기존 실행 안전 계약도 유지한다. 반복은 독립 사용자 표본이 아니므로 신뢰구간은 470개 구체 사례를 cluster로 묶어 추정한다.</a:t>
+            </a:r>
+          </a:p>
+          <a:p xmlns:a="http://schemas.openxmlformats.org/drawingml/2006/main">
+            <a:r>
+              <a:t/>
+            </a:r>
+          </a:p>
+          <a:p xmlns:a="http://schemas.openxmlformats.org/drawingml/2006/main">
+            <a:r>
+              <a:t>## 4. V-02 기능 적절성</a:t>
+            </a:r>
+          </a:p>
+          <a:p xmlns:a="http://schemas.openxmlformats.org/drawingml/2006/main">
+            <a:r>
+              <a:t/>
+            </a:r>
+          </a:p>
+          <a:p xmlns:a="http://schemas.openxmlformats.org/drawingml/2006/main">
+            <a:r>
+              <a:t>**설명:** 사용자가 적은 추가 입력으로 요청을 마칠 수 있어야 한다.</a:t>
+            </a:r>
+          </a:p>
+          <a:p xmlns:a="http://schemas.openxmlformats.org/drawingml/2006/main">
+            <a:r>
+              <a:t/>
+            </a:r>
+          </a:p>
+          <a:p xmlns:a="http://schemas.openxmlformats.org/drawingml/2006/main">
+            <a:r>
+              <a:t>**단일 목표:** 평균 사용자 개입 1회/요청 이하.</a:t>
+            </a:r>
+          </a:p>
+          <a:p xmlns:a="http://schemas.openxmlformats.org/drawingml/2006/main">
+            <a:r>
+              <a:t/>
+            </a:r>
+          </a:p>
+          <a:p xmlns:a="http://schemas.openxmlformats.org/drawingml/2006/main">
+            <a:r>
+              <a:t>**근거:** 시각 질의의 정보가 부족할 때 CoA는 필요한 경우 하나의 집중된 질문을 하고 답변을 반영하는 접근을 사용한다 [S03]. VIA도 근거를 먼저 활용하고 한 번의 답변에 필요한 정보를 모으는 상호작용을 목표로 삼아 추가 개입 예산을 1회로 제안한다. 이 연구는 VIA의 모든 요청이 질문 하나로 해결된다는 실증 근거가 아니며, VIA의 권한 승인 비용도 아래 횟수에 포함한다.</a:t>
+            </a:r>
+          </a:p>
+          <a:p xmlns:a="http://schemas.openxmlformats.org/drawingml/2006/main">
+            <a:r>
+              <a:t/>
+            </a:r>
+          </a:p>
+          <a:p xmlns:a="http://schemas.openxmlformats.org/drawingml/2006/main">
+            <a:r>
+              <a:t>**분모와 식:** 같은 1,880회 전체 시험에 대해, 최초 목표 입력 이후 VIA가 요구한 추가 사용자 입력을 센다.</a:t>
+            </a:r>
+          </a:p>
+          <a:p xmlns:a="http://schemas.openxmlformats.org/drawingml/2006/main">
+            <a:r>
+              <a:t/>
+            </a:r>
+          </a:p>
+          <a:p xmlns:a="http://schemas.openxmlformats.org/drawingml/2006/main">
+            <a:r>
+              <a:t>```text</a:t>
+            </a:r>
+          </a:p>
+          <a:p xmlns:a="http://schemas.openxmlformats.org/drawingml/2006/main">
+            <a:r>
+              <a:t>u(i) = VIA가 요구한 추가 답변, 선택, 승인 또는 수동 우회 횟수</a:t>
+            </a:r>
+          </a:p>
+          <a:p xmlns:a="http://schemas.openxmlformats.org/drawingml/2006/main">
+            <a:r>
+              <a:t>사용자 개입 횟수 = Σ u(i) / 1,880</a:t>
+            </a:r>
+          </a:p>
+          <a:p xmlns:a="http://schemas.openxmlformats.org/drawingml/2006/main">
+            <a:r>
+              <a:t>```</a:t>
+            </a:r>
+          </a:p>
+          <a:p xmlns:a="http://schemas.openxmlformats.org/drawingml/2006/main">
+            <a:r>
+              <a:t/>
+            </a:r>
+          </a:p>
+          <a:p xmlns:a="http://schemas.openxmlformats.org/drawingml/2006/main">
+            <a:r>
+              <a:t>하나의 질문에 음성과 선택 UI를 함께 사용해 답하면 하나의 응답 episode로 센다. VIA가 다시 질문하여 새 답변을 받으면 한 번을 더 센다. 자동 정보 읽기와 시스템 내부 재시도는 사용자 개입이 아니다. 자발적 새 목표는 최초 입력으로 분리하지만, 기능 부족 때문에 사용자가 수동으로 앱을 조작하는 우회는 포함한다.</a:t>
+            </a:r>
+          </a:p>
+          <a:p xmlns:a="http://schemas.openxmlformats.org/drawingml/2006/main">
+            <a:r>
+              <a:t/>
+            </a:r>
+          </a:p>
+          <a:p xmlns:a="http://schemas.openxmlformats.org/drawingml/2006/main">
+            <a:r>
+              <a:t>시험 사용자는 script에 정해진 최소 답변을 제공한다. 실패 응답 뒤 원래 목표를 다시 요청하거나 앱에서 수동으로 마무리하는 동작도 script에 넣고 실제 개입으로 센다. 필요 권한을 생략하거나 불확실한 대상에 대해 추측해 개입을 줄인 시험은 V-01이나 V-10에서 실패한다. 미완료 시험도 당시까지의 실제 횟수로 분모에 남기고 성공 여부에 따른 개입 분포를 함께 공개한다. 아무것도 수행하지 않는 구현의 0회는 낮은 부담의 근거로 해석하지 않는다. 이 지표는 V-01과 V-03의 기능 결과와 함께 평가하며 성공 시험만 뽑은 평균을 쓰지 않는다.</a:t>
+            </a:r>
+          </a:p>
+          <a:p xmlns:a="http://schemas.openxmlformats.org/drawingml/2006/main">
+            <a:r>
+              <a:t/>
+            </a:r>
+          </a:p>
+          <a:p xmlns:a="http://schemas.openxmlformats.org/drawingml/2006/main">
+            <a:r>
+              <a:t>## 5. V-03 기능 완전성</a:t>
+            </a:r>
+          </a:p>
+          <a:p xmlns:a="http://schemas.openxmlformats.org/drawingml/2006/main">
+            <a:r>
+              <a:t/>
+            </a:r>
+          </a:p>
+          <a:p xmlns:a="http://schemas.openxmlformats.org/drawingml/2006/main">
+            <a:r>
+              <a:t>**설명:** 고정된 사용 시나리오의 필수 기능을 모두 지원해야 한다.</a:t>
+            </a:r>
+          </a:p>
+          <a:p xmlns:a="http://schemas.openxmlformats.org/drawingml/2006/main">
+            <a:r>
+              <a:t/>
+            </a:r>
+          </a:p>
+          <a:p xmlns:a="http://schemas.openxmlformats.org/drawingml/2006/main">
+            <a:r>
+              <a:t>**단일 목표:** 기능 지원 달성률 100%.</a:t>
+            </a:r>
+          </a:p>
+          <a:p xmlns:a="http://schemas.openxmlformats.org/drawingml/2006/main">
+            <a:r>
+              <a:t/>
+            </a:r>
+          </a:p>
+          <a:p xmlns:a="http://schemas.openxmlformats.org/drawingml/2006/main">
+            <a:r>
+              <a:t>**근거:** 94개 필수 변형은 제품 기능 계약 자체이다 [S00]. 선택적인 benchmark 문항이 아니므로 완전 지원의 목표는 94개 모두를 지원하는 100%로 정한다. 이 수치는 문헌의 통계적 정확도에서 가져오지 않는다.</a:t>
+            </a:r>
+          </a:p>
+          <a:p xmlns:a="http://schemas.openxmlformats.org/drawingml/2006/main">
+            <a:r>
+              <a:t/>
+            </a:r>
+          </a:p>
+          <a:p xmlns:a="http://schemas.openxmlformats.org/drawingml/2006/main">
+            <a:r>
+              <a:t>**분모와 식:**</a:t>
+            </a:r>
+          </a:p>
+          <a:p xmlns:a="http://schemas.openxmlformats.org/drawingml/2006/main">
+            <a:r>
+              <a:t/>
+            </a:r>
+          </a:p>
+          <a:p xmlns:a="http://schemas.openxmlformats.org/drawingml/2006/main">
+            <a:r>
+              <a:t>```text</a:t>
+            </a:r>
+          </a:p>
+          <a:p xmlns:a="http://schemas.openxmlformats.org/drawingml/2006/main">
+            <a:r>
+              <a:t>support(v) = 변형 v의 필수 동작 전체를 구현하고 검증 증거를 제공하면 1, 아니면 0</a:t>
+            </a:r>
+          </a:p>
+          <a:p xmlns:a="http://schemas.openxmlformats.org/drawingml/2006/main">
+            <a:r>
+              <a:t>기능 지원 달성률 = 100 × Σ support(v) / 94</a:t>
+            </a:r>
+          </a:p>
+          <a:p xmlns:a="http://schemas.openxmlformats.org/drawingml/2006/main">
+            <a:r>
+              <a:t>```</a:t>
+            </a:r>
+          </a:p>
+          <a:p xmlns:a="http://schemas.openxmlformats.org/drawingml/2006/main">
+            <a:r>
+              <a:t/>
+            </a:r>
+          </a:p>
+          <a:p xmlns:a="http://schemas.openxmlformats.org/drawingml/2006/main">
+            <a:r>
+              <a:t>각 변형에는 입력, 필요한 VIA 처리, 정상 종료, 변형 고유의 예외 및 책임 경계를 체크리스트로 작성한다. 구현 경로와 실제 동작 witness를 대조한다. 모든 구체 사례의 필수 capability를 입증해야 완전 지원으로 표시한다. 기능이 있지만 일부 실행에서 발생한 확률적 의미 오류는 V-01에서 집계하며 그 사실만으로 capability를 미구현이라고 바꾸지 않는다. 반대로 지원하지 않는 관계를 사용자가 수동으로 해결하면 부분 지원이다.</a:t>
+            </a:r>
+          </a:p>
+          <a:p xmlns:a="http://schemas.openxmlformats.org/drawingml/2006/main">
+            <a:r>
+              <a:t/>
+            </a:r>
+          </a:p>
+          <a:p xmlns:a="http://schemas.openxmlformats.org/drawingml/2006/main">
+            <a:r>
+              <a:t>부분 지원, 미지원, 미확인은 분모에 남고 분자에는 들어가지 않는다. 표에는 한 비율만 표시하고 상세 support ledger에는 제한과 증거 링크를 남긴다. 설계 문서만 검토한 시점에는 '설계상 지원'을 별도 표시하며 구현 지원률 결과를 만들지 않는다. 현재 실제 support ledger와 실행 결과는 없다.</a:t>
+            </a:r>
+          </a:p>
+          <a:p xmlns:a="http://schemas.openxmlformats.org/drawingml/2006/main">
+            <a:r>
+              <a:t/>
+            </a:r>
+          </a:p>
+          <a:p xmlns:a="http://schemas.openxmlformats.org/drawingml/2006/main">
+            <a:r>
+              <a:t>## 6. V-04 응답 신속성</a:t>
+            </a:r>
+          </a:p>
+          <a:p xmlns:a="http://schemas.openxmlformats.org/drawingml/2006/main">
+            <a:r>
+              <a:t/>
+            </a:r>
+          </a:p>
+          <a:p xmlns:a="http://schemas.openxmlformats.org/drawingml/2006/main">
+            <a:r>
+              <a:t>**설명:** 사용자 입력에 대한 유효한 반응이 빠르게 나타나야 한다.</a:t>
+            </a:r>
+          </a:p>
+          <a:p xmlns:a="http://schemas.openxmlformats.org/drawingml/2006/main">
+            <a:r>
+              <a:t/>
+            </a:r>
+          </a:p>
+          <a:p xmlns:a="http://schemas.openxmlformats.org/drawingml/2006/main">
+            <a:r>
+              <a:t>**단일 목표:** 종류별 p95 반응 지연의 최댓값 1초 이하.</a:t>
+            </a:r>
+          </a:p>
+          <a:p xmlns:a="http://schemas.openxmlformats.org/drawingml/2006/main">
+            <a:r>
+              <a:t/>
+            </a:r>
+          </a:p>
+          <a:p xmlns:a="http://schemas.openxmlformats.org/drawingml/2006/main">
+            <a:r>
+              <a:t>**근거:** Nielsen은 상호작용의 반응시간 기준으로 0.1초, 1초, 10초를 제시한다 [S04]. VIA의 첫 유효 반응에는 1초 기준을 선택한다. p95와 종류별 최댓값은 VIA의 시험 집계 선택이며 Nielsen의 원문 통계 정의가 아니다.</a:t>
+            </a:r>
+          </a:p>
+          <a:p xmlns:a="http://schemas.openxmlformats.org/drawingml/2006/main">
+            <a:r>
+              <a:t/>
+            </a:r>
+          </a:p>
+          <a:p xmlns:a="http://schemas.openxmlformats.org/drawingml/2006/main">
+            <a:r>
+              <a:t>| 종류 | 실제 시작 사건 | 실제 종료 사건 |</a:t>
+            </a:r>
+          </a:p>
+          <a:p xmlns:a="http://schemas.openxmlformats.org/drawingml/2006/main">
+            <a:r>
+              <a:t>| --- | --- | --- |</a:t>
+            </a:r>
+          </a:p>
+          <a:p xmlns:a="http://schemas.openxmlformats.org/drawingml/2006/main">
+            <a:r>
+              <a:t>| 요청 반응 | 실제 발화 종료 또는 텍스트 제출 | 해당 요청의 의미 있는 응답이 표시되거나 첫 유효 음성이 재생됨 |</a:t>
+            </a:r>
+          </a:p>
+          <a:p xmlns:a="http://schemas.openxmlformats.org/drawingml/2006/main">
+            <a:r>
+              <a:t>| 상태 전달 | 외부 상태가 VIA에게 이용 가능해진 source 사건 | 그 사실을 반영한 상태가 사용자에게 표시됨 |</a:t>
+            </a:r>
+          </a:p>
+          <a:p xmlns:a="http://schemas.openxmlformats.org/drawingml/2006/main">
+            <a:r>
+              <a:t>| 업무 제어 | 사용자 제어 명령의 실제 입력 | VIA가 제어를 적용하고 그 사실을 확인할 수 있음 |</a:t>
+            </a:r>
+          </a:p>
+          <a:p xmlns:a="http://schemas.openxmlformats.org/drawingml/2006/main">
+            <a:r>
+              <a:t>| 음성 중단 | 사용자의 새 발화가 실제 시작함 | 이전 음성의 마지막 출력 sample |</a:t>
+            </a:r>
+          </a:p>
+          <a:p xmlns:a="http://schemas.openxmlformats.org/drawingml/2006/main">
+            <a:r>
+              <a:t/>
+            </a:r>
+          </a:p>
+          <a:p xmlns:a="http://schemas.openxmlformats.org/drawingml/2006/main">
+            <a:r>
+              <a:t>업무 취소에 Agent의 실행 중단 확인이 필요하면 상태 전달 지연의 시작은 실제 외부 확인이다. 사용자 요청부터 외부 확인까지의 실제 체감 시간도 함께 공개한다. 음성 출력 중단을 업무 취소 완료로 세지 않는다. 접수 인사, 의미 없는 filler, spinner, enqueue와 model 내부 완료는 종료점이 아니다.</a:t>
+            </a:r>
+          </a:p>
+          <a:p xmlns:a="http://schemas.openxmlformats.org/drawingml/2006/main">
+            <a:r>
+              <a:t/>
+            </a:r>
+          </a:p>
+          <a:p xmlns:a="http://schemas.openxmlformats.org/drawingml/2006/main">
+            <a:r>
+              <a:t>동일 monotonic clock으로 시작 사건과 실제 출력 사건을 수집한다. 음성은 녹음된 입력 기준점과 OS 오디오 loopback을 정렬하고 장치 오차를 기록한다. 종류마다 최소 20회 이상 관측하며 1,880회 시험에서 해당하는 모든 사건을 포함한다. 종류별 nearest-rank p95를 구한 뒤 가장 큰 값을 대표값으로 한다. 사건이 발생했는데 유효 반응이 없으면 지연을 무한대로 기록한다. Cold와 warm 결과를 각각 공개하고 긴 지연을 pooled 평균으로 숨기지 않는다.</a:t>
+            </a:r>
+          </a:p>
+          <a:p xmlns:a="http://schemas.openxmlformats.org/drawingml/2006/main">
+            <a:r>
+              <a:t/>
+            </a:r>
+          </a:p>
+          <a:p xmlns:a="http://schemas.openxmlformats.org/drawingml/2006/main">
+            <a:r>
+              <a:t>## 7. V-05 요청 완료 신속성</a:t>
+            </a:r>
+          </a:p>
+          <a:p xmlns:a="http://schemas.openxmlformats.org/drawingml/2006/main">
+            <a:r>
+              <a:t/>
+            </a:r>
+          </a:p>
+          <a:p xmlns:a="http://schemas.openxmlformats.org/drawingml/2006/main">
+            <a:r>
+              <a:t>**설명:** 필요한 최종 결과를 사용자에게 빠르게 전달해야 한다.</a:t>
+            </a:r>
+          </a:p>
+          <a:p xmlns:a="http://schemas.openxmlformats.org/drawingml/2006/main">
+            <a:r>
+              <a:t/>
+            </a:r>
+          </a:p>
+          <a:p xmlns:a="http://schemas.openxmlformats.org/drawingml/2006/main">
+            <a:r>
+              <a:t>**단일 목표:** 처리 경로별 p95 VIA 완료시간의 최댓값 10초 이하.</a:t>
+            </a:r>
+          </a:p>
+          <a:p xmlns:a="http://schemas.openxmlformats.org/drawingml/2006/main">
+            <a:r>
+              <a:t/>
+            </a:r>
+          </a:p>
+          <a:p xmlns:a="http://schemas.openxmlformats.org/drawingml/2006/main">
+            <a:r>
+              <a:t>**근거:** Nielsen의 10초 기준은 사용자가 상호작용에 주의를 유지하는 상한을 제안한다 [S04]. 이 값을 VIA 책임 처리의 완료 예산으로 적용한다. 외부 Agent의 긴 도메인 작업을 포함한 전체 업무가 10초에 끝난다는 뜻은 아니다. 따라서 발표 표에도 'VIA 완료시간'이라고 명시한다.</a:t>
+            </a:r>
+          </a:p>
+          <a:p xmlns:a="http://schemas.openxmlformats.org/drawingml/2006/main">
+            <a:r>
+              <a:t/>
+            </a:r>
+          </a:p>
+          <a:p xmlns:a="http://schemas.openxmlformats.org/drawingml/2006/main">
+            <a:r>
+              <a:t>직접 응답은 VIA가 결과를 만드는 경로이고 위임은 Downstream Agent가 실제 업무를 수행하는 경로이다. **의존 관계**는 앞 결과를 다음 작업의 입력으로 쓰는 관계이다. 예를 들어 보고서 결과로 발표 슬라이드를 만드는 경우이며, 직접 응답과 위임 모두에 생길 수 있다. 세 번째 상호 배타적인 처리 경로로 분류하지 않는다.</a:t>
+            </a:r>
+          </a:p>
+          <a:p xmlns:a="http://schemas.openxmlformats.org/drawingml/2006/main">
+            <a:r>
+              <a:t/>
+            </a:r>
+          </a:p>
+          <a:p xmlns:a="http://schemas.openxmlformats.org/drawingml/2006/main">
+            <a:r>
+              <a:t>측정은 직접 응답과 위임을 각각 의존 관계 없음과 있음으로 나눈 네 층으로 수행한다. 모든 층에 같은 10초 목표를 적용하고 최악 층의 p95를 보고한다. 층별 별도 목표 세 개를 만들면 동일한 VIA 완료 예산의 의미가 흐려지므로 채택하지 않는다.</a:t>
+            </a:r>
+          </a:p>
+          <a:p xmlns:a="http://schemas.openxmlformats.org/drawingml/2006/main">
+            <a:r>
+              <a:t/>
+            </a:r>
+          </a:p>
+          <a:p xmlns:a="http://schemas.openxmlformats.org/drawingml/2006/main">
+            <a:r>
+              <a:t>**VIA 책임 시간 계산:** 최초 입력부터 필수 최종 전달까지의 사건 의존 그래프를 만든다. 해석, 근거 읽기, 자원 대기, 상태 채택, routing, 직렬화, Agent 통합 통신, 결과 결합과 실제 출력의 VIA 책임 구간을 포함한다. 외부 Agent의 도메인 작업과 사용자의 답변 대기 구간은 비용 0으로 치환한다. 이 그래프의 최장 경로 시간이 VIA 완료시간이다. 중첩된 parent span과 child span을 동시에 더하지 않는다. 병렬 작업도 모두 직렬 합산하지 않는다. 단순히 모든 Agent 시간을 총 wall time에서 빼면 겹치는 대기로 음수가 생길 수 있으므로 사용하지 않는다.</a:t>
+            </a:r>
+          </a:p>
+          <a:p xmlns:a="http://schemas.openxmlformats.org/drawingml/2006/main">
+            <a:r>
+              <a:t/>
+            </a:r>
+          </a:p>
+          <a:p xmlns:a="http://schemas.openxmlformats.org/drawingml/2006/main">
+            <a:r>
+              <a:t>동시에 실제 사용자 체감 wall time과 외부 대기 시간을 보조 기록한다. 필수 결과의 text, artifact 접근 및 필요한 최종 음성 전달이 모두 끝나야 종료한다. 첫 packet이나 첫 음절만으로 완료를 판정하지 않는다. 실패 시험과 필수 결과 누락은 무한대 지연으로 남긴다.</a:t>
+            </a:r>
+          </a:p>
+          <a:p xmlns:a="http://schemas.openxmlformats.org/drawingml/2006/main">
+            <a:r>
+              <a:t/>
+            </a:r>
+          </a:p>
+          <a:p xmlns:a="http://schemas.openxmlformats.org/drawingml/2006/main">
+            <a:r>
+              <a:t>자료 길이는 양쪽에 동일한 manifest로 고정한다. 일상 결과의 요약과 상세 artifact, 긴 음성 설명은 별도 층으로 표시한다. 소리의 실제 재생 시간도 VIA 비용에 포함하므로 10초를 넘는 필수 발화를 이 목표 안에 억지로 통과시킬 수 없다. 출력 축약이 필수 내용을 없애면 V-01이나 V-03에서 실패한다. 결과 크기가 다른 사례를 삭제해 목표를 통과시키지 않으며 적용 범위 변경은 측정 전에 승인한 공통 계약에만 반영한다.</a:t>
+            </a:r>
+          </a:p>
+          <a:p xmlns:a="http://schemas.openxmlformats.org/drawingml/2006/main">
+            <a:r>
+              <a:t/>
+            </a:r>
+          </a:p>
+          <a:p xmlns:a="http://schemas.openxmlformats.org/drawingml/2006/main">
+            <a:r>
+              <a:t>## 8. V-08 변경 용이성</a:t>
+            </a:r>
+          </a:p>
+          <a:p xmlns:a="http://schemas.openxmlformats.org/drawingml/2006/main">
+            <a:r>
+              <a:t/>
+            </a:r>
+          </a:p>
+          <a:p xmlns:a="http://schemas.openxmlformats.org/drawingml/2006/main">
+            <a:r>
+              <a:t>**설명:** 기능 변경이 적은 설계 요소에만 영향을 주어야 한다.</a:t>
+            </a:r>
+          </a:p>
+          <a:p xmlns:a="http://schemas.openxmlformats.org/drawingml/2006/main">
+            <a:r>
+              <a:t/>
+            </a:r>
+          </a:p>
+          <a:p xmlns:a="http://schemas.openxmlformats.org/drawingml/2006/main">
+            <a:r>
+              <a:t>**단일 목표:** 평균 변경 요소 수 3개/변경 이하.</a:t>
+            </a:r>
+          </a:p>
+          <a:p xmlns:a="http://schemas.openxmlformats.org/drawingml/2006/main">
+            <a:r>
+              <a:t/>
+            </a:r>
+          </a:p>
+          <a:p xmlns:a="http://schemas.openxmlformats.org/drawingml/2006/main">
+            <a:r>
+              <a:t>**근거:** SEI는 변경 비용을 바뀌는 책임과 다른 요소로의 전파 및 시험 비용으로 설명한다 [S05]. 이를 VIA에서 한 책임 요소, 그 요소의 계약, 그 계약을 소비하는 요소까지의 국소 변경 예산으로 구체화하여 평균 3개를 제안한다. 논문이 3이라는 상한을 제시한 것은 아니다. 모든 변경이 항상 세 역할을 바꿔야 한다는 뜻도 아니다.</a:t>
+            </a:r>
+          </a:p>
+          <a:p xmlns:a="http://schemas.openxmlformats.org/drawingml/2006/main">
+            <a:r>
+              <a:t/>
+            </a:r>
+          </a:p>
+          <a:p xmlns:a="http://schemas.openxmlformats.org/drawingml/2006/main">
+            <a:r>
+              <a:t>공통 변경 과제는 아래 여섯 개를 제안한다. 양쪽 대안은 같은 사용자 동작과 외부 capability를 유지해야 한다.</a:t>
+            </a:r>
+          </a:p>
+          <a:p xmlns:a="http://schemas.openxmlformats.org/drawingml/2006/main">
+            <a:r>
+              <a:t/>
+            </a:r>
+          </a:p>
+          <a:p xmlns:a="http://schemas.openxmlformats.org/drawingml/2006/main">
+            <a:r>
+              <a:t>1. 참조 대상에 표의 선택 범위를 추가한다.</a:t>
+            </a:r>
+          </a:p>
+          <a:p xmlns:a="http://schemas.openxmlformats.org/drawingml/2006/main">
+            <a:r>
+              <a:t>2. 기존 Task를 이어 쓰는 요청 관계 규칙을 추가한다.</a:t>
+            </a:r>
+          </a:p>
+          <a:p xmlns:a="http://schemas.openxmlformats.org/drawingml/2006/main">
+            <a:r>
+              <a:t>3. Downstream Agent의 진행 및 결과 protocol을 변경한다.</a:t>
+            </a:r>
+          </a:p>
+          <a:p xmlns:a="http://schemas.openxmlformats.org/drawingml/2006/main">
+            <a:r>
+              <a:t>4. 음성 중단 정책을 바꾸되 Task 실행은 유지한다.</a:t>
+            </a:r>
+          </a:p>
+          <a:p xmlns:a="http://schemas.openxmlformats.org/drawingml/2006/main">
+            <a:r>
+              <a:t>5. Context 보존기간과 삭제 전파 정책을 변경한다.</a:t>
+            </a:r>
+          </a:p>
+          <a:p xmlns:a="http://schemas.openxmlformats.org/drawingml/2006/main">
+            <a:r>
+              <a:t>6. 외부 결과 중복 알림의 재접속 처리 규칙을 변경한다.</a:t>
+            </a:r>
+          </a:p>
+          <a:p xmlns:a="http://schemas.openxmlformats.org/drawingml/2006/main">
+            <a:r>
+              <a:t/>
+            </a:r>
+          </a:p>
+          <a:p xmlns:a="http://schemas.openxmlformats.org/drawingml/2006/main">
+            <a:r>
+              <a:t>측정 전 후보별 논리 요소 ledger를 같은 수준으로 작성한다. Module, 독립 interface 계약, 공유 schema 및 별도 runtime 배치 단위를 등록하고 동일 정의를 따른다. 파일이나 코드 줄을 요소로 세지 않는다. 책임 Module의 내부 구현과 그 Module 전용 private schema는 한 요소로 센다. 공개 공유 계약을 변경하면 독립 계약 요소로 센다. 그림의 사각형을 임의로 합쳐 수를 줄일 수 없다.</a:t>
+            </a:r>
+          </a:p>
+          <a:p xmlns:a="http://schemas.openxmlformats.org/drawingml/2006/main">
+            <a:r>
+              <a:t/>
+            </a:r>
+          </a:p>
+          <a:p xmlns:a="http://schemas.openxmlformats.org/drawingml/2006/main">
+            <a:r>
+              <a:t>과제별로 실제 추가, 수정, 삭제가 필요한 요소의 ID 합집합 크기 N을 센다. 공통 코드, 설정, 테스트 harness를 변경해야 기능이 성립하면 해당 논리 요소도 포함한다. 같은 요소의 여러 파일과 여러 commit은 한 번만 센다. 설계만 있을 때는 예상 영향 수로 표시하고 실제 수행 비용으로 주장하지 않는다. 해결하지 못한 과제를 평균에서 빼지 않고 미달로 기록한다.</a:t>
+            </a:r>
+          </a:p>
+          <a:p xmlns:a="http://schemas.openxmlformats.org/drawingml/2006/main">
+            <a:r>
+              <a:t/>
+            </a:r>
+          </a:p>
+          <a:p xmlns:a="http://schemas.openxmlformats.org/drawingml/2006/main">
+            <a:r>
+              <a:t>```text</a:t>
+            </a:r>
+          </a:p>
+          <a:p xmlns:a="http://schemas.openxmlformats.org/drawingml/2006/main">
+            <a:r>
+              <a:t>평균 변경 요소 수 = Σ N(s) / 6</a:t>
+            </a:r>
+          </a:p>
+          <a:p xmlns:a="http://schemas.openxmlformats.org/drawingml/2006/main">
+            <a:r>
+              <a:t>MH 추정(s) = a(변경 종류) + b(변경 종류) × N(s)</a:t>
+            </a:r>
+          </a:p>
+          <a:p xmlns:a="http://schemas.openxmlformats.org/drawingml/2006/main">
+            <a:r>
+              <a:t>MM 추정(s) = MH 추정(s) / H_month</a:t>
+            </a:r>
+          </a:p>
+          <a:p xmlns:a="http://schemas.openxmlformats.org/drawingml/2006/main">
+            <a:r>
+              <a:t>```</a:t>
+            </a:r>
+          </a:p>
+          <a:p xmlns:a="http://schemas.openxmlformats.org/drawingml/2006/main">
+            <a:r>
+              <a:t/>
+            </a:r>
+          </a:p>
+          <a:p xmlns:a="http://schemas.openxmlformats.org/drawingml/2006/main">
+            <a:r>
+              <a:t>MH는 person-hour, MM는 person-month이다. a는 분석과 공통 검증의 고정 비용, b는 요소당 추가 수정과 시험의 비용이다. 완료된 실제 과제에서 작업시간을 기록하고 변경 종류별 회귀로 보정한다. 자료가 적으면 임의의 a와 b를 채우지 않는다. H_month는 조직의 표준 월 근무시간이며 160시간을 선택한다면 8시간 × 20일이라는 환산 규약을 명시한다. 3개를 3MH 또는 3MM로 곧바로 환산할 수 없다. 보정 자료 수, 추정 오차와 실제 MH를 함께 공개한다.</a:t>
+            </a:r>
+          </a:p>
+          <a:p xmlns:a="http://schemas.openxmlformats.org/drawingml/2006/main">
+            <a:r>
+              <a:t/>
+            </a:r>
+          </a:p>
+          <a:p xmlns:a="http://schemas.openxmlformats.org/drawingml/2006/main">
+            <a:r>
+              <a:t>## 9. V-06 메모리 효율성</a:t>
+            </a:r>
+          </a:p>
+          <a:p xmlns:a="http://schemas.openxmlformats.org/drawingml/2006/main">
+            <a:r>
+              <a:t/>
+            </a:r>
+          </a:p>
+          <a:p xmlns:a="http://schemas.openxmlformats.org/drawingml/2006/main">
+            <a:r>
+              <a:t>**설명:** 상시 실행 중에도 다른 PC 작업을 위한 메모리를 남겨야 한다.</a:t>
+            </a:r>
+          </a:p>
+          <a:p xmlns:a="http://schemas.openxmlformats.org/drawingml/2006/main">
+            <a:r>
+              <a:t/>
+            </a:r>
+          </a:p>
+          <a:p xmlns:a="http://schemas.openxmlformats.org/drawingml/2006/main">
+            <a:r>
+              <a:t>**단일 목표:** 최대 전체 메모리 16GB 이하. GB는 10^9 bytes이다.</a:t>
+            </a:r>
+          </a:p>
+          <a:p xmlns:a="http://schemas.openxmlformats.org/drawingml/2006/main">
+            <a:r>
+              <a:t/>
+            </a:r>
+          </a:p>
+          <a:p xmlns:a="http://schemas.openxmlformats.org/drawingml/2006/main">
+            <a:r>
+              <a:t>**장치 근거:** Samsung의 Galaxy Book6 Ultra NP960UJH-XG3IN 공식 사양은 32GB LPDDR5X RAM과 RTX 5070 Laptop GPU의 전용 8GB GDDR7을 명시한다 [S06]. 이 고사양 노트북을 기준으로 사용자 PC의 RAM 절반 이상을 VIA 외 용도로 남기는 예산을 설정한다.</a:t>
+            </a:r>
+          </a:p>
+          <a:p xmlns:a="http://schemas.openxmlformats.org/drawingml/2006/main">
+            <a:r>
+              <a:t/>
+            </a:r>
+          </a:p>
+          <a:p xmlns:a="http://schemas.openxmlformats.org/drawingml/2006/main">
+            <a:r>
+              <a:t>| 32GB RAM의 배정 | 예산 | 성격 |</a:t>
+            </a:r>
+          </a:p>
+          <a:p xmlns:a="http://schemas.openxmlformats.org/drawingml/2006/main">
+            <a:r>
+              <a:t>| --- | ---: | --- |</a:t>
+            </a:r>
+          </a:p>
+          <a:p xmlns:a="http://schemas.openxmlformats.org/drawingml/2006/main">
+            <a:r>
+              <a:t>| Windows와 기본 상주 프로그램 | 6GB | VIA가 제안하는 예약량, 실측 OS 사용량 아님 |</a:t>
+            </a:r>
+          </a:p>
+          <a:p xmlns:a="http://schemas.openxmlformats.org/drawingml/2006/main">
+            <a:r>
+              <a:t>| 사용자의 browser와 문서 및 개발 앱 | 6GB | 공존 부하 예산, 실제 foreground app manifest로 검증 필요 |</a:t>
+            </a:r>
+          </a:p>
+          <a:p xmlns:a="http://schemas.openxmlformats.org/drawingml/2006/main">
+            <a:r>
+              <a:t>| 부하 변동과 작업 확장을 위한 여유 | 4GB | 설계상 headroom |</a:t>
+            </a:r>
+          </a:p>
+          <a:p xmlns:a="http://schemas.openxmlformats.org/drawingml/2006/main">
+            <a:r>
+              <a:t>| VIA의 전체 메모리 상한 | 16GB | 32 - 6 - 6 - 4로 계산한 단일 목표 |</a:t>
+            </a:r>
+          </a:p>
+          <a:p xmlns:a="http://schemas.openxmlformats.org/drawingml/2006/main">
+            <a:r>
+              <a:t/>
+            </a:r>
+          </a:p>
+          <a:p xmlns:a="http://schemas.openxmlformats.org/drawingml/2006/main">
+            <a:r>
+              <a:t>전용 GPU의 8GB를 RAM에 더해 VIA 예산을 24GB로 키우지 않는다. 목표는 VIA가 사용하는 CPU RAM과 전용 VRAM의 실제 물리 사용량을 합친 16GB이므로 CPU RAM만 16GB를 사용하는 경우에도 비 VIA RAM 예산을 보존한다. GPU 전용 메모리에는 별도의 물리적 장치 한계가 있다. 16GB가 전부 GPU에 들어간다고 가정하지 않는다. 64GB 장치를 사용하더라도 발표 목표를 자동으로 배증하지 않는다.</a:t>
+            </a:r>
+          </a:p>
+          <a:p xmlns:a="http://schemas.openxmlformats.org/drawingml/2006/main">
+            <a:r>
+              <a:t/>
+            </a:r>
+          </a:p>
+          <a:p xmlns:a="http://schemas.openxmlformats.org/drawingml/2006/main">
+            <a:r>
+              <a:t>**모델 근거와 할당:** 현재 reference Architecture의 약 10B는 Thinker/backbone의 목표 크기이다. encoders, Talker, Streaming ASR와 기타 learned helper까지 10B라고 간주하지 않는다. 원시 가중치 bytes는 N × bit / 8이므로 10B backbone만 FP16에서 약 20GB, 8bit에서 약 10GB, 4bit에서 약 5GB이다. AWQ는 4bit LLM 배포의 실제 연구 근거이다 [S07]. 양자화 선택이나 VIA의 정확도 보존을 승인했다는 뜻은 아니다.</a:t>
+            </a:r>
+          </a:p>
+          <a:p xmlns:a="http://schemas.openxmlformats.org/drawingml/2006/main">
+            <a:r>
+              <a:t/>
+            </a:r>
+          </a:p>
+          <a:p xmlns:a="http://schemas.openxmlformats.org/drawingml/2006/main">
+            <a:r>
+              <a:t>16GB 안에서 backbone 가중치와 양자화 부대 정보 6GB, 나머지 learned weights 4GB, KV와 중간 상태 3GB, runtime과 UI 및 관측 버퍼 3GB의 할당을 제안한다. 모두 상한 예산이며 실제 모델 크기 주장이 아니다. 전체 weight inventory가 예산을 초과하면 목표 미달로 보고하고, 모델 구성을 바꿀 때에는 기능 정확성도 다시 확인한다. CPU staging copy와 GPU loaded copy가 실제로 공존하면 둘 다 포함하므로 이 예산을 더 빠르게 소진한다.</a:t>
+            </a:r>
+          </a:p>
+          <a:p xmlns:a="http://schemas.openxmlformats.org/drawingml/2006/main">
+            <a:r>
+              <a:t/>
+            </a:r>
+          </a:p>
+          <a:p xmlns:a="http://schemas.openxmlformats.org/drawingml/2006/main">
+            <a:r>
+              <a:t>**측정 식:**</a:t>
+            </a:r>
+          </a:p>
+          <a:p xmlns:a="http://schemas.openxmlformats.org/drawingml/2006/main">
+            <a:r>
+              <a:t/>
+            </a:r>
+          </a:p>
+          <a:p xmlns:a="http://schemas.openxmlformats.org/drawingml/2006/main">
+            <a:r>
+              <a:t>```text</a:t>
+            </a:r>
+          </a:p>
+          <a:p xmlns:a="http://schemas.openxmlformats.org/drawingml/2006/main">
+            <a:r>
+              <a:t>M(t) = VIA의 CPU 고유 상주 물리 bytes</a:t>
+            </a:r>
+          </a:p>
+          <a:p xmlns:a="http://schemas.openxmlformats.org/drawingml/2006/main">
+            <a:r>
+              <a:t>     + VIA의 전용 GPU 물리 bytes</a:t>
+            </a:r>
+          </a:p>
+          <a:p xmlns:a="http://schemas.openxmlformats.org/drawingml/2006/main">
+            <a:r>
+              <a:t>     + 다른 항목에 포함되지 않은 pinned 및 공유 물리 bytes</a:t>
+            </a:r>
+          </a:p>
+          <a:p xmlns:a="http://schemas.openxmlformats.org/drawingml/2006/main">
+            <a:r>
+              <a:t>최대 전체 메모리 = max_t M(t) / 10^9</a:t>
+            </a:r>
+          </a:p>
+          <a:p xmlns:a="http://schemas.openxmlformats.org/drawingml/2006/main">
+            <a:r>
+              <a:t>```</a:t>
+            </a:r>
+          </a:p>
+          <a:p xmlns:a="http://schemas.openxmlformats.org/drawingml/2006/main">
+            <a:r>
+              <a:t/>
+            </a:r>
+          </a:p>
+          <a:p xmlns:a="http://schemas.openxmlformats.org/drawingml/2006/main">
+            <a:r>
+              <a:t>여러 프로세스가 같은 물리 페이지를 매핑하면 한 번만 센다. 실제 CPU와 GPU 복제본은 별개이다. Windows Working Set의 단순 프로세스별 합계는 공유 페이지를 중복 셀 수 있고 Private Bytes만 쓰면 공유 가중치를 놓칠 수 있으므로 page 및 allocation ID와 GPU allocation ledger로 보정한다. process tree는 VIA launcher가 기록하고 모든 worker와 helper를 포함한다. pagefile로 밀어낸 bytes와 commit은 보조 기록으로 공개하여 swapping으로 피크를 낮춘 결과를 드러낸다.</a:t>
+            </a:r>
+          </a:p>
+          <a:p xmlns:a="http://schemas.openxmlformats.org/drawingml/2006/main">
+            <a:r>
+              <a:t/>
+            </a:r>
+          </a:p>
+          <a:p xmlns:a="http://schemas.openxmlformats.org/drawingml/2006/main">
+            <a:r>
+              <a:t>8시간 시험을 다음 순서로 수행한다. 상주 대기 두 시간, 요청 burst 한 시간, 정상 대화와 두 외부 실행 병행 두 시간, 화면 및 Context 보존 한도 도달과 삭제 한 시간, 장애 및 모델 재로딩 한 시간, 무입력 대기 한 시간이다. burst는 15초마다 한 요청을 제안하며 처리되지 않은 요청도 적체 상태로 남긴다. 나머지 단계의 입력 시간축은 동일 fixture로 고정한다. browser와 문서 앱 부하는 같은 파일과 tab 목록으로 유지하고 실제 사용량을 기록한다.</a:t>
+            </a:r>
+          </a:p>
+          <a:p xmlns:a="http://schemas.openxmlformats.org/drawingml/2006/main">
+            <a:r>
+              <a:t/>
+            </a:r>
+          </a:p>
+          <a:p xmlns:a="http://schemas.openxmlformats.org/drawingml/2006/main">
+            <a:r>
+              <a:t>최소 100ms 간격의 CPU 및 GPU 계측과 allocation high-water mark를 함께 사용한다. 짧은 load peak를 sampling만으로 놓치지 않도록 allocator의 생성과 해제 사건을 보조로 사용한다. 시작부터 종료까지의 최대값 하나를 목표와 비교하고 대기, 요청 및 복구 피크는 원인 분석용으로 분리한다. 장시간 무입력의 idle 메모리도 공개한다. CPU나 전력의 별도 목표를 새로 만들지는 않는다.</a:t>
+            </a:r>
+          </a:p>
+          <a:p xmlns:a="http://schemas.openxmlformats.org/drawingml/2006/main">
+            <a:r>
+              <a:t/>
+            </a:r>
+          </a:p>
+          <a:p xmlns:a="http://schemas.openxmlformats.org/drawingml/2006/main">
+            <a:r>
+              <a:t>## 10. V-07 복구 용이성</a:t>
+            </a:r>
+          </a:p>
+          <a:p xmlns:a="http://schemas.openxmlformats.org/drawingml/2006/main">
+            <a:r>
+              <a:t/>
+            </a:r>
+          </a:p>
+          <a:p xmlns:a="http://schemas.openxmlformats.org/drawingml/2006/main">
+            <a:r>
+              <a:t>**설명:** 장애 뒤 기존 업무를 이어갈 수 있는 상태로 돌아와야 한다.</a:t>
+            </a:r>
+          </a:p>
+          <a:p xmlns:a="http://schemas.openxmlformats.org/drawingml/2006/main">
+            <a:r>
+              <a:t/>
+            </a:r>
+          </a:p>
+          <a:p xmlns:a="http://schemas.openxmlformats.org/drawingml/2006/main">
+            <a:r>
+              <a:t>**단일 목표:** 최대 정상 복구시간 10초 이하.</a:t>
+            </a:r>
+          </a:p>
+          <a:p xmlns:a="http://schemas.openxmlformats.org/drawingml/2006/main">
+            <a:r>
+              <a:t/>
+            </a:r>
+          </a:p>
+          <a:p xmlns:a="http://schemas.openxmlformats.org/drawingml/2006/main">
+            <a:r>
+              <a:t>**근거:** 사용자의 주의 유지 한계인 10초를 장애 후 재개 예산으로 채택한다 [S04]. microreboot 연구는 실행 단위를 재시작하면서 필요한 상태를 보존하는 회복 구조와 짧은 복구의 가능성을 보여준다 [S08]. 그 웹 시스템의 시간은 VIA의 Omni 로딩이나 전체 복구 성능이 아니므로 그대로 적용하지 않는다. 논문에서 VIA 복구가 10초라고 측정했다는 표현도 쓰지 않는다.</a:t>
+            </a:r>
+          </a:p>
+          <a:p xmlns:a="http://schemas.openxmlformats.org/drawingml/2006/main">
+            <a:r>
+              <a:t/>
+            </a:r>
+          </a:p>
+          <a:p xmlns:a="http://schemas.openxmlformats.org/drawingml/2006/main">
+            <a:r>
+              <a:t>각 장애는 저장 전, 저장 후 외부 전달 전, 외부 전달 후 확인 전의 적용 가능한 세 지점에 주입하고 각각 4회 반복한다. 부적합한 지점은 이유를 사전에 정하고 같은 지점을 양쪽 후보에서 제외한다. 정상 복구의 oracle은 필요한 사용자 입력을 받고, 현재 상태를 정확히 설명하며, 다음 필요한 처리 또는 명확한 보류 상태로 이어가는 것이다. Agent의 긴 작업이 끝나야 복구되는 것은 아니다.</a:t>
+            </a:r>
+          </a:p>
+          <a:p xmlns:a="http://schemas.openxmlformats.org/drawingml/2006/main">
+            <a:r>
+              <a:t/>
+            </a:r>
+          </a:p>
+          <a:p xmlns:a="http://schemas.openxmlformats.org/drawingml/2006/main">
+            <a:r>
+              <a:t>| ID | 장애 | 확인할 상태 |</a:t>
+            </a:r>
+          </a:p>
+          <a:p xmlns:a="http://schemas.openxmlformats.org/drawingml/2006/main">
+            <a:r>
+              <a:t>| --- | --- | --- |</a:t>
+            </a:r>
+          </a:p>
+          <a:p xmlns:a="http://schemas.openxmlformats.org/drawingml/2006/main">
+            <a:r>
+              <a:t>| F01 | semantic model 호출 timeout | 미채택 해석을 완료 사실로 쓰지 않고 새 입력 처리 가능 |</a:t>
+            </a:r>
+          </a:p>
+          <a:p xmlns:a="http://schemas.openxmlformats.org/drawingml/2006/main">
+            <a:r>
+              <a:t>| F02 | shared model runtime 종료 | cold weights와 세션 재구성 후 입력과 해석 재개 |</a:t>
+            </a:r>
+          </a:p>
+          <a:p xmlns:a="http://schemas.openxmlformats.org/drawingml/2006/main">
+            <a:r>
+              <a:t>| F03 | 음성 출력 오류 | Task 사실을 보존하고 text나 정상 음성으로 상태 확인 가능 |</a:t>
+            </a:r>
+          </a:p>
+          <a:p xmlns:a="http://schemas.openxmlformats.org/drawingml/2006/main">
+            <a:r>
+              <a:t>| F04 | 관측 producer 종료 | 근거 공백을 표시하고 해당 없는 참조를 추측하지 않음 |</a:t>
+            </a:r>
+          </a:p>
+          <a:p xmlns:a="http://schemas.openxmlformats.org/drawingml/2006/main">
+            <a:r>
+              <a:t>| F05 | VIA 상태 owner 종료 | 채택 상태와 미완료 의도를 올바르게 구분 |</a:t>
+            </a:r>
+          </a:p>
+          <a:p xmlns:a="http://schemas.openxmlformats.org/drawingml/2006/main">
+            <a:r>
+              <a:t>| F06 | 저장 실패 또는 crash | 미확정 상태를 확정 사실로 발표하지 않음 |</a:t>
+            </a:r>
+          </a:p>
+          <a:p xmlns:a="http://schemas.openxmlformats.org/drawingml/2006/main">
+            <a:r>
+              <a:t>| F07 | Agent 연결 단절 | 외부 실행이 미확인임을 보존하며 접속 재개 가능 |</a:t>
+            </a:r>
+          </a:p>
+          <a:p xmlns:a="http://schemas.openxmlformats.org/drawingml/2006/main">
+            <a:r>
+              <a:t>| F08 | 결과 확인 응답 유실 | 재접속 후 실제 Agent 결과로 상태 정정 |</a:t>
+            </a:r>
+          </a:p>
+          <a:p xmlns:a="http://schemas.openxmlformats.org/drawingml/2006/main">
+            <a:r>
+              <a:t>| F09 | 중복 또는 역순 외부 알림 | 최신 상태와 적용 이력 보존 |</a:t>
+            </a:r>
+          </a:p>
+          <a:p xmlns:a="http://schemas.openxmlformats.org/drawingml/2006/main">
+            <a:r>
+              <a:t>| F10 | 취소와 결과 도착 경합 | 정해진 채택 정책에 따른 상태와 전달 |</a:t>
+            </a:r>
+          </a:p>
+          <a:p xmlns:a="http://schemas.openxmlformats.org/drawingml/2006/main">
+            <a:r>
+              <a:t>| F11 | 삭제 중 재시작 | 삭제된 Context가 다시 살아나지 않음 |</a:t>
+            </a:r>
+          </a:p>
+          <a:p xmlns:a="http://schemas.openxmlformats.org/drawingml/2006/main">
+            <a:r>
+              <a:t>| F12 | 프로세스 재시작 중 새 입력 | 입력 공백이나 보류를 명시하고 다음 요청 수용 |</a:t>
+            </a:r>
+          </a:p>
+          <a:p xmlns:a="http://schemas.openxmlformats.org/drawingml/2006/main">
+            <a:r>
+              <a:t/>
+            </a:r>
+          </a:p>
+          <a:p xmlns:a="http://schemas.openxmlformats.org/drawingml/2006/main">
+            <a:r>
+              <a:t>VIA가 장애를 감지한 시점 대신 harness의 실제 장애 주입 시점에서 시작한다. 정상 복구 oracle을 만족한 실제 사건에서 종료한다. 사람의 수동 복구 단계 없이 재개할 수 있는지를 확인하되 주지표는 복구시간 하나이다. 종료한 process를 띄운 것만으로 복구로 세지 않는다. F02에는 warm 세션 복원뿐 아니라 cold weight loading도 포함한다.</a:t>
+            </a:r>
+          </a:p>
+          <a:p xmlns:a="http://schemas.openxmlformats.org/drawingml/2006/main">
+            <a:r>
+              <a:t/>
+            </a:r>
+          </a:p>
+          <a:p xmlns:a="http://schemas.openxmlformats.org/drawingml/2006/main">
+            <a:r>
+              <a:t>각 적용 시험의 정상 복구시간 중 최대값을 보고한다. 미복구나 잘못된 복구는 무한대라서 목표를 통과하지 못한다. timeout은 60초로 관측을 마치되 이를 정상 복구시간 60초로 대체하지 않는다. 원인별 elapsed time과 실패 기록은 남긴다. 외부 capability 때문에 조회할 수 없는 실행은 미확인 상태를 정확히 보존하고 정해진 다음 동작을 제공해야 복구로 판정한다.</a:t>
+            </a:r>
+          </a:p>
+          <a:p xmlns:a="http://schemas.openxmlformats.org/drawingml/2006/main">
+            <a:r>
+              <a:t/>
+            </a:r>
+          </a:p>
+          <a:p xmlns:a="http://schemas.openxmlformats.org/drawingml/2006/main">
+            <a:r>
+              <a:t>## 11. V-09 분석 용이성</a:t>
+            </a:r>
+          </a:p>
+          <a:p xmlns:a="http://schemas.openxmlformats.org/drawingml/2006/main">
+            <a:r>
+              <a:t/>
+            </a:r>
+          </a:p>
+          <a:p xmlns:a="http://schemas.openxmlformats.org/drawingml/2006/main">
+            <a:r>
+              <a:t>**설명:** 실행 기록으로 요청의 처리 과정을 설명할 수 있어야 한다.</a:t>
+            </a:r>
+          </a:p>
+          <a:p xmlns:a="http://schemas.openxmlformats.org/drawingml/2006/main">
+            <a:r>
+              <a:t/>
+            </a:r>
+          </a:p>
+          <a:p xmlns:a="http://schemas.openxmlformats.org/drawingml/2006/main">
+            <a:r>
+              <a:t>**단일 목표:** 실행 재구성률 100%.</a:t>
+            </a:r>
+          </a:p>
+          <a:p xmlns:a="http://schemas.openxmlformats.org/drawingml/2006/main">
+            <a:r>
+              <a:t/>
+            </a:r>
+          </a:p>
+          <a:p xmlns:a="http://schemas.openxmlformats.org/drawingml/2006/main">
+            <a:r>
+              <a:t>**근거:** 연구 평가에서는 전체 시험의 실행 과정을 추적할 필요가 있다. OpenTelemetry의 always_on과 parentbased_always_on은 모든 root trace를 수집하는 구성 근거를 제공한다 [S09]. 이 설정이 로그 유실이나 인과 연결의 완전성을 자동 보장하지는 않으므로 실제 재구성 성공 여부를 검사한다.</a:t>
+            </a:r>
+          </a:p>
+          <a:p xmlns:a="http://schemas.openxmlformats.org/drawingml/2006/main">
+            <a:r>
+              <a:t/>
+            </a:r>
+          </a:p>
+          <a:p xmlns:a="http://schemas.openxmlformats.org/drawingml/2006/main">
+            <a:r>
+              <a:t>**분모:** V-01의 1,880회, 모든 장애 주입 시험 및 V-10의 144회 보안 시험을 독립 harness registry에서 가져온다. 중복된 trial ID는 한 번만 센다. VIA 로그에 등장한 trial만 분모로 삼으면 로그 전체가 누락된 실패를 놓치므로 금지한다.</a:t>
+            </a:r>
+          </a:p>
+          <a:p xmlns:a="http://schemas.openxmlformats.org/drawingml/2006/main">
+            <a:r>
+              <a:t/>
+            </a:r>
+          </a:p>
+          <a:p xmlns:a="http://schemas.openxmlformats.org/drawingml/2006/main">
+            <a:r>
+              <a:t>**재구성의 필수 질문:**</a:t>
+            </a:r>
+          </a:p>
+          <a:p xmlns:a="http://schemas.openxmlformats.org/drawingml/2006/main">
+            <a:r>
+              <a:t/>
+            </a:r>
+          </a:p>
+          <a:p xmlns:a="http://schemas.openxmlformats.org/drawingml/2006/main">
+            <a:r>
+              <a:t>1. 어느 입력이 어느 Request와 Task에 연결되었는가?</a:t>
+            </a:r>
+          </a:p>
+          <a:p xmlns:a="http://schemas.openxmlformats.org/drawingml/2006/main">
+            <a:r>
+              <a:t>2. 어떤 버전의 근거와 해석 결과로 처리를 채택했는가?</a:t>
+            </a:r>
+          </a:p>
+          <a:p xmlns:a="http://schemas.openxmlformats.org/drawingml/2006/main">
+            <a:r>
+              <a:t>3. 어떤 명령과 결과가 상태 변화를 만들었는가?</a:t>
+            </a:r>
+          </a:p>
+          <a:p xmlns:a="http://schemas.openxmlformats.org/drawingml/2006/main">
+            <a:r>
+              <a:t>4. 사용자에게 실제로 무엇을 전달했는가?</a:t>
+            </a:r>
+          </a:p>
+          <a:p xmlns:a="http://schemas.openxmlformats.org/drawingml/2006/main">
+            <a:r>
+              <a:t>5. 정상 실행과 보류 또는 실패를 나누는 확인된 사실은 무엇인가?</a:t>
+            </a:r>
+          </a:p>
+          <a:p xmlns:a="http://schemas.openxmlformats.org/drawingml/2006/main">
+            <a:r>
+              <a:t/>
+            </a:r>
+          </a:p>
+          <a:p xmlns:a="http://schemas.openxmlformats.org/drawingml/2006/main">
+            <a:r>
+              <a:t>시험 종류에 적용되는 질문을 모두 기록만으로 답하고 harness의 실제 사건과 일치해야 성공이다. 필요한 관계는 input ID, Request ID, Task ID, command와 receipt ID, source revision, permission epoch, model 및 prompt version, adoption decision, 이전 상태와 새 상태, 실제 output event 및 fault ID로 연결한다. 기록 자체가 모순되거나 필수 link가 없으면 실패이다.</a:t>
+            </a:r>
+          </a:p>
+          <a:p xmlns:a="http://schemas.openxmlformats.org/drawingml/2006/main">
+            <a:r>
+              <a:t/>
+            </a:r>
+          </a:p>
+          <a:p xmlns:a="http://schemas.openxmlformats.org/drawingml/2006/main">
+            <a:r>
+              <a:t>```text</a:t>
+            </a:r>
+          </a:p>
+          <a:p xmlns:a="http://schemas.openxmlformats.org/drawingml/2006/main">
+            <a:r>
+              <a:t>실행 재구성률 = 100 × 필수 질문 전체를 재구성한 trial 수 / registry의 전체 trial 수</a:t>
+            </a:r>
+          </a:p>
+          <a:p xmlns:a="http://schemas.openxmlformats.org/drawingml/2006/main">
+            <a:r>
+              <a:t>```</a:t>
+            </a:r>
+          </a:p>
+          <a:p xmlns:a="http://schemas.openxmlformats.org/drawingml/2006/main">
+            <a:r>
+              <a:t/>
+            </a:r>
+          </a:p>
+          <a:p xmlns:a="http://schemas.openxmlformats.org/drawingml/2006/main">
+            <a:r>
+              <a:t>후보를 가린 독립 검사자가 trace를 분석하고 oracle과 대조한다. 자동 link 검사와 사람의 설명 가능성 검토를 함께 사용한다. 정상 실행에서도 Context 선택, 해석 채택, Task routing과 전달을 검토한다. 실패 때만 verbose log를 켜는 방식은 전수 재구성 목표에 맞지 않는다. 수집 pipeline의 crash, flush 실패와 clock 불일치도 검사한다.</a:t>
+            </a:r>
+          </a:p>
+          <a:p xmlns:a="http://schemas.openxmlformats.org/drawingml/2006/main">
+            <a:r>
+              <a:t/>
+            </a:r>
+          </a:p>
+          <a:p xmlns:a="http://schemas.openxmlformats.org/drawingml/2006/main">
+            <a:r>
+              <a:t>연구용 aggregate에는 오류 유형, 참조 근거 공백, 해석 수정 패턴, model version별 차이와 latency 분포를 남겨 VIA orchestration 개선에 사용할 수 있게 한다. 모델 내부 사고 과정이나 개인 화면 및 음성 원문을 전부 저장해야 한다는 요구는 없다. ID, version, 접근이 허용된 structured output 및 제한된 digest로 연결하고, 철회와 삭제 정책을 지키면서 필요한 metadata의 보존 범위를 정한다. 로그의 기밀성도 V-10에서 시험한다.</a:t>
+            </a:r>
+          </a:p>
+          <a:p xmlns:a="http://schemas.openxmlformats.org/drawingml/2006/main">
+            <a:r>
+              <a:t/>
+            </a:r>
+          </a:p>
+          <a:p xmlns:a="http://schemas.openxmlformats.org/drawingml/2006/main">
+            <a:r>
+              <a:t>## 12. V-10 기밀성</a:t>
+            </a:r>
+          </a:p>
+          <a:p xmlns:a="http://schemas.openxmlformats.org/drawingml/2006/main">
+            <a:r>
+              <a:t/>
+            </a:r>
+          </a:p>
+          <a:p xmlns:a="http://schemas.openxmlformats.org/drawingml/2006/main">
+            <a:r>
+              <a:t>**설명:** 사용자 정보는 허용된 범위 안에서만 사용해야 한다.</a:t>
+            </a:r>
+          </a:p>
+          <a:p xmlns:a="http://schemas.openxmlformats.org/drawingml/2006/main">
+            <a:r>
+              <a:t/>
+            </a:r>
+          </a:p>
+          <a:p xmlns:a="http://schemas.openxmlformats.org/drawingml/2006/main">
+            <a:r>
+              <a:t>**단일 목표:** 고정 시험에서 무단 정보 사용 0건.</a:t>
+            </a:r>
+          </a:p>
+          <a:p xmlns:a="http://schemas.openxmlformats.org/drawingml/2006/main">
+            <a:r>
+              <a:t/>
+            </a:r>
+          </a:p>
+          <a:p xmlns:a="http://schemas.openxmlformats.org/drawingml/2006/main">
+            <a:r>
+              <a:t>**근거:** NIST SP 800-53의 AC-3은 승인된 접근의 집행, AC-6은 최소 권한을 다룬다 [S10]. VIA의 권한, 철회 및 삭제 계약을 적용하여 금지된 정보 사용의 허용 예산을 0으로 잡는다 [S00]. NIST 인증을 받았다거나 시험 밖의 모든 공격을 막는다는 주장은 하지 않는다.</a:t>
+            </a:r>
+          </a:p>
+          <a:p xmlns:a="http://schemas.openxmlformats.org/drawingml/2006/main">
+            <a:r>
+              <a:t/>
+            </a:r>
+          </a:p>
+          <a:p xmlns:a="http://schemas.openxmlformats.org/drawingml/2006/main">
+            <a:r>
+              <a:t>아래 12개 사례를 정상 동작, 요청 처리 중 정책 또는 사건 변경, 재시작 후의 세 조건에서 4회 반복한다. **12 × 3 × 4 = 144회**를 제안한다. 첫 조건에는 고정 금지 정책을 적용하고, 처리 중 조건은 실제 접근 또는 전달 전 정책을 바꾸거나 제한을 적용한다. 재시작 조건은 같은 정책을 durable state에서 복원한다. 시험마다 적용 지점을 manifest로 명시한다.</a:t>
+            </a:r>
+          </a:p>
+          <a:p xmlns:a="http://schemas.openxmlformats.org/drawingml/2006/main">
+            <a:r>
+              <a:t/>
+            </a:r>
+          </a:p>
+          <a:p xmlns:a="http://schemas.openxmlformats.org/drawingml/2006/main">
+            <a:r>
+              <a:t>| ID | 시험 상황 | 금지 사건의 관측 지점 |</a:t>
+            </a:r>
+          </a:p>
+          <a:p xmlns:a="http://schemas.openxmlformats.org/drawingml/2006/main">
+            <a:r>
+              <a:t>| --- | --- | --- |</a:t>
+            </a:r>
+          </a:p>
+          <a:p xmlns:a="http://schemas.openxmlformats.org/drawingml/2006/main">
+            <a:r>
+              <a:t>| S01 | 화면 수집 권한이 없는 앱 | capture API, buffer와 model 입력 |</a:t>
+            </a:r>
+          </a:p>
+          <a:p xmlns:a="http://schemas.openxmlformats.org/drawingml/2006/main">
+            <a:r>
+              <a:t>| S02 | 승인한 파일 범위 밖의 문서 | 실제 file read와 Context 추가 |</a:t>
+            </a:r>
+          </a:p>
+          <a:p xmlns:a="http://schemas.openxmlformats.org/drawingml/2006/main">
+            <a:r>
+              <a:t>| S03 | 허용한 Agent와 다른 수신자 | serialised payload와 실제 전송 |</a:t>
+            </a:r>
+          </a:p>
+          <a:p xmlns:a="http://schemas.openxmlformats.org/drawingml/2006/main">
+            <a:r>
+              <a:t>| S04 | 읽기 목적을 넘어 다른 요청에 재사용 | Context query와 해석 호출의 목적 ID |</a:t>
+            </a:r>
+          </a:p>
+          <a:p xmlns:a="http://schemas.openxmlformats.org/drawingml/2006/main">
+            <a:r>
+              <a:t>| S05 | 권한 철회 후 cache 내용 사용 | cache hit와 model 입력 |</a:t>
+            </a:r>
+          </a:p>
+          <a:p xmlns:a="http://schemas.openxmlformats.org/drawingml/2006/main">
+            <a:r>
+              <a:t>| S06 | 조회 시작 후 전달 전에 권한 철회 | 전달 직전 permission epoch와 payload |</a:t>
+            </a:r>
+          </a:p>
+          <a:p xmlns:a="http://schemas.openxmlformats.org/drawingml/2006/main">
+            <a:r>
+              <a:t>| S07 | 다른 Task의 정보 승인 재사용 | Task와 approval scope 연결 |</a:t>
+            </a:r>
+          </a:p>
+          <a:p xmlns:a="http://schemas.openxmlformats.org/drawingml/2006/main">
+            <a:r>
+              <a:t>| S08 | 다른 역할이나 세션으로 Context 유출 | session과 KV binding |</a:t>
+            </a:r>
+          </a:p>
+          <a:p xmlns:a="http://schemas.openxmlformats.org/drawingml/2006/main">
+            <a:r>
+              <a:t>| S09 | 삭제 뒤 원문 및 파생 index 검색 | storage read와 retrieval 결과 |</a:t>
+            </a:r>
+          </a:p>
+          <a:p xmlns:a="http://schemas.openxmlformats.org/drawingml/2006/main">
+            <a:r>
+              <a:t>| S10 | 삭제 뒤 KV 또는 scene 해석 재사용 | retained session과 semantic input |</a:t>
+            </a:r>
+          </a:p>
+          <a:p xmlns:a="http://schemas.openxmlformats.org/drawingml/2006/main">
+            <a:r>
+              <a:t>| S11 | 삭제 중 늦은 write 및 재시작 복원 | store commit과 restored records |</a:t>
+            </a:r>
+          </a:p>
+          <a:p xmlns:a="http://schemas.openxmlformats.org/drawingml/2006/main">
+            <a:r>
+              <a:t>| S12 | 화면, 음성 또는 문서 비밀값의 로그 노출 | local logs와 연구 수집 endpoint |</a:t>
+            </a:r>
+          </a:p>
+          <a:p xmlns:a="http://schemas.openxmlformats.org/drawingml/2006/main">
+            <a:r>
+              <a:t/>
+            </a:r>
+          </a:p>
+          <a:p xmlns:a="http://schemas.openxmlformats.org/drawingml/2006/main">
+            <a:r>
+              <a:t>각 사례에 고유 canary 값을 심고 read, model input, store, KV binding, Agent 전송 및 로그 sink에서 실제 접근을 계측한다. 로그에 '거절'이라고 적힌 것만으로 통과시키지 않는다. 정책상 허용 여부는 접근과 전달 시점의 권한 epoch로 oracle이 계산한다. 하나의 무단 사용을 여러 계층에서 관측하면 event ID로 중복 제거하며 원본 관측도 보존한다.</a:t>
+            </a:r>
+          </a:p>
+          <a:p xmlns:a="http://schemas.openxmlformats.org/drawingml/2006/main">
+            <a:r>
+              <a:t/>
+            </a:r>
+          </a:p>
+          <a:p xmlns:a="http://schemas.openxmlformats.org/drawingml/2006/main">
+            <a:r>
+              <a:t>명확히 허용된 동일 요청을 정상 대조군으로 수행한다. 모든 읽기와 전송을 막아 0건을 만드는 구현은 V-01과 V-03을 충족하지 못한다. 허용된 Downstream Agent로 필요한 Context를 전달하는 것은 위반이 아니다. 철회 전에 적법하게 외부 Agent에게 전달한 데이터의 모든 외부 복제본을 VIA가 삭제한다고 가정하지 않는다. VIA 통제 범위의 후속 사용과 재전달을 시험하고 외부 시스템의 capability와 책임 경계를 명시한다.</a:t>
+            </a:r>
+          </a:p>
+          <a:p xmlns:a="http://schemas.openxmlformats.org/drawingml/2006/main">
+            <a:r>
+              <a:t/>
+            </a:r>
+          </a:p>
+          <a:p xmlns:a="http://schemas.openxmlformats.org/drawingml/2006/main">
+            <a:r>
+              <a:t>시험 종료 후 보고는 사건 수 0건 여부와 144회 전체의 실행 여부, 누락된 관측 지점 및 정상 대조군 결과를 포함한다. 실행하지 않은 사례를 0건으로 채우지 않는다. 새 공격이나 새로운 저장소가 추가되면 시험 목록을 확장하고 기존 결과의 범위를 보존한다.</a:t>
+            </a:r>
+          </a:p>
+          <a:p xmlns:a="http://schemas.openxmlformats.org/drawingml/2006/main">
+            <a:r>
+              <a:t/>
+            </a:r>
+          </a:p>
+          <a:p xmlns:a="http://schemas.openxmlformats.org/drawingml/2006/main">
+            <a:r>
+              <a:t>## 13. 출처</a:t>
+            </a:r>
+          </a:p>
+          <a:p xmlns:a="http://schemas.openxmlformats.org/drawingml/2006/main">
+            <a:r>
+              <a:t/>
+            </a:r>
+          </a:p>
+          <a:p xmlns:a="http://schemas.openxmlformats.org/drawingml/2006/main">
+            <a:r>
+              <a:t>외부 자료 확인일: 2026-10-06. 각 출처의 적용 범위는 위 항목에서 제한했다.</a:t>
+            </a:r>
+          </a:p>
+          <a:p xmlns:a="http://schemas.openxmlformats.org/drawingml/2006/main">
+            <a:r>
+              <a:t/>
+            </a:r>
+          </a:p>
+          <a:p xmlns:a="http://schemas.openxmlformats.org/drawingml/2006/main">
+            <a:r>
+              <a:t>| ID | 원문 출처 | 사용한 사실 또는 원칙 |</a:t>
+            </a:r>
+          </a:p>
+          <a:p xmlns:a="http://schemas.openxmlformats.org/drawingml/2006/main">
+            <a:r>
+              <a:t>| --- | --- | --- |</a:t>
+            </a:r>
+          </a:p>
+          <a:p xmlns:a="http://schemas.openxmlformats.org/drawingml/2006/main">
+            <a:r>
+              <a:t>| S00 | [VIA 대표 UC](../../architecture/05-representative-use-cases.md), [고정 범위](../../architecture/03-fixed-architecture-scope.md), [03-00 품질 시나리오](../../architecture/12-decisions/decision-packages/03-00-quality-scenarios.md) | 필수 변형 94개, 책임 경계, V의 의미와 순위 및 정보 사용 계약 |</a:t>
+            </a:r>
+          </a:p>
+          <a:p xmlns:a="http://schemas.openxmlformats.org/drawingml/2006/main">
+            <a:r>
+              <a:t>| S01 | Chen et al., 2019, [BERT for Joint Intent Classification and Slot Filling, Table 2](https://arxiv.org/html/1902.10909) | SNIPS의 문장 전체 semantic frame accuracy 92.8% |</a:t>
+            </a:r>
+          </a:p>
+          <a:p xmlns:a="http://schemas.openxmlformats.org/drawingml/2006/main">
+            <a:r>
+              <a:t>| S02 | Yao et al., 2024, [tau-bench](https://arxiv.org/abs/2406.12045) | 대화 종료 뒤 실제 상태와 정답 상태를 대조하는 성공 판정 |</a:t>
+            </a:r>
+          </a:p>
+          <a:p xmlns:a="http://schemas.openxmlformats.org/drawingml/2006/main">
+            <a:r>
+              <a:t>| S03 | Cao et al., 2026, [Clarify or Answer](https://arxiv.org/abs/2601.16400) | 필요할 때 단일 집중 질문을 사용하는 시각 질의 접근, preprint |</a:t>
+            </a:r>
+          </a:p>
+          <a:p xmlns:a="http://schemas.openxmlformats.org/drawingml/2006/main">
+            <a:r>
+              <a:t>| S04 | Jakob Nielsen, 2019, [The 3 Response Time Limits in Interaction Design](https://www.nngroup.com/videos/3-response-time-limits-interaction-design/) | 0.1초, 1초, 10초의 사용자 반응 기준 |</a:t>
+            </a:r>
+          </a:p>
+          <a:p xmlns:a="http://schemas.openxmlformats.org/drawingml/2006/main">
+            <a:r>
+              <a:t>| S05 | SEI, 2003, [Deriving Architectural Tactics, Modifiability](https://www.sei.cmu.edu/documents/704/2003_005_001_14213.pdf) | 책임 변경과 변경 전파가 개발 및 시험 비용에 미치는 영향 |</a:t>
+            </a:r>
+          </a:p>
+          <a:p xmlns:a="http://schemas.openxmlformats.org/drawingml/2006/main">
+            <a:r>
+              <a:t>| S06 | Samsung, [Galaxy Book6 Ultra NP960UJH-XG3IN 공식 사양](https://www.samsung.com/in/computers/galaxy-book/galaxy-book6-ultra-ultra-7-32gb-1tb-np960ujh-xg3in/) | 32GB LPDDR5X RAM, RTX 5070 Laptop 전용 8GB GDDR7 |</a:t>
+            </a:r>
+          </a:p>
+          <a:p xmlns:a="http://schemas.openxmlformats.org/drawingml/2006/main">
+            <a:r>
+              <a:t>| S07 | Lin et al., [AWQ](https://arxiv.org/abs/2306.00978) | 4bit LLM 양자화와 장치 배포의 연구 근거 |</a:t>
+            </a:r>
+          </a:p>
+          <a:p xmlns:a="http://schemas.openxmlformats.org/drawingml/2006/main">
+            <a:r>
+              <a:t>| S08 | Candea et al., OSDI 2004, [Microreboot: A Technique for Cheap Recovery](https://www.usenix.org/legacy/events/osdi04/tech/full_papers/candea/candea_html/index.html) | 상태와 실행을 분리하여 작은 실행 단위를 복구하는 구조 |</a:t>
+            </a:r>
+          </a:p>
+          <a:p xmlns:a="http://schemas.openxmlformats.org/drawingml/2006/main">
+            <a:r>
+              <a:t>| S09 | OpenTelemetry, [General SDK Configuration](https://opentelemetry.io/docs/languages/sdk-configuration/general/) | always_on 및 parentbased_always_on sampler 설정 |</a:t>
+            </a:r>
+          </a:p>
+          <a:p xmlns:a="http://schemas.openxmlformats.org/drawingml/2006/main">
+            <a:r>
+              <a:t>| S10 | NIST, [SP 800-53 Rev. 5](https://doi.org/10.6028/NIST.SP.800-53r5), AC-3 및 AC-6 | 승인된 접근의 집행과 최소 권한 |</a:t>
+            </a:r>
+          </a:p>
+          <a:p xmlns:a="http://schemas.openxmlformats.org/drawingml/2006/main">
+            <a:r>
+              <a:t/>
+            </a:r>
+          </a:p>
+          <a:p xmlns:a="http://schemas.openxmlformats.org/drawingml/2006/main">
+            <a:r>
+              <a:t>실제 시간 endpoint는 [event-boundary-contract](../../architecture/11-measurement/event-boundary-contract.md), 기존 의미와 qualification은 [core-asr-contract](../../architecture/08-quality-attributes/core-asr-contract.md)를 함께 읽는다. 이번 목표 제안이 기존 QA ID와 집계를 자동으로 대체하지 않는다.</a:t>
+            </a:r>
+          </a:p>
+          <a:p xmlns:a="http://schemas.openxmlformats.org/drawingml/2006/main">
+            <a:r>
+              <a:t/>
             </a:r>
           </a:p>
         </p:txBody>
@@ -1111,7 +4331,7 @@
   </p:cSld>
   <p:clrMap bg1="lt1" tx1="dk1" bg2="lt2" tx2="dk2" accent1="accent1" accent2="accent2" accent3="accent3" accent4="accent4" accent5="accent5" accent6="accent6" hlink="hlink" folHlink="folHlink"/>
   <p:sldLayoutIdLst>
-    <p:sldLayoutId xmlns:r="http://schemas.openxmlformats.org/officeDocument/2006/relationships" id="2147483649" r:id="R56c6fdfb8f8c43ae"/>
+    <p:sldLayoutId xmlns:r="http://schemas.openxmlformats.org/officeDocument/2006/relationships" id="2147483649" r:id="R1b28ddeb1b734fa7"/>
   </p:sldLayoutIdLst>
   <p:txStyles>
     <p:titleStyle>
@@ -1662,7 +4882,7 @@
           <p:cNvPr id="6" name="title">
             <a:extLst xmlns:a="http://schemas.openxmlformats.org/drawingml/2006/main">
               <a:ext uri="{FF2B5EF4-FFF2-40B4-BE49-F238E27FC236}">
-                <a16:creationId xmlns:a16="http://schemas.microsoft.com/office/drawing/2014/main" id="{F97A3D78-D60D-41CE-A522-A41B0459EFB0}"/>
+                <a16:creationId xmlns:a16="http://schemas.microsoft.com/office/drawing/2014/main" id="{DB647625-3622-46F5-BFCB-B0BDF65A1E53}"/>
               </a:ext>
             </a:extLst>
           </p:cNvPr>
@@ -1719,7 +4939,7 @@
           <p:cNvPr id="2" name="section">
             <a:extLst xmlns:a="http://schemas.openxmlformats.org/drawingml/2006/main">
               <a:ext uri="{FF2B5EF4-FFF2-40B4-BE49-F238E27FC236}">
-                <a16:creationId xmlns:a16="http://schemas.microsoft.com/office/drawing/2014/main" id="{9E6DBD7D-729A-4876-B314-94B5FE1FF1D8}"/>
+                <a16:creationId xmlns:a16="http://schemas.microsoft.com/office/drawing/2014/main" id="{89062FF2-E53F-47AD-9DD5-01E8917205E5}"/>
               </a:ext>
             </a:extLst>
           </p:cNvPr>
@@ -1766,7 +4986,7 @@
                 <a:ea typeface="Apple SD Gothic Neo"/>
                 <a:cs typeface="Apple SD Gothic Neo"/>
               </a:rPr>
-              <a:t>VIA 품질 관점과 우선순위  /  1~5순위</a:t>
+              <a:t>우선순위 1~2  /  기능과 시간</a:t>
             </a:r>
           </a:p>
         </p:txBody>
@@ -1776,7 +4996,7 @@
           <p:cNvPr id="3" name="page">
             <a:extLst xmlns:a="http://schemas.openxmlformats.org/drawingml/2006/main">
               <a:ext uri="{FF2B5EF4-FFF2-40B4-BE49-F238E27FC236}">
-                <a16:creationId xmlns:a16="http://schemas.microsoft.com/office/drawing/2014/main" id="{B08E673D-7D88-43B9-8B99-30A6D4D9CD1E}"/>
+                <a16:creationId xmlns:a16="http://schemas.microsoft.com/office/drawing/2014/main" id="{C50D0A50-CFB3-4560-9FA4-5DC042C11CB9}"/>
               </a:ext>
             </a:extLst>
           </p:cNvPr>
@@ -1836,7 +5056,7 @@
         </p:nvGraphicFramePr>
         <p:xfrm>
           <a:off xmlns:a="http://schemas.openxmlformats.org/drawingml/2006/main" x="457200" y="1733550"/>
-          <a:ext xmlns:a="http://schemas.openxmlformats.org/drawingml/2006/main" cx="17373600" cy="7829550"/>
+          <a:ext xmlns:a="http://schemas.openxmlformats.org/drawingml/2006/main" cx="17373600" cy="7886700"/>
         </p:xfrm>
         <a:graphic xmlns:a="http://schemas.openxmlformats.org/drawingml/2006/main">
           <a:graphicData uri="http://schemas.openxmlformats.org/drawingml/2006/table">
@@ -1848,7 +5068,7 @@
                 <a:gridCol w="11668125"/>
                 <a:gridCol w="1181100"/>
               </a:tblGrid>
-              <a:tr h="514350">
+              <a:tr h="552450">
                 <a:tc>
                   <a:txBody>
                     <a:bodyPr/>
@@ -1914,7 +5134,7 @@
                           <a:ea typeface="Apple SD Gothic Neo"/>
                           <a:cs typeface="Apple SD Gothic Neo"/>
                         </a:rPr>
-                        <a:t>설명 / 목표 / 측정 방법(초안)</a:t>
+                        <a:t>설명 / 목표 수치 / 측정 방법</a:t>
                       </a:r>
                     </a:p>
                   </a:txBody>
@@ -1950,7 +5170,7 @@
                   </a:tcPr>
                 </a:tc>
               </a:tr>
-              <a:tr h="914400">
+              <a:tr h="1466850">
                 <a:tc>
                   <a:txBody>
                     <a:bodyPr/>
@@ -2008,7 +5228,7 @@
                     <a:p>
                       <a:pPr algn="l"/>
                       <a:r>
-                        <a:rPr sz="1650" b="0">
+                        <a:rPr sz="2175" b="0">
                           <a:solidFill>
                             <a:srgbClr val="17232E"/>
                           </a:solidFill>
@@ -2016,13 +5236,13 @@
                           <a:ea typeface="Apple SD Gothic Neo"/>
                           <a:cs typeface="Apple SD Gothic Neo"/>
                         </a:rPr>
-                        <a:t>사용자의 의도와 확인된 사실에 맞게 요청의 의미, 업무 연결, 실행 상태와 결과 전달을 처리해야 한다.</a:t>
+                        <a:t>사용자 요청을 의도에 맞게 정확히 처리해야 한다.</a:t>
                       </a:r>
                     </a:p>
                     <a:p>
                       <a:pPr algn="l"/>
                       <a:r>
-                        <a:rPr sz="1650" b="1">
+                        <a:rPr sz="2175" b="1">
                           <a:solidFill>
                             <a:srgbClr val="2873B9"/>
                           </a:solidFill>
@@ -2030,13 +5250,13 @@
                           <a:ea typeface="Apple SD Gothic Neo"/>
                           <a:cs typeface="Apple SD Gothic Neo"/>
                         </a:rPr>
-                        <a:t>목표  정확 처리율(%) 목표 미정 · 다른 업무 오실행·중복 실행 0건</a:t>
+                        <a:t>목표  정확 처리율 ≥ 90%</a:t>
                       </a:r>
                     </a:p>
                     <a:p>
                       <a:pPr algn="l"/>
                       <a:r>
-                        <a:rPr sz="1575" b="0">
+                        <a:rPr sz="2100" b="0">
                           <a:solidFill>
                             <a:srgbClr val="3E4853"/>
                           </a:solidFill>
@@ -2044,7 +5264,7 @@
                           <a:ea typeface="Apple SD Gothic Neo"/>
                           <a:cs typeface="Apple SD Gothic Neo"/>
                         </a:rPr>
-                        <a:t>측정  동일 입력의 기대 의미·연결·상태·전달을 실제 기록과 대조해 정확 처리율과 금지 오류 건수를 측정</a:t>
+                        <a:t>측정  전체 1,880회 시험에서 요청 전체가 정답인 비율</a:t>
                       </a:r>
                     </a:p>
                   </a:txBody>
@@ -2080,7 +5300,7 @@
                   </a:tcPr>
                 </a:tc>
               </a:tr>
-              <a:tr h="914400">
+              <a:tr h="1466850">
                 <a:tc>
                   <a:txBody>
                     <a:bodyPr/>
@@ -2138,7 +5358,7 @@
                     <a:p>
                       <a:pPr algn="l"/>
                       <a:r>
-                        <a:rPr sz="1650" b="0">
+                        <a:rPr sz="2175" b="0">
                           <a:solidFill>
                             <a:srgbClr val="17232E"/>
                           </a:solidFill>
@@ -2146,13 +5366,13 @@
                           <a:ea typeface="Apple SD Gothic Neo"/>
                           <a:cs typeface="Apple SD Gothic Neo"/>
                         </a:rPr>
-                        <a:t>충분한 근거가 있는 요청에서 반복 설명, 재선택과 수동 업무 연결의 부담을 줄여 사용자 목표 달성을 도와야 한다.</a:t>
+                        <a:t>사용자가 적은 추가 입력으로 요청을 마칠 수 있어야 한다.</a:t>
                       </a:r>
                     </a:p>
                     <a:p>
                       <a:pPr algn="l"/>
                       <a:r>
-                        <a:rPr sz="1650" b="1">
+                        <a:rPr sz="2175" b="1">
                           <a:solidFill>
                             <a:srgbClr val="2873B9"/>
                           </a:solidFill>
@@ -2160,13 +5380,13 @@
                           <a:ea typeface="Apple SD Gothic Neo"/>
                           <a:cs typeface="Apple SD Gothic Neo"/>
                         </a:rPr>
-                        <a:t>목표  불필요한 사용자 단계(회)·추가 작업시간(s) 목표 미정</a:t>
+                        <a:t>목표  평균 사용자 개입 ≤ 1회/요청</a:t>
                       </a:r>
                     </a:p>
                     <a:p>
                       <a:pPr algn="l"/>
                       <a:r>
-                        <a:rPr sz="1575" b="0">
+                        <a:rPr sz="2100" b="0">
                           <a:solidFill>
                             <a:srgbClr val="3E4853"/>
                           </a:solidFill>
@@ -2174,7 +5394,7 @@
                           <a:ea typeface="Apple SD Gothic Neo"/>
                           <a:cs typeface="Apple SD Gothic Neo"/>
                         </a:rPr>
-                        <a:t>측정  같은 목표의 수행 과정에서 재설명·재선택·수동 연결 횟수와 사용자 작업시간을 기록</a:t>
+                        <a:t>측정  요청 뒤 필요한 사용자 추가 입력 횟수의 평균</a:t>
                       </a:r>
                     </a:p>
                   </a:txBody>
@@ -2210,7 +5430,7 @@
                   </a:tcPr>
                 </a:tc>
               </a:tr>
-              <a:tr h="914400">
+              <a:tr h="1466850">
                 <a:tc>
                   <a:txBody>
                     <a:bodyPr/>
@@ -2268,7 +5488,7 @@
                     <a:p>
                       <a:pPr algn="l"/>
                       <a:r>
-                        <a:rPr sz="1650" b="0">
+                        <a:rPr sz="2175" b="0">
                           <a:solidFill>
                             <a:srgbClr val="17232E"/>
                           </a:solidFill>
@@ -2276,13 +5496,13 @@
                           <a:ea typeface="Apple SD Gothic Neo"/>
                           <a:cs typeface="Apple SD Gothic Neo"/>
                         </a:rPr>
-                        <a:t>공통 요구에 포함된 기능과 완료 범위를 지원해 사용자가 필요한 목표를 달성할 수 있어야 한다.</a:t>
+                        <a:t>고정된 사용 시나리오의 필수 기능을 모두 지원해야 한다.</a:t>
                       </a:r>
                     </a:p>
                     <a:p>
                       <a:pPr algn="l"/>
                       <a:r>
-                        <a:rPr sz="1650" b="1">
+                        <a:rPr sz="2175" b="1">
                           <a:solidFill>
                             <a:srgbClr val="2873B9"/>
                           </a:solidFill>
@@ -2290,13 +5510,13 @@
                           <a:ea typeface="Apple SD Gothic Neo"/>
                           <a:cs typeface="Apple SD Gothic Neo"/>
                         </a:rPr>
-                        <a:t>목표  기능 지원 범위 목표 미정 · 지원·부분 지원·미지원·미확인 구분</a:t>
+                        <a:t>목표  기능 지원 달성률 = 100%</a:t>
                       </a:r>
                     </a:p>
                     <a:p>
                       <a:pPr algn="l"/>
                       <a:r>
-                        <a:rPr sz="1575" b="0">
+                        <a:rPr sz="2100" b="0">
                           <a:solidFill>
                             <a:srgbClr val="3E4853"/>
                           </a:solidFill>
@@ -2304,7 +5524,7 @@
                           <a:ea typeface="Apple SD Gothic Neo"/>
                           <a:cs typeface="Apple SD Gothic Neo"/>
                         </a:rPr>
-                        <a:t>측정  고정 UC와 필수 변형별 지원 수준·제한·완료 범위·수동 우회를 공통 요구표에 대조</a:t>
+                        <a:t>측정  필수 UC 변형 94개 중 완전 지원 비율</a:t>
                       </a:r>
                     </a:p>
                   </a:txBody>
@@ -2340,7 +5560,7 @@
                   </a:tcPr>
                 </a:tc>
               </a:tr>
-              <a:tr h="914400">
+              <a:tr h="1466850">
                 <a:tc>
                   <a:txBody>
                     <a:bodyPr/>
@@ -2381,7 +5601,7 @@
                           <a:ea typeface="Apple SD Gothic Neo"/>
                           <a:cs typeface="Apple SD Gothic Neo"/>
                         </a:rPr>
-                        <a:t>상호작용 반응성</a:t>
+                        <a:t>응답 신속성</a:t>
                       </a:r>
                     </a:p>
                   </a:txBody>
@@ -2398,7 +5618,7 @@
                     <a:p>
                       <a:pPr algn="l"/>
                       <a:r>
-                        <a:rPr sz="1650" b="0">
+                        <a:rPr sz="2175" b="0">
                           <a:solidFill>
                             <a:srgbClr val="17232E"/>
                           </a:solidFill>
@@ -2406,13 +5626,13 @@
                           <a:ea typeface="Apple SD Gothic Neo"/>
                           <a:cs typeface="Apple SD Gothic Neo"/>
                         </a:rPr>
-                        <a:t>사용자 입력이나 제어 사건 뒤 유효한 응답 또는 실제 제어 효과가 신속하게 나타나야 한다.</a:t>
+                        <a:t>사용자 입력에 대한 유효한 반응이 빠르게 나타나야 한다.</a:t>
                       </a:r>
                     </a:p>
                     <a:p>
                       <a:pPr algn="l"/>
                       <a:r>
-                        <a:rPr sz="1650" b="1">
+                        <a:rPr sz="2175" b="1">
                           <a:solidFill>
                             <a:srgbClr val="2873B9"/>
                           </a:solidFill>
@@ -2420,13 +5640,13 @@
                           <a:ea typeface="Apple SD Gothic Neo"/>
                           <a:cs typeface="Apple SD Gothic Neo"/>
                         </a:rPr>
-                        <a:t>목표  응답·상태 전달·제어·음성 중단의 허용 지연(ms) 미정</a:t>
+                        <a:t>목표  p95 반응 지연 ≤ 1초</a:t>
                       </a:r>
                     </a:p>
                     <a:p>
                       <a:pPr algn="l"/>
                       <a:r>
-                        <a:rPr sz="1575" b="0">
+                        <a:rPr sz="2100" b="0">
                           <a:solidFill>
                             <a:srgbClr val="3E4853"/>
                           </a:solidFill>
@@ -2434,7 +5654,7 @@
                           <a:ea typeface="Apple SD Gothic Neo"/>
                           <a:cs typeface="Apple SD Gothic Neo"/>
                         </a:rPr>
-                        <a:t>측정  실제 입력·상태·제어 사건부터 유효한 표시·발화·효과까지 VIA 지연을 종류별 계측</a:t>
+                        <a:t>측정  응답과 제어 종류별 p95 지연 중 최댓값</a:t>
                       </a:r>
                     </a:p>
                   </a:txBody>
@@ -2470,7 +5690,7 @@
                   </a:tcPr>
                 </a:tc>
               </a:tr>
-              <a:tr h="914400">
+              <a:tr h="1466850">
                 <a:tc>
                   <a:txBody>
                     <a:bodyPr/>
@@ -2511,21 +5731,7 @@
                           <a:ea typeface="Apple SD Gothic Neo"/>
                           <a:cs typeface="Apple SD Gothic Neo"/>
                         </a:rPr>
-                        <a:t>VIA 귀속 요청</a:t>
-                      </a:r>
-                    </a:p>
-                    <a:p>
-                      <a:pPr algn="ctr"/>
-                      <a:r>
-                        <a:rPr sz="2175" b="1">
-                          <a:solidFill>
-                            <a:srgbClr val="183E4A"/>
-                          </a:solidFill>
-                          <a:latin typeface="Apple SD Gothic Neo"/>
-                          <a:ea typeface="Apple SD Gothic Neo"/>
-                          <a:cs typeface="Apple SD Gothic Neo"/>
-                        </a:rPr>
-                        <a:t>완료 시간</a:t>
+                        <a:t>요청 완료 신속성</a:t>
                       </a:r>
                     </a:p>
                   </a:txBody>
@@ -2542,7 +5748,7 @@
                     <a:p>
                       <a:pPr algn="l"/>
                       <a:r>
-                        <a:rPr sz="1650" b="0">
+                        <a:rPr sz="2175" b="0">
                           <a:solidFill>
                             <a:srgbClr val="17232E"/>
                           </a:solidFill>
@@ -2550,13 +5756,13 @@
                           <a:ea typeface="Apple SD Gothic Neo"/>
                           <a:cs typeface="Apple SD Gothic Neo"/>
                         </a:rPr>
-                        <a:t>요청 시작부터 필요한 최종 결과의 실제 전달까지 VIA가 책임지는 처리와 대기 시간을 줄여야 한다.</a:t>
+                        <a:t>필요한 최종 결과를 사용자에게 빠르게 전달해야 한다.</a:t>
                       </a:r>
                     </a:p>
                     <a:p>
                       <a:pPr algn="l"/>
                       <a:r>
-                        <a:rPr sz="1650" b="1">
+                        <a:rPr sz="2175" b="1">
                           <a:solidFill>
                             <a:srgbClr val="2873B9"/>
                           </a:solidFill>
@@ -2564,13 +5770,13 @@
                           <a:ea typeface="Apple SD Gothic Neo"/>
                           <a:cs typeface="Apple SD Gothic Neo"/>
                         </a:rPr>
-                        <a:t>목표  직접·위임·의존 요청별 VIA 귀속 완료시간(ms) 미정</a:t>
+                        <a:t>목표  p95 VIA 완료시간 ≤ 10초</a:t>
                       </a:r>
                     </a:p>
                     <a:p>
                       <a:pPr algn="l"/>
                       <a:r>
-                        <a:rPr sz="1575" b="0">
+                        <a:rPr sz="2100" b="0">
                           <a:solidFill>
                             <a:srgbClr val="3E4853"/>
                           </a:solidFill>
@@ -2578,7 +5784,7 @@
                           <a:ea typeface="Apple SD Gothic Neo"/>
                           <a:cs typeface="Apple SD Gothic Neo"/>
                         </a:rPr>
-                        <a:t>측정  최종 전달까지 사건·의존 경로를 추적해 VIA 구간을 귀속하고 외부 실행·사람 대기를 분리</a:t>
+                        <a:t>측정  처리 경로별 p95 VIA 책임 시간 중 최댓값</a:t>
                       </a:r>
                     </a:p>
                   </a:txBody>
@@ -2614,438 +5820,6 @@
                   </a:tcPr>
                 </a:tc>
               </a:tr>
-              <a:tr h="914400">
-                <a:tc>
-                  <a:txBody>
-                    <a:bodyPr/>
-                    <a:lstStyle/>
-                    <a:p>
-                      <a:pPr algn="ctr"/>
-                      <a:r>
-                        <a:rPr sz="2175" b="1">
-                          <a:solidFill>
-                            <a:srgbClr val="183E4A"/>
-                          </a:solidFill>
-                          <a:latin typeface="Apple SD Gothic Neo"/>
-                          <a:ea typeface="Apple SD Gothic Neo"/>
-                          <a:cs typeface="Apple SD Gothic Neo"/>
-                        </a:rPr>
-                        <a:t>V-08</a:t>
-                      </a:r>
-                    </a:p>
-                  </a:txBody>
-                  <a:tcPr marL="95250" marR="95250" marT="28575" marB="28575" anchor="ctr">
-                    <a:solidFill>
-                      <a:srgbClr val="F8FAFB"/>
-                    </a:solidFill>
-                  </a:tcPr>
-                </a:tc>
-                <a:tc>
-                  <a:txBody>
-                    <a:bodyPr/>
-                    <a:lstStyle/>
-                    <a:p>
-                      <a:pPr algn="ctr"/>
-                      <a:r>
-                        <a:rPr sz="2175" b="1">
-                          <a:solidFill>
-                            <a:srgbClr val="183E4A"/>
-                          </a:solidFill>
-                          <a:latin typeface="Apple SD Gothic Neo"/>
-                          <a:ea typeface="Apple SD Gothic Neo"/>
-                          <a:cs typeface="Apple SD Gothic Neo"/>
-                        </a:rPr>
-                        <a:t>변경 용이성과</a:t>
-                      </a:r>
-                    </a:p>
-                    <a:p>
-                      <a:pPr algn="ctr"/>
-                      <a:r>
-                        <a:rPr sz="2175" b="1">
-                          <a:solidFill>
-                            <a:srgbClr val="183E4A"/>
-                          </a:solidFill>
-                          <a:latin typeface="Apple SD Gothic Neo"/>
-                          <a:ea typeface="Apple SD Gothic Neo"/>
-                          <a:cs typeface="Apple SD Gothic Neo"/>
-                        </a:rPr>
-                        <a:t>모듈성</a:t>
-                      </a:r>
-                    </a:p>
-                  </a:txBody>
-                  <a:tcPr marL="95250" marR="95250" marT="28575" marB="28575" anchor="ctr">
-                    <a:solidFill>
-                      <a:srgbClr val="F8FAFB"/>
-                    </a:solidFill>
-                  </a:tcPr>
-                </a:tc>
-                <a:tc>
-                  <a:txBody>
-                    <a:bodyPr/>
-                    <a:lstStyle/>
-                    <a:p>
-                      <a:pPr algn="l"/>
-                      <a:r>
-                        <a:rPr sz="1650" b="0">
-                          <a:solidFill>
-                            <a:srgbClr val="17232E"/>
-                          </a:solidFill>
-                          <a:latin typeface="Apple SD Gothic Neo"/>
-                          <a:ea typeface="Apple SD Gothic Neo"/>
-                          <a:cs typeface="Apple SD Gothic Neo"/>
-                        </a:rPr>
-                        <a:t>기능·계약 변경의 영향을 제한하고 다른 책임과 기존 기능을 유지하며 수정과 검증을 수행할 수 있어야 한다.</a:t>
-                      </a:r>
-                    </a:p>
-                    <a:p>
-                      <a:pPr algn="l"/>
-                      <a:r>
-                        <a:rPr sz="1650" b="1">
-                          <a:solidFill>
-                            <a:srgbClr val="2873B9"/>
-                          </a:solidFill>
-                          <a:latin typeface="Apple SD Gothic Neo"/>
-                          <a:ea typeface="Apple SD Gothic Neo"/>
-                          <a:cs typeface="Apple SD Gothic Neo"/>
-                        </a:rPr>
-                        <a:t>목표  변경 요소 수(개)·수정 및 회귀 검증 공수(인시) 목표 미정</a:t>
-                      </a:r>
-                    </a:p>
-                    <a:p>
-                      <a:pPr algn="l"/>
-                      <a:r>
-                        <a:rPr sz="1575" b="0">
-                          <a:solidFill>
-                            <a:srgbClr val="3E4853"/>
-                          </a:solidFill>
-                          <a:latin typeface="Apple SD Gothic Neo"/>
-                          <a:ea typeface="Apple SD Gothic Neo"/>
-                          <a:cs typeface="Apple SD Gothic Neo"/>
-                        </a:rPr>
-                        <a:t>측정  같은 변경 과제에서 요소·계약·상태·런타임의 변경과 수정·검증 공수 및 회귀 결과를 비교</a:t>
-                      </a:r>
-                    </a:p>
-                  </a:txBody>
-                  <a:tcPr marL="142875" marR="95250" marT="28575" marB="28575" anchor="ctr">
-                    <a:solidFill>
-                      <a:srgbClr val="F8FAFB"/>
-                    </a:solidFill>
-                  </a:tcPr>
-                </a:tc>
-                <a:tc>
-                  <a:txBody>
-                    <a:bodyPr/>
-                    <a:lstStyle/>
-                    <a:p>
-                      <a:pPr algn="ctr"/>
-                      <a:r>
-                        <a:rPr sz="1875" b="1">
-                          <a:solidFill>
-                            <a:srgbClr val="183E4A"/>
-                          </a:solidFill>
-                          <a:latin typeface="Apple SD Gothic Neo"/>
-                          <a:ea typeface="Apple SD Gothic Neo"/>
-                          <a:cs typeface="Apple SD Gothic Neo"/>
-                        </a:rPr>
-                        <a:t>3</a:t>
-                      </a:r>
-                    </a:p>
-                  </a:txBody>
-                  <a:tcPr marL="95250" marR="95250" marT="28575" marB="28575" anchor="ctr">
-                    <a:solidFill>
-                      <a:srgbClr val="F8FAFB"/>
-                    </a:solidFill>
-                  </a:tcPr>
-                </a:tc>
-              </a:tr>
-              <a:tr h="914400">
-                <a:tc>
-                  <a:txBody>
-                    <a:bodyPr/>
-                    <a:lstStyle/>
-                    <a:p>
-                      <a:pPr algn="ctr"/>
-                      <a:r>
-                        <a:rPr sz="2175" b="1">
-                          <a:solidFill>
-                            <a:srgbClr val="183E4A"/>
-                          </a:solidFill>
-                          <a:latin typeface="Apple SD Gothic Neo"/>
-                          <a:ea typeface="Apple SD Gothic Neo"/>
-                          <a:cs typeface="Apple SD Gothic Neo"/>
-                        </a:rPr>
-                        <a:t>V-06</a:t>
-                      </a:r>
-                    </a:p>
-                  </a:txBody>
-                  <a:tcPr marL="95250" marR="95250" marT="28575" marB="28575" anchor="ctr">
-                    <a:solidFill>
-                      <a:srgbClr val="EEF4F5"/>
-                    </a:solidFill>
-                  </a:tcPr>
-                </a:tc>
-                <a:tc>
-                  <a:txBody>
-                    <a:bodyPr/>
-                    <a:lstStyle/>
-                    <a:p>
-                      <a:pPr algn="ctr"/>
-                      <a:r>
-                        <a:rPr sz="2175" b="1">
-                          <a:solidFill>
-                            <a:srgbClr val="183E4A"/>
-                          </a:solidFill>
-                          <a:latin typeface="Apple SD Gothic Neo"/>
-                          <a:ea typeface="Apple SD Gothic Neo"/>
-                          <a:cs typeface="Apple SD Gothic Neo"/>
-                        </a:rPr>
-                        <a:t>자원 활용성과</a:t>
-                      </a:r>
-                    </a:p>
-                    <a:p>
-                      <a:pPr algn="ctr"/>
-                      <a:r>
-                        <a:rPr sz="2175" b="1">
-                          <a:solidFill>
-                            <a:srgbClr val="183E4A"/>
-                          </a:solidFill>
-                          <a:latin typeface="Apple SD Gothic Neo"/>
-                          <a:ea typeface="Apple SD Gothic Neo"/>
-                          <a:cs typeface="Apple SD Gothic Neo"/>
-                        </a:rPr>
-                        <a:t>수용량</a:t>
-                      </a:r>
-                    </a:p>
-                  </a:txBody>
-                  <a:tcPr marL="95250" marR="95250" marT="28575" marB="28575" anchor="ctr">
-                    <a:solidFill>
-                      <a:srgbClr val="EEF4F5"/>
-                    </a:solidFill>
-                  </a:tcPr>
-                </a:tc>
-                <a:tc>
-                  <a:txBody>
-                    <a:bodyPr/>
-                    <a:lstStyle/>
-                    <a:p>
-                      <a:pPr algn="l"/>
-                      <a:r>
-                        <a:rPr sz="1650" b="0">
-                          <a:solidFill>
-                            <a:srgbClr val="17232E"/>
-                          </a:solidFill>
-                          <a:latin typeface="Apple SD Gothic Neo"/>
-                          <a:ea typeface="Apple SD Gothic Neo"/>
-                          <a:cs typeface="Apple SD Gothic Neo"/>
-                        </a:rPr>
-                        <a:t>필요한 기능을 함께 유지하는 자원 비용을 줄이고 정상 처리 가능한 부하 범위를 확보해야 한다.</a:t>
-                      </a:r>
-                    </a:p>
-                    <a:p>
-                      <a:pPr algn="l"/>
-                      <a:r>
-                        <a:rPr sz="1650" b="1">
-                          <a:solidFill>
-                            <a:srgbClr val="2873B9"/>
-                          </a:solidFill>
-                          <a:latin typeface="Apple SD Gothic Neo"/>
-                          <a:ea typeface="Apple SD Gothic Neo"/>
-                          <a:cs typeface="Apple SD Gothic Neo"/>
-                        </a:rPr>
-                        <a:t>목표  메모리·연산·에너지·저장 예산 및 동시 업무·입력 부하 상한 미정</a:t>
-                      </a:r>
-                    </a:p>
-                    <a:p>
-                      <a:pPr algn="l"/>
-                      <a:r>
-                        <a:rPr sz="1575" b="0">
-                          <a:solidFill>
-                            <a:srgbClr val="3E4853"/>
-                          </a:solidFill>
-                          <a:latin typeface="Apple SD Gothic Neo"/>
-                          <a:ea typeface="Apple SD Gothic Neo"/>
-                          <a:cs typeface="Apple SD Gothic Neo"/>
-                        </a:rPr>
-                        <a:t>측정  전체 가중치·KV·helper·buffer를 포함해 자원을 계측하고 부하를 높여 처리 한계를 확인</a:t>
-                      </a:r>
-                    </a:p>
-                  </a:txBody>
-                  <a:tcPr marL="142875" marR="95250" marT="28575" marB="28575" anchor="ctr">
-                    <a:solidFill>
-                      <a:srgbClr val="EEF4F5"/>
-                    </a:solidFill>
-                  </a:tcPr>
-                </a:tc>
-                <a:tc>
-                  <a:txBody>
-                    <a:bodyPr/>
-                    <a:lstStyle/>
-                    <a:p>
-                      <a:pPr algn="ctr"/>
-                      <a:r>
-                        <a:rPr sz="1875" b="1">
-                          <a:solidFill>
-                            <a:srgbClr val="183E4A"/>
-                          </a:solidFill>
-                          <a:latin typeface="Apple SD Gothic Neo"/>
-                          <a:ea typeface="Apple SD Gothic Neo"/>
-                          <a:cs typeface="Apple SD Gothic Neo"/>
-                        </a:rPr>
-                        <a:t>4</a:t>
-                      </a:r>
-                    </a:p>
-                  </a:txBody>
-                  <a:tcPr marL="95250" marR="95250" marT="28575" marB="28575" anchor="ctr">
-                    <a:solidFill>
-                      <a:srgbClr val="EEF4F5"/>
-                    </a:solidFill>
-                  </a:tcPr>
-                </a:tc>
-              </a:tr>
-              <a:tr h="914400">
-                <a:tc>
-                  <a:txBody>
-                    <a:bodyPr/>
-                    <a:lstStyle/>
-                    <a:p>
-                      <a:pPr algn="ctr"/>
-                      <a:r>
-                        <a:rPr sz="2175" b="1">
-                          <a:solidFill>
-                            <a:srgbClr val="183E4A"/>
-                          </a:solidFill>
-                          <a:latin typeface="Apple SD Gothic Neo"/>
-                          <a:ea typeface="Apple SD Gothic Neo"/>
-                          <a:cs typeface="Apple SD Gothic Neo"/>
-                        </a:rPr>
-                        <a:t>V-07</a:t>
-                      </a:r>
-                    </a:p>
-                  </a:txBody>
-                  <a:tcPr marL="95250" marR="95250" marT="28575" marB="28575" anchor="ctr">
-                    <a:solidFill>
-                      <a:srgbClr val="F8FAFB"/>
-                    </a:solidFill>
-                  </a:tcPr>
-                </a:tc>
-                <a:tc>
-                  <a:txBody>
-                    <a:bodyPr/>
-                    <a:lstStyle/>
-                    <a:p>
-                      <a:pPr algn="ctr"/>
-                      <a:r>
-                        <a:rPr sz="2175" b="1">
-                          <a:solidFill>
-                            <a:srgbClr val="183E4A"/>
-                          </a:solidFill>
-                          <a:latin typeface="Apple SD Gothic Neo"/>
-                          <a:ea typeface="Apple SD Gothic Neo"/>
-                          <a:cs typeface="Apple SD Gothic Neo"/>
-                        </a:rPr>
-                        <a:t>결함 허용성과</a:t>
-                      </a:r>
-                    </a:p>
-                    <a:p>
-                      <a:pPr algn="ctr"/>
-                      <a:r>
-                        <a:rPr sz="2175" b="1">
-                          <a:solidFill>
-                            <a:srgbClr val="183E4A"/>
-                          </a:solidFill>
-                          <a:latin typeface="Apple SD Gothic Neo"/>
-                          <a:ea typeface="Apple SD Gothic Neo"/>
-                          <a:cs typeface="Apple SD Gothic Neo"/>
-                        </a:rPr>
-                        <a:t>복구성</a:t>
-                      </a:r>
-                    </a:p>
-                  </a:txBody>
-                  <a:tcPr marL="95250" marR="95250" marT="28575" marB="28575" anchor="ctr">
-                    <a:solidFill>
-                      <a:srgbClr val="F8FAFB"/>
-                    </a:solidFill>
-                  </a:tcPr>
-                </a:tc>
-                <a:tc>
-                  <a:txBody>
-                    <a:bodyPr/>
-                    <a:lstStyle/>
-                    <a:p>
-                      <a:pPr algn="l"/>
-                      <a:r>
-                        <a:rPr sz="1650" b="0">
-                          <a:solidFill>
-                            <a:srgbClr val="17232E"/>
-                          </a:solidFill>
-                          <a:latin typeface="Apple SD Gothic Neo"/>
-                          <a:ea typeface="Apple SD Gothic Neo"/>
-                          <a:cs typeface="Apple SD Gothic Neo"/>
-                        </a:rPr>
-                        <a:t>장애 중 무관한 기능과 업무를 유지하고 장애 뒤 확인 가능한 상태와 제어를 올바르게 복원해야 한다.</a:t>
-                      </a:r>
-                    </a:p>
-                    <a:p>
-                      <a:pPr algn="l"/>
-                      <a:r>
-                        <a:rPr sz="1650" b="1">
-                          <a:solidFill>
-                            <a:srgbClr val="2873B9"/>
-                          </a:solidFill>
-                          <a:latin typeface="Apple SD Gothic Neo"/>
-                          <a:ea typeface="Apple SD Gothic Neo"/>
-                          <a:cs typeface="Apple SD Gothic Neo"/>
-                        </a:rPr>
-                        <a:t>목표  장애 유지·복구율(%)과 복구시간(ms) 미정 · 오실행·중복 실행 0건</a:t>
-                      </a:r>
-                    </a:p>
-                    <a:p>
-                      <a:pPr algn="l"/>
-                      <a:r>
-                        <a:rPr sz="1575" b="0">
-                          <a:solidFill>
-                            <a:srgbClr val="3E4853"/>
-                          </a:solidFill>
-                          <a:latin typeface="Apple SD Gothic Neo"/>
-                          <a:ea typeface="Apple SD Gothic Neo"/>
-                          <a:cs typeface="Apple SD Gothic Neo"/>
-                        </a:rPr>
-                        <a:t>측정  동일 장애를 주입해 무관한 기능 영향과 올바른 상태·제어 복귀까지의 시간·성공 여부를 측정</a:t>
-                      </a:r>
-                    </a:p>
-                  </a:txBody>
-                  <a:tcPr marL="142875" marR="95250" marT="28575" marB="28575" anchor="ctr">
-                    <a:solidFill>
-                      <a:srgbClr val="F8FAFB"/>
-                    </a:solidFill>
-                  </a:tcPr>
-                </a:tc>
-                <a:tc>
-                  <a:txBody>
-                    <a:bodyPr/>
-                    <a:lstStyle/>
-                    <a:p>
-                      <a:pPr algn="ctr"/>
-                      <a:r>
-                        <a:rPr sz="1875" b="1">
-                          <a:solidFill>
-                            <a:srgbClr val="183E4A"/>
-                          </a:solidFill>
-                          <a:latin typeface="Apple SD Gothic Neo"/>
-                          <a:ea typeface="Apple SD Gothic Neo"/>
-                          <a:cs typeface="Apple SD Gothic Neo"/>
-                        </a:rPr>
-                        <a:t>5</a:t>
-                      </a:r>
-                    </a:p>
-                  </a:txBody>
-                  <a:tcPr marL="95250" marR="95250" marT="28575" marB="28575" anchor="ctr">
-                    <a:solidFill>
-                      <a:srgbClr val="F8FAFB"/>
-                    </a:solidFill>
-                  </a:tcPr>
-                </a:tc>
-              </a:tr>
             </a:tbl>
           </a:graphicData>
         </a:graphic>
@@ -3055,7 +5829,7 @@
           <p:cNvPr id="5" name="footnote">
             <a:extLst xmlns:a="http://schemas.openxmlformats.org/drawingml/2006/main">
               <a:ext uri="{FF2B5EF4-FFF2-40B4-BE49-F238E27FC236}">
-                <a16:creationId xmlns:a16="http://schemas.microsoft.com/office/drawing/2014/main" id="{B9E5BCB0-E4E3-4E57-B6E7-FB8A1375B2EA}"/>
+                <a16:creationId xmlns:a16="http://schemas.microsoft.com/office/drawing/2014/main" id="{4C8E8B47-EA73-4AF7-9F60-62B8E046C703}"/>
               </a:ext>
             </a:extLst>
           </p:cNvPr>
@@ -3102,7 +5876,7 @@
                 <a:ea typeface="Apple SD Gothic Neo"/>
                 <a:cs typeface="Apple SD Gothic Neo"/>
               </a:rPr>
-              <a:t>수치 목표 미확정, 측정 방법 초안. 0건은 기존 금지 조건이며 측정 전 모든 DP의 공통 계약을 확정한다.</a:t>
+              <a:t>근거 기반 목표 제안. 출처와 상세 측정 절차는 발표자 노트 및 Markdown에 수록. 구현 및 측정 결과 없음.</a:t>
             </a:r>
           </a:p>
         </p:txBody>
@@ -3110,7 +5884,7 @@
     </p:spTree>
     <p:extLst>
       <p:ext uri="{BB962C8B-B14F-4D97-AF65-F5344CB8AC3E}">
-        <p14:creationId xmlns:p14="http://schemas.microsoft.com/office/powerpoint/2010/main" val="1421453911"/>
+        <p14:creationId xmlns:p14="http://schemas.microsoft.com/office/powerpoint/2010/main" val="119264758"/>
       </p:ext>
     </p:extLst>
   </p:cSld>
@@ -3141,7 +5915,7 @@
           <p:cNvPr id="6" name="title">
             <a:extLst xmlns:a="http://schemas.openxmlformats.org/drawingml/2006/main">
               <a:ext uri="{FF2B5EF4-FFF2-40B4-BE49-F238E27FC236}">
-                <a16:creationId xmlns:a16="http://schemas.microsoft.com/office/drawing/2014/main" id="{4EF7A8EE-915C-4D56-B868-046074B87A6F}"/>
+                <a16:creationId xmlns:a16="http://schemas.microsoft.com/office/drawing/2014/main" id="{2AFF124F-D683-4BB0-A751-7B6C847D9450}"/>
               </a:ext>
             </a:extLst>
           </p:cNvPr>
@@ -3198,7 +5972,7 @@
           <p:cNvPr id="2" name="section">
             <a:extLst xmlns:a="http://schemas.openxmlformats.org/drawingml/2006/main">
               <a:ext uri="{FF2B5EF4-FFF2-40B4-BE49-F238E27FC236}">
-                <a16:creationId xmlns:a16="http://schemas.microsoft.com/office/drawing/2014/main" id="{4D9891EF-E8AE-4C07-9089-450FB12A6385}"/>
+                <a16:creationId xmlns:a16="http://schemas.microsoft.com/office/drawing/2014/main" id="{09C22DDA-3122-48FA-B176-14CBFDD81507}"/>
               </a:ext>
             </a:extLst>
           </p:cNvPr>
@@ -3245,7 +6019,7 @@
                 <a:ea typeface="Apple SD Gothic Neo"/>
                 <a:cs typeface="Apple SD Gothic Neo"/>
               </a:rPr>
-              <a:t>VIA 품질 관점과 우선순위  /  공동 6순위</a:t>
+              <a:t>우선순위 3~6  /  변경, 메모리, 복구와 분석</a:t>
             </a:r>
           </a:p>
         </p:txBody>
@@ -3255,7 +6029,7 @@
           <p:cNvPr id="3" name="page">
             <a:extLst xmlns:a="http://schemas.openxmlformats.org/drawingml/2006/main">
               <a:ext uri="{FF2B5EF4-FFF2-40B4-BE49-F238E27FC236}">
-                <a16:creationId xmlns:a16="http://schemas.microsoft.com/office/drawing/2014/main" id="{093465CF-103A-4A53-9027-BA51D62D365C}"/>
+                <a16:creationId xmlns:a16="http://schemas.microsoft.com/office/drawing/2014/main" id="{68964259-B3A5-4BF3-A1FA-66D5F42259AB}"/>
               </a:ext>
             </a:extLst>
           </p:cNvPr>
@@ -3315,7 +6089,7 @@
         </p:nvGraphicFramePr>
         <p:xfrm>
           <a:off xmlns:a="http://schemas.openxmlformats.org/drawingml/2006/main" x="457200" y="1733550"/>
-          <a:ext xmlns:a="http://schemas.openxmlformats.org/drawingml/2006/main" cx="17373600" cy="7419975"/>
+          <a:ext xmlns:a="http://schemas.openxmlformats.org/drawingml/2006/main" cx="17373600" cy="7886700"/>
         </p:xfrm>
         <a:graphic xmlns:a="http://schemas.openxmlformats.org/drawingml/2006/main">
           <a:graphicData uri="http://schemas.openxmlformats.org/drawingml/2006/table">
@@ -3327,7 +6101,7 @@
                 <a:gridCol w="11668125"/>
                 <a:gridCol w="1181100"/>
               </a:tblGrid>
-              <a:tr h="514350">
+              <a:tr h="552450">
                 <a:tc>
                   <a:txBody>
                     <a:bodyPr/>
@@ -3393,7 +6167,7 @@
                           <a:ea typeface="Apple SD Gothic Neo"/>
                           <a:cs typeface="Apple SD Gothic Neo"/>
                         </a:rPr>
-                        <a:t>설명 / 목표 / 측정 방법(초안)</a:t>
+                        <a:t>설명 / 목표 수치 / 측정 방법</a:t>
                       </a:r>
                     </a:p>
                   </a:txBody>
@@ -3429,7 +6203,7 @@
                   </a:tcPr>
                 </a:tc>
               </a:tr>
-              <a:tr h="1381125">
+              <a:tr h="1466850">
                 <a:tc>
                   <a:txBody>
                     <a:bodyPr/>
@@ -3445,7 +6219,7 @@
                           <a:ea typeface="Apple SD Gothic Neo"/>
                           <a:cs typeface="Apple SD Gothic Neo"/>
                         </a:rPr>
-                        <a:t>V-09</a:t>
+                        <a:t>V-08</a:t>
                       </a:r>
                     </a:p>
                   </a:txBody>
@@ -3470,21 +6244,7 @@
                           <a:ea typeface="Apple SD Gothic Neo"/>
                           <a:cs typeface="Apple SD Gothic Neo"/>
                         </a:rPr>
-                        <a:t>분석 및</a:t>
-                      </a:r>
-                    </a:p>
-                    <a:p>
-                      <a:pPr algn="ctr"/>
-                      <a:r>
-                        <a:rPr sz="2175" b="1">
-                          <a:solidFill>
-                            <a:srgbClr val="183E4A"/>
-                          </a:solidFill>
-                          <a:latin typeface="Apple SD Gothic Neo"/>
-                          <a:ea typeface="Apple SD Gothic Neo"/>
-                          <a:cs typeface="Apple SD Gothic Neo"/>
-                        </a:rPr>
-                        <a:t>시험 용이성</a:t>
+                        <a:t>변경 용이성</a:t>
                       </a:r>
                     </a:p>
                   </a:txBody>
@@ -3501,7 +6261,7 @@
                     <a:p>
                       <a:pPr algn="l"/>
                       <a:r>
-                        <a:rPr sz="1800" b="0">
+                        <a:rPr sz="2175" b="0">
                           <a:solidFill>
                             <a:srgbClr val="17232E"/>
                           </a:solidFill>
@@ -3509,13 +6269,13 @@
                           <a:ea typeface="Apple SD Gothic Neo"/>
                           <a:cs typeface="Apple SD Gothic Neo"/>
                         </a:rPr>
-                        <a:t>실패 원인을 구분하고 필요한 사건과 장애를 통제하며 기대 결과를 판정할 수 있어야 한다.</a:t>
+                        <a:t>기능 변경이 적은 설계 요소에만 영향을 주어야 한다.</a:t>
                       </a:r>
                     </a:p>
                     <a:p>
                       <a:pPr algn="l"/>
                       <a:r>
-                        <a:rPr sz="1800" b="1">
+                        <a:rPr sz="2175" b="1">
                           <a:solidFill>
                             <a:srgbClr val="2873B9"/>
                           </a:solidFill>
@@ -3523,13 +6283,13 @@
                           <a:ea typeface="Apple SD Gothic Neo"/>
                           <a:cs typeface="Apple SD Gothic Neo"/>
                         </a:rPr>
-                        <a:t>목표  진단 성공률(%)·시간(s), 시험 준비·판정 공수(인시) 미정</a:t>
+                        <a:t>목표  평균 변경 요소 수 ≤ 3개/변경</a:t>
                       </a:r>
                     </a:p>
                     <a:p>
                       <a:pPr algn="l"/>
                       <a:r>
-                        <a:rPr sz="1725" b="0">
+                        <a:rPr sz="2100" b="0">
                           <a:solidFill>
                             <a:srgbClr val="3E4853"/>
                           </a:solidFill>
@@ -3537,7 +6297,7 @@
                           <a:ea typeface="Apple SD Gothic Neo"/>
                           <a:cs typeface="Apple SD Gothic Neo"/>
                         </a:rPr>
-                        <a:t>측정  알려진 장애의 진단 시간·정확도와 사건 재현·주입·결과 판정에 필요한 공수를 각각 측정</a:t>
+                        <a:t>측정  공통 변경 과제별 수정 요소 수의 평균</a:t>
                       </a:r>
                     </a:p>
                   </a:txBody>
@@ -3562,7 +6322,7 @@
                           <a:ea typeface="Apple SD Gothic Neo"/>
                           <a:cs typeface="Apple SD Gothic Neo"/>
                         </a:rPr>
-                        <a:t>6 (공동)</a:t>
+                        <a:t>3</a:t>
                       </a:r>
                     </a:p>
                   </a:txBody>
@@ -3573,7 +6333,7 @@
                   </a:tcPr>
                 </a:tc>
               </a:tr>
-              <a:tr h="1381125">
+              <a:tr h="1466850">
                 <a:tc>
                   <a:txBody>
                     <a:bodyPr/>
@@ -3589,7 +6349,7 @@
                           <a:ea typeface="Apple SD Gothic Neo"/>
                           <a:cs typeface="Apple SD Gothic Neo"/>
                         </a:rPr>
-                        <a:t>V-10</a:t>
+                        <a:t>V-06</a:t>
                       </a:r>
                     </a:p>
                   </a:txBody>
@@ -3614,7 +6374,7 @@
                           <a:ea typeface="Apple SD Gothic Neo"/>
                           <a:cs typeface="Apple SD Gothic Neo"/>
                         </a:rPr>
-                        <a:t>기밀성</a:t>
+                        <a:t>메모리 효율성</a:t>
                       </a:r>
                     </a:p>
                   </a:txBody>
@@ -3631,7 +6391,7 @@
                     <a:p>
                       <a:pPr algn="l"/>
                       <a:r>
-                        <a:rPr sz="1800" b="0">
+                        <a:rPr sz="2175" b="0">
                           <a:solidFill>
                             <a:srgbClr val="17232E"/>
                           </a:solidFill>
@@ -3639,13 +6399,13 @@
                           <a:ea typeface="Apple SD Gothic Neo"/>
                           <a:cs typeface="Apple SD Gothic Neo"/>
                         </a:rPr>
-                        <a:t>허용된 대상과 목적에만 정보를 사용하고 권한 철회 또는 삭제 뒤의 신규 사용을 차단해야 한다.</a:t>
+                        <a:t>상시 실행 중에도 다른 PC 작업을 위한 메모리를 남겨야 한다.</a:t>
                       </a:r>
                     </a:p>
                     <a:p>
                       <a:pPr algn="l"/>
                       <a:r>
-                        <a:rPr sz="1800" b="1">
+                        <a:rPr sz="2175" b="1">
                           <a:solidFill>
                             <a:srgbClr val="2873B9"/>
                           </a:solidFill>
@@ -3653,13 +6413,13 @@
                           <a:ea typeface="Apple SD Gothic Neo"/>
                           <a:cs typeface="Apple SD Gothic Neo"/>
                         </a:rPr>
-                        <a:t>목표  무단 읽기·제공 및 철회·삭제 뒤 신규 사용 0건</a:t>
+                        <a:t>목표  최대 전체 메모리 ≤ 16GB</a:t>
                       </a:r>
                     </a:p>
                     <a:p>
                       <a:pPr algn="l"/>
                       <a:r>
-                        <a:rPr sz="1725" b="0">
+                        <a:rPr sz="2100" b="0">
                           <a:solidFill>
                             <a:srgbClr val="3E4853"/>
                           </a:solidFill>
@@ -3667,7 +6427,267 @@
                           <a:ea typeface="Apple SD Gothic Neo"/>
                           <a:cs typeface="Apple SD Gothic Neo"/>
                         </a:rPr>
-                        <a:t>측정  권한·수신자·목적·철회·삭제 시험에서 원문·파생 자료·cache·KV의 읽기·전달·재사용을 감사</a:t>
+                        <a:t>측정  8시간 부하 시험의 CPU와 GPU 메모리 합계 피크</a:t>
+                      </a:r>
+                    </a:p>
+                  </a:txBody>
+                  <a:tcPr marL="142875" marR="95250" marT="28575" marB="28575" anchor="ctr">
+                    <a:solidFill>
+                      <a:srgbClr val="F8FAFB"/>
+                    </a:solidFill>
+                  </a:tcPr>
+                </a:tc>
+                <a:tc>
+                  <a:txBody>
+                    <a:bodyPr/>
+                    <a:lstStyle/>
+                    <a:p>
+                      <a:pPr algn="ctr"/>
+                      <a:r>
+                        <a:rPr sz="1875" b="1">
+                          <a:solidFill>
+                            <a:srgbClr val="183E4A"/>
+                          </a:solidFill>
+                          <a:latin typeface="Apple SD Gothic Neo"/>
+                          <a:ea typeface="Apple SD Gothic Neo"/>
+                          <a:cs typeface="Apple SD Gothic Neo"/>
+                        </a:rPr>
+                        <a:t>4</a:t>
+                      </a:r>
+                    </a:p>
+                  </a:txBody>
+                  <a:tcPr marL="95250" marR="95250" marT="28575" marB="28575" anchor="ctr">
+                    <a:solidFill>
+                      <a:srgbClr val="F8FAFB"/>
+                    </a:solidFill>
+                  </a:tcPr>
+                </a:tc>
+              </a:tr>
+              <a:tr h="1466850">
+                <a:tc>
+                  <a:txBody>
+                    <a:bodyPr/>
+                    <a:lstStyle/>
+                    <a:p>
+                      <a:pPr algn="ctr"/>
+                      <a:r>
+                        <a:rPr sz="2175" b="1">
+                          <a:solidFill>
+                            <a:srgbClr val="183E4A"/>
+                          </a:solidFill>
+                          <a:latin typeface="Apple SD Gothic Neo"/>
+                          <a:ea typeface="Apple SD Gothic Neo"/>
+                          <a:cs typeface="Apple SD Gothic Neo"/>
+                        </a:rPr>
+                        <a:t>V-07</a:t>
+                      </a:r>
+                    </a:p>
+                  </a:txBody>
+                  <a:tcPr marL="95250" marR="95250" marT="28575" marB="28575" anchor="ctr">
+                    <a:solidFill>
+                      <a:srgbClr val="EEF4F5"/>
+                    </a:solidFill>
+                  </a:tcPr>
+                </a:tc>
+                <a:tc>
+                  <a:txBody>
+                    <a:bodyPr/>
+                    <a:lstStyle/>
+                    <a:p>
+                      <a:pPr algn="ctr"/>
+                      <a:r>
+                        <a:rPr sz="2175" b="1">
+                          <a:solidFill>
+                            <a:srgbClr val="183E4A"/>
+                          </a:solidFill>
+                          <a:latin typeface="Apple SD Gothic Neo"/>
+                          <a:ea typeface="Apple SD Gothic Neo"/>
+                          <a:cs typeface="Apple SD Gothic Neo"/>
+                        </a:rPr>
+                        <a:t>복구 용이성</a:t>
+                      </a:r>
+                    </a:p>
+                  </a:txBody>
+                  <a:tcPr marL="95250" marR="95250" marT="28575" marB="28575" anchor="ctr">
+                    <a:solidFill>
+                      <a:srgbClr val="EEF4F5"/>
+                    </a:solidFill>
+                  </a:tcPr>
+                </a:tc>
+                <a:tc>
+                  <a:txBody>
+                    <a:bodyPr/>
+                    <a:lstStyle/>
+                    <a:p>
+                      <a:pPr algn="l"/>
+                      <a:r>
+                        <a:rPr sz="2175" b="0">
+                          <a:solidFill>
+                            <a:srgbClr val="17232E"/>
+                          </a:solidFill>
+                          <a:latin typeface="Apple SD Gothic Neo"/>
+                          <a:ea typeface="Apple SD Gothic Neo"/>
+                          <a:cs typeface="Apple SD Gothic Neo"/>
+                        </a:rPr>
+                        <a:t>장애 뒤 기존 업무를 이어갈 수 있는 상태로 돌아와야 한다.</a:t>
+                      </a:r>
+                    </a:p>
+                    <a:p>
+                      <a:pPr algn="l"/>
+                      <a:r>
+                        <a:rPr sz="2175" b="1">
+                          <a:solidFill>
+                            <a:srgbClr val="2873B9"/>
+                          </a:solidFill>
+                          <a:latin typeface="Apple SD Gothic Neo"/>
+                          <a:ea typeface="Apple SD Gothic Neo"/>
+                          <a:cs typeface="Apple SD Gothic Neo"/>
+                        </a:rPr>
+                        <a:t>목표  최대 정상 복구시간 ≤ 10초</a:t>
+                      </a:r>
+                    </a:p>
+                    <a:p>
+                      <a:pPr algn="l"/>
+                      <a:r>
+                        <a:rPr sz="2100" b="0">
+                          <a:solidFill>
+                            <a:srgbClr val="3E4853"/>
+                          </a:solidFill>
+                          <a:latin typeface="Apple SD Gothic Neo"/>
+                          <a:ea typeface="Apple SD Gothic Neo"/>
+                          <a:cs typeface="Apple SD Gothic Neo"/>
+                        </a:rPr>
+                        <a:t>측정  장애 12종의 주입부터 올바른 업무 재개까지 계측</a:t>
+                      </a:r>
+                    </a:p>
+                  </a:txBody>
+                  <a:tcPr marL="142875" marR="95250" marT="28575" marB="28575" anchor="ctr">
+                    <a:solidFill>
+                      <a:srgbClr val="EEF4F5"/>
+                    </a:solidFill>
+                  </a:tcPr>
+                </a:tc>
+                <a:tc>
+                  <a:txBody>
+                    <a:bodyPr/>
+                    <a:lstStyle/>
+                    <a:p>
+                      <a:pPr algn="ctr"/>
+                      <a:r>
+                        <a:rPr sz="1875" b="1">
+                          <a:solidFill>
+                            <a:srgbClr val="183E4A"/>
+                          </a:solidFill>
+                          <a:latin typeface="Apple SD Gothic Neo"/>
+                          <a:ea typeface="Apple SD Gothic Neo"/>
+                          <a:cs typeface="Apple SD Gothic Neo"/>
+                        </a:rPr>
+                        <a:t>5</a:t>
+                      </a:r>
+                    </a:p>
+                  </a:txBody>
+                  <a:tcPr marL="95250" marR="95250" marT="28575" marB="28575" anchor="ctr">
+                    <a:solidFill>
+                      <a:srgbClr val="EEF4F5"/>
+                    </a:solidFill>
+                  </a:tcPr>
+                </a:tc>
+              </a:tr>
+              <a:tr h="1466850">
+                <a:tc>
+                  <a:txBody>
+                    <a:bodyPr/>
+                    <a:lstStyle/>
+                    <a:p>
+                      <a:pPr algn="ctr"/>
+                      <a:r>
+                        <a:rPr sz="2175" b="1">
+                          <a:solidFill>
+                            <a:srgbClr val="183E4A"/>
+                          </a:solidFill>
+                          <a:latin typeface="Apple SD Gothic Neo"/>
+                          <a:ea typeface="Apple SD Gothic Neo"/>
+                          <a:cs typeface="Apple SD Gothic Neo"/>
+                        </a:rPr>
+                        <a:t>V-09</a:t>
+                      </a:r>
+                    </a:p>
+                  </a:txBody>
+                  <a:tcPr marL="95250" marR="95250" marT="28575" marB="28575" anchor="ctr">
+                    <a:solidFill>
+                      <a:srgbClr val="F8FAFB"/>
+                    </a:solidFill>
+                  </a:tcPr>
+                </a:tc>
+                <a:tc>
+                  <a:txBody>
+                    <a:bodyPr/>
+                    <a:lstStyle/>
+                    <a:p>
+                      <a:pPr algn="ctr"/>
+                      <a:r>
+                        <a:rPr sz="2175" b="1">
+                          <a:solidFill>
+                            <a:srgbClr val="183E4A"/>
+                          </a:solidFill>
+                          <a:latin typeface="Apple SD Gothic Neo"/>
+                          <a:ea typeface="Apple SD Gothic Neo"/>
+                          <a:cs typeface="Apple SD Gothic Neo"/>
+                        </a:rPr>
+                        <a:t>분석 용이성</a:t>
+                      </a:r>
+                    </a:p>
+                  </a:txBody>
+                  <a:tcPr marL="95250" marR="95250" marT="28575" marB="28575" anchor="ctr">
+                    <a:solidFill>
+                      <a:srgbClr val="F8FAFB"/>
+                    </a:solidFill>
+                  </a:tcPr>
+                </a:tc>
+                <a:tc>
+                  <a:txBody>
+                    <a:bodyPr/>
+                    <a:lstStyle/>
+                    <a:p>
+                      <a:pPr algn="l"/>
+                      <a:r>
+                        <a:rPr sz="2175" b="0">
+                          <a:solidFill>
+                            <a:srgbClr val="17232E"/>
+                          </a:solidFill>
+                          <a:latin typeface="Apple SD Gothic Neo"/>
+                          <a:ea typeface="Apple SD Gothic Neo"/>
+                          <a:cs typeface="Apple SD Gothic Neo"/>
+                        </a:rPr>
+                        <a:t>실행 기록으로 요청의 처리 과정을 설명할 수 있어야 한다.</a:t>
+                      </a:r>
+                    </a:p>
+                    <a:p>
+                      <a:pPr algn="l"/>
+                      <a:r>
+                        <a:rPr sz="2175" b="1">
+                          <a:solidFill>
+                            <a:srgbClr val="2873B9"/>
+                          </a:solidFill>
+                          <a:latin typeface="Apple SD Gothic Neo"/>
+                          <a:ea typeface="Apple SD Gothic Neo"/>
+                          <a:cs typeface="Apple SD Gothic Neo"/>
+                        </a:rPr>
+                        <a:t>목표  실행 재구성률 = 100%</a:t>
+                      </a:r>
+                    </a:p>
+                    <a:p>
+                      <a:pPr algn="l"/>
+                      <a:r>
+                        <a:rPr sz="2100" b="0">
+                          <a:solidFill>
+                            <a:srgbClr val="3E4853"/>
+                          </a:solidFill>
+                          <a:latin typeface="Apple SD Gothic Neo"/>
+                          <a:ea typeface="Apple SD Gothic Neo"/>
+                          <a:cs typeface="Apple SD Gothic Neo"/>
+                        </a:rPr>
+                        <a:t>측정  전체 시험에서 필수 실행 관계를 복원한 비율</a:t>
                       </a:r>
                     </a:p>
                   </a:txBody>
@@ -3703,7 +6723,7 @@
                   </a:tcPr>
                 </a:tc>
               </a:tr>
-              <a:tr h="1381125">
+              <a:tr h="1466850">
                 <a:tc>
                   <a:txBody>
                     <a:bodyPr/>
@@ -3719,7 +6739,7 @@
                           <a:ea typeface="Apple SD Gothic Neo"/>
                           <a:cs typeface="Apple SD Gothic Neo"/>
                         </a:rPr>
-                        <a:t>V-11</a:t>
+                        <a:t>V-10</a:t>
                       </a:r>
                     </a:p>
                   </a:txBody>
@@ -3744,21 +6764,7 @@
                           <a:ea typeface="Apple SD Gothic Neo"/>
                           <a:cs typeface="Apple SD Gothic Neo"/>
                         </a:rPr>
-                        <a:t>상호운용성과</a:t>
-                      </a:r>
-                    </a:p>
-                    <a:p>
-                      <a:pPr algn="ctr"/>
-                      <a:r>
-                        <a:rPr sz="2175" b="1">
-                          <a:solidFill>
-                            <a:srgbClr val="183E4A"/>
-                          </a:solidFill>
-                          <a:latin typeface="Apple SD Gothic Neo"/>
-                          <a:ea typeface="Apple SD Gothic Neo"/>
-                          <a:cs typeface="Apple SD Gothic Neo"/>
-                        </a:rPr>
-                        <a:t>공존성</a:t>
+                        <a:t>기밀성</a:t>
                       </a:r>
                     </a:p>
                   </a:txBody>
@@ -3775,7 +6781,7 @@
                     <a:p>
                       <a:pPr algn="l"/>
                       <a:r>
-                        <a:rPr sz="1800" b="0">
+                        <a:rPr sz="2175" b="0">
                           <a:solidFill>
                             <a:srgbClr val="17232E"/>
                           </a:solidFill>
@@ -3783,13 +6789,13 @@
                           <a:ea typeface="Apple SD Gothic Neo"/>
                           <a:cs typeface="Apple SD Gothic Neo"/>
                         </a:rPr>
-                        <a:t>외부 제품과 교환한 정보의 의미를 유지하고 다른 PC 앱과 함께 필요한 기능을 수행할 수 있어야 한다.</a:t>
+                        <a:t>사용자 정보는 허용된 범위 안에서만 사용해야 한다.</a:t>
                       </a:r>
                     </a:p>
                     <a:p>
                       <a:pPr algn="l"/>
                       <a:r>
-                        <a:rPr sz="1800" b="1">
+                        <a:rPr sz="2175" b="1">
                           <a:solidFill>
                             <a:srgbClr val="2873B9"/>
                           </a:solidFill>
@@ -3797,13 +6803,13 @@
                           <a:ea typeface="Apple SD Gothic Neo"/>
                           <a:cs typeface="Apple SD Gothic Neo"/>
                         </a:rPr>
-                        <a:t>목표  연동 의미 보존율(%)·동시 사용 시 VIA와 타 앱의 성능 저하 한도 미정</a:t>
+                        <a:t>목표  무단 정보 사용 = 0건</a:t>
                       </a:r>
                     </a:p>
                     <a:p>
                       <a:pPr algn="l"/>
                       <a:r>
-                        <a:rPr sz="1725" b="0">
+                        <a:rPr sz="2100" b="0">
                           <a:solidFill>
                             <a:srgbClr val="3E4853"/>
                           </a:solidFill>
@@ -3811,281 +6817,7 @@
                           <a:ea typeface="Apple SD Gothic Neo"/>
                           <a:cs typeface="Apple SD Gothic Neo"/>
                         </a:rPr>
-                        <a:t>측정  Agent·source 기능별 계약 적합성을 시험하고 타 앱 동시 부하에서 양쪽 기능·성능 변화를 측정</a:t>
-                      </a:r>
-                    </a:p>
-                  </a:txBody>
-                  <a:tcPr marL="142875" marR="95250" marT="28575" marB="28575" anchor="ctr">
-                    <a:solidFill>
-                      <a:srgbClr val="EEF4F5"/>
-                    </a:solidFill>
-                  </a:tcPr>
-                </a:tc>
-                <a:tc>
-                  <a:txBody>
-                    <a:bodyPr/>
-                    <a:lstStyle/>
-                    <a:p>
-                      <a:pPr algn="ctr"/>
-                      <a:r>
-                        <a:rPr sz="1875" b="1">
-                          <a:solidFill>
-                            <a:srgbClr val="183E4A"/>
-                          </a:solidFill>
-                          <a:latin typeface="Apple SD Gothic Neo"/>
-                          <a:ea typeface="Apple SD Gothic Neo"/>
-                          <a:cs typeface="Apple SD Gothic Neo"/>
-                        </a:rPr>
-                        <a:t>6 (공동)</a:t>
-                      </a:r>
-                    </a:p>
-                  </a:txBody>
-                  <a:tcPr marL="95250" marR="95250" marT="28575" marB="28575" anchor="ctr">
-                    <a:solidFill>
-                      <a:srgbClr val="EEF4F5"/>
-                    </a:solidFill>
-                  </a:tcPr>
-                </a:tc>
-              </a:tr>
-              <a:tr h="1381125">
-                <a:tc>
-                  <a:txBody>
-                    <a:bodyPr/>
-                    <a:lstStyle/>
-                    <a:p>
-                      <a:pPr algn="ctr"/>
-                      <a:r>
-                        <a:rPr sz="2175" b="1">
-                          <a:solidFill>
-                            <a:srgbClr val="183E4A"/>
-                          </a:solidFill>
-                          <a:latin typeface="Apple SD Gothic Neo"/>
-                          <a:ea typeface="Apple SD Gothic Neo"/>
-                          <a:cs typeface="Apple SD Gothic Neo"/>
-                        </a:rPr>
-                        <a:t>V-12</a:t>
-                      </a:r>
-                    </a:p>
-                  </a:txBody>
-                  <a:tcPr marL="95250" marR="95250" marT="28575" marB="28575" anchor="ctr">
-                    <a:solidFill>
-                      <a:srgbClr val="F8FAFB"/>
-                    </a:solidFill>
-                  </a:tcPr>
-                </a:tc>
-                <a:tc>
-                  <a:txBody>
-                    <a:bodyPr/>
-                    <a:lstStyle/>
-                    <a:p>
-                      <a:pPr algn="ctr"/>
-                      <a:r>
-                        <a:rPr sz="2175" b="1">
-                          <a:solidFill>
-                            <a:srgbClr val="183E4A"/>
-                          </a:solidFill>
-                          <a:latin typeface="Apple SD Gothic Neo"/>
-                          <a:ea typeface="Apple SD Gothic Neo"/>
-                          <a:cs typeface="Apple SD Gothic Neo"/>
-                        </a:rPr>
-                        <a:t>조작 용이성과</a:t>
-                      </a:r>
-                    </a:p>
-                    <a:p>
-                      <a:pPr algn="ctr"/>
-                      <a:r>
-                        <a:rPr sz="2175" b="1">
-                          <a:solidFill>
-                            <a:srgbClr val="183E4A"/>
-                          </a:solidFill>
-                          <a:latin typeface="Apple SD Gothic Neo"/>
-                          <a:ea typeface="Apple SD Gothic Neo"/>
-                          <a:cs typeface="Apple SD Gothic Neo"/>
-                        </a:rPr>
-                        <a:t>사용자 오류 방지</a:t>
-                      </a:r>
-                    </a:p>
-                  </a:txBody>
-                  <a:tcPr marL="95250" marR="95250" marT="28575" marB="28575" anchor="ctr">
-                    <a:solidFill>
-                      <a:srgbClr val="F8FAFB"/>
-                    </a:solidFill>
-                  </a:tcPr>
-                </a:tc>
-                <a:tc>
-                  <a:txBody>
-                    <a:bodyPr/>
-                    <a:lstStyle/>
-                    <a:p>
-                      <a:pPr algn="l"/>
-                      <a:r>
-                        <a:rPr sz="1800" b="0">
-                          <a:solidFill>
-                            <a:srgbClr val="17232E"/>
-                          </a:solidFill>
-                          <a:latin typeface="Apple SD Gothic Neo"/>
-                          <a:ea typeface="Apple SD Gothic Neo"/>
-                          <a:cs typeface="Apple SD Gothic Neo"/>
-                        </a:rPr>
-                        <a:t>사용자가 현재 상태와 제어 대상을 알아보고 잘못된 대상이나 범위를 조작하지 않도록 도와야 한다.</a:t>
-                      </a:r>
-                    </a:p>
-                    <a:p>
-                      <a:pPr algn="l"/>
-                      <a:r>
-                        <a:rPr sz="1800" b="1">
-                          <a:solidFill>
-                            <a:srgbClr val="2873B9"/>
-                          </a:solidFill>
-                          <a:latin typeface="Apple SD Gothic Neo"/>
-                          <a:ea typeface="Apple SD Gothic Neo"/>
-                          <a:cs typeface="Apple SD Gothic Neo"/>
-                        </a:rPr>
-                        <a:t>목표  조작 성공률(%)·단계(회) 미정 · 다른 업무 오실행 0건</a:t>
-                      </a:r>
-                    </a:p>
-                    <a:p>
-                      <a:pPr algn="l"/>
-                      <a:r>
-                        <a:rPr sz="1725" b="0">
-                          <a:solidFill>
-                            <a:srgbClr val="3E4853"/>
-                          </a:solidFill>
-                          <a:latin typeface="Apple SD Gothic Neo"/>
-                          <a:ea typeface="Apple SD Gothic Neo"/>
-                          <a:cs typeface="Apple SD Gothic Neo"/>
-                        </a:rPr>
-                        <a:t>측정  다중 업무·질문·중단·취소 상황에서 대상·상태 인지, 조작 단계·성공과 오조작 결과를 관찰</a:t>
-                      </a:r>
-                    </a:p>
-                  </a:txBody>
-                  <a:tcPr marL="142875" marR="95250" marT="28575" marB="28575" anchor="ctr">
-                    <a:solidFill>
-                      <a:srgbClr val="F8FAFB"/>
-                    </a:solidFill>
-                  </a:tcPr>
-                </a:tc>
-                <a:tc>
-                  <a:txBody>
-                    <a:bodyPr/>
-                    <a:lstStyle/>
-                    <a:p>
-                      <a:pPr algn="ctr"/>
-                      <a:r>
-                        <a:rPr sz="1875" b="1">
-                          <a:solidFill>
-                            <a:srgbClr val="183E4A"/>
-                          </a:solidFill>
-                          <a:latin typeface="Apple SD Gothic Neo"/>
-                          <a:ea typeface="Apple SD Gothic Neo"/>
-                          <a:cs typeface="Apple SD Gothic Neo"/>
-                        </a:rPr>
-                        <a:t>6 (공동)</a:t>
-                      </a:r>
-                    </a:p>
-                  </a:txBody>
-                  <a:tcPr marL="95250" marR="95250" marT="28575" marB="28575" anchor="ctr">
-                    <a:solidFill>
-                      <a:srgbClr val="F8FAFB"/>
-                    </a:solidFill>
-                  </a:tcPr>
-                </a:tc>
-              </a:tr>
-              <a:tr h="1381125">
-                <a:tc>
-                  <a:txBody>
-                    <a:bodyPr/>
-                    <a:lstStyle/>
-                    <a:p>
-                      <a:pPr algn="ctr"/>
-                      <a:r>
-                        <a:rPr sz="2175" b="1">
-                          <a:solidFill>
-                            <a:srgbClr val="183E4A"/>
-                          </a:solidFill>
-                          <a:latin typeface="Apple SD Gothic Neo"/>
-                          <a:ea typeface="Apple SD Gothic Neo"/>
-                          <a:cs typeface="Apple SD Gothic Neo"/>
-                        </a:rPr>
-                        <a:t>V-13</a:t>
-                      </a:r>
-                    </a:p>
-                  </a:txBody>
-                  <a:tcPr marL="95250" marR="95250" marT="28575" marB="28575" anchor="ctr">
-                    <a:solidFill>
-                      <a:srgbClr val="EEF4F5"/>
-                    </a:solidFill>
-                  </a:tcPr>
-                </a:tc>
-                <a:tc>
-                  <a:txBody>
-                    <a:bodyPr/>
-                    <a:lstStyle/>
-                    <a:p>
-                      <a:pPr algn="ctr"/>
-                      <a:r>
-                        <a:rPr sz="2175" b="1">
-                          <a:solidFill>
-                            <a:srgbClr val="183E4A"/>
-                          </a:solidFill>
-                          <a:latin typeface="Apple SD Gothic Neo"/>
-                          <a:ea typeface="Apple SD Gothic Neo"/>
-                          <a:cs typeface="Apple SD Gothic Neo"/>
-                        </a:rPr>
-                        <a:t>설치 용이성</a:t>
-                      </a:r>
-                    </a:p>
-                  </a:txBody>
-                  <a:tcPr marL="95250" marR="95250" marT="28575" marB="28575" anchor="ctr">
-                    <a:solidFill>
-                      <a:srgbClr val="EEF4F5"/>
-                    </a:solidFill>
-                  </a:tcPr>
-                </a:tc>
-                <a:tc>
-                  <a:txBody>
-                    <a:bodyPr/>
-                    <a:lstStyle/>
-                    <a:p>
-                      <a:pPr algn="l"/>
-                      <a:r>
-                        <a:rPr sz="1800" b="0">
-                          <a:solidFill>
-                            <a:srgbClr val="17232E"/>
-                          </a:solidFill>
-                          <a:latin typeface="Apple SD Gothic Neo"/>
-                          <a:ea typeface="Apple SD Gothic Neo"/>
-                          <a:cs typeface="Apple SD Gothic Neo"/>
-                        </a:rPr>
-                        <a:t>필요한 의존성을 설치·갱신·제거하고 부분 실패 뒤의 실행체와 자료를 확인해 복구하거나 정리할 수 있어야 한다.</a:t>
-                      </a:r>
-                    </a:p>
-                    <a:p>
-                      <a:pPr algn="l"/>
-                      <a:r>
-                        <a:rPr sz="1800" b="1">
-                          <a:solidFill>
-                            <a:srgbClr val="2873B9"/>
-                          </a:solidFill>
-                          <a:latin typeface="Apple SD Gothic Neo"/>
-                          <a:ea typeface="Apple SD Gothic Neo"/>
-                          <a:cs typeface="Apple SD Gothic Neo"/>
-                        </a:rPr>
-                        <a:t>목표  설치·갱신·제거 성공률(%)·단계(회)·시간(s)과 실패 정리 목표 미정</a:t>
-                      </a:r>
-                    </a:p>
-                    <a:p>
-                      <a:pPr algn="l"/>
-                      <a:r>
-                        <a:rPr sz="1725" b="0">
-                          <a:solidFill>
-                            <a:srgbClr val="3E4853"/>
-                          </a:solidFill>
-                          <a:latin typeface="Apple SD Gothic Neo"/>
-                          <a:ea typeface="Apple SD Gothic Neo"/>
-                          <a:cs typeface="Apple SD Gothic Neo"/>
-                        </a:rPr>
-                        <a:t>측정  동일 PC의 설치·갱신·제거와 단계별 실패 후 runtime·helper·모델·상태의 복구·잔여물을 확인</a:t>
+                        <a:t>측정  권한과 철회 및 삭제 시험 144회의 위반 사건 수</a:t>
                       </a:r>
                     </a:p>
                   </a:txBody>
@@ -4130,7 +6862,7 @@
           <p:cNvPr id="5" name="footnote">
             <a:extLst xmlns:a="http://schemas.openxmlformats.org/drawingml/2006/main">
               <a:ext uri="{FF2B5EF4-FFF2-40B4-BE49-F238E27FC236}">
-                <a16:creationId xmlns:a16="http://schemas.microsoft.com/office/drawing/2014/main" id="{6491508A-F636-4137-B4A3-5D1D2568CDD4}"/>
+                <a16:creationId xmlns:a16="http://schemas.microsoft.com/office/drawing/2014/main" id="{AF9460E0-BD62-4A04-AC16-F6043360F338}"/>
               </a:ext>
             </a:extLst>
           </p:cNvPr>
@@ -4177,7 +6909,7 @@
                 <a:ea typeface="Apple SD Gothic Neo"/>
                 <a:cs typeface="Apple SD Gothic Neo"/>
               </a:rPr>
-              <a:t>수치 목표 미확정, 측정 방법 초안. 0건은 기존 금지 조건이며 측정 전 모든 DP의 공통 계약을 확정한다.</a:t>
+              <a:t>근거 기반 목표 제안. 출처와 상세 측정 절차는 발표자 노트 및 Markdown에 수록. 구현 및 측정 결과 없음.</a:t>
             </a:r>
           </a:p>
         </p:txBody>
@@ -4185,7 +6917,7 @@
     </p:spTree>
     <p:extLst>
       <p:ext uri="{BB962C8B-B14F-4D97-AF65-F5344CB8AC3E}">
-        <p14:creationId xmlns:p14="http://schemas.microsoft.com/office/powerpoint/2010/main" val="1516161176"/>
+        <p14:creationId xmlns:p14="http://schemas.microsoft.com/office/powerpoint/2010/main" val="995967266"/>
       </p:ext>
     </p:extLst>
   </p:cSld>

--- a/docs/presentations_files/quality-attributes/VIA-quality-attributes.pptx
+++ b/docs/presentations_files/quality-attributes/VIA-quality-attributes.pptx
@@ -2,14 +2,14 @@
 <file path=ppt/presentation.xml><?xml version="1.0" encoding="utf-8"?>
 <p:presentation xmlns:p="http://schemas.openxmlformats.org/presentationml/2006/main">
   <p:sldMasterIdLst>
-    <p:sldMasterId xmlns:r="http://schemas.openxmlformats.org/officeDocument/2006/relationships" id="2147483648" r:id="R1ea347adc4ed4e98"/>
+    <p:sldMasterId xmlns:r="http://schemas.openxmlformats.org/officeDocument/2006/relationships" id="2147483648" r:id="R31fa252a0ac04300"/>
   </p:sldMasterIdLst>
   <p:notesMasterIdLst>
-    <p:notesMasterId xmlns:r="http://schemas.openxmlformats.org/officeDocument/2006/relationships" r:id="R6cf76ca6f8f54722"/>
+    <p:notesMasterId xmlns:r="http://schemas.openxmlformats.org/officeDocument/2006/relationships" r:id="R409daa03339244ee"/>
   </p:notesMasterIdLst>
   <p:sldIdLst>
-    <p:sldId xmlns:r="http://schemas.openxmlformats.org/officeDocument/2006/relationships" id="256" r:id="R8957ccd890964dfc"/>
-    <p:sldId xmlns:r="http://schemas.openxmlformats.org/officeDocument/2006/relationships" id="257" r:id="R608706782bdd45fd"/>
+    <p:sldId xmlns:r="http://schemas.openxmlformats.org/officeDocument/2006/relationships" id="256" r:id="R743bc6cac6e54757"/>
+    <p:sldId xmlns:r="http://schemas.openxmlformats.org/officeDocument/2006/relationships" id="257" r:id="R2b0e530f65a847db"/>
   </p:sldIdLst>
   <p:sldSz cx="18288000" cy="10287000"/>
   <p:notesSz cx="6858000" cy="9144000"/>
@@ -468,17 +468,17 @@
           </a:p>
           <a:p xmlns:a="http://schemas.openxmlformats.org/drawingml/2006/main">
             <a:r>
-              <a:t>목표: 정확 처리율 ≥ 90%</a:t>
-            </a:r>
-          </a:p>
-          <a:p xmlns:a="http://schemas.openxmlformats.org/drawingml/2006/main">
-            <a:r>
-              <a:t>목표 근거: SNIPS의 문장 전체 의미 프레임 정확도 92.8%를 참고해 첫 통합 평가의 하한을 90%로 제안한다. VIA와 동일한 시험의 실적이라는 뜻은 아니다.</a:t>
-            </a:r>
-          </a:p>
-          <a:p xmlns:a="http://schemas.openxmlformats.org/drawingml/2006/main">
-            <a:r>
-              <a:t>측정: 1880회 전체를 분모로 삼고 의미, 업무 연결, 상태, 전달의 필수 판정을 모두 만족한 시험만 성공으로 센다.</a:t>
+              <a:t>목표: 정확 처리율 ≥ 95%</a:t>
+            </a:r>
+          </a:p>
+          <a:p xmlns:a="http://schemas.openxmlformats.org/drawingml/2006/main">
+            <a:r>
+              <a:t>목표 근거: NexusRaven-13B는 예시 검색을 결합한 보안 도구 사용에서 성공률 95%를 보고했다. 이 구현 수준을 VIA의 통합 시험 목표로 선택한다. 동일 모집단의 성능 예측이나 VIA 실적을 뜻하지 않는다.</a:t>
+            </a:r>
+          </a:p>
+          <a:p xmlns:a="http://schemas.openxmlformats.org/drawingml/2006/main">
+            <a:r>
+              <a:t>측정: 1880회 전체를 분모로 삼고 모든 사용자 턴의 의미, Task 연결, 상태 변화와 필수 전달을 판정한다. 오답과 미지원 및 timeout은 실패이며 분모에 남는다.</a:t>
             </a:r>
           </a:p>
           <a:p xmlns:a="http://schemas.openxmlformats.org/drawingml/2006/main">
@@ -488,7 +488,7 @@
           </a:p>
           <a:p xmlns:a="http://schemas.openxmlformats.org/drawingml/2006/main">
             <a:r>
-              <a:t>S01: Chen et al., 2019, [BERT for Joint Intent Classification and Slot Filling, Table 2](https://arxiv.org/html/1902.10909)</a:t>
+              <a:t>S01: Nexusflow, [NexusRaven-13B 공식 구현 README](https://github.com/nexusflowai/NexusRaven#introducing-nexusraven-13b)</a:t>
             </a:r>
           </a:p>
           <a:p xmlns:a="http://schemas.openxmlformats.org/drawingml/2006/main">
@@ -498,6 +498,11 @@
           </a:p>
           <a:p xmlns:a="http://schemas.openxmlformats.org/drawingml/2006/main">
             <a:r>
+              <a:t>S11: Mao et al., [BFCL V3 공식 평가 설명](https://gorilla.cs.berkeley.edu/blogs/13_bfcl_v3_multi_turn.html#evaluation-metrics)</a:t>
+            </a:r>
+          </a:p>
+          <a:p xmlns:a="http://schemas.openxmlformats.org/drawingml/2006/main">
+            <a:r>
               <a:t/>
             </a:r>
           </a:p>
@@ -513,7 +518,7 @@
           </a:p>
           <a:p xmlns:a="http://schemas.openxmlformats.org/drawingml/2006/main">
             <a:r>
-              <a:t>설명: 사용자가 적은 추가 입력으로 요청을 마칠 수 있어야 한다.</a:t>
+              <a:t>설명: 추가 사용자 입력을 최소화해 요청을 마쳐야 한다.</a:t>
             </a:r>
           </a:p>
           <a:p xmlns:a="http://schemas.openxmlformats.org/drawingml/2006/main">
@@ -528,7 +533,7 @@
           </a:p>
           <a:p xmlns:a="http://schemas.openxmlformats.org/drawingml/2006/main">
             <a:r>
-              <a:t>측정: 최초 요청은 제외하고 VIA가 요구한 질문 답변, 선택, 승인과 수동 우회를 센다. 자발적 목표 변경은 별도 요청으로 기록한다.</a:t>
+              <a:t>측정: 질문 답변, 선택, 승인과 정해진 수동 우회의 사용자 입력 episode를 센다. 실패 뒤 최대 두 번의 재요청과 사례별 수동 마무리도 포함하며 미완료 시험을 제외하지 않는다.</a:t>
             </a:r>
           </a:p>
           <a:p xmlns:a="http://schemas.openxmlformats.org/drawingml/2006/main">
@@ -573,7 +578,7 @@
           </a:p>
           <a:p xmlns:a="http://schemas.openxmlformats.org/drawingml/2006/main">
             <a:r>
-              <a:t>측정: 같은 94개 목록에 완전 지원, 부분 지원, 미지원, 미확인을 기록한다. 실제 동작 증거 없는 설계 주장은 구현 지원으로 세지 않는다.</a:t>
+              <a:t>측정: 94개 변형마다 구현 경로, 필수 capability 계약 시험과 다섯 상황의 실제 witness를 확인한다. 단 한 번의 성공이나 설계 문서만으로 완전 지원을 인정하지 않는다.</a:t>
             </a:r>
           </a:p>
           <a:p xmlns:a="http://schemas.openxmlformats.org/drawingml/2006/main">
@@ -583,7 +588,7 @@
           </a:p>
           <a:p xmlns:a="http://schemas.openxmlformats.org/drawingml/2006/main">
             <a:r>
-              <a:t>S00: [VIA 대표 UC](../../architecture/05-representative-use-cases.md), [고정 범위](../../architecture/03-fixed-architecture-scope.md), [03-00 품질 시나리오](../../architecture/12-decisions/decision-packages/03-00-quality-scenarios.md)</a:t>
+              <a:t>S00: [VIA 대표 UC](../../architecture/05-representative-use-cases.md), [고정 범위](../../architecture/03-fixed-architecture-scope.md), [V 품질 시나리오](../../architecture/12-decisions/decision-packages/03-00-quality-scenarios.md)</a:t>
             </a:r>
           </a:p>
           <a:p xmlns:a="http://schemas.openxmlformats.org/drawingml/2006/main">
@@ -603,22 +608,22 @@
           </a:p>
           <a:p xmlns:a="http://schemas.openxmlformats.org/drawingml/2006/main">
             <a:r>
-              <a:t>설명: 사용자 입력에 대한 유효한 반응이 빠르게 나타나야 한다.</a:t>
-            </a:r>
-          </a:p>
-          <a:p xmlns:a="http://schemas.openxmlformats.org/drawingml/2006/main">
-            <a:r>
-              <a:t>목표: p95 반응 지연 ≤ 1초</a:t>
-            </a:r>
-          </a:p>
-          <a:p xmlns:a="http://schemas.openxmlformats.org/drawingml/2006/main">
-            <a:r>
-              <a:t>목표 근거: Nielsen의 1초 반응 기준을 적용한다. p95와 종류별 최댓값 집계는 VIA의 긴 지연을 숨기지 않기 위한 설계 선택이다.</a:t>
-            </a:r>
-          </a:p>
-          <a:p xmlns:a="http://schemas.openxmlformats.org/drawingml/2006/main">
-            <a:r>
-              <a:t>측정: 실제 입력이나 상태 발생부터 의미 있는 응답 또는 제어 효과까지 측정한다. 접수 인사나 spinner는 종료점으로 인정하지 않는다.</a:t>
+              <a:t>설명: 사용자 입력에 빠르게 반응해야 한다.</a:t>
+            </a:r>
+          </a:p>
+          <a:p xmlns:a="http://schemas.openxmlformats.org/drawingml/2006/main">
+            <a:r>
+              <a:t>목표: 평균 반응시간 ≤ 1초</a:t>
+            </a:r>
+          </a:p>
+          <a:p xmlns:a="http://schemas.openxmlformats.org/drawingml/2006/main">
+            <a:r>
+              <a:t>목표 근거: Nielsen의 1초 상호작용 기준을 평균 반응시간의 목표로 선택한다. 원문이 평균 집계를 지정하지는 않으며 집계는 사용자의 발표 기준을 따른다.</a:t>
+            </a:r>
+          </a:p>
+          <a:p xmlns:a="http://schemas.openxmlformats.org/drawingml/2006/main">
+            <a:r>
+              <a:t>측정: 요청, 상태 전달과 제어의 고정 event slot을 계측한다. 오답이나 오류 안내도 실제 전달 시각으로 시간을 기록하고 정답 여부는 V-01에서 별도 판정한다. 출력이 없으면 실제 관측 종료까지의 경과시간과 미전달 상태를 남긴다.</a:t>
             </a:r>
           </a:p>
           <a:p xmlns:a="http://schemas.openxmlformats.org/drawingml/2006/main">
@@ -648,27 +653,27 @@
           </a:p>
           <a:p xmlns:a="http://schemas.openxmlformats.org/drawingml/2006/main">
             <a:r>
-              <a:t>설명: 필요한 최종 결과를 사용자에게 빠르게 전달해야 한다.</a:t>
-            </a:r>
-          </a:p>
-          <a:p xmlns:a="http://schemas.openxmlformats.org/drawingml/2006/main">
-            <a:r>
-              <a:t>목표: p95 VIA 완료시간 ≤ 10초</a:t>
-            </a:r>
-          </a:p>
-          <a:p xmlns:a="http://schemas.openxmlformats.org/drawingml/2006/main">
-            <a:r>
-              <a:t>목표 근거: Nielsen의 10초 주의 유지 기준을 VIA가 책임지는 완료시간의 상한으로 제안한다. 외부 작업시간을 제외한 목표임을 함께 표시한다.</a:t>
-            </a:r>
-          </a:p>
-          <a:p xmlns:a="http://schemas.openxmlformats.org/drawingml/2006/main">
-            <a:r>
-              <a:t>측정: 직접 응답과 Agent 위임을 구분하고 앞 결과가 다음 작업 입력이 되는 의존 관계를 별도 표식으로 기록한다. 동일한 10초 목표를 적용한다.</a:t>
-            </a:r>
-          </a:p>
-          <a:p xmlns:a="http://schemas.openxmlformats.org/drawingml/2006/main">
-            <a:r>
-              <a:t>경계: Agent 내부 대기, 추론, 계획, 업무 실행 및 사람의 답변 대기는 제외한다. 전체 경과시간에서 외부 시간 합을 단순 차감하거나 병렬 VIA 구간을 무조건 합산하지 않는다.</a:t>
+              <a:t>설명: VIA의 처리로 결과 전달이 늦어지지 않아야 한다.</a:t>
+            </a:r>
+          </a:p>
+          <a:p xmlns:a="http://schemas.openxmlformats.org/drawingml/2006/main">
+            <a:r>
+              <a:t>목표: 평균 VIA 처리시간 ≤ 10초</a:t>
+            </a:r>
+          </a:p>
+          <a:p xmlns:a="http://schemas.openxmlformats.org/drawingml/2006/main">
+            <a:r>
+              <a:t>목표 근거: Nielsen의 10초 기준을 참고해 VIA의 추가 처리 예산을 10초로 선택한다. 외부 대기를 뺀 이 값이 사용자의 전체 대기시간과 같다는 주장은 하지 않는다.</a:t>
+            </a:r>
+          </a:p>
+          <a:p xmlns:a="http://schemas.openxmlformats.org/drawingml/2006/main">
+            <a:r>
+              <a:t>측정: 실제 입력부터 필수 결과 전달까지 VIA 처리가 필요한 구간의 합집합 길이를 측정한다. 외부 작업이나 사용자 답변만 기다린 구간만 제외하며 병렬 구간과 parent/child span을 중복 합산하지 않는다.</a:t>
+            </a:r>
+          </a:p>
+          <a:p xmlns:a="http://schemas.openxmlformats.org/drawingml/2006/main">
+            <a:r>
+              <a:t>경계: 직접 응답과 위임에 같은 목표를 적용하고 선행 결과를 쓰는 요청 관계를 별도 표시한다. 실패도 실제 경과시간을 기록하며 정답 실패를 무한대 시간으로 바꾸지 않는다.</a:t>
             </a:r>
           </a:p>
           <a:p xmlns:a="http://schemas.openxmlformats.org/drawingml/2006/main">
@@ -698,97 +703,152 @@
           </a:p>
           <a:p xmlns:a="http://schemas.openxmlformats.org/drawingml/2006/main">
             <a:r>
-              <a:t>작성일: 2026-10-06. 이 문서는 사용자의 리뷰를 반영한 **근거 기반 목표 제안**이다. VIA의 실측 결과나 동결된 측정 계약으로 해석하지 않는다.</a:t>
-            </a:r>
-          </a:p>
-          <a:p xmlns:a="http://schemas.openxmlformats.org/drawingml/2006/main">
-            <a:r>
-              <a:t/>
-            </a:r>
-          </a:p>
-          <a:p xmlns:a="http://schemas.openxmlformats.org/drawingml/2006/main">
-            <a:r>
-              <a:t>## 1. 발표 범위와 목표 설정 원칙</a:t>
-            </a:r>
-          </a:p>
-          <a:p xmlns:a="http://schemas.openxmlformats.org/drawingml/2006/main">
-            <a:r>
-              <a:t/>
-            </a:r>
-          </a:p>
-          <a:p xmlns:a="http://schemas.openxmlformats.org/drawingml/2006/main">
-            <a:r>
-              <a:t>V-01~10 중 기존 우선순위를 유지한 10개를 발표한다. V-08은 V-06보다 앞에 배치한다. 공동 순위 내부에는 추가 순위를 만들지 않는다. 각 항목은 하나의 품질 속성과 하나의 주지표만 가진다.</a:t>
-            </a:r>
-          </a:p>
-          <a:p xmlns:a="http://schemas.openxmlformats.org/drawingml/2006/main">
-            <a:r>
-              <a:t/>
-            </a:r>
-          </a:p>
-          <a:p xmlns:a="http://schemas.openxmlformats.org/drawingml/2006/main">
-            <a:r>
-              <a:t>V-11은 발표에서 제외하고, PC 공존 비용 중 메모리 부분만 V-06에 반영한다. 메모리 지표가 외부 시스템과의 상호운용성 전체를 평가하는 것은 아니다. V-12와 V-13도 현재 발표의 DP 연결이 약하다는 사용자 판단에 따라 제외한다. 원본 V 목록과 기존 Architecture 및 QA 계약은 그대로 보존한다.</a:t>
-            </a:r>
-          </a:p>
-          <a:p xmlns:a="http://schemas.openxmlformats.org/drawingml/2006/main">
-            <a:r>
-              <a:t/>
-            </a:r>
-          </a:p>
-          <a:p xmlns:a="http://schemas.openxmlformats.org/drawingml/2006/main">
-            <a:r>
-              <a:t>외부 논문의 결과를 VIA의 성능처럼 옮겨 적지 않는다. 각 목표는 아래에서 **출처가 실제로 말하는 사실**, **VIA의 목표로 선택한 이유**, **적용 한계**로 나눠 설명한다. 동일한 제품과 시험이 없는 항목에는 출처의 원칙이나 장치 사양을 바탕으로 VIA의 예산을 계산한다. 특히 90%, 3개, 16GB는 외부 문헌이 VIA에 직접 규정한 수치가 아니다.</a:t>
-            </a:r>
-          </a:p>
-          <a:p xmlns:a="http://schemas.openxmlformats.org/drawingml/2006/main">
-            <a:r>
-              <a:t/>
-            </a:r>
-          </a:p>
-          <a:p xmlns:a="http://schemas.openxmlformats.org/drawingml/2006/main">
-            <a:r>
-              <a:t>100%는 고정 계약의 완전 지원과 연구용 시험 기록의 전수 재구성을 뜻한다. 0건은 고정 권한 계약의 금지 사건 예산이다. 둘 다 미래의 모든 입력이나 모든 공격에 대한 보증을 뜻하지 않는다. 목표를 달성하지 못한 대안도 결과와 비용을 보존하며, 이 발표만으로 후보 탈락이나 승자를 결정하지 않는다.</a:t>
-            </a:r>
-          </a:p>
-          <a:p xmlns:a="http://schemas.openxmlformats.org/drawingml/2006/main">
-            <a:r>
-              <a:t/>
-            </a:r>
-          </a:p>
-          <a:p xmlns:a="http://schemas.openxmlformats.org/drawingml/2006/main">
-            <a:r>
-              <a:t>## 2. 공통 모집단과 시험 조건</a:t>
-            </a:r>
-          </a:p>
-          <a:p xmlns:a="http://schemas.openxmlformats.org/drawingml/2006/main">
-            <a:r>
-              <a:t/>
-            </a:r>
-          </a:p>
-          <a:p xmlns:a="http://schemas.openxmlformats.org/drawingml/2006/main">
-            <a:r>
-              <a:t>### 2.1 기능 모집단</a:t>
-            </a:r>
-          </a:p>
-          <a:p xmlns:a="http://schemas.openxmlformats.org/drawingml/2006/main">
-            <a:r>
-              <a:t/>
-            </a:r>
-          </a:p>
-          <a:p xmlns:a="http://schemas.openxmlformats.org/drawingml/2006/main">
-            <a:r>
-              <a:t>[대표 UC 원문](../../architecture/05-representative-use-cases.md)은 UC 18개와 필수 변형 94개를 포함한다. 기능 단위는 가장 구체적인 필수 변형으로 잡는다. 상위 UC를 다시 합산한 112개를 분모로 쓰면 동일 기능을 두 번 센다.</a:t>
-            </a:r>
-          </a:p>
-          <a:p xmlns:a="http://schemas.openxmlformats.org/drawingml/2006/main">
-            <a:r>
-              <a:t/>
-            </a:r>
-          </a:p>
-          <a:p xmlns:a="http://schemas.openxmlformats.org/drawingml/2006/main">
-            <a:r>
-              <a:t>| UC | 필수 변형 수 | UC | 필수 변형 수 | UC | 필수 변형 수 |</a:t>
+              <a:t>작성일: 2026-10-06. **발표용 목표와 평가 설계 제안이며 구현 결과, 실측 결과 또는 동결된 측정 계약이 아니다.** 기존 Architecture, QA 및 ADR와 비교안의 미선정 상태를 보존한다.</a:t>
+            </a:r>
+          </a:p>
+          <a:p xmlns:a="http://schemas.openxmlformats.org/drawingml/2006/main">
+            <a:r>
+              <a:t/>
+            </a:r>
+          </a:p>
+          <a:p xmlns:a="http://schemas.openxmlformats.org/drawingml/2006/main">
+            <a:r>
+              <a:t>## 1. 발표 기준</a:t>
+            </a:r>
+          </a:p>
+          <a:p xmlns:a="http://schemas.openxmlformats.org/drawingml/2006/main">
+            <a:r>
+              <a:t/>
+            </a:r>
+          </a:p>
+          <a:p xmlns:a="http://schemas.openxmlformats.org/drawingml/2006/main">
+            <a:r>
+              <a:t>원본 V의 순위와 ID를 유지하고 V-01~10을 발표한다. V-08은 V-06보다 앞에 배치한다. 공동 순위 안에는 추가 우열이 없다. 각 행에는 하나의 품질명, 짧은 한 문장 설명과 하나의 수치 목표를 둔다. V-11~13은 사용자 검토에 따라 발표에서 제외한다. V-11의 메모리 비용을 V-06에서 확인하되 상호운용성 전체를 메모리로 대체하지 않는다.</a:t>
+            </a:r>
+          </a:p>
+          <a:p xmlns:a="http://schemas.openxmlformats.org/drawingml/2006/main">
+            <a:r>
+              <a:t/>
+            </a:r>
+          </a:p>
+          <a:p xmlns:a="http://schemas.openxmlformats.org/drawingml/2006/main">
+            <a:r>
+              <a:t>목표의 근거는 세 종류로 구분한다. **구현 참조값**은 다른 시스템의 공개 결과를 VIA가 지향할 수준으로 선택한 값이다. **계약 목표**는 고정된 필수 기능과 금지 사건에서 정한다. **설계 예산**은 장치 사양이나 사용자 시간 기준을 바탕으로 VIA의 허용 비용을 계산한다. 예산 항목과 계산은 공개하며 문헌이 VIA에 그 숫자를 직접 규정했다고 주장하지 않는다.</a:t>
+            </a:r>
+          </a:p>
+          <a:p xmlns:a="http://schemas.openxmlformats.org/drawingml/2006/main">
+            <a:r>
+              <a:t/>
+            </a:r>
+          </a:p>
+          <a:p xmlns:a="http://schemas.openxmlformats.org/drawingml/2006/main">
+            <a:r>
+              <a:t>| ID | 목표 유형 | 선택 근거 |</a:t>
+            </a:r>
+          </a:p>
+          <a:p xmlns:a="http://schemas.openxmlformats.org/drawingml/2006/main">
+            <a:r>
+              <a:t>| --- | --- | --- |</a:t>
+            </a:r>
+          </a:p>
+          <a:p xmlns:a="http://schemas.openxmlformats.org/drawingml/2006/main">
+            <a:r>
+              <a:t>| V-01 | 구현 참조값 | NexusRaven의 검색을 결합한 도구 사용 성공률 95% [S01] |</a:t>
+            </a:r>
+          </a:p>
+          <a:p xmlns:a="http://schemas.openxmlformats.org/drawingml/2006/main">
+            <a:r>
+              <a:t>| V-02 | 상호작용 예산 | 필요한 경우 하나의 집중 질문을 쓰는 CoA 방식 [S03] |</a:t>
+            </a:r>
+          </a:p>
+          <a:p xmlns:a="http://schemas.openxmlformats.org/drawingml/2006/main">
+            <a:r>
+              <a:t>| V-03 | 기능 계약 | 고정된 필수 UC 변형 94개 전부 [S00] |</a:t>
+            </a:r>
+          </a:p>
+          <a:p xmlns:a="http://schemas.openxmlformats.org/drawingml/2006/main">
+            <a:r>
+              <a:t>| V-04 | 시간 예산 | Nielsen의 1초 상호작용 기준 [S04] |</a:t>
+            </a:r>
+          </a:p>
+          <a:p xmlns:a="http://schemas.openxmlformats.org/drawingml/2006/main">
+            <a:r>
+              <a:t>| V-05 | 처리 예산 | Nielsen의 10초 기준을 참고한 VIA 추가 처리 예산 [S04] |</a:t>
+            </a:r>
+          </a:p>
+          <a:p xmlns:a="http://schemas.openxmlformats.org/drawingml/2006/main">
+            <a:r>
+              <a:t>| V-08 | 변경 예산 | SEI 변경 전파 원칙을 책임, 계약, 소비자 세 요소로 구체화 [S05] |</a:t>
+            </a:r>
+          </a:p>
+          <a:p xmlns:a="http://schemas.openxmlformats.org/drawingml/2006/main">
+            <a:r>
+              <a:t>| V-06 | 메모리 예산 | 삼성 32GB RAM / 8GB VRAM 사양과 가중치 및 KV 계산 [S06, S07, S12] |</a:t>
+            </a:r>
+          </a:p>
+          <a:p xmlns:a="http://schemas.openxmlformats.org/drawingml/2006/main">
+            <a:r>
+              <a:t>| V-07 | 복구 예산 | 10초 시간 예산과 작은 실행 단위 복구의 구조적 근거 [S04, S08] |</a:t>
+            </a:r>
+          </a:p>
+          <a:p xmlns:a="http://schemas.openxmlformats.org/drawingml/2006/main">
+            <a:r>
+              <a:t>| V-09 | 연구 기록 계약 | 모든 시험의 처리 경위를 독립 분석자가 확인 [S09] |</a:t>
+            </a:r>
+          </a:p>
+          <a:p xmlns:a="http://schemas.openxmlformats.org/drawingml/2006/main">
+            <a:r>
+              <a:t>| V-10 | 정보 사용 계약 | 승인된 접근과 최소 권한에서 금지 사건 예산 0건 [S00, S10] |</a:t>
+            </a:r>
+          </a:p>
+          <a:p xmlns:a="http://schemas.openxmlformats.org/drawingml/2006/main">
+            <a:r>
+              <a:t/>
+            </a:r>
+          </a:p>
+          <a:p xmlns:a="http://schemas.openxmlformats.org/drawingml/2006/main">
+            <a:r>
+              <a:t>VIA와 동일한 제품 및 시험에서 산출한 외부 기준은 없다. 그러므로 이 목표들은 달성 사실이나 달성 가능성의 증명이 아니다. 목표를 정한 뒤 실제 시험으로 검증할 값이다. 정확도와 메모리 또는 속도가 충돌하면 실패와 비용을 모두 공개한다. 특정 숫자를 통과시키려고 기능 범위나 출력 내용을 사후 축소하지 않는다.</a:t>
+            </a:r>
+          </a:p>
+          <a:p xmlns:a="http://schemas.openxmlformats.org/drawingml/2006/main">
+            <a:r>
+              <a:t/>
+            </a:r>
+          </a:p>
+          <a:p xmlns:a="http://schemas.openxmlformats.org/drawingml/2006/main">
+            <a:r>
+              <a:t>## 2. 전체 평가 조건</a:t>
+            </a:r>
+          </a:p>
+          <a:p xmlns:a="http://schemas.openxmlformats.org/drawingml/2006/main">
+            <a:r>
+              <a:t/>
+            </a:r>
+          </a:p>
+          <a:p xmlns:a="http://schemas.openxmlformats.org/drawingml/2006/main">
+            <a:r>
+              <a:t>### 2.1 모집단과 집계</a:t>
+            </a:r>
+          </a:p>
+          <a:p xmlns:a="http://schemas.openxmlformats.org/drawingml/2006/main">
+            <a:r>
+              <a:t/>
+            </a:r>
+          </a:p>
+          <a:p xmlns:a="http://schemas.openxmlformats.org/drawingml/2006/main">
+            <a:r>
+              <a:t>[대표 UC](../../architecture/05-representative-use-cases.md)의 UC 18개 아래 **필수 변형 94개**를 기능 모수로 잡는다. 상위 UC를 다시 더하면 같은 기능을 중복 집계한다. 정확한 ID는 [functional-coverage.json](functional-coverage.json)에 보존한다.</a:t>
+            </a:r>
+          </a:p>
+          <a:p xmlns:a="http://schemas.openxmlformats.org/drawingml/2006/main">
+            <a:r>
+              <a:t/>
+            </a:r>
+          </a:p>
+          <a:p xmlns:a="http://schemas.openxmlformats.org/drawingml/2006/main">
+            <a:r>
+              <a:t>| UC | 변형 수 | UC | 변형 수 | UC | 변형 수 |</a:t>
             </a:r>
           </a:p>
           <a:p xmlns:a="http://schemas.openxmlformats.org/drawingml/2006/main">
@@ -833,117 +893,437 @@
           </a:p>
           <a:p xmlns:a="http://schemas.openxmlformats.org/drawingml/2006/main">
             <a:r>
-              <a:t>[functional-coverage.json](functional-coverage.json)에 94개 ID를 고정한다. 각 변형을 구체적인 상황 5개로 만들고 각 상황을 4회 반복하여 **94 × 5 × 4 = 1,880회**를 제안한다. 5개는 정답이 같은 단순 문장 복사 대신 표현, 참조 대상, 업무 이력, 화면 상황과 사건 순서를 바꾸되 해당 변형의 필수 동작을 유지한다. 변형 자체가 음성 전용이면 텍스트 사례를 억지로 추가하지 않는다. 오류나 예외가 원래 변형이면 기대되는 거절 또는 보류를 정답으로 정한다.</a:t>
-            </a:r>
-          </a:p>
-          <a:p xmlns:a="http://schemas.openxmlformats.org/drawingml/2006/main">
-            <a:r>
-              <a:t/>
-            </a:r>
-          </a:p>
-          <a:p xmlns:a="http://schemas.openxmlformats.org/drawingml/2006/main">
-            <a:r>
-              <a:t>다섯 사례와 네 반복은 시험 규모 선택이며 논문이 규정한 값이 아니다. 동일 사례를 무작위 순서와 같은 seed 집합으로 모든 후보에 적용한다. 분석 시 94개 변형이 동일한 가중치를 갖는다. 아직 구체 입력 fixture나 실행 runner는 만들지 않았으며, JSON은 시험 목록 설계이다.</a:t>
-            </a:r>
-          </a:p>
-          <a:p xmlns:a="http://schemas.openxmlformats.org/drawingml/2006/main">
-            <a:r>
-              <a:t/>
-            </a:r>
-          </a:p>
-          <a:p xmlns:a="http://schemas.openxmlformats.org/drawingml/2006/main">
-            <a:r>
-              <a:t>한 시험은 하나의 사용자 목표를 위한 상호작용 전체이다. 정정, 질문 답변, 후속 제어가 있더라도 같은 목표의 시험에 포함한다. 모델 호출, tool 호출이나 하위 Task를 별도 성공 표본으로 늘리지 않는다. 사용자가 독립적인 새 목표를 자발적으로 추가하면 새 시험으로 구분한다.</a:t>
-            </a:r>
-          </a:p>
-          <a:p xmlns:a="http://schemas.openxmlformats.org/drawingml/2006/main">
-            <a:r>
-              <a:t/>
-            </a:r>
-          </a:p>
-          <a:p xmlns:a="http://schemas.openxmlformats.org/drawingml/2006/main">
-            <a:r>
-              <a:t>### 2.2 정답과 외부 경계</a:t>
-            </a:r>
-          </a:p>
-          <a:p xmlns:a="http://schemas.openxmlformats.org/drawingml/2006/main">
-            <a:r>
-              <a:t/>
-            </a:r>
-          </a:p>
-          <a:p xmlns:a="http://schemas.openxmlformats.org/drawingml/2006/main">
-            <a:r>
-              <a:t>각 사례에는 시험 전 정답 manifest를 작성한다. 필드는 기대 의도, 대상, Conversation과 Task 연결, 요청 관계, 수정 범위, 허용 처리, 상태 변화, 필요한 결과 전달이다. 적용하지 않는 필드는 실행 전에 이유를 명시한다. 두 검토자가 기대 상태를 작성하고 불일치를 해결한 뒤 후보에 동일하게 적용한다. 후보가 내놓은 문장을 정답으로 삼지 않는다.</a:t>
-            </a:r>
-          </a:p>
-          <a:p xmlns:a="http://schemas.openxmlformats.org/drawingml/2006/main">
-            <a:r>
-              <a:t/>
-            </a:r>
-          </a:p>
-          <a:p xmlns:a="http://schemas.openxmlformats.org/drawingml/2006/main">
-            <a:r>
-              <a:t>Downstream Agent는 동일한 capability와 성공, 실패, 지연, 중복 알림 script를 제공하는 결정적 simulator로 고정한다. VIA가 받는 외부 결과와 실행 사실을 oracle에 기록한다. Agent 내부의 도메인 답변 품질을 VIA 성공률에 섞지 않는다. VIA의 잘못된 위임, 업무 연결, 상태 판단이나 결과 전달은 포함한다.</a:t>
-            </a:r>
-          </a:p>
-          <a:p xmlns:a="http://schemas.openxmlformats.org/drawingml/2006/main">
-            <a:r>
-              <a:t/>
-            </a:r>
-          </a:p>
-          <a:p xmlns:a="http://schemas.openxmlformats.org/drawingml/2006/main">
-            <a:r>
-              <a:t>시험 timeout은 최종 외부 사건 후 60초의 VIA 책임 시간으로 제안한다. 시간 목표 1초 또는 10초와 구분되는 관측 종료 조건이다. timeout과 crash도 전체 목록에 남긴다. 미지원, 미확인, 로그 누락을 성공 표본에서 제거하지 않는다. 실제 평가 전에 사례 manifest, seed, timeout, 환경 및 집계를 함께 확정한다.</a:t>
-            </a:r>
-          </a:p>
-          <a:p xmlns:a="http://schemas.openxmlformats.org/drawingml/2006/main">
-            <a:r>
-              <a:t/>
-            </a:r>
-          </a:p>
-          <a:p xmlns:a="http://schemas.openxmlformats.org/drawingml/2006/main">
-            <a:r>
-              <a:t>### 2.3 장치와 부하</a:t>
-            </a:r>
-          </a:p>
-          <a:p xmlns:a="http://schemas.openxmlformats.org/drawingml/2006/main">
-            <a:r>
-              <a:t/>
-            </a:r>
-          </a:p>
-          <a:p xmlns:a="http://schemas.openxmlformats.org/drawingml/2006/main">
-            <a:r>
-              <a:t>삼성 Galaxy Book6 Ultra NP960UJH-XG3IN의 32GB RAM, RTX 5070 Laptop 전용 GPU 8GB, Windows 11 구성을 발표의 장치 예산 기준으로 삼는다 [S06]. 실제 시험 장치는 모델명, BIOS, OS build, driver, 전력 모드, CPU, GPU, 저장장치와 사용 가능한 물리 메모리를 별도 기록한다. 다른 장치의 결과를 같은 장치 실적으로 표시하지 않는다.</a:t>
-            </a:r>
-          </a:p>
-          <a:p xmlns:a="http://schemas.openxmlformats.org/drawingml/2006/main">
-            <a:r>
-              <a:t/>
-            </a:r>
-          </a:p>
-          <a:p xmlns:a="http://schemas.openxmlformats.org/drawingml/2006/main">
-            <a:r>
-              <a:t>Omni와 Streaming ASR 및 모든 helper의 버전, 파라미터 수, 정밀도, 실제 파일 크기와 loaded bytes를 기록한다. 하나의 공유 Omni 가중치를 전제하고 역할별 Context와 KV의 실제 비용을 포함한다. 모델 호출량이나 의미 지원 범위를 줄여 메모리만 통과한 구성은 V-01과 V-03의 결과에서 드러나야 한다.</a:t>
-            </a:r>
-          </a:p>
-          <a:p xmlns:a="http://schemas.openxmlformats.org/drawingml/2006/main">
-            <a:r>
-              <a:t/>
-            </a:r>
-          </a:p>
-          <a:p xmlns:a="http://schemas.openxmlformats.org/drawingml/2006/main">
-            <a:r>
-              <a:t>시험 부하는 한 개의 활성 대화, 미완료 Task 네 개, 동시에 진행하는 외부 실행 두 개를 기본 profile로 제안한다. 이는 현재 측정된 수용량이 아닌 명시적인 비교 조건이다. 더 큰 부하는 별도 민감도 시험으로 공개한다. 입력 시간축과 최대 retained Context, KV, 화면 근거, 오디오 버퍼의 설정을 manifest에 적어 임의의 cache 한도 차이가 결과를 결정하지 않도록 한다.</a:t>
-            </a:r>
-          </a:p>
-          <a:p xmlns:a="http://schemas.openxmlformats.org/drawingml/2006/main">
-            <a:r>
-              <a:t/>
-            </a:r>
-          </a:p>
-          <a:p xmlns:a="http://schemas.openxmlformats.org/drawingml/2006/main">
-            <a:r>
-              <a:t>Cold 시작, warm 요청, 연속 정정, Task 전환, 음성 출력 중 새 입력, 재접속 및 장시간 background 상태를 분리해서 표시한다. 전체 평균만 공개해 어려운 조건을 숨기지 않는다.</a:t>
+              <a:t>기능 회귀 시험은 변형별 구체 사례 5개와 반복 4회로 **94 × 5 × 4 = 1,880회**를 설계한다. 각 변형의 다섯 사례는 표현, 대상의 혼동 가능성, 이력 길이, 허용된 화면 근거와 사건 순서를 바꾼다. 음성 전용 변형에 텍스트를 강제로 배정하지 않는다. 예외 변형의 올바른 거절과 보류는 정답이다. 잘못된 구현 때문에 정상 요청을 거절한 것은 실패다.</a:t>
+            </a:r>
+          </a:p>
+          <a:p xmlns:a="http://schemas.openxmlformats.org/drawingml/2006/main">
+            <a:r>
+              <a:t/>
+            </a:r>
+          </a:p>
+          <a:p xmlns:a="http://schemas.openxmlformats.org/drawingml/2006/main">
+            <a:r>
+              <a:t>각 사례는 하나의 사용자 목표를 위한 상호작용 전체다. 필요한 질문 답변과 정정 턴을 포함한다. 모델 호출, tool 호출, 하위 Task 수로 분모를 늘리지 않는다. 모든 반복을 포함하고 94개 변형은 동일한 가중치를 가진다. 다섯 사례와 네 반복은 재현 가능한 시험 규모의 제안이며 논문이 규정한 표본 수가 아니다. 1,880개 독립 사용자를 조사했다고 표현하지 않는다.</a:t>
+            </a:r>
+          </a:p>
+          <a:p xmlns:a="http://schemas.openxmlformats.org/drawingml/2006/main">
+            <a:r>
+              <a:t/>
+            </a:r>
+          </a:p>
+          <a:p xmlns:a="http://schemas.openxmlformats.org/drawingml/2006/main">
+            <a:r>
+              <a:t>다음 시험군은 전체 기능 평균에 섞지 않고 각각 보고한다. [evaluation-plan.json](evaluation-plan.json)은 시험군과 환경 및 DP별 구체 상황을 기록한다. 아직 실행 fixture나 runner를 구현하지 않았다.</a:t>
+            </a:r>
+          </a:p>
+          <a:p xmlns:a="http://schemas.openxmlformats.org/drawingml/2006/main">
+            <a:r>
+              <a:t/>
+            </a:r>
+          </a:p>
+          <a:p xmlns:a="http://schemas.openxmlformats.org/drawingml/2006/main">
+            <a:r>
+              <a:t>| 시험군 | 제안 규모 | 목적 |</a:t>
+            </a:r>
+          </a:p>
+          <a:p xmlns:a="http://schemas.openxmlformats.org/drawingml/2006/main">
+            <a:r>
+              <a:t>| --- | ---: | --- |</a:t>
+            </a:r>
+          </a:p>
+          <a:p xmlns:a="http://schemas.openxmlformats.org/drawingml/2006/main">
+            <a:r>
+              <a:t>| G-FUNC | 1,880회 | V-01~05의 공통 기능 및 상호작용 회귀 |</a:t>
+            </a:r>
+          </a:p>
+          <a:p xmlns:a="http://schemas.openxmlformats.org/drawingml/2006/main">
+            <a:r>
+              <a:t>| G-DP | 비교별 8개 상황 × 3개 조건 × 4회 = 96회 | 41~45의 실제 구조 차이에 민감한 조건 확인 |</a:t>
+            </a:r>
+          </a:p>
+          <a:p xmlns:a="http://schemas.openxmlformats.org/drawingml/2006/main">
+            <a:r>
+              <a:t>| G-CHANGE | 공통 변경 과제 6개 | V-08의 변경 영향 분석 |</a:t>
+            </a:r>
+          </a:p>
+          <a:p xmlns:a="http://schemas.openxmlformats.org/drawingml/2006/main">
+            <a:r>
+              <a:t>| G-MEM | 후보별 8시간 세션 3회 | 상시 동작과 반복 요청 및 최대 메모리 |</a:t>
+            </a:r>
+          </a:p>
+          <a:p xmlns:a="http://schemas.openxmlformats.org/drawingml/2006/main">
+            <a:r>
+              <a:t>| G-FAULT | 12종 × 3개 지점 × 4회 = 144회 | V-07의 올바른 복구 |</a:t>
+            </a:r>
+          </a:p>
+          <a:p xmlns:a="http://schemas.openxmlformats.org/drawingml/2006/main">
+            <a:r>
+              <a:t>| G-SEC | 금지 사례 144회와 허용 대조군 144회 | V-10의 무단 사용과 과도한 차단 확인 |</a:t>
+            </a:r>
+          </a:p>
+          <a:p xmlns:a="http://schemas.openxmlformats.org/drawingml/2006/main">
+            <a:r>
+              <a:t>| G-ANALYSIS | 위 시험의 고유 trial ID 전체 | V-09의 처리 경위 확인 |</a:t>
+            </a:r>
+          </a:p>
+          <a:p xmlns:a="http://schemas.openxmlformats.org/drawingml/2006/main">
+            <a:r>
+              <a:t/>
+            </a:r>
+          </a:p>
+          <a:p xmlns:a="http://schemas.openxmlformats.org/drawingml/2006/main">
+            <a:r>
+              <a:t>### 2.2 정답 계약과 입력</a:t>
+            </a:r>
+          </a:p>
+          <a:p xmlns:a="http://schemas.openxmlformats.org/drawingml/2006/main">
+            <a:r>
+              <a:t/>
+            </a:r>
+          </a:p>
+          <a:p xmlns:a="http://schemas.openxmlformats.org/drawingml/2006/main">
+            <a:r>
+              <a:t>각 구체 사례에는 실행 전에 다음 manifest를 작성한다. 두 검토자가 사용자 의도와 정답을 독립적으로 검토하고 불일치를 해결한다. 대안의 출력으로 정답을 만들지 않는다.</a:t>
+            </a:r>
+          </a:p>
+          <a:p xmlns:a="http://schemas.openxmlformats.org/drawingml/2006/main">
+            <a:r>
+              <a:t/>
+            </a:r>
+          </a:p>
+          <a:p xmlns:a="http://schemas.openxmlformats.org/drawingml/2006/main">
+            <a:r>
+              <a:t>| 항목 | 반드시 고정할 내용 |</a:t>
+            </a:r>
+          </a:p>
+          <a:p xmlns:a="http://schemas.openxmlformats.org/drawingml/2006/main">
+            <a:r>
+              <a:t>| --- | --- |</a:t>
+            </a:r>
+          </a:p>
+          <a:p xmlns:a="http://schemas.openxmlformats.org/drawingml/2006/main">
+            <a:r>
+              <a:t>| 식별 | case ID, UC 변형, DP 조건, 반복 seed, 독립 사용자 목표 |</a:t>
+            </a:r>
+          </a:p>
+          <a:p xmlns:a="http://schemas.openxmlformats.org/drawingml/2006/main">
+            <a:r>
+              <a:t>| 입력 | 실제 텍스트 또는 PCM 파일, 언어, 발화 시작과 종료, 화면과 pointer 사건 |</a:t>
+            </a:r>
+          </a:p>
+          <a:p xmlns:a="http://schemas.openxmlformats.org/drawingml/2006/main">
+            <a:r>
+              <a:t>| 초기 상태 | Conversation, Request, Task, Execution, 질문의 실제 제시 여부와 revision |</a:t>
+            </a:r>
+          </a:p>
+          <a:p xmlns:a="http://schemas.openxmlformats.org/drawingml/2006/main">
+            <a:r>
+              <a:t>| 근거 | source ID, 버전, 접근 범위, 삭제 및 권한 epoch, 누락된 범위 |</a:t>
+            </a:r>
+          </a:p>
+          <a:p xmlns:a="http://schemas.openxmlformats.org/drawingml/2006/main">
+            <a:r>
+              <a:t>| 의미 정답 | F1 의도, F2 대상, F3 대화와 Task 연결, F4 요청 관계, F5 수정 범위, F6 처리 방향 |</a:t>
+            </a:r>
+          </a:p>
+          <a:p xmlns:a="http://schemas.openxmlformats.org/drawingml/2006/main">
+            <a:r>
+              <a:t>| 상태 정답 | 허용된 상태 변화와 명령 및 외부 사실, 적용하지 않는 필드의 이유 |</a:t>
+            </a:r>
+          </a:p>
+          <a:p xmlns:a="http://schemas.openxmlformats.org/drawingml/2006/main">
+            <a:r>
+              <a:t>| 사용자 script | 필요한 답변, 승인, 오답 뒤 재요청과 수동 마무리, 실제 행동 단위 |</a:t>
+            </a:r>
+          </a:p>
+          <a:p xmlns:a="http://schemas.openxmlformats.org/drawingml/2006/main">
+            <a:r>
+              <a:t>| 출력 계약 | 필수 사실, artifact 접근, 실제 텍스트와 음성 전달 범위 및 오류 안내 |</a:t>
+            </a:r>
+          </a:p>
+          <a:p xmlns:a="http://schemas.openxmlformats.org/drawingml/2006/main">
+            <a:r>
+              <a:t>| 시간 조건 | 사건 기준점, 외부 알림 schedule, 관측 종료 및 fault 주입 지점 |</a:t>
+            </a:r>
+          </a:p>
+          <a:p xmlns:a="http://schemas.openxmlformats.org/drawingml/2006/main">
+            <a:r>
+              <a:t/>
+            </a:r>
+          </a:p>
+          <a:p xmlns:a="http://schemas.openxmlformats.org/drawingml/2006/main">
+            <a:r>
+              <a:t>한 턴이라도 필요한 의미, 상태 또는 전달이 틀리면 V-01의 해당 전체 시험은 실패다. 마지막 상태가 우연히 맞아 앞선 잘못된 전송을 가리지 않도록 각 턴을 검사한다. BFCL V3의 상태와 응답 검사 방식을 참고하되 [S11], API 호출 순서를 정답 하나로 강제하지 않는다. A의 ReAct나 B/C의 코드 조정 등 각 설계의 합법적인 경로를 허용한다.</a:t>
+            </a:r>
+          </a:p>
+          <a:p xmlns:a="http://schemas.openxmlformats.org/drawingml/2006/main">
+            <a:r>
+              <a:t/>
+            </a:r>
+          </a:p>
+          <a:p xmlns:a="http://schemas.openxmlformats.org/drawingml/2006/main">
+            <a:r>
+              <a:t>한국어를 기본 시험 언어로 한다. 한국어 입력과 영어 문서 또는 앱 이름이 섞인 상황을 포함한다. 음성 PCM은 동일 파일을 같은 입력 경계에 replay한다. 기본 조용한 음성 조건과 배경 소음 15dB SNR 조건을 구분한다. 이는 일반 사용자의 소음 분포를 주장하는 수치가 아니라 반복 가능한 시험 조건이다. 정답 Task ID를 시스템 입력에 미리 붙이지 않는다.</a:t>
+            </a:r>
+          </a:p>
+          <a:p xmlns:a="http://schemas.openxmlformats.org/drawingml/2006/main">
+            <a:r>
+              <a:t/>
+            </a:r>
+          </a:p>
+          <a:p xmlns:a="http://schemas.openxmlformats.org/drawingml/2006/main">
+            <a:r>
+              <a:t>Context 조건은 짧은 근거 1k 토큰 상당, 긴 근거 8k 토큰 상당과 관련 없는 후보 20개를 명시한다. 모델에 실제 주입한 토큰 수와 retrieval로 읽은 원본량은 각각 기록한다. 메모리 시험의 전체 KV 예산은 §9에서 따로 계산한다. 필수 정보를 잘라낸 구성은 정확성 및 완전성에서 실패한다.</a:t>
+            </a:r>
+          </a:p>
+          <a:p xmlns:a="http://schemas.openxmlformats.org/drawingml/2006/main">
+            <a:r>
+              <a:t/>
+            </a:r>
+          </a:p>
+          <a:p xmlns:a="http://schemas.openxmlformats.org/drawingml/2006/main">
+            <a:r>
+              <a:t>### 2.3 장치와 모델 및 출력</a:t>
+            </a:r>
+          </a:p>
+          <a:p xmlns:a="http://schemas.openxmlformats.org/drawingml/2006/main">
+            <a:r>
+              <a:t/>
+            </a:r>
+          </a:p>
+          <a:p xmlns:a="http://schemas.openxmlformats.org/drawingml/2006/main">
+            <a:r>
+              <a:t>| 항목 | 공통 제안 조건 |</a:t>
+            </a:r>
+          </a:p>
+          <a:p xmlns:a="http://schemas.openxmlformats.org/drawingml/2006/main">
+            <a:r>
+              <a:t>| --- | --- |</a:t>
+            </a:r>
+          </a:p>
+          <a:p xmlns:a="http://schemas.openxmlformats.org/drawingml/2006/main">
+            <a:r>
+              <a:t>| 장치 기준 | Samsung Galaxy Book6 Ultra NP960UJH-XG3IN, RAM 32GB, RTX 5070 Laptop 전용 VRAM 8GB, NVMe 1TB [S06] |</a:t>
+            </a:r>
+          </a:p>
+          <a:p xmlns:a="http://schemas.openxmlformats.org/drawingml/2006/main">
+            <a:r>
+              <a:t>| 화면 | 공식 사양의 2880 × 1800, OS 배율과 capture 해상도 고정 |</a:t>
+            </a:r>
+          </a:p>
+          <a:p xmlns:a="http://schemas.openxmlformats.org/drawingml/2006/main">
+            <a:r>
+              <a:t>| OS와 실행 | Windows 11, AC 연결, 같은 전력 모드, 동일 driver와 build, 24시간 절전 중지 |</a:t>
+            </a:r>
+          </a:p>
+          <a:p xmlns:a="http://schemas.openxmlformats.org/drawingml/2006/main">
+            <a:r>
+              <a:t>| 기록할 환경 | 실제 CPU/GPU, BIOS, available RAM, driver, 온도, 전력 상태 및 page fault |</a:t>
+            </a:r>
+          </a:p>
+          <a:p xmlns:a="http://schemas.openxmlformats.org/drawingml/2006/main">
+            <a:r>
+              <a:t>| 모델 | 동일한 공유 on-device Omni 한 벌, 독립 Streaming ASR, 동일 helper inventory |</a:t>
+            </a:r>
+          </a:p>
+          <a:p xmlns:a="http://schemas.openxmlformats.org/drawingml/2006/main">
+            <a:r>
+              <a:t>| 모델 계약 | 모델 hash, tokenizer, quantization, runtime, context 한도, decoding과 seed를 실제 평가 전에 고정 |</a:t>
+            </a:r>
+          </a:p>
+          <a:p xmlns:a="http://schemas.openxmlformats.org/drawingml/2006/main">
+            <a:r>
+              <a:t>| 자원 조건 | 동일 총 weight와 KV 예산, scheduler 정책, thread와 GPU 설정. 호출 수와 producer state는 대안의 비용으로 남김 |</a:t>
+            </a:r>
+          </a:p>
+          <a:p xmlns:a="http://schemas.openxmlformats.org/drawingml/2006/main">
+            <a:r>
+              <a:t>| 기본 부하 | 활성 Conversation 1개, 미완료 Task 4개, 외부 실행 2개 |</a:t>
+            </a:r>
+          </a:p>
+          <a:p xmlns:a="http://schemas.openxmlformats.org/drawingml/2006/main">
+            <a:r>
+              <a:t>| 입력과 사건 | 사용자 입력 중 Agent 질문 또는 결과 도착, 음성 출력 중 정정, source와 권한 변경 |</a:t>
+            </a:r>
+          </a:p>
+          <a:p xmlns:a="http://schemas.openxmlformats.org/drawingml/2006/main">
+            <a:r>
+              <a:t>| 출력 길이 | 짧은 요약은 필수 사실을 담은 텍스트와 최대 4초 기준 음성, 상세 내용은 동일 artifact |</a:t>
+            </a:r>
+          </a:p>
+          <a:p xmlns:a="http://schemas.openxmlformats.org/drawingml/2006/main">
+            <a:r>
+              <a:t>| 긴 출력 | 20초 기준 설명 음성을 별도 조건으로 보고하고 V-05의 10초 적용 범위와 구별 |</a:t>
+            </a:r>
+          </a:p>
+          <a:p xmlns:a="http://schemas.openxmlformats.org/drawingml/2006/main">
+            <a:r>
+              <a:t>| 반복 | seed 11, 23, 37, 53. 후보 실행 순서는 교차 배치하고 상태는 동일 snapshot으로 복원 |</a:t>
+            </a:r>
+          </a:p>
+          <a:p xmlns:a="http://schemas.openxmlformats.org/drawingml/2006/main">
+            <a:r>
+              <a:t/>
+            </a:r>
+          </a:p>
+          <a:p xmlns:a="http://schemas.openxmlformats.org/drawingml/2006/main">
+            <a:r>
+              <a:t>한국어 4초와 20초는 동일 renderer의 기준 음성 fixture 길이다. 모델 생성 음성은 실제 길이를 다시 계측한다. 목표 통과를 위해 중요한 내용을 생략할 수 없다. 20초 설명은 실제 재생만으로 10초를 넘으므로 짧은 응답 계약용 V-05 점수에 합치지 않는다. 기능 정확성과 지원률 및 긴 출력의 실제 시간은 계속 보고한다. 이 적용 범위를 평가 전에 공개한다.</a:t>
+            </a:r>
+          </a:p>
+          <a:p xmlns:a="http://schemas.openxmlformats.org/drawingml/2006/main">
+            <a:r>
+              <a:t/>
+            </a:r>
+          </a:p>
+          <a:p xmlns:a="http://schemas.openxmlformats.org/drawingml/2006/main">
+            <a:r>
+              <a:t>모델의 구체 버전은 아직 선정하지 않았다. 따라서 현재 문서가 완성된 환경 freeze나 실행 가능 benchmark라는 주장은 하지 않는다. 같은 10B라도 서로 다른 모델이면 별도 조건이다. 실제 시험 전 버전, hash, 장치 및 입력 파일을 채워 계약을 동결해야 한다.</a:t>
+            </a:r>
+          </a:p>
+          <a:p xmlns:a="http://schemas.openxmlformats.org/drawingml/2006/main">
+            <a:r>
+              <a:t/>
+            </a:r>
+          </a:p>
+          <a:p xmlns:a="http://schemas.openxmlformats.org/drawingml/2006/main">
+            <a:r>
+              <a:t>Cold는 프로세스와 가중치 및 해당 시험 cache가 없는 상태, warm은 가중치가 상주한 상태다. OS 파일 cache의 상태도 기록한다. 기능 회귀는 warm으로 수행하고 cold 첫 요청을 별도 시간 및 메모리 시험으로 수행한다. 발표의 반응시간 목표는 VIA가 이미 실행 중인 warm 상호작용에 적용한다. 시작 시간이나 모델 loading을 숨기지 않고 별도 공개한다.</a:t>
+            </a:r>
+          </a:p>
+          <a:p xmlns:a="http://schemas.openxmlformats.org/drawingml/2006/main">
+            <a:r>
+              <a:t/>
+            </a:r>
+          </a:p>
+          <a:p xmlns:a="http://schemas.openxmlformats.org/drawingml/2006/main">
+            <a:r>
+              <a:t>VIA 외 프로세스의 RAM을 임의로 몇 GB 예약하지 않는다. 기본 시험에서는 관련 없는 부하를 끄고 OS 상태를 기록한다. 같은 foreground 앱으로 근거를 제공하는 데 필요한 비용은 VIA 비용과 구별한다. 전체 PC 공존성을 증명했다고 주장하지 않는다.</a:t>
+            </a:r>
+          </a:p>
+          <a:p xmlns:a="http://schemas.openxmlformats.org/drawingml/2006/main">
+            <a:r>
+              <a:t/>
+            </a:r>
+          </a:p>
+          <a:p xmlns:a="http://schemas.openxmlformats.org/drawingml/2006/main">
+            <a:r>
+              <a:t>### 2.4 Downstream Agent와 관측</a:t>
+            </a:r>
+          </a:p>
+          <a:p xmlns:a="http://schemas.openxmlformats.org/drawingml/2006/main">
+            <a:r>
+              <a:t/>
+            </a:r>
+          </a:p>
+          <a:p xmlns:a="http://schemas.openxmlformats.org/drawingml/2006/main">
+            <a:r>
+              <a:t>같은 결정적 simulator가 동일 capability와 외부 결과를 제공한다. 기본 script는 접수 확인 0.2초 후, 첫 상태 1초 후, 결과 5초 후다. 지연 조건은 결과 30초 후, 중복과 역순은 동일 event ID 및 revision의 정해진 schedule로 발생한다. 이 값들은 외부 모델의 실측 성능이 아닌 통제 입력이다. 실제 Agent와의 검증은 별도 integration 시험으로 기록한다.</a:t>
+            </a:r>
+          </a:p>
+          <a:p xmlns:a="http://schemas.openxmlformats.org/drawingml/2006/main">
+            <a:r>
+              <a:t/>
+            </a:r>
+          </a:p>
+          <a:p xmlns:a="http://schemas.openxmlformats.org/drawingml/2006/main">
+            <a:r>
+              <a:t>VIA의 잘못된 대상, Task 연결, 명령, 상태 판단 및 전달은 V-01에 포함한다. 외부 Agent의 도메인 추론과 실제 업무 품질은 제외한다. 외부가 실패를 알려온 예외 사례에서 VIA가 사실을 정확히 전달하고 계약대로 처리하면 성공이다.</a:t>
+            </a:r>
+          </a:p>
+          <a:p xmlns:a="http://schemas.openxmlformats.org/drawingml/2006/main">
+            <a:r>
+              <a:t/>
+            </a:r>
+          </a:p>
+          <a:p xmlns:a="http://schemas.openxmlformats.org/drawingml/2006/main">
+            <a:r>
+              <a:t>모든 endpoint는 동일 monotonic clock에 맞춘다. OS audio loopback과 UI capture로 실제 전달을 확인한다. 내부 생성 완료, enqueue, 첫 packet과 실제 사용자 전달을 구별한다. recorder clock 동기 오차와 표본 주기를 결과에 기재한다. logger만으로 logger의 유실을 판정하지 않고 독립 harness registry를 사용한다.</a:t>
+            </a:r>
+          </a:p>
+          <a:p xmlns:a="http://schemas.openxmlformats.org/drawingml/2006/main">
+            <a:r>
+              <a:t/>
+            </a:r>
+          </a:p>
+          <a:p xmlns:a="http://schemas.openxmlformats.org/drawingml/2006/main">
+            <a:r>
+              <a:t>관측 종료는 VIA 책임 구간 60초, 사용자나 외부 응답만 기다리는 전체 wall time 120초로 제안한다. 예고한 Agent 결과와 사용자 답변은 종료 전에 공급한다. 종료 조건은 후보마다 같고 결과를 보고 연장하지 않는다. crash와 timeout을 삭제하거나 무한대 숫자로 바꾸지 않는다.</a:t>
+            </a:r>
+          </a:p>
+          <a:p xmlns:a="http://schemas.openxmlformats.org/drawingml/2006/main">
+            <a:r>
+              <a:t/>
+            </a:r>
+          </a:p>
+          <a:p xmlns:a="http://schemas.openxmlformats.org/drawingml/2006/main">
+            <a:r>
+              <a:t>### 2.5 시간과 실패의 공통 처리</a:t>
+            </a:r>
+          </a:p>
+          <a:p xmlns:a="http://schemas.openxmlformats.org/drawingml/2006/main">
+            <a:r>
+              <a:t/>
+            </a:r>
+          </a:p>
+          <a:p xmlns:a="http://schemas.openxmlformats.org/drawingml/2006/main">
+            <a:r>
+              <a:t>정확성 판정과 시간 측정은 분리한다. 틀린 매칭이라도 반응, 오류 안내 또는 실제 처리가 끝난 시각이 있으면 그 경과시간을 사용하고 V-01에서 실패로 남긴다. 빠른 오답의 시간이 길었다고 만들어내지 않는다.</a:t>
+            </a:r>
+          </a:p>
+          <a:p xmlns:a="http://schemas.openxmlformats.org/drawingml/2006/main">
+            <a:r>
+              <a:t/>
+            </a:r>
+          </a:p>
+          <a:p xmlns:a="http://schemas.openxmlformats.org/drawingml/2006/main">
+            <a:r>
+              <a:t>| 관측 상태 | 시간 기록 | 판정 |</a:t>
+            </a:r>
+          </a:p>
+          <a:p xmlns:a="http://schemas.openxmlformats.org/drawingml/2006/main">
+            <a:r>
+              <a:t>| --- | --- | --- |</a:t>
+            </a:r>
+          </a:p>
+          <a:p xmlns:a="http://schemas.openxmlformats.org/drawingml/2006/main">
+            <a:r>
+              <a:t>| 정답과 실제 전달 | 실제 종료 사건까지의 경과시간 | 정확성과 시간 각각 판정 |</a:t>
+            </a:r>
+          </a:p>
+          <a:p xmlns:a="http://schemas.openxmlformats.org/drawingml/2006/main">
+            <a:r>
+              <a:t>| 오답 또는 실패 안내 전달 | 실제 반응과 종료 시각까지의 경과시간 | 정확성은 정답 manifest로 별도 판정. 오답은 실패, 올바른 예외 안내는 성공 |</a:t>
+            </a:r>
+          </a:p>
+          <a:p xmlns:a="http://schemas.openxmlformats.org/drawingml/2006/main">
+            <a:r>
+              <a:t>| 출력 없이 crash 또는 timeout | harness가 실제 관측을 종료할 때까지의 경과시간 | 미전달 표식. 실제 전달시간이라고 표기하지 않음 |</a:t>
+            </a:r>
+          </a:p>
+          <a:p xmlns:a="http://schemas.openxmlformats.org/drawingml/2006/main">
+            <a:r>
+              <a:t>| 복구를 못 한 장애 | 관측 종료까지 실제 기다린 시간 | 미복구 표식. 정상 복구시간으로 표기하지 않음 |</a:t>
+            </a:r>
+          </a:p>
+          <a:p xmlns:a="http://schemas.openxmlformats.org/drawingml/2006/main">
+            <a:r>
+              <a:t/>
+            </a:r>
+          </a:p>
+          <a:p xmlns:a="http://schemas.openxmlformats.org/drawingml/2006/main">
+            <a:r>
+              <a:t>모든 trial의 **관측 경과시간 산술평균**을 먼저 보고하고 미전달 및 미복구 ID를 함께 제시한다. endpoint를 관측하지 못한 표본이 있으면 이 평균은 관측 기간까지만 포함한 값임을 표시하고, 해당 시간 목표의 충족 판정은 보류한다. 누락된 endpoint를 60초에 전달 또는 복구했다고 꾸미지 않는다. 유효한 오답 전달은 endpoint 누락이 아니므로 이 보류 규칙을 적용하지 않는다. 정답률을 암묵적으로 더 높이는 집계도 쓰지 않는다.</a:t>
+            </a:r>
+          </a:p>
+          <a:p xmlns:a="http://schemas.openxmlformats.org/drawingml/2006/main">
+            <a:r>
+              <a:t/>
+            </a:r>
+          </a:p>
+          <a:p xmlns:a="http://schemas.openxmlformats.org/drawingml/2006/main">
+            <a:r>
+              <a:t>종류별 평균, 경로별 평균, cold와 warm, 최솟값과 최댓값 및 실패 목록은 진단으로 보고한다. 대표 목표는 산술평균 하나다. 평균이 동일하더라도 어려운 조건에서 발생한 회귀를 숨기지 않는다. 대안 간 차이는 동일 사례와 seed의 paired 결과로 제시한다. 정확도 신뢰구간은 반복 네 회를 독립으로 취급하지 않고 470개 구체 사례를 cluster로 묶어 산출한다. 측정 전 평균과 분모 및 적용 범위를 고정한다.</a:t>
             </a:r>
           </a:p>
           <a:p xmlns:a="http://schemas.openxmlformats.org/drawingml/2006/main">
@@ -973,37 +1353,37 @@
           </a:p>
           <a:p xmlns:a="http://schemas.openxmlformats.org/drawingml/2006/main">
             <a:r>
-              <a:t>**단일 목표:** 정확 처리율 90% 이상.</a:t>
-            </a:r>
-          </a:p>
-          <a:p xmlns:a="http://schemas.openxmlformats.org/drawingml/2006/main">
-            <a:r>
-              <a:t/>
-            </a:r>
-          </a:p>
-          <a:p xmlns:a="http://schemas.openxmlformats.org/drawingml/2006/main">
-            <a:r>
-              <a:t>**근거:** Joint BERT 연구의 SNIPS 시험은 문장 전체의 의도와 slot이 모두 맞는 semantic frame accuracy 92.8%를 보고한다 [S01]. slot F1 97.0%나 intent 정확도 98.6%를 전체 요청 성공률처럼 쓰지 않는다. VIA의 첫 통합 평가에서는 더 복잡한 화면과 업무 상태 판단까지 포함하므로 이 문장 단위 결과를 그대로 달성했다고 가정하지 않고, 가까운 정수 10% 단위의 보수적인 목표인 90%를 제안한다. 이는 허용 오류 예산이 전체 시험의 10%라는 뜻이다.</a:t>
-            </a:r>
-          </a:p>
-          <a:p xmlns:a="http://schemas.openxmlformats.org/drawingml/2006/main">
-            <a:r>
-              <a:t/>
-            </a:r>
-          </a:p>
-          <a:p xmlns:a="http://schemas.openxmlformats.org/drawingml/2006/main">
-            <a:r>
-              <a:t>92.8%와 VIA 90%는 서로 다른 모집단이다. 비교 실적이나 최종 제품 출시 기준으로 주장할 수 없다. tau-bench가 대화 종료 후 실제 DB 상태를 정답 상태와 대조하는 방법은 전체 요청의 성공 판정에 참고한다 [S02]. 그 benchmark에서 보고한 낮은 Agent 성공률은 VIA의 90%를 증명하거나 반박하는 직접 비교 수치가 아니다.</a:t>
-            </a:r>
-          </a:p>
-          <a:p xmlns:a="http://schemas.openxmlformats.org/drawingml/2006/main">
-            <a:r>
-              <a:t/>
-            </a:r>
-          </a:p>
-          <a:p xmlns:a="http://schemas.openxmlformats.org/drawingml/2006/main">
-            <a:r>
-              <a:t>**분모와 식:**</a:t>
+              <a:t>**단일 목표:** 정확 처리율 95% 이상.</a:t>
+            </a:r>
+          </a:p>
+          <a:p xmlns:a="http://schemas.openxmlformats.org/drawingml/2006/main">
+            <a:r>
+              <a:t/>
+            </a:r>
+          </a:p>
+          <a:p xmlns:a="http://schemas.openxmlformats.org/drawingml/2006/main">
+            <a:r>
+              <a:t>**근거 사실:** Nexusflow의 NexusRaven-13B 구현은 demonstration retrieval을 결합한 CVE/CPE Search와 VirusTotal 도구 사용에서 성공률 95%를 보고한다 [S01]. 문장 intent 분류나 slot별 F1보다 함수 선택과 인자 구성을 평가한다는 점에서 VIA의 요청 처리와 더 가깝다. 개발팀이 공개한 결과이며 독립적으로 재현한 VIA 실적은 아니다.</a:t>
+            </a:r>
+          </a:p>
+          <a:p xmlns:a="http://schemas.openxmlformats.org/drawingml/2006/main">
+            <a:r>
+              <a:t/>
+            </a:r>
+          </a:p>
+          <a:p xmlns:a="http://schemas.openxmlformats.org/drawingml/2006/main">
+            <a:r>
+              <a:t>**목표 선택:** 이미 공개된 검색 보조 도구 사용 구현의 95%를 VIA 통합 평가가 지향할 참조 수준으로 선택한다. 90%로 임의 반올림하거나 화면과 업무 이력을 이유로 5%를 할인하지 않는다. 고정 corpus에서 최대 5%의 전체 요청 실패를 허용하는 연구 평가 목표이며 정식 제품 출시의 안전 인증 기준은 아니다. VIA가 더 복잡한 기능을 갖는 만큼 달성 가능성은 직접 시험해야 한다.</a:t>
+            </a:r>
+          </a:p>
+          <a:p xmlns:a="http://schemas.openxmlformats.org/drawingml/2006/main">
+            <a:r>
+              <a:t/>
+            </a:r>
+          </a:p>
+          <a:p xmlns:a="http://schemas.openxmlformats.org/drawingml/2006/main">
+            <a:r>
+              <a:t>**전이 한계:** NexusRaven은 VIA와 모델 크기, quantization, 장치, 언어, 업무 상태와 화면 근거가 다르다. 보안 도구 시험의 95%가 VIA의 한국어 다중 턴 성공률을 예측한다고 주장하지 않는다. 이 출처만으로 VIA가 95%를 달성한다고 말할 수 없다. 전체 VIA 성능에 동일 corpus의 외부 수치가 없다는 한계를 발표 답변에서도 명시한다. 목표를 선택하는 근거와 목표를 달성하는 증거를 구분한다.</a:t>
             </a:r>
           </a:p>
           <a:p xmlns:a="http://schemas.openxmlformats.org/drawingml/2006/main">
@@ -1018,12 +1398,12 @@
           </a:p>
           <a:p xmlns:a="http://schemas.openxmlformats.org/drawingml/2006/main">
             <a:r>
-              <a:t>N = 94개 필수 변형 × 5개 구체 사례 × 4회 반복 = 1,880회</a:t>
-            </a:r>
-          </a:p>
-          <a:p xmlns:a="http://schemas.openxmlformats.org/drawingml/2006/main">
-            <a:r>
-              <a:t>success(i) = 사례 i의 적용 가능한 필수 oracle 판정을 모두 만족하면 1, 아니면 0</a:t>
+              <a:t>N = 94개 필수 변형 × 5개 구체 사례 × 4회 = 1,880회</a:t>
+            </a:r>
+          </a:p>
+          <a:p xmlns:a="http://schemas.openxmlformats.org/drawingml/2006/main">
+            <a:r>
+              <a:t>success(i) = 모든 턴의 적용 가능한 필수 oracle 판정을 만족하면 1, 아니면 0</a:t>
             </a:r>
           </a:p>
           <a:p xmlns:a="http://schemas.openxmlformats.org/drawingml/2006/main">
@@ -1033,7 +1413,7 @@
           </a:p>
           <a:p xmlns:a="http://schemas.openxmlformats.org/drawingml/2006/main">
             <a:r>
-              <a:t>목표 성공 수 = 1,692회 이상</a:t>
+              <a:t>목표 성공 수 = 1,786회 이상</a:t>
             </a:r>
           </a:p>
           <a:p xmlns:a="http://schemas.openxmlformats.org/drawingml/2006/main">
@@ -1048,27 +1428,27 @@
           </a:p>
           <a:p xmlns:a="http://schemas.openxmlformats.org/drawingml/2006/main">
             <a:r>
-              <a:t>미지원도 분모에 포함한다. 원래 예외 시험에서 올바른 보류나 거절은 성공이지만, 기능을 지원하지 못해 정상 요청을 거절한 경우는 실패이다. 정확한 안내 문구만 내놓고 필요한 처리를 수행하지 않으면 성공으로 세지 않는다.</a:t>
-            </a:r>
-          </a:p>
-          <a:p xmlns:a="http://schemas.openxmlformats.org/drawingml/2006/main">
-            <a:r>
-              <a:t/>
-            </a:r>
-          </a:p>
-          <a:p xmlns:a="http://schemas.openxmlformats.org/drawingml/2006/main">
-            <a:r>
-              <a:t>시험 전 manifest와 실제 semantic output, 채택된 상태, 명령, Agent 사실 및 사용자에게 전달한 결과를 자동 대조한다. 동등한 표현의 의미 판정이 필요하면 후보를 가린 검토자가 rubric으로 판정한다. 전체 판정과 필드별 오류를 모두 보존한다. 모델을 judge로 사용할 때도 사람과 일치도를 먼저 검증하며 judge의 답을 무검토 정답으로 삼지 않는다.</a:t>
-            </a:r>
-          </a:p>
-          <a:p xmlns:a="http://schemas.openxmlformats.org/drawingml/2006/main">
-            <a:r>
-              <a:t/>
-            </a:r>
-          </a:p>
-          <a:p xmlns:a="http://schemas.openxmlformats.org/drawingml/2006/main">
-            <a:r>
-              <a:t>90%는 이 비율 하나의 목표이다. 다른 업무 오실행과 중복 실행을 별도의 0건 목표로 이 행에 넣지 않는다. 이런 사건은 해당 시험의 정확성 실패와 오류 유형으로 남기며 기존 실행 안전 계약도 유지한다. 반복은 독립 사용자 표본이 아니므로 신뢰구간은 470개 구체 사례를 cluster로 묶어 추정한다.</a:t>
+              <a:t>tau-bench의 실제 상태 대조 [S02]와 BFCL V3의 턴별 상태 및 응답 검사 [S11]를 판정 방법에 참고한다. 의도와 slot을 각각 맞힌 비율을 전체 처리율로 합치지 않는다. 모델이 선택한 tool이 정답이라는 이유만으로 올바른 Task 및 전달까지 맞았다고 간주하지 않는다.</a:t>
+            </a:r>
+          </a:p>
+          <a:p xmlns:a="http://schemas.openxmlformats.org/drawingml/2006/main">
+            <a:r>
+              <a:t/>
+            </a:r>
+          </a:p>
+          <a:p xmlns:a="http://schemas.openxmlformats.org/drawingml/2006/main">
+            <a:r>
+              <a:t>필수 oracle은 F1~F6의 적용 필드, 필요한 상태 변화, 명령과 외부 사실, 사용자 전달이다. 응답 표현은 달라도 필수 사실이 같으면 인정한다. 불명확한 표현은 후보를 가린 검토자가 고정 rubric으로 판정한다. 정답 상태를 확인할 수 없는 시험과 미지원 및 미전달도 분모에 남고 실패다. 오실행과 중복 실행은 해당 전체 시험의 오류 유형으로 기록한다. 이 행에 별도의 수치 목표를 추가하지 않는다.</a:t>
+            </a:r>
+          </a:p>
+          <a:p xmlns:a="http://schemas.openxmlformats.org/drawingml/2006/main">
+            <a:r>
+              <a:t/>
+            </a:r>
+          </a:p>
+          <a:p xmlns:a="http://schemas.openxmlformats.org/drawingml/2006/main">
+            <a:r>
+              <a:t>DP별 96회에는 같은 정의를 적용하고 성공 수 92회 이상이 95% 하한이다. 작은 시험군의 통계적 불확실성을 공개하고 전체 기능 평균으로 DP의 취약 조건을 가리지 않는다. 동일 목표의 적용 여부는 시험군별로 명시하며 새로운 오류가 중요한 안전 계약을 깨면 별도 기존 qualification에도 남긴다.</a:t>
             </a:r>
           </a:p>
           <a:p xmlns:a="http://schemas.openxmlformats.org/drawingml/2006/main">
@@ -1088,7 +1468,7 @@
           </a:p>
           <a:p xmlns:a="http://schemas.openxmlformats.org/drawingml/2006/main">
             <a:r>
-              <a:t>**설명:** 사용자가 적은 추가 입력으로 요청을 마칠 수 있어야 한다.</a:t>
+              <a:t>**설명:** 추가 사용자 입력을 최소화해 요청을 마쳐야 한다.</a:t>
             </a:r>
           </a:p>
           <a:p xmlns:a="http://schemas.openxmlformats.org/drawingml/2006/main">
@@ -1108,17 +1488,7 @@
           </a:p>
           <a:p xmlns:a="http://schemas.openxmlformats.org/drawingml/2006/main">
             <a:r>
-              <a:t>**근거:** 시각 질의의 정보가 부족할 때 CoA는 필요한 경우 하나의 집중된 질문을 하고 답변을 반영하는 접근을 사용한다 [S03]. VIA도 근거를 먼저 활용하고 한 번의 답변에 필요한 정보를 모으는 상호작용을 목표로 삼아 추가 개입 예산을 1회로 제안한다. 이 연구는 VIA의 모든 요청이 질문 하나로 해결된다는 실증 근거가 아니며, VIA의 권한 승인 비용도 아래 횟수에 포함한다.</a:t>
-            </a:r>
-          </a:p>
-          <a:p xmlns:a="http://schemas.openxmlformats.org/drawingml/2006/main">
-            <a:r>
-              <a:t/>
-            </a:r>
-          </a:p>
-          <a:p xmlns:a="http://schemas.openxmlformats.org/drawingml/2006/main">
-            <a:r>
-              <a:t>**분모와 식:** 같은 1,880회 전체 시험에 대해, 최초 목표 입력 이후 VIA가 요구한 추가 사용자 입력을 센다.</a:t>
+              <a:t>CoA는 필요한 때 하나의 집중 질문으로 부족한 시각 질의 정보를 보완하는 접근을 사용한다 [S03]. VIA에서도 근거를 먼저 활용하고 필요한 정보를 한 번에 묻는 상호작용 예산을 선택한다. 논문이 VIA의 모든 요청이나 권한 승인을 평균 한 번으로 처리했다고 주장하지 않는다. 승인에 필요한 입력도 예산에 포함하며 필수 승인을 생략할 수 없다.</a:t>
             </a:r>
           </a:p>
           <a:p xmlns:a="http://schemas.openxmlformats.org/drawingml/2006/main">
@@ -1133,12 +1503,12 @@
           </a:p>
           <a:p xmlns:a="http://schemas.openxmlformats.org/drawingml/2006/main">
             <a:r>
-              <a:t>u(i) = VIA가 요구한 추가 답변, 선택, 승인 또는 수동 우회 횟수</a:t>
-            </a:r>
-          </a:p>
-          <a:p xmlns:a="http://schemas.openxmlformats.org/drawingml/2006/main">
-            <a:r>
-              <a:t>사용자 개입 횟수 = Σ u(i) / 1,880</a:t>
+              <a:t>u(i) = 최초 요청 뒤 VIA가 요구한 사용자 입력 episode 수</a:t>
+            </a:r>
+          </a:p>
+          <a:p xmlns:a="http://schemas.openxmlformats.org/drawingml/2006/main">
+            <a:r>
+              <a:t>평균 사용자 개입 = Σ u(i) / 1,880</a:t>
             </a:r>
           </a:p>
           <a:p xmlns:a="http://schemas.openxmlformats.org/drawingml/2006/main">
@@ -1153,17 +1523,27 @@
           </a:p>
           <a:p xmlns:a="http://schemas.openxmlformats.org/drawingml/2006/main">
             <a:r>
-              <a:t>하나의 질문에 음성과 선택 UI를 함께 사용해 답하면 하나의 응답 episode로 센다. VIA가 다시 질문하여 새 답변을 받으면 한 번을 더 센다. 자동 정보 읽기와 시스템 내부 재시도는 사용자 개입이 아니다. 자발적 새 목표는 최초 입력으로 분리하지만, 기능 부족 때문에 사용자가 수동으로 앱을 조작하는 우회는 포함한다.</a:t>
-            </a:r>
-          </a:p>
-          <a:p xmlns:a="http://schemas.openxmlformats.org/drawingml/2006/main">
-            <a:r>
-              <a:t/>
-            </a:r>
-          </a:p>
-          <a:p xmlns:a="http://schemas.openxmlformats.org/drawingml/2006/main">
-            <a:r>
-              <a:t>시험 사용자는 script에 정해진 최소 답변을 제공한다. 실패 응답 뒤 원래 목표를 다시 요청하거나 앱에서 수동으로 마무리하는 동작도 script에 넣고 실제 개입으로 센다. 필요 권한을 생략하거나 불확실한 대상에 대해 추측해 개입을 줄인 시험은 V-01이나 V-10에서 실패한다. 미완료 시험도 당시까지의 실제 횟수로 분모에 남기고 성공 여부에 따른 개입 분포를 함께 공개한다. 아무것도 수행하지 않는 구현의 0회는 낮은 부담의 근거로 해석하지 않는다. 이 지표는 V-01과 V-03의 기능 결과와 함께 평가하며 성공 시험만 뽑은 평균을 쓰지 않는다.</a:t>
+              <a:t>질문 답변, 대상 선택과 승인을 각각 새로운 답변 episode로 센다. 같은 질문에 음성과 UI를 함께 써 하나의 답을 제출하면 한 번이다. 앱을 수동으로 마무리하는 경우 클릭 묶음을 임의로 하나로 만들지 않고 manifest의 의미 있는 실행 단계별로 센다. 예를 들어 파일 선택, 내용 입력, 실행 확인은 각각 한 단계다. 내부 자동 재시도는 사용자 개입이 아니다.</a:t>
+            </a:r>
+          </a:p>
+          <a:p xmlns:a="http://schemas.openxmlformats.org/drawingml/2006/main">
+            <a:r>
+              <a:t/>
+            </a:r>
+          </a:p>
+          <a:p xmlns:a="http://schemas.openxmlformats.org/drawingml/2006/main">
+            <a:r>
+              <a:t>실패가 보이면 동일 사용자 script가 최대 두 번의 재요청을 하고 이후 사례별 수동 마무리를 시도한다. 실제 관측한 단계만 세며 미완료도 분모에 포함한다. 구현을 보고 우회 횟수를 줄이지 않는다. 자발적인 독립 새 목표는 새 시험이며 기능 부족 때문에 같은 목표를 다시 설명하는 것은 추가 개입이다.</a:t>
+            </a:r>
+          </a:p>
+          <a:p xmlns:a="http://schemas.openxmlformats.org/drawingml/2006/main">
+            <a:r>
+              <a:t/>
+            </a:r>
+          </a:p>
+          <a:p xmlns:a="http://schemas.openxmlformats.org/drawingml/2006/main">
+            <a:r>
+              <a:t>모든 시험 평균과 성공 및 실패 시험의 분포를 함께 기록한다. 아무것도 수행하지 않아 나온 0회는 낮은 부담의 개선 증거로 인정하지 않는다. DP 비교에서는 목표 완료 여부가 다른 pair를 따로 표시하고, 실패로 생략한 질문을 장점으로 주장하지 않는다. V-01과 V-03을 함께 평가하되 성공 시험만 골라 평균을 낮추지 않는다.</a:t>
             </a:r>
           </a:p>
           <a:p xmlns:a="http://schemas.openxmlformats.org/drawingml/2006/main">
@@ -1203,17 +1583,7 @@
           </a:p>
           <a:p xmlns:a="http://schemas.openxmlformats.org/drawingml/2006/main">
             <a:r>
-              <a:t>**근거:** 94개 필수 변형은 제품 기능 계약 자체이다 [S00]. 선택적인 benchmark 문항이 아니므로 완전 지원의 목표는 94개 모두를 지원하는 100%로 정한다. 이 수치는 문헌의 통계적 정확도에서 가져오지 않는다.</a:t>
-            </a:r>
-          </a:p>
-          <a:p xmlns:a="http://schemas.openxmlformats.org/drawingml/2006/main">
-            <a:r>
-              <a:t/>
-            </a:r>
-          </a:p>
-          <a:p xmlns:a="http://schemas.openxmlformats.org/drawingml/2006/main">
-            <a:r>
-              <a:t>**분모와 식:**</a:t>
+              <a:t>필수 UC 변형 94개는 시스템의 기능 계약이므로 94개 모두를 지원하는 목표를 선택한다 [S00]. 문헌의 확률적 정확도를 가져오는 항목이 아니다.</a:t>
             </a:r>
           </a:p>
           <a:p xmlns:a="http://schemas.openxmlformats.org/drawingml/2006/main">
@@ -1228,7 +1598,7 @@
           </a:p>
           <a:p xmlns:a="http://schemas.openxmlformats.org/drawingml/2006/main">
             <a:r>
-              <a:t>support(v) = 변형 v의 필수 동작 전체를 구현하고 검증 증거를 제공하면 1, 아니면 0</a:t>
+              <a:t>support(v) = 필수 capability 전부를 입증한 변형이면 1, 아니면 0</a:t>
             </a:r>
           </a:p>
           <a:p xmlns:a="http://schemas.openxmlformats.org/drawingml/2006/main">
@@ -1248,17 +1618,27 @@
           </a:p>
           <a:p xmlns:a="http://schemas.openxmlformats.org/drawingml/2006/main">
             <a:r>
-              <a:t>각 변형에는 입력, 필요한 VIA 처리, 정상 종료, 변형 고유의 예외 및 책임 경계를 체크리스트로 작성한다. 구현 경로와 실제 동작 witness를 대조한다. 모든 구체 사례의 필수 capability를 입증해야 완전 지원으로 표시한다. 기능이 있지만 일부 실행에서 발생한 확률적 의미 오류는 V-01에서 집계하며 그 사실만으로 capability를 미구현이라고 바꾸지 않는다. 반대로 지원하지 않는 관계를 사용자가 수동으로 해결하면 부분 지원이다.</a:t>
-            </a:r>
-          </a:p>
-          <a:p xmlns:a="http://schemas.openxmlformats.org/drawingml/2006/main">
-            <a:r>
-              <a:t/>
-            </a:r>
-          </a:p>
-          <a:p xmlns:a="http://schemas.openxmlformats.org/drawingml/2006/main">
-            <a:r>
-              <a:t>부분 지원, 미지원, 미확인은 분모에 남고 분자에는 들어가지 않는다. 표에는 한 비율만 표시하고 상세 support ledger에는 제한과 증거 링크를 남긴다. 설계 문서만 검토한 시점에는 '설계상 지원'을 별도 표시하며 구현 지원률 결과를 만들지 않는다. 현재 실제 support ledger와 실행 결과는 없다.</a:t>
+              <a:t>완전 지원에는 세 증거가 모두 필요하다. 첫째, 필수 입력과 의미 관계를 표현하고 처리하는 구현 경로가 있어야 한다. 둘째, 각 필수 상태 전이와 오류 처리의 capability 계약 시험을 통과해야 한다. 이 시험에서는 유효한 모델 제안과 source 응답을 공급하여 코드 경로의 구현 여부를 확인한다. 셋째, 다섯 구체 상황 각각에서 실제 입력을 사용한 통합 witness가 있어야 한다. 모델을 대체한 계약 시험만으로 전체 지원을 선언하지 않는다.</a:t>
+            </a:r>
+          </a:p>
+          <a:p xmlns:a="http://schemas.openxmlformats.org/drawingml/2006/main">
+            <a:r>
+              <a:t/>
+            </a:r>
+          </a:p>
+          <a:p xmlns:a="http://schemas.openxmlformats.org/drawingml/2006/main">
+            <a:r>
+              <a:t>계약 시험은 41의 코드 표현 범위, 43의 F1~F6 생산 결과, 질문과 승인 및 정정, 상태와 전달을 개별 확인한다. 필수 관계를 유한 표현에 담을 수 없거나 원본 근거 없이 사용자에게 우회시키면 부분 지원이다. 통합 witness의 확률적 오류는 V-01에 모두 기록한다. 다섯 상황 중 하나의 우연한 성공만으로 변형 전체를 지원으로 세지 않는다.</a:t>
+            </a:r>
+          </a:p>
+          <a:p xmlns:a="http://schemas.openxmlformats.org/drawingml/2006/main">
+            <a:r>
+              <a:t/>
+            </a:r>
+          </a:p>
+          <a:p xmlns:a="http://schemas.openxmlformats.org/drawingml/2006/main">
+            <a:r>
+              <a:t>지원 ledger에는 완전 지원, 부분 지원, 미지원과 미확인을 남긴다. 뒤의 세 상태는 분모에 남고 분자에 들어가지 않는다. 설계 문서 단계는 '설계상 지원 검토'이며 구현 지원률 실적으로 표시하지 않는다.</a:t>
             </a:r>
           </a:p>
           <a:p xmlns:a="http://schemas.openxmlformats.org/drawingml/2006/main">
@@ -1278,37 +1658,37 @@
           </a:p>
           <a:p xmlns:a="http://schemas.openxmlformats.org/drawingml/2006/main">
             <a:r>
-              <a:t>**설명:** 사용자 입력에 대한 유효한 반응이 빠르게 나타나야 한다.</a:t>
-            </a:r>
-          </a:p>
-          <a:p xmlns:a="http://schemas.openxmlformats.org/drawingml/2006/main">
-            <a:r>
-              <a:t/>
-            </a:r>
-          </a:p>
-          <a:p xmlns:a="http://schemas.openxmlformats.org/drawingml/2006/main">
-            <a:r>
-              <a:t>**단일 목표:** 종류별 p95 반응 지연의 최댓값 1초 이하.</a:t>
-            </a:r>
-          </a:p>
-          <a:p xmlns:a="http://schemas.openxmlformats.org/drawingml/2006/main">
-            <a:r>
-              <a:t/>
-            </a:r>
-          </a:p>
-          <a:p xmlns:a="http://schemas.openxmlformats.org/drawingml/2006/main">
-            <a:r>
-              <a:t>**근거:** Nielsen은 상호작용의 반응시간 기준으로 0.1초, 1초, 10초를 제시한다 [S04]. VIA의 첫 유효 반응에는 1초 기준을 선택한다. p95와 종류별 최댓값은 VIA의 시험 집계 선택이며 Nielsen의 원문 통계 정의가 아니다.</a:t>
-            </a:r>
-          </a:p>
-          <a:p xmlns:a="http://schemas.openxmlformats.org/drawingml/2006/main">
-            <a:r>
-              <a:t/>
-            </a:r>
-          </a:p>
-          <a:p xmlns:a="http://schemas.openxmlformats.org/drawingml/2006/main">
-            <a:r>
-              <a:t>| 종류 | 실제 시작 사건 | 실제 종료 사건 |</a:t>
+              <a:t>**설명:** 사용자 입력에 빠르게 반응해야 한다.</a:t>
+            </a:r>
+          </a:p>
+          <a:p xmlns:a="http://schemas.openxmlformats.org/drawingml/2006/main">
+            <a:r>
+              <a:t/>
+            </a:r>
+          </a:p>
+          <a:p xmlns:a="http://schemas.openxmlformats.org/drawingml/2006/main">
+            <a:r>
+              <a:t>**단일 목표:** 평균 반응시간 1초 이하.</a:t>
+            </a:r>
+          </a:p>
+          <a:p xmlns:a="http://schemas.openxmlformats.org/drawingml/2006/main">
+            <a:r>
+              <a:t/>
+            </a:r>
+          </a:p>
+          <a:p xmlns:a="http://schemas.openxmlformats.org/drawingml/2006/main">
+            <a:r>
+              <a:t>Nielsen의 1초 상호작용 기준을 선택한다 [S04]. 평균 집계는 사용자의 발표 요구에 따른 선택이다. 한 번의 즉시 응답이 뒤의 긴 전체 처리시간을 가리지 않도록 V-05도 따로 측정한다.</a:t>
+            </a:r>
+          </a:p>
+          <a:p xmlns:a="http://schemas.openxmlformats.org/drawingml/2006/main">
+            <a:r>
+              <a:t/>
+            </a:r>
+          </a:p>
+          <a:p xmlns:a="http://schemas.openxmlformats.org/drawingml/2006/main">
+            <a:r>
+              <a:t>| 사건 종류 | 시작 | 실제 종료 |</a:t>
             </a:r>
           </a:p>
           <a:p xmlns:a="http://schemas.openxmlformats.org/drawingml/2006/main">
@@ -1318,42 +1698,57 @@
           </a:p>
           <a:p xmlns:a="http://schemas.openxmlformats.org/drawingml/2006/main">
             <a:r>
-              <a:t>| 요청 반응 | 실제 발화 종료 또는 텍스트 제출 | 해당 요청의 의미 있는 응답이 표시되거나 첫 유효 음성이 재생됨 |</a:t>
-            </a:r>
-          </a:p>
-          <a:p xmlns:a="http://schemas.openxmlformats.org/drawingml/2006/main">
-            <a:r>
-              <a:t>| 상태 전달 | 외부 상태가 VIA에게 이용 가능해진 source 사건 | 그 사실을 반영한 상태가 사용자에게 표시됨 |</a:t>
-            </a:r>
-          </a:p>
-          <a:p xmlns:a="http://schemas.openxmlformats.org/drawingml/2006/main">
-            <a:r>
-              <a:t>| 업무 제어 | 사용자 제어 명령의 실제 입력 | VIA가 제어를 적용하고 그 사실을 확인할 수 있음 |</a:t>
-            </a:r>
-          </a:p>
-          <a:p xmlns:a="http://schemas.openxmlformats.org/drawingml/2006/main">
-            <a:r>
-              <a:t>| 음성 중단 | 사용자의 새 발화가 실제 시작함 | 이전 음성의 마지막 출력 sample |</a:t>
-            </a:r>
-          </a:p>
-          <a:p xmlns:a="http://schemas.openxmlformats.org/drawingml/2006/main">
-            <a:r>
-              <a:t/>
-            </a:r>
-          </a:p>
-          <a:p xmlns:a="http://schemas.openxmlformats.org/drawingml/2006/main">
-            <a:r>
-              <a:t>업무 취소에 Agent의 실행 중단 확인이 필요하면 상태 전달 지연의 시작은 실제 외부 확인이다. 사용자 요청부터 외부 확인까지의 실제 체감 시간도 함께 공개한다. 음성 출력 중단을 업무 취소 완료로 세지 않는다. 접수 인사, 의미 없는 filler, spinner, enqueue와 model 내부 완료는 종료점이 아니다.</a:t>
-            </a:r>
-          </a:p>
-          <a:p xmlns:a="http://schemas.openxmlformats.org/drawingml/2006/main">
-            <a:r>
-              <a:t/>
-            </a:r>
-          </a:p>
-          <a:p xmlns:a="http://schemas.openxmlformats.org/drawingml/2006/main">
-            <a:r>
-              <a:t>동일 monotonic clock으로 시작 사건과 실제 출력 사건을 수집한다. 음성은 녹음된 입력 기준점과 OS 오디오 loopback을 정렬하고 장치 오차를 기록한다. 종류마다 최소 20회 이상 관측하며 1,880회 시험에서 해당하는 모든 사건을 포함한다. 종류별 nearest-rank p95를 구한 뒤 가장 큰 값을 대표값으로 한다. 사건이 발생했는데 유효 반응이 없으면 지연을 무한대로 기록한다. Cold와 warm 결과를 각각 공개하고 긴 지연을 pooled 평균으로 숨기지 않는다.</a:t>
+              <a:t>| 요청 반응 | 실제 발화 종료 또는 텍스트 제출 | 해당 요청의 유효한 텍스트 표시 또는 첫 유효 음성 재생 |</a:t>
+            </a:r>
+          </a:p>
+          <a:p xmlns:a="http://schemas.openxmlformats.org/drawingml/2006/main">
+            <a:r>
+              <a:t>| 상태 전달 | 확인된 외부 상태가 source에서 VIA에 이용 가능해진 시각 | 그 상태 또는 처리 오류를 사용자에게 실제 전달 |</a:t>
+            </a:r>
+          </a:p>
+          <a:p xmlns:a="http://schemas.openxmlformats.org/drawingml/2006/main">
+            <a:r>
+              <a:t>| 업무 제어 | 제어 요청의 실제 입력 | VIA 로컬 제어 적용을 확인할 수 있는 반응 |</a:t>
+            </a:r>
+          </a:p>
+          <a:p xmlns:a="http://schemas.openxmlformats.org/drawingml/2006/main">
+            <a:r>
+              <a:t/>
+            </a:r>
+          </a:p>
+          <a:p xmlns:a="http://schemas.openxmlformats.org/drawingml/2006/main">
+            <a:r>
+              <a:t>'처리 중' 같은 고정 filler와 spinner는 유효 반응이 아니다. 올바른 결과, 구체적 확인 질문, 해당 요청을 식별한 접수 사실 또는 구체적인 실패 안내는 유효 반응이다. 외부 실행 접수는 실제 Agent 확인 이후에만 접수 사실로 말할 수 있다. 대상을 틀리게 말한 반응도 실제 시각은 기록하고 정확성 실패로 남긴다.</a:t>
+            </a:r>
+          </a:p>
+          <a:p xmlns:a="http://schemas.openxmlformats.org/drawingml/2006/main">
+            <a:r>
+              <a:t/>
+            </a:r>
+          </a:p>
+          <a:p xmlns:a="http://schemas.openxmlformats.org/drawingml/2006/main">
+            <a:r>
+              <a:t>주점수의 event ledger를 사례 manifest에서 사전에 고정한다. 각 trial의 최초 사용자 목표 입력에 대한 반응을 기본 slot 하나로 삼는다. 시나리오가 고정 시각의 상태 전달이나 제어를 요구하면 해당 slot을 사전에 추가하고 모든 후보에 같은 외부 입력을 공급한다. 후보가 추가로 만든 질문과 재시도 턴은 진단 기록에 남기며 주점수의 slot 수를 늘리지 않는다. 빠른 확인 질문 여러 개로 느린 최초 반응을 희석할 수 없다.</a:t>
+            </a:r>
+          </a:p>
+          <a:p xmlns:a="http://schemas.openxmlformats.org/drawingml/2006/main">
+            <a:r>
+              <a:t/>
+            </a:r>
+          </a:p>
+          <a:p xmlns:a="http://schemas.openxmlformats.org/drawingml/2006/main">
+            <a:r>
+              <a:t>고정 slot마다 경과시간을 기록하고 시험 내 slot 산술평균을 먼저 계산한 뒤 적용 시험 전체의 산술평균을 낸다. 각 trial이 같은 가중치를 갖는다. 반응이 필요 없는 변형은 적용 불가 이유를 미리 기록하고 실제 분모를 공개한다. 후보 출력 여부에 따라 적용 여부를 바꾸지 않으며 미전달 slot도 삭제하지 않는다.</a:t>
+            </a:r>
+          </a:p>
+          <a:p xmlns:a="http://schemas.openxmlformats.org/drawingml/2006/main">
+            <a:r>
+              <a:t/>
+            </a:r>
+          </a:p>
+          <a:p xmlns:a="http://schemas.openxmlformats.org/drawingml/2006/main">
+            <a:r>
+              <a:t>음성 중단은 새 발화 시작부터 이전 출력의 마지막 sample까지 따로 검사한다. 업무 취소 완료와 동일시하지 않는다. 이 제어 회귀를 응답 평균에 섞어 첫 답변시간을 줄이지 않는다. 기본 시간점수는 warm 상태이며 cold 첫 반응은 별도 보고한다. 미전달은 §2.5대로 실제 관측시간과 상태를 남긴다.</a:t>
             </a:r>
           </a:p>
           <a:p xmlns:a="http://schemas.openxmlformats.org/drawingml/2006/main">
@@ -1373,77 +1768,122 @@
           </a:p>
           <a:p xmlns:a="http://schemas.openxmlformats.org/drawingml/2006/main">
             <a:r>
-              <a:t>**설명:** 필요한 최종 결과를 사용자에게 빠르게 전달해야 한다.</a:t>
-            </a:r>
-          </a:p>
-          <a:p xmlns:a="http://schemas.openxmlformats.org/drawingml/2006/main">
-            <a:r>
-              <a:t/>
-            </a:r>
-          </a:p>
-          <a:p xmlns:a="http://schemas.openxmlformats.org/drawingml/2006/main">
-            <a:r>
-              <a:t>**단일 목표:** 처리 경로별 p95 VIA 완료시간의 최댓값 10초 이하.</a:t>
-            </a:r>
-          </a:p>
-          <a:p xmlns:a="http://schemas.openxmlformats.org/drawingml/2006/main">
-            <a:r>
-              <a:t/>
-            </a:r>
-          </a:p>
-          <a:p xmlns:a="http://schemas.openxmlformats.org/drawingml/2006/main">
-            <a:r>
-              <a:t>**근거:** Nielsen의 10초 기준은 사용자가 상호작용에 주의를 유지하는 상한을 제안한다 [S04]. 이 값을 VIA 책임 처리의 완료 예산으로 적용한다. 외부 Agent의 긴 도메인 작업을 포함한 전체 업무가 10초에 끝난다는 뜻은 아니다. 따라서 발표 표에도 'VIA 완료시간'이라고 명시한다.</a:t>
-            </a:r>
-          </a:p>
-          <a:p xmlns:a="http://schemas.openxmlformats.org/drawingml/2006/main">
-            <a:r>
-              <a:t/>
-            </a:r>
-          </a:p>
-          <a:p xmlns:a="http://schemas.openxmlformats.org/drawingml/2006/main">
-            <a:r>
-              <a:t>직접 응답은 VIA가 결과를 만드는 경로이고 위임은 Downstream Agent가 실제 업무를 수행하는 경로이다. **의존 관계**는 앞 결과를 다음 작업의 입력으로 쓰는 관계이다. 예를 들어 보고서 결과로 발표 슬라이드를 만드는 경우이며, 직접 응답과 위임 모두에 생길 수 있다. 세 번째 상호 배타적인 처리 경로로 분류하지 않는다.</a:t>
-            </a:r>
-          </a:p>
-          <a:p xmlns:a="http://schemas.openxmlformats.org/drawingml/2006/main">
-            <a:r>
-              <a:t/>
-            </a:r>
-          </a:p>
-          <a:p xmlns:a="http://schemas.openxmlformats.org/drawingml/2006/main">
-            <a:r>
-              <a:t>측정은 직접 응답과 위임을 각각 의존 관계 없음과 있음으로 나눈 네 층으로 수행한다. 모든 층에 같은 10초 목표를 적용하고 최악 층의 p95를 보고한다. 층별 별도 목표 세 개를 만들면 동일한 VIA 완료 예산의 의미가 흐려지므로 채택하지 않는다.</a:t>
-            </a:r>
-          </a:p>
-          <a:p xmlns:a="http://schemas.openxmlformats.org/drawingml/2006/main">
-            <a:r>
-              <a:t/>
-            </a:r>
-          </a:p>
-          <a:p xmlns:a="http://schemas.openxmlformats.org/drawingml/2006/main">
-            <a:r>
-              <a:t>**VIA 책임 시간 계산:** 최초 입력부터 필수 최종 전달까지의 사건 의존 그래프를 만든다. 해석, 근거 읽기, 자원 대기, 상태 채택, routing, 직렬화, Agent 통합 통신, 결과 결합과 실제 출력의 VIA 책임 구간을 포함한다. 외부 Agent의 도메인 작업과 사용자의 답변 대기 구간은 비용 0으로 치환한다. 이 그래프의 최장 경로 시간이 VIA 완료시간이다. 중첩된 parent span과 child span을 동시에 더하지 않는다. 병렬 작업도 모두 직렬 합산하지 않는다. 단순히 모든 Agent 시간을 총 wall time에서 빼면 겹치는 대기로 음수가 생길 수 있으므로 사용하지 않는다.</a:t>
-            </a:r>
-          </a:p>
-          <a:p xmlns:a="http://schemas.openxmlformats.org/drawingml/2006/main">
-            <a:r>
-              <a:t/>
-            </a:r>
-          </a:p>
-          <a:p xmlns:a="http://schemas.openxmlformats.org/drawingml/2006/main">
-            <a:r>
-              <a:t>동시에 실제 사용자 체감 wall time과 외부 대기 시간을 보조 기록한다. 필수 결과의 text, artifact 접근 및 필요한 최종 음성 전달이 모두 끝나야 종료한다. 첫 packet이나 첫 음절만으로 완료를 판정하지 않는다. 실패 시험과 필수 결과 누락은 무한대 지연으로 남긴다.</a:t>
-            </a:r>
-          </a:p>
-          <a:p xmlns:a="http://schemas.openxmlformats.org/drawingml/2006/main">
-            <a:r>
-              <a:t/>
-            </a:r>
-          </a:p>
-          <a:p xmlns:a="http://schemas.openxmlformats.org/drawingml/2006/main">
-            <a:r>
-              <a:t>자료 길이는 양쪽에 동일한 manifest로 고정한다. 일상 결과의 요약과 상세 artifact, 긴 음성 설명은 별도 층으로 표시한다. 소리의 실제 재생 시간도 VIA 비용에 포함하므로 10초를 넘는 필수 발화를 이 목표 안에 억지로 통과시킬 수 없다. 출력 축약이 필수 내용을 없애면 V-01이나 V-03에서 실패한다. 결과 크기가 다른 사례를 삭제해 목표를 통과시키지 않으며 적용 범위 변경은 측정 전에 승인한 공통 계약에만 반영한다.</a:t>
+              <a:t>**설명:** VIA의 처리로 결과 전달이 늦어지지 않아야 한다.</a:t>
+            </a:r>
+          </a:p>
+          <a:p xmlns:a="http://schemas.openxmlformats.org/drawingml/2006/main">
+            <a:r>
+              <a:t/>
+            </a:r>
+          </a:p>
+          <a:p xmlns:a="http://schemas.openxmlformats.org/drawingml/2006/main">
+            <a:r>
+              <a:t>**단일 목표:** 평균 VIA 처리시간 10초 이하.</a:t>
+            </a:r>
+          </a:p>
+          <a:p xmlns:a="http://schemas.openxmlformats.org/drawingml/2006/main">
+            <a:r>
+              <a:t/>
+            </a:r>
+          </a:p>
+          <a:p xmlns:a="http://schemas.openxmlformats.org/drawingml/2006/main">
+            <a:r>
+              <a:t>Nielsen의 10초 주의 유지 기준을 참고해 VIA의 추가 처리 예산을 선택한다 [S04]. 외부가 30초 일한 뒤 VIA가 4초 처리하면 사용자의 전체 대기는 34초일 수 있다. 이 경우 4초의 VIA 목표를 만족했다고 해서 전체 경험이 10초 이내라고 설명하지 않는다. 직접 응답처럼 외부 대기가 없는 짧은 요청에서는 전체 경과시간과 일치한다.</a:t>
+            </a:r>
+          </a:p>
+          <a:p xmlns:a="http://schemas.openxmlformats.org/drawingml/2006/main">
+            <a:r>
+              <a:t/>
+            </a:r>
+          </a:p>
+          <a:p xmlns:a="http://schemas.openxmlformats.org/drawingml/2006/main">
+            <a:r>
+              <a:t>짧은 출력 계약에 예산을 배분한 예시는 입력 해석과 근거 확인 3초, 채택과 위임 준비 1초, 결과 연결과 응답 구성 2초, 실제 최종 음성 4초로 총 10초다. 이것은 설계 배분이며 각 단계의 실측값이나 별도의 합격 목표가 아니다. 실제 병렬 실행의 중복을 제거해 측정한다.</a:t>
+            </a:r>
+          </a:p>
+          <a:p xmlns:a="http://schemas.openxmlformats.org/drawingml/2006/main">
+            <a:r>
+              <a:t/>
+            </a:r>
+          </a:p>
+          <a:p xmlns:a="http://schemas.openxmlformats.org/drawingml/2006/main">
+            <a:r>
+              <a:t>직접 응답은 VIA가 결과를 만드는 경로, 위임은 외부 Agent가 업무를 수행하는 경로다. 요청 관계는 선행 결과를 다음 입력으로 쓰는 연결이며 제3의 상호 배타적 경로가 아니다. 직접 및 위임 각각에 관계 있음과 없음 표식을 붙여 네 조건의 평균을 진단으로 공개한다. 주목표는 적용 시험의 전체 산술평균 하나다.</a:t>
+            </a:r>
+          </a:p>
+          <a:p xmlns:a="http://schemas.openxmlformats.org/drawingml/2006/main">
+            <a:r>
+              <a:t/>
+            </a:r>
+          </a:p>
+          <a:p xmlns:a="http://schemas.openxmlformats.org/drawingml/2006/main">
+            <a:r>
+              <a:t>```text</a:t>
+            </a:r>
+          </a:p>
+          <a:p xmlns:a="http://schemas.openxmlformats.org/drawingml/2006/main">
+            <a:r>
+              <a:t>W(i) = 실제 입력 종료부터 해당 요청의 필수 최종 전달까지의 구간</a:t>
+            </a:r>
+          </a:p>
+          <a:p xmlns:a="http://schemas.openxmlformats.org/drawingml/2006/main">
+            <a:r>
+              <a:t>E(i) = 외부 작업 또는 사용자 답변만 기다리며 VIA가 할 필수 처리가 없는 구간</a:t>
+            </a:r>
+          </a:p>
+          <a:p xmlns:a="http://schemas.openxmlformats.org/drawingml/2006/main">
+            <a:r>
+              <a:t>T_via(i) = 길이(W(i)에서 E(i)의 합집합을 제외한 구간)</a:t>
+            </a:r>
+          </a:p>
+          <a:p xmlns:a="http://schemas.openxmlformats.org/drawingml/2006/main">
+            <a:r>
+              <a:t>평균 VIA 처리시간 = Σ T_via(i) / 적용 trial 수</a:t>
+            </a:r>
+          </a:p>
+          <a:p xmlns:a="http://schemas.openxmlformats.org/drawingml/2006/main">
+            <a:r>
+              <a:t>```</a:t>
+            </a:r>
+          </a:p>
+          <a:p xmlns:a="http://schemas.openxmlformats.org/drawingml/2006/main">
+            <a:r>
+              <a:t/>
+            </a:r>
+          </a:p>
+          <a:p xmlns:a="http://schemas.openxmlformats.org/drawingml/2006/main">
+            <a:r>
+              <a:t>E는 Agent가 걸린 시간을 단순 합산한 값이 아니다. 그 시간 중 VIA가 의미 해석, 근거 읽기, 결과 준비 또는 필요한 출력을 진행하면 VIA 구간으로 포함한다. 자체 model queue, scheduler 대기, storage와 IPC, Agent 통합 통신, retry와 실제 출력은 포함한다. 후보가 표시한 '외부 대기' 이름을 믿지 않고 독립 event 및 필수 작업의 ready/blocked 상태로 검증한다. 완료에 필요 없는 background 유지 작업은 별도 비용이지만 foreground 처리를 지연시키면 그 대기도 포함한다.</a:t>
+            </a:r>
+          </a:p>
+          <a:p xmlns:a="http://schemas.openxmlformats.org/drawingml/2006/main">
+            <a:r>
+              <a:t/>
+            </a:r>
+          </a:p>
+          <a:p xmlns:a="http://schemas.openxmlformats.org/drawingml/2006/main">
+            <a:r>
+              <a:t>**겹치는 구간 예:** 전체 W는 0~34초다. VIA 해석은 0~1초, Agent 작업은 1~31초, 그동안 필요한 VIA 준비는 10~12초, 최종 출력은 31~34초다. 외부 작업만 기다린 E는 1~10초와 12~31초로 28초다. VIA 시간은 **34 - 28 = 6초**다. Agent 30초를 그대로 빼 얻은 4초나, 외부 비용을 0으로 놓은 가상 그래프의 시간을 실제 관측값으로 제시하지 않는다.</a:t>
+            </a:r>
+          </a:p>
+          <a:p xmlns:a="http://schemas.openxmlformats.org/drawingml/2006/main">
+            <a:r>
+              <a:t/>
+            </a:r>
+          </a:p>
+          <a:p xmlns:a="http://schemas.openxmlformats.org/drawingml/2006/main">
+            <a:r>
+              <a:t>완료는 필수 결과 text, artifact 접근과 계약상 최종 음성 전달까지 끝난 시각이다. 외부 Agent 접수만 필요한 Request는 접수 확인 전달이 그 Request의 종료점이며 Task 실행 종료를 섞지 않는다. 결과 전달을 목표로 하는 시험은 결과까지 관측한다. 같은 목표의 질문과 답변은 같은 trial에 남는다. 실패 안내까지 끝난 실제 시간도 기록하며 정확성은 따로 판정한다.</a:t>
+            </a:r>
+          </a:p>
+          <a:p xmlns:a="http://schemas.openxmlformats.org/drawingml/2006/main">
+            <a:r>
+              <a:t/>
+            </a:r>
+          </a:p>
+          <a:p xmlns:a="http://schemas.openxmlformats.org/drawingml/2006/main">
+            <a:r>
+              <a:t>주목표의 적용 모집단은 warm 짧은 출력 계약이다. 긴 20초 설명, cold loading과 전체 wall time은 같은 보고서에서 별도로 공개한다. 입력 manifest에서 정한 분류를 실행 결과를 보고 옮기지 않는다. 실제 재생이 길어졌다면 원래 짧은 계약 시험의 시간 미달로 남긴다. 미전달은 §2.5에 따라 목표 충족을 보류한다.</a:t>
             </a:r>
           </a:p>
           <a:p xmlns:a="http://schemas.openxmlformats.org/drawingml/2006/main">
@@ -1483,72 +1923,72 @@
           </a:p>
           <a:p xmlns:a="http://schemas.openxmlformats.org/drawingml/2006/main">
             <a:r>
-              <a:t>**근거:** SEI는 변경 비용을 바뀌는 책임과 다른 요소로의 전파 및 시험 비용으로 설명한다 [S05]. 이를 VIA에서 한 책임 요소, 그 요소의 계약, 그 계약을 소비하는 요소까지의 국소 변경 예산으로 구체화하여 평균 3개를 제안한다. 논문이 3이라는 상한을 제시한 것은 아니다. 모든 변경이 항상 세 역할을 바꿔야 한다는 뜻도 아니다.</a:t>
-            </a:r>
-          </a:p>
-          <a:p xmlns:a="http://schemas.openxmlformats.org/drawingml/2006/main">
-            <a:r>
-              <a:t/>
-            </a:r>
-          </a:p>
-          <a:p xmlns:a="http://schemas.openxmlformats.org/drawingml/2006/main">
-            <a:r>
-              <a:t>공통 변경 과제는 아래 여섯 개를 제안한다. 양쪽 대안은 같은 사용자 동작과 외부 capability를 유지해야 한다.</a:t>
-            </a:r>
-          </a:p>
-          <a:p xmlns:a="http://schemas.openxmlformats.org/drawingml/2006/main">
-            <a:r>
-              <a:t/>
-            </a:r>
-          </a:p>
-          <a:p xmlns:a="http://schemas.openxmlformats.org/drawingml/2006/main">
-            <a:r>
-              <a:t>1. 참조 대상에 표의 선택 범위를 추가한다.</a:t>
-            </a:r>
-          </a:p>
-          <a:p xmlns:a="http://schemas.openxmlformats.org/drawingml/2006/main">
-            <a:r>
-              <a:t>2. 기존 Task를 이어 쓰는 요청 관계 규칙을 추가한다.</a:t>
-            </a:r>
-          </a:p>
-          <a:p xmlns:a="http://schemas.openxmlformats.org/drawingml/2006/main">
-            <a:r>
-              <a:t>3. Downstream Agent의 진행 및 결과 protocol을 변경한다.</a:t>
-            </a:r>
-          </a:p>
-          <a:p xmlns:a="http://schemas.openxmlformats.org/drawingml/2006/main">
-            <a:r>
-              <a:t>4. 음성 중단 정책을 바꾸되 Task 실행은 유지한다.</a:t>
-            </a:r>
-          </a:p>
-          <a:p xmlns:a="http://schemas.openxmlformats.org/drawingml/2006/main">
-            <a:r>
-              <a:t>5. Context 보존기간과 삭제 전파 정책을 변경한다.</a:t>
-            </a:r>
-          </a:p>
-          <a:p xmlns:a="http://schemas.openxmlformats.org/drawingml/2006/main">
-            <a:r>
-              <a:t>6. 외부 결과 중복 알림의 재접속 처리 규칙을 변경한다.</a:t>
-            </a:r>
-          </a:p>
-          <a:p xmlns:a="http://schemas.openxmlformats.org/drawingml/2006/main">
-            <a:r>
-              <a:t/>
-            </a:r>
-          </a:p>
-          <a:p xmlns:a="http://schemas.openxmlformats.org/drawingml/2006/main">
-            <a:r>
-              <a:t>측정 전 후보별 논리 요소 ledger를 같은 수준으로 작성한다. Module, 독립 interface 계약, 공유 schema 및 별도 runtime 배치 단위를 등록하고 동일 정의를 따른다. 파일이나 코드 줄을 요소로 세지 않는다. 책임 Module의 내부 구현과 그 Module 전용 private schema는 한 요소로 센다. 공개 공유 계약을 변경하면 독립 계약 요소로 센다. 그림의 사각형을 임의로 합쳐 수를 줄일 수 없다.</a:t>
-            </a:r>
-          </a:p>
-          <a:p xmlns:a="http://schemas.openxmlformats.org/drawingml/2006/main">
-            <a:r>
-              <a:t/>
-            </a:r>
-          </a:p>
-          <a:p xmlns:a="http://schemas.openxmlformats.org/drawingml/2006/main">
-            <a:r>
-              <a:t>과제별로 실제 추가, 수정, 삭제가 필요한 요소의 ID 합집합 크기 N을 센다. 공통 코드, 설정, 테스트 harness를 변경해야 기능이 성립하면 해당 논리 요소도 포함한다. 같은 요소의 여러 파일과 여러 commit은 한 번만 센다. 설계만 있을 때는 예상 영향 수로 표시하고 실제 수행 비용으로 주장하지 않는다. 해결하지 못한 과제를 평균에서 빼지 않고 미달로 기록한다.</a:t>
+              <a:t>SEI는 수정할 책임과 변경 전파가 변경 및 시험 비용을 만든다고 설명한다 [S05]. 이를 하나의 책임, 독립 계약, 소비 책임까지의 국소 변경 예산 3개로 구체화한다. 원문이 3개를 규정했다는 뜻은 아니다. 예를 들어 결과 protocol 필드 추가가 adapter 책임 C, 공개 계약 I, 소비 책임 C에 머무르면 3개다. 추가 공유 상태나 배포 변경까지 요구하면 실제 count를 늘린다.</a:t>
+            </a:r>
+          </a:p>
+          <a:p xmlns:a="http://schemas.openxmlformats.org/drawingml/2006/main">
+            <a:r>
+              <a:t/>
+            </a:r>
+          </a:p>
+          <a:p xmlns:a="http://schemas.openxmlformats.org/drawingml/2006/main">
+            <a:r>
+              <a:t>[Architecture Element 정의](../../architecture/10-element-definition.md)의 **C 책임, I interface 계약, S 상태 책임, D 배포 단위**를 그대로 적용한다. Component나 Module 사각형 및 파일 수를 세지 않는다. 큰 통합 Module도 독립 책임 여러 개를 바꾸면 여러 C로 센다. 분리된 helper 여러 파일이 동일 책임이면 한 C다. private payload와 공개 I/S의 중복 집계를 피한다.</a:t>
+            </a:r>
+          </a:p>
+          <a:p xmlns:a="http://schemas.openxmlformats.org/drawingml/2006/main">
+            <a:r>
+              <a:t/>
+            </a:r>
+          </a:p>
+          <a:p xmlns:a="http://schemas.openxmlformats.org/drawingml/2006/main">
+            <a:r>
+              <a:t>측정 전 같은 기능 책임의 후보별 대응표를 작성하고 독립 검토자가 분해 수준을 확인한다. 요소마다 identity, 책임 경계, 독립성, 변경 판정 조건과 증거를 등록한다. 측정 후 유리하게 묶거나 나누지 않는다. 실제 수정 전의 영향 분석과 수정 후 diff를 대조한다.</a:t>
+            </a:r>
+          </a:p>
+          <a:p xmlns:a="http://schemas.openxmlformats.org/drawingml/2006/main">
+            <a:r>
+              <a:t/>
+            </a:r>
+          </a:p>
+          <a:p xmlns:a="http://schemas.openxmlformats.org/drawingml/2006/main">
+            <a:r>
+              <a:t>| 과제 | 공통 변경 목표 |</a:t>
+            </a:r>
+          </a:p>
+          <a:p xmlns:a="http://schemas.openxmlformats.org/drawingml/2006/main">
+            <a:r>
+              <a:t>| --- | --- |</a:t>
+            </a:r>
+          </a:p>
+          <a:p xmlns:a="http://schemas.openxmlformats.org/drawingml/2006/main">
+            <a:r>
+              <a:t>| CH01 | 화면 참조 대상에 표의 선택 범위를 추가 |</a:t>
+            </a:r>
+          </a:p>
+          <a:p xmlns:a="http://schemas.openxmlformats.org/drawingml/2006/main">
+            <a:r>
+              <a:t>| CH02 | 기존 Task를 이어 쓰는 요청 관계 규칙 추가 |</a:t>
+            </a:r>
+          </a:p>
+          <a:p xmlns:a="http://schemas.openxmlformats.org/drawingml/2006/main">
+            <a:r>
+              <a:t>| CH03 | Agent 진행 및 결과 protocol의 revision 필드 변경 |</a:t>
+            </a:r>
+          </a:p>
+          <a:p xmlns:a="http://schemas.openxmlformats.org/drawingml/2006/main">
+            <a:r>
+              <a:t>| CH04 | 음성 중단 정책 변경, 기존 Task 실행은 유지 |</a:t>
+            </a:r>
+          </a:p>
+          <a:p xmlns:a="http://schemas.openxmlformats.org/drawingml/2006/main">
+            <a:r>
+              <a:t>| CH05 | Context 보존기간과 삭제 전파 정책 변경 |</a:t>
+            </a:r>
+          </a:p>
+          <a:p xmlns:a="http://schemas.openxmlformats.org/drawingml/2006/main">
+            <a:r>
+              <a:t>| CH06 | 중복 결과와 재접속 확인의 결합 규칙 변경 |</a:t>
             </a:r>
           </a:p>
           <a:p xmlns:a="http://schemas.openxmlformats.org/drawingml/2006/main">
@@ -1563,6 +2003,11 @@
           </a:p>
           <a:p xmlns:a="http://schemas.openxmlformats.org/drawingml/2006/main">
             <a:r>
+              <a:t>N(s) = 실제 추가, 수정, 삭제가 필요한 등록 요소 ID의 합집합 크기</a:t>
+            </a:r>
+          </a:p>
+          <a:p xmlns:a="http://schemas.openxmlformats.org/drawingml/2006/main">
+            <a:r>
               <a:t>평균 변경 요소 수 = Σ N(s) / 6</a:t>
             </a:r>
           </a:p>
@@ -1588,7 +2033,17 @@
           </a:p>
           <a:p xmlns:a="http://schemas.openxmlformats.org/drawingml/2006/main">
             <a:r>
-              <a:t>MH는 person-hour, MM는 person-month이다. a는 분석과 공통 검증의 고정 비용, b는 요소당 추가 수정과 시험의 비용이다. 완료된 실제 과제에서 작업시간을 기록하고 변경 종류별 회귀로 보정한다. 자료가 적으면 임의의 a와 b를 채우지 않는다. H_month는 조직의 표준 월 근무시간이며 160시간을 선택한다면 8시간 × 20일이라는 환산 규약을 명시한다. 3개를 3MH 또는 3MM로 곧바로 환산할 수 없다. 보정 자료 수, 추정 오차와 실제 MH를 함께 공개한다.</a:t>
+              <a:t>동일 요소의 여러 파일과 commit은 한 번만 센다. 과제를 해결하지 못하면 count 0으로 통과시키지 않고 미완료로 보고하며 변경 목표 충족 판정을 보류한다. 설계만 있으면 예상 영향 수이며 실제 변경 실적이 아니다. 여섯 과제와 DP에 관련된 하위집합을 함께 공개하되 후보별로 과제를 삭제하지 않는다.</a:t>
+            </a:r>
+          </a:p>
+          <a:p xmlns:a="http://schemas.openxmlformats.org/drawingml/2006/main">
+            <a:r>
+              <a:t/>
+            </a:r>
+          </a:p>
+          <a:p xmlns:a="http://schemas.openxmlformats.org/drawingml/2006/main">
+            <a:r>
+              <a:t>MH는 person-hour, MM는 person-month다. a는 공통 분석 및 검증 비용, b는 요소당 실제 작업 비용이다. 같은 종류의 완료된 과제에서 시간을 기록하고 회귀 및 교차 검증으로 보정한다. 자료가 없으면 임의 계수를 채우지 않는다. H_month는 조직의 월 표준시간이며 160시간을 쓰면 8시간 × 20일이라는 환산 규약을 명시한다. count가 같은 두 구조라도 실제 MH는 다를 수 있다. 모델과 오차를 함께 공개한다.</a:t>
             </a:r>
           </a:p>
           <a:p xmlns:a="http://schemas.openxmlformats.org/drawingml/2006/main">
@@ -1608,37 +2063,47 @@
           </a:p>
           <a:p xmlns:a="http://schemas.openxmlformats.org/drawingml/2006/main">
             <a:r>
-              <a:t>**설명:** 상시 실행 중에도 다른 PC 작업을 위한 메모리를 남겨야 한다.</a:t>
-            </a:r>
-          </a:p>
-          <a:p xmlns:a="http://schemas.openxmlformats.org/drawingml/2006/main">
-            <a:r>
-              <a:t/>
-            </a:r>
-          </a:p>
-          <a:p xmlns:a="http://schemas.openxmlformats.org/drawingml/2006/main">
-            <a:r>
-              <a:t>**단일 목표:** 최대 전체 메모리 16GB 이하. GB는 10^9 bytes이다.</a:t>
-            </a:r>
-          </a:p>
-          <a:p xmlns:a="http://schemas.openxmlformats.org/drawingml/2006/main">
-            <a:r>
-              <a:t/>
-            </a:r>
-          </a:p>
-          <a:p xmlns:a="http://schemas.openxmlformats.org/drawingml/2006/main">
-            <a:r>
-              <a:t>**장치 근거:** Samsung의 Galaxy Book6 Ultra NP960UJH-XG3IN 공식 사양은 32GB LPDDR5X RAM과 RTX 5070 Laptop GPU의 전용 8GB GDDR7을 명시한다 [S06]. 이 고사양 노트북을 기준으로 사용자 PC의 RAM 절반 이상을 VIA 외 용도로 남기는 예산을 설정한다.</a:t>
-            </a:r>
-          </a:p>
-          <a:p xmlns:a="http://schemas.openxmlformats.org/drawingml/2006/main">
-            <a:r>
-              <a:t/>
-            </a:r>
-          </a:p>
-          <a:p xmlns:a="http://schemas.openxmlformats.org/drawingml/2006/main">
-            <a:r>
-              <a:t>| 32GB RAM의 배정 | 예산 | 성격 |</a:t>
+              <a:t>**설명:** 상시 실행에 필요한 메모리를 제한해야 한다.</a:t>
+            </a:r>
+          </a:p>
+          <a:p xmlns:a="http://schemas.openxmlformats.org/drawingml/2006/main">
+            <a:r>
+              <a:t/>
+            </a:r>
+          </a:p>
+          <a:p xmlns:a="http://schemas.openxmlformats.org/drawingml/2006/main">
+            <a:r>
+              <a:t>**단일 목표:** 최대 전체 메모리 16GB 이하. GB는 10^9 bytes다.</a:t>
+            </a:r>
+          </a:p>
+          <a:p xmlns:a="http://schemas.openxmlformats.org/drawingml/2006/main">
+            <a:r>
+              <a:t/>
+            </a:r>
+          </a:p>
+          <a:p xmlns:a="http://schemas.openxmlformats.org/drawingml/2006/main">
+            <a:r>
+              <a:t>### 9.1 장치와 VIA 자체 예산</a:t>
+            </a:r>
+          </a:p>
+          <a:p xmlns:a="http://schemas.openxmlformats.org/drawingml/2006/main">
+            <a:r>
+              <a:t/>
+            </a:r>
+          </a:p>
+          <a:p xmlns:a="http://schemas.openxmlformats.org/drawingml/2006/main">
+            <a:r>
+              <a:t>삼성 공식 NP960UJH-XG3IN 사양의 32GB RAM과 전용 8GB VRAM을 기준으로 한다 [S06]. 다른 사용자 앱에 임의의 6GB를 할당해 목표를 계산하지 않는다. 아래 합계는 **VIA가 직접 부담하는 전체 물리 메모리**의 예산이다.</a:t>
+            </a:r>
+          </a:p>
+          <a:p xmlns:a="http://schemas.openxmlformats.org/drawingml/2006/main">
+            <a:r>
+              <a:t/>
+            </a:r>
+          </a:p>
+          <a:p xmlns:a="http://schemas.openxmlformats.org/drawingml/2006/main">
+            <a:r>
+              <a:t>| 항목 | 예산 | 계산 또는 제한 근거 |</a:t>
             </a:r>
           </a:p>
           <a:p xmlns:a="http://schemas.openxmlformats.org/drawingml/2006/main">
@@ -1648,62 +2113,72 @@
           </a:p>
           <a:p xmlns:a="http://schemas.openxmlformats.org/drawingml/2006/main">
             <a:r>
-              <a:t>| Windows와 기본 상주 프로그램 | 6GB | VIA가 제안하는 예약량, 실측 OS 사용량 아님 |</a:t>
-            </a:r>
-          </a:p>
-          <a:p xmlns:a="http://schemas.openxmlformats.org/drawingml/2006/main">
-            <a:r>
-              <a:t>| 사용자의 browser와 문서 및 개발 앱 | 6GB | 공존 부하 예산, 실제 foreground app manifest로 검증 필요 |</a:t>
-            </a:r>
-          </a:p>
-          <a:p xmlns:a="http://schemas.openxmlformats.org/drawingml/2006/main">
-            <a:r>
-              <a:t>| 부하 변동과 작업 확장을 위한 여유 | 4GB | 설계상 headroom |</a:t>
-            </a:r>
-          </a:p>
-          <a:p xmlns:a="http://schemas.openxmlformats.org/drawingml/2006/main">
-            <a:r>
-              <a:t>| VIA의 전체 메모리 상한 | 16GB | 32 - 6 - 6 - 4로 계산한 단일 목표 |</a:t>
-            </a:r>
-          </a:p>
-          <a:p xmlns:a="http://schemas.openxmlformats.org/drawingml/2006/main">
-            <a:r>
-              <a:t/>
-            </a:r>
-          </a:p>
-          <a:p xmlns:a="http://schemas.openxmlformats.org/drawingml/2006/main">
-            <a:r>
-              <a:t>전용 GPU의 8GB를 RAM에 더해 VIA 예산을 24GB로 키우지 않는다. 목표는 VIA가 사용하는 CPU RAM과 전용 VRAM의 실제 물리 사용량을 합친 16GB이므로 CPU RAM만 16GB를 사용하는 경우에도 비 VIA RAM 예산을 보존한다. GPU 전용 메모리에는 별도의 물리적 장치 한계가 있다. 16GB가 전부 GPU에 들어간다고 가정하지 않는다. 64GB 장치를 사용하더라도 발표 목표를 자동으로 배증하지 않는다.</a:t>
-            </a:r>
-          </a:p>
-          <a:p xmlns:a="http://schemas.openxmlformats.org/drawingml/2006/main">
-            <a:r>
-              <a:t/>
-            </a:r>
-          </a:p>
-          <a:p xmlns:a="http://schemas.openxmlformats.org/drawingml/2006/main">
-            <a:r>
-              <a:t>**모델 근거와 할당:** 현재 reference Architecture의 약 10B는 Thinker/backbone의 목표 크기이다. encoders, Talker, Streaming ASR와 기타 learned helper까지 10B라고 간주하지 않는다. 원시 가중치 bytes는 N × bit / 8이므로 10B backbone만 FP16에서 약 20GB, 8bit에서 약 10GB, 4bit에서 약 5GB이다. AWQ는 4bit LLM 배포의 실제 연구 근거이다 [S07]. 양자화 선택이나 VIA의 정확도 보존을 승인했다는 뜻은 아니다.</a:t>
-            </a:r>
-          </a:p>
-          <a:p xmlns:a="http://schemas.openxmlformats.org/drawingml/2006/main">
-            <a:r>
-              <a:t/>
-            </a:r>
-          </a:p>
-          <a:p xmlns:a="http://schemas.openxmlformats.org/drawingml/2006/main">
-            <a:r>
-              <a:t>16GB 안에서 backbone 가중치와 양자화 부대 정보 6GB, 나머지 learned weights 4GB, KV와 중간 상태 3GB, runtime과 UI 및 관측 버퍼 3GB의 할당을 제안한다. 모두 상한 예산이며 실제 모델 크기 주장이 아니다. 전체 weight inventory가 예산을 초과하면 목표 미달로 보고하고, 모델 구성을 바꿀 때에는 기능 정확성도 다시 확인한다. CPU staging copy와 GPU loaded copy가 실제로 공존하면 둘 다 포함하므로 이 예산을 더 빠르게 소진한다.</a:t>
-            </a:r>
-          </a:p>
-          <a:p xmlns:a="http://schemas.openxmlformats.org/drawingml/2006/main">
-            <a:r>
-              <a:t/>
-            </a:r>
-          </a:p>
-          <a:p xmlns:a="http://schemas.openxmlformats.org/drawingml/2006/main">
-            <a:r>
-              <a:t>**측정 식:**</a:t>
+              <a:t>| 공유 가중치 전체 | 8GB | 10B backbone의 4bit 원시 5GB, 다른 learned weights 2GB, quantization 부대 정보 1GB |</a:t>
+            </a:r>
+          </a:p>
+          <a:p xmlns:a="http://schemas.openxmlformats.org/drawingml/2006/main">
+            <a:r>
+              <a:t>| 역할 및 producer KV 전체 | 3GB | 공개 Qwen KV 구조로 계산한 두 8k Context의 약 2.684GB를 상향 배정 |</a:t>
+            </a:r>
+          </a:p>
+          <a:p xmlns:a="http://schemas.openxmlformats.org/drawingml/2006/main">
+            <a:r>
+              <a:t>| 추론 실행 공간 | 3GB | activation, compute workspace, encoder와 Talker 임시 tensor의 합계 제한 |</a:t>
+            </a:r>
+          </a:p>
+          <a:p xmlns:a="http://schemas.openxmlformats.org/drawingml/2006/main">
+            <a:r>
+              <a:t>| 입력 근거와 UI 및 상태 buffer | 1GB | 아래 해상도와 보존량을 사용한 약 0.939GB 계산 |</a:t>
+            </a:r>
+          </a:p>
+          <a:p xmlns:a="http://schemas.openxmlformats.org/drawingml/2006/main">
+            <a:r>
+              <a:t>| loading 중 복제와 staging | 1GB | 동시에 존재하는 추가 물리 복제의 제한 |</a:t>
+            </a:r>
+          </a:p>
+          <a:p xmlns:a="http://schemas.openxmlformats.org/drawingml/2006/main">
+            <a:r>
+              <a:t>| **합계** | **16GB** | **8 + 3 + 3 + 1 + 1** |</a:t>
+            </a:r>
+          </a:p>
+          <a:p xmlns:a="http://schemas.openxmlformats.org/drawingml/2006/main">
+            <a:r>
+              <a:t/>
+            </a:r>
+          </a:p>
+          <a:p xmlns:a="http://schemas.openxmlformats.org/drawingml/2006/main">
+            <a:r>
+              <a:t>약 10B는 Thinker/backbone 목표이며 전체 Omni와 helper 합계가 아니다. 모든 encoders, Talker, Streaming ASR와 helper를 inventory에 포함한다. 원시 가중치는 N × bit / 8이다. 10B backbone은 4bit 약 5GB, 8bit 약 10GB, FP16 약 20GB다. AWQ는 4bit LLM 배포의 기술적 근거 [S07]이며 모든 VIA helper를 같은 정밀도로 양자화할 수 있거나 정확도가 보존된다는 보증은 아니다.</a:t>
+            </a:r>
+          </a:p>
+          <a:p xmlns:a="http://schemas.openxmlformats.org/drawingml/2006/main">
+            <a:r>
+              <a:t/>
+            </a:r>
+          </a:p>
+          <a:p xmlns:a="http://schemas.openxmlformats.org/drawingml/2006/main">
+            <a:r>
+              <a:t>추가 learned weights 2GB는 실제 선정 모델의 크기라는 주장이 아니라 자원 계약이다. 예를 들어 전체가 4bit면 원시 약 4B, FP16이면 약 1B에 해당한다. 실제 혼합 정밀도와 양자화 metadata 및 scale bytes로 검사한다. 전체 inventory가 8GB를 넘으면 weight 예산 미달이다. 모델을 바꿔 수치를 맞추면 같은 V-01과 V-03 시험도 다시 필요하다.</a:t>
+            </a:r>
+          </a:p>
+          <a:p xmlns:a="http://schemas.openxmlformats.org/drawingml/2006/main">
+            <a:r>
+              <a:t/>
+            </a:r>
+          </a:p>
+          <a:p xmlns:a="http://schemas.openxmlformats.org/drawingml/2006/main">
+            <a:r>
+              <a:t>### 9.2 KV와 buffer 계산</a:t>
+            </a:r>
+          </a:p>
+          <a:p xmlns:a="http://schemas.openxmlformats.org/drawingml/2006/main">
+            <a:r>
+              <a:t/>
+            </a:r>
+          </a:p>
+          <a:p xmlns:a="http://schemas.openxmlformats.org/drawingml/2006/main">
+            <a:r>
+              <a:t>공개 Qwen3-14B의 config는 layer 40개, KV head 8개, head dimension 128과 bfloat16을 명시한다 [S12]. 이는 계산 예시이며 VIA가 Qwen3-14B를 선택했거나 10B Omni의 내부 config가 같다는 뜻은 아니다. 실제 선택 모델의 값으로 다시 계산해야 한다.</a:t>
             </a:r>
           </a:p>
           <a:p xmlns:a="http://schemas.openxmlformats.org/drawingml/2006/main">
@@ -1718,22 +2193,22 @@
           </a:p>
           <a:p xmlns:a="http://schemas.openxmlformats.org/drawingml/2006/main">
             <a:r>
-              <a:t>M(t) = VIA의 CPU 고유 상주 물리 bytes</a:t>
-            </a:r>
-          </a:p>
-          <a:p xmlns:a="http://schemas.openxmlformats.org/drawingml/2006/main">
-            <a:r>
-              <a:t>     + VIA의 전용 GPU 물리 bytes</a:t>
-            </a:r>
-          </a:p>
-          <a:p xmlns:a="http://schemas.openxmlformats.org/drawingml/2006/main">
-            <a:r>
-              <a:t>     + 다른 항목에 포함되지 않은 pinned 및 공유 물리 bytes</a:t>
-            </a:r>
-          </a:p>
-          <a:p xmlns:a="http://schemas.openxmlformats.org/drawingml/2006/main">
-            <a:r>
-              <a:t>최대 전체 메모리 = max_t M(t) / 10^9</a:t>
+              <a:t>KV bytes = 2(K와 V) × session 수 × layer 수 × token 수 × KV head 수 × head dimension × bytes/원소</a:t>
+            </a:r>
+          </a:p>
+          <a:p xmlns:a="http://schemas.openxmlformats.org/drawingml/2006/main">
+            <a:r>
+              <a:t>예시 = 2 × 2 × 40 × 8192 × 8 × 128 × 2</a:t>
+            </a:r>
+          </a:p>
+          <a:p xmlns:a="http://schemas.openxmlformats.org/drawingml/2006/main">
+            <a:r>
+              <a:t>     = 2,684,354,560 bytes = 약 2.684GB</a:t>
+            </a:r>
+          </a:p>
+          <a:p xmlns:a="http://schemas.openxmlformats.org/drawingml/2006/main">
+            <a:r>
+              <a:t>전체 KV 예산 = 3GB</a:t>
             </a:r>
           </a:p>
           <a:p xmlns:a="http://schemas.openxmlformats.org/drawingml/2006/main">
@@ -1748,27 +2223,132 @@
           </a:p>
           <a:p xmlns:a="http://schemas.openxmlformats.org/drawingml/2006/main">
             <a:r>
-              <a:t>여러 프로세스가 같은 물리 페이지를 매핑하면 한 번만 센다. 실제 CPU와 GPU 복제본은 별개이다. Windows Working Set의 단순 프로세스별 합계는 공유 페이지를 중복 셀 수 있고 Private Bytes만 쓰면 공유 가중치를 놓칠 수 있으므로 page 및 allocation ID와 GPU allocation ledger로 보정한다. process tree는 VIA launcher가 기록하고 모든 worker와 helper를 포함한다. pagefile로 밀어낸 bytes와 commit은 보조 기록으로 공개하여 swapping으로 피크를 낮춘 결과를 드러낸다.</a:t>
-            </a:r>
-          </a:p>
-          <a:p xmlns:a="http://schemas.openxmlformats.org/drawingml/2006/main">
-            <a:r>
-              <a:t/>
-            </a:r>
-          </a:p>
-          <a:p xmlns:a="http://schemas.openxmlformats.org/drawingml/2006/main">
-            <a:r>
-              <a:t>8시간 시험을 다음 순서로 수행한다. 상주 대기 두 시간, 요청 burst 한 시간, 정상 대화와 두 외부 실행 병행 두 시간, 화면 및 Context 보존 한도 도달과 삭제 한 시간, 장애 및 모델 재로딩 한 시간, 무입력 대기 한 시간이다. burst는 15초마다 한 요청을 제안하며 처리되지 않은 요청도 적체 상태로 남긴다. 나머지 단계의 입력 시간축은 동일 fixture로 고정한다. browser와 문서 앱 부하는 같은 파일과 tab 목록으로 유지하고 실제 사용량을 기록한다.</a:t>
-            </a:r>
-          </a:p>
-          <a:p xmlns:a="http://schemas.openxmlformats.org/drawingml/2006/main">
-            <a:r>
-              <a:t/>
-            </a:r>
-          </a:p>
-          <a:p xmlns:a="http://schemas.openxmlformats.org/drawingml/2006/main">
-            <a:r>
-              <a:t>최소 100ms 간격의 CPU 및 GPU 계측과 allocation high-water mark를 함께 사용한다. 짧은 load peak를 sampling만으로 놓치지 않도록 allocator의 생성과 해제 사건을 보조로 사용한다. 시작부터 종료까지의 최대값 하나를 목표와 비교하고 대기, 요청 및 복구 피크는 원인 분석용으로 분리한다. 장시간 무입력의 idle 메모리도 공개한다. CPU나 전력의 별도 목표를 새로 만들지는 않는다.</a:t>
+              <a:t>8k는 입력과 생성 및 multimodal token을 합친 session별 cache 양이다. 두 session은 S2S와 semantic 역할의 계산 예시다. 기능별 producer의 별도 KV, 보류된 session, 재사용 Context와 보조 모델 KV가 있으면 모두 같은 3GB에 포함한다. C의 producer 여섯 개를 무료로 두지 않는다. 가중치를 역할마다 복제하지 않으며, 공통 총 KV 예산 안에서 실제 session 운영과 교환 비용을 대안의 차이로 남긴다.</a:t>
+            </a:r>
+          </a:p>
+          <a:p xmlns:a="http://schemas.openxmlformats.org/drawingml/2006/main">
+            <a:r>
+              <a:t/>
+            </a:r>
+          </a:p>
+          <a:p xmlns:a="http://schemas.openxmlformats.org/drawingml/2006/main">
+            <a:r>
+              <a:t>2880 × 1800 BGRA 화면 32개의 원시 buffer는 약 0.664GB다. 16kHz mono 16bit 음성 10분은 0.0192GB다. source 읽기 buffer 0.128GB, UI 및 structured 상태 0.064GB와 index metadata 0.064GB를 더하면 약 0.939GB다. 이 retained 입력량을 메모리 시험 조건으로 고정하고 전체 1GB 예산과 대조한다. capture 간격이나 원본 삭제 정책을 이번 문서에서 Architecture 선택으로 확정하지 않는다. 추가 파생 tensor는 workspace, 영속 자료는 storage이며 실제 상주 page는 메모리 합계에 포함한다.</a:t>
+            </a:r>
+          </a:p>
+          <a:p xmlns:a="http://schemas.openxmlformats.org/drawingml/2006/main">
+            <a:r>
+              <a:t/>
+            </a:r>
+          </a:p>
+          <a:p xmlns:a="http://schemas.openxmlformats.org/drawingml/2006/main">
+            <a:r>
+              <a:t>실행 공간 3GB와 staging 1GB는 아직 측정되지 않은 할당 상한이다. 런타임의 allocation trace로 검증할 항목이며 공개 논문이 정한 VIA 필요량은 아니다. 정적 산술만으로 모든 10B Omni 구성이 16GB에 들어간다고 단정할 수 없다.</a:t>
+            </a:r>
+          </a:p>
+          <a:p xmlns:a="http://schemas.openxmlformats.org/drawingml/2006/main">
+            <a:r>
+              <a:t/>
+            </a:r>
+          </a:p>
+          <a:p xmlns:a="http://schemas.openxmlformats.org/drawingml/2006/main">
+            <a:r>
+              <a:t>### 9.3 RAM과 VRAM의 구별</a:t>
+            </a:r>
+          </a:p>
+          <a:p xmlns:a="http://schemas.openxmlformats.org/drawingml/2006/main">
+            <a:r>
+              <a:t/>
+            </a:r>
+          </a:p>
+          <a:p xmlns:a="http://schemas.openxmlformats.org/drawingml/2006/main">
+            <a:r>
+              <a:t>RAM과 VRAM은 서로 바꿔 쓸 수 없는 용량이다. 전체 합계 16GB 통과와 별개로 실제 장치의 RAM 및 전용 VRAM 한도를 충족해야 실행 가능한 구성이다. VRAM 8GB에 전체 모델과 KV가 들어간다고 가정하지 않는다. device capacity는 새로운 QA 목표가 아닌 시험 장치의 물리 조건이다.</a:t>
+            </a:r>
+          </a:p>
+          <a:p xmlns:a="http://schemas.openxmlformats.org/drawingml/2006/main">
+            <a:r>
+              <a:t/>
+            </a:r>
+          </a:p>
+          <a:p xmlns:a="http://schemas.openxmlformats.org/drawingml/2006/main">
+            <a:r>
+              <a:t>배치 산술의 한 예는 가중치 RAM 4GB / VRAM 4GB, KV RAM 2GB / VRAM 1GB, workspace RAM 1GB / VRAM 2GB, buffer RAM 1GB, staging RAM 1GB다. 이 경우 RAM 9GB와 VRAM 7GB로 합계 16GB다. 이 표는 실제 offload 구성을 선택한 결과가 아니다. 실제 모델이 이러한 분할을 허용하는지와 CPU 처리 및 전송이 V-04/05를 만족하는지는 반드시 같이 검증해야 한다. 메모리만 통과하고 응답이 느리면 품질 목표 전체를 달성하지 못한다.</a:t>
+            </a:r>
+          </a:p>
+          <a:p xmlns:a="http://schemas.openxmlformats.org/drawingml/2006/main">
+            <a:r>
+              <a:t/>
+            </a:r>
+          </a:p>
+          <a:p xmlns:a="http://schemas.openxmlformats.org/drawingml/2006/main">
+            <a:r>
+              <a:t>### 9.4 상시 동작 측정</a:t>
+            </a:r>
+          </a:p>
+          <a:p xmlns:a="http://schemas.openxmlformats.org/drawingml/2006/main">
+            <a:r>
+              <a:t/>
+            </a:r>
+          </a:p>
+          <a:p xmlns:a="http://schemas.openxmlformats.org/drawingml/2006/main">
+            <a:r>
+              <a:t>```text</a:t>
+            </a:r>
+          </a:p>
+          <a:p xmlns:a="http://schemas.openxmlformats.org/drawingml/2006/main">
+            <a:r>
+              <a:t>M(t) = VIA 소유 CPU 고유 상주 물리 bytes</a:t>
+            </a:r>
+          </a:p>
+          <a:p xmlns:a="http://schemas.openxmlformats.org/drawingml/2006/main">
+            <a:r>
+              <a:t>     + VIA 소유 전용 GPU 물리 bytes</a:t>
+            </a:r>
+          </a:p>
+          <a:p xmlns:a="http://schemas.openxmlformats.org/drawingml/2006/main">
+            <a:r>
+              <a:t>     + 위 항목에 포함되지 않은 pinned 또는 공유 물리 bytes</a:t>
+            </a:r>
+          </a:p>
+          <a:p xmlns:a="http://schemas.openxmlformats.org/drawingml/2006/main">
+            <a:r>
+              <a:t>최대 전체 메모리 = 모든 세션에서 관측한 max M(t) / 10^9</a:t>
+            </a:r>
+          </a:p>
+          <a:p xmlns:a="http://schemas.openxmlformats.org/drawingml/2006/main">
+            <a:r>
+              <a:t>```</a:t>
+            </a:r>
+          </a:p>
+          <a:p xmlns:a="http://schemas.openxmlformats.org/drawingml/2006/main">
+            <a:r>
+              <a:t/>
+            </a:r>
+          </a:p>
+          <a:p xmlns:a="http://schemas.openxmlformats.org/drawingml/2006/main">
+            <a:r>
+              <a:t>VIA process tree, shared model runtime과 모든 helper를 포함한다. CPU와 GPU에 실제 복제본이 둘이면 둘 다 센다. 같은 RAM page의 여러 mapping은 한 번만 센다. GPU shared system memory가 이미 RAM에 잡히면 다시 더하지 않는다. 논리 virtual size나 모든 process private working set의 단순 합계로 대체하지 않는다.</a:t>
+            </a:r>
+          </a:p>
+          <a:p xmlns:a="http://schemas.openxmlformats.org/drawingml/2006/main">
+            <a:r>
+              <a:t/>
+            </a:r>
+          </a:p>
+          <a:p xmlns:a="http://schemas.openxmlformats.org/drawingml/2006/main">
+            <a:r>
+              <a:t>각 8시간 세션은 30분 cold startup과 안정화, 60분 idle background, 300분 반복 요청 및 정정, 60분 입력과 외부 event가 겹치는 burst, 마지막 30분 회수 관측으로 구성한다. 300분 동안 30초마다 사용자 목표 하나를 제출하고 실제 진행 중인 Task를 유지한다. burst에서는 5초마다 입력 또는 외부 event를 공급한다. 과부하 대기와 누락도 남긴다. startup은 안정화 시간 뒤 최대값에서 빼지 않는다.</a:t>
+            </a:r>
+          </a:p>
+          <a:p xmlns:a="http://schemas.openxmlformats.org/drawingml/2006/main">
+            <a:r>
+              <a:t/>
+            </a:r>
+          </a:p>
+          <a:p xmlns:a="http://schemas.openxmlformats.org/drawingml/2006/main">
+            <a:r>
+              <a:t>100ms 주기 OS process 및 GPU 계측과 allocation high-water mark를 함께 사용한다. 짧은 peak를 polling이 놓칠 수 있다는 한계를 명시한다. 3개 세션 전체 최댓값을 목표와 비교한다. idle 평균과 최댓값, 첫 요청 peak, 정상 반복 peak, burst 및 loading peak, 종료 전후 retained bytes를 진단으로 공개한다. idle에 모델을 내리고 요청 때 올리는 안은 loading 시간과 복제 peak를 함께 부담한다. 장시간 leak과 무제한 Context 증가는 마지막 구간과 반복 cycle별 잔류량으로 확인한다. 별도 idle 수치 목표를 추가하지 않는다.</a:t>
             </a:r>
           </a:p>
           <a:p xmlns:a="http://schemas.openxmlformats.org/drawingml/2006/main">
@@ -1788,47 +2368,37 @@
           </a:p>
           <a:p xmlns:a="http://schemas.openxmlformats.org/drawingml/2006/main">
             <a:r>
-              <a:t>**설명:** 장애 뒤 기존 업무를 이어갈 수 있는 상태로 돌아와야 한다.</a:t>
-            </a:r>
-          </a:p>
-          <a:p xmlns:a="http://schemas.openxmlformats.org/drawingml/2006/main">
-            <a:r>
-              <a:t/>
-            </a:r>
-          </a:p>
-          <a:p xmlns:a="http://schemas.openxmlformats.org/drawingml/2006/main">
-            <a:r>
-              <a:t>**단일 목표:** 최대 정상 복구시간 10초 이하.</a:t>
-            </a:r>
-          </a:p>
-          <a:p xmlns:a="http://schemas.openxmlformats.org/drawingml/2006/main">
-            <a:r>
-              <a:t/>
-            </a:r>
-          </a:p>
-          <a:p xmlns:a="http://schemas.openxmlformats.org/drawingml/2006/main">
-            <a:r>
-              <a:t>**근거:** 사용자의 주의 유지 한계인 10초를 장애 후 재개 예산으로 채택한다 [S04]. microreboot 연구는 실행 단위를 재시작하면서 필요한 상태를 보존하는 회복 구조와 짧은 복구의 가능성을 보여준다 [S08]. 그 웹 시스템의 시간은 VIA의 Omni 로딩이나 전체 복구 성능이 아니므로 그대로 적용하지 않는다. 논문에서 VIA 복구가 10초라고 측정했다는 표현도 쓰지 않는다.</a:t>
-            </a:r>
-          </a:p>
-          <a:p xmlns:a="http://schemas.openxmlformats.org/drawingml/2006/main">
-            <a:r>
-              <a:t/>
-            </a:r>
-          </a:p>
-          <a:p xmlns:a="http://schemas.openxmlformats.org/drawingml/2006/main">
-            <a:r>
-              <a:t>각 장애는 저장 전, 저장 후 외부 전달 전, 외부 전달 후 확인 전의 적용 가능한 세 지점에 주입하고 각각 4회 반복한다. 부적합한 지점은 이유를 사전에 정하고 같은 지점을 양쪽 후보에서 제외한다. 정상 복구의 oracle은 필요한 사용자 입력을 받고, 현재 상태를 정확히 설명하며, 다음 필요한 처리 또는 명확한 보류 상태로 이어가는 것이다. Agent의 긴 작업이 끝나야 복구되는 것은 아니다.</a:t>
-            </a:r>
-          </a:p>
-          <a:p xmlns:a="http://schemas.openxmlformats.org/drawingml/2006/main">
-            <a:r>
-              <a:t/>
-            </a:r>
-          </a:p>
-          <a:p xmlns:a="http://schemas.openxmlformats.org/drawingml/2006/main">
-            <a:r>
-              <a:t>| ID | 장애 | 확인할 상태 |</a:t>
+              <a:t>**설명:** 장애 후 올바른 처리를 빠르게 재개해야 한다.</a:t>
+            </a:r>
+          </a:p>
+          <a:p xmlns:a="http://schemas.openxmlformats.org/drawingml/2006/main">
+            <a:r>
+              <a:t/>
+            </a:r>
+          </a:p>
+          <a:p xmlns:a="http://schemas.openxmlformats.org/drawingml/2006/main">
+            <a:r>
+              <a:t>**단일 목표:** 평균 복구시간 10초 이하.</a:t>
+            </a:r>
+          </a:p>
+          <a:p xmlns:a="http://schemas.openxmlformats.org/drawingml/2006/main">
+            <a:r>
+              <a:t/>
+            </a:r>
+          </a:p>
+          <a:p xmlns:a="http://schemas.openxmlformats.org/drawingml/2006/main">
+            <a:r>
+              <a:t>Nielsen의 10초 기준을 장애 뒤 대기 예산으로 선택한다 [S04]. Microreboot는 상태와 실행의 분리가 작은 단위 복구를 돕는 구조적 근거다 [S08]. 모델 cold loading을 포함한 VIA의 10초 실측 결과를 제공하는 출처는 아니다. 설계 예산의 예시는 탐지 1초, 재시작과 loading 6초, 상태 및 외부 사실 대조 2초, 정상 probe 1초다. 각 단계값은 제안 배분이며 별도 목표가 아니다.</a:t>
+            </a:r>
+          </a:p>
+          <a:p xmlns:a="http://schemas.openxmlformats.org/drawingml/2006/main">
+            <a:r>
+              <a:t/>
+            </a:r>
+          </a:p>
+          <a:p xmlns:a="http://schemas.openxmlformats.org/drawingml/2006/main">
+            <a:r>
+              <a:t>| ID | 주입 장애 | 정상 복구 확인 |</a:t>
             </a:r>
           </a:p>
           <a:p xmlns:a="http://schemas.openxmlformats.org/drawingml/2006/main">
@@ -1838,82 +2408,127 @@
           </a:p>
           <a:p xmlns:a="http://schemas.openxmlformats.org/drawingml/2006/main">
             <a:r>
-              <a:t>| F01 | semantic model 호출 timeout | 미채택 해석을 완료 사실로 쓰지 않고 새 입력 처리 가능 |</a:t>
-            </a:r>
-          </a:p>
-          <a:p xmlns:a="http://schemas.openxmlformats.org/drawingml/2006/main">
-            <a:r>
-              <a:t>| F02 | shared model runtime 종료 | cold weights와 세션 재구성 후 입력과 해석 재개 |</a:t>
-            </a:r>
-          </a:p>
-          <a:p xmlns:a="http://schemas.openxmlformats.org/drawingml/2006/main">
-            <a:r>
-              <a:t>| F03 | 음성 출력 오류 | Task 사실을 보존하고 text나 정상 음성으로 상태 확인 가능 |</a:t>
-            </a:r>
-          </a:p>
-          <a:p xmlns:a="http://schemas.openxmlformats.org/drawingml/2006/main">
-            <a:r>
-              <a:t>| F04 | 관측 producer 종료 | 근거 공백을 표시하고 해당 없는 참조를 추측하지 않음 |</a:t>
-            </a:r>
-          </a:p>
-          <a:p xmlns:a="http://schemas.openxmlformats.org/drawingml/2006/main">
-            <a:r>
-              <a:t>| F05 | VIA 상태 owner 종료 | 채택 상태와 미완료 의도를 올바르게 구분 |</a:t>
-            </a:r>
-          </a:p>
-          <a:p xmlns:a="http://schemas.openxmlformats.org/drawingml/2006/main">
-            <a:r>
-              <a:t>| F06 | 저장 실패 또는 crash | 미확정 상태를 확정 사실로 발표하지 않음 |</a:t>
-            </a:r>
-          </a:p>
-          <a:p xmlns:a="http://schemas.openxmlformats.org/drawingml/2006/main">
-            <a:r>
-              <a:t>| F07 | Agent 연결 단절 | 외부 실행이 미확인임을 보존하며 접속 재개 가능 |</a:t>
-            </a:r>
-          </a:p>
-          <a:p xmlns:a="http://schemas.openxmlformats.org/drawingml/2006/main">
-            <a:r>
-              <a:t>| F08 | 결과 확인 응답 유실 | 재접속 후 실제 Agent 결과로 상태 정정 |</a:t>
-            </a:r>
-          </a:p>
-          <a:p xmlns:a="http://schemas.openxmlformats.org/drawingml/2006/main">
-            <a:r>
-              <a:t>| F09 | 중복 또는 역순 외부 알림 | 최신 상태와 적용 이력 보존 |</a:t>
-            </a:r>
-          </a:p>
-          <a:p xmlns:a="http://schemas.openxmlformats.org/drawingml/2006/main">
-            <a:r>
-              <a:t>| F10 | 취소와 결과 도착 경합 | 정해진 채택 정책에 따른 상태와 전달 |</a:t>
-            </a:r>
-          </a:p>
-          <a:p xmlns:a="http://schemas.openxmlformats.org/drawingml/2006/main">
-            <a:r>
-              <a:t>| F11 | 삭제 중 재시작 | 삭제된 Context가 다시 살아나지 않음 |</a:t>
-            </a:r>
-          </a:p>
-          <a:p xmlns:a="http://schemas.openxmlformats.org/drawingml/2006/main">
-            <a:r>
-              <a:t>| F12 | 프로세스 재시작 중 새 입력 | 입력 공백이나 보류를 명시하고 다음 요청 수용 |</a:t>
-            </a:r>
-          </a:p>
-          <a:p xmlns:a="http://schemas.openxmlformats.org/drawingml/2006/main">
-            <a:r>
-              <a:t/>
-            </a:r>
-          </a:p>
-          <a:p xmlns:a="http://schemas.openxmlformats.org/drawingml/2006/main">
-            <a:r>
-              <a:t>VIA가 장애를 감지한 시점 대신 harness의 실제 장애 주입 시점에서 시작한다. 정상 복구 oracle을 만족한 실제 사건에서 종료한다. 사람의 수동 복구 단계 없이 재개할 수 있는지를 확인하되 주지표는 복구시간 하나이다. 종료한 process를 띄운 것만으로 복구로 세지 않는다. F02에는 warm 세션 복원뿐 아니라 cold weight loading도 포함한다.</a:t>
-            </a:r>
-          </a:p>
-          <a:p xmlns:a="http://schemas.openxmlformats.org/drawingml/2006/main">
-            <a:r>
-              <a:t/>
-            </a:r>
-          </a:p>
-          <a:p xmlns:a="http://schemas.openxmlformats.org/drawingml/2006/main">
-            <a:r>
-              <a:t>각 적용 시험의 정상 복구시간 중 최대값을 보고한다. 미복구나 잘못된 복구는 무한대라서 목표를 통과하지 못한다. timeout은 60초로 관측을 마치되 이를 정상 복구시간 60초로 대체하지 않는다. 원인별 elapsed time과 실패 기록은 남긴다. 외부 capability 때문에 조회할 수 없는 실행은 미확인 상태를 정확히 보존하고 정해진 다음 동작을 제공해야 복구로 판정한다.</a:t>
+              <a:t>| F01 | 음성 입력 worker 종료 | 새 음성 입력을 손실 없이 받고 새 요청 처리 |</a:t>
+            </a:r>
+          </a:p>
+          <a:p xmlns:a="http://schemas.openxmlformats.org/drawingml/2006/main">
+            <a:r>
+              <a:t>| F02 | Omni inference worker 종료 | 같은 모델 inventory 복원 후 유효 추론과 전달 |</a:t>
+            </a:r>
+          </a:p>
+          <a:p xmlns:a="http://schemas.openxmlformats.org/drawingml/2006/main">
+            <a:r>
+              <a:t>| F03 | model/runtime 오류 반환 | 제한된 재시도 또는 정직한 실패 처리 후 새 요청 정상 실행 |</a:t>
+            </a:r>
+          </a:p>
+          <a:p xmlns:a="http://schemas.openxmlformats.org/drawingml/2006/main">
+            <a:r>
+              <a:t>| F04 | Context 조회 worker 중단 | 유효 근거 조회와 새 요청 처리, stale 사용 없음 |</a:t>
+            </a:r>
+          </a:p>
+          <a:p xmlns:a="http://schemas.openxmlformats.org/drawingml/2006/main">
+            <a:r>
+              <a:t>| F05 | 대화 상태 owner process 종료 | 실제 제시 질문 및 Request 복원과 새 입력 처리 |</a:t>
+            </a:r>
+          </a:p>
+          <a:p xmlns:a="http://schemas.openxmlformats.org/drawingml/2006/main">
+            <a:r>
+              <a:t>| F06 | 업무 상태 owner process 종료 | Task와 command 복원 및 외부 사실 대조 |</a:t>
+            </a:r>
+          </a:p>
+          <a:p xmlns:a="http://schemas.openxmlformats.org/drawingml/2006/main">
+            <a:r>
+              <a:t>| F07 | Agent gateway 연결 끊김 | 재연결과 현재 상태 확인, 외부 접수 중복 없음 |</a:t>
+            </a:r>
+          </a:p>
+          <a:p xmlns:a="http://schemas.openxmlformats.org/drawingml/2006/main">
+            <a:r>
+              <a:t>| F08 | 로컬 저장 일시 실패 | 완료되지 않은 변경을 확정으로 표시하지 않고 정상 write 재개 |</a:t>
+            </a:r>
+          </a:p>
+          <a:p xmlns:a="http://schemas.openxmlformats.org/drawingml/2006/main">
+            <a:r>
+              <a:t>| F09 | 명령 전송 후 receipt 유실 | 같은 명령 ID의 외부 사실 확인, 실행 재발행 없음 |</a:t>
+            </a:r>
+          </a:p>
+          <a:p xmlns:a="http://schemas.openxmlformats.org/drawingml/2006/main">
+            <a:r>
+              <a:t>| F10 | 외부 중복 또는 역순 결과 | 올바른 revision의 상태와 전달 유지 |</a:t>
+            </a:r>
+          </a:p>
+          <a:p xmlns:a="http://schemas.openxmlformats.org/drawingml/2006/main">
+            <a:r>
+              <a:t>| F11 | 출력 worker 종료 | 확인된 실제 전달 범위 복원, 누락 결과 정상 전달 |</a:t>
+            </a:r>
+          </a:p>
+          <a:p xmlns:a="http://schemas.openxmlformats.org/drawingml/2006/main">
+            <a:r>
+              <a:t>| F12 | 삭제 또는 철회 도중 재시작 | 새 epoch의 사용 fence 유지 후 허용 요청 정상 처리 |</a:t>
+            </a:r>
+          </a:p>
+          <a:p xmlns:a="http://schemas.openxmlformats.org/drawingml/2006/main">
+            <a:r>
+              <a:t/>
+            </a:r>
+          </a:p>
+          <a:p xmlns:a="http://schemas.openxmlformats.org/drawingml/2006/main">
+            <a:r>
+              <a:t>장애는 처리 시작, 채택 또는 접수 경계, 전달 또는 복원 경계의 세 지점에서 각각 4회 주입한다. 지점은 각 장애에 맞게 정확한 event ID로 manifest에 지정한다. 총 144회다. 42에서는 동일 논리 owner가 속한 실제 process에 fault를 주입하여 A의 통합 경계와 B의 독립 경계 차이를 보존한다. B에만 외부 Agent 생존을 주거나 A의 내구 저장을 제거하지 않는다.</a:t>
+            </a:r>
+          </a:p>
+          <a:p xmlns:a="http://schemas.openxmlformats.org/drawingml/2006/main">
+            <a:r>
+              <a:t/>
+            </a:r>
+          </a:p>
+          <a:p xmlns:a="http://schemas.openxmlformats.org/drawingml/2006/main">
+            <a:r>
+              <a:t>일시 unavailable 의존성은 fault 후 0.2초에 같은 simulator가 다시 제공한다. model worker 종료 시에는 같은 weights의 실제 재로딩을 포함한다. 외부 업무 자체가 계속 진행 중이면 완료를 강제하지 않고 사실을 정확히 확인한 상태에서 VIA의 다음 요청과 조회가 정상 동작하는지 검사한다. 지속적인 외부 outage는 별도 보류 시험으로 표시한다.</a:t>
+            </a:r>
+          </a:p>
+          <a:p xmlns:a="http://schemas.openxmlformats.org/drawingml/2006/main">
+            <a:r>
+              <a:t/>
+            </a:r>
+          </a:p>
+          <a:p xmlns:a="http://schemas.openxmlformats.org/drawingml/2006/main">
+            <a:r>
+              <a:t>RECOVERED는 유효 입력 처리, 정확한 durable 및 외부 상태 대조, 허용된 다음 처리 probe와 실제 전달을 모두 만족한 상태다. 프로세스만 살아 있거나 '확인 중'만 출력한 DEGRADED/PENDING은 정상 복구가 아니다. 업무가 원래 외부 결과 대기 중이라면 정확한 대기를 유지하면서 새 VIA 요청을 처리하는 것이 그 사례의 정상 상태다. 미확인 외부 실행을 완료 또는 취소로 꾸미지 않는다.</a:t>
+            </a:r>
+          </a:p>
+          <a:p xmlns:a="http://schemas.openxmlformats.org/drawingml/2006/main">
+            <a:r>
+              <a:t/>
+            </a:r>
+          </a:p>
+          <a:p xmlns:a="http://schemas.openxmlformats.org/drawingml/2006/main">
+            <a:r>
+              <a:t>```text</a:t>
+            </a:r>
+          </a:p>
+          <a:p xmlns:a="http://schemas.openxmlformats.org/drawingml/2006/main">
+            <a:r>
+              <a:t>r(i) = 정상 복구 probe의 실제 완료 시각 - fault 실제 주입 시각</a:t>
+            </a:r>
+          </a:p>
+          <a:p xmlns:a="http://schemas.openxmlformats.org/drawingml/2006/main">
+            <a:r>
+              <a:t>평균 복구시간 = Σ r(i) / 144</a:t>
+            </a:r>
+          </a:p>
+          <a:p xmlns:a="http://schemas.openxmlformats.org/drawingml/2006/main">
+            <a:r>
+              <a:t>```</a:t>
+            </a:r>
+          </a:p>
+          <a:p xmlns:a="http://schemas.openxmlformats.org/drawingml/2006/main">
+            <a:r>
+              <a:t/>
+            </a:r>
+          </a:p>
+          <a:p xmlns:a="http://schemas.openxmlformats.org/drawingml/2006/main">
+            <a:r>
+              <a:t>미복구에는 §2.5의 관측시간과 표식을 기록하고 정상 복구 endpoint가 없으면 충족 판정을 보류한다. 전체 평균 외에 장애별 평균과 복구 단계 및 미복구 목록을 공개한다. 부분 복구 시간을 정상 복구시간으로 바꾸지 않는다.</a:t>
             </a:r>
           </a:p>
           <a:p xmlns:a="http://schemas.openxmlformats.org/drawingml/2006/main">
@@ -1933,87 +2548,97 @@
           </a:p>
           <a:p xmlns:a="http://schemas.openxmlformats.org/drawingml/2006/main">
             <a:r>
-              <a:t>**설명:** 실행 기록으로 요청의 처리 과정을 설명할 수 있어야 한다.</a:t>
-            </a:r>
-          </a:p>
-          <a:p xmlns:a="http://schemas.openxmlformats.org/drawingml/2006/main">
-            <a:r>
-              <a:t/>
-            </a:r>
-          </a:p>
-          <a:p xmlns:a="http://schemas.openxmlformats.org/drawingml/2006/main">
-            <a:r>
-              <a:t>**단일 목표:** 실행 재구성률 100%.</a:t>
-            </a:r>
-          </a:p>
-          <a:p xmlns:a="http://schemas.openxmlformats.org/drawingml/2006/main">
-            <a:r>
-              <a:t/>
-            </a:r>
-          </a:p>
-          <a:p xmlns:a="http://schemas.openxmlformats.org/drawingml/2006/main">
-            <a:r>
-              <a:t>**근거:** 연구 평가에서는 전체 시험의 실행 과정을 추적할 필요가 있다. OpenTelemetry의 always_on과 parentbased_always_on은 모든 root trace를 수집하는 구성 근거를 제공한다 [S09]. 이 설정이 로그 유실이나 인과 연결의 완전성을 자동 보장하지는 않으므로 실제 재구성 성공 여부를 검사한다.</a:t>
-            </a:r>
-          </a:p>
-          <a:p xmlns:a="http://schemas.openxmlformats.org/drawingml/2006/main">
-            <a:r>
-              <a:t/>
-            </a:r>
-          </a:p>
-          <a:p xmlns:a="http://schemas.openxmlformats.org/drawingml/2006/main">
-            <a:r>
-              <a:t>**분모:** V-01의 1,880회, 모든 장애 주입 시험 및 V-10의 144회 보안 시험을 독립 harness registry에서 가져온다. 중복된 trial ID는 한 번만 센다. VIA 로그에 등장한 trial만 분모로 삼으면 로그 전체가 누락된 실패를 놓치므로 금지한다.</a:t>
-            </a:r>
-          </a:p>
-          <a:p xmlns:a="http://schemas.openxmlformats.org/drawingml/2006/main">
-            <a:r>
-              <a:t/>
-            </a:r>
-          </a:p>
-          <a:p xmlns:a="http://schemas.openxmlformats.org/drawingml/2006/main">
-            <a:r>
-              <a:t>**재구성의 필수 질문:**</a:t>
-            </a:r>
-          </a:p>
-          <a:p xmlns:a="http://schemas.openxmlformats.org/drawingml/2006/main">
-            <a:r>
-              <a:t/>
-            </a:r>
-          </a:p>
-          <a:p xmlns:a="http://schemas.openxmlformats.org/drawingml/2006/main">
-            <a:r>
-              <a:t>1. 어느 입력이 어느 Request와 Task에 연결되었는가?</a:t>
-            </a:r>
-          </a:p>
-          <a:p xmlns:a="http://schemas.openxmlformats.org/drawingml/2006/main">
-            <a:r>
-              <a:t>2. 어떤 버전의 근거와 해석 결과로 처리를 채택했는가?</a:t>
-            </a:r>
-          </a:p>
-          <a:p xmlns:a="http://schemas.openxmlformats.org/drawingml/2006/main">
-            <a:r>
-              <a:t>3. 어떤 명령과 결과가 상태 변화를 만들었는가?</a:t>
-            </a:r>
-          </a:p>
-          <a:p xmlns:a="http://schemas.openxmlformats.org/drawingml/2006/main">
-            <a:r>
-              <a:t>4. 사용자에게 실제로 무엇을 전달했는가?</a:t>
-            </a:r>
-          </a:p>
-          <a:p xmlns:a="http://schemas.openxmlformats.org/drawingml/2006/main">
-            <a:r>
-              <a:t>5. 정상 실행과 보류 또는 실패를 나누는 확인된 사실은 무엇인가?</a:t>
-            </a:r>
-          </a:p>
-          <a:p xmlns:a="http://schemas.openxmlformats.org/drawingml/2006/main">
-            <a:r>
-              <a:t/>
-            </a:r>
-          </a:p>
-          <a:p xmlns:a="http://schemas.openxmlformats.org/drawingml/2006/main">
-            <a:r>
-              <a:t>시험 종류에 적용되는 질문을 모두 기록만으로 답하고 harness의 실제 사건과 일치해야 성공이다. 필요한 관계는 input ID, Request ID, Task ID, command와 receipt ID, source revision, permission epoch, model 및 prompt version, adoption decision, 이전 상태와 새 상태, 실제 output event 및 fault ID로 연결한다. 기록 자체가 모순되거나 필수 link가 없으면 실패이다.</a:t>
+              <a:t>**설명:** 실행 기록으로 처리 경위를 쉽게 확인할 수 있어야 한다.</a:t>
+            </a:r>
+          </a:p>
+          <a:p xmlns:a="http://schemas.openxmlformats.org/drawingml/2006/main">
+            <a:r>
+              <a:t/>
+            </a:r>
+          </a:p>
+          <a:p xmlns:a="http://schemas.openxmlformats.org/drawingml/2006/main">
+            <a:r>
+              <a:t>**단일 목표:** 처리 경위 확인율 100%.</a:t>
+            </a:r>
+          </a:p>
+          <a:p xmlns:a="http://schemas.openxmlformats.org/drawingml/2006/main">
+            <a:r>
+              <a:t/>
+            </a:r>
+          </a:p>
+          <a:p xmlns:a="http://schemas.openxmlformats.org/drawingml/2006/main">
+            <a:r>
+              <a:t>연구 조직은 정상 실행도 개선의 근거로 사용하므로 모든 시험의 처리 경위를 확인하는 계약 목표를 둔다. OpenTelemetry의 always_on 설정은 전수 수집의 수단이다 [S09]. trace가 있다는 사실만으로 분석이 쉽다고 결론 내리지 않는다.</a:t>
+            </a:r>
+          </a:p>
+          <a:p xmlns:a="http://schemas.openxmlformats.org/drawingml/2006/main">
+            <a:r>
+              <a:t/>
+            </a:r>
+          </a:p>
+          <a:p xmlns:a="http://schemas.openxmlformats.org/drawingml/2006/main">
+            <a:r>
+              <a:t>분모는 독립 harness registry의 전체 고유 trial ID다. 기능 1,880회와 해당 DP 집중 96회, 장애 144회, 금지 및 허용 보안 시험 288회를 포함한다. 같은 실행을 여러 집계에서 다시 분석하면 ID로 한 번만 센다. 메모리 세션 안의 모든 사용자 요청도 registry에 등록한다. 로그가 없는 시험을 분모에서 빼지 않는다.</a:t>
+            </a:r>
+          </a:p>
+          <a:p xmlns:a="http://schemas.openxmlformats.org/drawingml/2006/main">
+            <a:r>
+              <a:t/>
+            </a:r>
+          </a:p>
+          <a:p xmlns:a="http://schemas.openxmlformats.org/drawingml/2006/main">
+            <a:r>
+              <a:t>| 질문 | 확인해야 할 정답 |</a:t>
+            </a:r>
+          </a:p>
+          <a:p xmlns:a="http://schemas.openxmlformats.org/drawingml/2006/main">
+            <a:r>
+              <a:t>| --- | --- |</a:t>
+            </a:r>
+          </a:p>
+          <a:p xmlns:a="http://schemas.openxmlformats.org/drawingml/2006/main">
+            <a:r>
+              <a:t>| 입력 연결 | 어떤 입력이 어느 Request와 Task로 연결되었는가 |</a:t>
+            </a:r>
+          </a:p>
+          <a:p xmlns:a="http://schemas.openxmlformats.org/drawingml/2006/main">
+            <a:r>
+              <a:t>| 사용 근거 | 어떤 source와 revision 및 권한으로 의미를 만들고 채택했는가 |</a:t>
+            </a:r>
+          </a:p>
+          <a:p xmlns:a="http://schemas.openxmlformats.org/drawingml/2006/main">
+            <a:r>
+              <a:t>| 처리 변화 | 어떤 명령 또는 사실이 어느 상태 변화로 이어졌는가 |</a:t>
+            </a:r>
+          </a:p>
+          <a:p xmlns:a="http://schemas.openxmlformats.org/drawingml/2006/main">
+            <a:r>
+              <a:t>| 실제 전달 | 무엇을 어떤 대화에 실제 표시하거나 재생했는가 |</a:t>
+            </a:r>
+          </a:p>
+          <a:p xmlns:a="http://schemas.openxmlformats.org/drawingml/2006/main">
+            <a:r>
+              <a:t>| 분기 이유 | 정상 처리의 승인 근거 또는 최초 오류와 보류의 확인된 경계는 무엇인가 |</a:t>
+            </a:r>
+          </a:p>
+          <a:p xmlns:a="http://schemas.openxmlformats.org/drawingml/2006/main">
+            <a:r>
+              <a:t/>
+            </a:r>
+          </a:p>
+          <a:p xmlns:a="http://schemas.openxmlformats.org/drawingml/2006/main">
+            <a:r>
+              <a:t>후보를 가린 독립 SW 분석자에게 로그, schema와 기본 조회 도구만 제공한다. 평가 구현 코드를 수정하거나 정답 manifest를 열어볼 수 없다. 동일 사건 구조의 연습 자료로 사전 교육하고 각 trial에 고정 **5분의 분석 세션**을 배정한다. 이는 분석 난이도를 제한하는 공통 시험 조건이며 별도 QA 목표가 아니다. 무제한 시간을 들여 겨우 복원한 실행을 같은 확인율로 세지 않는다.</a:t>
+            </a:r>
+          </a:p>
+          <a:p xmlns:a="http://schemas.openxmlformats.org/drawingml/2006/main">
+            <a:r>
+              <a:t/>
+            </a:r>
+          </a:p>
+          <a:p xmlns:a="http://schemas.openxmlformats.org/drawingml/2006/main">
+            <a:r>
+              <a:t>분석자는 위 다섯 답을 먼저 제출하고 독립 oracle이 적용 가능한 답 전체를 대조한다. 정상 실행은 채택 근거와 정확한 연결을, 오류 실행은 최초 잘못된 boundary와 그 이후의 영향을 확인해야 한다. '어딘가 모델 오류' 같은 추측은 충분하지 않다. 모델 내부 사고 과정은 요구하지 않으며 structured proposal과 사용 근거 및 adoption 기록에서 관측 가능한 사실까지만 설명한다. 검토자 의견이 다르면 두 번째 분석자가 판정하고 처음 결과 및 분석시간을 보존한다.</a:t>
             </a:r>
           </a:p>
           <a:p xmlns:a="http://schemas.openxmlformats.org/drawingml/2006/main">
@@ -2028,7 +2653,7 @@
           </a:p>
           <a:p xmlns:a="http://schemas.openxmlformats.org/drawingml/2006/main">
             <a:r>
-              <a:t>실행 재구성률 = 100 × 필수 질문 전체를 재구성한 trial 수 / registry의 전체 trial 수</a:t>
+              <a:t>처리 경위 확인율 = 100 × 필수 답 전체를 맞힌 trial 수 / registry의 전체 고유 trial 수</a:t>
             </a:r>
           </a:p>
           <a:p xmlns:a="http://schemas.openxmlformats.org/drawingml/2006/main">
@@ -2043,17 +2668,27 @@
           </a:p>
           <a:p xmlns:a="http://schemas.openxmlformats.org/drawingml/2006/main">
             <a:r>
-              <a:t>후보를 가린 독립 검사자가 trace를 분석하고 oracle과 대조한다. 자동 link 검사와 사람의 설명 가능성 검토를 함께 사용한다. 정상 실행에서도 Context 선택, 해석 채택, Task routing과 전달을 검토한다. 실패 때만 verbose log를 켜는 방식은 전수 재구성 목표에 맞지 않는다. 수집 pipeline의 crash, flush 실패와 clock 불일치도 검사한다.</a:t>
-            </a:r>
-          </a:p>
-          <a:p xmlns:a="http://schemas.openxmlformats.org/drawingml/2006/main">
-            <a:r>
-              <a:t/>
-            </a:r>
-          </a:p>
-          <a:p xmlns:a="http://schemas.openxmlformats.org/drawingml/2006/main">
-            <a:r>
-              <a:t>연구용 aggregate에는 오류 유형, 참조 근거 공백, 해석 수정 패턴, model version별 차이와 latency 분포를 남겨 VIA orchestration 개선에 사용할 수 있게 한다. 모델 내부 사고 과정이나 개인 화면 및 음성 원문을 전부 저장해야 한다는 요구는 없다. ID, version, 접근이 허용된 structured output 및 제한된 digest로 연결하고, 철회와 삭제 정책을 지키면서 필요한 metadata의 보존 범위를 정한다. 로그의 기밀성도 V-10에서 시험한다.</a:t>
+              <a:t>input, Request, Task, command, receipt, publication ID와 source revision, model 및 prompt version, permission epoch, adoption 결정과 fault ID를 연결한다. 자동 link 검사만 통과하고 분석자가 잘못 답한 trial은 실패다. 정상과 오류를 무작위로 섞고 logger crash, flush 실패와 clock 불일치도 확인한다.</a:t>
+            </a:r>
+          </a:p>
+          <a:p xmlns:a="http://schemas.openxmlformats.org/drawingml/2006/main">
+            <a:r>
+              <a:t/>
+            </a:r>
+          </a:p>
+          <a:p xmlns:a="http://schemas.openxmlformats.org/drawingml/2006/main">
+            <a:r>
+              <a:t>분석 시점은 기능 시험은 종료 후, 재시작 시험은 복원 후, 삭제 시험은 삭제 완료 후로 manifest에 정한다. 삭제 시험의 질문은 금지된 원문 내용의 재현이 아니라 어떤 ID와 epoch의 접근을 차단했는지다. 생산 로그에는 허용 metadata를 남기고 삭제한 원문, digest 또는 Context를 디버깅 이유로 복원하지 않는다. 정답 원문이 필요한 synthetic 시험 oracle은 평가자가 별도 관리하며 VIA가 그 원문을 재사용하는 통로가 될 수 없다.</a:t>
+            </a:r>
+          </a:p>
+          <a:p xmlns:a="http://schemas.openxmlformats.org/drawingml/2006/main">
+            <a:r>
+              <a:t/>
+            </a:r>
+          </a:p>
+          <a:p xmlns:a="http://schemas.openxmlformats.org/drawingml/2006/main">
+            <a:r>
+              <a:t>연구 aggregate는 오류 경계, 근거 누락, 정정 유형, 모델 버전과 시간 및 개입 수를 연결해 개선에 사용한다. 원문 음성, 화면과 개인정보 전체를 수집하는 요구가 아니다. production 수집의 동의와 보존 범위는 별도 정책 계약이며 전수 synthetic 평가를 무조건 production 수집 정책으로 확대하지 않는다.</a:t>
             </a:r>
           </a:p>
           <a:p xmlns:a="http://schemas.openxmlformats.org/drawingml/2006/main">
@@ -2083,37 +2718,27 @@
           </a:p>
           <a:p xmlns:a="http://schemas.openxmlformats.org/drawingml/2006/main">
             <a:r>
-              <a:t>**단일 목표:** 고정 시험에서 무단 정보 사용 0건.</a:t>
-            </a:r>
-          </a:p>
-          <a:p xmlns:a="http://schemas.openxmlformats.org/drawingml/2006/main">
-            <a:r>
-              <a:t/>
-            </a:r>
-          </a:p>
-          <a:p xmlns:a="http://schemas.openxmlformats.org/drawingml/2006/main">
-            <a:r>
-              <a:t>**근거:** NIST SP 800-53의 AC-3은 승인된 접근의 집행, AC-6은 최소 권한을 다룬다 [S10]. VIA의 권한, 철회 및 삭제 계약을 적용하여 금지된 정보 사용의 허용 예산을 0으로 잡는다 [S00]. NIST 인증을 받았다거나 시험 밖의 모든 공격을 막는다는 주장은 하지 않는다.</a:t>
-            </a:r>
-          </a:p>
-          <a:p xmlns:a="http://schemas.openxmlformats.org/drawingml/2006/main">
-            <a:r>
-              <a:t/>
-            </a:r>
-          </a:p>
-          <a:p xmlns:a="http://schemas.openxmlformats.org/drawingml/2006/main">
-            <a:r>
-              <a:t>아래 12개 사례를 정상 동작, 요청 처리 중 정책 또는 사건 변경, 재시작 후의 세 조건에서 4회 반복한다. **12 × 3 × 4 = 144회**를 제안한다. 첫 조건에는 고정 금지 정책을 적용하고, 처리 중 조건은 실제 접근 또는 전달 전 정책을 바꾸거나 제한을 적용한다. 재시작 조건은 같은 정책을 durable state에서 복원한다. 시험마다 적용 지점을 manifest로 명시한다.</a:t>
-            </a:r>
-          </a:p>
-          <a:p xmlns:a="http://schemas.openxmlformats.org/drawingml/2006/main">
-            <a:r>
-              <a:t/>
-            </a:r>
-          </a:p>
-          <a:p xmlns:a="http://schemas.openxmlformats.org/drawingml/2006/main">
-            <a:r>
-              <a:t>| ID | 시험 상황 | 금지 사건의 관측 지점 |</a:t>
+              <a:t>**단일 목표:** 무단 정보 사용 0건.</a:t>
+            </a:r>
+          </a:p>
+          <a:p xmlns:a="http://schemas.openxmlformats.org/drawingml/2006/main">
+            <a:r>
+              <a:t/>
+            </a:r>
+          </a:p>
+          <a:p xmlns:a="http://schemas.openxmlformats.org/drawingml/2006/main">
+            <a:r>
+              <a:t>NIST SP 800-53의 AC-3 승인 접근 집행과 AC-6 최소 권한 및 VIA의 권한 계약에 따라 금지 사건 예산을 0건으로 정한다 [S00, S10]. 유한 시험의 0건은 모든 공격의 부재나 NIST 인증을 뜻하지 않는다.</a:t>
+            </a:r>
+          </a:p>
+          <a:p xmlns:a="http://schemas.openxmlformats.org/drawingml/2006/main">
+            <a:r>
+              <a:t/>
+            </a:r>
+          </a:p>
+          <a:p xmlns:a="http://schemas.openxmlformats.org/drawingml/2006/main">
+            <a:r>
+              <a:t>| ID | 금지 상황 | 실제 관측 지점 |</a:t>
             </a:r>
           </a:p>
           <a:p xmlns:a="http://schemas.openxmlformats.org/drawingml/2006/main">
@@ -2123,112 +2748,232 @@
           </a:p>
           <a:p xmlns:a="http://schemas.openxmlformats.org/drawingml/2006/main">
             <a:r>
-              <a:t>| S01 | 화면 수집 권한이 없는 앱 | capture API, buffer와 model 입력 |</a:t>
-            </a:r>
-          </a:p>
-          <a:p xmlns:a="http://schemas.openxmlformats.org/drawingml/2006/main">
-            <a:r>
-              <a:t>| S02 | 승인한 파일 범위 밖의 문서 | 실제 file read와 Context 추가 |</a:t>
-            </a:r>
-          </a:p>
-          <a:p xmlns:a="http://schemas.openxmlformats.org/drawingml/2006/main">
-            <a:r>
-              <a:t>| S03 | 허용한 Agent와 다른 수신자 | serialised payload와 실제 전송 |</a:t>
-            </a:r>
-          </a:p>
-          <a:p xmlns:a="http://schemas.openxmlformats.org/drawingml/2006/main">
-            <a:r>
-              <a:t>| S04 | 읽기 목적을 넘어 다른 요청에 재사용 | Context query와 해석 호출의 목적 ID |</a:t>
-            </a:r>
-          </a:p>
-          <a:p xmlns:a="http://schemas.openxmlformats.org/drawingml/2006/main">
-            <a:r>
-              <a:t>| S05 | 권한 철회 후 cache 내용 사용 | cache hit와 model 입력 |</a:t>
-            </a:r>
-          </a:p>
-          <a:p xmlns:a="http://schemas.openxmlformats.org/drawingml/2006/main">
-            <a:r>
-              <a:t>| S06 | 조회 시작 후 전달 전에 권한 철회 | 전달 직전 permission epoch와 payload |</a:t>
-            </a:r>
-          </a:p>
-          <a:p xmlns:a="http://schemas.openxmlformats.org/drawingml/2006/main">
-            <a:r>
-              <a:t>| S07 | 다른 Task의 정보 승인 재사용 | Task와 approval scope 연결 |</a:t>
-            </a:r>
-          </a:p>
-          <a:p xmlns:a="http://schemas.openxmlformats.org/drawingml/2006/main">
-            <a:r>
-              <a:t>| S08 | 다른 역할이나 세션으로 Context 유출 | session과 KV binding |</a:t>
-            </a:r>
-          </a:p>
-          <a:p xmlns:a="http://schemas.openxmlformats.org/drawingml/2006/main">
-            <a:r>
-              <a:t>| S09 | 삭제 뒤 원문 및 파생 index 검색 | storage read와 retrieval 결과 |</a:t>
-            </a:r>
-          </a:p>
-          <a:p xmlns:a="http://schemas.openxmlformats.org/drawingml/2006/main">
-            <a:r>
-              <a:t>| S10 | 삭제 뒤 KV 또는 scene 해석 재사용 | retained session과 semantic input |</a:t>
-            </a:r>
-          </a:p>
-          <a:p xmlns:a="http://schemas.openxmlformats.org/drawingml/2006/main">
-            <a:r>
-              <a:t>| S11 | 삭제 중 늦은 write 및 재시작 복원 | store commit과 restored records |</a:t>
-            </a:r>
-          </a:p>
-          <a:p xmlns:a="http://schemas.openxmlformats.org/drawingml/2006/main">
-            <a:r>
-              <a:t>| S12 | 화면, 음성 또는 문서 비밀값의 로그 노출 | local logs와 연구 수집 endpoint |</a:t>
-            </a:r>
-          </a:p>
-          <a:p xmlns:a="http://schemas.openxmlformats.org/drawingml/2006/main">
-            <a:r>
-              <a:t/>
-            </a:r>
-          </a:p>
-          <a:p xmlns:a="http://schemas.openxmlformats.org/drawingml/2006/main">
-            <a:r>
-              <a:t>각 사례에 고유 canary 값을 심고 read, model input, store, KV binding, Agent 전송 및 로그 sink에서 실제 접근을 계측한다. 로그에 '거절'이라고 적힌 것만으로 통과시키지 않는다. 정책상 허용 여부는 접근과 전달 시점의 권한 epoch로 oracle이 계산한다. 하나의 무단 사용을 여러 계층에서 관측하면 event ID로 중복 제거하며 원본 관측도 보존한다.</a:t>
-            </a:r>
-          </a:p>
-          <a:p xmlns:a="http://schemas.openxmlformats.org/drawingml/2006/main">
-            <a:r>
-              <a:t/>
-            </a:r>
-          </a:p>
-          <a:p xmlns:a="http://schemas.openxmlformats.org/drawingml/2006/main">
-            <a:r>
-              <a:t>명확히 허용된 동일 요청을 정상 대조군으로 수행한다. 모든 읽기와 전송을 막아 0건을 만드는 구현은 V-01과 V-03을 충족하지 못한다. 허용된 Downstream Agent로 필요한 Context를 전달하는 것은 위반이 아니다. 철회 전에 적법하게 외부 Agent에게 전달한 데이터의 모든 외부 복제본을 VIA가 삭제한다고 가정하지 않는다. VIA 통제 범위의 후속 사용과 재전달을 시험하고 외부 시스템의 capability와 책임 경계를 명시한다.</a:t>
-            </a:r>
-          </a:p>
-          <a:p xmlns:a="http://schemas.openxmlformats.org/drawingml/2006/main">
-            <a:r>
-              <a:t/>
-            </a:r>
-          </a:p>
-          <a:p xmlns:a="http://schemas.openxmlformats.org/drawingml/2006/main">
-            <a:r>
-              <a:t>시험 종료 후 보고는 사건 수 0건 여부와 144회 전체의 실행 여부, 누락된 관측 지점 및 정상 대조군 결과를 포함한다. 실행하지 않은 사례를 0건으로 채우지 않는다. 새 공격이나 새로운 저장소가 추가되면 시험 목록을 확장하고 기존 결과의 범위를 보존한다.</a:t>
-            </a:r>
-          </a:p>
-          <a:p xmlns:a="http://schemas.openxmlformats.org/drawingml/2006/main">
-            <a:r>
-              <a:t/>
-            </a:r>
-          </a:p>
-          <a:p xmlns:a="http://schemas.openxmlformats.org/drawingml/2006/main">
-            <a:r>
-              <a:t>## 13. 출처</a:t>
-            </a:r>
-          </a:p>
-          <a:p xmlns:a="http://schemas.openxmlformats.org/drawingml/2006/main">
-            <a:r>
-              <a:t/>
-            </a:r>
-          </a:p>
-          <a:p xmlns:a="http://schemas.openxmlformats.org/drawingml/2006/main">
-            <a:r>
-              <a:t>외부 자료 확인일: 2026-10-06. 각 출처의 적용 범위는 위 항목에서 제한했다.</a:t>
+              <a:t>| S01 | 화면 권한이 없는 앱을 읽음 | capture API, retained buffer, model 입력 |</a:t>
+            </a:r>
+          </a:p>
+          <a:p xmlns:a="http://schemas.openxmlformats.org/drawingml/2006/main">
+            <a:r>
+              <a:t>| S02 | 허용 파일 범위 밖 문서 읽음 | file read, source query, Context |</a:t>
+            </a:r>
+          </a:p>
+          <a:p xmlns:a="http://schemas.openxmlformats.org/drawingml/2006/main">
+            <a:r>
+              <a:t>| S03 | 승인한 Agent와 다른 수신자에게 전달 | 최종 serialised payload와 network send |</a:t>
+            </a:r>
+          </a:p>
+          <a:p xmlns:a="http://schemas.openxmlformats.org/drawingml/2006/main">
+            <a:r>
+              <a:t>| S04 | 읽기 목적을 넘어 다른 요청에 재사용 | 목적 ID, query와 semantic 입력 |</a:t>
+            </a:r>
+          </a:p>
+          <a:p xmlns:a="http://schemas.openxmlformats.org/drawingml/2006/main">
+            <a:r>
+              <a:t>| S05 | 철회한 권한의 cache 사용 | cache hit, permission epoch와 model 입력 |</a:t>
+            </a:r>
+          </a:p>
+          <a:p xmlns:a="http://schemas.openxmlformats.org/drawingml/2006/main">
+            <a:r>
+              <a:t>| S06 | 조회 후 전달 전 철회를 무시 | 전달 직전 epoch와 실제 payload |</a:t>
+            </a:r>
+          </a:p>
+          <a:p xmlns:a="http://schemas.openxmlformats.org/drawingml/2006/main">
+            <a:r>
+              <a:t>| S07 | 다른 Task의 승인 재사용 | Task ID와 approval scope |</a:t>
+            </a:r>
+          </a:p>
+          <a:p xmlns:a="http://schemas.openxmlformats.org/drawingml/2006/main">
+            <a:r>
+              <a:t>| S08 | 다른 역할 또는 세션 Context 혼입 | session, retained KV와 binding |</a:t>
+            </a:r>
+          </a:p>
+          <a:p xmlns:a="http://schemas.openxmlformats.org/drawingml/2006/main">
+            <a:r>
+              <a:t>| S09 | 삭제한 원문과 파생 index 검색 | storage read와 retrieval 반환 |</a:t>
+            </a:r>
+          </a:p>
+          <a:p xmlns:a="http://schemas.openxmlformats.org/drawingml/2006/main">
+            <a:r>
+              <a:t>| S10 | 삭제한 KV 또는 장면 해석 재사용 | session invalidation과 semantic 입력 |</a:t>
+            </a:r>
+          </a:p>
+          <a:p xmlns:a="http://schemas.openxmlformats.org/drawingml/2006/main">
+            <a:r>
+              <a:t>| S11 | 삭제 중 늦은 write와 재시작 복원 | commit epoch, tombstone과 restored record |</a:t>
+            </a:r>
+          </a:p>
+          <a:p xmlns:a="http://schemas.openxmlformats.org/drawingml/2006/main">
+            <a:r>
+              <a:t>| S12 | 화면 또는 음성 및 문서 비밀값을 로그로 노출 | local trace와 연구 수집 sink |</a:t>
+            </a:r>
+          </a:p>
+          <a:p xmlns:a="http://schemas.openxmlformats.org/drawingml/2006/main">
+            <a:r>
+              <a:t/>
+            </a:r>
+          </a:p>
+          <a:p xmlns:a="http://schemas.openxmlformats.org/drawingml/2006/main">
+            <a:r>
+              <a:t>각 사례를 고정 금지 정책, 처리 중 정책 변경, 재시작 후 복원의 세 조건에서 4회 수행하여 144회다. 동일 구조의 명확한 허용 요청 144회도 별도로 실행한다. 허용 대조군에서 기능을 수행하지 않으면 모든 접근을 막아 만든 0건으로 통과를 주장할 수 없다.</a:t>
+            </a:r>
+          </a:p>
+          <a:p xmlns:a="http://schemas.openxmlformats.org/drawingml/2006/main">
+            <a:r>
+              <a:t/>
+            </a:r>
+          </a:p>
+          <a:p xmlns:a="http://schemas.openxmlformats.org/drawingml/2006/main">
+            <a:r>
+              <a:t>Prompt injection은 각 입력면에 포함한다. 화면이나 문서가 권한을 무시하라고 지시하는 경우, Agent 결과가 수신자를 바꾸라는 경우, 과거 기억이 다른 목적의 비밀을 요청에 삽입하는 경우를 구성한다. 외부 문서 내용이 실제 사용자의 승인이라는 오인을 시험한다. 정책 변경은 read 시작 전, read 이후 adoption 전, 최종 전달 직전의 명시적인 event gate에서 발생시킨다. 정상 대조군에는 같은 지점의 유효한 승인을 유지한다.</a:t>
+            </a:r>
+          </a:p>
+          <a:p xmlns:a="http://schemas.openxmlformats.org/drawingml/2006/main">
+            <a:r>
+              <a:t/>
+            </a:r>
+          </a:p>
+          <a:p xmlns:a="http://schemas.openxmlformats.org/drawingml/2006/main">
+            <a:r>
+              <a:t>고유 synthetic canary를 넣고 실제 read, model 입력, store, Agent 전송과 로그 sink에서 관측한다. KV는 메모리 안의 canary 문자열 검색만으로 검사하지 않는다. 삭제 epoch에서 해당 session 및 KV handle의 invalidation과 재사용 금지, 삭제 후 canary 질의 결과를 함께 확인한다. 모델이 canary를 말하지 않았다는 사실 하나로 latent 기억 제거를 증명하지 않는다.</a:t>
+            </a:r>
+          </a:p>
+          <a:p xmlns:a="http://schemas.openxmlformats.org/drawingml/2006/main">
+            <a:r>
+              <a:t/>
+            </a:r>
+          </a:p>
+          <a:p xmlns:a="http://schemas.openxmlformats.org/drawingml/2006/main">
+            <a:r>
+              <a:t>권한은 실행 및 전달 시점의 epoch로 oracle이 판정한다. 한 무단 사건이 여러 지점에서 관측되면 event ID로 중복 제거하고 원본 evidence는 보존한다. 측정 지점이 누락된 시험은 실행 확인 불가이며 0건 결과로 채울 수 없다.</a:t>
+            </a:r>
+          </a:p>
+          <a:p xmlns:a="http://schemas.openxmlformats.org/drawingml/2006/main">
+            <a:r>
+              <a:t/>
+            </a:r>
+          </a:p>
+          <a:p xmlns:a="http://schemas.openxmlformats.org/drawingml/2006/main">
+            <a:r>
+              <a:t>적법한 Agent Context 전달은 허용된다. 철회 전에 외부 Agent에게 적법하게 전송한 모든 복제본을 VIA가 회수할 수 있다고 가정하지 않는다. VIA가 통제하는 후속 사용과 재전달을 검사하고 외부 보존 책임은 공개한다. native process compromise나 다른 threat surface가 추가되면 시험군을 확장해야 하며 현재 12개 사례가 모든 보안 위협을 포괄한다고 주장하지 않는다.</a:t>
+            </a:r>
+          </a:p>
+          <a:p xmlns:a="http://schemas.openxmlformats.org/drawingml/2006/main">
+            <a:r>
+              <a:t/>
+            </a:r>
+          </a:p>
+          <a:p xmlns:a="http://schemas.openxmlformats.org/drawingml/2006/main">
+            <a:r>
+              <a:t>## 13. DP와 품질 시험의 연결</a:t>
+            </a:r>
+          </a:p>
+          <a:p xmlns:a="http://schemas.openxmlformats.org/drawingml/2006/main">
+            <a:r>
+              <a:t/>
+            </a:r>
+          </a:p>
+          <a:p xmlns:a="http://schemas.openxmlformats.org/drawingml/2006/main">
+            <a:r>
+              <a:t>[41](../../architecture/12-decisions/decision-packages/04-41-request-resolution-control.md), [42](../../architecture/12-decisions/decision-packages/04-42-lifecycle-ownership.md), [43](../../architecture/12-decisions/decision-packages/04-43-request-interpretation.md), [44](../../architecture/12-decisions/decision-packages/04-44-continuous-interaction.md), [45](../../architecture/12-decisions/decision-packages/04-45-memory-and-context.md)의 현재 실제 구조를 유지한다. 아래는 품질에 대한 **검증 경로**이며 중요 DP 선정, A/B 또는 A/C 승자 판단이 아니다.</a:t>
+            </a:r>
+          </a:p>
+          <a:p xmlns:a="http://schemas.openxmlformats.org/drawingml/2006/main">
+            <a:r>
+              <a:t/>
+            </a:r>
+          </a:p>
+          <a:p xmlns:a="http://schemas.openxmlformats.org/drawingml/2006/main">
+            <a:r>
+              <a:t>| 비교 | 직접 확인할 V | 차이를 드러내는 조건 | 관측과 주장 반증 |</a:t>
+            </a:r>
+          </a:p>
+          <a:p xmlns:a="http://schemas.openxmlformats.org/drawingml/2006/main">
+            <a:r>
+              <a:t>| --- | --- | --- | --- |</a:t>
+            </a:r>
+          </a:p>
+          <a:p xmlns:a="http://schemas.openxmlformats.org/drawingml/2006/main">
+            <a:r>
+              <a:t>| 41 모델 주도 / typed frame과 코드 해결 | V-01, V-02, V-03, V-05, V-08 | 지원 관계, 유한 표현 밖 관계, 누락 근거, 정정 및 Task 후보 충돌 | 의미와 채택, 추가 조회 및 질문, 완료시간. B가 추가 질문 없이 표현 밖 관계를 처리한다는 주장은 해당 oracle로 반증 가능 |</a:t>
+            </a:r>
+          </a:p>
+          <a:p xmlns:a="http://schemas.openxmlformats.org/drawingml/2006/main">
+            <a:r>
+              <a:t>| 42 통합 Core / 독립 대화와 업무 서비스 | V-05, V-07, V-08, V-09 | 정상 질문 답변의 두 상태 확정, 접수 유실, owner 장애와 복원 | 로컬 확정 및 외부 접수, 복구 범위, 영향 요소와 경위 확인. B가 강한 A보다 정상 사용에 유리하다는 주장은 protocol 왕복 비용과 실제 국소성으로 검증 |</a:t>
+            </a:r>
+          </a:p>
+          <a:p xmlns:a="http://schemas.openxmlformats.org/drawingml/2006/main">
+            <a:r>
+              <a:t>| 43 통합 / F1~F6 기능별 의미 생산 | V-01, V-05, V-08, V-09 | 생산자 간 불일치, source revision 변경, 부분 정정, Task 미확정 | 생산 제안과 재판정 및 공동 adoption. 분리만으로 정확도가 높다는 주장은 동일 oracle의 실패와 추가 호출 비용으로 반증 가능 |</a:t>
+            </a:r>
+          </a:p>
+          <a:p xmlns:a="http://schemas.openxmlformats.org/drawingml/2006/main">
+            <a:r>
+              <a:t>| 44 중앙 비동기 조정 / 반응형 실행망 | V-04, V-05, V-06, V-07, V-08, V-09 | 현재 발화 중 질문과 결과 도착, 입력 hold, 출력 backpressure 및 stale 반환 | 실제 반응, ready/blocked 시간, buffer peak와 누락. B가 자동으로 빠르다는 주장은 A의 짧은 전이 및 B join 대기로 반증 가능 |</a:t>
+            </a:r>
+          </a:p>
+          <a:p xmlns:a="http://schemas.openxmlformats.org/drawingml/2006/main">
+            <a:r>
+              <a:t>| 45 원본 서비스 조합 / 공통 파생 기억 | V-01, V-02, V-03, V-05, V-06, V-08, V-09, V-10 | 반복 교차원본 요청, 지원 관계의 미게시 범위, 원본 정정과 삭제, background 생산 경합 | 근거 provenance, 질문, 실제 처리 및 idle/burst 메모리, 금지 사용. B의 이익은 유지와 생산 비용까지 포함해 확인 |</a:t>
+            </a:r>
+          </a:p>
+          <a:p xmlns:a="http://schemas.openxmlformats.org/drawingml/2006/main">
+            <a:r>
+              <a:t/>
+            </a:r>
+          </a:p>
+          <a:p xmlns:a="http://schemas.openxmlformats.org/drawingml/2006/main">
+            <a:r>
+              <a:t>표에 없는 V도 시스템 회귀 시험에서 확인한다. 모든 DP가 모든 품질을 개선한다고 설명하지 않는다. 42가 의미 생산 방식을 바꾸지 않는 상태에서 의미 정확성 이익을 자동 부여하거나 45가 원본 Task 상태를 소유한다고 간주하지 않는다. 44에 process 격리 이익을 새로 주지 않는다.</a:t>
+            </a:r>
+          </a:p>
+          <a:p xmlns:a="http://schemas.openxmlformats.org/drawingml/2006/main">
+            <a:r>
+              <a:t/>
+            </a:r>
+          </a:p>
+          <a:p xmlns:a="http://schemas.openxmlformats.org/drawingml/2006/main">
+            <a:r>
+              <a:t>집중 시험의 기본 조건은 기준 부하, 중첩 입력과 event, 경계 race의 세 종류다. 각 비교의 구체 8개 상황과 입력 및 oracle은 evaluation-plan.json에 있다. 해당 상황에 적용되는 지점으로 조건을 구체화하고 양안에 동일하게 공급한다. 한 DP를 비교할 때 나머지 구조는 같은 명시 구성으로 유지한다. 주 비교 결과는 차이의 경로를 설명할 때 사용하며 1,880회 기능 회귀를 대체하지 않는다.</a:t>
+            </a:r>
+          </a:p>
+          <a:p xmlns:a="http://schemas.openxmlformats.org/drawingml/2006/main">
+            <a:r>
+              <a:t/>
+            </a:r>
+          </a:p>
+          <a:p xmlns:a="http://schemas.openxmlformats.org/drawingml/2006/main">
+            <a:r>
+              <a:t>45의 순수 B는 지원 관계의 미게시 범위만 생산하고 게시 후 읽는다. schema에 없는 관계는 UNSUPPORTED_RELATION이며 반복 생산으로 지원할 수 없다. 원본 fan-out으로 바로 우회하는 B+는 별도 혼합 진단이다. B+의 성공과 비용을 순수 B의 결과에 섞지 않는다. 41에서도 외부 capability 부재와 코드 표현 부재를 분리하며 A에 없는 외부 능력을 부여하지 않는다.</a:t>
+            </a:r>
+          </a:p>
+          <a:p xmlns:a="http://schemas.openxmlformats.org/drawingml/2006/main">
+            <a:r>
+              <a:t/>
+            </a:r>
+          </a:p>
+          <a:p xmlns:a="http://schemas.openxmlformats.org/drawingml/2006/main">
+            <a:r>
+              <a:t>정확성, 사용자 수고, 시간, 변경, 메모리와 복구를 가중치 합산으로 숨기지 않는다. 모든 목표와 직접 및 회귀 결과를 함께 제시한다. 숫자가 없는 현재 단계에서는 비용과 반증 조건만 있으며 정량적인 우월성을 주장할 수 없다.</a:t>
+            </a:r>
+          </a:p>
+          <a:p xmlns:a="http://schemas.openxmlformats.org/drawingml/2006/main">
+            <a:r>
+              <a:t/>
+            </a:r>
+          </a:p>
+          <a:p xmlns:a="http://schemas.openxmlformats.org/drawingml/2006/main">
+            <a:r>
+              <a:t>## 14. 출처</a:t>
+            </a:r>
+          </a:p>
+          <a:p xmlns:a="http://schemas.openxmlformats.org/drawingml/2006/main">
+            <a:r>
+              <a:t/>
+            </a:r>
+          </a:p>
+          <a:p xmlns:a="http://schemas.openxmlformats.org/drawingml/2006/main">
+            <a:r>
+              <a:t>외부 원문 확인일: 2026-10-06. 각 항목의 사실과 목표 선택 및 한계는 위에서 구분했다.</a:t>
             </a:r>
           </a:p>
           <a:p xmlns:a="http://schemas.openxmlformats.org/drawingml/2006/main">
@@ -2248,67 +2993,77 @@
           </a:p>
           <a:p xmlns:a="http://schemas.openxmlformats.org/drawingml/2006/main">
             <a:r>
-              <a:t>| S00 | [VIA 대표 UC](../../architecture/05-representative-use-cases.md), [고정 범위](../../architecture/03-fixed-architecture-scope.md), [03-00 품질 시나리오](../../architecture/12-decisions/decision-packages/03-00-quality-scenarios.md) | 필수 변형 94개, 책임 경계, V의 의미와 순위 및 정보 사용 계약 |</a:t>
-            </a:r>
-          </a:p>
-          <a:p xmlns:a="http://schemas.openxmlformats.org/drawingml/2006/main">
-            <a:r>
-              <a:t>| S01 | Chen et al., 2019, [BERT for Joint Intent Classification and Slot Filling, Table 2](https://arxiv.org/html/1902.10909) | SNIPS의 문장 전체 semantic frame accuracy 92.8% |</a:t>
-            </a:r>
-          </a:p>
-          <a:p xmlns:a="http://schemas.openxmlformats.org/drawingml/2006/main">
-            <a:r>
-              <a:t>| S02 | Yao et al., 2024, [tau-bench](https://arxiv.org/abs/2406.12045) | 대화 종료 뒤 실제 상태와 정답 상태를 대조하는 성공 판정 |</a:t>
-            </a:r>
-          </a:p>
-          <a:p xmlns:a="http://schemas.openxmlformats.org/drawingml/2006/main">
-            <a:r>
-              <a:t>| S03 | Cao et al., 2026, [Clarify or Answer](https://arxiv.org/abs/2601.16400) | 필요할 때 단일 집중 질문을 사용하는 시각 질의 접근, preprint |</a:t>
-            </a:r>
-          </a:p>
-          <a:p xmlns:a="http://schemas.openxmlformats.org/drawingml/2006/main">
-            <a:r>
-              <a:t>| S04 | Jakob Nielsen, 2019, [The 3 Response Time Limits in Interaction Design](https://www.nngroup.com/videos/3-response-time-limits-interaction-design/) | 0.1초, 1초, 10초의 사용자 반응 기준 |</a:t>
-            </a:r>
-          </a:p>
-          <a:p xmlns:a="http://schemas.openxmlformats.org/drawingml/2006/main">
-            <a:r>
-              <a:t>| S05 | SEI, 2003, [Deriving Architectural Tactics, Modifiability](https://www.sei.cmu.edu/documents/704/2003_005_001_14213.pdf) | 책임 변경과 변경 전파가 개발 및 시험 비용에 미치는 영향 |</a:t>
-            </a:r>
-          </a:p>
-          <a:p xmlns:a="http://schemas.openxmlformats.org/drawingml/2006/main">
-            <a:r>
-              <a:t>| S06 | Samsung, [Galaxy Book6 Ultra NP960UJH-XG3IN 공식 사양](https://www.samsung.com/in/computers/galaxy-book/galaxy-book6-ultra-ultra-7-32gb-1tb-np960ujh-xg3in/) | 32GB LPDDR5X RAM, RTX 5070 Laptop 전용 8GB GDDR7 |</a:t>
-            </a:r>
-          </a:p>
-          <a:p xmlns:a="http://schemas.openxmlformats.org/drawingml/2006/main">
-            <a:r>
-              <a:t>| S07 | Lin et al., [AWQ](https://arxiv.org/abs/2306.00978) | 4bit LLM 양자화와 장치 배포의 연구 근거 |</a:t>
-            </a:r>
-          </a:p>
-          <a:p xmlns:a="http://schemas.openxmlformats.org/drawingml/2006/main">
-            <a:r>
-              <a:t>| S08 | Candea et al., OSDI 2004, [Microreboot: A Technique for Cheap Recovery](https://www.usenix.org/legacy/events/osdi04/tech/full_papers/candea/candea_html/index.html) | 상태와 실행을 분리하여 작은 실행 단위를 복구하는 구조 |</a:t>
-            </a:r>
-          </a:p>
-          <a:p xmlns:a="http://schemas.openxmlformats.org/drawingml/2006/main">
-            <a:r>
-              <a:t>| S09 | OpenTelemetry, [General SDK Configuration](https://opentelemetry.io/docs/languages/sdk-configuration/general/) | always_on 및 parentbased_always_on sampler 설정 |</a:t>
-            </a:r>
-          </a:p>
-          <a:p xmlns:a="http://schemas.openxmlformats.org/drawingml/2006/main">
-            <a:r>
-              <a:t>| S10 | NIST, [SP 800-53 Rev. 5](https://doi.org/10.6028/NIST.SP.800-53r5), AC-3 및 AC-6 | 승인된 접근의 집행과 최소 권한 |</a:t>
-            </a:r>
-          </a:p>
-          <a:p xmlns:a="http://schemas.openxmlformats.org/drawingml/2006/main">
-            <a:r>
-              <a:t/>
-            </a:r>
-          </a:p>
-          <a:p xmlns:a="http://schemas.openxmlformats.org/drawingml/2006/main">
-            <a:r>
-              <a:t>실제 시간 endpoint는 [event-boundary-contract](../../architecture/11-measurement/event-boundary-contract.md), 기존 의미와 qualification은 [core-asr-contract](../../architecture/08-quality-attributes/core-asr-contract.md)를 함께 읽는다. 이번 목표 제안이 기존 QA ID와 집계를 자동으로 대체하지 않는다.</a:t>
+              <a:t>| S00 | [VIA 대표 UC](../../architecture/05-representative-use-cases.md), [고정 범위](../../architecture/03-fixed-architecture-scope.md), [V 품질 시나리오](../../architecture/12-decisions/decision-packages/03-00-quality-scenarios.md) | 필수 변형 94개, 책임 경계와 원래 순위 및 정보 사용 계약 |</a:t>
+            </a:r>
+          </a:p>
+          <a:p xmlns:a="http://schemas.openxmlformats.org/drawingml/2006/main">
+            <a:r>
+              <a:t>| S01 | Nexusflow, [NexusRaven-13B 공식 구현 README](https://github.com/nexusflowai/NexusRaven#introducing-nexusraven-13b) | demonstration retrieval 결합 보안 도구 사용에서 개발팀 보고 성공률 95% |</a:t>
+            </a:r>
+          </a:p>
+          <a:p xmlns:a="http://schemas.openxmlformats.org/drawingml/2006/main">
+            <a:r>
+              <a:t>| S02 | Yao et al., 2024, [tau-bench](https://arxiv.org/abs/2406.12045) | 대화와 실제 상태를 대조한 전체 시험 성공 판정 |</a:t>
+            </a:r>
+          </a:p>
+          <a:p xmlns:a="http://schemas.openxmlformats.org/drawingml/2006/main">
+            <a:r>
+              <a:t>| S03 | Cao et al., 2026, [Clarify or Answer](https://arxiv.org/abs/2601.16400) | 필요한 경우 단일 집중 질문을 사용하는 접근, preprint |</a:t>
+            </a:r>
+          </a:p>
+          <a:p xmlns:a="http://schemas.openxmlformats.org/drawingml/2006/main">
+            <a:r>
+              <a:t>| S04 | Jakob Nielsen, 2019, [The 3 Response Time Limits in Interaction Design](https://www.nngroup.com/videos/3-response-time-limits-interaction-design/) | 0.1초, 1초와 10초 상호작용 시간 기준 |</a:t>
+            </a:r>
+          </a:p>
+          <a:p xmlns:a="http://schemas.openxmlformats.org/drawingml/2006/main">
+            <a:r>
+              <a:t>| S05 | SEI, 2003, [Deriving Architectural Tactics](https://www.sei.cmu.edu/documents/704/2003_005_001_14213.pdf) | 책임 변경과 변경 전파에 따른 수정 및 시험 비용 |</a:t>
+            </a:r>
+          </a:p>
+          <a:p xmlns:a="http://schemas.openxmlformats.org/drawingml/2006/main">
+            <a:r>
+              <a:t>| S06 | Samsung, [Galaxy Book6 Ultra NP960UJH-XG3IN 공식 사양](https://www.samsung.com/in/computers/galaxy-book/galaxy-book6-ultra-ultra-7-32gb-1tb-np960ujh-xg3in/) | RAM 32GB, 전용 VRAM 8GB, 화면 2880 × 1800, NVMe 1TB |</a:t>
+            </a:r>
+          </a:p>
+          <a:p xmlns:a="http://schemas.openxmlformats.org/drawingml/2006/main">
+            <a:r>
+              <a:t>| S07 | Lin et al., [AWQ](https://arxiv.org/abs/2306.00978) | 4bit LLM 양자화와 장치 배포 |</a:t>
+            </a:r>
+          </a:p>
+          <a:p xmlns:a="http://schemas.openxmlformats.org/drawingml/2006/main">
+            <a:r>
+              <a:t>| S08 | Candea et al., OSDI 2004, [Microreboot](https://www.usenix.org/legacy/events/osdi04/tech/full_papers/candea/candea_html/index.html) | 상태와 실행을 분리한 작은 실행 단위 복구 |</a:t>
+            </a:r>
+          </a:p>
+          <a:p xmlns:a="http://schemas.openxmlformats.org/drawingml/2006/main">
+            <a:r>
+              <a:t>| S09 | OpenTelemetry, [General SDK Configuration](https://opentelemetry.io/docs/languages/sdk-configuration/general/) | 전수 root trace를 위한 always_on 설정 |</a:t>
+            </a:r>
+          </a:p>
+          <a:p xmlns:a="http://schemas.openxmlformats.org/drawingml/2006/main">
+            <a:r>
+              <a:t>| S10 | NIST, [SP 800-53 Rev. 5](https://doi.org/10.6028/NIST.SP.800-53r5), AC-3 및 AC-6 | 승인된 접근 집행과 최소 권한 |</a:t>
+            </a:r>
+          </a:p>
+          <a:p xmlns:a="http://schemas.openxmlformats.org/drawingml/2006/main">
+            <a:r>
+              <a:t>| S11 | Mao et al., [BFCL V3 공식 평가 설명](https://gorilla.cs.berkeley.edu/blogs/13_bfcl_v3_multi_turn.html#evaluation-metrics) | multi-turn의 상태와 응답 검사 및 전체 턴 성공 판정 |</a:t>
+            </a:r>
+          </a:p>
+          <a:p xmlns:a="http://schemas.openxmlformats.org/drawingml/2006/main">
+            <a:r>
+              <a:t>| S12 | Qwen, [Qwen3-14B config.json](https://huggingface.co/Qwen/Qwen3-14B/blob/main/config.json) | layer 40, KV head 8, head dimension 128과 bfloat16 |</a:t>
+            </a:r>
+          </a:p>
+          <a:p xmlns:a="http://schemas.openxmlformats.org/drawingml/2006/main">
+            <a:r>
+              <a:t/>
+            </a:r>
+          </a:p>
+          <a:p xmlns:a="http://schemas.openxmlformats.org/drawingml/2006/main">
+            <a:r>
+              <a:t>기존 [core-asr-contract](../../architecture/08-quality-attributes/core-asr-contract.md)와 [event-boundary-contract](../../architecture/11-measurement/event-boundary-contract.md)는 기존 QA의 계약으로 보존한다. 이번 V의 실제 오답 endpoint와 평균 및 관측 종료 규칙을 해당 QA의 결과로 재명명하지 않는다.</a:t>
             </a:r>
           </a:p>
           <a:p xmlns:a="http://schemas.openxmlformats.org/drawingml/2006/main">
@@ -2418,7 +3173,7 @@
           </a:p>
           <a:p xmlns:a="http://schemas.openxmlformats.org/drawingml/2006/main">
             <a:r>
-              <a:t>측정: 고정된 논리 요소 목록에서 추가, 수정, 삭제한 요소의 합집합을 센다. MH는 실제 과제로 보정한 a+bN으로, MM는 MH를 조직의 월 표준시간으로 나눠 환산한다.</a:t>
+              <a:t>측정: 기존 Architecture Element 계약의 C/I/S/D 책임 단위를 후보 간 대응시킨 뒤 여섯 과제의 추가, 수정, 삭제 요소 합집합을 센다. 큰 Module에 독립 책임이 여러 개면 여러 요소로 센다. MH=a+bN은 실제 작업시간으로 보정한다.</a:t>
             </a:r>
           </a:p>
           <a:p xmlns:a="http://schemas.openxmlformats.org/drawingml/2006/main">
@@ -2428,7 +3183,7 @@
           </a:p>
           <a:p xmlns:a="http://schemas.openxmlformats.org/drawingml/2006/main">
             <a:r>
-              <a:t>S05: SEI, 2003, [Deriving Architectural Tactics, Modifiability](https://www.sei.cmu.edu/documents/704/2003_005_001_14213.pdf)</a:t>
+              <a:t>S05: SEI, 2003, [Deriving Architectural Tactics](https://www.sei.cmu.edu/documents/704/2003_005_001_14213.pdf)</a:t>
             </a:r>
           </a:p>
           <a:p xmlns:a="http://schemas.openxmlformats.org/drawingml/2006/main">
@@ -2448,7 +3203,7 @@
           </a:p>
           <a:p xmlns:a="http://schemas.openxmlformats.org/drawingml/2006/main">
             <a:r>
-              <a:t>설명: 상시 실행 중에도 다른 PC 작업을 위한 메모리를 남겨야 한다.</a:t>
+              <a:t>설명: 상시 실행에 필요한 메모리를 제한해야 한다.</a:t>
             </a:r>
           </a:p>
           <a:p xmlns:a="http://schemas.openxmlformats.org/drawingml/2006/main">
@@ -2458,12 +3213,12 @@
           </a:p>
           <a:p xmlns:a="http://schemas.openxmlformats.org/drawingml/2006/main">
             <a:r>
-              <a:t>목표 근거: Galaxy Book6 Ultra 32GB RAM 구성에서 OS 6GB, 다른 앱 6GB, 여유 4GB를 예약해 VIA에 16GB를 배정한다. 예약량은 측정 사실이 아닌 공개한 설계 예산이다.</a:t>
-            </a:r>
-          </a:p>
-          <a:p xmlns:a="http://schemas.openxmlformats.org/drawingml/2006/main">
-            <a:r>
-              <a:t>측정: 공유 Omni 전체 가중치와 모든 helper, KV, UI, 입력 버퍼 및 실제 복제본을 합산한다. 전용 GPU는 더하고 같은 물리 메모리의 중복 매핑은 한 번만 센다.</a:t>
+              <a:t>목표 근거: 삼성 32GB RAM과 전용 VRAM 8GB 구성을 기준으로, VIA의 가중치 8GB와 KV 3GB 및 실행과 버퍼 5GB를 합해 16GB를 제안한다. 가중치 bytes 식과 공개 Qwen KV 구조로 계산하며 임의의 타 앱 예약량을 사용하지 않는다.</a:t>
+            </a:r>
+          </a:p>
+          <a:p xmlns:a="http://schemas.openxmlformats.org/drawingml/2006/main">
+            <a:r>
+              <a:t>측정: 가중치 8GB, KV 3GB, 실행 workspace 3GB, 관측과 UI 1GB, 로딩 중 복제 1GB의 총예산을 검사한다. CPU와 GPU의 실제 고유 물리 사용량을 합산하며 전체 helper와 background 상태를 포함한다.</a:t>
             </a:r>
           </a:p>
           <a:p xmlns:a="http://schemas.openxmlformats.org/drawingml/2006/main">
@@ -2483,6 +3238,11 @@
           </a:p>
           <a:p xmlns:a="http://schemas.openxmlformats.org/drawingml/2006/main">
             <a:r>
+              <a:t>S12: Qwen, [Qwen3-14B config.json](https://huggingface.co/Qwen/Qwen3-14B/blob/main/config.json)</a:t>
+            </a:r>
+          </a:p>
+          <a:p xmlns:a="http://schemas.openxmlformats.org/drawingml/2006/main">
+            <a:r>
               <a:t/>
             </a:r>
           </a:p>
@@ -2498,22 +3258,22 @@
           </a:p>
           <a:p xmlns:a="http://schemas.openxmlformats.org/drawingml/2006/main">
             <a:r>
-              <a:t>설명: 장애 뒤 기존 업무를 이어갈 수 있는 상태로 돌아와야 한다.</a:t>
-            </a:r>
-          </a:p>
-          <a:p xmlns:a="http://schemas.openxmlformats.org/drawingml/2006/main">
-            <a:r>
-              <a:t>목표: 최대 정상 복구시간 ≤ 10초</a:t>
-            </a:r>
-          </a:p>
-          <a:p xmlns:a="http://schemas.openxmlformats.org/drawingml/2006/main">
-            <a:r>
-              <a:t>목표 근거: Nielsen의 10초 주의 유지 한계를 복구 예산으로 제안한다. microreboot 연구는 상태와 실행을 분리한 빠른 복구의 근거이며 VIA의 모델 재로딩 속도를 증명하지 않는다.</a:t>
-            </a:r>
-          </a:p>
-          <a:p xmlns:a="http://schemas.openxmlformats.org/drawingml/2006/main">
-            <a:r>
-              <a:t>측정: 장애 주입부터 입력, 올바른 상태 확인, 다음 작업 재개까지의 최대 시간을 센다. 정상 복구하지 못한 시험은 무한대이며 cold 모델 재로딩도 포함한다.</a:t>
+              <a:t>설명: 장애 후 올바른 처리를 빠르게 재개해야 한다.</a:t>
+            </a:r>
+          </a:p>
+          <a:p xmlns:a="http://schemas.openxmlformats.org/drawingml/2006/main">
+            <a:r>
+              <a:t>목표: 평균 복구시간 ≤ 10초</a:t>
+            </a:r>
+          </a:p>
+          <a:p xmlns:a="http://schemas.openxmlformats.org/drawingml/2006/main">
+            <a:r>
+              <a:t>목표 근거: Nielsen의 10초 기준을 복구 대기 예산으로 선택한다. Microreboot는 실행과 상태를 분리한 복구의 구조적 근거이며 10초를 VIA의 실측 속도로 주장하지 않는다.</a:t>
+            </a:r>
+          </a:p>
+          <a:p xmlns:a="http://schemas.openxmlformats.org/drawingml/2006/main">
+            <a:r>
+              <a:t>측정: 장애 12종과 세 주입 지점을 네 번 반복한다. 정상 입력, 정확한 상태 조회와 다음 처리 probe를 모두 통과해야 복구이다. 안전 보류와 부분 복구를 구별하고 미복구는 실제 관측 종료시간과 미복구 상태를 기록한다.</a:t>
             </a:r>
           </a:p>
           <a:p xmlns:a="http://schemas.openxmlformats.org/drawingml/2006/main">
@@ -2528,7 +3288,7 @@
           </a:p>
           <a:p xmlns:a="http://schemas.openxmlformats.org/drawingml/2006/main">
             <a:r>
-              <a:t>S08: Candea et al., OSDI 2004, [Microreboot: A Technique for Cheap Recovery](https://www.usenix.org/legacy/events/osdi04/tech/full_papers/candea/candea_html/index.html)</a:t>
+              <a:t>S08: Candea et al., OSDI 2004, [Microreboot](https://www.usenix.org/legacy/events/osdi04/tech/full_papers/candea/candea_html/index.html)</a:t>
             </a:r>
           </a:p>
           <a:p xmlns:a="http://schemas.openxmlformats.org/drawingml/2006/main">
@@ -2548,22 +3308,22 @@
           </a:p>
           <a:p xmlns:a="http://schemas.openxmlformats.org/drawingml/2006/main">
             <a:r>
-              <a:t>설명: 실행 기록으로 요청의 처리 과정을 설명할 수 있어야 한다.</a:t>
-            </a:r>
-          </a:p>
-          <a:p xmlns:a="http://schemas.openxmlformats.org/drawingml/2006/main">
-            <a:r>
-              <a:t>목표: 실행 재구성률 = 100%</a:t>
-            </a:r>
-          </a:p>
-          <a:p xmlns:a="http://schemas.openxmlformats.org/drawingml/2006/main">
-            <a:r>
-              <a:t>목표 근거: 연구용 평가에서 전체 실행을 수집하도록 정하고 OpenTelemetry always_on 방식으로 전수 수집을 설계한다. 샘플링 설정만으로 재구성 완전성을 보장하지는 않는다.</a:t>
-            </a:r>
-          </a:p>
-          <a:p xmlns:a="http://schemas.openxmlformats.org/drawingml/2006/main">
-            <a:r>
-              <a:t>측정: 정상과 실패 시험 모두에서 입력, 해석, 상태 변화, 명령, 결과의 필수 연결을 독립 검사한다. 로그 없는 시험도 분모에 포함하고 원문 개인정보나 모델 내부 사고 과정 수집은 요구하지 않는다.</a:t>
+              <a:t>설명: 실행 기록으로 처리 경위를 쉽게 확인할 수 있어야 한다.</a:t>
+            </a:r>
+          </a:p>
+          <a:p xmlns:a="http://schemas.openxmlformats.org/drawingml/2006/main">
+            <a:r>
+              <a:t>목표: 처리 경위 확인율 = 100%</a:t>
+            </a:r>
+          </a:p>
+          <a:p xmlns:a="http://schemas.openxmlformats.org/drawingml/2006/main">
+            <a:r>
+              <a:t>목표 근거: 연구 시험의 모든 실행이 분석 대상이므로 확인율 100%를 계약 목표로 정한다. OpenTelemetry 전수 수집은 수단이며 독립 분석자의 정답 판정으로 실제 확인 가능성을 검사한다.</a:t>
+            </a:r>
+          </a:p>
+          <a:p xmlns:a="http://schemas.openxmlformats.org/drawingml/2006/main">
+            <a:r>
+              <a:t>측정: 로그와 기본 조회 도구만 제공한 독립 분석자가 고정 5분 세션에서 정상 처리 근거 또는 최초 오류 경계를 답한다. 입력, 근거 버전, 상태 변화, 전달과 확인된 분기 이유의 다섯 질문을 oracle과 대조한다.</a:t>
             </a:r>
           </a:p>
           <a:p xmlns:a="http://schemas.openxmlformats.org/drawingml/2006/main">
@@ -2608,7 +3368,7 @@
           </a:p>
           <a:p xmlns:a="http://schemas.openxmlformats.org/drawingml/2006/main">
             <a:r>
-              <a:t>측정: 권한 밖 읽기와 수신자 전달, 철회 뒤 사용, 삭제 뒤 검색과 KV 재사용 및 로그 노출을 시험한다. 허용된 Agent 전달의 정상 대조군도 함께 확인한다.</a:t>
+              <a:t>측정: 권한 밖 읽기, 목적 밖 사용, 수신자 변경, 철회, 삭제, 세션 혼입과 로그 노출의 12개 사례를 세 조건에서 네 번 반복한다. Prompt injection과 정책 변경 race를 포함하며 144개 허용 대조군을 별도로 수행한다.</a:t>
             </a:r>
           </a:p>
           <a:p xmlns:a="http://schemas.openxmlformats.org/drawingml/2006/main">
@@ -2623,7 +3383,7 @@
           </a:p>
           <a:p xmlns:a="http://schemas.openxmlformats.org/drawingml/2006/main">
             <a:r>
-              <a:t>S00: [VIA 대표 UC](../../architecture/05-representative-use-cases.md), [고정 범위](../../architecture/03-fixed-architecture-scope.md), [03-00 품질 시나리오](../../architecture/12-decisions/decision-packages/03-00-quality-scenarios.md)</a:t>
+              <a:t>S00: [VIA 대표 UC](../../architecture/05-representative-use-cases.md), [고정 범위](../../architecture/03-fixed-architecture-scope.md), [V 품질 시나리오](../../architecture/12-decisions/decision-packages/03-00-quality-scenarios.md)</a:t>
             </a:r>
           </a:p>
           <a:p xmlns:a="http://schemas.openxmlformats.org/drawingml/2006/main">
@@ -2648,97 +3408,152 @@
           </a:p>
           <a:p xmlns:a="http://schemas.openxmlformats.org/drawingml/2006/main">
             <a:r>
-              <a:t>작성일: 2026-10-06. 이 문서는 사용자의 리뷰를 반영한 **근거 기반 목표 제안**이다. VIA의 실측 결과나 동결된 측정 계약으로 해석하지 않는다.</a:t>
-            </a:r>
-          </a:p>
-          <a:p xmlns:a="http://schemas.openxmlformats.org/drawingml/2006/main">
-            <a:r>
-              <a:t/>
-            </a:r>
-          </a:p>
-          <a:p xmlns:a="http://schemas.openxmlformats.org/drawingml/2006/main">
-            <a:r>
-              <a:t>## 1. 발표 범위와 목표 설정 원칙</a:t>
-            </a:r>
-          </a:p>
-          <a:p xmlns:a="http://schemas.openxmlformats.org/drawingml/2006/main">
-            <a:r>
-              <a:t/>
-            </a:r>
-          </a:p>
-          <a:p xmlns:a="http://schemas.openxmlformats.org/drawingml/2006/main">
-            <a:r>
-              <a:t>V-01~10 중 기존 우선순위를 유지한 10개를 발표한다. V-08은 V-06보다 앞에 배치한다. 공동 순위 내부에는 추가 순위를 만들지 않는다. 각 항목은 하나의 품질 속성과 하나의 주지표만 가진다.</a:t>
-            </a:r>
-          </a:p>
-          <a:p xmlns:a="http://schemas.openxmlformats.org/drawingml/2006/main">
-            <a:r>
-              <a:t/>
-            </a:r>
-          </a:p>
-          <a:p xmlns:a="http://schemas.openxmlformats.org/drawingml/2006/main">
-            <a:r>
-              <a:t>V-11은 발표에서 제외하고, PC 공존 비용 중 메모리 부분만 V-06에 반영한다. 메모리 지표가 외부 시스템과의 상호운용성 전체를 평가하는 것은 아니다. V-12와 V-13도 현재 발표의 DP 연결이 약하다는 사용자 판단에 따라 제외한다. 원본 V 목록과 기존 Architecture 및 QA 계약은 그대로 보존한다.</a:t>
-            </a:r>
-          </a:p>
-          <a:p xmlns:a="http://schemas.openxmlformats.org/drawingml/2006/main">
-            <a:r>
-              <a:t/>
-            </a:r>
-          </a:p>
-          <a:p xmlns:a="http://schemas.openxmlformats.org/drawingml/2006/main">
-            <a:r>
-              <a:t>외부 논문의 결과를 VIA의 성능처럼 옮겨 적지 않는다. 각 목표는 아래에서 **출처가 실제로 말하는 사실**, **VIA의 목표로 선택한 이유**, **적용 한계**로 나눠 설명한다. 동일한 제품과 시험이 없는 항목에는 출처의 원칙이나 장치 사양을 바탕으로 VIA의 예산을 계산한다. 특히 90%, 3개, 16GB는 외부 문헌이 VIA에 직접 규정한 수치가 아니다.</a:t>
-            </a:r>
-          </a:p>
-          <a:p xmlns:a="http://schemas.openxmlformats.org/drawingml/2006/main">
-            <a:r>
-              <a:t/>
-            </a:r>
-          </a:p>
-          <a:p xmlns:a="http://schemas.openxmlformats.org/drawingml/2006/main">
-            <a:r>
-              <a:t>100%는 고정 계약의 완전 지원과 연구용 시험 기록의 전수 재구성을 뜻한다. 0건은 고정 권한 계약의 금지 사건 예산이다. 둘 다 미래의 모든 입력이나 모든 공격에 대한 보증을 뜻하지 않는다. 목표를 달성하지 못한 대안도 결과와 비용을 보존하며, 이 발표만으로 후보 탈락이나 승자를 결정하지 않는다.</a:t>
-            </a:r>
-          </a:p>
-          <a:p xmlns:a="http://schemas.openxmlformats.org/drawingml/2006/main">
-            <a:r>
-              <a:t/>
-            </a:r>
-          </a:p>
-          <a:p xmlns:a="http://schemas.openxmlformats.org/drawingml/2006/main">
-            <a:r>
-              <a:t>## 2. 공통 모집단과 시험 조건</a:t>
-            </a:r>
-          </a:p>
-          <a:p xmlns:a="http://schemas.openxmlformats.org/drawingml/2006/main">
-            <a:r>
-              <a:t/>
-            </a:r>
-          </a:p>
-          <a:p xmlns:a="http://schemas.openxmlformats.org/drawingml/2006/main">
-            <a:r>
-              <a:t>### 2.1 기능 모집단</a:t>
-            </a:r>
-          </a:p>
-          <a:p xmlns:a="http://schemas.openxmlformats.org/drawingml/2006/main">
-            <a:r>
-              <a:t/>
-            </a:r>
-          </a:p>
-          <a:p xmlns:a="http://schemas.openxmlformats.org/drawingml/2006/main">
-            <a:r>
-              <a:t>[대표 UC 원문](../../architecture/05-representative-use-cases.md)은 UC 18개와 필수 변형 94개를 포함한다. 기능 단위는 가장 구체적인 필수 변형으로 잡는다. 상위 UC를 다시 합산한 112개를 분모로 쓰면 동일 기능을 두 번 센다.</a:t>
-            </a:r>
-          </a:p>
-          <a:p xmlns:a="http://schemas.openxmlformats.org/drawingml/2006/main">
-            <a:r>
-              <a:t/>
-            </a:r>
-          </a:p>
-          <a:p xmlns:a="http://schemas.openxmlformats.org/drawingml/2006/main">
-            <a:r>
-              <a:t>| UC | 필수 변형 수 | UC | 필수 변형 수 | UC | 필수 변형 수 |</a:t>
+              <a:t>작성일: 2026-10-06. **발표용 목표와 평가 설계 제안이며 구현 결과, 실측 결과 또는 동결된 측정 계약이 아니다.** 기존 Architecture, QA 및 ADR와 비교안의 미선정 상태를 보존한다.</a:t>
+            </a:r>
+          </a:p>
+          <a:p xmlns:a="http://schemas.openxmlformats.org/drawingml/2006/main">
+            <a:r>
+              <a:t/>
+            </a:r>
+          </a:p>
+          <a:p xmlns:a="http://schemas.openxmlformats.org/drawingml/2006/main">
+            <a:r>
+              <a:t>## 1. 발표 기준</a:t>
+            </a:r>
+          </a:p>
+          <a:p xmlns:a="http://schemas.openxmlformats.org/drawingml/2006/main">
+            <a:r>
+              <a:t/>
+            </a:r>
+          </a:p>
+          <a:p xmlns:a="http://schemas.openxmlformats.org/drawingml/2006/main">
+            <a:r>
+              <a:t>원본 V의 순위와 ID를 유지하고 V-01~10을 발표한다. V-08은 V-06보다 앞에 배치한다. 공동 순위 안에는 추가 우열이 없다. 각 행에는 하나의 품질명, 짧은 한 문장 설명과 하나의 수치 목표를 둔다. V-11~13은 사용자 검토에 따라 발표에서 제외한다. V-11의 메모리 비용을 V-06에서 확인하되 상호운용성 전체를 메모리로 대체하지 않는다.</a:t>
+            </a:r>
+          </a:p>
+          <a:p xmlns:a="http://schemas.openxmlformats.org/drawingml/2006/main">
+            <a:r>
+              <a:t/>
+            </a:r>
+          </a:p>
+          <a:p xmlns:a="http://schemas.openxmlformats.org/drawingml/2006/main">
+            <a:r>
+              <a:t>목표의 근거는 세 종류로 구분한다. **구현 참조값**은 다른 시스템의 공개 결과를 VIA가 지향할 수준으로 선택한 값이다. **계약 목표**는 고정된 필수 기능과 금지 사건에서 정한다. **설계 예산**은 장치 사양이나 사용자 시간 기준을 바탕으로 VIA의 허용 비용을 계산한다. 예산 항목과 계산은 공개하며 문헌이 VIA에 그 숫자를 직접 규정했다고 주장하지 않는다.</a:t>
+            </a:r>
+          </a:p>
+          <a:p xmlns:a="http://schemas.openxmlformats.org/drawingml/2006/main">
+            <a:r>
+              <a:t/>
+            </a:r>
+          </a:p>
+          <a:p xmlns:a="http://schemas.openxmlformats.org/drawingml/2006/main">
+            <a:r>
+              <a:t>| ID | 목표 유형 | 선택 근거 |</a:t>
+            </a:r>
+          </a:p>
+          <a:p xmlns:a="http://schemas.openxmlformats.org/drawingml/2006/main">
+            <a:r>
+              <a:t>| --- | --- | --- |</a:t>
+            </a:r>
+          </a:p>
+          <a:p xmlns:a="http://schemas.openxmlformats.org/drawingml/2006/main">
+            <a:r>
+              <a:t>| V-01 | 구현 참조값 | NexusRaven의 검색을 결합한 도구 사용 성공률 95% [S01] |</a:t>
+            </a:r>
+          </a:p>
+          <a:p xmlns:a="http://schemas.openxmlformats.org/drawingml/2006/main">
+            <a:r>
+              <a:t>| V-02 | 상호작용 예산 | 필요한 경우 하나의 집중 질문을 쓰는 CoA 방식 [S03] |</a:t>
+            </a:r>
+          </a:p>
+          <a:p xmlns:a="http://schemas.openxmlformats.org/drawingml/2006/main">
+            <a:r>
+              <a:t>| V-03 | 기능 계약 | 고정된 필수 UC 변형 94개 전부 [S00] |</a:t>
+            </a:r>
+          </a:p>
+          <a:p xmlns:a="http://schemas.openxmlformats.org/drawingml/2006/main">
+            <a:r>
+              <a:t>| V-04 | 시간 예산 | Nielsen의 1초 상호작용 기준 [S04] |</a:t>
+            </a:r>
+          </a:p>
+          <a:p xmlns:a="http://schemas.openxmlformats.org/drawingml/2006/main">
+            <a:r>
+              <a:t>| V-05 | 처리 예산 | Nielsen의 10초 기준을 참고한 VIA 추가 처리 예산 [S04] |</a:t>
+            </a:r>
+          </a:p>
+          <a:p xmlns:a="http://schemas.openxmlformats.org/drawingml/2006/main">
+            <a:r>
+              <a:t>| V-08 | 변경 예산 | SEI 변경 전파 원칙을 책임, 계약, 소비자 세 요소로 구체화 [S05] |</a:t>
+            </a:r>
+          </a:p>
+          <a:p xmlns:a="http://schemas.openxmlformats.org/drawingml/2006/main">
+            <a:r>
+              <a:t>| V-06 | 메모리 예산 | 삼성 32GB RAM / 8GB VRAM 사양과 가중치 및 KV 계산 [S06, S07, S12] |</a:t>
+            </a:r>
+          </a:p>
+          <a:p xmlns:a="http://schemas.openxmlformats.org/drawingml/2006/main">
+            <a:r>
+              <a:t>| V-07 | 복구 예산 | 10초 시간 예산과 작은 실행 단위 복구의 구조적 근거 [S04, S08] |</a:t>
+            </a:r>
+          </a:p>
+          <a:p xmlns:a="http://schemas.openxmlformats.org/drawingml/2006/main">
+            <a:r>
+              <a:t>| V-09 | 연구 기록 계약 | 모든 시험의 처리 경위를 독립 분석자가 확인 [S09] |</a:t>
+            </a:r>
+          </a:p>
+          <a:p xmlns:a="http://schemas.openxmlformats.org/drawingml/2006/main">
+            <a:r>
+              <a:t>| V-10 | 정보 사용 계약 | 승인된 접근과 최소 권한에서 금지 사건 예산 0건 [S00, S10] |</a:t>
+            </a:r>
+          </a:p>
+          <a:p xmlns:a="http://schemas.openxmlformats.org/drawingml/2006/main">
+            <a:r>
+              <a:t/>
+            </a:r>
+          </a:p>
+          <a:p xmlns:a="http://schemas.openxmlformats.org/drawingml/2006/main">
+            <a:r>
+              <a:t>VIA와 동일한 제품 및 시험에서 산출한 외부 기준은 없다. 그러므로 이 목표들은 달성 사실이나 달성 가능성의 증명이 아니다. 목표를 정한 뒤 실제 시험으로 검증할 값이다. 정확도와 메모리 또는 속도가 충돌하면 실패와 비용을 모두 공개한다. 특정 숫자를 통과시키려고 기능 범위나 출력 내용을 사후 축소하지 않는다.</a:t>
+            </a:r>
+          </a:p>
+          <a:p xmlns:a="http://schemas.openxmlformats.org/drawingml/2006/main">
+            <a:r>
+              <a:t/>
+            </a:r>
+          </a:p>
+          <a:p xmlns:a="http://schemas.openxmlformats.org/drawingml/2006/main">
+            <a:r>
+              <a:t>## 2. 전체 평가 조건</a:t>
+            </a:r>
+          </a:p>
+          <a:p xmlns:a="http://schemas.openxmlformats.org/drawingml/2006/main">
+            <a:r>
+              <a:t/>
+            </a:r>
+          </a:p>
+          <a:p xmlns:a="http://schemas.openxmlformats.org/drawingml/2006/main">
+            <a:r>
+              <a:t>### 2.1 모집단과 집계</a:t>
+            </a:r>
+          </a:p>
+          <a:p xmlns:a="http://schemas.openxmlformats.org/drawingml/2006/main">
+            <a:r>
+              <a:t/>
+            </a:r>
+          </a:p>
+          <a:p xmlns:a="http://schemas.openxmlformats.org/drawingml/2006/main">
+            <a:r>
+              <a:t>[대표 UC](../../architecture/05-representative-use-cases.md)의 UC 18개 아래 **필수 변형 94개**를 기능 모수로 잡는다. 상위 UC를 다시 더하면 같은 기능을 중복 집계한다. 정확한 ID는 [functional-coverage.json](functional-coverage.json)에 보존한다.</a:t>
+            </a:r>
+          </a:p>
+          <a:p xmlns:a="http://schemas.openxmlformats.org/drawingml/2006/main">
+            <a:r>
+              <a:t/>
+            </a:r>
+          </a:p>
+          <a:p xmlns:a="http://schemas.openxmlformats.org/drawingml/2006/main">
+            <a:r>
+              <a:t>| UC | 변형 수 | UC | 변형 수 | UC | 변형 수 |</a:t>
             </a:r>
           </a:p>
           <a:p xmlns:a="http://schemas.openxmlformats.org/drawingml/2006/main">
@@ -2783,117 +3598,437 @@
           </a:p>
           <a:p xmlns:a="http://schemas.openxmlformats.org/drawingml/2006/main">
             <a:r>
-              <a:t>[functional-coverage.json](functional-coverage.json)에 94개 ID를 고정한다. 각 변형을 구체적인 상황 5개로 만들고 각 상황을 4회 반복하여 **94 × 5 × 4 = 1,880회**를 제안한다. 5개는 정답이 같은 단순 문장 복사 대신 표현, 참조 대상, 업무 이력, 화면 상황과 사건 순서를 바꾸되 해당 변형의 필수 동작을 유지한다. 변형 자체가 음성 전용이면 텍스트 사례를 억지로 추가하지 않는다. 오류나 예외가 원래 변형이면 기대되는 거절 또는 보류를 정답으로 정한다.</a:t>
-            </a:r>
-          </a:p>
-          <a:p xmlns:a="http://schemas.openxmlformats.org/drawingml/2006/main">
-            <a:r>
-              <a:t/>
-            </a:r>
-          </a:p>
-          <a:p xmlns:a="http://schemas.openxmlformats.org/drawingml/2006/main">
-            <a:r>
-              <a:t>다섯 사례와 네 반복은 시험 규모 선택이며 논문이 규정한 값이 아니다. 동일 사례를 무작위 순서와 같은 seed 집합으로 모든 후보에 적용한다. 분석 시 94개 변형이 동일한 가중치를 갖는다. 아직 구체 입력 fixture나 실행 runner는 만들지 않았으며, JSON은 시험 목록 설계이다.</a:t>
-            </a:r>
-          </a:p>
-          <a:p xmlns:a="http://schemas.openxmlformats.org/drawingml/2006/main">
-            <a:r>
-              <a:t/>
-            </a:r>
-          </a:p>
-          <a:p xmlns:a="http://schemas.openxmlformats.org/drawingml/2006/main">
-            <a:r>
-              <a:t>한 시험은 하나의 사용자 목표를 위한 상호작용 전체이다. 정정, 질문 답변, 후속 제어가 있더라도 같은 목표의 시험에 포함한다. 모델 호출, tool 호출이나 하위 Task를 별도 성공 표본으로 늘리지 않는다. 사용자가 독립적인 새 목표를 자발적으로 추가하면 새 시험으로 구분한다.</a:t>
-            </a:r>
-          </a:p>
-          <a:p xmlns:a="http://schemas.openxmlformats.org/drawingml/2006/main">
-            <a:r>
-              <a:t/>
-            </a:r>
-          </a:p>
-          <a:p xmlns:a="http://schemas.openxmlformats.org/drawingml/2006/main">
-            <a:r>
-              <a:t>### 2.2 정답과 외부 경계</a:t>
-            </a:r>
-          </a:p>
-          <a:p xmlns:a="http://schemas.openxmlformats.org/drawingml/2006/main">
-            <a:r>
-              <a:t/>
-            </a:r>
-          </a:p>
-          <a:p xmlns:a="http://schemas.openxmlformats.org/drawingml/2006/main">
-            <a:r>
-              <a:t>각 사례에는 시험 전 정답 manifest를 작성한다. 필드는 기대 의도, 대상, Conversation과 Task 연결, 요청 관계, 수정 범위, 허용 처리, 상태 변화, 필요한 결과 전달이다. 적용하지 않는 필드는 실행 전에 이유를 명시한다. 두 검토자가 기대 상태를 작성하고 불일치를 해결한 뒤 후보에 동일하게 적용한다. 후보가 내놓은 문장을 정답으로 삼지 않는다.</a:t>
-            </a:r>
-          </a:p>
-          <a:p xmlns:a="http://schemas.openxmlformats.org/drawingml/2006/main">
-            <a:r>
-              <a:t/>
-            </a:r>
-          </a:p>
-          <a:p xmlns:a="http://schemas.openxmlformats.org/drawingml/2006/main">
-            <a:r>
-              <a:t>Downstream Agent는 동일한 capability와 성공, 실패, 지연, 중복 알림 script를 제공하는 결정적 simulator로 고정한다. VIA가 받는 외부 결과와 실행 사실을 oracle에 기록한다. Agent 내부의 도메인 답변 품질을 VIA 성공률에 섞지 않는다. VIA의 잘못된 위임, 업무 연결, 상태 판단이나 결과 전달은 포함한다.</a:t>
-            </a:r>
-          </a:p>
-          <a:p xmlns:a="http://schemas.openxmlformats.org/drawingml/2006/main">
-            <a:r>
-              <a:t/>
-            </a:r>
-          </a:p>
-          <a:p xmlns:a="http://schemas.openxmlformats.org/drawingml/2006/main">
-            <a:r>
-              <a:t>시험 timeout은 최종 외부 사건 후 60초의 VIA 책임 시간으로 제안한다. 시간 목표 1초 또는 10초와 구분되는 관측 종료 조건이다. timeout과 crash도 전체 목록에 남긴다. 미지원, 미확인, 로그 누락을 성공 표본에서 제거하지 않는다. 실제 평가 전에 사례 manifest, seed, timeout, 환경 및 집계를 함께 확정한다.</a:t>
-            </a:r>
-          </a:p>
-          <a:p xmlns:a="http://schemas.openxmlformats.org/drawingml/2006/main">
-            <a:r>
-              <a:t/>
-            </a:r>
-          </a:p>
-          <a:p xmlns:a="http://schemas.openxmlformats.org/drawingml/2006/main">
-            <a:r>
-              <a:t>### 2.3 장치와 부하</a:t>
-            </a:r>
-          </a:p>
-          <a:p xmlns:a="http://schemas.openxmlformats.org/drawingml/2006/main">
-            <a:r>
-              <a:t/>
-            </a:r>
-          </a:p>
-          <a:p xmlns:a="http://schemas.openxmlformats.org/drawingml/2006/main">
-            <a:r>
-              <a:t>삼성 Galaxy Book6 Ultra NP960UJH-XG3IN의 32GB RAM, RTX 5070 Laptop 전용 GPU 8GB, Windows 11 구성을 발표의 장치 예산 기준으로 삼는다 [S06]. 실제 시험 장치는 모델명, BIOS, OS build, driver, 전력 모드, CPU, GPU, 저장장치와 사용 가능한 물리 메모리를 별도 기록한다. 다른 장치의 결과를 같은 장치 실적으로 표시하지 않는다.</a:t>
-            </a:r>
-          </a:p>
-          <a:p xmlns:a="http://schemas.openxmlformats.org/drawingml/2006/main">
-            <a:r>
-              <a:t/>
-            </a:r>
-          </a:p>
-          <a:p xmlns:a="http://schemas.openxmlformats.org/drawingml/2006/main">
-            <a:r>
-              <a:t>Omni와 Streaming ASR 및 모든 helper의 버전, 파라미터 수, 정밀도, 실제 파일 크기와 loaded bytes를 기록한다. 하나의 공유 Omni 가중치를 전제하고 역할별 Context와 KV의 실제 비용을 포함한다. 모델 호출량이나 의미 지원 범위를 줄여 메모리만 통과한 구성은 V-01과 V-03의 결과에서 드러나야 한다.</a:t>
-            </a:r>
-          </a:p>
-          <a:p xmlns:a="http://schemas.openxmlformats.org/drawingml/2006/main">
-            <a:r>
-              <a:t/>
-            </a:r>
-          </a:p>
-          <a:p xmlns:a="http://schemas.openxmlformats.org/drawingml/2006/main">
-            <a:r>
-              <a:t>시험 부하는 한 개의 활성 대화, 미완료 Task 네 개, 동시에 진행하는 외부 실행 두 개를 기본 profile로 제안한다. 이는 현재 측정된 수용량이 아닌 명시적인 비교 조건이다. 더 큰 부하는 별도 민감도 시험으로 공개한다. 입력 시간축과 최대 retained Context, KV, 화면 근거, 오디오 버퍼의 설정을 manifest에 적어 임의의 cache 한도 차이가 결과를 결정하지 않도록 한다.</a:t>
-            </a:r>
-          </a:p>
-          <a:p xmlns:a="http://schemas.openxmlformats.org/drawingml/2006/main">
-            <a:r>
-              <a:t/>
-            </a:r>
-          </a:p>
-          <a:p xmlns:a="http://schemas.openxmlformats.org/drawingml/2006/main">
-            <a:r>
-              <a:t>Cold 시작, warm 요청, 연속 정정, Task 전환, 음성 출력 중 새 입력, 재접속 및 장시간 background 상태를 분리해서 표시한다. 전체 평균만 공개해 어려운 조건을 숨기지 않는다.</a:t>
+              <a:t>기능 회귀 시험은 변형별 구체 사례 5개와 반복 4회로 **94 × 5 × 4 = 1,880회**를 설계한다. 각 변형의 다섯 사례는 표현, 대상의 혼동 가능성, 이력 길이, 허용된 화면 근거와 사건 순서를 바꾼다. 음성 전용 변형에 텍스트를 강제로 배정하지 않는다. 예외 변형의 올바른 거절과 보류는 정답이다. 잘못된 구현 때문에 정상 요청을 거절한 것은 실패다.</a:t>
+            </a:r>
+          </a:p>
+          <a:p xmlns:a="http://schemas.openxmlformats.org/drawingml/2006/main">
+            <a:r>
+              <a:t/>
+            </a:r>
+          </a:p>
+          <a:p xmlns:a="http://schemas.openxmlformats.org/drawingml/2006/main">
+            <a:r>
+              <a:t>각 사례는 하나의 사용자 목표를 위한 상호작용 전체다. 필요한 질문 답변과 정정 턴을 포함한다. 모델 호출, tool 호출, 하위 Task 수로 분모를 늘리지 않는다. 모든 반복을 포함하고 94개 변형은 동일한 가중치를 가진다. 다섯 사례와 네 반복은 재현 가능한 시험 규모의 제안이며 논문이 규정한 표본 수가 아니다. 1,880개 독립 사용자를 조사했다고 표현하지 않는다.</a:t>
+            </a:r>
+          </a:p>
+          <a:p xmlns:a="http://schemas.openxmlformats.org/drawingml/2006/main">
+            <a:r>
+              <a:t/>
+            </a:r>
+          </a:p>
+          <a:p xmlns:a="http://schemas.openxmlformats.org/drawingml/2006/main">
+            <a:r>
+              <a:t>다음 시험군은 전체 기능 평균에 섞지 않고 각각 보고한다. [evaluation-plan.json](evaluation-plan.json)은 시험군과 환경 및 DP별 구체 상황을 기록한다. 아직 실행 fixture나 runner를 구현하지 않았다.</a:t>
+            </a:r>
+          </a:p>
+          <a:p xmlns:a="http://schemas.openxmlformats.org/drawingml/2006/main">
+            <a:r>
+              <a:t/>
+            </a:r>
+          </a:p>
+          <a:p xmlns:a="http://schemas.openxmlformats.org/drawingml/2006/main">
+            <a:r>
+              <a:t>| 시험군 | 제안 규모 | 목적 |</a:t>
+            </a:r>
+          </a:p>
+          <a:p xmlns:a="http://schemas.openxmlformats.org/drawingml/2006/main">
+            <a:r>
+              <a:t>| --- | ---: | --- |</a:t>
+            </a:r>
+          </a:p>
+          <a:p xmlns:a="http://schemas.openxmlformats.org/drawingml/2006/main">
+            <a:r>
+              <a:t>| G-FUNC | 1,880회 | V-01~05의 공통 기능 및 상호작용 회귀 |</a:t>
+            </a:r>
+          </a:p>
+          <a:p xmlns:a="http://schemas.openxmlformats.org/drawingml/2006/main">
+            <a:r>
+              <a:t>| G-DP | 비교별 8개 상황 × 3개 조건 × 4회 = 96회 | 41~45의 실제 구조 차이에 민감한 조건 확인 |</a:t>
+            </a:r>
+          </a:p>
+          <a:p xmlns:a="http://schemas.openxmlformats.org/drawingml/2006/main">
+            <a:r>
+              <a:t>| G-CHANGE | 공통 변경 과제 6개 | V-08의 변경 영향 분석 |</a:t>
+            </a:r>
+          </a:p>
+          <a:p xmlns:a="http://schemas.openxmlformats.org/drawingml/2006/main">
+            <a:r>
+              <a:t>| G-MEM | 후보별 8시간 세션 3회 | 상시 동작과 반복 요청 및 최대 메모리 |</a:t>
+            </a:r>
+          </a:p>
+          <a:p xmlns:a="http://schemas.openxmlformats.org/drawingml/2006/main">
+            <a:r>
+              <a:t>| G-FAULT | 12종 × 3개 지점 × 4회 = 144회 | V-07의 올바른 복구 |</a:t>
+            </a:r>
+          </a:p>
+          <a:p xmlns:a="http://schemas.openxmlformats.org/drawingml/2006/main">
+            <a:r>
+              <a:t>| G-SEC | 금지 사례 144회와 허용 대조군 144회 | V-10의 무단 사용과 과도한 차단 확인 |</a:t>
+            </a:r>
+          </a:p>
+          <a:p xmlns:a="http://schemas.openxmlformats.org/drawingml/2006/main">
+            <a:r>
+              <a:t>| G-ANALYSIS | 위 시험의 고유 trial ID 전체 | V-09의 처리 경위 확인 |</a:t>
+            </a:r>
+          </a:p>
+          <a:p xmlns:a="http://schemas.openxmlformats.org/drawingml/2006/main">
+            <a:r>
+              <a:t/>
+            </a:r>
+          </a:p>
+          <a:p xmlns:a="http://schemas.openxmlformats.org/drawingml/2006/main">
+            <a:r>
+              <a:t>### 2.2 정답 계약과 입력</a:t>
+            </a:r>
+          </a:p>
+          <a:p xmlns:a="http://schemas.openxmlformats.org/drawingml/2006/main">
+            <a:r>
+              <a:t/>
+            </a:r>
+          </a:p>
+          <a:p xmlns:a="http://schemas.openxmlformats.org/drawingml/2006/main">
+            <a:r>
+              <a:t>각 구체 사례에는 실행 전에 다음 manifest를 작성한다. 두 검토자가 사용자 의도와 정답을 독립적으로 검토하고 불일치를 해결한다. 대안의 출력으로 정답을 만들지 않는다.</a:t>
+            </a:r>
+          </a:p>
+          <a:p xmlns:a="http://schemas.openxmlformats.org/drawingml/2006/main">
+            <a:r>
+              <a:t/>
+            </a:r>
+          </a:p>
+          <a:p xmlns:a="http://schemas.openxmlformats.org/drawingml/2006/main">
+            <a:r>
+              <a:t>| 항목 | 반드시 고정할 내용 |</a:t>
+            </a:r>
+          </a:p>
+          <a:p xmlns:a="http://schemas.openxmlformats.org/drawingml/2006/main">
+            <a:r>
+              <a:t>| --- | --- |</a:t>
+            </a:r>
+          </a:p>
+          <a:p xmlns:a="http://schemas.openxmlformats.org/drawingml/2006/main">
+            <a:r>
+              <a:t>| 식별 | case ID, UC 변형, DP 조건, 반복 seed, 독립 사용자 목표 |</a:t>
+            </a:r>
+          </a:p>
+          <a:p xmlns:a="http://schemas.openxmlformats.org/drawingml/2006/main">
+            <a:r>
+              <a:t>| 입력 | 실제 텍스트 또는 PCM 파일, 언어, 발화 시작과 종료, 화면과 pointer 사건 |</a:t>
+            </a:r>
+          </a:p>
+          <a:p xmlns:a="http://schemas.openxmlformats.org/drawingml/2006/main">
+            <a:r>
+              <a:t>| 초기 상태 | Conversation, Request, Task, Execution, 질문의 실제 제시 여부와 revision |</a:t>
+            </a:r>
+          </a:p>
+          <a:p xmlns:a="http://schemas.openxmlformats.org/drawingml/2006/main">
+            <a:r>
+              <a:t>| 근거 | source ID, 버전, 접근 범위, 삭제 및 권한 epoch, 누락된 범위 |</a:t>
+            </a:r>
+          </a:p>
+          <a:p xmlns:a="http://schemas.openxmlformats.org/drawingml/2006/main">
+            <a:r>
+              <a:t>| 의미 정답 | F1 의도, F2 대상, F3 대화와 Task 연결, F4 요청 관계, F5 수정 범위, F6 처리 방향 |</a:t>
+            </a:r>
+          </a:p>
+          <a:p xmlns:a="http://schemas.openxmlformats.org/drawingml/2006/main">
+            <a:r>
+              <a:t>| 상태 정답 | 허용된 상태 변화와 명령 및 외부 사실, 적용하지 않는 필드의 이유 |</a:t>
+            </a:r>
+          </a:p>
+          <a:p xmlns:a="http://schemas.openxmlformats.org/drawingml/2006/main">
+            <a:r>
+              <a:t>| 사용자 script | 필요한 답변, 승인, 오답 뒤 재요청과 수동 마무리, 실제 행동 단위 |</a:t>
+            </a:r>
+          </a:p>
+          <a:p xmlns:a="http://schemas.openxmlformats.org/drawingml/2006/main">
+            <a:r>
+              <a:t>| 출력 계약 | 필수 사실, artifact 접근, 실제 텍스트와 음성 전달 범위 및 오류 안내 |</a:t>
+            </a:r>
+          </a:p>
+          <a:p xmlns:a="http://schemas.openxmlformats.org/drawingml/2006/main">
+            <a:r>
+              <a:t>| 시간 조건 | 사건 기준점, 외부 알림 schedule, 관측 종료 및 fault 주입 지점 |</a:t>
+            </a:r>
+          </a:p>
+          <a:p xmlns:a="http://schemas.openxmlformats.org/drawingml/2006/main">
+            <a:r>
+              <a:t/>
+            </a:r>
+          </a:p>
+          <a:p xmlns:a="http://schemas.openxmlformats.org/drawingml/2006/main">
+            <a:r>
+              <a:t>한 턴이라도 필요한 의미, 상태 또는 전달이 틀리면 V-01의 해당 전체 시험은 실패다. 마지막 상태가 우연히 맞아 앞선 잘못된 전송을 가리지 않도록 각 턴을 검사한다. BFCL V3의 상태와 응답 검사 방식을 참고하되 [S11], API 호출 순서를 정답 하나로 강제하지 않는다. A의 ReAct나 B/C의 코드 조정 등 각 설계의 합법적인 경로를 허용한다.</a:t>
+            </a:r>
+          </a:p>
+          <a:p xmlns:a="http://schemas.openxmlformats.org/drawingml/2006/main">
+            <a:r>
+              <a:t/>
+            </a:r>
+          </a:p>
+          <a:p xmlns:a="http://schemas.openxmlformats.org/drawingml/2006/main">
+            <a:r>
+              <a:t>한국어를 기본 시험 언어로 한다. 한국어 입력과 영어 문서 또는 앱 이름이 섞인 상황을 포함한다. 음성 PCM은 동일 파일을 같은 입력 경계에 replay한다. 기본 조용한 음성 조건과 배경 소음 15dB SNR 조건을 구분한다. 이는 일반 사용자의 소음 분포를 주장하는 수치가 아니라 반복 가능한 시험 조건이다. 정답 Task ID를 시스템 입력에 미리 붙이지 않는다.</a:t>
+            </a:r>
+          </a:p>
+          <a:p xmlns:a="http://schemas.openxmlformats.org/drawingml/2006/main">
+            <a:r>
+              <a:t/>
+            </a:r>
+          </a:p>
+          <a:p xmlns:a="http://schemas.openxmlformats.org/drawingml/2006/main">
+            <a:r>
+              <a:t>Context 조건은 짧은 근거 1k 토큰 상당, 긴 근거 8k 토큰 상당과 관련 없는 후보 20개를 명시한다. 모델에 실제 주입한 토큰 수와 retrieval로 읽은 원본량은 각각 기록한다. 메모리 시험의 전체 KV 예산은 §9에서 따로 계산한다. 필수 정보를 잘라낸 구성은 정확성 및 완전성에서 실패한다.</a:t>
+            </a:r>
+          </a:p>
+          <a:p xmlns:a="http://schemas.openxmlformats.org/drawingml/2006/main">
+            <a:r>
+              <a:t/>
+            </a:r>
+          </a:p>
+          <a:p xmlns:a="http://schemas.openxmlformats.org/drawingml/2006/main">
+            <a:r>
+              <a:t>### 2.3 장치와 모델 및 출력</a:t>
+            </a:r>
+          </a:p>
+          <a:p xmlns:a="http://schemas.openxmlformats.org/drawingml/2006/main">
+            <a:r>
+              <a:t/>
+            </a:r>
+          </a:p>
+          <a:p xmlns:a="http://schemas.openxmlformats.org/drawingml/2006/main">
+            <a:r>
+              <a:t>| 항목 | 공통 제안 조건 |</a:t>
+            </a:r>
+          </a:p>
+          <a:p xmlns:a="http://schemas.openxmlformats.org/drawingml/2006/main">
+            <a:r>
+              <a:t>| --- | --- |</a:t>
+            </a:r>
+          </a:p>
+          <a:p xmlns:a="http://schemas.openxmlformats.org/drawingml/2006/main">
+            <a:r>
+              <a:t>| 장치 기준 | Samsung Galaxy Book6 Ultra NP960UJH-XG3IN, RAM 32GB, RTX 5070 Laptop 전용 VRAM 8GB, NVMe 1TB [S06] |</a:t>
+            </a:r>
+          </a:p>
+          <a:p xmlns:a="http://schemas.openxmlformats.org/drawingml/2006/main">
+            <a:r>
+              <a:t>| 화면 | 공식 사양의 2880 × 1800, OS 배율과 capture 해상도 고정 |</a:t>
+            </a:r>
+          </a:p>
+          <a:p xmlns:a="http://schemas.openxmlformats.org/drawingml/2006/main">
+            <a:r>
+              <a:t>| OS와 실행 | Windows 11, AC 연결, 같은 전력 모드, 동일 driver와 build, 24시간 절전 중지 |</a:t>
+            </a:r>
+          </a:p>
+          <a:p xmlns:a="http://schemas.openxmlformats.org/drawingml/2006/main">
+            <a:r>
+              <a:t>| 기록할 환경 | 실제 CPU/GPU, BIOS, available RAM, driver, 온도, 전력 상태 및 page fault |</a:t>
+            </a:r>
+          </a:p>
+          <a:p xmlns:a="http://schemas.openxmlformats.org/drawingml/2006/main">
+            <a:r>
+              <a:t>| 모델 | 동일한 공유 on-device Omni 한 벌, 독립 Streaming ASR, 동일 helper inventory |</a:t>
+            </a:r>
+          </a:p>
+          <a:p xmlns:a="http://schemas.openxmlformats.org/drawingml/2006/main">
+            <a:r>
+              <a:t>| 모델 계약 | 모델 hash, tokenizer, quantization, runtime, context 한도, decoding과 seed를 실제 평가 전에 고정 |</a:t>
+            </a:r>
+          </a:p>
+          <a:p xmlns:a="http://schemas.openxmlformats.org/drawingml/2006/main">
+            <a:r>
+              <a:t>| 자원 조건 | 동일 총 weight와 KV 예산, scheduler 정책, thread와 GPU 설정. 호출 수와 producer state는 대안의 비용으로 남김 |</a:t>
+            </a:r>
+          </a:p>
+          <a:p xmlns:a="http://schemas.openxmlformats.org/drawingml/2006/main">
+            <a:r>
+              <a:t>| 기본 부하 | 활성 Conversation 1개, 미완료 Task 4개, 외부 실행 2개 |</a:t>
+            </a:r>
+          </a:p>
+          <a:p xmlns:a="http://schemas.openxmlformats.org/drawingml/2006/main">
+            <a:r>
+              <a:t>| 입력과 사건 | 사용자 입력 중 Agent 질문 또는 결과 도착, 음성 출력 중 정정, source와 권한 변경 |</a:t>
+            </a:r>
+          </a:p>
+          <a:p xmlns:a="http://schemas.openxmlformats.org/drawingml/2006/main">
+            <a:r>
+              <a:t>| 출력 길이 | 짧은 요약은 필수 사실을 담은 텍스트와 최대 4초 기준 음성, 상세 내용은 동일 artifact |</a:t>
+            </a:r>
+          </a:p>
+          <a:p xmlns:a="http://schemas.openxmlformats.org/drawingml/2006/main">
+            <a:r>
+              <a:t>| 긴 출력 | 20초 기준 설명 음성을 별도 조건으로 보고하고 V-05의 10초 적용 범위와 구별 |</a:t>
+            </a:r>
+          </a:p>
+          <a:p xmlns:a="http://schemas.openxmlformats.org/drawingml/2006/main">
+            <a:r>
+              <a:t>| 반복 | seed 11, 23, 37, 53. 후보 실행 순서는 교차 배치하고 상태는 동일 snapshot으로 복원 |</a:t>
+            </a:r>
+          </a:p>
+          <a:p xmlns:a="http://schemas.openxmlformats.org/drawingml/2006/main">
+            <a:r>
+              <a:t/>
+            </a:r>
+          </a:p>
+          <a:p xmlns:a="http://schemas.openxmlformats.org/drawingml/2006/main">
+            <a:r>
+              <a:t>한국어 4초와 20초는 동일 renderer의 기준 음성 fixture 길이다. 모델 생성 음성은 실제 길이를 다시 계측한다. 목표 통과를 위해 중요한 내용을 생략할 수 없다. 20초 설명은 실제 재생만으로 10초를 넘으므로 짧은 응답 계약용 V-05 점수에 합치지 않는다. 기능 정확성과 지원률 및 긴 출력의 실제 시간은 계속 보고한다. 이 적용 범위를 평가 전에 공개한다.</a:t>
+            </a:r>
+          </a:p>
+          <a:p xmlns:a="http://schemas.openxmlformats.org/drawingml/2006/main">
+            <a:r>
+              <a:t/>
+            </a:r>
+          </a:p>
+          <a:p xmlns:a="http://schemas.openxmlformats.org/drawingml/2006/main">
+            <a:r>
+              <a:t>모델의 구체 버전은 아직 선정하지 않았다. 따라서 현재 문서가 완성된 환경 freeze나 실행 가능 benchmark라는 주장은 하지 않는다. 같은 10B라도 서로 다른 모델이면 별도 조건이다. 실제 시험 전 버전, hash, 장치 및 입력 파일을 채워 계약을 동결해야 한다.</a:t>
+            </a:r>
+          </a:p>
+          <a:p xmlns:a="http://schemas.openxmlformats.org/drawingml/2006/main">
+            <a:r>
+              <a:t/>
+            </a:r>
+          </a:p>
+          <a:p xmlns:a="http://schemas.openxmlformats.org/drawingml/2006/main">
+            <a:r>
+              <a:t>Cold는 프로세스와 가중치 및 해당 시험 cache가 없는 상태, warm은 가중치가 상주한 상태다. OS 파일 cache의 상태도 기록한다. 기능 회귀는 warm으로 수행하고 cold 첫 요청을 별도 시간 및 메모리 시험으로 수행한다. 발표의 반응시간 목표는 VIA가 이미 실행 중인 warm 상호작용에 적용한다. 시작 시간이나 모델 loading을 숨기지 않고 별도 공개한다.</a:t>
+            </a:r>
+          </a:p>
+          <a:p xmlns:a="http://schemas.openxmlformats.org/drawingml/2006/main">
+            <a:r>
+              <a:t/>
+            </a:r>
+          </a:p>
+          <a:p xmlns:a="http://schemas.openxmlformats.org/drawingml/2006/main">
+            <a:r>
+              <a:t>VIA 외 프로세스의 RAM을 임의로 몇 GB 예약하지 않는다. 기본 시험에서는 관련 없는 부하를 끄고 OS 상태를 기록한다. 같은 foreground 앱으로 근거를 제공하는 데 필요한 비용은 VIA 비용과 구별한다. 전체 PC 공존성을 증명했다고 주장하지 않는다.</a:t>
+            </a:r>
+          </a:p>
+          <a:p xmlns:a="http://schemas.openxmlformats.org/drawingml/2006/main">
+            <a:r>
+              <a:t/>
+            </a:r>
+          </a:p>
+          <a:p xmlns:a="http://schemas.openxmlformats.org/drawingml/2006/main">
+            <a:r>
+              <a:t>### 2.4 Downstream Agent와 관측</a:t>
+            </a:r>
+          </a:p>
+          <a:p xmlns:a="http://schemas.openxmlformats.org/drawingml/2006/main">
+            <a:r>
+              <a:t/>
+            </a:r>
+          </a:p>
+          <a:p xmlns:a="http://schemas.openxmlformats.org/drawingml/2006/main">
+            <a:r>
+              <a:t>같은 결정적 simulator가 동일 capability와 외부 결과를 제공한다. 기본 script는 접수 확인 0.2초 후, 첫 상태 1초 후, 결과 5초 후다. 지연 조건은 결과 30초 후, 중복과 역순은 동일 event ID 및 revision의 정해진 schedule로 발생한다. 이 값들은 외부 모델의 실측 성능이 아닌 통제 입력이다. 실제 Agent와의 검증은 별도 integration 시험으로 기록한다.</a:t>
+            </a:r>
+          </a:p>
+          <a:p xmlns:a="http://schemas.openxmlformats.org/drawingml/2006/main">
+            <a:r>
+              <a:t/>
+            </a:r>
+          </a:p>
+          <a:p xmlns:a="http://schemas.openxmlformats.org/drawingml/2006/main">
+            <a:r>
+              <a:t>VIA의 잘못된 대상, Task 연결, 명령, 상태 판단 및 전달은 V-01에 포함한다. 외부 Agent의 도메인 추론과 실제 업무 품질은 제외한다. 외부가 실패를 알려온 예외 사례에서 VIA가 사실을 정확히 전달하고 계약대로 처리하면 성공이다.</a:t>
+            </a:r>
+          </a:p>
+          <a:p xmlns:a="http://schemas.openxmlformats.org/drawingml/2006/main">
+            <a:r>
+              <a:t/>
+            </a:r>
+          </a:p>
+          <a:p xmlns:a="http://schemas.openxmlformats.org/drawingml/2006/main">
+            <a:r>
+              <a:t>모든 endpoint는 동일 monotonic clock에 맞춘다. OS audio loopback과 UI capture로 실제 전달을 확인한다. 내부 생성 완료, enqueue, 첫 packet과 실제 사용자 전달을 구별한다. recorder clock 동기 오차와 표본 주기를 결과에 기재한다. logger만으로 logger의 유실을 판정하지 않고 독립 harness registry를 사용한다.</a:t>
+            </a:r>
+          </a:p>
+          <a:p xmlns:a="http://schemas.openxmlformats.org/drawingml/2006/main">
+            <a:r>
+              <a:t/>
+            </a:r>
+          </a:p>
+          <a:p xmlns:a="http://schemas.openxmlformats.org/drawingml/2006/main">
+            <a:r>
+              <a:t>관측 종료는 VIA 책임 구간 60초, 사용자나 외부 응답만 기다리는 전체 wall time 120초로 제안한다. 예고한 Agent 결과와 사용자 답변은 종료 전에 공급한다. 종료 조건은 후보마다 같고 결과를 보고 연장하지 않는다. crash와 timeout을 삭제하거나 무한대 숫자로 바꾸지 않는다.</a:t>
+            </a:r>
+          </a:p>
+          <a:p xmlns:a="http://schemas.openxmlformats.org/drawingml/2006/main">
+            <a:r>
+              <a:t/>
+            </a:r>
+          </a:p>
+          <a:p xmlns:a="http://schemas.openxmlformats.org/drawingml/2006/main">
+            <a:r>
+              <a:t>### 2.5 시간과 실패의 공통 처리</a:t>
+            </a:r>
+          </a:p>
+          <a:p xmlns:a="http://schemas.openxmlformats.org/drawingml/2006/main">
+            <a:r>
+              <a:t/>
+            </a:r>
+          </a:p>
+          <a:p xmlns:a="http://schemas.openxmlformats.org/drawingml/2006/main">
+            <a:r>
+              <a:t>정확성 판정과 시간 측정은 분리한다. 틀린 매칭이라도 반응, 오류 안내 또는 실제 처리가 끝난 시각이 있으면 그 경과시간을 사용하고 V-01에서 실패로 남긴다. 빠른 오답의 시간이 길었다고 만들어내지 않는다.</a:t>
+            </a:r>
+          </a:p>
+          <a:p xmlns:a="http://schemas.openxmlformats.org/drawingml/2006/main">
+            <a:r>
+              <a:t/>
+            </a:r>
+          </a:p>
+          <a:p xmlns:a="http://schemas.openxmlformats.org/drawingml/2006/main">
+            <a:r>
+              <a:t>| 관측 상태 | 시간 기록 | 판정 |</a:t>
+            </a:r>
+          </a:p>
+          <a:p xmlns:a="http://schemas.openxmlformats.org/drawingml/2006/main">
+            <a:r>
+              <a:t>| --- | --- | --- |</a:t>
+            </a:r>
+          </a:p>
+          <a:p xmlns:a="http://schemas.openxmlformats.org/drawingml/2006/main">
+            <a:r>
+              <a:t>| 정답과 실제 전달 | 실제 종료 사건까지의 경과시간 | 정확성과 시간 각각 판정 |</a:t>
+            </a:r>
+          </a:p>
+          <a:p xmlns:a="http://schemas.openxmlformats.org/drawingml/2006/main">
+            <a:r>
+              <a:t>| 오답 또는 실패 안내 전달 | 실제 반응과 종료 시각까지의 경과시간 | 정확성은 정답 manifest로 별도 판정. 오답은 실패, 올바른 예외 안내는 성공 |</a:t>
+            </a:r>
+          </a:p>
+          <a:p xmlns:a="http://schemas.openxmlformats.org/drawingml/2006/main">
+            <a:r>
+              <a:t>| 출력 없이 crash 또는 timeout | harness가 실제 관측을 종료할 때까지의 경과시간 | 미전달 표식. 실제 전달시간이라고 표기하지 않음 |</a:t>
+            </a:r>
+          </a:p>
+          <a:p xmlns:a="http://schemas.openxmlformats.org/drawingml/2006/main">
+            <a:r>
+              <a:t>| 복구를 못 한 장애 | 관측 종료까지 실제 기다린 시간 | 미복구 표식. 정상 복구시간으로 표기하지 않음 |</a:t>
+            </a:r>
+          </a:p>
+          <a:p xmlns:a="http://schemas.openxmlformats.org/drawingml/2006/main">
+            <a:r>
+              <a:t/>
+            </a:r>
+          </a:p>
+          <a:p xmlns:a="http://schemas.openxmlformats.org/drawingml/2006/main">
+            <a:r>
+              <a:t>모든 trial의 **관측 경과시간 산술평균**을 먼저 보고하고 미전달 및 미복구 ID를 함께 제시한다. endpoint를 관측하지 못한 표본이 있으면 이 평균은 관측 기간까지만 포함한 값임을 표시하고, 해당 시간 목표의 충족 판정은 보류한다. 누락된 endpoint를 60초에 전달 또는 복구했다고 꾸미지 않는다. 유효한 오답 전달은 endpoint 누락이 아니므로 이 보류 규칙을 적용하지 않는다. 정답률을 암묵적으로 더 높이는 집계도 쓰지 않는다.</a:t>
+            </a:r>
+          </a:p>
+          <a:p xmlns:a="http://schemas.openxmlformats.org/drawingml/2006/main">
+            <a:r>
+              <a:t/>
+            </a:r>
+          </a:p>
+          <a:p xmlns:a="http://schemas.openxmlformats.org/drawingml/2006/main">
+            <a:r>
+              <a:t>종류별 평균, 경로별 평균, cold와 warm, 최솟값과 최댓값 및 실패 목록은 진단으로 보고한다. 대표 목표는 산술평균 하나다. 평균이 동일하더라도 어려운 조건에서 발생한 회귀를 숨기지 않는다. 대안 간 차이는 동일 사례와 seed의 paired 결과로 제시한다. 정확도 신뢰구간은 반복 네 회를 독립으로 취급하지 않고 470개 구체 사례를 cluster로 묶어 산출한다. 측정 전 평균과 분모 및 적용 범위를 고정한다.</a:t>
             </a:r>
           </a:p>
           <a:p xmlns:a="http://schemas.openxmlformats.org/drawingml/2006/main">
@@ -2923,37 +4058,37 @@
           </a:p>
           <a:p xmlns:a="http://schemas.openxmlformats.org/drawingml/2006/main">
             <a:r>
-              <a:t>**단일 목표:** 정확 처리율 90% 이상.</a:t>
-            </a:r>
-          </a:p>
-          <a:p xmlns:a="http://schemas.openxmlformats.org/drawingml/2006/main">
-            <a:r>
-              <a:t/>
-            </a:r>
-          </a:p>
-          <a:p xmlns:a="http://schemas.openxmlformats.org/drawingml/2006/main">
-            <a:r>
-              <a:t>**근거:** Joint BERT 연구의 SNIPS 시험은 문장 전체의 의도와 slot이 모두 맞는 semantic frame accuracy 92.8%를 보고한다 [S01]. slot F1 97.0%나 intent 정확도 98.6%를 전체 요청 성공률처럼 쓰지 않는다. VIA의 첫 통합 평가에서는 더 복잡한 화면과 업무 상태 판단까지 포함하므로 이 문장 단위 결과를 그대로 달성했다고 가정하지 않고, 가까운 정수 10% 단위의 보수적인 목표인 90%를 제안한다. 이는 허용 오류 예산이 전체 시험의 10%라는 뜻이다.</a:t>
-            </a:r>
-          </a:p>
-          <a:p xmlns:a="http://schemas.openxmlformats.org/drawingml/2006/main">
-            <a:r>
-              <a:t/>
-            </a:r>
-          </a:p>
-          <a:p xmlns:a="http://schemas.openxmlformats.org/drawingml/2006/main">
-            <a:r>
-              <a:t>92.8%와 VIA 90%는 서로 다른 모집단이다. 비교 실적이나 최종 제품 출시 기준으로 주장할 수 없다. tau-bench가 대화 종료 후 실제 DB 상태를 정답 상태와 대조하는 방법은 전체 요청의 성공 판정에 참고한다 [S02]. 그 benchmark에서 보고한 낮은 Agent 성공률은 VIA의 90%를 증명하거나 반박하는 직접 비교 수치가 아니다.</a:t>
-            </a:r>
-          </a:p>
-          <a:p xmlns:a="http://schemas.openxmlformats.org/drawingml/2006/main">
-            <a:r>
-              <a:t/>
-            </a:r>
-          </a:p>
-          <a:p xmlns:a="http://schemas.openxmlformats.org/drawingml/2006/main">
-            <a:r>
-              <a:t>**분모와 식:**</a:t>
+              <a:t>**단일 목표:** 정확 처리율 95% 이상.</a:t>
+            </a:r>
+          </a:p>
+          <a:p xmlns:a="http://schemas.openxmlformats.org/drawingml/2006/main">
+            <a:r>
+              <a:t/>
+            </a:r>
+          </a:p>
+          <a:p xmlns:a="http://schemas.openxmlformats.org/drawingml/2006/main">
+            <a:r>
+              <a:t>**근거 사실:** Nexusflow의 NexusRaven-13B 구현은 demonstration retrieval을 결합한 CVE/CPE Search와 VirusTotal 도구 사용에서 성공률 95%를 보고한다 [S01]. 문장 intent 분류나 slot별 F1보다 함수 선택과 인자 구성을 평가한다는 점에서 VIA의 요청 처리와 더 가깝다. 개발팀이 공개한 결과이며 독립적으로 재현한 VIA 실적은 아니다.</a:t>
+            </a:r>
+          </a:p>
+          <a:p xmlns:a="http://schemas.openxmlformats.org/drawingml/2006/main">
+            <a:r>
+              <a:t/>
+            </a:r>
+          </a:p>
+          <a:p xmlns:a="http://schemas.openxmlformats.org/drawingml/2006/main">
+            <a:r>
+              <a:t>**목표 선택:** 이미 공개된 검색 보조 도구 사용 구현의 95%를 VIA 통합 평가가 지향할 참조 수준으로 선택한다. 90%로 임의 반올림하거나 화면과 업무 이력을 이유로 5%를 할인하지 않는다. 고정 corpus에서 최대 5%의 전체 요청 실패를 허용하는 연구 평가 목표이며 정식 제품 출시의 안전 인증 기준은 아니다. VIA가 더 복잡한 기능을 갖는 만큼 달성 가능성은 직접 시험해야 한다.</a:t>
+            </a:r>
+          </a:p>
+          <a:p xmlns:a="http://schemas.openxmlformats.org/drawingml/2006/main">
+            <a:r>
+              <a:t/>
+            </a:r>
+          </a:p>
+          <a:p xmlns:a="http://schemas.openxmlformats.org/drawingml/2006/main">
+            <a:r>
+              <a:t>**전이 한계:** NexusRaven은 VIA와 모델 크기, quantization, 장치, 언어, 업무 상태와 화면 근거가 다르다. 보안 도구 시험의 95%가 VIA의 한국어 다중 턴 성공률을 예측한다고 주장하지 않는다. 이 출처만으로 VIA가 95%를 달성한다고 말할 수 없다. 전체 VIA 성능에 동일 corpus의 외부 수치가 없다는 한계를 발표 답변에서도 명시한다. 목표를 선택하는 근거와 목표를 달성하는 증거를 구분한다.</a:t>
             </a:r>
           </a:p>
           <a:p xmlns:a="http://schemas.openxmlformats.org/drawingml/2006/main">
@@ -2968,12 +4103,12 @@
           </a:p>
           <a:p xmlns:a="http://schemas.openxmlformats.org/drawingml/2006/main">
             <a:r>
-              <a:t>N = 94개 필수 변형 × 5개 구체 사례 × 4회 반복 = 1,880회</a:t>
-            </a:r>
-          </a:p>
-          <a:p xmlns:a="http://schemas.openxmlformats.org/drawingml/2006/main">
-            <a:r>
-              <a:t>success(i) = 사례 i의 적용 가능한 필수 oracle 판정을 모두 만족하면 1, 아니면 0</a:t>
+              <a:t>N = 94개 필수 변형 × 5개 구체 사례 × 4회 = 1,880회</a:t>
+            </a:r>
+          </a:p>
+          <a:p xmlns:a="http://schemas.openxmlformats.org/drawingml/2006/main">
+            <a:r>
+              <a:t>success(i) = 모든 턴의 적용 가능한 필수 oracle 판정을 만족하면 1, 아니면 0</a:t>
             </a:r>
           </a:p>
           <a:p xmlns:a="http://schemas.openxmlformats.org/drawingml/2006/main">
@@ -2983,7 +4118,7 @@
           </a:p>
           <a:p xmlns:a="http://schemas.openxmlformats.org/drawingml/2006/main">
             <a:r>
-              <a:t>목표 성공 수 = 1,692회 이상</a:t>
+              <a:t>목표 성공 수 = 1,786회 이상</a:t>
             </a:r>
           </a:p>
           <a:p xmlns:a="http://schemas.openxmlformats.org/drawingml/2006/main">
@@ -2998,27 +4133,27 @@
           </a:p>
           <a:p xmlns:a="http://schemas.openxmlformats.org/drawingml/2006/main">
             <a:r>
-              <a:t>미지원도 분모에 포함한다. 원래 예외 시험에서 올바른 보류나 거절은 성공이지만, 기능을 지원하지 못해 정상 요청을 거절한 경우는 실패이다. 정확한 안내 문구만 내놓고 필요한 처리를 수행하지 않으면 성공으로 세지 않는다.</a:t>
-            </a:r>
-          </a:p>
-          <a:p xmlns:a="http://schemas.openxmlformats.org/drawingml/2006/main">
-            <a:r>
-              <a:t/>
-            </a:r>
-          </a:p>
-          <a:p xmlns:a="http://schemas.openxmlformats.org/drawingml/2006/main">
-            <a:r>
-              <a:t>시험 전 manifest와 실제 semantic output, 채택된 상태, 명령, Agent 사실 및 사용자에게 전달한 결과를 자동 대조한다. 동등한 표현의 의미 판정이 필요하면 후보를 가린 검토자가 rubric으로 판정한다. 전체 판정과 필드별 오류를 모두 보존한다. 모델을 judge로 사용할 때도 사람과 일치도를 먼저 검증하며 judge의 답을 무검토 정답으로 삼지 않는다.</a:t>
-            </a:r>
-          </a:p>
-          <a:p xmlns:a="http://schemas.openxmlformats.org/drawingml/2006/main">
-            <a:r>
-              <a:t/>
-            </a:r>
-          </a:p>
-          <a:p xmlns:a="http://schemas.openxmlformats.org/drawingml/2006/main">
-            <a:r>
-              <a:t>90%는 이 비율 하나의 목표이다. 다른 업무 오실행과 중복 실행을 별도의 0건 목표로 이 행에 넣지 않는다. 이런 사건은 해당 시험의 정확성 실패와 오류 유형으로 남기며 기존 실행 안전 계약도 유지한다. 반복은 독립 사용자 표본이 아니므로 신뢰구간은 470개 구체 사례를 cluster로 묶어 추정한다.</a:t>
+              <a:t>tau-bench의 실제 상태 대조 [S02]와 BFCL V3의 턴별 상태 및 응답 검사 [S11]를 판정 방법에 참고한다. 의도와 slot을 각각 맞힌 비율을 전체 처리율로 합치지 않는다. 모델이 선택한 tool이 정답이라는 이유만으로 올바른 Task 및 전달까지 맞았다고 간주하지 않는다.</a:t>
+            </a:r>
+          </a:p>
+          <a:p xmlns:a="http://schemas.openxmlformats.org/drawingml/2006/main">
+            <a:r>
+              <a:t/>
+            </a:r>
+          </a:p>
+          <a:p xmlns:a="http://schemas.openxmlformats.org/drawingml/2006/main">
+            <a:r>
+              <a:t>필수 oracle은 F1~F6의 적용 필드, 필요한 상태 변화, 명령과 외부 사실, 사용자 전달이다. 응답 표현은 달라도 필수 사실이 같으면 인정한다. 불명확한 표현은 후보를 가린 검토자가 고정 rubric으로 판정한다. 정답 상태를 확인할 수 없는 시험과 미지원 및 미전달도 분모에 남고 실패다. 오실행과 중복 실행은 해당 전체 시험의 오류 유형으로 기록한다. 이 행에 별도의 수치 목표를 추가하지 않는다.</a:t>
+            </a:r>
+          </a:p>
+          <a:p xmlns:a="http://schemas.openxmlformats.org/drawingml/2006/main">
+            <a:r>
+              <a:t/>
+            </a:r>
+          </a:p>
+          <a:p xmlns:a="http://schemas.openxmlformats.org/drawingml/2006/main">
+            <a:r>
+              <a:t>DP별 96회에는 같은 정의를 적용하고 성공 수 92회 이상이 95% 하한이다. 작은 시험군의 통계적 불확실성을 공개하고 전체 기능 평균으로 DP의 취약 조건을 가리지 않는다. 동일 목표의 적용 여부는 시험군별로 명시하며 새로운 오류가 중요한 안전 계약을 깨면 별도 기존 qualification에도 남긴다.</a:t>
             </a:r>
           </a:p>
           <a:p xmlns:a="http://schemas.openxmlformats.org/drawingml/2006/main">
@@ -3038,7 +4173,7 @@
           </a:p>
           <a:p xmlns:a="http://schemas.openxmlformats.org/drawingml/2006/main">
             <a:r>
-              <a:t>**설명:** 사용자가 적은 추가 입력으로 요청을 마칠 수 있어야 한다.</a:t>
+              <a:t>**설명:** 추가 사용자 입력을 최소화해 요청을 마쳐야 한다.</a:t>
             </a:r>
           </a:p>
           <a:p xmlns:a="http://schemas.openxmlformats.org/drawingml/2006/main">
@@ -3058,17 +4193,7 @@
           </a:p>
           <a:p xmlns:a="http://schemas.openxmlformats.org/drawingml/2006/main">
             <a:r>
-              <a:t>**근거:** 시각 질의의 정보가 부족할 때 CoA는 필요한 경우 하나의 집중된 질문을 하고 답변을 반영하는 접근을 사용한다 [S03]. VIA도 근거를 먼저 활용하고 한 번의 답변에 필요한 정보를 모으는 상호작용을 목표로 삼아 추가 개입 예산을 1회로 제안한다. 이 연구는 VIA의 모든 요청이 질문 하나로 해결된다는 실증 근거가 아니며, VIA의 권한 승인 비용도 아래 횟수에 포함한다.</a:t>
-            </a:r>
-          </a:p>
-          <a:p xmlns:a="http://schemas.openxmlformats.org/drawingml/2006/main">
-            <a:r>
-              <a:t/>
-            </a:r>
-          </a:p>
-          <a:p xmlns:a="http://schemas.openxmlformats.org/drawingml/2006/main">
-            <a:r>
-              <a:t>**분모와 식:** 같은 1,880회 전체 시험에 대해, 최초 목표 입력 이후 VIA가 요구한 추가 사용자 입력을 센다.</a:t>
+              <a:t>CoA는 필요한 때 하나의 집중 질문으로 부족한 시각 질의 정보를 보완하는 접근을 사용한다 [S03]. VIA에서도 근거를 먼저 활용하고 필요한 정보를 한 번에 묻는 상호작용 예산을 선택한다. 논문이 VIA의 모든 요청이나 권한 승인을 평균 한 번으로 처리했다고 주장하지 않는다. 승인에 필요한 입력도 예산에 포함하며 필수 승인을 생략할 수 없다.</a:t>
             </a:r>
           </a:p>
           <a:p xmlns:a="http://schemas.openxmlformats.org/drawingml/2006/main">
@@ -3083,12 +4208,12 @@
           </a:p>
           <a:p xmlns:a="http://schemas.openxmlformats.org/drawingml/2006/main">
             <a:r>
-              <a:t>u(i) = VIA가 요구한 추가 답변, 선택, 승인 또는 수동 우회 횟수</a:t>
-            </a:r>
-          </a:p>
-          <a:p xmlns:a="http://schemas.openxmlformats.org/drawingml/2006/main">
-            <a:r>
-              <a:t>사용자 개입 횟수 = Σ u(i) / 1,880</a:t>
+              <a:t>u(i) = 최초 요청 뒤 VIA가 요구한 사용자 입력 episode 수</a:t>
+            </a:r>
+          </a:p>
+          <a:p xmlns:a="http://schemas.openxmlformats.org/drawingml/2006/main">
+            <a:r>
+              <a:t>평균 사용자 개입 = Σ u(i) / 1,880</a:t>
             </a:r>
           </a:p>
           <a:p xmlns:a="http://schemas.openxmlformats.org/drawingml/2006/main">
@@ -3103,17 +4228,27 @@
           </a:p>
           <a:p xmlns:a="http://schemas.openxmlformats.org/drawingml/2006/main">
             <a:r>
-              <a:t>하나의 질문에 음성과 선택 UI를 함께 사용해 답하면 하나의 응답 episode로 센다. VIA가 다시 질문하여 새 답변을 받으면 한 번을 더 센다. 자동 정보 읽기와 시스템 내부 재시도는 사용자 개입이 아니다. 자발적 새 목표는 최초 입력으로 분리하지만, 기능 부족 때문에 사용자가 수동으로 앱을 조작하는 우회는 포함한다.</a:t>
-            </a:r>
-          </a:p>
-          <a:p xmlns:a="http://schemas.openxmlformats.org/drawingml/2006/main">
-            <a:r>
-              <a:t/>
-            </a:r>
-          </a:p>
-          <a:p xmlns:a="http://schemas.openxmlformats.org/drawingml/2006/main">
-            <a:r>
-              <a:t>시험 사용자는 script에 정해진 최소 답변을 제공한다. 실패 응답 뒤 원래 목표를 다시 요청하거나 앱에서 수동으로 마무리하는 동작도 script에 넣고 실제 개입으로 센다. 필요 권한을 생략하거나 불확실한 대상에 대해 추측해 개입을 줄인 시험은 V-01이나 V-10에서 실패한다. 미완료 시험도 당시까지의 실제 횟수로 분모에 남기고 성공 여부에 따른 개입 분포를 함께 공개한다. 아무것도 수행하지 않는 구현의 0회는 낮은 부담의 근거로 해석하지 않는다. 이 지표는 V-01과 V-03의 기능 결과와 함께 평가하며 성공 시험만 뽑은 평균을 쓰지 않는다.</a:t>
+              <a:t>질문 답변, 대상 선택과 승인을 각각 새로운 답변 episode로 센다. 같은 질문에 음성과 UI를 함께 써 하나의 답을 제출하면 한 번이다. 앱을 수동으로 마무리하는 경우 클릭 묶음을 임의로 하나로 만들지 않고 manifest의 의미 있는 실행 단계별로 센다. 예를 들어 파일 선택, 내용 입력, 실행 확인은 각각 한 단계다. 내부 자동 재시도는 사용자 개입이 아니다.</a:t>
+            </a:r>
+          </a:p>
+          <a:p xmlns:a="http://schemas.openxmlformats.org/drawingml/2006/main">
+            <a:r>
+              <a:t/>
+            </a:r>
+          </a:p>
+          <a:p xmlns:a="http://schemas.openxmlformats.org/drawingml/2006/main">
+            <a:r>
+              <a:t>실패가 보이면 동일 사용자 script가 최대 두 번의 재요청을 하고 이후 사례별 수동 마무리를 시도한다. 실제 관측한 단계만 세며 미완료도 분모에 포함한다. 구현을 보고 우회 횟수를 줄이지 않는다. 자발적인 독립 새 목표는 새 시험이며 기능 부족 때문에 같은 목표를 다시 설명하는 것은 추가 개입이다.</a:t>
+            </a:r>
+          </a:p>
+          <a:p xmlns:a="http://schemas.openxmlformats.org/drawingml/2006/main">
+            <a:r>
+              <a:t/>
+            </a:r>
+          </a:p>
+          <a:p xmlns:a="http://schemas.openxmlformats.org/drawingml/2006/main">
+            <a:r>
+              <a:t>모든 시험 평균과 성공 및 실패 시험의 분포를 함께 기록한다. 아무것도 수행하지 않아 나온 0회는 낮은 부담의 개선 증거로 인정하지 않는다. DP 비교에서는 목표 완료 여부가 다른 pair를 따로 표시하고, 실패로 생략한 질문을 장점으로 주장하지 않는다. V-01과 V-03을 함께 평가하되 성공 시험만 골라 평균을 낮추지 않는다.</a:t>
             </a:r>
           </a:p>
           <a:p xmlns:a="http://schemas.openxmlformats.org/drawingml/2006/main">
@@ -3153,17 +4288,7 @@
           </a:p>
           <a:p xmlns:a="http://schemas.openxmlformats.org/drawingml/2006/main">
             <a:r>
-              <a:t>**근거:** 94개 필수 변형은 제품 기능 계약 자체이다 [S00]. 선택적인 benchmark 문항이 아니므로 완전 지원의 목표는 94개 모두를 지원하는 100%로 정한다. 이 수치는 문헌의 통계적 정확도에서 가져오지 않는다.</a:t>
-            </a:r>
-          </a:p>
-          <a:p xmlns:a="http://schemas.openxmlformats.org/drawingml/2006/main">
-            <a:r>
-              <a:t/>
-            </a:r>
-          </a:p>
-          <a:p xmlns:a="http://schemas.openxmlformats.org/drawingml/2006/main">
-            <a:r>
-              <a:t>**분모와 식:**</a:t>
+              <a:t>필수 UC 변형 94개는 시스템의 기능 계약이므로 94개 모두를 지원하는 목표를 선택한다 [S00]. 문헌의 확률적 정확도를 가져오는 항목이 아니다.</a:t>
             </a:r>
           </a:p>
           <a:p xmlns:a="http://schemas.openxmlformats.org/drawingml/2006/main">
@@ -3178,7 +4303,7 @@
           </a:p>
           <a:p xmlns:a="http://schemas.openxmlformats.org/drawingml/2006/main">
             <a:r>
-              <a:t>support(v) = 변형 v의 필수 동작 전체를 구현하고 검증 증거를 제공하면 1, 아니면 0</a:t>
+              <a:t>support(v) = 필수 capability 전부를 입증한 변형이면 1, 아니면 0</a:t>
             </a:r>
           </a:p>
           <a:p xmlns:a="http://schemas.openxmlformats.org/drawingml/2006/main">
@@ -3198,17 +4323,27 @@
           </a:p>
           <a:p xmlns:a="http://schemas.openxmlformats.org/drawingml/2006/main">
             <a:r>
-              <a:t>각 변형에는 입력, 필요한 VIA 처리, 정상 종료, 변형 고유의 예외 및 책임 경계를 체크리스트로 작성한다. 구현 경로와 실제 동작 witness를 대조한다. 모든 구체 사례의 필수 capability를 입증해야 완전 지원으로 표시한다. 기능이 있지만 일부 실행에서 발생한 확률적 의미 오류는 V-01에서 집계하며 그 사실만으로 capability를 미구현이라고 바꾸지 않는다. 반대로 지원하지 않는 관계를 사용자가 수동으로 해결하면 부분 지원이다.</a:t>
-            </a:r>
-          </a:p>
-          <a:p xmlns:a="http://schemas.openxmlformats.org/drawingml/2006/main">
-            <a:r>
-              <a:t/>
-            </a:r>
-          </a:p>
-          <a:p xmlns:a="http://schemas.openxmlformats.org/drawingml/2006/main">
-            <a:r>
-              <a:t>부분 지원, 미지원, 미확인은 분모에 남고 분자에는 들어가지 않는다. 표에는 한 비율만 표시하고 상세 support ledger에는 제한과 증거 링크를 남긴다. 설계 문서만 검토한 시점에는 '설계상 지원'을 별도 표시하며 구현 지원률 결과를 만들지 않는다. 현재 실제 support ledger와 실행 결과는 없다.</a:t>
+              <a:t>완전 지원에는 세 증거가 모두 필요하다. 첫째, 필수 입력과 의미 관계를 표현하고 처리하는 구현 경로가 있어야 한다. 둘째, 각 필수 상태 전이와 오류 처리의 capability 계약 시험을 통과해야 한다. 이 시험에서는 유효한 모델 제안과 source 응답을 공급하여 코드 경로의 구현 여부를 확인한다. 셋째, 다섯 구체 상황 각각에서 실제 입력을 사용한 통합 witness가 있어야 한다. 모델을 대체한 계약 시험만으로 전체 지원을 선언하지 않는다.</a:t>
+            </a:r>
+          </a:p>
+          <a:p xmlns:a="http://schemas.openxmlformats.org/drawingml/2006/main">
+            <a:r>
+              <a:t/>
+            </a:r>
+          </a:p>
+          <a:p xmlns:a="http://schemas.openxmlformats.org/drawingml/2006/main">
+            <a:r>
+              <a:t>계약 시험은 41의 코드 표현 범위, 43의 F1~F6 생산 결과, 질문과 승인 및 정정, 상태와 전달을 개별 확인한다. 필수 관계를 유한 표현에 담을 수 없거나 원본 근거 없이 사용자에게 우회시키면 부분 지원이다. 통합 witness의 확률적 오류는 V-01에 모두 기록한다. 다섯 상황 중 하나의 우연한 성공만으로 변형 전체를 지원으로 세지 않는다.</a:t>
+            </a:r>
+          </a:p>
+          <a:p xmlns:a="http://schemas.openxmlformats.org/drawingml/2006/main">
+            <a:r>
+              <a:t/>
+            </a:r>
+          </a:p>
+          <a:p xmlns:a="http://schemas.openxmlformats.org/drawingml/2006/main">
+            <a:r>
+              <a:t>지원 ledger에는 완전 지원, 부분 지원, 미지원과 미확인을 남긴다. 뒤의 세 상태는 분모에 남고 분자에 들어가지 않는다. 설계 문서 단계는 '설계상 지원 검토'이며 구현 지원률 실적으로 표시하지 않는다.</a:t>
             </a:r>
           </a:p>
           <a:p xmlns:a="http://schemas.openxmlformats.org/drawingml/2006/main">
@@ -3228,37 +4363,37 @@
           </a:p>
           <a:p xmlns:a="http://schemas.openxmlformats.org/drawingml/2006/main">
             <a:r>
-              <a:t>**설명:** 사용자 입력에 대한 유효한 반응이 빠르게 나타나야 한다.</a:t>
-            </a:r>
-          </a:p>
-          <a:p xmlns:a="http://schemas.openxmlformats.org/drawingml/2006/main">
-            <a:r>
-              <a:t/>
-            </a:r>
-          </a:p>
-          <a:p xmlns:a="http://schemas.openxmlformats.org/drawingml/2006/main">
-            <a:r>
-              <a:t>**단일 목표:** 종류별 p95 반응 지연의 최댓값 1초 이하.</a:t>
-            </a:r>
-          </a:p>
-          <a:p xmlns:a="http://schemas.openxmlformats.org/drawingml/2006/main">
-            <a:r>
-              <a:t/>
-            </a:r>
-          </a:p>
-          <a:p xmlns:a="http://schemas.openxmlformats.org/drawingml/2006/main">
-            <a:r>
-              <a:t>**근거:** Nielsen은 상호작용의 반응시간 기준으로 0.1초, 1초, 10초를 제시한다 [S04]. VIA의 첫 유효 반응에는 1초 기준을 선택한다. p95와 종류별 최댓값은 VIA의 시험 집계 선택이며 Nielsen의 원문 통계 정의가 아니다.</a:t>
-            </a:r>
-          </a:p>
-          <a:p xmlns:a="http://schemas.openxmlformats.org/drawingml/2006/main">
-            <a:r>
-              <a:t/>
-            </a:r>
-          </a:p>
-          <a:p xmlns:a="http://schemas.openxmlformats.org/drawingml/2006/main">
-            <a:r>
-              <a:t>| 종류 | 실제 시작 사건 | 실제 종료 사건 |</a:t>
+              <a:t>**설명:** 사용자 입력에 빠르게 반응해야 한다.</a:t>
+            </a:r>
+          </a:p>
+          <a:p xmlns:a="http://schemas.openxmlformats.org/drawingml/2006/main">
+            <a:r>
+              <a:t/>
+            </a:r>
+          </a:p>
+          <a:p xmlns:a="http://schemas.openxmlformats.org/drawingml/2006/main">
+            <a:r>
+              <a:t>**단일 목표:** 평균 반응시간 1초 이하.</a:t>
+            </a:r>
+          </a:p>
+          <a:p xmlns:a="http://schemas.openxmlformats.org/drawingml/2006/main">
+            <a:r>
+              <a:t/>
+            </a:r>
+          </a:p>
+          <a:p xmlns:a="http://schemas.openxmlformats.org/drawingml/2006/main">
+            <a:r>
+              <a:t>Nielsen의 1초 상호작용 기준을 선택한다 [S04]. 평균 집계는 사용자의 발표 요구에 따른 선택이다. 한 번의 즉시 응답이 뒤의 긴 전체 처리시간을 가리지 않도록 V-05도 따로 측정한다.</a:t>
+            </a:r>
+          </a:p>
+          <a:p xmlns:a="http://schemas.openxmlformats.org/drawingml/2006/main">
+            <a:r>
+              <a:t/>
+            </a:r>
+          </a:p>
+          <a:p xmlns:a="http://schemas.openxmlformats.org/drawingml/2006/main">
+            <a:r>
+              <a:t>| 사건 종류 | 시작 | 실제 종료 |</a:t>
             </a:r>
           </a:p>
           <a:p xmlns:a="http://schemas.openxmlformats.org/drawingml/2006/main">
@@ -3268,42 +4403,57 @@
           </a:p>
           <a:p xmlns:a="http://schemas.openxmlformats.org/drawingml/2006/main">
             <a:r>
-              <a:t>| 요청 반응 | 실제 발화 종료 또는 텍스트 제출 | 해당 요청의 의미 있는 응답이 표시되거나 첫 유효 음성이 재생됨 |</a:t>
-            </a:r>
-          </a:p>
-          <a:p xmlns:a="http://schemas.openxmlformats.org/drawingml/2006/main">
-            <a:r>
-              <a:t>| 상태 전달 | 외부 상태가 VIA에게 이용 가능해진 source 사건 | 그 사실을 반영한 상태가 사용자에게 표시됨 |</a:t>
-            </a:r>
-          </a:p>
-          <a:p xmlns:a="http://schemas.openxmlformats.org/drawingml/2006/main">
-            <a:r>
-              <a:t>| 업무 제어 | 사용자 제어 명령의 실제 입력 | VIA가 제어를 적용하고 그 사실을 확인할 수 있음 |</a:t>
-            </a:r>
-          </a:p>
-          <a:p xmlns:a="http://schemas.openxmlformats.org/drawingml/2006/main">
-            <a:r>
-              <a:t>| 음성 중단 | 사용자의 새 발화가 실제 시작함 | 이전 음성의 마지막 출력 sample |</a:t>
-            </a:r>
-          </a:p>
-          <a:p xmlns:a="http://schemas.openxmlformats.org/drawingml/2006/main">
-            <a:r>
-              <a:t/>
-            </a:r>
-          </a:p>
-          <a:p xmlns:a="http://schemas.openxmlformats.org/drawingml/2006/main">
-            <a:r>
-              <a:t>업무 취소에 Agent의 실행 중단 확인이 필요하면 상태 전달 지연의 시작은 실제 외부 확인이다. 사용자 요청부터 외부 확인까지의 실제 체감 시간도 함께 공개한다. 음성 출력 중단을 업무 취소 완료로 세지 않는다. 접수 인사, 의미 없는 filler, spinner, enqueue와 model 내부 완료는 종료점이 아니다.</a:t>
-            </a:r>
-          </a:p>
-          <a:p xmlns:a="http://schemas.openxmlformats.org/drawingml/2006/main">
-            <a:r>
-              <a:t/>
-            </a:r>
-          </a:p>
-          <a:p xmlns:a="http://schemas.openxmlformats.org/drawingml/2006/main">
-            <a:r>
-              <a:t>동일 monotonic clock으로 시작 사건과 실제 출력 사건을 수집한다. 음성은 녹음된 입력 기준점과 OS 오디오 loopback을 정렬하고 장치 오차를 기록한다. 종류마다 최소 20회 이상 관측하며 1,880회 시험에서 해당하는 모든 사건을 포함한다. 종류별 nearest-rank p95를 구한 뒤 가장 큰 값을 대표값으로 한다. 사건이 발생했는데 유효 반응이 없으면 지연을 무한대로 기록한다. Cold와 warm 결과를 각각 공개하고 긴 지연을 pooled 평균으로 숨기지 않는다.</a:t>
+              <a:t>| 요청 반응 | 실제 발화 종료 또는 텍스트 제출 | 해당 요청의 유효한 텍스트 표시 또는 첫 유효 음성 재생 |</a:t>
+            </a:r>
+          </a:p>
+          <a:p xmlns:a="http://schemas.openxmlformats.org/drawingml/2006/main">
+            <a:r>
+              <a:t>| 상태 전달 | 확인된 외부 상태가 source에서 VIA에 이용 가능해진 시각 | 그 상태 또는 처리 오류를 사용자에게 실제 전달 |</a:t>
+            </a:r>
+          </a:p>
+          <a:p xmlns:a="http://schemas.openxmlformats.org/drawingml/2006/main">
+            <a:r>
+              <a:t>| 업무 제어 | 제어 요청의 실제 입력 | VIA 로컬 제어 적용을 확인할 수 있는 반응 |</a:t>
+            </a:r>
+          </a:p>
+          <a:p xmlns:a="http://schemas.openxmlformats.org/drawingml/2006/main">
+            <a:r>
+              <a:t/>
+            </a:r>
+          </a:p>
+          <a:p xmlns:a="http://schemas.openxmlformats.org/drawingml/2006/main">
+            <a:r>
+              <a:t>'처리 중' 같은 고정 filler와 spinner는 유효 반응이 아니다. 올바른 결과, 구체적 확인 질문, 해당 요청을 식별한 접수 사실 또는 구체적인 실패 안내는 유효 반응이다. 외부 실행 접수는 실제 Agent 확인 이후에만 접수 사실로 말할 수 있다. 대상을 틀리게 말한 반응도 실제 시각은 기록하고 정확성 실패로 남긴다.</a:t>
+            </a:r>
+          </a:p>
+          <a:p xmlns:a="http://schemas.openxmlformats.org/drawingml/2006/main">
+            <a:r>
+              <a:t/>
+            </a:r>
+          </a:p>
+          <a:p xmlns:a="http://schemas.openxmlformats.org/drawingml/2006/main">
+            <a:r>
+              <a:t>주점수의 event ledger를 사례 manifest에서 사전에 고정한다. 각 trial의 최초 사용자 목표 입력에 대한 반응을 기본 slot 하나로 삼는다. 시나리오가 고정 시각의 상태 전달이나 제어를 요구하면 해당 slot을 사전에 추가하고 모든 후보에 같은 외부 입력을 공급한다. 후보가 추가로 만든 질문과 재시도 턴은 진단 기록에 남기며 주점수의 slot 수를 늘리지 않는다. 빠른 확인 질문 여러 개로 느린 최초 반응을 희석할 수 없다.</a:t>
+            </a:r>
+          </a:p>
+          <a:p xmlns:a="http://schemas.openxmlformats.org/drawingml/2006/main">
+            <a:r>
+              <a:t/>
+            </a:r>
+          </a:p>
+          <a:p xmlns:a="http://schemas.openxmlformats.org/drawingml/2006/main">
+            <a:r>
+              <a:t>고정 slot마다 경과시간을 기록하고 시험 내 slot 산술평균을 먼저 계산한 뒤 적용 시험 전체의 산술평균을 낸다. 각 trial이 같은 가중치를 갖는다. 반응이 필요 없는 변형은 적용 불가 이유를 미리 기록하고 실제 분모를 공개한다. 후보 출력 여부에 따라 적용 여부를 바꾸지 않으며 미전달 slot도 삭제하지 않는다.</a:t>
+            </a:r>
+          </a:p>
+          <a:p xmlns:a="http://schemas.openxmlformats.org/drawingml/2006/main">
+            <a:r>
+              <a:t/>
+            </a:r>
+          </a:p>
+          <a:p xmlns:a="http://schemas.openxmlformats.org/drawingml/2006/main">
+            <a:r>
+              <a:t>음성 중단은 새 발화 시작부터 이전 출력의 마지막 sample까지 따로 검사한다. 업무 취소 완료와 동일시하지 않는다. 이 제어 회귀를 응답 평균에 섞어 첫 답변시간을 줄이지 않는다. 기본 시간점수는 warm 상태이며 cold 첫 반응은 별도 보고한다. 미전달은 §2.5대로 실제 관측시간과 상태를 남긴다.</a:t>
             </a:r>
           </a:p>
           <a:p xmlns:a="http://schemas.openxmlformats.org/drawingml/2006/main">
@@ -3323,77 +4473,122 @@
           </a:p>
           <a:p xmlns:a="http://schemas.openxmlformats.org/drawingml/2006/main">
             <a:r>
-              <a:t>**설명:** 필요한 최종 결과를 사용자에게 빠르게 전달해야 한다.</a:t>
-            </a:r>
-          </a:p>
-          <a:p xmlns:a="http://schemas.openxmlformats.org/drawingml/2006/main">
-            <a:r>
-              <a:t/>
-            </a:r>
-          </a:p>
-          <a:p xmlns:a="http://schemas.openxmlformats.org/drawingml/2006/main">
-            <a:r>
-              <a:t>**단일 목표:** 처리 경로별 p95 VIA 완료시간의 최댓값 10초 이하.</a:t>
-            </a:r>
-          </a:p>
-          <a:p xmlns:a="http://schemas.openxmlformats.org/drawingml/2006/main">
-            <a:r>
-              <a:t/>
-            </a:r>
-          </a:p>
-          <a:p xmlns:a="http://schemas.openxmlformats.org/drawingml/2006/main">
-            <a:r>
-              <a:t>**근거:** Nielsen의 10초 기준은 사용자가 상호작용에 주의를 유지하는 상한을 제안한다 [S04]. 이 값을 VIA 책임 처리의 완료 예산으로 적용한다. 외부 Agent의 긴 도메인 작업을 포함한 전체 업무가 10초에 끝난다는 뜻은 아니다. 따라서 발표 표에도 'VIA 완료시간'이라고 명시한다.</a:t>
-            </a:r>
-          </a:p>
-          <a:p xmlns:a="http://schemas.openxmlformats.org/drawingml/2006/main">
-            <a:r>
-              <a:t/>
-            </a:r>
-          </a:p>
-          <a:p xmlns:a="http://schemas.openxmlformats.org/drawingml/2006/main">
-            <a:r>
-              <a:t>직접 응답은 VIA가 결과를 만드는 경로이고 위임은 Downstream Agent가 실제 업무를 수행하는 경로이다. **의존 관계**는 앞 결과를 다음 작업의 입력으로 쓰는 관계이다. 예를 들어 보고서 결과로 발표 슬라이드를 만드는 경우이며, 직접 응답과 위임 모두에 생길 수 있다. 세 번째 상호 배타적인 처리 경로로 분류하지 않는다.</a:t>
-            </a:r>
-          </a:p>
-          <a:p xmlns:a="http://schemas.openxmlformats.org/drawingml/2006/main">
-            <a:r>
-              <a:t/>
-            </a:r>
-          </a:p>
-          <a:p xmlns:a="http://schemas.openxmlformats.org/drawingml/2006/main">
-            <a:r>
-              <a:t>측정은 직접 응답과 위임을 각각 의존 관계 없음과 있음으로 나눈 네 층으로 수행한다. 모든 층에 같은 10초 목표를 적용하고 최악 층의 p95를 보고한다. 층별 별도 목표 세 개를 만들면 동일한 VIA 완료 예산의 의미가 흐려지므로 채택하지 않는다.</a:t>
-            </a:r>
-          </a:p>
-          <a:p xmlns:a="http://schemas.openxmlformats.org/drawingml/2006/main">
-            <a:r>
-              <a:t/>
-            </a:r>
-          </a:p>
-          <a:p xmlns:a="http://schemas.openxmlformats.org/drawingml/2006/main">
-            <a:r>
-              <a:t>**VIA 책임 시간 계산:** 최초 입력부터 필수 최종 전달까지의 사건 의존 그래프를 만든다. 해석, 근거 읽기, 자원 대기, 상태 채택, routing, 직렬화, Agent 통합 통신, 결과 결합과 실제 출력의 VIA 책임 구간을 포함한다. 외부 Agent의 도메인 작업과 사용자의 답변 대기 구간은 비용 0으로 치환한다. 이 그래프의 최장 경로 시간이 VIA 완료시간이다. 중첩된 parent span과 child span을 동시에 더하지 않는다. 병렬 작업도 모두 직렬 합산하지 않는다. 단순히 모든 Agent 시간을 총 wall time에서 빼면 겹치는 대기로 음수가 생길 수 있으므로 사용하지 않는다.</a:t>
-            </a:r>
-          </a:p>
-          <a:p xmlns:a="http://schemas.openxmlformats.org/drawingml/2006/main">
-            <a:r>
-              <a:t/>
-            </a:r>
-          </a:p>
-          <a:p xmlns:a="http://schemas.openxmlformats.org/drawingml/2006/main">
-            <a:r>
-              <a:t>동시에 실제 사용자 체감 wall time과 외부 대기 시간을 보조 기록한다. 필수 결과의 text, artifact 접근 및 필요한 최종 음성 전달이 모두 끝나야 종료한다. 첫 packet이나 첫 음절만으로 완료를 판정하지 않는다. 실패 시험과 필수 결과 누락은 무한대 지연으로 남긴다.</a:t>
-            </a:r>
-          </a:p>
-          <a:p xmlns:a="http://schemas.openxmlformats.org/drawingml/2006/main">
-            <a:r>
-              <a:t/>
-            </a:r>
-          </a:p>
-          <a:p xmlns:a="http://schemas.openxmlformats.org/drawingml/2006/main">
-            <a:r>
-              <a:t>자료 길이는 양쪽에 동일한 manifest로 고정한다. 일상 결과의 요약과 상세 artifact, 긴 음성 설명은 별도 층으로 표시한다. 소리의 실제 재생 시간도 VIA 비용에 포함하므로 10초를 넘는 필수 발화를 이 목표 안에 억지로 통과시킬 수 없다. 출력 축약이 필수 내용을 없애면 V-01이나 V-03에서 실패한다. 결과 크기가 다른 사례를 삭제해 목표를 통과시키지 않으며 적용 범위 변경은 측정 전에 승인한 공통 계약에만 반영한다.</a:t>
+              <a:t>**설명:** VIA의 처리로 결과 전달이 늦어지지 않아야 한다.</a:t>
+            </a:r>
+          </a:p>
+          <a:p xmlns:a="http://schemas.openxmlformats.org/drawingml/2006/main">
+            <a:r>
+              <a:t/>
+            </a:r>
+          </a:p>
+          <a:p xmlns:a="http://schemas.openxmlformats.org/drawingml/2006/main">
+            <a:r>
+              <a:t>**단일 목표:** 평균 VIA 처리시간 10초 이하.</a:t>
+            </a:r>
+          </a:p>
+          <a:p xmlns:a="http://schemas.openxmlformats.org/drawingml/2006/main">
+            <a:r>
+              <a:t/>
+            </a:r>
+          </a:p>
+          <a:p xmlns:a="http://schemas.openxmlformats.org/drawingml/2006/main">
+            <a:r>
+              <a:t>Nielsen의 10초 주의 유지 기준을 참고해 VIA의 추가 처리 예산을 선택한다 [S04]. 외부가 30초 일한 뒤 VIA가 4초 처리하면 사용자의 전체 대기는 34초일 수 있다. 이 경우 4초의 VIA 목표를 만족했다고 해서 전체 경험이 10초 이내라고 설명하지 않는다. 직접 응답처럼 외부 대기가 없는 짧은 요청에서는 전체 경과시간과 일치한다.</a:t>
+            </a:r>
+          </a:p>
+          <a:p xmlns:a="http://schemas.openxmlformats.org/drawingml/2006/main">
+            <a:r>
+              <a:t/>
+            </a:r>
+          </a:p>
+          <a:p xmlns:a="http://schemas.openxmlformats.org/drawingml/2006/main">
+            <a:r>
+              <a:t>짧은 출력 계약에 예산을 배분한 예시는 입력 해석과 근거 확인 3초, 채택과 위임 준비 1초, 결과 연결과 응답 구성 2초, 실제 최종 음성 4초로 총 10초다. 이것은 설계 배분이며 각 단계의 실측값이나 별도의 합격 목표가 아니다. 실제 병렬 실행의 중복을 제거해 측정한다.</a:t>
+            </a:r>
+          </a:p>
+          <a:p xmlns:a="http://schemas.openxmlformats.org/drawingml/2006/main">
+            <a:r>
+              <a:t/>
+            </a:r>
+          </a:p>
+          <a:p xmlns:a="http://schemas.openxmlformats.org/drawingml/2006/main">
+            <a:r>
+              <a:t>직접 응답은 VIA가 결과를 만드는 경로, 위임은 외부 Agent가 업무를 수행하는 경로다. 요청 관계는 선행 결과를 다음 입력으로 쓰는 연결이며 제3의 상호 배타적 경로가 아니다. 직접 및 위임 각각에 관계 있음과 없음 표식을 붙여 네 조건의 평균을 진단으로 공개한다. 주목표는 적용 시험의 전체 산술평균 하나다.</a:t>
+            </a:r>
+          </a:p>
+          <a:p xmlns:a="http://schemas.openxmlformats.org/drawingml/2006/main">
+            <a:r>
+              <a:t/>
+            </a:r>
+          </a:p>
+          <a:p xmlns:a="http://schemas.openxmlformats.org/drawingml/2006/main">
+            <a:r>
+              <a:t>```text</a:t>
+            </a:r>
+          </a:p>
+          <a:p xmlns:a="http://schemas.openxmlformats.org/drawingml/2006/main">
+            <a:r>
+              <a:t>W(i) = 실제 입력 종료부터 해당 요청의 필수 최종 전달까지의 구간</a:t>
+            </a:r>
+          </a:p>
+          <a:p xmlns:a="http://schemas.openxmlformats.org/drawingml/2006/main">
+            <a:r>
+              <a:t>E(i) = 외부 작업 또는 사용자 답변만 기다리며 VIA가 할 필수 처리가 없는 구간</a:t>
+            </a:r>
+          </a:p>
+          <a:p xmlns:a="http://schemas.openxmlformats.org/drawingml/2006/main">
+            <a:r>
+              <a:t>T_via(i) = 길이(W(i)에서 E(i)의 합집합을 제외한 구간)</a:t>
+            </a:r>
+          </a:p>
+          <a:p xmlns:a="http://schemas.openxmlformats.org/drawingml/2006/main">
+            <a:r>
+              <a:t>평균 VIA 처리시간 = Σ T_via(i) / 적용 trial 수</a:t>
+            </a:r>
+          </a:p>
+          <a:p xmlns:a="http://schemas.openxmlformats.org/drawingml/2006/main">
+            <a:r>
+              <a:t>```</a:t>
+            </a:r>
+          </a:p>
+          <a:p xmlns:a="http://schemas.openxmlformats.org/drawingml/2006/main">
+            <a:r>
+              <a:t/>
+            </a:r>
+          </a:p>
+          <a:p xmlns:a="http://schemas.openxmlformats.org/drawingml/2006/main">
+            <a:r>
+              <a:t>E는 Agent가 걸린 시간을 단순 합산한 값이 아니다. 그 시간 중 VIA가 의미 해석, 근거 읽기, 결과 준비 또는 필요한 출력을 진행하면 VIA 구간으로 포함한다. 자체 model queue, scheduler 대기, storage와 IPC, Agent 통합 통신, retry와 실제 출력은 포함한다. 후보가 표시한 '외부 대기' 이름을 믿지 않고 독립 event 및 필수 작업의 ready/blocked 상태로 검증한다. 완료에 필요 없는 background 유지 작업은 별도 비용이지만 foreground 처리를 지연시키면 그 대기도 포함한다.</a:t>
+            </a:r>
+          </a:p>
+          <a:p xmlns:a="http://schemas.openxmlformats.org/drawingml/2006/main">
+            <a:r>
+              <a:t/>
+            </a:r>
+          </a:p>
+          <a:p xmlns:a="http://schemas.openxmlformats.org/drawingml/2006/main">
+            <a:r>
+              <a:t>**겹치는 구간 예:** 전체 W는 0~34초다. VIA 해석은 0~1초, Agent 작업은 1~31초, 그동안 필요한 VIA 준비는 10~12초, 최종 출력은 31~34초다. 외부 작업만 기다린 E는 1~10초와 12~31초로 28초다. VIA 시간은 **34 - 28 = 6초**다. Agent 30초를 그대로 빼 얻은 4초나, 외부 비용을 0으로 놓은 가상 그래프의 시간을 실제 관측값으로 제시하지 않는다.</a:t>
+            </a:r>
+          </a:p>
+          <a:p xmlns:a="http://schemas.openxmlformats.org/drawingml/2006/main">
+            <a:r>
+              <a:t/>
+            </a:r>
+          </a:p>
+          <a:p xmlns:a="http://schemas.openxmlformats.org/drawingml/2006/main">
+            <a:r>
+              <a:t>완료는 필수 결과 text, artifact 접근과 계약상 최종 음성 전달까지 끝난 시각이다. 외부 Agent 접수만 필요한 Request는 접수 확인 전달이 그 Request의 종료점이며 Task 실행 종료를 섞지 않는다. 결과 전달을 목표로 하는 시험은 결과까지 관측한다. 같은 목표의 질문과 답변은 같은 trial에 남는다. 실패 안내까지 끝난 실제 시간도 기록하며 정확성은 따로 판정한다.</a:t>
+            </a:r>
+          </a:p>
+          <a:p xmlns:a="http://schemas.openxmlformats.org/drawingml/2006/main">
+            <a:r>
+              <a:t/>
+            </a:r>
+          </a:p>
+          <a:p xmlns:a="http://schemas.openxmlformats.org/drawingml/2006/main">
+            <a:r>
+              <a:t>주목표의 적용 모집단은 warm 짧은 출력 계약이다. 긴 20초 설명, cold loading과 전체 wall time은 같은 보고서에서 별도로 공개한다. 입력 manifest에서 정한 분류를 실행 결과를 보고 옮기지 않는다. 실제 재생이 길어졌다면 원래 짧은 계약 시험의 시간 미달로 남긴다. 미전달은 §2.5에 따라 목표 충족을 보류한다.</a:t>
             </a:r>
           </a:p>
           <a:p xmlns:a="http://schemas.openxmlformats.org/drawingml/2006/main">
@@ -3433,72 +4628,72 @@
           </a:p>
           <a:p xmlns:a="http://schemas.openxmlformats.org/drawingml/2006/main">
             <a:r>
-              <a:t>**근거:** SEI는 변경 비용을 바뀌는 책임과 다른 요소로의 전파 및 시험 비용으로 설명한다 [S05]. 이를 VIA에서 한 책임 요소, 그 요소의 계약, 그 계약을 소비하는 요소까지의 국소 변경 예산으로 구체화하여 평균 3개를 제안한다. 논문이 3이라는 상한을 제시한 것은 아니다. 모든 변경이 항상 세 역할을 바꿔야 한다는 뜻도 아니다.</a:t>
-            </a:r>
-          </a:p>
-          <a:p xmlns:a="http://schemas.openxmlformats.org/drawingml/2006/main">
-            <a:r>
-              <a:t/>
-            </a:r>
-          </a:p>
-          <a:p xmlns:a="http://schemas.openxmlformats.org/drawingml/2006/main">
-            <a:r>
-              <a:t>공통 변경 과제는 아래 여섯 개를 제안한다. 양쪽 대안은 같은 사용자 동작과 외부 capability를 유지해야 한다.</a:t>
-            </a:r>
-          </a:p>
-          <a:p xmlns:a="http://schemas.openxmlformats.org/drawingml/2006/main">
-            <a:r>
-              <a:t/>
-            </a:r>
-          </a:p>
-          <a:p xmlns:a="http://schemas.openxmlformats.org/drawingml/2006/main">
-            <a:r>
-              <a:t>1. 참조 대상에 표의 선택 범위를 추가한다.</a:t>
-            </a:r>
-          </a:p>
-          <a:p xmlns:a="http://schemas.openxmlformats.org/drawingml/2006/main">
-            <a:r>
-              <a:t>2. 기존 Task를 이어 쓰는 요청 관계 규칙을 추가한다.</a:t>
-            </a:r>
-          </a:p>
-          <a:p xmlns:a="http://schemas.openxmlformats.org/drawingml/2006/main">
-            <a:r>
-              <a:t>3. Downstream Agent의 진행 및 결과 protocol을 변경한다.</a:t>
-            </a:r>
-          </a:p>
-          <a:p xmlns:a="http://schemas.openxmlformats.org/drawingml/2006/main">
-            <a:r>
-              <a:t>4. 음성 중단 정책을 바꾸되 Task 실행은 유지한다.</a:t>
-            </a:r>
-          </a:p>
-          <a:p xmlns:a="http://schemas.openxmlformats.org/drawingml/2006/main">
-            <a:r>
-              <a:t>5. Context 보존기간과 삭제 전파 정책을 변경한다.</a:t>
-            </a:r>
-          </a:p>
-          <a:p xmlns:a="http://schemas.openxmlformats.org/drawingml/2006/main">
-            <a:r>
-              <a:t>6. 외부 결과 중복 알림의 재접속 처리 규칙을 변경한다.</a:t>
-            </a:r>
-          </a:p>
-          <a:p xmlns:a="http://schemas.openxmlformats.org/drawingml/2006/main">
-            <a:r>
-              <a:t/>
-            </a:r>
-          </a:p>
-          <a:p xmlns:a="http://schemas.openxmlformats.org/drawingml/2006/main">
-            <a:r>
-              <a:t>측정 전 후보별 논리 요소 ledger를 같은 수준으로 작성한다. Module, 독립 interface 계약, 공유 schema 및 별도 runtime 배치 단위를 등록하고 동일 정의를 따른다. 파일이나 코드 줄을 요소로 세지 않는다. 책임 Module의 내부 구현과 그 Module 전용 private schema는 한 요소로 센다. 공개 공유 계약을 변경하면 독립 계약 요소로 센다. 그림의 사각형을 임의로 합쳐 수를 줄일 수 없다.</a:t>
-            </a:r>
-          </a:p>
-          <a:p xmlns:a="http://schemas.openxmlformats.org/drawingml/2006/main">
-            <a:r>
-              <a:t/>
-            </a:r>
-          </a:p>
-          <a:p xmlns:a="http://schemas.openxmlformats.org/drawingml/2006/main">
-            <a:r>
-              <a:t>과제별로 실제 추가, 수정, 삭제가 필요한 요소의 ID 합집합 크기 N을 센다. 공통 코드, 설정, 테스트 harness를 변경해야 기능이 성립하면 해당 논리 요소도 포함한다. 같은 요소의 여러 파일과 여러 commit은 한 번만 센다. 설계만 있을 때는 예상 영향 수로 표시하고 실제 수행 비용으로 주장하지 않는다. 해결하지 못한 과제를 평균에서 빼지 않고 미달로 기록한다.</a:t>
+              <a:t>SEI는 수정할 책임과 변경 전파가 변경 및 시험 비용을 만든다고 설명한다 [S05]. 이를 하나의 책임, 독립 계약, 소비 책임까지의 국소 변경 예산 3개로 구체화한다. 원문이 3개를 규정했다는 뜻은 아니다. 예를 들어 결과 protocol 필드 추가가 adapter 책임 C, 공개 계약 I, 소비 책임 C에 머무르면 3개다. 추가 공유 상태나 배포 변경까지 요구하면 실제 count를 늘린다.</a:t>
+            </a:r>
+          </a:p>
+          <a:p xmlns:a="http://schemas.openxmlformats.org/drawingml/2006/main">
+            <a:r>
+              <a:t/>
+            </a:r>
+          </a:p>
+          <a:p xmlns:a="http://schemas.openxmlformats.org/drawingml/2006/main">
+            <a:r>
+              <a:t>[Architecture Element 정의](../../architecture/10-element-definition.md)의 **C 책임, I interface 계약, S 상태 책임, D 배포 단위**를 그대로 적용한다. Component나 Module 사각형 및 파일 수를 세지 않는다. 큰 통합 Module도 독립 책임 여러 개를 바꾸면 여러 C로 센다. 분리된 helper 여러 파일이 동일 책임이면 한 C다. private payload와 공개 I/S의 중복 집계를 피한다.</a:t>
+            </a:r>
+          </a:p>
+          <a:p xmlns:a="http://schemas.openxmlformats.org/drawingml/2006/main">
+            <a:r>
+              <a:t/>
+            </a:r>
+          </a:p>
+          <a:p xmlns:a="http://schemas.openxmlformats.org/drawingml/2006/main">
+            <a:r>
+              <a:t>측정 전 같은 기능 책임의 후보별 대응표를 작성하고 독립 검토자가 분해 수준을 확인한다. 요소마다 identity, 책임 경계, 독립성, 변경 판정 조건과 증거를 등록한다. 측정 후 유리하게 묶거나 나누지 않는다. 실제 수정 전의 영향 분석과 수정 후 diff를 대조한다.</a:t>
+            </a:r>
+          </a:p>
+          <a:p xmlns:a="http://schemas.openxmlformats.org/drawingml/2006/main">
+            <a:r>
+              <a:t/>
+            </a:r>
+          </a:p>
+          <a:p xmlns:a="http://schemas.openxmlformats.org/drawingml/2006/main">
+            <a:r>
+              <a:t>| 과제 | 공통 변경 목표 |</a:t>
+            </a:r>
+          </a:p>
+          <a:p xmlns:a="http://schemas.openxmlformats.org/drawingml/2006/main">
+            <a:r>
+              <a:t>| --- | --- |</a:t>
+            </a:r>
+          </a:p>
+          <a:p xmlns:a="http://schemas.openxmlformats.org/drawingml/2006/main">
+            <a:r>
+              <a:t>| CH01 | 화면 참조 대상에 표의 선택 범위를 추가 |</a:t>
+            </a:r>
+          </a:p>
+          <a:p xmlns:a="http://schemas.openxmlformats.org/drawingml/2006/main">
+            <a:r>
+              <a:t>| CH02 | 기존 Task를 이어 쓰는 요청 관계 규칙 추가 |</a:t>
+            </a:r>
+          </a:p>
+          <a:p xmlns:a="http://schemas.openxmlformats.org/drawingml/2006/main">
+            <a:r>
+              <a:t>| CH03 | Agent 진행 및 결과 protocol의 revision 필드 변경 |</a:t>
+            </a:r>
+          </a:p>
+          <a:p xmlns:a="http://schemas.openxmlformats.org/drawingml/2006/main">
+            <a:r>
+              <a:t>| CH04 | 음성 중단 정책 변경, 기존 Task 실행은 유지 |</a:t>
+            </a:r>
+          </a:p>
+          <a:p xmlns:a="http://schemas.openxmlformats.org/drawingml/2006/main">
+            <a:r>
+              <a:t>| CH05 | Context 보존기간과 삭제 전파 정책 변경 |</a:t>
+            </a:r>
+          </a:p>
+          <a:p xmlns:a="http://schemas.openxmlformats.org/drawingml/2006/main">
+            <a:r>
+              <a:t>| CH06 | 중복 결과와 재접속 확인의 결합 규칙 변경 |</a:t>
             </a:r>
           </a:p>
           <a:p xmlns:a="http://schemas.openxmlformats.org/drawingml/2006/main">
@@ -3513,6 +4708,11 @@
           </a:p>
           <a:p xmlns:a="http://schemas.openxmlformats.org/drawingml/2006/main">
             <a:r>
+              <a:t>N(s) = 실제 추가, 수정, 삭제가 필요한 등록 요소 ID의 합집합 크기</a:t>
+            </a:r>
+          </a:p>
+          <a:p xmlns:a="http://schemas.openxmlformats.org/drawingml/2006/main">
+            <a:r>
               <a:t>평균 변경 요소 수 = Σ N(s) / 6</a:t>
             </a:r>
           </a:p>
@@ -3538,7 +4738,17 @@
           </a:p>
           <a:p xmlns:a="http://schemas.openxmlformats.org/drawingml/2006/main">
             <a:r>
-              <a:t>MH는 person-hour, MM는 person-month이다. a는 분석과 공통 검증의 고정 비용, b는 요소당 추가 수정과 시험의 비용이다. 완료된 실제 과제에서 작업시간을 기록하고 변경 종류별 회귀로 보정한다. 자료가 적으면 임의의 a와 b를 채우지 않는다. H_month는 조직의 표준 월 근무시간이며 160시간을 선택한다면 8시간 × 20일이라는 환산 규약을 명시한다. 3개를 3MH 또는 3MM로 곧바로 환산할 수 없다. 보정 자료 수, 추정 오차와 실제 MH를 함께 공개한다.</a:t>
+              <a:t>동일 요소의 여러 파일과 commit은 한 번만 센다. 과제를 해결하지 못하면 count 0으로 통과시키지 않고 미완료로 보고하며 변경 목표 충족 판정을 보류한다. 설계만 있으면 예상 영향 수이며 실제 변경 실적이 아니다. 여섯 과제와 DP에 관련된 하위집합을 함께 공개하되 후보별로 과제를 삭제하지 않는다.</a:t>
+            </a:r>
+          </a:p>
+          <a:p xmlns:a="http://schemas.openxmlformats.org/drawingml/2006/main">
+            <a:r>
+              <a:t/>
+            </a:r>
+          </a:p>
+          <a:p xmlns:a="http://schemas.openxmlformats.org/drawingml/2006/main">
+            <a:r>
+              <a:t>MH는 person-hour, MM는 person-month다. a는 공통 분석 및 검증 비용, b는 요소당 실제 작업 비용이다. 같은 종류의 완료된 과제에서 시간을 기록하고 회귀 및 교차 검증으로 보정한다. 자료가 없으면 임의 계수를 채우지 않는다. H_month는 조직의 월 표준시간이며 160시간을 쓰면 8시간 × 20일이라는 환산 규약을 명시한다. count가 같은 두 구조라도 실제 MH는 다를 수 있다. 모델과 오차를 함께 공개한다.</a:t>
             </a:r>
           </a:p>
           <a:p xmlns:a="http://schemas.openxmlformats.org/drawingml/2006/main">
@@ -3558,37 +4768,47 @@
           </a:p>
           <a:p xmlns:a="http://schemas.openxmlformats.org/drawingml/2006/main">
             <a:r>
-              <a:t>**설명:** 상시 실행 중에도 다른 PC 작업을 위한 메모리를 남겨야 한다.</a:t>
-            </a:r>
-          </a:p>
-          <a:p xmlns:a="http://schemas.openxmlformats.org/drawingml/2006/main">
-            <a:r>
-              <a:t/>
-            </a:r>
-          </a:p>
-          <a:p xmlns:a="http://schemas.openxmlformats.org/drawingml/2006/main">
-            <a:r>
-              <a:t>**단일 목표:** 최대 전체 메모리 16GB 이하. GB는 10^9 bytes이다.</a:t>
-            </a:r>
-          </a:p>
-          <a:p xmlns:a="http://schemas.openxmlformats.org/drawingml/2006/main">
-            <a:r>
-              <a:t/>
-            </a:r>
-          </a:p>
-          <a:p xmlns:a="http://schemas.openxmlformats.org/drawingml/2006/main">
-            <a:r>
-              <a:t>**장치 근거:** Samsung의 Galaxy Book6 Ultra NP960UJH-XG3IN 공식 사양은 32GB LPDDR5X RAM과 RTX 5070 Laptop GPU의 전용 8GB GDDR7을 명시한다 [S06]. 이 고사양 노트북을 기준으로 사용자 PC의 RAM 절반 이상을 VIA 외 용도로 남기는 예산을 설정한다.</a:t>
-            </a:r>
-          </a:p>
-          <a:p xmlns:a="http://schemas.openxmlformats.org/drawingml/2006/main">
-            <a:r>
-              <a:t/>
-            </a:r>
-          </a:p>
-          <a:p xmlns:a="http://schemas.openxmlformats.org/drawingml/2006/main">
-            <a:r>
-              <a:t>| 32GB RAM의 배정 | 예산 | 성격 |</a:t>
+              <a:t>**설명:** 상시 실행에 필요한 메모리를 제한해야 한다.</a:t>
+            </a:r>
+          </a:p>
+          <a:p xmlns:a="http://schemas.openxmlformats.org/drawingml/2006/main">
+            <a:r>
+              <a:t/>
+            </a:r>
+          </a:p>
+          <a:p xmlns:a="http://schemas.openxmlformats.org/drawingml/2006/main">
+            <a:r>
+              <a:t>**단일 목표:** 최대 전체 메모리 16GB 이하. GB는 10^9 bytes다.</a:t>
+            </a:r>
+          </a:p>
+          <a:p xmlns:a="http://schemas.openxmlformats.org/drawingml/2006/main">
+            <a:r>
+              <a:t/>
+            </a:r>
+          </a:p>
+          <a:p xmlns:a="http://schemas.openxmlformats.org/drawingml/2006/main">
+            <a:r>
+              <a:t>### 9.1 장치와 VIA 자체 예산</a:t>
+            </a:r>
+          </a:p>
+          <a:p xmlns:a="http://schemas.openxmlformats.org/drawingml/2006/main">
+            <a:r>
+              <a:t/>
+            </a:r>
+          </a:p>
+          <a:p xmlns:a="http://schemas.openxmlformats.org/drawingml/2006/main">
+            <a:r>
+              <a:t>삼성 공식 NP960UJH-XG3IN 사양의 32GB RAM과 전용 8GB VRAM을 기준으로 한다 [S06]. 다른 사용자 앱에 임의의 6GB를 할당해 목표를 계산하지 않는다. 아래 합계는 **VIA가 직접 부담하는 전체 물리 메모리**의 예산이다.</a:t>
+            </a:r>
+          </a:p>
+          <a:p xmlns:a="http://schemas.openxmlformats.org/drawingml/2006/main">
+            <a:r>
+              <a:t/>
+            </a:r>
+          </a:p>
+          <a:p xmlns:a="http://schemas.openxmlformats.org/drawingml/2006/main">
+            <a:r>
+              <a:t>| 항목 | 예산 | 계산 또는 제한 근거 |</a:t>
             </a:r>
           </a:p>
           <a:p xmlns:a="http://schemas.openxmlformats.org/drawingml/2006/main">
@@ -3598,62 +4818,72 @@
           </a:p>
           <a:p xmlns:a="http://schemas.openxmlformats.org/drawingml/2006/main">
             <a:r>
-              <a:t>| Windows와 기본 상주 프로그램 | 6GB | VIA가 제안하는 예약량, 실측 OS 사용량 아님 |</a:t>
-            </a:r>
-          </a:p>
-          <a:p xmlns:a="http://schemas.openxmlformats.org/drawingml/2006/main">
-            <a:r>
-              <a:t>| 사용자의 browser와 문서 및 개발 앱 | 6GB | 공존 부하 예산, 실제 foreground app manifest로 검증 필요 |</a:t>
-            </a:r>
-          </a:p>
-          <a:p xmlns:a="http://schemas.openxmlformats.org/drawingml/2006/main">
-            <a:r>
-              <a:t>| 부하 변동과 작업 확장을 위한 여유 | 4GB | 설계상 headroom |</a:t>
-            </a:r>
-          </a:p>
-          <a:p xmlns:a="http://schemas.openxmlformats.org/drawingml/2006/main">
-            <a:r>
-              <a:t>| VIA의 전체 메모리 상한 | 16GB | 32 - 6 - 6 - 4로 계산한 단일 목표 |</a:t>
-            </a:r>
-          </a:p>
-          <a:p xmlns:a="http://schemas.openxmlformats.org/drawingml/2006/main">
-            <a:r>
-              <a:t/>
-            </a:r>
-          </a:p>
-          <a:p xmlns:a="http://schemas.openxmlformats.org/drawingml/2006/main">
-            <a:r>
-              <a:t>전용 GPU의 8GB를 RAM에 더해 VIA 예산을 24GB로 키우지 않는다. 목표는 VIA가 사용하는 CPU RAM과 전용 VRAM의 실제 물리 사용량을 합친 16GB이므로 CPU RAM만 16GB를 사용하는 경우에도 비 VIA RAM 예산을 보존한다. GPU 전용 메모리에는 별도의 물리적 장치 한계가 있다. 16GB가 전부 GPU에 들어간다고 가정하지 않는다. 64GB 장치를 사용하더라도 발표 목표를 자동으로 배증하지 않는다.</a:t>
-            </a:r>
-          </a:p>
-          <a:p xmlns:a="http://schemas.openxmlformats.org/drawingml/2006/main">
-            <a:r>
-              <a:t/>
-            </a:r>
-          </a:p>
-          <a:p xmlns:a="http://schemas.openxmlformats.org/drawingml/2006/main">
-            <a:r>
-              <a:t>**모델 근거와 할당:** 현재 reference Architecture의 약 10B는 Thinker/backbone의 목표 크기이다. encoders, Talker, Streaming ASR와 기타 learned helper까지 10B라고 간주하지 않는다. 원시 가중치 bytes는 N × bit / 8이므로 10B backbone만 FP16에서 약 20GB, 8bit에서 약 10GB, 4bit에서 약 5GB이다. AWQ는 4bit LLM 배포의 실제 연구 근거이다 [S07]. 양자화 선택이나 VIA의 정확도 보존을 승인했다는 뜻은 아니다.</a:t>
-            </a:r>
-          </a:p>
-          <a:p xmlns:a="http://schemas.openxmlformats.org/drawingml/2006/main">
-            <a:r>
-              <a:t/>
-            </a:r>
-          </a:p>
-          <a:p xmlns:a="http://schemas.openxmlformats.org/drawingml/2006/main">
-            <a:r>
-              <a:t>16GB 안에서 backbone 가중치와 양자화 부대 정보 6GB, 나머지 learned weights 4GB, KV와 중간 상태 3GB, runtime과 UI 및 관측 버퍼 3GB의 할당을 제안한다. 모두 상한 예산이며 실제 모델 크기 주장이 아니다. 전체 weight inventory가 예산을 초과하면 목표 미달로 보고하고, 모델 구성을 바꿀 때에는 기능 정확성도 다시 확인한다. CPU staging copy와 GPU loaded copy가 실제로 공존하면 둘 다 포함하므로 이 예산을 더 빠르게 소진한다.</a:t>
-            </a:r>
-          </a:p>
-          <a:p xmlns:a="http://schemas.openxmlformats.org/drawingml/2006/main">
-            <a:r>
-              <a:t/>
-            </a:r>
-          </a:p>
-          <a:p xmlns:a="http://schemas.openxmlformats.org/drawingml/2006/main">
-            <a:r>
-              <a:t>**측정 식:**</a:t>
+              <a:t>| 공유 가중치 전체 | 8GB | 10B backbone의 4bit 원시 5GB, 다른 learned weights 2GB, quantization 부대 정보 1GB |</a:t>
+            </a:r>
+          </a:p>
+          <a:p xmlns:a="http://schemas.openxmlformats.org/drawingml/2006/main">
+            <a:r>
+              <a:t>| 역할 및 producer KV 전체 | 3GB | 공개 Qwen KV 구조로 계산한 두 8k Context의 약 2.684GB를 상향 배정 |</a:t>
+            </a:r>
+          </a:p>
+          <a:p xmlns:a="http://schemas.openxmlformats.org/drawingml/2006/main">
+            <a:r>
+              <a:t>| 추론 실행 공간 | 3GB | activation, compute workspace, encoder와 Talker 임시 tensor의 합계 제한 |</a:t>
+            </a:r>
+          </a:p>
+          <a:p xmlns:a="http://schemas.openxmlformats.org/drawingml/2006/main">
+            <a:r>
+              <a:t>| 입력 근거와 UI 및 상태 buffer | 1GB | 아래 해상도와 보존량을 사용한 약 0.939GB 계산 |</a:t>
+            </a:r>
+          </a:p>
+          <a:p xmlns:a="http://schemas.openxmlformats.org/drawingml/2006/main">
+            <a:r>
+              <a:t>| loading 중 복제와 staging | 1GB | 동시에 존재하는 추가 물리 복제의 제한 |</a:t>
+            </a:r>
+          </a:p>
+          <a:p xmlns:a="http://schemas.openxmlformats.org/drawingml/2006/main">
+            <a:r>
+              <a:t>| **합계** | **16GB** | **8 + 3 + 3 + 1 + 1** |</a:t>
+            </a:r>
+          </a:p>
+          <a:p xmlns:a="http://schemas.openxmlformats.org/drawingml/2006/main">
+            <a:r>
+              <a:t/>
+            </a:r>
+          </a:p>
+          <a:p xmlns:a="http://schemas.openxmlformats.org/drawingml/2006/main">
+            <a:r>
+              <a:t>약 10B는 Thinker/backbone 목표이며 전체 Omni와 helper 합계가 아니다. 모든 encoders, Talker, Streaming ASR와 helper를 inventory에 포함한다. 원시 가중치는 N × bit / 8이다. 10B backbone은 4bit 약 5GB, 8bit 약 10GB, FP16 약 20GB다. AWQ는 4bit LLM 배포의 기술적 근거 [S07]이며 모든 VIA helper를 같은 정밀도로 양자화할 수 있거나 정확도가 보존된다는 보증은 아니다.</a:t>
+            </a:r>
+          </a:p>
+          <a:p xmlns:a="http://schemas.openxmlformats.org/drawingml/2006/main">
+            <a:r>
+              <a:t/>
+            </a:r>
+          </a:p>
+          <a:p xmlns:a="http://schemas.openxmlformats.org/drawingml/2006/main">
+            <a:r>
+              <a:t>추가 learned weights 2GB는 실제 선정 모델의 크기라는 주장이 아니라 자원 계약이다. 예를 들어 전체가 4bit면 원시 약 4B, FP16이면 약 1B에 해당한다. 실제 혼합 정밀도와 양자화 metadata 및 scale bytes로 검사한다. 전체 inventory가 8GB를 넘으면 weight 예산 미달이다. 모델을 바꿔 수치를 맞추면 같은 V-01과 V-03 시험도 다시 필요하다.</a:t>
+            </a:r>
+          </a:p>
+          <a:p xmlns:a="http://schemas.openxmlformats.org/drawingml/2006/main">
+            <a:r>
+              <a:t/>
+            </a:r>
+          </a:p>
+          <a:p xmlns:a="http://schemas.openxmlformats.org/drawingml/2006/main">
+            <a:r>
+              <a:t>### 9.2 KV와 buffer 계산</a:t>
+            </a:r>
+          </a:p>
+          <a:p xmlns:a="http://schemas.openxmlformats.org/drawingml/2006/main">
+            <a:r>
+              <a:t/>
+            </a:r>
+          </a:p>
+          <a:p xmlns:a="http://schemas.openxmlformats.org/drawingml/2006/main">
+            <a:r>
+              <a:t>공개 Qwen3-14B의 config는 layer 40개, KV head 8개, head dimension 128과 bfloat16을 명시한다 [S12]. 이는 계산 예시이며 VIA가 Qwen3-14B를 선택했거나 10B Omni의 내부 config가 같다는 뜻은 아니다. 실제 선택 모델의 값으로 다시 계산해야 한다.</a:t>
             </a:r>
           </a:p>
           <a:p xmlns:a="http://schemas.openxmlformats.org/drawingml/2006/main">
@@ -3668,22 +4898,22 @@
           </a:p>
           <a:p xmlns:a="http://schemas.openxmlformats.org/drawingml/2006/main">
             <a:r>
-              <a:t>M(t) = VIA의 CPU 고유 상주 물리 bytes</a:t>
-            </a:r>
-          </a:p>
-          <a:p xmlns:a="http://schemas.openxmlformats.org/drawingml/2006/main">
-            <a:r>
-              <a:t>     + VIA의 전용 GPU 물리 bytes</a:t>
-            </a:r>
-          </a:p>
-          <a:p xmlns:a="http://schemas.openxmlformats.org/drawingml/2006/main">
-            <a:r>
-              <a:t>     + 다른 항목에 포함되지 않은 pinned 및 공유 물리 bytes</a:t>
-            </a:r>
-          </a:p>
-          <a:p xmlns:a="http://schemas.openxmlformats.org/drawingml/2006/main">
-            <a:r>
-              <a:t>최대 전체 메모리 = max_t M(t) / 10^9</a:t>
+              <a:t>KV bytes = 2(K와 V) × session 수 × layer 수 × token 수 × KV head 수 × head dimension × bytes/원소</a:t>
+            </a:r>
+          </a:p>
+          <a:p xmlns:a="http://schemas.openxmlformats.org/drawingml/2006/main">
+            <a:r>
+              <a:t>예시 = 2 × 2 × 40 × 8192 × 8 × 128 × 2</a:t>
+            </a:r>
+          </a:p>
+          <a:p xmlns:a="http://schemas.openxmlformats.org/drawingml/2006/main">
+            <a:r>
+              <a:t>     = 2,684,354,560 bytes = 약 2.684GB</a:t>
+            </a:r>
+          </a:p>
+          <a:p xmlns:a="http://schemas.openxmlformats.org/drawingml/2006/main">
+            <a:r>
+              <a:t>전체 KV 예산 = 3GB</a:t>
             </a:r>
           </a:p>
           <a:p xmlns:a="http://schemas.openxmlformats.org/drawingml/2006/main">
@@ -3698,27 +4928,132 @@
           </a:p>
           <a:p xmlns:a="http://schemas.openxmlformats.org/drawingml/2006/main">
             <a:r>
-              <a:t>여러 프로세스가 같은 물리 페이지를 매핑하면 한 번만 센다. 실제 CPU와 GPU 복제본은 별개이다. Windows Working Set의 단순 프로세스별 합계는 공유 페이지를 중복 셀 수 있고 Private Bytes만 쓰면 공유 가중치를 놓칠 수 있으므로 page 및 allocation ID와 GPU allocation ledger로 보정한다. process tree는 VIA launcher가 기록하고 모든 worker와 helper를 포함한다. pagefile로 밀어낸 bytes와 commit은 보조 기록으로 공개하여 swapping으로 피크를 낮춘 결과를 드러낸다.</a:t>
-            </a:r>
-          </a:p>
-          <a:p xmlns:a="http://schemas.openxmlformats.org/drawingml/2006/main">
-            <a:r>
-              <a:t/>
-            </a:r>
-          </a:p>
-          <a:p xmlns:a="http://schemas.openxmlformats.org/drawingml/2006/main">
-            <a:r>
-              <a:t>8시간 시험을 다음 순서로 수행한다. 상주 대기 두 시간, 요청 burst 한 시간, 정상 대화와 두 외부 실행 병행 두 시간, 화면 및 Context 보존 한도 도달과 삭제 한 시간, 장애 및 모델 재로딩 한 시간, 무입력 대기 한 시간이다. burst는 15초마다 한 요청을 제안하며 처리되지 않은 요청도 적체 상태로 남긴다. 나머지 단계의 입력 시간축은 동일 fixture로 고정한다. browser와 문서 앱 부하는 같은 파일과 tab 목록으로 유지하고 실제 사용량을 기록한다.</a:t>
-            </a:r>
-          </a:p>
-          <a:p xmlns:a="http://schemas.openxmlformats.org/drawingml/2006/main">
-            <a:r>
-              <a:t/>
-            </a:r>
-          </a:p>
-          <a:p xmlns:a="http://schemas.openxmlformats.org/drawingml/2006/main">
-            <a:r>
-              <a:t>최소 100ms 간격의 CPU 및 GPU 계측과 allocation high-water mark를 함께 사용한다. 짧은 load peak를 sampling만으로 놓치지 않도록 allocator의 생성과 해제 사건을 보조로 사용한다. 시작부터 종료까지의 최대값 하나를 목표와 비교하고 대기, 요청 및 복구 피크는 원인 분석용으로 분리한다. 장시간 무입력의 idle 메모리도 공개한다. CPU나 전력의 별도 목표를 새로 만들지는 않는다.</a:t>
+              <a:t>8k는 입력과 생성 및 multimodal token을 합친 session별 cache 양이다. 두 session은 S2S와 semantic 역할의 계산 예시다. 기능별 producer의 별도 KV, 보류된 session, 재사용 Context와 보조 모델 KV가 있으면 모두 같은 3GB에 포함한다. C의 producer 여섯 개를 무료로 두지 않는다. 가중치를 역할마다 복제하지 않으며, 공통 총 KV 예산 안에서 실제 session 운영과 교환 비용을 대안의 차이로 남긴다.</a:t>
+            </a:r>
+          </a:p>
+          <a:p xmlns:a="http://schemas.openxmlformats.org/drawingml/2006/main">
+            <a:r>
+              <a:t/>
+            </a:r>
+          </a:p>
+          <a:p xmlns:a="http://schemas.openxmlformats.org/drawingml/2006/main">
+            <a:r>
+              <a:t>2880 × 1800 BGRA 화면 32개의 원시 buffer는 약 0.664GB다. 16kHz mono 16bit 음성 10분은 0.0192GB다. source 읽기 buffer 0.128GB, UI 및 structured 상태 0.064GB와 index metadata 0.064GB를 더하면 약 0.939GB다. 이 retained 입력량을 메모리 시험 조건으로 고정하고 전체 1GB 예산과 대조한다. capture 간격이나 원본 삭제 정책을 이번 문서에서 Architecture 선택으로 확정하지 않는다. 추가 파생 tensor는 workspace, 영속 자료는 storage이며 실제 상주 page는 메모리 합계에 포함한다.</a:t>
+            </a:r>
+          </a:p>
+          <a:p xmlns:a="http://schemas.openxmlformats.org/drawingml/2006/main">
+            <a:r>
+              <a:t/>
+            </a:r>
+          </a:p>
+          <a:p xmlns:a="http://schemas.openxmlformats.org/drawingml/2006/main">
+            <a:r>
+              <a:t>실행 공간 3GB와 staging 1GB는 아직 측정되지 않은 할당 상한이다. 런타임의 allocation trace로 검증할 항목이며 공개 논문이 정한 VIA 필요량은 아니다. 정적 산술만으로 모든 10B Omni 구성이 16GB에 들어간다고 단정할 수 없다.</a:t>
+            </a:r>
+          </a:p>
+          <a:p xmlns:a="http://schemas.openxmlformats.org/drawingml/2006/main">
+            <a:r>
+              <a:t/>
+            </a:r>
+          </a:p>
+          <a:p xmlns:a="http://schemas.openxmlformats.org/drawingml/2006/main">
+            <a:r>
+              <a:t>### 9.3 RAM과 VRAM의 구별</a:t>
+            </a:r>
+          </a:p>
+          <a:p xmlns:a="http://schemas.openxmlformats.org/drawingml/2006/main">
+            <a:r>
+              <a:t/>
+            </a:r>
+          </a:p>
+          <a:p xmlns:a="http://schemas.openxmlformats.org/drawingml/2006/main">
+            <a:r>
+              <a:t>RAM과 VRAM은 서로 바꿔 쓸 수 없는 용량이다. 전체 합계 16GB 통과와 별개로 실제 장치의 RAM 및 전용 VRAM 한도를 충족해야 실행 가능한 구성이다. VRAM 8GB에 전체 모델과 KV가 들어간다고 가정하지 않는다. device capacity는 새로운 QA 목표가 아닌 시험 장치의 물리 조건이다.</a:t>
+            </a:r>
+          </a:p>
+          <a:p xmlns:a="http://schemas.openxmlformats.org/drawingml/2006/main">
+            <a:r>
+              <a:t/>
+            </a:r>
+          </a:p>
+          <a:p xmlns:a="http://schemas.openxmlformats.org/drawingml/2006/main">
+            <a:r>
+              <a:t>배치 산술의 한 예는 가중치 RAM 4GB / VRAM 4GB, KV RAM 2GB / VRAM 1GB, workspace RAM 1GB / VRAM 2GB, buffer RAM 1GB, staging RAM 1GB다. 이 경우 RAM 9GB와 VRAM 7GB로 합계 16GB다. 이 표는 실제 offload 구성을 선택한 결과가 아니다. 실제 모델이 이러한 분할을 허용하는지와 CPU 처리 및 전송이 V-04/05를 만족하는지는 반드시 같이 검증해야 한다. 메모리만 통과하고 응답이 느리면 품질 목표 전체를 달성하지 못한다.</a:t>
+            </a:r>
+          </a:p>
+          <a:p xmlns:a="http://schemas.openxmlformats.org/drawingml/2006/main">
+            <a:r>
+              <a:t/>
+            </a:r>
+          </a:p>
+          <a:p xmlns:a="http://schemas.openxmlformats.org/drawingml/2006/main">
+            <a:r>
+              <a:t>### 9.4 상시 동작 측정</a:t>
+            </a:r>
+          </a:p>
+          <a:p xmlns:a="http://schemas.openxmlformats.org/drawingml/2006/main">
+            <a:r>
+              <a:t/>
+            </a:r>
+          </a:p>
+          <a:p xmlns:a="http://schemas.openxmlformats.org/drawingml/2006/main">
+            <a:r>
+              <a:t>```text</a:t>
+            </a:r>
+          </a:p>
+          <a:p xmlns:a="http://schemas.openxmlformats.org/drawingml/2006/main">
+            <a:r>
+              <a:t>M(t) = VIA 소유 CPU 고유 상주 물리 bytes</a:t>
+            </a:r>
+          </a:p>
+          <a:p xmlns:a="http://schemas.openxmlformats.org/drawingml/2006/main">
+            <a:r>
+              <a:t>     + VIA 소유 전용 GPU 물리 bytes</a:t>
+            </a:r>
+          </a:p>
+          <a:p xmlns:a="http://schemas.openxmlformats.org/drawingml/2006/main">
+            <a:r>
+              <a:t>     + 위 항목에 포함되지 않은 pinned 또는 공유 물리 bytes</a:t>
+            </a:r>
+          </a:p>
+          <a:p xmlns:a="http://schemas.openxmlformats.org/drawingml/2006/main">
+            <a:r>
+              <a:t>최대 전체 메모리 = 모든 세션에서 관측한 max M(t) / 10^9</a:t>
+            </a:r>
+          </a:p>
+          <a:p xmlns:a="http://schemas.openxmlformats.org/drawingml/2006/main">
+            <a:r>
+              <a:t>```</a:t>
+            </a:r>
+          </a:p>
+          <a:p xmlns:a="http://schemas.openxmlformats.org/drawingml/2006/main">
+            <a:r>
+              <a:t/>
+            </a:r>
+          </a:p>
+          <a:p xmlns:a="http://schemas.openxmlformats.org/drawingml/2006/main">
+            <a:r>
+              <a:t>VIA process tree, shared model runtime과 모든 helper를 포함한다. CPU와 GPU에 실제 복제본이 둘이면 둘 다 센다. 같은 RAM page의 여러 mapping은 한 번만 센다. GPU shared system memory가 이미 RAM에 잡히면 다시 더하지 않는다. 논리 virtual size나 모든 process private working set의 단순 합계로 대체하지 않는다.</a:t>
+            </a:r>
+          </a:p>
+          <a:p xmlns:a="http://schemas.openxmlformats.org/drawingml/2006/main">
+            <a:r>
+              <a:t/>
+            </a:r>
+          </a:p>
+          <a:p xmlns:a="http://schemas.openxmlformats.org/drawingml/2006/main">
+            <a:r>
+              <a:t>각 8시간 세션은 30분 cold startup과 안정화, 60분 idle background, 300분 반복 요청 및 정정, 60분 입력과 외부 event가 겹치는 burst, 마지막 30분 회수 관측으로 구성한다. 300분 동안 30초마다 사용자 목표 하나를 제출하고 실제 진행 중인 Task를 유지한다. burst에서는 5초마다 입력 또는 외부 event를 공급한다. 과부하 대기와 누락도 남긴다. startup은 안정화 시간 뒤 최대값에서 빼지 않는다.</a:t>
+            </a:r>
+          </a:p>
+          <a:p xmlns:a="http://schemas.openxmlformats.org/drawingml/2006/main">
+            <a:r>
+              <a:t/>
+            </a:r>
+          </a:p>
+          <a:p xmlns:a="http://schemas.openxmlformats.org/drawingml/2006/main">
+            <a:r>
+              <a:t>100ms 주기 OS process 및 GPU 계측과 allocation high-water mark를 함께 사용한다. 짧은 peak를 polling이 놓칠 수 있다는 한계를 명시한다. 3개 세션 전체 최댓값을 목표와 비교한다. idle 평균과 최댓값, 첫 요청 peak, 정상 반복 peak, burst 및 loading peak, 종료 전후 retained bytes를 진단으로 공개한다. idle에 모델을 내리고 요청 때 올리는 안은 loading 시간과 복제 peak를 함께 부담한다. 장시간 leak과 무제한 Context 증가는 마지막 구간과 반복 cycle별 잔류량으로 확인한다. 별도 idle 수치 목표를 추가하지 않는다.</a:t>
             </a:r>
           </a:p>
           <a:p xmlns:a="http://schemas.openxmlformats.org/drawingml/2006/main">
@@ -3738,47 +5073,37 @@
           </a:p>
           <a:p xmlns:a="http://schemas.openxmlformats.org/drawingml/2006/main">
             <a:r>
-              <a:t>**설명:** 장애 뒤 기존 업무를 이어갈 수 있는 상태로 돌아와야 한다.</a:t>
-            </a:r>
-          </a:p>
-          <a:p xmlns:a="http://schemas.openxmlformats.org/drawingml/2006/main">
-            <a:r>
-              <a:t/>
-            </a:r>
-          </a:p>
-          <a:p xmlns:a="http://schemas.openxmlformats.org/drawingml/2006/main">
-            <a:r>
-              <a:t>**단일 목표:** 최대 정상 복구시간 10초 이하.</a:t>
-            </a:r>
-          </a:p>
-          <a:p xmlns:a="http://schemas.openxmlformats.org/drawingml/2006/main">
-            <a:r>
-              <a:t/>
-            </a:r>
-          </a:p>
-          <a:p xmlns:a="http://schemas.openxmlformats.org/drawingml/2006/main">
-            <a:r>
-              <a:t>**근거:** 사용자의 주의 유지 한계인 10초를 장애 후 재개 예산으로 채택한다 [S04]. microreboot 연구는 실행 단위를 재시작하면서 필요한 상태를 보존하는 회복 구조와 짧은 복구의 가능성을 보여준다 [S08]. 그 웹 시스템의 시간은 VIA의 Omni 로딩이나 전체 복구 성능이 아니므로 그대로 적용하지 않는다. 논문에서 VIA 복구가 10초라고 측정했다는 표현도 쓰지 않는다.</a:t>
-            </a:r>
-          </a:p>
-          <a:p xmlns:a="http://schemas.openxmlformats.org/drawingml/2006/main">
-            <a:r>
-              <a:t/>
-            </a:r>
-          </a:p>
-          <a:p xmlns:a="http://schemas.openxmlformats.org/drawingml/2006/main">
-            <a:r>
-              <a:t>각 장애는 저장 전, 저장 후 외부 전달 전, 외부 전달 후 확인 전의 적용 가능한 세 지점에 주입하고 각각 4회 반복한다. 부적합한 지점은 이유를 사전에 정하고 같은 지점을 양쪽 후보에서 제외한다. 정상 복구의 oracle은 필요한 사용자 입력을 받고, 현재 상태를 정확히 설명하며, 다음 필요한 처리 또는 명확한 보류 상태로 이어가는 것이다. Agent의 긴 작업이 끝나야 복구되는 것은 아니다.</a:t>
-            </a:r>
-          </a:p>
-          <a:p xmlns:a="http://schemas.openxmlformats.org/drawingml/2006/main">
-            <a:r>
-              <a:t/>
-            </a:r>
-          </a:p>
-          <a:p xmlns:a="http://schemas.openxmlformats.org/drawingml/2006/main">
-            <a:r>
-              <a:t>| ID | 장애 | 확인할 상태 |</a:t>
+              <a:t>**설명:** 장애 후 올바른 처리를 빠르게 재개해야 한다.</a:t>
+            </a:r>
+          </a:p>
+          <a:p xmlns:a="http://schemas.openxmlformats.org/drawingml/2006/main">
+            <a:r>
+              <a:t/>
+            </a:r>
+          </a:p>
+          <a:p xmlns:a="http://schemas.openxmlformats.org/drawingml/2006/main">
+            <a:r>
+              <a:t>**단일 목표:** 평균 복구시간 10초 이하.</a:t>
+            </a:r>
+          </a:p>
+          <a:p xmlns:a="http://schemas.openxmlformats.org/drawingml/2006/main">
+            <a:r>
+              <a:t/>
+            </a:r>
+          </a:p>
+          <a:p xmlns:a="http://schemas.openxmlformats.org/drawingml/2006/main">
+            <a:r>
+              <a:t>Nielsen의 10초 기준을 장애 뒤 대기 예산으로 선택한다 [S04]. Microreboot는 상태와 실행의 분리가 작은 단위 복구를 돕는 구조적 근거다 [S08]. 모델 cold loading을 포함한 VIA의 10초 실측 결과를 제공하는 출처는 아니다. 설계 예산의 예시는 탐지 1초, 재시작과 loading 6초, 상태 및 외부 사실 대조 2초, 정상 probe 1초다. 각 단계값은 제안 배분이며 별도 목표가 아니다.</a:t>
+            </a:r>
+          </a:p>
+          <a:p xmlns:a="http://schemas.openxmlformats.org/drawingml/2006/main">
+            <a:r>
+              <a:t/>
+            </a:r>
+          </a:p>
+          <a:p xmlns:a="http://schemas.openxmlformats.org/drawingml/2006/main">
+            <a:r>
+              <a:t>| ID | 주입 장애 | 정상 복구 확인 |</a:t>
             </a:r>
           </a:p>
           <a:p xmlns:a="http://schemas.openxmlformats.org/drawingml/2006/main">
@@ -3788,82 +5113,127 @@
           </a:p>
           <a:p xmlns:a="http://schemas.openxmlformats.org/drawingml/2006/main">
             <a:r>
-              <a:t>| F01 | semantic model 호출 timeout | 미채택 해석을 완료 사실로 쓰지 않고 새 입력 처리 가능 |</a:t>
-            </a:r>
-          </a:p>
-          <a:p xmlns:a="http://schemas.openxmlformats.org/drawingml/2006/main">
-            <a:r>
-              <a:t>| F02 | shared model runtime 종료 | cold weights와 세션 재구성 후 입력과 해석 재개 |</a:t>
-            </a:r>
-          </a:p>
-          <a:p xmlns:a="http://schemas.openxmlformats.org/drawingml/2006/main">
-            <a:r>
-              <a:t>| F03 | 음성 출력 오류 | Task 사실을 보존하고 text나 정상 음성으로 상태 확인 가능 |</a:t>
-            </a:r>
-          </a:p>
-          <a:p xmlns:a="http://schemas.openxmlformats.org/drawingml/2006/main">
-            <a:r>
-              <a:t>| F04 | 관측 producer 종료 | 근거 공백을 표시하고 해당 없는 참조를 추측하지 않음 |</a:t>
-            </a:r>
-          </a:p>
-          <a:p xmlns:a="http://schemas.openxmlformats.org/drawingml/2006/main">
-            <a:r>
-              <a:t>| F05 | VIA 상태 owner 종료 | 채택 상태와 미완료 의도를 올바르게 구분 |</a:t>
-            </a:r>
-          </a:p>
-          <a:p xmlns:a="http://schemas.openxmlformats.org/drawingml/2006/main">
-            <a:r>
-              <a:t>| F06 | 저장 실패 또는 crash | 미확정 상태를 확정 사실로 발표하지 않음 |</a:t>
-            </a:r>
-          </a:p>
-          <a:p xmlns:a="http://schemas.openxmlformats.org/drawingml/2006/main">
-            <a:r>
-              <a:t>| F07 | Agent 연결 단절 | 외부 실행이 미확인임을 보존하며 접속 재개 가능 |</a:t>
-            </a:r>
-          </a:p>
-          <a:p xmlns:a="http://schemas.openxmlformats.org/drawingml/2006/main">
-            <a:r>
-              <a:t>| F08 | 결과 확인 응답 유실 | 재접속 후 실제 Agent 결과로 상태 정정 |</a:t>
-            </a:r>
-          </a:p>
-          <a:p xmlns:a="http://schemas.openxmlformats.org/drawingml/2006/main">
-            <a:r>
-              <a:t>| F09 | 중복 또는 역순 외부 알림 | 최신 상태와 적용 이력 보존 |</a:t>
-            </a:r>
-          </a:p>
-          <a:p xmlns:a="http://schemas.openxmlformats.org/drawingml/2006/main">
-            <a:r>
-              <a:t>| F10 | 취소와 결과 도착 경합 | 정해진 채택 정책에 따른 상태와 전달 |</a:t>
-            </a:r>
-          </a:p>
-          <a:p xmlns:a="http://schemas.openxmlformats.org/drawingml/2006/main">
-            <a:r>
-              <a:t>| F11 | 삭제 중 재시작 | 삭제된 Context가 다시 살아나지 않음 |</a:t>
-            </a:r>
-          </a:p>
-          <a:p xmlns:a="http://schemas.openxmlformats.org/drawingml/2006/main">
-            <a:r>
-              <a:t>| F12 | 프로세스 재시작 중 새 입력 | 입력 공백이나 보류를 명시하고 다음 요청 수용 |</a:t>
-            </a:r>
-          </a:p>
-          <a:p xmlns:a="http://schemas.openxmlformats.org/drawingml/2006/main">
-            <a:r>
-              <a:t/>
-            </a:r>
-          </a:p>
-          <a:p xmlns:a="http://schemas.openxmlformats.org/drawingml/2006/main">
-            <a:r>
-              <a:t>VIA가 장애를 감지한 시점 대신 harness의 실제 장애 주입 시점에서 시작한다. 정상 복구 oracle을 만족한 실제 사건에서 종료한다. 사람의 수동 복구 단계 없이 재개할 수 있는지를 확인하되 주지표는 복구시간 하나이다. 종료한 process를 띄운 것만으로 복구로 세지 않는다. F02에는 warm 세션 복원뿐 아니라 cold weight loading도 포함한다.</a:t>
-            </a:r>
-          </a:p>
-          <a:p xmlns:a="http://schemas.openxmlformats.org/drawingml/2006/main">
-            <a:r>
-              <a:t/>
-            </a:r>
-          </a:p>
-          <a:p xmlns:a="http://schemas.openxmlformats.org/drawingml/2006/main">
-            <a:r>
-              <a:t>각 적용 시험의 정상 복구시간 중 최대값을 보고한다. 미복구나 잘못된 복구는 무한대라서 목표를 통과하지 못한다. timeout은 60초로 관측을 마치되 이를 정상 복구시간 60초로 대체하지 않는다. 원인별 elapsed time과 실패 기록은 남긴다. 외부 capability 때문에 조회할 수 없는 실행은 미확인 상태를 정확히 보존하고 정해진 다음 동작을 제공해야 복구로 판정한다.</a:t>
+              <a:t>| F01 | 음성 입력 worker 종료 | 새 음성 입력을 손실 없이 받고 새 요청 처리 |</a:t>
+            </a:r>
+          </a:p>
+          <a:p xmlns:a="http://schemas.openxmlformats.org/drawingml/2006/main">
+            <a:r>
+              <a:t>| F02 | Omni inference worker 종료 | 같은 모델 inventory 복원 후 유효 추론과 전달 |</a:t>
+            </a:r>
+          </a:p>
+          <a:p xmlns:a="http://schemas.openxmlformats.org/drawingml/2006/main">
+            <a:r>
+              <a:t>| F03 | model/runtime 오류 반환 | 제한된 재시도 또는 정직한 실패 처리 후 새 요청 정상 실행 |</a:t>
+            </a:r>
+          </a:p>
+          <a:p xmlns:a="http://schemas.openxmlformats.org/drawingml/2006/main">
+            <a:r>
+              <a:t>| F04 | Context 조회 worker 중단 | 유효 근거 조회와 새 요청 처리, stale 사용 없음 |</a:t>
+            </a:r>
+          </a:p>
+          <a:p xmlns:a="http://schemas.openxmlformats.org/drawingml/2006/main">
+            <a:r>
+              <a:t>| F05 | 대화 상태 owner process 종료 | 실제 제시 질문 및 Request 복원과 새 입력 처리 |</a:t>
+            </a:r>
+          </a:p>
+          <a:p xmlns:a="http://schemas.openxmlformats.org/drawingml/2006/main">
+            <a:r>
+              <a:t>| F06 | 업무 상태 owner process 종료 | Task와 command 복원 및 외부 사실 대조 |</a:t>
+            </a:r>
+          </a:p>
+          <a:p xmlns:a="http://schemas.openxmlformats.org/drawingml/2006/main">
+            <a:r>
+              <a:t>| F07 | Agent gateway 연결 끊김 | 재연결과 현재 상태 확인, 외부 접수 중복 없음 |</a:t>
+            </a:r>
+          </a:p>
+          <a:p xmlns:a="http://schemas.openxmlformats.org/drawingml/2006/main">
+            <a:r>
+              <a:t>| F08 | 로컬 저장 일시 실패 | 완료되지 않은 변경을 확정으로 표시하지 않고 정상 write 재개 |</a:t>
+            </a:r>
+          </a:p>
+          <a:p xmlns:a="http://schemas.openxmlformats.org/drawingml/2006/main">
+            <a:r>
+              <a:t>| F09 | 명령 전송 후 receipt 유실 | 같은 명령 ID의 외부 사실 확인, 실행 재발행 없음 |</a:t>
+            </a:r>
+          </a:p>
+          <a:p xmlns:a="http://schemas.openxmlformats.org/drawingml/2006/main">
+            <a:r>
+              <a:t>| F10 | 외부 중복 또는 역순 결과 | 올바른 revision의 상태와 전달 유지 |</a:t>
+            </a:r>
+          </a:p>
+          <a:p xmlns:a="http://schemas.openxmlformats.org/drawingml/2006/main">
+            <a:r>
+              <a:t>| F11 | 출력 worker 종료 | 확인된 실제 전달 범위 복원, 누락 결과 정상 전달 |</a:t>
+            </a:r>
+          </a:p>
+          <a:p xmlns:a="http://schemas.openxmlformats.org/drawingml/2006/main">
+            <a:r>
+              <a:t>| F12 | 삭제 또는 철회 도중 재시작 | 새 epoch의 사용 fence 유지 후 허용 요청 정상 처리 |</a:t>
+            </a:r>
+          </a:p>
+          <a:p xmlns:a="http://schemas.openxmlformats.org/drawingml/2006/main">
+            <a:r>
+              <a:t/>
+            </a:r>
+          </a:p>
+          <a:p xmlns:a="http://schemas.openxmlformats.org/drawingml/2006/main">
+            <a:r>
+              <a:t>장애는 처리 시작, 채택 또는 접수 경계, 전달 또는 복원 경계의 세 지점에서 각각 4회 주입한다. 지점은 각 장애에 맞게 정확한 event ID로 manifest에 지정한다. 총 144회다. 42에서는 동일 논리 owner가 속한 실제 process에 fault를 주입하여 A의 통합 경계와 B의 독립 경계 차이를 보존한다. B에만 외부 Agent 생존을 주거나 A의 내구 저장을 제거하지 않는다.</a:t>
+            </a:r>
+          </a:p>
+          <a:p xmlns:a="http://schemas.openxmlformats.org/drawingml/2006/main">
+            <a:r>
+              <a:t/>
+            </a:r>
+          </a:p>
+          <a:p xmlns:a="http://schemas.openxmlformats.org/drawingml/2006/main">
+            <a:r>
+              <a:t>일시 unavailable 의존성은 fault 후 0.2초에 같은 simulator가 다시 제공한다. model worker 종료 시에는 같은 weights의 실제 재로딩을 포함한다. 외부 업무 자체가 계속 진행 중이면 완료를 강제하지 않고 사실을 정확히 확인한 상태에서 VIA의 다음 요청과 조회가 정상 동작하는지 검사한다. 지속적인 외부 outage는 별도 보류 시험으로 표시한다.</a:t>
+            </a:r>
+          </a:p>
+          <a:p xmlns:a="http://schemas.openxmlformats.org/drawingml/2006/main">
+            <a:r>
+              <a:t/>
+            </a:r>
+          </a:p>
+          <a:p xmlns:a="http://schemas.openxmlformats.org/drawingml/2006/main">
+            <a:r>
+              <a:t>RECOVERED는 유효 입력 처리, 정확한 durable 및 외부 상태 대조, 허용된 다음 처리 probe와 실제 전달을 모두 만족한 상태다. 프로세스만 살아 있거나 '확인 중'만 출력한 DEGRADED/PENDING은 정상 복구가 아니다. 업무가 원래 외부 결과 대기 중이라면 정확한 대기를 유지하면서 새 VIA 요청을 처리하는 것이 그 사례의 정상 상태다. 미확인 외부 실행을 완료 또는 취소로 꾸미지 않는다.</a:t>
+            </a:r>
+          </a:p>
+          <a:p xmlns:a="http://schemas.openxmlformats.org/drawingml/2006/main">
+            <a:r>
+              <a:t/>
+            </a:r>
+          </a:p>
+          <a:p xmlns:a="http://schemas.openxmlformats.org/drawingml/2006/main">
+            <a:r>
+              <a:t>```text</a:t>
+            </a:r>
+          </a:p>
+          <a:p xmlns:a="http://schemas.openxmlformats.org/drawingml/2006/main">
+            <a:r>
+              <a:t>r(i) = 정상 복구 probe의 실제 완료 시각 - fault 실제 주입 시각</a:t>
+            </a:r>
+          </a:p>
+          <a:p xmlns:a="http://schemas.openxmlformats.org/drawingml/2006/main">
+            <a:r>
+              <a:t>평균 복구시간 = Σ r(i) / 144</a:t>
+            </a:r>
+          </a:p>
+          <a:p xmlns:a="http://schemas.openxmlformats.org/drawingml/2006/main">
+            <a:r>
+              <a:t>```</a:t>
+            </a:r>
+          </a:p>
+          <a:p xmlns:a="http://schemas.openxmlformats.org/drawingml/2006/main">
+            <a:r>
+              <a:t/>
+            </a:r>
+          </a:p>
+          <a:p xmlns:a="http://schemas.openxmlformats.org/drawingml/2006/main">
+            <a:r>
+              <a:t>미복구에는 §2.5의 관측시간과 표식을 기록하고 정상 복구 endpoint가 없으면 충족 판정을 보류한다. 전체 평균 외에 장애별 평균과 복구 단계 및 미복구 목록을 공개한다. 부분 복구 시간을 정상 복구시간으로 바꾸지 않는다.</a:t>
             </a:r>
           </a:p>
           <a:p xmlns:a="http://schemas.openxmlformats.org/drawingml/2006/main">
@@ -3883,87 +5253,97 @@
           </a:p>
           <a:p xmlns:a="http://schemas.openxmlformats.org/drawingml/2006/main">
             <a:r>
-              <a:t>**설명:** 실행 기록으로 요청의 처리 과정을 설명할 수 있어야 한다.</a:t>
-            </a:r>
-          </a:p>
-          <a:p xmlns:a="http://schemas.openxmlformats.org/drawingml/2006/main">
-            <a:r>
-              <a:t/>
-            </a:r>
-          </a:p>
-          <a:p xmlns:a="http://schemas.openxmlformats.org/drawingml/2006/main">
-            <a:r>
-              <a:t>**단일 목표:** 실행 재구성률 100%.</a:t>
-            </a:r>
-          </a:p>
-          <a:p xmlns:a="http://schemas.openxmlformats.org/drawingml/2006/main">
-            <a:r>
-              <a:t/>
-            </a:r>
-          </a:p>
-          <a:p xmlns:a="http://schemas.openxmlformats.org/drawingml/2006/main">
-            <a:r>
-              <a:t>**근거:** 연구 평가에서는 전체 시험의 실행 과정을 추적할 필요가 있다. OpenTelemetry의 always_on과 parentbased_always_on은 모든 root trace를 수집하는 구성 근거를 제공한다 [S09]. 이 설정이 로그 유실이나 인과 연결의 완전성을 자동 보장하지는 않으므로 실제 재구성 성공 여부를 검사한다.</a:t>
-            </a:r>
-          </a:p>
-          <a:p xmlns:a="http://schemas.openxmlformats.org/drawingml/2006/main">
-            <a:r>
-              <a:t/>
-            </a:r>
-          </a:p>
-          <a:p xmlns:a="http://schemas.openxmlformats.org/drawingml/2006/main">
-            <a:r>
-              <a:t>**분모:** V-01의 1,880회, 모든 장애 주입 시험 및 V-10의 144회 보안 시험을 독립 harness registry에서 가져온다. 중복된 trial ID는 한 번만 센다. VIA 로그에 등장한 trial만 분모로 삼으면 로그 전체가 누락된 실패를 놓치므로 금지한다.</a:t>
-            </a:r>
-          </a:p>
-          <a:p xmlns:a="http://schemas.openxmlformats.org/drawingml/2006/main">
-            <a:r>
-              <a:t/>
-            </a:r>
-          </a:p>
-          <a:p xmlns:a="http://schemas.openxmlformats.org/drawingml/2006/main">
-            <a:r>
-              <a:t>**재구성의 필수 질문:**</a:t>
-            </a:r>
-          </a:p>
-          <a:p xmlns:a="http://schemas.openxmlformats.org/drawingml/2006/main">
-            <a:r>
-              <a:t/>
-            </a:r>
-          </a:p>
-          <a:p xmlns:a="http://schemas.openxmlformats.org/drawingml/2006/main">
-            <a:r>
-              <a:t>1. 어느 입력이 어느 Request와 Task에 연결되었는가?</a:t>
-            </a:r>
-          </a:p>
-          <a:p xmlns:a="http://schemas.openxmlformats.org/drawingml/2006/main">
-            <a:r>
-              <a:t>2. 어떤 버전의 근거와 해석 결과로 처리를 채택했는가?</a:t>
-            </a:r>
-          </a:p>
-          <a:p xmlns:a="http://schemas.openxmlformats.org/drawingml/2006/main">
-            <a:r>
-              <a:t>3. 어떤 명령과 결과가 상태 변화를 만들었는가?</a:t>
-            </a:r>
-          </a:p>
-          <a:p xmlns:a="http://schemas.openxmlformats.org/drawingml/2006/main">
-            <a:r>
-              <a:t>4. 사용자에게 실제로 무엇을 전달했는가?</a:t>
-            </a:r>
-          </a:p>
-          <a:p xmlns:a="http://schemas.openxmlformats.org/drawingml/2006/main">
-            <a:r>
-              <a:t>5. 정상 실행과 보류 또는 실패를 나누는 확인된 사실은 무엇인가?</a:t>
-            </a:r>
-          </a:p>
-          <a:p xmlns:a="http://schemas.openxmlformats.org/drawingml/2006/main">
-            <a:r>
-              <a:t/>
-            </a:r>
-          </a:p>
-          <a:p xmlns:a="http://schemas.openxmlformats.org/drawingml/2006/main">
-            <a:r>
-              <a:t>시험 종류에 적용되는 질문을 모두 기록만으로 답하고 harness의 실제 사건과 일치해야 성공이다. 필요한 관계는 input ID, Request ID, Task ID, command와 receipt ID, source revision, permission epoch, model 및 prompt version, adoption decision, 이전 상태와 새 상태, 실제 output event 및 fault ID로 연결한다. 기록 자체가 모순되거나 필수 link가 없으면 실패이다.</a:t>
+              <a:t>**설명:** 실행 기록으로 처리 경위를 쉽게 확인할 수 있어야 한다.</a:t>
+            </a:r>
+          </a:p>
+          <a:p xmlns:a="http://schemas.openxmlformats.org/drawingml/2006/main">
+            <a:r>
+              <a:t/>
+            </a:r>
+          </a:p>
+          <a:p xmlns:a="http://schemas.openxmlformats.org/drawingml/2006/main">
+            <a:r>
+              <a:t>**단일 목표:** 처리 경위 확인율 100%.</a:t>
+            </a:r>
+          </a:p>
+          <a:p xmlns:a="http://schemas.openxmlformats.org/drawingml/2006/main">
+            <a:r>
+              <a:t/>
+            </a:r>
+          </a:p>
+          <a:p xmlns:a="http://schemas.openxmlformats.org/drawingml/2006/main">
+            <a:r>
+              <a:t>연구 조직은 정상 실행도 개선의 근거로 사용하므로 모든 시험의 처리 경위를 확인하는 계약 목표를 둔다. OpenTelemetry의 always_on 설정은 전수 수집의 수단이다 [S09]. trace가 있다는 사실만으로 분석이 쉽다고 결론 내리지 않는다.</a:t>
+            </a:r>
+          </a:p>
+          <a:p xmlns:a="http://schemas.openxmlformats.org/drawingml/2006/main">
+            <a:r>
+              <a:t/>
+            </a:r>
+          </a:p>
+          <a:p xmlns:a="http://schemas.openxmlformats.org/drawingml/2006/main">
+            <a:r>
+              <a:t>분모는 독립 harness registry의 전체 고유 trial ID다. 기능 1,880회와 해당 DP 집중 96회, 장애 144회, 금지 및 허용 보안 시험 288회를 포함한다. 같은 실행을 여러 집계에서 다시 분석하면 ID로 한 번만 센다. 메모리 세션 안의 모든 사용자 요청도 registry에 등록한다. 로그가 없는 시험을 분모에서 빼지 않는다.</a:t>
+            </a:r>
+          </a:p>
+          <a:p xmlns:a="http://schemas.openxmlformats.org/drawingml/2006/main">
+            <a:r>
+              <a:t/>
+            </a:r>
+          </a:p>
+          <a:p xmlns:a="http://schemas.openxmlformats.org/drawingml/2006/main">
+            <a:r>
+              <a:t>| 질문 | 확인해야 할 정답 |</a:t>
+            </a:r>
+          </a:p>
+          <a:p xmlns:a="http://schemas.openxmlformats.org/drawingml/2006/main">
+            <a:r>
+              <a:t>| --- | --- |</a:t>
+            </a:r>
+          </a:p>
+          <a:p xmlns:a="http://schemas.openxmlformats.org/drawingml/2006/main">
+            <a:r>
+              <a:t>| 입력 연결 | 어떤 입력이 어느 Request와 Task로 연결되었는가 |</a:t>
+            </a:r>
+          </a:p>
+          <a:p xmlns:a="http://schemas.openxmlformats.org/drawingml/2006/main">
+            <a:r>
+              <a:t>| 사용 근거 | 어떤 source와 revision 및 권한으로 의미를 만들고 채택했는가 |</a:t>
+            </a:r>
+          </a:p>
+          <a:p xmlns:a="http://schemas.openxmlformats.org/drawingml/2006/main">
+            <a:r>
+              <a:t>| 처리 변화 | 어떤 명령 또는 사실이 어느 상태 변화로 이어졌는가 |</a:t>
+            </a:r>
+          </a:p>
+          <a:p xmlns:a="http://schemas.openxmlformats.org/drawingml/2006/main">
+            <a:r>
+              <a:t>| 실제 전달 | 무엇을 어떤 대화에 실제 표시하거나 재생했는가 |</a:t>
+            </a:r>
+          </a:p>
+          <a:p xmlns:a="http://schemas.openxmlformats.org/drawingml/2006/main">
+            <a:r>
+              <a:t>| 분기 이유 | 정상 처리의 승인 근거 또는 최초 오류와 보류의 확인된 경계는 무엇인가 |</a:t>
+            </a:r>
+          </a:p>
+          <a:p xmlns:a="http://schemas.openxmlformats.org/drawingml/2006/main">
+            <a:r>
+              <a:t/>
+            </a:r>
+          </a:p>
+          <a:p xmlns:a="http://schemas.openxmlformats.org/drawingml/2006/main">
+            <a:r>
+              <a:t>후보를 가린 독립 SW 분석자에게 로그, schema와 기본 조회 도구만 제공한다. 평가 구현 코드를 수정하거나 정답 manifest를 열어볼 수 없다. 동일 사건 구조의 연습 자료로 사전 교육하고 각 trial에 고정 **5분의 분석 세션**을 배정한다. 이는 분석 난이도를 제한하는 공통 시험 조건이며 별도 QA 목표가 아니다. 무제한 시간을 들여 겨우 복원한 실행을 같은 확인율로 세지 않는다.</a:t>
+            </a:r>
+          </a:p>
+          <a:p xmlns:a="http://schemas.openxmlformats.org/drawingml/2006/main">
+            <a:r>
+              <a:t/>
+            </a:r>
+          </a:p>
+          <a:p xmlns:a="http://schemas.openxmlformats.org/drawingml/2006/main">
+            <a:r>
+              <a:t>분석자는 위 다섯 답을 먼저 제출하고 독립 oracle이 적용 가능한 답 전체를 대조한다. 정상 실행은 채택 근거와 정확한 연결을, 오류 실행은 최초 잘못된 boundary와 그 이후의 영향을 확인해야 한다. '어딘가 모델 오류' 같은 추측은 충분하지 않다. 모델 내부 사고 과정은 요구하지 않으며 structured proposal과 사용 근거 및 adoption 기록에서 관측 가능한 사실까지만 설명한다. 검토자 의견이 다르면 두 번째 분석자가 판정하고 처음 결과 및 분석시간을 보존한다.</a:t>
             </a:r>
           </a:p>
           <a:p xmlns:a="http://schemas.openxmlformats.org/drawingml/2006/main">
@@ -3978,7 +5358,7 @@
           </a:p>
           <a:p xmlns:a="http://schemas.openxmlformats.org/drawingml/2006/main">
             <a:r>
-              <a:t>실행 재구성률 = 100 × 필수 질문 전체를 재구성한 trial 수 / registry의 전체 trial 수</a:t>
+              <a:t>처리 경위 확인율 = 100 × 필수 답 전체를 맞힌 trial 수 / registry의 전체 고유 trial 수</a:t>
             </a:r>
           </a:p>
           <a:p xmlns:a="http://schemas.openxmlformats.org/drawingml/2006/main">
@@ -3993,17 +5373,27 @@
           </a:p>
           <a:p xmlns:a="http://schemas.openxmlformats.org/drawingml/2006/main">
             <a:r>
-              <a:t>후보를 가린 독립 검사자가 trace를 분석하고 oracle과 대조한다. 자동 link 검사와 사람의 설명 가능성 검토를 함께 사용한다. 정상 실행에서도 Context 선택, 해석 채택, Task routing과 전달을 검토한다. 실패 때만 verbose log를 켜는 방식은 전수 재구성 목표에 맞지 않는다. 수집 pipeline의 crash, flush 실패와 clock 불일치도 검사한다.</a:t>
-            </a:r>
-          </a:p>
-          <a:p xmlns:a="http://schemas.openxmlformats.org/drawingml/2006/main">
-            <a:r>
-              <a:t/>
-            </a:r>
-          </a:p>
-          <a:p xmlns:a="http://schemas.openxmlformats.org/drawingml/2006/main">
-            <a:r>
-              <a:t>연구용 aggregate에는 오류 유형, 참조 근거 공백, 해석 수정 패턴, model version별 차이와 latency 분포를 남겨 VIA orchestration 개선에 사용할 수 있게 한다. 모델 내부 사고 과정이나 개인 화면 및 음성 원문을 전부 저장해야 한다는 요구는 없다. ID, version, 접근이 허용된 structured output 및 제한된 digest로 연결하고, 철회와 삭제 정책을 지키면서 필요한 metadata의 보존 범위를 정한다. 로그의 기밀성도 V-10에서 시험한다.</a:t>
+              <a:t>input, Request, Task, command, receipt, publication ID와 source revision, model 및 prompt version, permission epoch, adoption 결정과 fault ID를 연결한다. 자동 link 검사만 통과하고 분석자가 잘못 답한 trial은 실패다. 정상과 오류를 무작위로 섞고 logger crash, flush 실패와 clock 불일치도 확인한다.</a:t>
+            </a:r>
+          </a:p>
+          <a:p xmlns:a="http://schemas.openxmlformats.org/drawingml/2006/main">
+            <a:r>
+              <a:t/>
+            </a:r>
+          </a:p>
+          <a:p xmlns:a="http://schemas.openxmlformats.org/drawingml/2006/main">
+            <a:r>
+              <a:t>분석 시점은 기능 시험은 종료 후, 재시작 시험은 복원 후, 삭제 시험은 삭제 완료 후로 manifest에 정한다. 삭제 시험의 질문은 금지된 원문 내용의 재현이 아니라 어떤 ID와 epoch의 접근을 차단했는지다. 생산 로그에는 허용 metadata를 남기고 삭제한 원문, digest 또는 Context를 디버깅 이유로 복원하지 않는다. 정답 원문이 필요한 synthetic 시험 oracle은 평가자가 별도 관리하며 VIA가 그 원문을 재사용하는 통로가 될 수 없다.</a:t>
+            </a:r>
+          </a:p>
+          <a:p xmlns:a="http://schemas.openxmlformats.org/drawingml/2006/main">
+            <a:r>
+              <a:t/>
+            </a:r>
+          </a:p>
+          <a:p xmlns:a="http://schemas.openxmlformats.org/drawingml/2006/main">
+            <a:r>
+              <a:t>연구 aggregate는 오류 경계, 근거 누락, 정정 유형, 모델 버전과 시간 및 개입 수를 연결해 개선에 사용한다. 원문 음성, 화면과 개인정보 전체를 수집하는 요구가 아니다. production 수집의 동의와 보존 범위는 별도 정책 계약이며 전수 synthetic 평가를 무조건 production 수집 정책으로 확대하지 않는다.</a:t>
             </a:r>
           </a:p>
           <a:p xmlns:a="http://schemas.openxmlformats.org/drawingml/2006/main">
@@ -4033,37 +5423,27 @@
           </a:p>
           <a:p xmlns:a="http://schemas.openxmlformats.org/drawingml/2006/main">
             <a:r>
-              <a:t>**단일 목표:** 고정 시험에서 무단 정보 사용 0건.</a:t>
-            </a:r>
-          </a:p>
-          <a:p xmlns:a="http://schemas.openxmlformats.org/drawingml/2006/main">
-            <a:r>
-              <a:t/>
-            </a:r>
-          </a:p>
-          <a:p xmlns:a="http://schemas.openxmlformats.org/drawingml/2006/main">
-            <a:r>
-              <a:t>**근거:** NIST SP 800-53의 AC-3은 승인된 접근의 집행, AC-6은 최소 권한을 다룬다 [S10]. VIA의 권한, 철회 및 삭제 계약을 적용하여 금지된 정보 사용의 허용 예산을 0으로 잡는다 [S00]. NIST 인증을 받았다거나 시험 밖의 모든 공격을 막는다는 주장은 하지 않는다.</a:t>
-            </a:r>
-          </a:p>
-          <a:p xmlns:a="http://schemas.openxmlformats.org/drawingml/2006/main">
-            <a:r>
-              <a:t/>
-            </a:r>
-          </a:p>
-          <a:p xmlns:a="http://schemas.openxmlformats.org/drawingml/2006/main">
-            <a:r>
-              <a:t>아래 12개 사례를 정상 동작, 요청 처리 중 정책 또는 사건 변경, 재시작 후의 세 조건에서 4회 반복한다. **12 × 3 × 4 = 144회**를 제안한다. 첫 조건에는 고정 금지 정책을 적용하고, 처리 중 조건은 실제 접근 또는 전달 전 정책을 바꾸거나 제한을 적용한다. 재시작 조건은 같은 정책을 durable state에서 복원한다. 시험마다 적용 지점을 manifest로 명시한다.</a:t>
-            </a:r>
-          </a:p>
-          <a:p xmlns:a="http://schemas.openxmlformats.org/drawingml/2006/main">
-            <a:r>
-              <a:t/>
-            </a:r>
-          </a:p>
-          <a:p xmlns:a="http://schemas.openxmlformats.org/drawingml/2006/main">
-            <a:r>
-              <a:t>| ID | 시험 상황 | 금지 사건의 관측 지점 |</a:t>
+              <a:t>**단일 목표:** 무단 정보 사용 0건.</a:t>
+            </a:r>
+          </a:p>
+          <a:p xmlns:a="http://schemas.openxmlformats.org/drawingml/2006/main">
+            <a:r>
+              <a:t/>
+            </a:r>
+          </a:p>
+          <a:p xmlns:a="http://schemas.openxmlformats.org/drawingml/2006/main">
+            <a:r>
+              <a:t>NIST SP 800-53의 AC-3 승인 접근 집행과 AC-6 최소 권한 및 VIA의 권한 계약에 따라 금지 사건 예산을 0건으로 정한다 [S00, S10]. 유한 시험의 0건은 모든 공격의 부재나 NIST 인증을 뜻하지 않는다.</a:t>
+            </a:r>
+          </a:p>
+          <a:p xmlns:a="http://schemas.openxmlformats.org/drawingml/2006/main">
+            <a:r>
+              <a:t/>
+            </a:r>
+          </a:p>
+          <a:p xmlns:a="http://schemas.openxmlformats.org/drawingml/2006/main">
+            <a:r>
+              <a:t>| ID | 금지 상황 | 실제 관측 지점 |</a:t>
             </a:r>
           </a:p>
           <a:p xmlns:a="http://schemas.openxmlformats.org/drawingml/2006/main">
@@ -4073,112 +5453,232 @@
           </a:p>
           <a:p xmlns:a="http://schemas.openxmlformats.org/drawingml/2006/main">
             <a:r>
-              <a:t>| S01 | 화면 수집 권한이 없는 앱 | capture API, buffer와 model 입력 |</a:t>
-            </a:r>
-          </a:p>
-          <a:p xmlns:a="http://schemas.openxmlformats.org/drawingml/2006/main">
-            <a:r>
-              <a:t>| S02 | 승인한 파일 범위 밖의 문서 | 실제 file read와 Context 추가 |</a:t>
-            </a:r>
-          </a:p>
-          <a:p xmlns:a="http://schemas.openxmlformats.org/drawingml/2006/main">
-            <a:r>
-              <a:t>| S03 | 허용한 Agent와 다른 수신자 | serialised payload와 실제 전송 |</a:t>
-            </a:r>
-          </a:p>
-          <a:p xmlns:a="http://schemas.openxmlformats.org/drawingml/2006/main">
-            <a:r>
-              <a:t>| S04 | 읽기 목적을 넘어 다른 요청에 재사용 | Context query와 해석 호출의 목적 ID |</a:t>
-            </a:r>
-          </a:p>
-          <a:p xmlns:a="http://schemas.openxmlformats.org/drawingml/2006/main">
-            <a:r>
-              <a:t>| S05 | 권한 철회 후 cache 내용 사용 | cache hit와 model 입력 |</a:t>
-            </a:r>
-          </a:p>
-          <a:p xmlns:a="http://schemas.openxmlformats.org/drawingml/2006/main">
-            <a:r>
-              <a:t>| S06 | 조회 시작 후 전달 전에 권한 철회 | 전달 직전 permission epoch와 payload |</a:t>
-            </a:r>
-          </a:p>
-          <a:p xmlns:a="http://schemas.openxmlformats.org/drawingml/2006/main">
-            <a:r>
-              <a:t>| S07 | 다른 Task의 정보 승인 재사용 | Task와 approval scope 연결 |</a:t>
-            </a:r>
-          </a:p>
-          <a:p xmlns:a="http://schemas.openxmlformats.org/drawingml/2006/main">
-            <a:r>
-              <a:t>| S08 | 다른 역할이나 세션으로 Context 유출 | session과 KV binding |</a:t>
-            </a:r>
-          </a:p>
-          <a:p xmlns:a="http://schemas.openxmlformats.org/drawingml/2006/main">
-            <a:r>
-              <a:t>| S09 | 삭제 뒤 원문 및 파생 index 검색 | storage read와 retrieval 결과 |</a:t>
-            </a:r>
-          </a:p>
-          <a:p xmlns:a="http://schemas.openxmlformats.org/drawingml/2006/main">
-            <a:r>
-              <a:t>| S10 | 삭제 뒤 KV 또는 scene 해석 재사용 | retained session과 semantic input |</a:t>
-            </a:r>
-          </a:p>
-          <a:p xmlns:a="http://schemas.openxmlformats.org/drawingml/2006/main">
-            <a:r>
-              <a:t>| S11 | 삭제 중 늦은 write 및 재시작 복원 | store commit과 restored records |</a:t>
-            </a:r>
-          </a:p>
-          <a:p xmlns:a="http://schemas.openxmlformats.org/drawingml/2006/main">
-            <a:r>
-              <a:t>| S12 | 화면, 음성 또는 문서 비밀값의 로그 노출 | local logs와 연구 수집 endpoint |</a:t>
-            </a:r>
-          </a:p>
-          <a:p xmlns:a="http://schemas.openxmlformats.org/drawingml/2006/main">
-            <a:r>
-              <a:t/>
-            </a:r>
-          </a:p>
-          <a:p xmlns:a="http://schemas.openxmlformats.org/drawingml/2006/main">
-            <a:r>
-              <a:t>각 사례에 고유 canary 값을 심고 read, model input, store, KV binding, Agent 전송 및 로그 sink에서 실제 접근을 계측한다. 로그에 '거절'이라고 적힌 것만으로 통과시키지 않는다. 정책상 허용 여부는 접근과 전달 시점의 권한 epoch로 oracle이 계산한다. 하나의 무단 사용을 여러 계층에서 관측하면 event ID로 중복 제거하며 원본 관측도 보존한다.</a:t>
-            </a:r>
-          </a:p>
-          <a:p xmlns:a="http://schemas.openxmlformats.org/drawingml/2006/main">
-            <a:r>
-              <a:t/>
-            </a:r>
-          </a:p>
-          <a:p xmlns:a="http://schemas.openxmlformats.org/drawingml/2006/main">
-            <a:r>
-              <a:t>명확히 허용된 동일 요청을 정상 대조군으로 수행한다. 모든 읽기와 전송을 막아 0건을 만드는 구현은 V-01과 V-03을 충족하지 못한다. 허용된 Downstream Agent로 필요한 Context를 전달하는 것은 위반이 아니다. 철회 전에 적법하게 외부 Agent에게 전달한 데이터의 모든 외부 복제본을 VIA가 삭제한다고 가정하지 않는다. VIA 통제 범위의 후속 사용과 재전달을 시험하고 외부 시스템의 capability와 책임 경계를 명시한다.</a:t>
-            </a:r>
-          </a:p>
-          <a:p xmlns:a="http://schemas.openxmlformats.org/drawingml/2006/main">
-            <a:r>
-              <a:t/>
-            </a:r>
-          </a:p>
-          <a:p xmlns:a="http://schemas.openxmlformats.org/drawingml/2006/main">
-            <a:r>
-              <a:t>시험 종료 후 보고는 사건 수 0건 여부와 144회 전체의 실행 여부, 누락된 관측 지점 및 정상 대조군 결과를 포함한다. 실행하지 않은 사례를 0건으로 채우지 않는다. 새 공격이나 새로운 저장소가 추가되면 시험 목록을 확장하고 기존 결과의 범위를 보존한다.</a:t>
-            </a:r>
-          </a:p>
-          <a:p xmlns:a="http://schemas.openxmlformats.org/drawingml/2006/main">
-            <a:r>
-              <a:t/>
-            </a:r>
-          </a:p>
-          <a:p xmlns:a="http://schemas.openxmlformats.org/drawingml/2006/main">
-            <a:r>
-              <a:t>## 13. 출처</a:t>
-            </a:r>
-          </a:p>
-          <a:p xmlns:a="http://schemas.openxmlformats.org/drawingml/2006/main">
-            <a:r>
-              <a:t/>
-            </a:r>
-          </a:p>
-          <a:p xmlns:a="http://schemas.openxmlformats.org/drawingml/2006/main">
-            <a:r>
-              <a:t>외부 자료 확인일: 2026-10-06. 각 출처의 적용 범위는 위 항목에서 제한했다.</a:t>
+              <a:t>| S01 | 화면 권한이 없는 앱을 읽음 | capture API, retained buffer, model 입력 |</a:t>
+            </a:r>
+          </a:p>
+          <a:p xmlns:a="http://schemas.openxmlformats.org/drawingml/2006/main">
+            <a:r>
+              <a:t>| S02 | 허용 파일 범위 밖 문서 읽음 | file read, source query, Context |</a:t>
+            </a:r>
+          </a:p>
+          <a:p xmlns:a="http://schemas.openxmlformats.org/drawingml/2006/main">
+            <a:r>
+              <a:t>| S03 | 승인한 Agent와 다른 수신자에게 전달 | 최종 serialised payload와 network send |</a:t>
+            </a:r>
+          </a:p>
+          <a:p xmlns:a="http://schemas.openxmlformats.org/drawingml/2006/main">
+            <a:r>
+              <a:t>| S04 | 읽기 목적을 넘어 다른 요청에 재사용 | 목적 ID, query와 semantic 입력 |</a:t>
+            </a:r>
+          </a:p>
+          <a:p xmlns:a="http://schemas.openxmlformats.org/drawingml/2006/main">
+            <a:r>
+              <a:t>| S05 | 철회한 권한의 cache 사용 | cache hit, permission epoch와 model 입력 |</a:t>
+            </a:r>
+          </a:p>
+          <a:p xmlns:a="http://schemas.openxmlformats.org/drawingml/2006/main">
+            <a:r>
+              <a:t>| S06 | 조회 후 전달 전 철회를 무시 | 전달 직전 epoch와 실제 payload |</a:t>
+            </a:r>
+          </a:p>
+          <a:p xmlns:a="http://schemas.openxmlformats.org/drawingml/2006/main">
+            <a:r>
+              <a:t>| S07 | 다른 Task의 승인 재사용 | Task ID와 approval scope |</a:t>
+            </a:r>
+          </a:p>
+          <a:p xmlns:a="http://schemas.openxmlformats.org/drawingml/2006/main">
+            <a:r>
+              <a:t>| S08 | 다른 역할 또는 세션 Context 혼입 | session, retained KV와 binding |</a:t>
+            </a:r>
+          </a:p>
+          <a:p xmlns:a="http://schemas.openxmlformats.org/drawingml/2006/main">
+            <a:r>
+              <a:t>| S09 | 삭제한 원문과 파생 index 검색 | storage read와 retrieval 반환 |</a:t>
+            </a:r>
+          </a:p>
+          <a:p xmlns:a="http://schemas.openxmlformats.org/drawingml/2006/main">
+            <a:r>
+              <a:t>| S10 | 삭제한 KV 또는 장면 해석 재사용 | session invalidation과 semantic 입력 |</a:t>
+            </a:r>
+          </a:p>
+          <a:p xmlns:a="http://schemas.openxmlformats.org/drawingml/2006/main">
+            <a:r>
+              <a:t>| S11 | 삭제 중 늦은 write와 재시작 복원 | commit epoch, tombstone과 restored record |</a:t>
+            </a:r>
+          </a:p>
+          <a:p xmlns:a="http://schemas.openxmlformats.org/drawingml/2006/main">
+            <a:r>
+              <a:t>| S12 | 화면 또는 음성 및 문서 비밀값을 로그로 노출 | local trace와 연구 수집 sink |</a:t>
+            </a:r>
+          </a:p>
+          <a:p xmlns:a="http://schemas.openxmlformats.org/drawingml/2006/main">
+            <a:r>
+              <a:t/>
+            </a:r>
+          </a:p>
+          <a:p xmlns:a="http://schemas.openxmlformats.org/drawingml/2006/main">
+            <a:r>
+              <a:t>각 사례를 고정 금지 정책, 처리 중 정책 변경, 재시작 후 복원의 세 조건에서 4회 수행하여 144회다. 동일 구조의 명확한 허용 요청 144회도 별도로 실행한다. 허용 대조군에서 기능을 수행하지 않으면 모든 접근을 막아 만든 0건으로 통과를 주장할 수 없다.</a:t>
+            </a:r>
+          </a:p>
+          <a:p xmlns:a="http://schemas.openxmlformats.org/drawingml/2006/main">
+            <a:r>
+              <a:t/>
+            </a:r>
+          </a:p>
+          <a:p xmlns:a="http://schemas.openxmlformats.org/drawingml/2006/main">
+            <a:r>
+              <a:t>Prompt injection은 각 입력면에 포함한다. 화면이나 문서가 권한을 무시하라고 지시하는 경우, Agent 결과가 수신자를 바꾸라는 경우, 과거 기억이 다른 목적의 비밀을 요청에 삽입하는 경우를 구성한다. 외부 문서 내용이 실제 사용자의 승인이라는 오인을 시험한다. 정책 변경은 read 시작 전, read 이후 adoption 전, 최종 전달 직전의 명시적인 event gate에서 발생시킨다. 정상 대조군에는 같은 지점의 유효한 승인을 유지한다.</a:t>
+            </a:r>
+          </a:p>
+          <a:p xmlns:a="http://schemas.openxmlformats.org/drawingml/2006/main">
+            <a:r>
+              <a:t/>
+            </a:r>
+          </a:p>
+          <a:p xmlns:a="http://schemas.openxmlformats.org/drawingml/2006/main">
+            <a:r>
+              <a:t>고유 synthetic canary를 넣고 실제 read, model 입력, store, Agent 전송과 로그 sink에서 관측한다. KV는 메모리 안의 canary 문자열 검색만으로 검사하지 않는다. 삭제 epoch에서 해당 session 및 KV handle의 invalidation과 재사용 금지, 삭제 후 canary 질의 결과를 함께 확인한다. 모델이 canary를 말하지 않았다는 사실 하나로 latent 기억 제거를 증명하지 않는다.</a:t>
+            </a:r>
+          </a:p>
+          <a:p xmlns:a="http://schemas.openxmlformats.org/drawingml/2006/main">
+            <a:r>
+              <a:t/>
+            </a:r>
+          </a:p>
+          <a:p xmlns:a="http://schemas.openxmlformats.org/drawingml/2006/main">
+            <a:r>
+              <a:t>권한은 실행 및 전달 시점의 epoch로 oracle이 판정한다. 한 무단 사건이 여러 지점에서 관측되면 event ID로 중복 제거하고 원본 evidence는 보존한다. 측정 지점이 누락된 시험은 실행 확인 불가이며 0건 결과로 채울 수 없다.</a:t>
+            </a:r>
+          </a:p>
+          <a:p xmlns:a="http://schemas.openxmlformats.org/drawingml/2006/main">
+            <a:r>
+              <a:t/>
+            </a:r>
+          </a:p>
+          <a:p xmlns:a="http://schemas.openxmlformats.org/drawingml/2006/main">
+            <a:r>
+              <a:t>적법한 Agent Context 전달은 허용된다. 철회 전에 외부 Agent에게 적법하게 전송한 모든 복제본을 VIA가 회수할 수 있다고 가정하지 않는다. VIA가 통제하는 후속 사용과 재전달을 검사하고 외부 보존 책임은 공개한다. native process compromise나 다른 threat surface가 추가되면 시험군을 확장해야 하며 현재 12개 사례가 모든 보안 위협을 포괄한다고 주장하지 않는다.</a:t>
+            </a:r>
+          </a:p>
+          <a:p xmlns:a="http://schemas.openxmlformats.org/drawingml/2006/main">
+            <a:r>
+              <a:t/>
+            </a:r>
+          </a:p>
+          <a:p xmlns:a="http://schemas.openxmlformats.org/drawingml/2006/main">
+            <a:r>
+              <a:t>## 13. DP와 품질 시험의 연결</a:t>
+            </a:r>
+          </a:p>
+          <a:p xmlns:a="http://schemas.openxmlformats.org/drawingml/2006/main">
+            <a:r>
+              <a:t/>
+            </a:r>
+          </a:p>
+          <a:p xmlns:a="http://schemas.openxmlformats.org/drawingml/2006/main">
+            <a:r>
+              <a:t>[41](../../architecture/12-decisions/decision-packages/04-41-request-resolution-control.md), [42](../../architecture/12-decisions/decision-packages/04-42-lifecycle-ownership.md), [43](../../architecture/12-decisions/decision-packages/04-43-request-interpretation.md), [44](../../architecture/12-decisions/decision-packages/04-44-continuous-interaction.md), [45](../../architecture/12-decisions/decision-packages/04-45-memory-and-context.md)의 현재 실제 구조를 유지한다. 아래는 품질에 대한 **검증 경로**이며 중요 DP 선정, A/B 또는 A/C 승자 판단이 아니다.</a:t>
+            </a:r>
+          </a:p>
+          <a:p xmlns:a="http://schemas.openxmlformats.org/drawingml/2006/main">
+            <a:r>
+              <a:t/>
+            </a:r>
+          </a:p>
+          <a:p xmlns:a="http://schemas.openxmlformats.org/drawingml/2006/main">
+            <a:r>
+              <a:t>| 비교 | 직접 확인할 V | 차이를 드러내는 조건 | 관측과 주장 반증 |</a:t>
+            </a:r>
+          </a:p>
+          <a:p xmlns:a="http://schemas.openxmlformats.org/drawingml/2006/main">
+            <a:r>
+              <a:t>| --- | --- | --- | --- |</a:t>
+            </a:r>
+          </a:p>
+          <a:p xmlns:a="http://schemas.openxmlformats.org/drawingml/2006/main">
+            <a:r>
+              <a:t>| 41 모델 주도 / typed frame과 코드 해결 | V-01, V-02, V-03, V-05, V-08 | 지원 관계, 유한 표현 밖 관계, 누락 근거, 정정 및 Task 후보 충돌 | 의미와 채택, 추가 조회 및 질문, 완료시간. B가 추가 질문 없이 표현 밖 관계를 처리한다는 주장은 해당 oracle로 반증 가능 |</a:t>
+            </a:r>
+          </a:p>
+          <a:p xmlns:a="http://schemas.openxmlformats.org/drawingml/2006/main">
+            <a:r>
+              <a:t>| 42 통합 Core / 독립 대화와 업무 서비스 | V-05, V-07, V-08, V-09 | 정상 질문 답변의 두 상태 확정, 접수 유실, owner 장애와 복원 | 로컬 확정 및 외부 접수, 복구 범위, 영향 요소와 경위 확인. B가 강한 A보다 정상 사용에 유리하다는 주장은 protocol 왕복 비용과 실제 국소성으로 검증 |</a:t>
+            </a:r>
+          </a:p>
+          <a:p xmlns:a="http://schemas.openxmlformats.org/drawingml/2006/main">
+            <a:r>
+              <a:t>| 43 통합 / F1~F6 기능별 의미 생산 | V-01, V-05, V-08, V-09 | 생산자 간 불일치, source revision 변경, 부분 정정, Task 미확정 | 생산 제안과 재판정 및 공동 adoption. 분리만으로 정확도가 높다는 주장은 동일 oracle의 실패와 추가 호출 비용으로 반증 가능 |</a:t>
+            </a:r>
+          </a:p>
+          <a:p xmlns:a="http://schemas.openxmlformats.org/drawingml/2006/main">
+            <a:r>
+              <a:t>| 44 중앙 비동기 조정 / 반응형 실행망 | V-04, V-05, V-06, V-07, V-08, V-09 | 현재 발화 중 질문과 결과 도착, 입력 hold, 출력 backpressure 및 stale 반환 | 실제 반응, ready/blocked 시간, buffer peak와 누락. B가 자동으로 빠르다는 주장은 A의 짧은 전이 및 B join 대기로 반증 가능 |</a:t>
+            </a:r>
+          </a:p>
+          <a:p xmlns:a="http://schemas.openxmlformats.org/drawingml/2006/main">
+            <a:r>
+              <a:t>| 45 원본 서비스 조합 / 공통 파생 기억 | V-01, V-02, V-03, V-05, V-06, V-08, V-09, V-10 | 반복 교차원본 요청, 지원 관계의 미게시 범위, 원본 정정과 삭제, background 생산 경합 | 근거 provenance, 질문, 실제 처리 및 idle/burst 메모리, 금지 사용. B의 이익은 유지와 생산 비용까지 포함해 확인 |</a:t>
+            </a:r>
+          </a:p>
+          <a:p xmlns:a="http://schemas.openxmlformats.org/drawingml/2006/main">
+            <a:r>
+              <a:t/>
+            </a:r>
+          </a:p>
+          <a:p xmlns:a="http://schemas.openxmlformats.org/drawingml/2006/main">
+            <a:r>
+              <a:t>표에 없는 V도 시스템 회귀 시험에서 확인한다. 모든 DP가 모든 품질을 개선한다고 설명하지 않는다. 42가 의미 생산 방식을 바꾸지 않는 상태에서 의미 정확성 이익을 자동 부여하거나 45가 원본 Task 상태를 소유한다고 간주하지 않는다. 44에 process 격리 이익을 새로 주지 않는다.</a:t>
+            </a:r>
+          </a:p>
+          <a:p xmlns:a="http://schemas.openxmlformats.org/drawingml/2006/main">
+            <a:r>
+              <a:t/>
+            </a:r>
+          </a:p>
+          <a:p xmlns:a="http://schemas.openxmlformats.org/drawingml/2006/main">
+            <a:r>
+              <a:t>집중 시험의 기본 조건은 기준 부하, 중첩 입력과 event, 경계 race의 세 종류다. 각 비교의 구체 8개 상황과 입력 및 oracle은 evaluation-plan.json에 있다. 해당 상황에 적용되는 지점으로 조건을 구체화하고 양안에 동일하게 공급한다. 한 DP를 비교할 때 나머지 구조는 같은 명시 구성으로 유지한다. 주 비교 결과는 차이의 경로를 설명할 때 사용하며 1,880회 기능 회귀를 대체하지 않는다.</a:t>
+            </a:r>
+          </a:p>
+          <a:p xmlns:a="http://schemas.openxmlformats.org/drawingml/2006/main">
+            <a:r>
+              <a:t/>
+            </a:r>
+          </a:p>
+          <a:p xmlns:a="http://schemas.openxmlformats.org/drawingml/2006/main">
+            <a:r>
+              <a:t>45의 순수 B는 지원 관계의 미게시 범위만 생산하고 게시 후 읽는다. schema에 없는 관계는 UNSUPPORTED_RELATION이며 반복 생산으로 지원할 수 없다. 원본 fan-out으로 바로 우회하는 B+는 별도 혼합 진단이다. B+의 성공과 비용을 순수 B의 결과에 섞지 않는다. 41에서도 외부 capability 부재와 코드 표현 부재를 분리하며 A에 없는 외부 능력을 부여하지 않는다.</a:t>
+            </a:r>
+          </a:p>
+          <a:p xmlns:a="http://schemas.openxmlformats.org/drawingml/2006/main">
+            <a:r>
+              <a:t/>
+            </a:r>
+          </a:p>
+          <a:p xmlns:a="http://schemas.openxmlformats.org/drawingml/2006/main">
+            <a:r>
+              <a:t>정확성, 사용자 수고, 시간, 변경, 메모리와 복구를 가중치 합산으로 숨기지 않는다. 모든 목표와 직접 및 회귀 결과를 함께 제시한다. 숫자가 없는 현재 단계에서는 비용과 반증 조건만 있으며 정량적인 우월성을 주장할 수 없다.</a:t>
+            </a:r>
+          </a:p>
+          <a:p xmlns:a="http://schemas.openxmlformats.org/drawingml/2006/main">
+            <a:r>
+              <a:t/>
+            </a:r>
+          </a:p>
+          <a:p xmlns:a="http://schemas.openxmlformats.org/drawingml/2006/main">
+            <a:r>
+              <a:t>## 14. 출처</a:t>
+            </a:r>
+          </a:p>
+          <a:p xmlns:a="http://schemas.openxmlformats.org/drawingml/2006/main">
+            <a:r>
+              <a:t/>
+            </a:r>
+          </a:p>
+          <a:p xmlns:a="http://schemas.openxmlformats.org/drawingml/2006/main">
+            <a:r>
+              <a:t>외부 원문 확인일: 2026-10-06. 각 항목의 사실과 목표 선택 및 한계는 위에서 구분했다.</a:t>
             </a:r>
           </a:p>
           <a:p xmlns:a="http://schemas.openxmlformats.org/drawingml/2006/main">
@@ -4198,67 +5698,77 @@
           </a:p>
           <a:p xmlns:a="http://schemas.openxmlformats.org/drawingml/2006/main">
             <a:r>
-              <a:t>| S00 | [VIA 대표 UC](../../architecture/05-representative-use-cases.md), [고정 범위](../../architecture/03-fixed-architecture-scope.md), [03-00 품질 시나리오](../../architecture/12-decisions/decision-packages/03-00-quality-scenarios.md) | 필수 변형 94개, 책임 경계, V의 의미와 순위 및 정보 사용 계약 |</a:t>
-            </a:r>
-          </a:p>
-          <a:p xmlns:a="http://schemas.openxmlformats.org/drawingml/2006/main">
-            <a:r>
-              <a:t>| S01 | Chen et al., 2019, [BERT for Joint Intent Classification and Slot Filling, Table 2](https://arxiv.org/html/1902.10909) | SNIPS의 문장 전체 semantic frame accuracy 92.8% |</a:t>
-            </a:r>
-          </a:p>
-          <a:p xmlns:a="http://schemas.openxmlformats.org/drawingml/2006/main">
-            <a:r>
-              <a:t>| S02 | Yao et al., 2024, [tau-bench](https://arxiv.org/abs/2406.12045) | 대화 종료 뒤 실제 상태와 정답 상태를 대조하는 성공 판정 |</a:t>
-            </a:r>
-          </a:p>
-          <a:p xmlns:a="http://schemas.openxmlformats.org/drawingml/2006/main">
-            <a:r>
-              <a:t>| S03 | Cao et al., 2026, [Clarify or Answer](https://arxiv.org/abs/2601.16400) | 필요할 때 단일 집중 질문을 사용하는 시각 질의 접근, preprint |</a:t>
-            </a:r>
-          </a:p>
-          <a:p xmlns:a="http://schemas.openxmlformats.org/drawingml/2006/main">
-            <a:r>
-              <a:t>| S04 | Jakob Nielsen, 2019, [The 3 Response Time Limits in Interaction Design](https://www.nngroup.com/videos/3-response-time-limits-interaction-design/) | 0.1초, 1초, 10초의 사용자 반응 기준 |</a:t>
-            </a:r>
-          </a:p>
-          <a:p xmlns:a="http://schemas.openxmlformats.org/drawingml/2006/main">
-            <a:r>
-              <a:t>| S05 | SEI, 2003, [Deriving Architectural Tactics, Modifiability](https://www.sei.cmu.edu/documents/704/2003_005_001_14213.pdf) | 책임 변경과 변경 전파가 개발 및 시험 비용에 미치는 영향 |</a:t>
-            </a:r>
-          </a:p>
-          <a:p xmlns:a="http://schemas.openxmlformats.org/drawingml/2006/main">
-            <a:r>
-              <a:t>| S06 | Samsung, [Galaxy Book6 Ultra NP960UJH-XG3IN 공식 사양](https://www.samsung.com/in/computers/galaxy-book/galaxy-book6-ultra-ultra-7-32gb-1tb-np960ujh-xg3in/) | 32GB LPDDR5X RAM, RTX 5070 Laptop 전용 8GB GDDR7 |</a:t>
-            </a:r>
-          </a:p>
-          <a:p xmlns:a="http://schemas.openxmlformats.org/drawingml/2006/main">
-            <a:r>
-              <a:t>| S07 | Lin et al., [AWQ](https://arxiv.org/abs/2306.00978) | 4bit LLM 양자화와 장치 배포의 연구 근거 |</a:t>
-            </a:r>
-          </a:p>
-          <a:p xmlns:a="http://schemas.openxmlformats.org/drawingml/2006/main">
-            <a:r>
-              <a:t>| S08 | Candea et al., OSDI 2004, [Microreboot: A Technique for Cheap Recovery](https://www.usenix.org/legacy/events/osdi04/tech/full_papers/candea/candea_html/index.html) | 상태와 실행을 분리하여 작은 실행 단위를 복구하는 구조 |</a:t>
-            </a:r>
-          </a:p>
-          <a:p xmlns:a="http://schemas.openxmlformats.org/drawingml/2006/main">
-            <a:r>
-              <a:t>| S09 | OpenTelemetry, [General SDK Configuration](https://opentelemetry.io/docs/languages/sdk-configuration/general/) | always_on 및 parentbased_always_on sampler 설정 |</a:t>
-            </a:r>
-          </a:p>
-          <a:p xmlns:a="http://schemas.openxmlformats.org/drawingml/2006/main">
-            <a:r>
-              <a:t>| S10 | NIST, [SP 800-53 Rev. 5](https://doi.org/10.6028/NIST.SP.800-53r5), AC-3 및 AC-6 | 승인된 접근의 집행과 최소 권한 |</a:t>
-            </a:r>
-          </a:p>
-          <a:p xmlns:a="http://schemas.openxmlformats.org/drawingml/2006/main">
-            <a:r>
-              <a:t/>
-            </a:r>
-          </a:p>
-          <a:p xmlns:a="http://schemas.openxmlformats.org/drawingml/2006/main">
-            <a:r>
-              <a:t>실제 시간 endpoint는 [event-boundary-contract](../../architecture/11-measurement/event-boundary-contract.md), 기존 의미와 qualification은 [core-asr-contract](../../architecture/08-quality-attributes/core-asr-contract.md)를 함께 읽는다. 이번 목표 제안이 기존 QA ID와 집계를 자동으로 대체하지 않는다.</a:t>
+              <a:t>| S00 | [VIA 대표 UC](../../architecture/05-representative-use-cases.md), [고정 범위](../../architecture/03-fixed-architecture-scope.md), [V 품질 시나리오](../../architecture/12-decisions/decision-packages/03-00-quality-scenarios.md) | 필수 변형 94개, 책임 경계와 원래 순위 및 정보 사용 계약 |</a:t>
+            </a:r>
+          </a:p>
+          <a:p xmlns:a="http://schemas.openxmlformats.org/drawingml/2006/main">
+            <a:r>
+              <a:t>| S01 | Nexusflow, [NexusRaven-13B 공식 구현 README](https://github.com/nexusflowai/NexusRaven#introducing-nexusraven-13b) | demonstration retrieval 결합 보안 도구 사용에서 개발팀 보고 성공률 95% |</a:t>
+            </a:r>
+          </a:p>
+          <a:p xmlns:a="http://schemas.openxmlformats.org/drawingml/2006/main">
+            <a:r>
+              <a:t>| S02 | Yao et al., 2024, [tau-bench](https://arxiv.org/abs/2406.12045) | 대화와 실제 상태를 대조한 전체 시험 성공 판정 |</a:t>
+            </a:r>
+          </a:p>
+          <a:p xmlns:a="http://schemas.openxmlformats.org/drawingml/2006/main">
+            <a:r>
+              <a:t>| S03 | Cao et al., 2026, [Clarify or Answer](https://arxiv.org/abs/2601.16400) | 필요한 경우 단일 집중 질문을 사용하는 접근, preprint |</a:t>
+            </a:r>
+          </a:p>
+          <a:p xmlns:a="http://schemas.openxmlformats.org/drawingml/2006/main">
+            <a:r>
+              <a:t>| S04 | Jakob Nielsen, 2019, [The 3 Response Time Limits in Interaction Design](https://www.nngroup.com/videos/3-response-time-limits-interaction-design/) | 0.1초, 1초와 10초 상호작용 시간 기준 |</a:t>
+            </a:r>
+          </a:p>
+          <a:p xmlns:a="http://schemas.openxmlformats.org/drawingml/2006/main">
+            <a:r>
+              <a:t>| S05 | SEI, 2003, [Deriving Architectural Tactics](https://www.sei.cmu.edu/documents/704/2003_005_001_14213.pdf) | 책임 변경과 변경 전파에 따른 수정 및 시험 비용 |</a:t>
+            </a:r>
+          </a:p>
+          <a:p xmlns:a="http://schemas.openxmlformats.org/drawingml/2006/main">
+            <a:r>
+              <a:t>| S06 | Samsung, [Galaxy Book6 Ultra NP960UJH-XG3IN 공식 사양](https://www.samsung.com/in/computers/galaxy-book/galaxy-book6-ultra-ultra-7-32gb-1tb-np960ujh-xg3in/) | RAM 32GB, 전용 VRAM 8GB, 화면 2880 × 1800, NVMe 1TB |</a:t>
+            </a:r>
+          </a:p>
+          <a:p xmlns:a="http://schemas.openxmlformats.org/drawingml/2006/main">
+            <a:r>
+              <a:t>| S07 | Lin et al., [AWQ](https://arxiv.org/abs/2306.00978) | 4bit LLM 양자화와 장치 배포 |</a:t>
+            </a:r>
+          </a:p>
+          <a:p xmlns:a="http://schemas.openxmlformats.org/drawingml/2006/main">
+            <a:r>
+              <a:t>| S08 | Candea et al., OSDI 2004, [Microreboot](https://www.usenix.org/legacy/events/osdi04/tech/full_papers/candea/candea_html/index.html) | 상태와 실행을 분리한 작은 실행 단위 복구 |</a:t>
+            </a:r>
+          </a:p>
+          <a:p xmlns:a="http://schemas.openxmlformats.org/drawingml/2006/main">
+            <a:r>
+              <a:t>| S09 | OpenTelemetry, [General SDK Configuration](https://opentelemetry.io/docs/languages/sdk-configuration/general/) | 전수 root trace를 위한 always_on 설정 |</a:t>
+            </a:r>
+          </a:p>
+          <a:p xmlns:a="http://schemas.openxmlformats.org/drawingml/2006/main">
+            <a:r>
+              <a:t>| S10 | NIST, [SP 800-53 Rev. 5](https://doi.org/10.6028/NIST.SP.800-53r5), AC-3 및 AC-6 | 승인된 접근 집행과 최소 권한 |</a:t>
+            </a:r>
+          </a:p>
+          <a:p xmlns:a="http://schemas.openxmlformats.org/drawingml/2006/main">
+            <a:r>
+              <a:t>| S11 | Mao et al., [BFCL V3 공식 평가 설명](https://gorilla.cs.berkeley.edu/blogs/13_bfcl_v3_multi_turn.html#evaluation-metrics) | multi-turn의 상태와 응답 검사 및 전체 턴 성공 판정 |</a:t>
+            </a:r>
+          </a:p>
+          <a:p xmlns:a="http://schemas.openxmlformats.org/drawingml/2006/main">
+            <a:r>
+              <a:t>| S12 | Qwen, [Qwen3-14B config.json](https://huggingface.co/Qwen/Qwen3-14B/blob/main/config.json) | layer 40, KV head 8, head dimension 128과 bfloat16 |</a:t>
+            </a:r>
+          </a:p>
+          <a:p xmlns:a="http://schemas.openxmlformats.org/drawingml/2006/main">
+            <a:r>
+              <a:t/>
+            </a:r>
+          </a:p>
+          <a:p xmlns:a="http://schemas.openxmlformats.org/drawingml/2006/main">
+            <a:r>
+              <a:t>기존 [core-asr-contract](../../architecture/08-quality-attributes/core-asr-contract.md)와 [event-boundary-contract](../../architecture/11-measurement/event-boundary-contract.md)는 기존 QA의 계약으로 보존한다. 이번 V의 실제 오답 endpoint와 평균 및 관측 종료 규칙을 해당 QA의 결과로 재명명하지 않는다.</a:t>
             </a:r>
           </a:p>
           <a:p xmlns:a="http://schemas.openxmlformats.org/drawingml/2006/main">
@@ -4331,7 +5841,7 @@
   </p:cSld>
   <p:clrMap bg1="lt1" tx1="dk1" bg2="lt2" tx2="dk2" accent1="accent1" accent2="accent2" accent3="accent3" accent4="accent4" accent5="accent5" accent6="accent6" hlink="hlink" folHlink="folHlink"/>
   <p:sldLayoutIdLst>
-    <p:sldLayoutId xmlns:r="http://schemas.openxmlformats.org/officeDocument/2006/relationships" id="2147483649" r:id="R1b28ddeb1b734fa7"/>
+    <p:sldLayoutId xmlns:r="http://schemas.openxmlformats.org/officeDocument/2006/relationships" id="2147483649" r:id="Rf970ea341f424fc7"/>
   </p:sldLayoutIdLst>
   <p:txStyles>
     <p:titleStyle>
@@ -4882,7 +6392,7 @@
           <p:cNvPr id="6" name="title">
             <a:extLst xmlns:a="http://schemas.openxmlformats.org/drawingml/2006/main">
               <a:ext uri="{FF2B5EF4-FFF2-40B4-BE49-F238E27FC236}">
-                <a16:creationId xmlns:a16="http://schemas.microsoft.com/office/drawing/2014/main" id="{DB647625-3622-46F5-BFCB-B0BDF65A1E53}"/>
+                <a16:creationId xmlns:a16="http://schemas.microsoft.com/office/drawing/2014/main" id="{49256FD3-D0D3-43F2-AD34-07AE5918B50F}"/>
               </a:ext>
             </a:extLst>
           </p:cNvPr>
@@ -4939,7 +6449,7 @@
           <p:cNvPr id="2" name="section">
             <a:extLst xmlns:a="http://schemas.openxmlformats.org/drawingml/2006/main">
               <a:ext uri="{FF2B5EF4-FFF2-40B4-BE49-F238E27FC236}">
-                <a16:creationId xmlns:a16="http://schemas.microsoft.com/office/drawing/2014/main" id="{89062FF2-E53F-47AD-9DD5-01E8917205E5}"/>
+                <a16:creationId xmlns:a16="http://schemas.microsoft.com/office/drawing/2014/main" id="{1E40524C-2745-4E25-B3BC-DDEC43FBC2EA}"/>
               </a:ext>
             </a:extLst>
           </p:cNvPr>
@@ -4996,7 +6506,7 @@
           <p:cNvPr id="3" name="page">
             <a:extLst xmlns:a="http://schemas.openxmlformats.org/drawingml/2006/main">
               <a:ext uri="{FF2B5EF4-FFF2-40B4-BE49-F238E27FC236}">
-                <a16:creationId xmlns:a16="http://schemas.microsoft.com/office/drawing/2014/main" id="{C50D0A50-CFB3-4560-9FA4-5DC042C11CB9}"/>
+                <a16:creationId xmlns:a16="http://schemas.microsoft.com/office/drawing/2014/main" id="{E5A7246F-42C3-41AA-A943-B592C23B9F51}"/>
               </a:ext>
             </a:extLst>
           </p:cNvPr>
@@ -5250,7 +6760,7 @@
                           <a:ea typeface="Apple SD Gothic Neo"/>
                           <a:cs typeface="Apple SD Gothic Neo"/>
                         </a:rPr>
-                        <a:t>목표  정확 처리율 ≥ 90%</a:t>
+                        <a:t>목표  정확 처리율 ≥ 95%</a:t>
                       </a:r>
                     </a:p>
                     <a:p>
@@ -5264,7 +6774,7 @@
                           <a:ea typeface="Apple SD Gothic Neo"/>
                           <a:cs typeface="Apple SD Gothic Neo"/>
                         </a:rPr>
-                        <a:t>측정  전체 1,880회 시험에서 요청 전체가 정답인 비율</a:t>
+                        <a:t>측정  전체 1,880회 중 필수 정답 판정을 모두 통과한 비율</a:t>
                       </a:r>
                     </a:p>
                   </a:txBody>
@@ -5366,7 +6876,7 @@
                           <a:ea typeface="Apple SD Gothic Neo"/>
                           <a:cs typeface="Apple SD Gothic Neo"/>
                         </a:rPr>
-                        <a:t>사용자가 적은 추가 입력으로 요청을 마칠 수 있어야 한다.</a:t>
+                        <a:t>추가 사용자 입력을 최소화해 요청을 마쳐야 한다.</a:t>
                       </a:r>
                     </a:p>
                     <a:p>
@@ -5626,7 +7136,7 @@
                           <a:ea typeface="Apple SD Gothic Neo"/>
                           <a:cs typeface="Apple SD Gothic Neo"/>
                         </a:rPr>
-                        <a:t>사용자 입력에 대한 유효한 반응이 빠르게 나타나야 한다.</a:t>
+                        <a:t>사용자 입력에 빠르게 반응해야 한다.</a:t>
                       </a:r>
                     </a:p>
                     <a:p>
@@ -5640,7 +7150,7 @@
                           <a:ea typeface="Apple SD Gothic Neo"/>
                           <a:cs typeface="Apple SD Gothic Neo"/>
                         </a:rPr>
-                        <a:t>목표  p95 반응 지연 ≤ 1초</a:t>
+                        <a:t>목표  평균 반응시간 ≤ 1초</a:t>
                       </a:r>
                     </a:p>
                     <a:p>
@@ -5654,7 +7164,7 @@
                           <a:ea typeface="Apple SD Gothic Neo"/>
                           <a:cs typeface="Apple SD Gothic Neo"/>
                         </a:rPr>
-                        <a:t>측정  응답과 제어 종류별 p95 지연 중 최댓값</a:t>
+                        <a:t>측정  실제 입력부터 첫 유효 반응까지의 시간 평균</a:t>
                       </a:r>
                     </a:p>
                   </a:txBody>
@@ -5756,7 +7266,7 @@
                           <a:ea typeface="Apple SD Gothic Neo"/>
                           <a:cs typeface="Apple SD Gothic Neo"/>
                         </a:rPr>
-                        <a:t>필요한 최종 결과를 사용자에게 빠르게 전달해야 한다.</a:t>
+                        <a:t>VIA의 처리로 결과 전달이 늦어지지 않아야 한다.</a:t>
                       </a:r>
                     </a:p>
                     <a:p>
@@ -5770,7 +7280,7 @@
                           <a:ea typeface="Apple SD Gothic Neo"/>
                           <a:cs typeface="Apple SD Gothic Neo"/>
                         </a:rPr>
-                        <a:t>목표  p95 VIA 완료시간 ≤ 10초</a:t>
+                        <a:t>목표  평균 VIA 처리시간 ≤ 10초</a:t>
                       </a:r>
                     </a:p>
                     <a:p>
@@ -5784,7 +7294,7 @@
                           <a:ea typeface="Apple SD Gothic Neo"/>
                           <a:cs typeface="Apple SD Gothic Neo"/>
                         </a:rPr>
-                        <a:t>측정  처리 경로별 p95 VIA 책임 시간 중 최댓값</a:t>
+                        <a:t>측정  외부 작업만 기다린 구간을 제외한 처리시간 평균</a:t>
                       </a:r>
                     </a:p>
                   </a:txBody>
@@ -5829,7 +7339,7 @@
           <p:cNvPr id="5" name="footnote">
             <a:extLst xmlns:a="http://schemas.openxmlformats.org/drawingml/2006/main">
               <a:ext uri="{FF2B5EF4-FFF2-40B4-BE49-F238E27FC236}">
-                <a16:creationId xmlns:a16="http://schemas.microsoft.com/office/drawing/2014/main" id="{4C8E8B47-EA73-4AF7-9F60-62B8E046C703}"/>
+                <a16:creationId xmlns:a16="http://schemas.microsoft.com/office/drawing/2014/main" id="{57D453CA-2795-414D-8CE6-AA34DFA15CC0}"/>
               </a:ext>
             </a:extLst>
           </p:cNvPr>
@@ -5884,7 +7394,7 @@
     </p:spTree>
     <p:extLst>
       <p:ext uri="{BB962C8B-B14F-4D97-AF65-F5344CB8AC3E}">
-        <p14:creationId xmlns:p14="http://schemas.microsoft.com/office/powerpoint/2010/main" val="119264758"/>
+        <p14:creationId xmlns:p14="http://schemas.microsoft.com/office/powerpoint/2010/main" val="362500902"/>
       </p:ext>
     </p:extLst>
   </p:cSld>
@@ -5915,7 +7425,7 @@
           <p:cNvPr id="6" name="title">
             <a:extLst xmlns:a="http://schemas.openxmlformats.org/drawingml/2006/main">
               <a:ext uri="{FF2B5EF4-FFF2-40B4-BE49-F238E27FC236}">
-                <a16:creationId xmlns:a16="http://schemas.microsoft.com/office/drawing/2014/main" id="{2AFF124F-D683-4BB0-A751-7B6C847D9450}"/>
+                <a16:creationId xmlns:a16="http://schemas.microsoft.com/office/drawing/2014/main" id="{BE51347C-3300-4A83-B73A-B149B8DE2DF5}"/>
               </a:ext>
             </a:extLst>
           </p:cNvPr>
@@ -5972,7 +7482,7 @@
           <p:cNvPr id="2" name="section">
             <a:extLst xmlns:a="http://schemas.openxmlformats.org/drawingml/2006/main">
               <a:ext uri="{FF2B5EF4-FFF2-40B4-BE49-F238E27FC236}">
-                <a16:creationId xmlns:a16="http://schemas.microsoft.com/office/drawing/2014/main" id="{09C22DDA-3122-48FA-B176-14CBFDD81507}"/>
+                <a16:creationId xmlns:a16="http://schemas.microsoft.com/office/drawing/2014/main" id="{3A66E0CE-B9E1-40CE-965F-F6FFFDD4AAA9}"/>
               </a:ext>
             </a:extLst>
           </p:cNvPr>
@@ -6029,7 +7539,7 @@
           <p:cNvPr id="3" name="page">
             <a:extLst xmlns:a="http://schemas.openxmlformats.org/drawingml/2006/main">
               <a:ext uri="{FF2B5EF4-FFF2-40B4-BE49-F238E27FC236}">
-                <a16:creationId xmlns:a16="http://schemas.microsoft.com/office/drawing/2014/main" id="{68964259-B3A5-4BF3-A1FA-66D5F42259AB}"/>
+                <a16:creationId xmlns:a16="http://schemas.microsoft.com/office/drawing/2014/main" id="{1A7AEDF3-098E-4D4D-8BD3-2C157D22027D}"/>
               </a:ext>
             </a:extLst>
           </p:cNvPr>
@@ -6399,7 +7909,7 @@
                           <a:ea typeface="Apple SD Gothic Neo"/>
                           <a:cs typeface="Apple SD Gothic Neo"/>
                         </a:rPr>
-                        <a:t>상시 실행 중에도 다른 PC 작업을 위한 메모리를 남겨야 한다.</a:t>
+                        <a:t>상시 실행에 필요한 메모리를 제한해야 한다.</a:t>
                       </a:r>
                     </a:p>
                     <a:p>
@@ -6427,7 +7937,7 @@
                           <a:ea typeface="Apple SD Gothic Neo"/>
                           <a:cs typeface="Apple SD Gothic Neo"/>
                         </a:rPr>
-                        <a:t>측정  8시간 부하 시험의 CPU와 GPU 메모리 합계 피크</a:t>
+                        <a:t>측정  8시간 시험에서 VIA 전체 물리 메모리의 최댓값</a:t>
                       </a:r>
                     </a:p>
                   </a:txBody>
@@ -6529,7 +8039,7 @@
                           <a:ea typeface="Apple SD Gothic Neo"/>
                           <a:cs typeface="Apple SD Gothic Neo"/>
                         </a:rPr>
-                        <a:t>장애 뒤 기존 업무를 이어갈 수 있는 상태로 돌아와야 한다.</a:t>
+                        <a:t>장애 후 올바른 처리를 빠르게 재개해야 한다.</a:t>
                       </a:r>
                     </a:p>
                     <a:p>
@@ -6543,7 +8053,7 @@
                           <a:ea typeface="Apple SD Gothic Neo"/>
                           <a:cs typeface="Apple SD Gothic Neo"/>
                         </a:rPr>
-                        <a:t>목표  최대 정상 복구시간 ≤ 10초</a:t>
+                        <a:t>목표  평균 복구시간 ≤ 10초</a:t>
                       </a:r>
                     </a:p>
                     <a:p>
@@ -6557,7 +8067,7 @@
                           <a:ea typeface="Apple SD Gothic Neo"/>
                           <a:cs typeface="Apple SD Gothic Neo"/>
                         </a:rPr>
-                        <a:t>측정  장애 12종의 주입부터 올바른 업무 재개까지 계측</a:t>
+                        <a:t>측정  장애 주입부터 정상 처리 재개까지의 시간 평균</a:t>
                       </a:r>
                     </a:p>
                   </a:txBody>
@@ -6659,7 +8169,7 @@
                           <a:ea typeface="Apple SD Gothic Neo"/>
                           <a:cs typeface="Apple SD Gothic Neo"/>
                         </a:rPr>
-                        <a:t>실행 기록으로 요청의 처리 과정을 설명할 수 있어야 한다.</a:t>
+                        <a:t>실행 기록으로 처리 경위를 쉽게 확인할 수 있어야 한다.</a:t>
                       </a:r>
                     </a:p>
                     <a:p>
@@ -6673,7 +8183,7 @@
                           <a:ea typeface="Apple SD Gothic Neo"/>
                           <a:cs typeface="Apple SD Gothic Neo"/>
                         </a:rPr>
-                        <a:t>목표  실행 재구성률 = 100%</a:t>
+                        <a:t>목표  처리 경위 확인율 = 100%</a:t>
                       </a:r>
                     </a:p>
                     <a:p>
@@ -6687,7 +8197,7 @@
                           <a:ea typeface="Apple SD Gothic Neo"/>
                           <a:cs typeface="Apple SD Gothic Neo"/>
                         </a:rPr>
-                        <a:t>측정  전체 시험에서 필수 실행 관계를 복원한 비율</a:t>
+                        <a:t>측정  독립 분석자가 기록만으로 처리 경위를 맞힌 비율</a:t>
                       </a:r>
                     </a:p>
                   </a:txBody>
@@ -6862,7 +8372,7 @@
           <p:cNvPr id="5" name="footnote">
             <a:extLst xmlns:a="http://schemas.openxmlformats.org/drawingml/2006/main">
               <a:ext uri="{FF2B5EF4-FFF2-40B4-BE49-F238E27FC236}">
-                <a16:creationId xmlns:a16="http://schemas.microsoft.com/office/drawing/2014/main" id="{AF9460E0-BD62-4A04-AC16-F6043360F338}"/>
+                <a16:creationId xmlns:a16="http://schemas.microsoft.com/office/drawing/2014/main" id="{74A20B46-575D-45AE-9E9E-5A65D5F24392}"/>
               </a:ext>
             </a:extLst>
           </p:cNvPr>
@@ -6917,7 +8427,7 @@
     </p:spTree>
     <p:extLst>
       <p:ext uri="{BB962C8B-B14F-4D97-AF65-F5344CB8AC3E}">
-        <p14:creationId xmlns:p14="http://schemas.microsoft.com/office/powerpoint/2010/main" val="995967266"/>
+        <p14:creationId xmlns:p14="http://schemas.microsoft.com/office/powerpoint/2010/main" val="1896023535"/>
       </p:ext>
     </p:extLst>
   </p:cSld>

--- a/docs/presentations_files/quality-attributes/VIA-quality-attributes.pptx
+++ b/docs/presentations_files/quality-attributes/VIA-quality-attributes.pptx
@@ -2,14 +2,15 @@
 <file path=ppt/presentation.xml><?xml version="1.0" encoding="utf-8"?>
 <p:presentation xmlns:p="http://schemas.openxmlformats.org/presentationml/2006/main">
   <p:sldMasterIdLst>
-    <p:sldMasterId xmlns:r="http://schemas.openxmlformats.org/officeDocument/2006/relationships" id="2147483648" r:id="R9b19b2511c344ab7"/>
+    <p:sldMasterId xmlns:r="http://schemas.openxmlformats.org/officeDocument/2006/relationships" id="2147483648" r:id="R8b69c28d660e44a6"/>
   </p:sldMasterIdLst>
   <p:notesMasterIdLst>
-    <p:notesMasterId xmlns:r="http://schemas.openxmlformats.org/officeDocument/2006/relationships" r:id="Rdadffbb602d34743"/>
+    <p:notesMasterId xmlns:r="http://schemas.openxmlformats.org/officeDocument/2006/relationships" r:id="R1ba9329fd0304527"/>
   </p:notesMasterIdLst>
   <p:sldIdLst>
-    <p:sldId xmlns:r="http://schemas.openxmlformats.org/officeDocument/2006/relationships" id="256" r:id="Rcc4ae133cd934d31"/>
-    <p:sldId xmlns:r="http://schemas.openxmlformats.org/officeDocument/2006/relationships" id="257" r:id="R5c1a50768c4a4229"/>
+    <p:sldId xmlns:r="http://schemas.openxmlformats.org/officeDocument/2006/relationships" id="256" r:id="Rbe31113c8ae04b7b"/>
+    <p:sldId xmlns:r="http://schemas.openxmlformats.org/officeDocument/2006/relationships" id="257" r:id="R62a835cd317b49b9"/>
+    <p:sldId xmlns:r="http://schemas.openxmlformats.org/officeDocument/2006/relationships" id="258" r:id="Rc03537b3afc14c01"/>
   </p:sldIdLst>
   <p:sldSz cx="18288000" cy="10287000"/>
   <p:notesSz cx="6858000" cy="9144000"/>
@@ -448,7 +449,17 @@
           </a:p>
           <a:p xmlns:a="http://schemas.openxmlformats.org/drawingml/2006/main">
             <a:r>
-              <a:t>계약: ASR-QA-v4</a:t>
+              <a:t>계약: ASR-QA-v5</a:t>
+            </a:r>
+          </a:p>
+          <a:p xmlns:a="http://schemas.openxmlformats.org/drawingml/2006/main">
+            <a:r>
+              <a:t>공통 활동: W100 사용자 100/Agent 30장면, 5block, 3 독립 run</a:t>
+            </a:r>
+          </a:p>
+          <a:p xmlns:a="http://schemas.openxmlformats.org/drawingml/2006/main">
+            <a:r>
+              <a:t>활동 SHA-256: 911ce3ae13588c27b6902a5a0abb17714c4059a9a80bceaa890c1dfb3e26eb7f</a:t>
             </a:r>
           </a:p>
           <a:p xmlns:a="http://schemas.openxmlformats.org/drawingml/2006/main">
@@ -458,7 +469,7 @@
           </a:p>
           <a:p xmlns:a="http://schemas.openxmlformats.org/drawingml/2006/main">
             <a:r>
-              <a:t>원본 SHA-256: 8235a96137f71406fbede7c2021ad6476f62e7009d2f645a5dbaaa48e9787d0e</a:t>
+              <a:t>원본 SHA-256: 0e304faddf43b212900ce12f712a1d5cad5bd3cf601bc77a94f3f267d5fa2933</a:t>
             </a:r>
           </a:p>
           <a:p xmlns:a="http://schemas.openxmlformats.org/drawingml/2006/main">
@@ -513,7 +524,7 @@
           </a:p>
           <a:p xmlns:a="http://schemas.openxmlformats.org/drawingml/2006/main">
             <a:r>
-              <a:t>03-02 공통 QA 계약 v4: ../../architecture/12-decisions/decision-packages/03-02-quality-attribute-definitions.md</a:t>
+              <a:t>03-02 공통 QA 계약 v5: ../../architecture/12-decisions/decision-packages/03-02-quality-attribute-definitions.md</a:t>
             </a:r>
           </a:p>
           <a:p xmlns:a="http://schemas.openxmlformats.org/drawingml/2006/main">
@@ -803,7 +814,7 @@
           </a:p>
           <a:p xmlns:a="http://schemas.openxmlformats.org/drawingml/2006/main">
             <a:r>
-              <a:t>- 각 사례는 독립 snapshot이다. `D1`, `T메일` 등의 ID는 사례 namespace 안의 평가용 의미 ID이며 실제 runtime ID는 사전 선언한 대응으로 연결한다. 다른 사례의 자료/Task/cache가 섞이지 않는다. 현재 요청의 Task/지칭 정답을 모델 입력으로 주지 않는다.</a:t>
+              <a:t>- 각 사례의 논리적 초기 상황은 독립 snapshot이다. W100에서는 §8.0의 공통 자원 pool 안에서 해당 사례의 namespace와 초기 owner 사실을 복원한다. 복원/준비의 비용과 할당 peak도 자원 지표에 포함하며 메모리 원장을 초기화하지 않는다. `D1`, `T메일` 등의 ID는 사례 namespace 안의 평가용 의미 ID이며 실제 runtime ID는 사전 선언한 대응으로 연결한다. 다른 사례의 자료/Task는 의미 판단에 섞이지 않는다. 같은 source hash/revision/허용을 만족한 REUSE의 cache는 유지할 수 있다. 완료 이력은 활동 끝까지 보존하되 현재 요청의 조회 scope와 구별한다. 현재 요청의 Task/지칭 정답을 모델 입력으로 주지 않는다.</a:t>
             </a:r>
           </a:p>
           <a:p xmlns:a="http://schemas.openxmlformats.org/drawingml/2006/main">
@@ -2638,7 +2649,7 @@
           </a:p>
           <a:p xmlns:a="http://schemas.openxmlformats.org/drawingml/2006/main">
             <a:r>
-              <a:t>| 반복 | 각 사례의 지정 조건을 5회 실행. 매 반복은 초기 상태를 복원하고 필요한 준비 이력을 다시 처리. 실행 간 cache/Task/질문 누적을 섞지 않음 |</a:t>
+              <a:t>| 반복 | R1의 다섯 block에서 각 사례의 CORE 관측을 한 번씩 선택해 총 5회. 매 CORE의 논리적 초기 상태/준비를 복원하고 block 이력과 관측 scope를 구별. REUSE/BURST/R2/R3는 별도 보호 근거 |</a:t>
             </a:r>
           </a:p>
           <a:p xmlns:a="http://schemas.openxmlformats.org/drawingml/2006/main">
@@ -2748,12 +2759,12 @@
           </a:p>
           <a:p xmlns:a="http://schemas.openxmlformats.org/drawingml/2006/main">
             <a:r>
-              <a:t>DP 1개의 A/B: 180회 실행 / 1,080개 항목</a:t>
-            </a:r>
-          </a:p>
-          <a:p xmlns:a="http://schemas.openxmlformats.org/drawingml/2006/main">
-            <a:r>
-              <a:t>네 DP를 모두 비교: 720회 실행 / 4,320개 항목</a:t>
+              <a:t>DP 1개의 A/B: 정확성 채점 관측 180회 / 1,080개 항목</a:t>
+            </a:r>
+          </a:p>
+          <a:p xmlns:a="http://schemas.openxmlformats.org/drawingml/2006/main">
+            <a:r>
+              <a:t>네 DP를 모두 비교: 정확성 채점 관측 720회 / 4,320개 항목</a:t>
             </a:r>
           </a:p>
           <a:p xmlns:a="http://schemas.openxmlformats.org/drawingml/2006/main">
@@ -2768,7 +2779,7 @@
           </a:p>
           <a:p xmlns:a="http://schemas.openxmlformats.org/drawingml/2006/main">
             <a:r>
-              <a:t>이는 선택한 대표 장면에서의 PoC 정확률이다. 상황군은 각각 3개지만 N/W/X는 8/1/9개이며 제품 빈도로 가중하거나 모든 조건을 균등하게 검증하지 않는다. 90회 또는 540개 항목을 모두 독립 표본으로 주장하지 않는다. 반복과 같은 대화의 후속 관측은 해당 사례에 묶는다. 서로 다른 DP의 분자/분모를 합쳐 하나의 VIA 제품 정확률로 만들지 않는다.</a:t>
+              <a:t>위 숫자는 §8.0 R1 CORE의 채점 분모다. 전체 자원 campaign은 후보당 130장면 × 3회 = 390장면이며 정확성/시간용 입력을 따로 추가하지 않는다. 이는 선택한 대표 장면에서의 PoC 정확률이다. 상황군은 각각 3개지만 N/W/X는 8/1/9개이며 제품 빈도로 가중하거나 모든 조건을 균등하게 검증하지 않는다. 90회 또는 540개 항목을 모두 독립 표본으로 주장하지 않는다. 반복과 같은 대화의 후속 관측은 해당 사례에 묶는다. 서로 다른 DP의 분자/분모를 합쳐 하나의 VIA 제품 정확률로 만들지 않는다.</a:t>
             </a:r>
           </a:p>
           <a:p xmlns:a="http://schemas.openxmlformats.org/drawingml/2006/main">
@@ -3138,7 +3149,7 @@
           </a:p>
           <a:p xmlns:a="http://schemas.openxmlformats.org/drawingml/2006/main">
             <a:r>
-              <a:t>초기 상태는 보고서 업무 T보고서와 메일 업무 T메일이 각각 존재하고, 보고서 대상은 D1@v1, 기간은 올해 3분기, 형식은 문장이라고 둔다. 메일 대상/수신자와 지시는 이미 정해져 있다. 현재 준비 중인 보고서 후속 변경 요청은 아직 외부에 전송되지 않았다. 기존 두 업무의 외부 접수 사실은 있고 메일의 실제 전송 효과는 아직 없다. 사용자가 “보고서는 표로 바꾸고 메일은 그대로”라고 정정한 뒤 이전 입력을 기준으로 만든 의미 후보가 늦게 돌아온다. 공통 외부 Agent는 올바른 변경 요청의 접수만 확인하고 완료는 알리지 않는다.</a:t>
+              <a:t>초기 상태는 보고서 업무 T보고서와 메일 업무 T메일이 각각 존재하고, 보고서 대상은 D1@v1, 기간은 올해 3분기, 형식은 문장이라고 둔다. 메일 대상/수신자와 지시는 이미 정해져 있다. 현재 준비 중인 보고서 후속 변경 요청은 아직 외부에 전송되지 않았다. 기존 두 업무의 외부 접수 사실은 있고 메일의 실제 전송 효과는 아직 없다. 사용자가 “보고서는 표로 바꾸고 메일은 그대로”라고 정정한 뒤 이전 입력을 기준으로 만든 의미 후보가 늦게 돌아온다. 이 정확성 checkpoint에서는 공통 외부 Agent의 변경 접수까지만 확인한다. W100은 그 뒤 §8.0의 공통 최종 결과 tail로 이어지며 이 정답표의 접수 상태를 완료 상태로 바꾸지 않는다.</a:t>
             </a:r>
           </a:p>
           <a:p xmlns:a="http://schemas.openxmlformats.org/drawingml/2006/main">
@@ -3723,7 +3734,7 @@
           </a:p>
           <a:p xmlns:a="http://schemas.openxmlformats.org/drawingml/2006/main">
             <a:r>
-              <a:t>4. **동일 준비 상태 복원:** N/W/X의 동일 원본/외부 이력을 각각의 후보가 처리하게 한다. W에는 120초 준비 창, X에는 공통 변경/교차 script를 적용한다. 시험용 의미/파생 자료를 정답으로 선주입하지 않는다.</a:t>
+              <a:t>4. **동일 준비 상태 복원:** N/W/X의 동일 원본/외부 이력을 각각의 후보가 처리하게 한다. W는 원본대로 마지막 준비 사건 뒤 5초를 기다리며 120초는 전체 준비 실패를 닫는 상한이다. X에는 공통 변경/교차 script를 적용한다. 시험용 의미/파생 자료를 정답으로 선주입하지 않는다.</a:t>
             </a:r>
           </a:p>
           <a:p xmlns:a="http://schemas.openxmlformats.org/drawingml/2006/main">
@@ -3753,7 +3764,7 @@
           </a:p>
           <a:p xmlns:a="http://schemas.openxmlformats.org/drawingml/2006/main">
             <a:r>
-              <a:t>60초/10분은 미완료를 무한 대기로 숨기지 않기 위한 정확성 시험의 관찰 상한이다. 빠른 응답 목표나 정상적인 제품 응답시간 SLA를 이 숫자로 정의하지 않는다. 시간/비용/메모리 raw trace는 함께 수집할 수 있지만 그 QA의 대표 지표/목표는 이후 별도로 확정한다.</a:t>
+              <a:t>60초/10분은 미완료를 무한 대기로 숨기지 않기 위한 정확성 시험의 관찰 상한이다. 빠른 응답 목표나 정상적인 제품 응답시간 SLA를 이 숫자로 정의하지 않는다. 시간/비용/메모리 raw trace는 같은 W100에서 함께 수집하고 §4/5/7의 완성된 대표 지표/목표로 집계한다.</a:t>
             </a:r>
           </a:p>
           <a:p xmlns:a="http://schemas.openxmlformats.org/drawingml/2006/main">
@@ -3908,7 +3919,7 @@
           </a:p>
           <a:p xmlns:a="http://schemas.openxmlformats.org/drawingml/2006/main">
             <a:r>
-              <a:t>03-02 공통 QA 계약 v4: ../../architecture/12-decisions/decision-packages/03-02-quality-attribute-definitions.md</a:t>
+              <a:t>03-02 공통 QA 계약 v5: ../../architecture/12-decisions/decision-packages/03-02-quality-attribute-definitions.md</a:t>
             </a:r>
           </a:p>
           <a:p xmlns:a="http://schemas.openxmlformats.org/drawingml/2006/main">
@@ -3933,7 +3944,7 @@
           </a:p>
           <a:p xmlns:a="http://schemas.openxmlformats.org/drawingml/2006/main">
             <a:r>
-              <a:t>**관리 ID: ASR-QA-02 — 상호작용 응답시간, ASR-QA-03 — VIA 요청 처리시간.** 둘 다 초 단위의 산술평균을 대표값으로 사용한다. 각 6개 대표 장면을 5회 반복하므로 후보당 30개 값이다. 정확성의 90회/540개 분모를 시간 지표에 복사하지 않는다. 기존 정확성 사례의 자료와 사건을 재사용하고, 전체 완료를 보는 시간 장면에만 명시적인 최종 결과 사건을 추가한다.</a:t>
+              <a:t>**관리 ID: ASR-QA-02 — 상호작용 응답시간, ASR-QA-03 — VIA 요청 처리시간.** 둘 다 초 단위의 산술평균을 대표값으로 사용한다. 각 6개 대표 장면을 5회 반복하므로 후보당 30개 값이다. 정확성의 90회/540개 분모를 시간 지표에 복사하지 않는다. §8.0의 같은 S 사례에서 첫 반응과 전체 완료를 읽는다. 명시한 최종 결과 사건은 모든 QA에 공통인 tail이며 시간 시험만의 변형이 아니다.</a:t>
             </a:r>
           </a:p>
           <a:p xmlns:a="http://schemas.openxmlformats.org/drawingml/2006/main">
@@ -4178,12 +4189,7 @@
           </a:p>
           <a:p xmlns:a="http://schemas.openxmlformats.org/drawingml/2006/main">
             <a:r>
-              <a:t>아래 T-01~06은 정확성 원본과 구별하는 **시간 전용 파생 장면**이다. 기존 S 사례의 정확성 종료/정답/분모를 수정하지 않는다. 각 5회, 총 30회이며 확인 답변은 실제 질문 전달 뒤 2초에 Voice로 준다. 문서/메일 Agent가 업무를 실제 접수하면 최종 결과는 8초 뒤 사용 가능해진다. 이 8초는 외부 업무 노드로 제외하며 자료 내용/결과 version은 양안에서 같다. 업무 내용의 전문적 품질을 VIA QA로 채점하지 않는다.</a:t>
-            </a:r>
-          </a:p>
-          <a:p xmlns:a="http://schemas.openxmlformats.org/drawingml/2006/main">
-            <a:r>
-              <a:t/>
+              <a:t>아래 T-01~06은 **W100에서 같은 S 사례를 끝까지 처리할 때 읽는 전체 사이클 관측 구간**이다. 별도의 시간 전용 입력을 만들지 않는다. 기존 정확성 C1~C6는 원본에 정한 접수/제어 checkpoint에서 채점하고, 그 뒤의 최종 결과 사건은 공통 lifecycle tail로 이어 비용/메모리와 시간 모두에 적용한다. R1 CORE 다섯 block에서 각 T를 한 번씩 읽어 총 30회다. 확인 답변은 S6-01 원본대로 실제 질문 전달 뒤 **1초**에 시작한다. 장기 문서/메일 작업의 최종 결과는 실제 접수 뒤 8초에 사용 가능하며 이 외부 업무 노드는 시간 귀속에서 제외한다. S1-01 한정 조회의 0.2초는 원본대로 보존한다. 실제 VIA 연결/모델/네트워크/음성 시간은 남긴다.</a:t>
             </a:r>
           </a:p>
           <a:p xmlns:a="http://schemas.openxmlformats.org/drawingml/2006/main">
@@ -4198,7 +4204,7 @@
           </a:p>
           <a:p xmlns:a="http://schemas.openxmlformats.org/drawingml/2006/main">
             <a:r>
-              <a:t>| T-01 / S1-01 | D1 마감일 문의, 원본의 직접/한정 위임 허용. 위임이면 같은 날짜 결과를 접수+8초에 반환 | 발화 종료부터 D1 마감 10월 15일의 최종 전달 |</a:t>
+              <a:t>| T-01 / S1-01 | D1 마감일 문의, 원본의 직접/한정 위임 허용. 위임이면 원본대로 같은 날짜 결과를 접수+0.2초에 반환 | 발화 종료부터 D1 마감 10월 15일의 최종 전달 |</a:t>
             </a:r>
           </a:p>
           <a:p xmlns:a="http://schemas.openxmlformats.org/drawingml/2006/main">
@@ -4223,7 +4229,7 @@
           </a:p>
           <a:p xmlns:a="http://schemas.openxmlformats.org/drawingml/2006/main">
             <a:r>
-              <a:t>| T-06 / S6-01 | 두 보고서 중 대상/수정 내용 확인. 원본에 정한 후속 답변을 실제 질문+2초에 주고 지정 보고서의 `ConfirmedRevision@v2` 반환 | 최초 발화 종료부터 확인 후 수정 결과 전달. 질문만 제시하고 끝내지 않음 |</a:t>
+              <a:t>| T-06 / S6-01 | 두 보고서 중 대상/수정 내용 확인. 원본에 정한 후속 답변을 실제 질문+1초에 주고 지정 보고서의 `ConfirmedRevision@v2` 반환 | 최초 발화 종료부터 확인 후 수정 결과 전달. 질문만 제시하고 끝내지 않음 |</a:t>
             </a:r>
           </a:p>
           <a:p xmlns:a="http://schemas.openxmlformats.org/drawingml/2006/main">
@@ -4528,7 +4534,7 @@
           </a:p>
           <a:p xmlns:a="http://schemas.openxmlformats.org/drawingml/2006/main">
             <a:r>
-              <a:t>03-02 공통 QA 계약 v4: ../../architecture/12-decisions/decision-packages/03-02-quality-attribute-definitions.md</a:t>
+              <a:t>03-02 공통 QA 계약 v5: ../../architecture/12-decisions/decision-packages/03-02-quality-attribute-definitions.md</a:t>
             </a:r>
           </a:p>
           <a:p xmlns:a="http://schemas.openxmlformats.org/drawingml/2006/main">
@@ -4553,7 +4559,7 @@
           </a:p>
           <a:p xmlns:a="http://schemas.openxmlformats.org/drawingml/2006/main">
             <a:r>
-              <a:t>**관리 ID: ASR-QA-02 — 상호작용 응답시간, ASR-QA-03 — VIA 요청 처리시간.** 둘 다 초 단위의 산술평균을 대표값으로 사용한다. 각 6개 대표 장면을 5회 반복하므로 후보당 30개 값이다. 정확성의 90회/540개 분모를 시간 지표에 복사하지 않는다. 기존 정확성 사례의 자료와 사건을 재사용하고, 전체 완료를 보는 시간 장면에만 명시적인 최종 결과 사건을 추가한다.</a:t>
+              <a:t>**관리 ID: ASR-QA-02 — 상호작용 응답시간, ASR-QA-03 — VIA 요청 처리시간.** 둘 다 초 단위의 산술평균을 대표값으로 사용한다. 각 6개 대표 장면을 5회 반복하므로 후보당 30개 값이다. 정확성의 90회/540개 분모를 시간 지표에 복사하지 않는다. §8.0의 같은 S 사례에서 첫 반응과 전체 완료를 읽는다. 명시한 최종 결과 사건은 모든 QA에 공통인 tail이며 시간 시험만의 변형이 아니다.</a:t>
             </a:r>
           </a:p>
           <a:p xmlns:a="http://schemas.openxmlformats.org/drawingml/2006/main">
@@ -4798,12 +4804,7 @@
           </a:p>
           <a:p xmlns:a="http://schemas.openxmlformats.org/drawingml/2006/main">
             <a:r>
-              <a:t>아래 T-01~06은 정확성 원본과 구별하는 **시간 전용 파생 장면**이다. 기존 S 사례의 정확성 종료/정답/분모를 수정하지 않는다. 각 5회, 총 30회이며 확인 답변은 실제 질문 전달 뒤 2초에 Voice로 준다. 문서/메일 Agent가 업무를 실제 접수하면 최종 결과는 8초 뒤 사용 가능해진다. 이 8초는 외부 업무 노드로 제외하며 자료 내용/결과 version은 양안에서 같다. 업무 내용의 전문적 품질을 VIA QA로 채점하지 않는다.</a:t>
-            </a:r>
-          </a:p>
-          <a:p xmlns:a="http://schemas.openxmlformats.org/drawingml/2006/main">
-            <a:r>
-              <a:t/>
+              <a:t>아래 T-01~06은 **W100에서 같은 S 사례를 끝까지 처리할 때 읽는 전체 사이클 관측 구간**이다. 별도의 시간 전용 입력을 만들지 않는다. 기존 정확성 C1~C6는 원본에 정한 접수/제어 checkpoint에서 채점하고, 그 뒤의 최종 결과 사건은 공통 lifecycle tail로 이어 비용/메모리와 시간 모두에 적용한다. R1 CORE 다섯 block에서 각 T를 한 번씩 읽어 총 30회다. 확인 답변은 S6-01 원본대로 실제 질문 전달 뒤 **1초**에 시작한다. 장기 문서/메일 작업의 최종 결과는 실제 접수 뒤 8초에 사용 가능하며 이 외부 업무 노드는 시간 귀속에서 제외한다. S1-01 한정 조회의 0.2초는 원본대로 보존한다. 실제 VIA 연결/모델/네트워크/음성 시간은 남긴다.</a:t>
             </a:r>
           </a:p>
           <a:p xmlns:a="http://schemas.openxmlformats.org/drawingml/2006/main">
@@ -4818,7 +4819,7 @@
           </a:p>
           <a:p xmlns:a="http://schemas.openxmlformats.org/drawingml/2006/main">
             <a:r>
-              <a:t>| T-01 / S1-01 | D1 마감일 문의, 원본의 직접/한정 위임 허용. 위임이면 같은 날짜 결과를 접수+8초에 반환 | 발화 종료부터 D1 마감 10월 15일의 최종 전달 |</a:t>
+              <a:t>| T-01 / S1-01 | D1 마감일 문의, 원본의 직접/한정 위임 허용. 위임이면 원본대로 같은 날짜 결과를 접수+0.2초에 반환 | 발화 종료부터 D1 마감 10월 15일의 최종 전달 |</a:t>
             </a:r>
           </a:p>
           <a:p xmlns:a="http://schemas.openxmlformats.org/drawingml/2006/main">
@@ -4843,7 +4844,7 @@
           </a:p>
           <a:p xmlns:a="http://schemas.openxmlformats.org/drawingml/2006/main">
             <a:r>
-              <a:t>| T-06 / S6-01 | 두 보고서 중 대상/수정 내용 확인. 원본에 정한 후속 답변을 실제 질문+2초에 주고 지정 보고서의 `ConfirmedRevision@v2` 반환 | 최초 발화 종료부터 확인 후 수정 결과 전달. 질문만 제시하고 끝내지 않음 |</a:t>
+              <a:t>| T-06 / S6-01 | 두 보고서 중 대상/수정 내용 확인. 원본에 정한 후속 답변을 실제 질문+1초에 주고 지정 보고서의 `ConfirmedRevision@v2` 반환 | 최초 발화 종료부터 확인 후 수정 결과 전달. 질문만 제시하고 끝내지 않음 |</a:t>
             </a:r>
           </a:p>
           <a:p xmlns:a="http://schemas.openxmlformats.org/drawingml/2006/main">
@@ -5094,6 +5095,431 @@
           <a:p xmlns:a="http://schemas.openxmlformats.org/drawingml/2006/main">
             <a:r>
               <a:t>두 QA 모두 같은 값이 나올 수 있다. 예를 들어 44에서 첫 반응은 같은 local stop지만 전체 후속 준비 전이는 다를 수 있고, 45에서 게시 준비가 없는 첫 요청은 B가 느릴 수 있다. 모든 네 DP에 반드시 반대 부호의 결과를 만들도록 지표나 사례를 바꾸지 않는다.</a:t>
+            </a:r>
+          </a:p>
+          <a:p xmlns:a="http://schemas.openxmlformats.org/drawingml/2006/main">
+            <a:r>
+              <a:t/>
+            </a:r>
+          </a:p>
+          <a:p xmlns:a="http://schemas.openxmlformats.org/drawingml/2006/main">
+            <a:r>
+              <a:t/>
+            </a:r>
+          </a:p>
+          <a:p xmlns:a="http://schemas.openxmlformats.org/drawingml/2006/main">
+            <a:r>
+              <a:t>공통 활동 상세 §8.0</a:t>
+            </a:r>
+          </a:p>
+          <a:p xmlns:a="http://schemas.openxmlformats.org/drawingml/2006/main">
+            <a:r>
+              <a:t>공통 PoC 환경과 A/B 비교 방법</a:t>
+            </a:r>
+          </a:p>
+          <a:p xmlns:a="http://schemas.openxmlformats.org/drawingml/2006/main">
+            <a:r>
+              <a:t/>
+            </a:r>
+          </a:p>
+          <a:p xmlns:a="http://schemas.openxmlformats.org/drawingml/2006/main">
+            <a:r>
+              <a:t>공통 입력/원천 사건/후보/모델 조건은 여섯 QA에 공유하고, 각 QA의 분모/시간/금액/변경/메모리 경계는 §3~7의 완료 정의를 따른다. 공통 전사/장치 replay를 실제 ASR 정확도나 물리 장치 응답시간 실측으로 해석하지 않는다.</a:t>
+            </a:r>
+          </a:p>
+          <a:p xmlns:a="http://schemas.openxmlformats.org/drawingml/2006/main">
+            <a:r>
+              <a:t/>
+            </a:r>
+          </a:p>
+          <a:p xmlns:a="http://schemas.openxmlformats.org/drawingml/2006/main">
+            <a:r>
+              <a:t>### 8.0 공통 활동 W100: 사용량과 관측 대응</a:t>
+            </a:r>
+          </a:p>
+          <a:p xmlns:a="http://schemas.openxmlformats.org/drawingml/2006/main">
+            <a:r>
+              <a:t/>
+            </a:r>
+          </a:p>
+          <a:p xmlns:a="http://schemas.openxmlformats.org/drawingml/2006/main">
+            <a:r>
+              <a:t>#### 8.0.1 사용량을 정의하는 이유와 범위</a:t>
+            </a:r>
+          </a:p>
+          <a:p xmlns:a="http://schemas.openxmlformats.org/drawingml/2006/main">
+            <a:r>
+              <a:t/>
+            </a:r>
+          </a:p>
+          <a:p xmlns:a="http://schemas.openxmlformats.org/drawingml/2006/main">
+            <a:r>
+              <a:t>**W100은 기존 18개 사례로 구성한 합성 표준 활동이다.** 사용자의 실제 일일 빈도 자료가 없는 PoC에서 A/B가 같은 기능과 부하를 처리하도록 평가용 사용량을 명시했다. 100은 사용자 입력 장면 수다. 신규 업무/조회뿐 아니라 정정/취소/확인/재연결이 들어간다. Agent가 먼저 질문/결과를 보내는 장면은 별도로 30건이다. S5-03은 Agent 결과로 시작하지만 재연결한 사용자의 명시적 조회 발화가 있으므로 사용량 원장에서는 사용자 장면 1건이다. S6의 계획된 답변은 그 장면 내부 후속 발화이며 장면을 추가하지 않는다.</a:t>
+            </a:r>
+          </a:p>
+          <a:p xmlns:a="http://schemas.openxmlformats.org/drawingml/2006/main">
+            <a:r>
+              <a:t/>
+            </a:r>
+          </a:p>
+          <a:p xmlns:a="http://schemas.openxmlformats.org/drawingml/2006/main">
+            <a:r>
+              <a:t>원천은 §3의 18개 초기 상황/입력/경쟁 사건/정답과 아래 공통 lifecycle tail이다. **QA별로 다른 업무나 외부 결과를 만들지 않는다.** 평가 관측 단위가 다르므로 모든 QA의 분모가 같을 필요는 없다. 정확성은 조건, 시간은 사건 경계, 비용은 활동 전체 청구, 메모리는 활동 전체 동시 할당을 읽는다. 변경 용이성은 여섯 구조 변경 과제이며 변경 뒤 같은 기능/활동 계약을 유지한다.</a:t>
+            </a:r>
+          </a:p>
+          <a:p xmlns:a="http://schemas.openxmlformats.org/drawingml/2006/main">
+            <a:r>
+              <a:t/>
+            </a:r>
+          </a:p>
+          <a:p xmlns:a="http://schemas.openxmlformats.org/drawingml/2006/main">
+            <a:r>
+              <a:t>[공통 활동 입력](./03-02-common-workload.json)은 이 절의 machine-readable 사용량/음성/호출 예산이고 [사건 목록](./03-02-workload-manifest.json)은 각 장면의 case/hash/CORE 여부/I/T 연결을 130행으로 생성한다. [활동 검산기](../../../../scripts/architecture/qa_common_workload.py)는 입력 목록을 컴파일할 뿐 후보/harness/API를 실행하지 않는다. 참조 계산과 두 발표자료도 같은 원본/manifest hash를 사용한다.</a:t>
+            </a:r>
+          </a:p>
+          <a:p xmlns:a="http://schemas.openxmlformats.org/drawingml/2006/main">
+            <a:r>
+              <a:t/>
+            </a:r>
+          </a:p>
+          <a:p xmlns:a="http://schemas.openxmlformats.org/drawingml/2006/main">
+            <a:r>
+              <a:t>#### 8.0.2 사례별 횟수와 음성 길이</a:t>
+            </a:r>
+          </a:p>
+          <a:p xmlns:a="http://schemas.openxmlformats.org/drawingml/2006/main">
+            <a:r>
+              <a:t/>
+            </a:r>
+          </a:p>
+          <a:p xmlns:a="http://schemas.openxmlformats.org/drawingml/2006/main">
+            <a:r>
+              <a:t>| 원본 사례 | W100 횟수 | 입력 장면 분류 | 최초 발화 초/회 | 지정 답변 초/회 | 출력 음성 예산 초/회 | 반응 관측 | 사이클 관측 |</a:t>
+            </a:r>
+          </a:p>
+          <a:p xmlns:a="http://schemas.openxmlformats.org/drawingml/2006/main">
+            <a:r>
+              <a:t>| --- | --- | --- | --- | --- | --- | --- | --- |</a:t>
+            </a:r>
+          </a:p>
+          <a:p xmlns:a="http://schemas.openxmlformats.org/drawingml/2006/main">
+            <a:r>
+              <a:t>| S1-01 | 8 | 사용자 | 2 | 0 | 3 | 없음 | T-01 |</a:t>
+            </a:r>
+          </a:p>
+          <a:p xmlns:a="http://schemas.openxmlformats.org/drawingml/2006/main">
+            <a:r>
+              <a:t>| S1-02 | 8 | 사용자 | 3 | 0 | 8 | 없음 | T-02 |</a:t>
+            </a:r>
+          </a:p>
+          <a:p xmlns:a="http://schemas.openxmlformats.org/drawingml/2006/main">
+            <a:r>
+              <a:t>| S1-03 | 8 | 사용자 | 3 | 0 | 4 | 없음 | 없음 |</a:t>
+            </a:r>
+          </a:p>
+          <a:p xmlns:a="http://schemas.openxmlformats.org/drawingml/2006/main">
+            <a:r>
+              <a:t>| S2-01 | 8 | 사용자 | 2 | 0 | 5 | 없음 | 없음 |</a:t>
+            </a:r>
+          </a:p>
+          <a:p xmlns:a="http://schemas.openxmlformats.org/drawingml/2006/main">
+            <a:r>
+              <a:t>| S2-02 | 8 | 사용자 | 3 | 0 | 18 | 없음 | T-03 |</a:t>
+            </a:r>
+          </a:p>
+          <a:p xmlns:a="http://schemas.openxmlformats.org/drawingml/2006/main">
+            <a:r>
+              <a:t>| S2-03 | 8 | 사용자 | 2 | 0 | 4 | 없음 | 없음 |</a:t>
+            </a:r>
+          </a:p>
+          <a:p xmlns:a="http://schemas.openxmlformats.org/drawingml/2006/main">
+            <a:r>
+              <a:t>| S3-01 | 5 | 사용자 | 3 | 0 | 6 | 없음 | 없음 |</a:t>
+            </a:r>
+          </a:p>
+          <a:p xmlns:a="http://schemas.openxmlformats.org/drawingml/2006/main">
+            <a:r>
+              <a:t>| S3-02 | 5 | 사용자 | 3 | 0 | 10 | 없음 | T-04 |</a:t>
+            </a:r>
+          </a:p>
+          <a:p xmlns:a="http://schemas.openxmlformats.org/drawingml/2006/main">
+            <a:r>
+              <a:t>| S3-03 | 5 | 사용자 | 3 | 0 | 6 | 없음 | 없음 |</a:t>
+            </a:r>
+          </a:p>
+          <a:p xmlns:a="http://schemas.openxmlformats.org/drawingml/2006/main">
+            <a:r>
+              <a:t>| S4-01 | 5 | 사용자 | 2 | 0 | 9 | I-02 | T-05 |</a:t>
+            </a:r>
+          </a:p>
+          <a:p xmlns:a="http://schemas.openxmlformats.org/drawingml/2006/main">
+            <a:r>
+              <a:t>| S4-02 | 5 | 사용자 | 2 | 0 | 8 | I-01 | 없음 |</a:t>
+            </a:r>
+          </a:p>
+          <a:p xmlns:a="http://schemas.openxmlformats.org/drawingml/2006/main">
+            <a:r>
+              <a:t>| S4-03 | 5 | 사용자 | 2 | 0 | 5 | I-03 | 없음 |</a:t>
+            </a:r>
+          </a:p>
+          <a:p xmlns:a="http://schemas.openxmlformats.org/drawingml/2006/main">
+            <a:r>
+              <a:t>| S5-01 | 15 | Agent | 0 | 0 | 5 | I-04 | 없음 |</a:t>
+            </a:r>
+          </a:p>
+          <a:p xmlns:a="http://schemas.openxmlformats.org/drawingml/2006/main">
+            <a:r>
+              <a:t>| S5-02 | 15 | Agent | 0 | 0 | 6 | I-05 | 없음 |</a:t>
+            </a:r>
+          </a:p>
+          <a:p xmlns:a="http://schemas.openxmlformats.org/drawingml/2006/main">
+            <a:r>
+              <a:t>| S5-03 | 7 | 사용자 | 2 | 0 | 4 | 없음 | 없음 |</a:t>
+            </a:r>
+          </a:p>
+          <a:p xmlns:a="http://schemas.openxmlformats.org/drawingml/2006/main">
+            <a:r>
+              <a:t>| S6-01 | 5 | 사용자 | 2 | 3 | 14 | 없음 | T-06 |</a:t>
+            </a:r>
+          </a:p>
+          <a:p xmlns:a="http://schemas.openxmlformats.org/drawingml/2006/main">
+            <a:r>
+              <a:t>| S6-02 | 5 | 사용자 | 1 | 3 | 14 | 없음 | 없음 |</a:t>
+            </a:r>
+          </a:p>
+          <a:p xmlns:a="http://schemas.openxmlformats.org/drawingml/2006/main">
+            <a:r>
+              <a:t>| S6-03 | 5 | 사용자 | 2 | 0 | 5 | I-06 | 없음 |</a:t>
+            </a:r>
+          </a:p>
+          <a:p xmlns:a="http://schemas.openxmlformats.org/drawingml/2006/main">
+            <a:r>
+              <a:t/>
+            </a:r>
+          </a:p>
+          <a:p xmlns:a="http://schemas.openxmlformats.org/drawingml/2006/main">
+            <a:r>
+              <a:t>사용자 장면 합 100, Agent 장면 합 30이다. 최초 입력의 replay 길이는 §3 사건 구간으로 정한 **fixture 조건**이고 합 234초다. S6-01/02 각 5회의 후속 답변 3초를 더해 계획된 입력은 **110발화/264초**다. 추가 확인은 §3 공통 답변 정책대로 공급하고 실제 청구를 더한다. S5-03의 2초 재연결 요청은 최초 발화 열에 이미 포함했다.</a:t>
+            </a:r>
+          </a:p>
+          <a:p xmlns:a="http://schemas.openxmlformats.org/drawingml/2006/main">
+            <a:r>
+              <a:t/>
+            </a:r>
+          </a:p>
+          <a:p xmlns:a="http://schemas.openxmlformats.org/drawingml/2006/main">
+            <a:r>
+              <a:t>출력 길이는 **작성자의 참조 예산**이며 모델 성능/자연 발화 길이 보장이 아니다. 위 표의 필수 사실 전달과 공통 tail을 합해 914초다. S2-02 18초는 과거의 실제 재생 설명 8초와 현재 접수/결과 10초, S4-02 8초는 중단 전 재생 4초와 새 설명 4초를 포함한다. S6-01/02 14초는 확인 질문과 허용 범위/결과 전달의 합이다. 나머지는 해당 C6 사실과 tail 전달의 총 길이 예산이다. 실제 모델 생성/재생/폐기 청구량을 예산값으로 덮어쓰지 않는다. Text 표시 길이와 음성 시간의 임의 token 환산도 하지 않는다.</a:t>
+            </a:r>
+          </a:p>
+          <a:p xmlns:a="http://schemas.openxmlformats.org/drawingml/2006/main">
+            <a:r>
+              <a:t/>
+            </a:r>
+          </a:p>
+          <a:p xmlns:a="http://schemas.openxmlformats.org/drawingml/2006/main">
+            <a:r>
+              <a:t>#### 8.0.3 다섯 block의 입력 순서와 관측 선택</a:t>
+            </a:r>
+          </a:p>
+          <a:p xmlns:a="http://schemas.openxmlformats.org/drawingml/2006/main">
+            <a:r>
+              <a:t/>
+            </a:r>
+          </a:p>
+          <a:p xmlns:a="http://schemas.openxmlformats.org/drawingml/2006/main">
+            <a:r>
+              <a:t>각 block은 **CORE 18장면 + REUSE 4장면 + BURST 4장면 = 26장면**이다. 다섯 block이 사용자 100/Agent 30의 130장면을 만든다. CORE는 S1-01부터 S6-03까지 위 표 순서로 각 한 번이다. 각 장면은 필수 checkpoint와 tail까지 진행한 뒤 다음 장면을 시작한다. 아래 REUSE는 같은 block에서 이미 허용된 원본 version/제공 권한을 확인한 뒤 재사용한다. 기존 현재 Task를 임의 정답으로 배치하지 않고 요청 ID/외부 실행 ID는 occurrence namespace로 구별한다.</a:t>
+            </a:r>
+          </a:p>
+          <a:p xmlns:a="http://schemas.openxmlformats.org/drawingml/2006/main">
+            <a:r>
+              <a:t/>
+            </a:r>
+          </a:p>
+          <a:p xmlns:a="http://schemas.openxmlformats.org/drawingml/2006/main">
+            <a:r>
+              <a:t>| block | REUSE 네 장면 순서 | BURST 네 장면 순서 |</a:t>
+            </a:r>
+          </a:p>
+          <a:p xmlns:a="http://schemas.openxmlformats.org/drawingml/2006/main">
+            <a:r>
+              <a:t>| --- | --- | --- |</a:t>
+            </a:r>
+          </a:p>
+          <a:p xmlns:a="http://schemas.openxmlformats.org/drawingml/2006/main">
+            <a:r>
+              <a:t>| B1 | S1-01, S1-02, S2-01, S2-02 | S5-01, S5-02, S5-01, S5-02 |</a:t>
+            </a:r>
+          </a:p>
+          <a:p xmlns:a="http://schemas.openxmlformats.org/drawingml/2006/main">
+            <a:r>
+              <a:t>| B2 | S1-01, S1-03, S2-01, S2-03 | 동일 |</a:t>
+            </a:r>
+          </a:p>
+          <a:p xmlns:a="http://schemas.openxmlformats.org/drawingml/2006/main">
+            <a:r>
+              <a:t>| B3 | S1-02, S1-03, S2-02, S2-03 | 동일 |</a:t>
+            </a:r>
+          </a:p>
+          <a:p xmlns:a="http://schemas.openxmlformats.org/drawingml/2006/main">
+            <a:r>
+              <a:t>| B4 | S1-01, S1-02, S2-01, S2-02 | 동일 |</a:t>
+            </a:r>
+          </a:p>
+          <a:p xmlns:a="http://schemas.openxmlformats.org/drawingml/2006/main">
+            <a:r>
+              <a:t>| B5 | S1-03, S2-03, S5-03, S5-03 | 동일 |</a:t>
+            </a:r>
+          </a:p>
+          <a:p xmlns:a="http://schemas.openxmlformats.org/drawingml/2006/main">
+            <a:r>
+              <a:t/>
+            </a:r>
+          </a:p>
+          <a:p xmlns:a="http://schemas.openxmlformats.org/drawingml/2006/main">
+            <a:r>
+              <a:t>BURST의 네 Agent 장면 최초 원천 사건을 상대 0/0.02/0.04/0.06초에 공급하고 각 장면 내부의 원본 후속 순서를 보존한다. 사용자 음성을 네 개 중첩시키는 시험은 아니다. 네 장면이 각각 사용하는 두 Task를 pool의 여덟 slot에 배치하고 T보호와 background 한 Task의 두 slot을 유지해 **활성 최대 10개**다. CORE/REUSE는 이 pool의 필요한 slot만 해당 초기 사실로 복원한다. 완료된 관련 작업은 active slot에서 빠져 이력으로 남는다. 이 합성 replay suite의 slot은 현재 제시하는 scoped scene의 owner이며 10은 그 scene에서 동시에 처리하는 Task 상한이다. 완료되지 않은 질문/취소 접수는 먼저 원본 checkpoint/5초 늦은 사건 관찰을 충족한 뒤 scope를 닫고 원래 대기 상태/receipt를 그대로 활동 이력에 보존한다. 전체 미완료 Task를 10개로 자른다거나 외부 대기를 성공 완료로 바꾸는 실제 운용 정책은 아니다. 다음 scene의 before-state 복원과 구분하고 scope 회수 비용/peak도 센다.</a:t>
+            </a:r>
+          </a:p>
+          <a:p xmlns:a="http://schemas.openxmlformats.org/drawingml/2006/main">
+            <a:r>
+              <a:t/>
+            </a:r>
+          </a:p>
+          <a:p xmlns:a="http://schemas.openxmlformats.org/drawingml/2006/main">
+            <a:r>
+              <a:t>block의 마지막 BURST checkpoint 이후 B01~B04, B05~B08, …, B17~B20의 background 원본을 각각 한 번 `v1→v2` 갱신한다. 각 원본은 초기 30개 source 중 하나이며 locator와 권한은 그대로, 내용의 수치 한 곳만 1 증가한다. 입력 목록 순서로 0.01초 간격 제공하고 같은 block의 maintenance tick 두 개를 직렬 제공한다. 총 **20개 background 변경/10개 tick**이다. §3의 S2-03 등 내부 X 갱신은 이 20개와 별개로 이미 장면에 포함되며 별도 호출을 중복 청구하지 않는다. B5 마지막 갱신 뒤 B20의 제공 동의를 철회해 원문/파생/Context 신규 소비를 차단한다. 후보의 실제 생산/재해석/철회 비용은 모두 남긴다.</a:t>
+            </a:r>
+          </a:p>
+          <a:p xmlns:a="http://schemas.openxmlformats.org/drawingml/2006/main">
+            <a:r>
+              <a:t/>
+            </a:r>
+          </a:p>
+          <a:p xmlns:a="http://schemas.openxmlformats.org/drawingml/2006/main">
+            <a:r>
+              <a:t>R1/R2/R3는 동일 초기 자료를 가진 **세 독립 활동**이다. 대표 정확성/시간 표본은 결과 전에 지정한 **R1 CORE만** 읽는다. 다섯 block의 18개가 90회/540개, I/T 여섯 개가 각각 30개다. REUSE/BURST와 R2/R3의 실패/필수 위반은 별도 보호 근거로 전부 보고하며 대표 정확성 분모에 임의 가산하거나 가장 좋은 run으로 교체하지 않는다. 비용은 세 활동 전체의 평균, 메모리는 세 활동 전체의 최대다. 실제 세 run 없이 같은 계산을 복제해 반복 측정이라고 부르지 않는다.</a:t>
+            </a:r>
+          </a:p>
+          <a:p xmlns:a="http://schemas.openxmlformats.org/drawingml/2006/main">
+            <a:r>
+              <a:t/>
+            </a:r>
+          </a:p>
+          <a:p xmlns:a="http://schemas.openxmlformats.org/drawingml/2006/main">
+            <a:r>
+              <a:t>#### 8.0.4 초기 데이터, 복원과 동시 부하</a:t>
+            </a:r>
+          </a:p>
+          <a:p xmlns:a="http://schemas.openxmlformats.org/drawingml/2006/main">
+            <a:r>
+              <a:t/>
+            </a:r>
+          </a:p>
+          <a:p xmlns:a="http://schemas.openxmlformats.org/drawingml/2006/main">
+            <a:r>
+              <a:t>각 활동은 원천 대화 2,000turn/완료 Task 200개/문서와 일정 등 source 30개(전체 합성 payload 20MiB)에서 시작한다. 30개 source slot은 B01~B20과 C01~C10이다. Bnn의 제목은 `W100 background source Bnn`, v1의 `value=100+nn`, v2는 `101+nn`이며 read/모델 제공을 허용한다. C slot에는 해당 사례의 원본 D/Cal/표/E1을 namespace 대응으로 제공한다. background 대화 H0001~H2000은 시간순으로 `배경 기록 {id}: B{((id-1)%20)+1}@v1의 값은 {100+((id-1)%20)+1}이다`와 실제 전달 receipt를 갖는다. 완료 Task HT001~HT200은 같은 순환 B source의 read-only 값 조회이며 ACCEPTED→COMPLETED→실제 전달 원천 사실을 갖는다. 현재 요청과 의미 관계를 선결합하지 않는다. UTF-8 원본/turn/Task payload 합을 20×1,024×1,024byte로 맞추도록 미사용 B 본문에 공백을 채운다. DB/index/runtime의 물리적 추가 overhead는 별도 메모리다. 활성 Task 10은 초기 Task를 무조건 10개 더 넣는 뜻이 아니라 공통 pool의 상한이며 BURST의 8개 관련 Task+2개 보호/background로 최대 10개를 제공한다. 실제 과거 원문과 실제 전달/수정/허용 이력을 제공하고 현재 요청의 정답/파생 관계는 넣지 않는다. namespace 대응표는 source/Task 식별을 위한 fixture map이며 모델의 지칭/Task 정답으로 주지 않는다. 각 사례가 읽을 수 있는 scope/사실은 §3 명세 그대로다. 무관한 background 자료는 모델 의미 입력에 무제한 섞지 않지만 전체 이력/DB/copy 메모리에는 포함한다.</a:t>
+            </a:r>
+          </a:p>
+          <a:p xmlns:a="http://schemas.openxmlformats.org/drawingml/2006/main">
+            <a:r>
+              <a:t/>
+            </a:r>
+          </a:p>
+          <a:p xmlns:a="http://schemas.openxmlformats.org/drawingml/2006/main">
+            <a:r>
+              <a:t>CORE 전에 해당 논리적 초기 owner 사실을 복원하고 필요한 W 준비를 실제 후보 경로로 처리한다. 복원은 input fixture일 뿐 후보가 처리해야 할 결과를 대신하지 않는다. 후보가 낸 상태/오류를 완료 snapshot으로 덮어쓰지 않고 checkpoint와 tail을 검사한 뒤에만 다음 fixture로 진행한다. 초기/복원/생산의 청구와 일시적 old/new snapshot 이중 할당을 모두 세며 **각 block 완료 이력은 활동 끝까지 남긴다.** 같은 source hash/revision/permission에 한정한 REUSE cache는 허용한다. 충돌 namespace의 cache나 현재성 불일치는 무효화한다.</a:t>
+            </a:r>
+          </a:p>
+          <a:p xmlns:a="http://schemas.openxmlformats.org/drawingml/2006/main">
+            <a:r>
+              <a:t/>
+            </a:r>
+          </a:p>
+          <a:p xmlns:a="http://schemas.openxmlformats.org/drawingml/2006/main">
+            <a:r>
+              <a:t>cloud call의 동시 상한은 4개이며 양안에 같은 queue/취소/timeout 계약을 적용한다. 호출 4개를 강제로 만들어 메모리를 늘리지 않는다. capture의 제공 원본/보존 창은 최대 15개 RGBA frame이며 scene 내부의 시각/포인터/허용 규칙은 §3과 같다. 동시 할당과 준비를 비교할 수 있도록 초기화부터 마지막 신규 입력 이후까지 원장을 연다. 마지막 철회 뒤 신규 입력을 멈추고 처리 가능한 VIA job/queue를 최대 30초에 drain한다. 30초는 대표 요청 처리 예산 10초의 세 배로 회수 여유를 둔 작성자 보호 한도다. 외부 업무/미응답 질문의 정당한 대기 상태는 보존한다. drain 완료 뒤 10초 idle probe에 새 maintenance를 넣지 않는다. 10초/50ms는 최소 200개 시간 sample로 단기 회수/잔류 증가를 확인하기 위한 관측 가정이며 장시간 누수의 부재를 증명하지 않는다. 전체 기능 checkpoint/tail 누락 또는 필수 위반이 있으면 작은 비용/메모리도 목표 달성이 아니다.</a:t>
+            </a:r>
+          </a:p>
+          <a:p xmlns:a="http://schemas.openxmlformats.org/drawingml/2006/main">
+            <a:r>
+              <a:t/>
+            </a:r>
+          </a:p>
+          <a:p xmlns:a="http://schemas.openxmlformats.org/drawingml/2006/main">
+            <a:r>
+              <a:t>#### 8.0.5 공통 후속 사건과 QA별 관측</a:t>
+            </a:r>
+          </a:p>
+          <a:p xmlns:a="http://schemas.openxmlformats.org/drawingml/2006/main">
+            <a:r>
+              <a:t/>
+            </a:r>
+          </a:p>
+          <a:p xmlns:a="http://schemas.openxmlformats.org/drawingml/2006/main">
+            <a:r>
+              <a:t>| 연결 | 같은 장면의 공통 종료/tail | 읽는 지표 |</a:t>
+            </a:r>
+          </a:p>
+          <a:p xmlns:a="http://schemas.openxmlformats.org/drawingml/2006/main">
+            <a:r>
+              <a:t>| --- | --- | --- |</a:t>
+            </a:r>
+          </a:p>
+          <a:p xmlns:a="http://schemas.openxmlformats.org/drawingml/2006/main">
+            <a:r>
+              <a:t>| S1-01 / T-01 | 원본 한정 조회: 직접 또는 외부 접수+0.2초 날짜 결과. 별도 8초 결과를 만들지 않음 | 정확성 C6과 cycle 최종 전달 |</a:t>
+            </a:r>
+          </a:p>
+          <a:p xmlns:a="http://schemas.openxmlformats.org/drawingml/2006/main">
+            <a:r>
+              <a:t>| S1-02 / T-02 | 원본 접수 receipt로 C5/C6 채점한 뒤 실제 작성 접수+8초에 ReportQ3@v1 결과 | 전체 cycle, 청구/할당 |</a:t>
+            </a:r>
+          </a:p>
+          <a:p xmlns:a="http://schemas.openxmlformats.org/drawingml/2006/main">
+            <a:r>
+              <a:t>| S2-02 / T-03 | 원본 준비 5초/접수 checkpoint 뒤 Proposal@v1 결과를 접수+8초에 반환 | cycle은 현재 발화부터, 자원은 과거 준비도 포함 |</a:t>
+            </a:r>
+          </a:p>
+          <a:p xmlns:a="http://schemas.openxmlformats.org/drawingml/2006/main">
+            <a:r>
+              <a:t>| S3-02 / T-04 | 현재 K현재 요약과 중복 처리 원본 유지, 실제 SEND 접수+8초 MailCurrent@v1:SENT | cycle은 현재 요약→전송→확인, 중복 effect 금지 |</a:t>
+            </a:r>
+          </a:p>
+          <a:p xmlns:a="http://schemas.openxmlformats.org/drawingml/2006/main">
+            <a:r>
+              <a:t>| S4-01 / I-02 / T-05 | 원본 정정 접수/메일 유지 checkpoint 이후 변경 접수+8초 ReportRevised@v2 결과 | 같은 정정의 첫 반응과 최종 전달을 각각 관측 |</a:t>
+            </a:r>
+          </a:p>
+          <a:p xmlns:a="http://schemas.openxmlformats.org/drawingml/2006/main">
+            <a:r>
+              <a:t>| S6-01 / T-06 | 원본 실제 확인 질문+1초에 3초 답변. 실제 유효 수정 접수+8초 ConfirmedRevision@v2 결과 | 사람 기다림/외부 업무만 제외한 cycle |</a:t>
+            </a:r>
+          </a:p>
+          <a:p xmlns:a="http://schemas.openxmlformats.org/drawingml/2006/main">
+            <a:r>
+              <a:t>| S2-03 | 원본 v1 지정 표 작성 접수 뒤 실제 접수+8초 결과(TablePast@v1) | 대표 T 없음, 비용/메모리와 기능 보호에는 포함 |</a:t>
+            </a:r>
+          </a:p>
+          <a:p xmlns:a="http://schemas.openxmlformats.org/drawingml/2006/main">
+            <a:r>
+              <a:t>| 나머지 11개 사례 | §3의 실제 조회/선호/제어/질문/결과/승인 범위/거부 checkpoint가 그 장면의 끝. 취소 접수는 완료 취소가 아니며 기다리는 질문을 임의 답변하지 않음 | C6와 지정 I, 전체 청구/할당 |</a:t>
+            </a:r>
+          </a:p>
+          <a:p xmlns:a="http://schemas.openxmlformats.org/drawingml/2006/main">
+            <a:r>
+              <a:t/>
+            </a:r>
+          </a:p>
+          <a:p xmlns:a="http://schemas.openxmlformats.org/drawingml/2006/main">
+            <a:r>
+              <a:t>위 tail은 모든 CORE/REUSE/BURST와 모든 run/QA에 공통이다. 최종 payload/source/version/허용과 실제 전달을 검사하며 접수 인사를 최종 결과로 세지 않는다. 정확성의 기존 108개 정답 명세는 해당 checkpoint에서 보존하고 tail 실패는 cycle/resource/필수 기능 보호에 기록한다. 각 관측은 `run/block/occurrence/case/source-vector/checkpoint/tail/I/T`를 동일 원장 key로 조인한다. QA-05 변경의 완료 검사도 이 기능/상태/권한 회귀와 W100의 사용량/동시성/보관 계약을 유지하는지 확인한다. 390장면 모두를 정확성 대표 분모로 키우지 않는다.</a:t>
+            </a:r>
+          </a:p>
+          <a:p xmlns:a="http://schemas.openxmlformats.org/drawingml/2006/main">
+            <a:r>
+              <a:t/>
             </a:r>
           </a:p>
           <a:p xmlns:a="http://schemas.openxmlformats.org/drawingml/2006/main">
@@ -5183,7 +5609,17 @@
           </a:p>
           <a:p xmlns:a="http://schemas.openxmlformats.org/drawingml/2006/main">
             <a:r>
-              <a:t>계약: ASR-QA-v4</a:t>
+              <a:t>계약: ASR-QA-v5</a:t>
+            </a:r>
+          </a:p>
+          <a:p xmlns:a="http://schemas.openxmlformats.org/drawingml/2006/main">
+            <a:r>
+              <a:t>공통 활동: W100 사용자 100/Agent 30장면, 5block, 3 독립 run</a:t>
+            </a:r>
+          </a:p>
+          <a:p xmlns:a="http://schemas.openxmlformats.org/drawingml/2006/main">
+            <a:r>
+              <a:t>활동 SHA-256: 911ce3ae13588c27b6902a5a0abb17714c4059a9a80bceaa890c1dfb3e26eb7f</a:t>
             </a:r>
           </a:p>
           <a:p xmlns:a="http://schemas.openxmlformats.org/drawingml/2006/main">
@@ -5193,7 +5629,7 @@
           </a:p>
           <a:p xmlns:a="http://schemas.openxmlformats.org/drawingml/2006/main">
             <a:r>
-              <a:t>원본 SHA-256: 8235a96137f71406fbede7c2021ad6476f62e7009d2f645a5dbaaa48e9787d0e</a:t>
+              <a:t>원본 SHA-256: 0e304faddf43b212900ce12f712a1d5cad5bd3cf601bc77a94f3f267d5fa2933</a:t>
             </a:r>
           </a:p>
           <a:p xmlns:a="http://schemas.openxmlformats.org/drawingml/2006/main">
@@ -5218,17 +5654,17 @@
           </a:p>
           <a:p xmlns:a="http://schemas.openxmlformats.org/drawingml/2006/main">
             <a:r>
-              <a:t>측정 지표: 8시간 평균 총 모델 비용(USD). 100개 목표/배경 생산/재시도/음성과 청구 context를 모두 합산</a:t>
-            </a:r>
-          </a:p>
-          <a:p xmlns:a="http://schemas.openxmlformats.org/drawingml/2006/main">
-            <a:r>
-              <a:t>목표: $1.50/8시간 이하</a:t>
-            </a:r>
-          </a:p>
-          <a:p xmlns:a="http://schemas.openxmlformats.org/drawingml/2006/main">
-            <a:r>
-              <a:t>목표 근거: 하루 100개 목표와 청구 음성 입력 30분/출력 10분의 공개 단가 계산 $1.1325에 추가 생산/재시도 여유 $0.3675를 둔 작성자 예산 (§5.3)</a:t>
+              <a:t>측정 지표: 표준 활동 W100 1회 평균 총 모델 비용(USD/묶음). 사용자 입력 100건과 Agent 발신 30건의 전체 청구를 3회 독립 수행해 평균</a:t>
+            </a:r>
+          </a:p>
+          <a:p xmlns:a="http://schemas.openxmlformats.org/drawingml/2006/main">
+            <a:r>
+              <a:t>목표: $1.50/W100 이하</a:t>
+            </a:r>
+          </a:p>
+          <a:p xmlns:a="http://schemas.openxmlformats.org/drawingml/2006/main">
+            <a:r>
+              <a:t>목표 근거: 18개 대표 사례에서 구성한 동일 활동의 의미 300호출 예산/음성 입력 264초/출력 914초 참조 계산 $1.0987에 추가 생산/재시도 여유 $0.4013을 둔 작성자 예산 (§5.3, §8.0)</a:t>
             </a:r>
           </a:p>
           <a:p xmlns:a="http://schemas.openxmlformats.org/drawingml/2006/main">
@@ -5253,7 +5689,7 @@
           </a:p>
           <a:p xmlns:a="http://schemas.openxmlformats.org/drawingml/2006/main">
             <a:r>
-              <a:t>03-02 공통 QA 계약 v4: ../../architecture/12-decisions/decision-packages/03-02-quality-attribute-definitions.md</a:t>
+              <a:t>03-02 공통 QA 계약 v5: ../../architecture/12-decisions/decision-packages/03-02-quality-attribute-definitions.md</a:t>
             </a:r>
           </a:p>
           <a:p xmlns:a="http://schemas.openxmlformats.org/drawingml/2006/main">
@@ -5298,17 +5734,17 @@
           </a:p>
           <a:p xmlns:a="http://schemas.openxmlformats.org/drawingml/2006/main">
             <a:r>
-              <a:t>**동일한 사용자 활동을 처리하는 동안 VIA의 음성/의미 모델 사용에 드는 금액.** 대표 지표는 **표준 8시간 활동의 총 모델 비용(USD/8시간)**이다. 입력 목표 수를 후보가 만든 Task/호출 수로 나눠 비용을 낮추지 않는다. 100개 요청 목표는 고정 workload의 설명이며 대표 비용 분모는 동일한 8시간이다.</a:t>
-            </a:r>
-          </a:p>
-          <a:p xmlns:a="http://schemas.openxmlformats.org/drawingml/2006/main">
-            <a:r>
-              <a:t/>
-            </a:r>
-          </a:p>
-          <a:p xmlns:a="http://schemas.openxmlformats.org/drawingml/2006/main">
-            <a:r>
-              <a:t>음성 입력/전사, 현재 의미, 과거 관계 생산/갱신, 질문/응답 내용과 음성 출력, 재시도, 늦어서 폐기된 청구 출력과 미사용 배경 생산을 포함한다. 외부 Downstream Agent가 자체 업무에 쓴 모델/도구 금액은 제외하고 별도 원장으로 남긴다. CPU/IPC/저장 비용은 모델 비용에 임의 단가로 섞지 않는다. 모델 call ID 하나를 41과 45 비용에 중복 가산하지 않는다.</a:t>
+              <a:t>**동일한 사용자 활동을 처리하는 동안 VIA의 음성/의미 모델 사용에 드는 금액.** 대표 지표는 **표준 활동 W100 1회 평균 총 모델 비용(USD/묶음)**이다. §8.0의 100개 사용자 입력 장면과 30개 Agent 발신 장면을 모두 처리한 금액을 구하고, 같은 초기 자료로 독립 수행한 R1/R2/R3의 산술평균을 낸다. 입력 개수는 정정/제어/확인 장면을 포함하며 모델 호출이나 Task 수로 다시 나누지 않는다. 보조 값 `$ / 100개 사용자 입력 장면`은 W100 총액과 같고, `$ / 사용자 입력 장면`은 총액/100이다. Agent 후속 처리 비용도 이 환산에 포함한다.</a:t>
+            </a:r>
+          </a:p>
+          <a:p xmlns:a="http://schemas.openxmlformats.org/drawingml/2006/main">
+            <a:r>
+              <a:t/>
+            </a:r>
+          </a:p>
+          <a:p xmlns:a="http://schemas.openxmlformats.org/drawingml/2006/main">
+            <a:r>
+              <a:t>음성 입력/전사, 현재 의미, 초기 과거 생산/갱신, 질문/응답/음성 출력, 재시도, 늦어서 폐기된 청구 출력과 미사용 배경 생산을 포함한다. 외부 Downstream Agent가 자체 업무에 쓴 모델/도구 금액은 별도 원장이다. CPU/IPC/저장 비용은 모델 비용에 임의 단가로 섞지 않는다. 같은 provider call ID는 한 번만 청구한다.</a:t>
             </a:r>
           </a:p>
           <a:p xmlns:a="http://schemas.openxmlformats.org/drawingml/2006/main">
@@ -5323,17 +5759,22 @@
           </a:p>
           <a:p xmlns:a="http://schemas.openxmlformats.org/drawingml/2006/main">
             <a:r>
-              <a:t>C8h = Σ 의미 호출(input_tokens × 0.80 + billed_output_tokens × 4.00) / 1,000,000</a:t>
-            </a:r>
-          </a:p>
-          <a:p xmlns:a="http://schemas.openxmlformats.org/drawingml/2006/main">
-            <a:r>
-              <a:t>    + audio_input_minutes × 0.005 + audio_output_minutes × 0.018</a:t>
-            </a:r>
-          </a:p>
-          <a:p xmlns:a="http://schemas.openxmlformats.org/drawingml/2006/main">
-            <a:r>
-              <a:t>    + (voice_text_input_tokens × 0.75 + voice_text_output_tokens × 4.50) / 1,000,000</a:t>
+              <a:t>CW100 = Σ 의미 호출(input_tokens × 0.80 + billed_output_tokens × 4.00) / 1,000,000</a:t>
+            </a:r>
+          </a:p>
+          <a:p xmlns:a="http://schemas.openxmlformats.org/drawingml/2006/main">
+            <a:r>
+              <a:t>      + audio_input_minutes × 0.005 + audio_output_minutes × 0.018</a:t>
+            </a:r>
+          </a:p>
+          <a:p xmlns:a="http://schemas.openxmlformats.org/drawingml/2006/main">
+            <a:r>
+              <a:t>      + (voice_text_input_tokens × 0.75 + voice_text_output_tokens × 4.50) / 1,000,000</a:t>
+            </a:r>
+          </a:p>
+          <a:p xmlns:a="http://schemas.openxmlformats.org/drawingml/2006/main">
+            <a:r>
+              <a:t>ASR-QA-04 = (CW100_R1 + CW100_R2 + CW100_R3) / 3</a:t>
             </a:r>
           </a:p>
           <a:p xmlns:a="http://schemas.openxmlformats.org/drawingml/2006/main">
@@ -5348,27 +5789,37 @@
           </a:p>
           <a:p xmlns:a="http://schemas.openxmlformats.org/drawingml/2006/main">
             <a:r>
-              <a:t>단가는 §8.4의 공개 reference다. 분 기반 음성 환산과 audio token 청구를 동시에 적용하지 않는다. 실측에서는 사용량 응답/청구 규칙을 우선하며 reasoning, image token, retained context, tool schema와 재전송도 해당 청구 입력/출력으로 기록한다. caching 할인을 기준값에 넣지 않는다. 할인 profile은 같은 양안에 같은 공개 조건으로만 추가한다.</a:t>
-            </a:r>
-          </a:p>
-          <a:p xmlns:a="http://schemas.openxmlformats.org/drawingml/2006/main">
-            <a:r>
-              <a:t/>
-            </a:r>
-          </a:p>
-          <a:p xmlns:a="http://schemas.openxmlformats.org/drawingml/2006/main">
-            <a:r>
-              <a:t>### 5.2 공통 8시간 workload와 호출 원장</a:t>
-            </a:r>
-          </a:p>
-          <a:p xmlns:a="http://schemas.openxmlformats.org/drawingml/2006/main">
-            <a:r>
-              <a:t/>
-            </a:r>
-          </a:p>
-          <a:p xmlns:a="http://schemas.openxmlformats.org/drawingml/2006/main">
-            <a:r>
-              <a:t>| 고정 입력 | 값과 사건 규칙 |</a:t>
+              <a:t>단가는 §8.4의 공개 reference다. 분 기반 음성 근사와 audio token 청구를 동시에 적용하지 않는다. 실측에서는 usage/청구 규칙을 우선하며 reasoning, image token, retained context, tool schema와 재전송도 해당 청구량에 포함한다. caching 할인은 공통 기본값에 넣지 않고 양안 같은 공개 조건의 추가 profile로만 계산한다.</a:t>
+            </a:r>
+          </a:p>
+          <a:p xmlns:a="http://schemas.openxmlformats.org/drawingml/2006/main">
+            <a:r>
+              <a:t/>
+            </a:r>
+          </a:p>
+          <a:p xmlns:a="http://schemas.openxmlformats.org/drawingml/2006/main">
+            <a:r>
+              <a:t>### 5.2 공통 활동과 호출 원장</a:t>
+            </a:r>
+          </a:p>
+          <a:p xmlns:a="http://schemas.openxmlformats.org/drawingml/2006/main">
+            <a:r>
+              <a:t/>
+            </a:r>
+          </a:p>
+          <a:p xmlns:a="http://schemas.openxmlformats.org/drawingml/2006/main">
+            <a:r>
+              <a:t>**사용량의 유일한 원본은 §8.0과 [공통 활동 입력](./03-02-common-workload.json)이다.** W100 130장면의 사례/순서는 [사건 목록](./03-02-workload-manifest.json)으로 검산한다. 초기화, CORE, REUSE, BURST, source 갱신/철회, drain/idle의 청구를 모두 합산한다. QA마다 요청 개수/발화/최종 사건을 따로 바꾸지 않는다.</a:t>
+            </a:r>
+          </a:p>
+          <a:p xmlns:a="http://schemas.openxmlformats.org/drawingml/2006/main">
+            <a:r>
+              <a:t/>
+            </a:r>
+          </a:p>
+          <a:p xmlns:a="http://schemas.openxmlformats.org/drawingml/2006/main">
+            <a:r>
+              <a:t>| 청구량의 근거 | W100 기준값과 실제 비교 규칙 |</a:t>
             </a:r>
           </a:p>
           <a:p xmlns:a="http://schemas.openxmlformats.org/drawingml/2006/main">
@@ -5378,57 +5829,47 @@
           </a:p>
           <a:p xmlns:a="http://schemas.openxmlformats.org/drawingml/2006/main">
             <a:r>
-              <a:t>| 사용자 요청 목표 | 100개: 명시적 기본 25, 과거/지칭 25, 복합 관계 20, 정정/제어 15, 확인/권한 15. S1/S2/S3/S4/S6 원본을 순환 재사용하며 S5의 비동기 질문/결과 30개를 같은 기간에 추가. 후속 답변과 알림은 새 요청 수로 세지 않음 |</a:t>
-            </a:r>
-          </a:p>
-          <a:p xmlns:a="http://schemas.openxmlformats.org/drawingml/2006/main">
-            <a:r>
-              <a:t>| 초기 원본 | 2,000개 과거 대화 turn, 완료 Task 200개, 현재 Task 10개, 문서/일정 source 30개. 전체 합성 payload 20MiB, 현재 scenario locator는 §3 자료에 대응. 양안 같은 owner snapshot에서 시작하며 정답 의미를 미리 생산하지 않음 |</a:t>
-            </a:r>
-          </a:p>
-          <a:p xmlns:a="http://schemas.openxmlformats.org/drawingml/2006/main">
-            <a:r>
-              <a:t>| 활동 시각 | 100개 목표의 최초 입력은 0~465.6분에 등간격(465.6/99분). 첫 5분의 초기화/관계 생산도 기간에 포함. Task event 10개는 30/60/.../300분에 하나씩, 나머지 20개는 360분/390분에 각각 10개씩 1초 간격으로 제공. 변경 source event는 20/40/.../400분의 총 20개 |</a:t>
-            </a:r>
-          </a:p>
-          <a:p xmlns:a="http://schemas.openxmlformats.org/drawingml/2006/main">
-            <a:r>
-              <a:t>| 음성 | **청구 대상 입력 30분/출력 10분**을 기준 workload 가정으로 둠. 후속 질문/답변/알림 포함. 단순 마이크 ON 8시간을 30분 청구라고 치환하지 않으며 실제 송신/usage 원장으로 확인 |</a:t>
-            </a:r>
-          </a:p>
-          <a:p xmlns:a="http://schemas.openxmlformats.org/drawingml/2006/main">
-            <a:r>
-              <a:t>| 음성 Text/context | 입력 50,000 token/출력 10,000 token의 기준 청구 가정. session context 재입력이 있으면 매 청구에 포함. 8시간 한 연결의 context 재사용이 무료라고 가정하지 않음 |</a:t>
-            </a:r>
-          </a:p>
-          <a:p xmlns:a="http://schemas.openxmlformats.org/drawingml/2006/main">
-            <a:r>
-              <a:t>| 의미 호출 예산 기준 | 100개 목표 × 평균 3호출 × 입력 2,000/출력 200 token = 총 입력 600,000/출력 60,000 token. 추가 background/retry는 별도 행으로 가산하며 이 평균을 후보에 강제하지 않음 |</a:t>
-            </a:r>
-          </a:p>
-          <a:p xmlns:a="http://schemas.openxmlformats.org/drawingml/2006/main">
-            <a:r>
-              <a:t>| 반복과 비교 | 동일 day script 3회, 각 회 초기화. 총 비용을 3회 산술평균. 계산에서는 동일 usage ledger의 기준/민감도 값을 산출하며 3회 복제로 통계적 표본을 만든다고 하지 않음 |</a:t>
-            </a:r>
-          </a:p>
-          <a:p xmlns:a="http://schemas.openxmlformats.org/drawingml/2006/main">
-            <a:r>
-              <a:t/>
-            </a:r>
-          </a:p>
-          <a:p xmlns:a="http://schemas.openxmlformats.org/drawingml/2006/main">
-            <a:r>
-              <a:t>8시간 source script는 18개 내용의 새 변형 전수 검사가 아니다. 반복/갱신/유휴 생산 비용을 놓치지 않도록 과제 수와 사건 수를 확대한 자원 workload다. 변경 source 20개는 version/사실을 바꾸는 사건이며 변경 용이성의 여섯 개발 과제와 구별한다. 45A의 cache/부분 갱신과 45B의 선택적 생산도 허용하되 실제 소비/준비/무효화 비용을 기록한다.</a:t>
-            </a:r>
-          </a:p>
-          <a:p xmlns:a="http://schemas.openxmlformats.org/drawingml/2006/main">
-            <a:r>
-              <a:t/>
-            </a:r>
-          </a:p>
-          <a:p xmlns:a="http://schemas.openxmlformats.org/drawingml/2006/main">
-            <a:r>
-              <a:t>원장 열은 `call_id, source_execution_key, dp_option, role, trigger_event, purpose, source_vector, start/end, input/output/reasoning/image/audio_usage, billed, outcome, used_by, USD, evidence_level`이다. timeout/cancel/미사용을 `billed=false`로 추정하지 않는다. provider가 usage를 주지 않으면 요청/출력 기록에서 보수적인 token 상한을 적용해 **상한 계산**이라고 표시한다. 평가 세션 미실행은 결과 상태이고 비용 정의의 빈칸이 아니다.</a:t>
+              <a:t>| 사용자와 Agent 장면 | 100/30건. 초기 요청뿐 아니라 정정/제어/확인과 실제 질문/결과 전달을 포함. 실제 내부 호출 수는 구조의 결과 |</a:t>
+            </a:r>
+          </a:p>
+          <a:p xmlns:a="http://schemas.openxmlformats.org/drawingml/2006/main">
+            <a:r>
+              <a:t>| 입력 음성 | 최초 발화 합 234초 + S6-01/02의 지정 후속 답변 합 30초 = **264초(4.4분)**. S5-03의 재연결 발화는 100건에 포함. 추가 확인 답변/송신 무음/재전송도 청구되면 더함 |</a:t>
+            </a:r>
+          </a:p>
+          <a:p xmlns:a="http://schemas.openxmlformats.org/drawingml/2006/main">
+            <a:r>
+              <a:t>| 출력 음성 | 사례별 필요한 전달의 작성자 길이 예산 합 **914초(15.233333분)**. S2-02의 초기 실제 설명과 S4-02의 중단 전 실제 재생도 포함. 실제 출력/중단/청구 길이를 우선하며 미사용 생성도 청구되면 포함 |</a:t>
+            </a:r>
+          </a:p>
+          <a:p xmlns:a="http://schemas.openxmlformats.org/drawingml/2006/main">
+            <a:r>
+              <a:t>| 음성 Text/context | 기준 입력 50,000/output 10,000token. 130장면 × 입력 context 350token + 초기/제어 4,500token, 130장면 × 별도 Text 출력 70token + 초기/제어 900token의 작성자 예산. audio에 이미 청구한 token을 별도 Text로 중복 계상하지 않고 실제 별도 Text 청구를 우선 |</a:t>
+            </a:r>
+          </a:p>
+          <a:p xmlns:a="http://schemas.openxmlformats.org/drawingml/2006/main">
+            <a:r>
+              <a:t>| 의미 호출 | 사용자 해석/결과 200 + Agent 질문/결과 60 + source 갱신 20 + 전체 block 초기/과거 준비 20 = **300호출 예산**. 각 입력 2,000/output 200token. 양안 호출을 300개로 강제하지 않음 |</a:t>
+            </a:r>
+          </a:p>
+          <a:p xmlns:a="http://schemas.openxmlformats.org/drawingml/2006/main">
+            <a:r>
+              <a:t>| 초기/갱신 생산 | source 변경 20건은 원천 사건 수다. 45B의 production 20회와 같다고 가정하지 않음. 모든 block의 2,000turn/200 Task 초기 생산이 예산보다 크면 추가 비용을 기록. 완성된 파생 의미 무료 선주입 금지 |</a:t>
+            </a:r>
+          </a:p>
+          <a:p xmlns:a="http://schemas.openxmlformats.org/drawingml/2006/main">
+            <a:r>
+              <a:t>| 독립 반복 | 동일 W100을 세 번 초기화. 세 실제 비용/청구량과 평균/범위를 공개. 같은 계산 원장을 3번 복제해 통계적 증거로 만들지 않음 |</a:t>
+            </a:r>
+          </a:p>
+          <a:p xmlns:a="http://schemas.openxmlformats.org/drawingml/2006/main">
+            <a:r>
+              <a:t/>
+            </a:r>
+          </a:p>
+          <a:p xmlns:a="http://schemas.openxmlformats.org/drawingml/2006/main">
+            <a:r>
+              <a:t>원장 열은 `run_id, block, occurrence_id, call_id, source_execution_key, dp_option, role, trigger_event, purpose, source_vector, start/end, input/output/reasoning/image/audio_usage, billed, outcome, used_by, USD, evidence_level`이다. timeout/cancel/미사용을 `billed=false`로 추정하지 않는다. usage가 없으면 기록에서 보수적인 token 상한을 적용해 **상한 계산**으로 표시한다. 불필요한 확인은 각 사례의 공통 후속 정책에 따라 처리하며 추가 수고/시간/비용을 모두 남긴다.</a:t>
             </a:r>
           </a:p>
           <a:p xmlns:a="http://schemas.openxmlformats.org/drawingml/2006/main">
@@ -5448,17 +5889,17 @@
           </a:p>
           <a:p xmlns:a="http://schemas.openxmlformats.org/drawingml/2006/main">
             <a:r>
-              <a:t>**목표: 8시간 평균 총 모델 비용 $1.50 이하.** 목표당 보조 환산은 $0.015이며 22일의 동일 활동이면 $33이다. USD 그대로 관리하고 환율/세금/마진/서비스 가격을 섞지 않는다. 이 금액은 사용자 또는 과제 사업자가 이미 확정한 상품 가격이 아니라 작성자가 제안한 모델 예산이다.</a:t>
-            </a:r>
-          </a:p>
-          <a:p xmlns:a="http://schemas.openxmlformats.org/drawingml/2006/main">
-            <a:r>
-              <a:t/>
-            </a:r>
-          </a:p>
-          <a:p xmlns:a="http://schemas.openxmlformats.org/drawingml/2006/main">
-            <a:r>
-              <a:t>| 기준 workload의 계산 | 금액 |</a:t>
+              <a:t>**목표: W100 1회 평균 총 모델 비용 $1.50 이하.** 고정 활동의 사용자 입력 한 장면당 보조 환산은 $0.015다. W100은 합성 PoC 부하이므로 실제 하루/월 사용량 또는 월 요금으로 환산하지 않는다. USD 그대로 관리하며 세금/환율/마진과 제품 서비스 가격을 섞지 않는다.</a:t>
+            </a:r>
+          </a:p>
+          <a:p xmlns:a="http://schemas.openxmlformats.org/drawingml/2006/main">
+            <a:r>
+              <a:t/>
+            </a:r>
+          </a:p>
+          <a:p xmlns:a="http://schemas.openxmlformats.org/drawingml/2006/main">
+            <a:r>
+              <a:t>| 기준 W100의 계산 | 금액 |</a:t>
             </a:r>
           </a:p>
           <a:p xmlns:a="http://schemas.openxmlformats.org/drawingml/2006/main">
@@ -5478,12 +5919,12 @@
           </a:p>
           <a:p xmlns:a="http://schemas.openxmlformats.org/drawingml/2006/main">
             <a:r>
-              <a:t>| 음성 입력 30분 × $0.005/분 | $0.1500 |</a:t>
-            </a:r>
-          </a:p>
-          <a:p xmlns:a="http://schemas.openxmlformats.org/drawingml/2006/main">
-            <a:r>
-              <a:t>| 음성 출력 10분 × $0.018/분 | $0.1800 |</a:t>
+              <a:t>| 음성 입력 264/60분 × $0.005/분 | $0.0220 |</a:t>
+            </a:r>
+          </a:p>
+          <a:p xmlns:a="http://schemas.openxmlformats.org/drawingml/2006/main">
+            <a:r>
+              <a:t>| 음성 출력 914/60분 × $0.018/분 | $0.2742 |</a:t>
             </a:r>
           </a:p>
           <a:p xmlns:a="http://schemas.openxmlformats.org/drawingml/2006/main">
@@ -5498,32 +5939,32 @@
           </a:p>
           <a:p xmlns:a="http://schemas.openxmlformats.org/drawingml/2006/main">
             <a:r>
-              <a:t>| 기본 합계 | **$1.1325** |</a:t>
-            </a:r>
-          </a:p>
-          <a:p xmlns:a="http://schemas.openxmlformats.org/drawingml/2006/main">
-            <a:r>
-              <a:t>| 추가 생산/재시도/길이 증가에 남는 예산 | **$0.3675** |</a:t>
-            </a:r>
-          </a:p>
-          <a:p xmlns:a="http://schemas.openxmlformats.org/drawingml/2006/main">
-            <a:r>
-              <a:t/>
-            </a:r>
-          </a:p>
-          <a:p xmlns:a="http://schemas.openxmlformats.org/drawingml/2006/main">
-            <a:r>
-              <a:t>**과제 근거:** VIA는 상시 대화와 여러 업무의 후속 처리를 제공하므로 요청 때만의 싼 단일 호출을 제시해서는 지속 운용 가능성을 설명할 수 없다. 하루 100개 목표/40분 음성의 기본 reference $1.1325에 추가 처리 여유 $0.3675를 두어 $1.50을 선택했다. 기본값 대비 약 32.45% 여유이며 총 예산의 24.5%다. 품질을 위해 필요한 재판단은 허용하되 배경 생산이 이 여유를 지속적으로 소모하는지 비교한다. 비용을 맞추려고 확인/현재성/허용 검사를 제거하면 정확성에서 손실을 남긴다.</a:t>
-            </a:r>
-          </a:p>
-          <a:p xmlns:a="http://schemas.openxmlformats.org/drawingml/2006/main">
-            <a:r>
-              <a:t/>
-            </a:r>
-          </a:p>
-          <a:p xmlns:a="http://schemas.openxmlformats.org/drawingml/2006/main">
-            <a:r>
-              <a:t>**차이 기준:** 하루 $0.15 이상, 즉 예산의 10% 차이를 의미 있는 비용 차이로 본다. 실제 반복이면 3회 각각의 비용/usage와 범위를 공개하고 같은 방향을 확인한다. 참조 계산이면 사용 횟수/재사용 빈도/음성 길이를 0.5배/1배/2배로 바꿔 조건부 손익을 보인다. 작은 차이는 그대로 금액으로 보고하고 등급 차이만으로 선택하지 않는다.</a:t>
+              <a:t>| 기본 합계 | **$1.0987** |</a:t>
+            </a:r>
+          </a:p>
+          <a:p xmlns:a="http://schemas.openxmlformats.org/drawingml/2006/main">
+            <a:r>
+              <a:t>| 추가 생산/재시도/길이 증가 예산 | **$0.4013** |</a:t>
+            </a:r>
+          </a:p>
+          <a:p xmlns:a="http://schemas.openxmlformats.org/drawingml/2006/main">
+            <a:r>
+              <a:t/>
+            </a:r>
+          </a:p>
+          <a:p xmlns:a="http://schemas.openxmlformats.org/drawingml/2006/main">
+            <a:r>
+              <a:t>**과제 근거:** VIA는 같은 대화에서 과거 근거와 여러 업무의 후속 처리를 연결해야 한다. 18개 대표 사례의 명시적 조회/과거 재사용/정정/질문/결과를 포함하는 W100에서 이 기능을 제공한 전체 모델 비용을 제한한다. 위 역할별 300호출과 실제 사례에 연결한 음성 길이 예산으로 기본 $1.0987을 산정하고 초기 생산/추가 확인/재시도에 $0.4013을 남겨 $1.50을 선택했다. 기본값 대비 약 36.53%, 총액의 약 26.75% 여유다. 이 한도는 외부 시장 단가가 보장하는 처리 성능이나 사용자와 합의된 상품 예산이 아니라 작성자의 설계 평가 예산이다. 출력 길이/초기 생산이 더 크면 목표 미달을 그대로 남긴다.</a:t>
+            </a:r>
+          </a:p>
+          <a:p xmlns:a="http://schemas.openxmlformats.org/drawingml/2006/main">
+            <a:r>
+              <a:t/>
+            </a:r>
+          </a:p>
+          <a:p xmlns:a="http://schemas.openxmlformats.org/drawingml/2006/main">
+            <a:r>
+              <a:t>**차이 기준: $0.15/W100 이상**, 예산의 10%. 실제 반복이면 3회별 차이/범위와 같은 방향을 확인한다. 계산이면 같은 장면 구성에서 cache miss/추가 호출/실제 음성 길이 가정을 절반/기준/두 배로 바꾼다. 부하량 자체를 50/100/200건으로 바꾸는 별도 profile은 양안에 함께 적용하고 W100 대표값과 섞지 않는다. 기능 포기/미완료/필수 위반이 있는 낮은 비용은 목표 달성으로 판정하지 않는다.</a:t>
             </a:r>
           </a:p>
           <a:p xmlns:a="http://schemas.openxmlformats.org/drawingml/2006/main">
@@ -5553,7 +5994,7 @@
           </a:p>
           <a:p xmlns:a="http://schemas.openxmlformats.org/drawingml/2006/main">
             <a:r>
-              <a:t>- A: 하루 실제 cache miss 40회, miss당 과거 근거 추가 입력 4,000/출력 200 token이면 `40 × $0.004 = $0.160`.</a:t>
+              <a:t>- A: W100에서 실제 cache miss 40회, miss당 과거 근거 추가 입력 4,000/출력 200 token이면 `40 × $0.004 = $0.160`.</a:t>
             </a:r>
           </a:p>
           <a:p xmlns:a="http://schemas.openxmlformats.org/drawingml/2006/main">
@@ -5633,7 +6074,7 @@
           </a:p>
           <a:p xmlns:a="http://schemas.openxmlformats.org/drawingml/2006/main">
             <a:r>
-              <a:t>03-02 공통 QA 계약 v4: ../../architecture/12-decisions/decision-packages/03-02-quality-attribute-definitions.md</a:t>
+              <a:t>03-02 공통 QA 계약 v5: ../../architecture/12-decisions/decision-packages/03-02-quality-attribute-definitions.md</a:t>
             </a:r>
           </a:p>
           <a:p xmlns:a="http://schemas.openxmlformats.org/drawingml/2006/main">
@@ -6028,7 +6469,7 @@
           </a:p>
           <a:p xmlns:a="http://schemas.openxmlformats.org/drawingml/2006/main">
             <a:r>
-              <a:t>측정 지표: 최대 전체 commit 메모리(MiB) = 모든 VIA process의 private commit + 고유 공유 anonymous commit의 동시 합 최대</a:t>
+              <a:t>측정 지표: 최대 전체 commit 메모리(MiB) = 같은 W100 3회 중 모든 VIA process의 private commit + 고유 공유 anonymous commit의 동시 합 최대</a:t>
             </a:r>
           </a:p>
           <a:p xmlns:a="http://schemas.openxmlformats.org/drawingml/2006/main">
@@ -6063,7 +6504,7 @@
           </a:p>
           <a:p xmlns:a="http://schemas.openxmlformats.org/drawingml/2006/main">
             <a:r>
-              <a:t>03-02 공통 QA 계약 v4: ../../architecture/12-decisions/decision-packages/03-02-quality-attribute-definitions.md</a:t>
+              <a:t>03-02 공통 QA 계약 v5: ../../architecture/12-decisions/decision-packages/03-02-quality-attribute-definitions.md</a:t>
             </a:r>
           </a:p>
           <a:p xmlns:a="http://schemas.openxmlformats.org/drawingml/2006/main">
@@ -6108,7 +6549,7 @@
           </a:p>
           <a:p xmlns:a="http://schemas.openxmlformats.org/drawingml/2006/main">
             <a:r>
-              <a:t>**동일한 활동과 동시 부하에서 VIA가 로컬 PC에 할당해 유지하는 메모리의 최대량.** 대표값은 **8시간 동안 VIA 전체 프로세스의 최대 동시 commit 메모리(MiB)**다. 순간별 모든 VIA process의 private committed bytes와 공유 anonymous section의 고유 committed bytes를 한 번씩 합한 뒤 최대값을 구한다.</a:t>
+              <a:t>**동일한 활동과 동시 부하에서 VIA가 로컬 PC에 할당해 유지하는 메모리의 최대량.** 대표값은 **같은 W100 세 번의 전체 활동에서 VIA 전체 프로세스의 최대 동시 commit 메모리(MiB)**다. 순간별 모든 VIA process의 private committed bytes와 공유 anonymous section의 고유 committed bytes를 한 번씩 합한 뒤 최대값을 구한다.</a:t>
             </a:r>
           </a:p>
           <a:p xmlns:a="http://schemas.openxmlformats.org/drawingml/2006/main">
@@ -6173,27 +6614,37 @@
           </a:p>
           <a:p xmlns:a="http://schemas.openxmlformats.org/drawingml/2006/main">
             <a:r>
-              <a:t>### 7.2 고정 장치, 부하와 관찰 기간</a:t>
-            </a:r>
-          </a:p>
-          <a:p xmlns:a="http://schemas.openxmlformats.org/drawingml/2006/main">
-            <a:r>
-              <a:t/>
-            </a:r>
-          </a:p>
-          <a:p xmlns:a="http://schemas.openxmlformats.org/drawingml/2006/main">
-            <a:r>
-              <a:t>장치는 §8.4의 **Galaxy Book6 Ultra NP960UJH-XG3IN, Windows 11, RAM 32GB급**이다. 가격 reference와 현재 접근 중인 Mac은 Windows 실측 기기가 아니다. AC 전원, 동일 전원 모드, 동일 Office/browser의 외부 부하를 고정한다.</a:t>
-            </a:r>
-          </a:p>
-          <a:p xmlns:a="http://schemas.openxmlformats.org/drawingml/2006/main">
-            <a:r>
-              <a:t/>
-            </a:r>
-          </a:p>
-          <a:p xmlns:a="http://schemas.openxmlformats.org/drawingml/2006/main">
-            <a:r>
-              <a:t>| 단계 | 기간 | VIA workload와 확인할 값 |</a:t>
+              <a:t>### 7.2 고정 장치, 공통 부하와 관찰 구간</a:t>
+            </a:r>
+          </a:p>
+          <a:p xmlns:a="http://schemas.openxmlformats.org/drawingml/2006/main">
+            <a:r>
+              <a:t/>
+            </a:r>
+          </a:p>
+          <a:p xmlns:a="http://schemas.openxmlformats.org/drawingml/2006/main">
+            <a:r>
+              <a:t>장치는 §8.4의 **Galaxy Book6 Ultra NP960UJH-XG3IN, Windows 11, RAM 32GB급**이다. AC 전원/전원 모드와 Office/browser 부하를 고정한다. 현재 접근 중인 Mac에서 산출한 참조 계산은 Windows 실측이 아니다.</a:t>
+            </a:r>
+          </a:p>
+          <a:p xmlns:a="http://schemas.openxmlformats.org/drawingml/2006/main">
+            <a:r>
+              <a:t/>
+            </a:r>
+          </a:p>
+          <a:p xmlns:a="http://schemas.openxmlformats.org/drawingml/2006/main">
+            <a:r>
+              <a:t>**비용과 정확히 같은 W100을 읽는다.** 초기 2,000turn/완료 Task 200개/원본 30개(20MiB), 활성 Task 최대 10개, cloud call 최대 4개, 130장면, background source 갱신 20건/maintenance tick 10회와 마지막 철회를 동일하게 적용한다. 10개 Task/4호출은 동시에 요구하거나 허용하는 부하의 상한이며 후보의 호출을 네 개로 강제하지 않는다. 논리적 Task pool과 burst의 역할은 §8.0에 정의했다.</a:t>
+            </a:r>
+          </a:p>
+          <a:p xmlns:a="http://schemas.openxmlformats.org/drawingml/2006/main">
+            <a:r>
+              <a:t/>
+            </a:r>
+          </a:p>
+          <a:p xmlns:a="http://schemas.openxmlformats.org/drawingml/2006/main">
+            <a:r>
+              <a:t>| 단계 | 종료 조건 | 관측에 포함할 것 |</a:t>
             </a:r>
           </a:p>
           <a:p xmlns:a="http://schemas.openxmlformats.org/drawingml/2006/main">
@@ -6203,42 +6654,47 @@
           </a:p>
           <a:p xmlns:a="http://schemas.openxmlformats.org/drawingml/2006/main">
             <a:r>
-              <a:t>| cold/초기화 | 0~5분 | owner snapshot/DB/cache/cloud session 초기화. B 초기 생산의 메모리/비용 포함 |</a:t>
-            </a:r>
-          </a:p>
-          <a:p xmlns:a="http://schemas.openxmlformats.org/drawingml/2006/main">
-            <a:r>
-              <a:t>| 일반 활동 | 5~360분 | §5.2의 동일 100개 목표/30개 비동기 event/20개 source 변경 중 해당 시각의 사건. Task 10개 활성, cloud call 최대 4개 |</a:t>
-            </a:r>
-          </a:p>
-          <a:p xmlns:a="http://schemas.openxmlformats.org/drawingml/2006/main">
-            <a:r>
-              <a:t>| 반복/집중 활동 | 360~420분 | 같은 source 재사용과 정정. 360분/390분에 네 개 동시 처리와 10개 event/1초 burst를 배치하되 추가 신규 목표 대신 기존 목표의 후속 사건으로 구성 |</a:t>
-            </a:r>
-          </a:p>
-          <a:p xmlns:a="http://schemas.openxmlformats.org/drawingml/2006/main">
-            <a:r>
-              <a:t>| 철회/회수/유휴 | 420~480분 | 450분에 source 하나의 제공 동의 철회, 관련 파생물/Context 신규 사용 차단. 470~480분은 신규 목표 없이 drain/idle, 잔류 메모리 확인 |</a:t>
-            </a:r>
-          </a:p>
-          <a:p xmlns:a="http://schemas.openxmlformats.org/drawingml/2006/main">
-            <a:r>
-              <a:t/>
-            </a:r>
-          </a:p>
-          <a:p xmlns:a="http://schemas.openxmlformats.org/drawingml/2006/main">
-            <a:r>
-              <a:t>§5.2의 마지막 입력 시각은 465.6분으로 정하고 **470분 이후 신규 요청은 없다**. 100개 최초 입력을 `0~465.6분 등간격`으로 배치한다. 일반 활동과 마지막 집중 구간은 같은 workload의 단계 구분이지 전체 사건을 두 번 실행한다는 뜻이 아니다. 순서를 바꿀 수 없는 정확성 X 사건은 해당 목표 내부 상대 순서를 유지한다. 초기 데이터와 모든 후속 사건의 비용도 §5의 같은 8시간 원장에 들어간다.</a:t>
-            </a:r>
-          </a:p>
-          <a:p xmlns:a="http://schemas.openxmlformats.org/drawingml/2006/main">
-            <a:r>
-              <a:t/>
-            </a:r>
-          </a:p>
-          <a:p xmlns:a="http://schemas.openxmlformats.org/drawingml/2006/main">
-            <a:r>
-              <a:t>근거 보관/질문/유효 Task의 사용자 기능은 양안 같다. capture는 2880×1800 RGBA 원본 한 장 약 19.775MiB, 최대 15장으로 약 296.63MiB이며 최대 512MiB budget 안에서 원본/전달 copy를 관리하는 **가정**이다. 후보는 같은 보존 범위에서 압축/참조 공유를 사용할 수 있고 그 처리 시간도 QA-02/03에 남긴다. 45B에만 무제한 모든 과거를 RAM 상주시키거나 A의 정상 cache를 없애지 않는다.</a:t>
+              <a:t>| 초기화/준비 | 최초 CORE 입력 준비 | owner 원본 복원/DB/cloud session/실제 파생 생산. peak 원장 시작 후 수행 |</a:t>
+            </a:r>
+          </a:p>
+          <a:p xmlns:a="http://schemas.openxmlformats.org/drawingml/2006/main">
+            <a:r>
+              <a:t>| CORE/REUSE | 각 block의 18+4 장면 checkpoint/tail 충족 | 과거 준비/캐시/정정/후속 결과, 이전 block의 완료 이력 유지 |</a:t>
+            </a:r>
+          </a:p>
+          <a:p xmlns:a="http://schemas.openxmlformats.org/drawingml/2006/main">
+            <a:r>
+              <a:t>| BURST/갱신 | 네 Agent 장면과 네 source 변경 반영 | 네 장면 0/0.02/0.04/0.06초 제공, 최대 4호출의 실제 겹침, queue/copy/무효화 |</a:t>
+            </a:r>
+          </a:p>
+          <a:p xmlns:a="http://schemas.openxmlformats.org/drawingml/2006/main">
+            <a:r>
+              <a:t>| 철회/drain | 마지막 source 철회 뒤 새 입력 없이 최대 30초 | 파생/Context 신규 사용 차단, 처리 가능한 VIA queue/job 회수. 외부 Task의 정당한 대기 상태는 보존 |</a:t>
+            </a:r>
+          </a:p>
+          <a:p xmlns:a="http://schemas.openxmlformats.org/drawingml/2006/main">
+            <a:r>
+              <a:t>| 유휴 probe | drain 완료 뒤 10초 | 시작/끝 commit과 구간 최대. 새 요청/추가 maintenance 없음, pending 외부 질문을 삭제해 성공으로 바꾸지 않음 |</a:t>
+            </a:r>
+          </a:p>
+          <a:p xmlns:a="http://schemas.openxmlformats.org/drawingml/2006/main">
+            <a:r>
+              <a:t/>
+            </a:r>
+          </a:p>
+          <a:p xmlns:a="http://schemas.openxmlformats.org/drawingml/2006/main">
+            <a:r>
+              <a:t>완료 history를 block마다 삭제해 메모리 증가를 숨기지 않는다. 후보가 job을 포기하거나 drain deadline을 넘으면 낮은 peak도 자원 목표 달성이 아니다. probe가 끝날 때까지 전체 비용 원장도 열린다. 실측 반복 R1/R2/R3는 서로 독립 초기화하지만 각 활동 내부의 peak와 history는 초기화하지 않는다.</a:t>
+            </a:r>
+          </a:p>
+          <a:p xmlns:a="http://schemas.openxmlformats.org/drawingml/2006/main">
+            <a:r>
+              <a:t/>
+            </a:r>
+          </a:p>
+          <a:p xmlns:a="http://schemas.openxmlformats.org/drawingml/2006/main">
+            <a:r>
+              <a:t>공통 capture는 2880×1800 RGBA 원본 한 장 약 19.775MiB, 보존 창 최대 15장으로 약 296.63MiB다. 512MiB capture 예산에는 음성/전사/전달 copy도 포함하므로 원본과 완전한 15장 복사본을 동시에 보관하면 예산을 넘을 수 있다. 같은 원천 사건/15장 보관 범위에서 압축/참조 공유를 허용하고 처리 시간은 QA-02/03에 남긴다. 45B의 과거 RAM 상주나 42B helper/복사 비용을 빠뜨리지 않으며 강한 A의 정상 cache도 보존한다.</a:t>
             </a:r>
           </a:p>
           <a:p xmlns:a="http://schemas.openxmlformats.org/drawingml/2006/main">
@@ -6343,7 +6799,7 @@
           </a:p>
           <a:p xmlns:a="http://schemas.openxmlformats.org/drawingml/2006/main">
             <a:r>
-              <a:t>보조 보호 조건은 앞의 working-set 합 6GiB 이하와 **470~480분 잔류 commit의 증가가 16MiB 이하**다. 필수 근거/작업을 유지한 채 배경 queue를 회수하는지 확인한다. 16MiB는 작은 page/cache fluctuation을 허용하는 진단 예산이고 product leak 0의 증명은 아니다. workload가 기능을 포기하고 더 적게 저장한 경우 정확성/지원 범위 손실과 함께 보고한다.</a:t>
+              <a:t>보조 보호 조건은 앞의 working-set 합 6GiB 이하와 **drain 뒤 10초 유휴 probe의 종료 commit - 시작 commit이 16MiB 이하**다. 필수 근거/작업을 유지한 채 배경 queue를 회수하는지 확인한다. probe 중 최대값도 전체 peak에 남기며 종료-시작이 음수면 증가 0으로 보고한다. 16MiB는 작은 page/cache fluctuation을 허용하는 진단 예산이고 product leak 0의 증명은 아니다. workload가 기능을 포기하고 더 적게 저장한 경우 정확성/지원 범위 손실과 함께 보고한다.</a:t>
             </a:r>
           </a:p>
           <a:p xmlns:a="http://schemas.openxmlformats.org/drawingml/2006/main">
@@ -6373,7 +6829,7 @@
           </a:p>
           <a:p xmlns:a="http://schemas.openxmlformats.org/drawingml/2006/main">
             <a:r>
-              <a:t>3. 8시간 session을 3회 초기화해 수행하고 **세 session의 최대 중 가장 큰 값**을 대표 보고값으로 쓴다. 각 session의 peak와 시각/phase, idle 변화, sample 누락을 공개한다. process restart에서 peak 원장을 리셋하지 않는다.</a:t>
+              <a:t>3. 같은 W100을 3회 독립 초기화해 수행하고 **세 활동의 최대 중 가장 큰 값**을 대표 보고값으로 쓴다. 각 run의 peak와 시각/phase, idle 변화, sample 누락을 공개한다. process restart에서 peak 원장을 리셋하지 않는다.</a:t>
             </a:r>
           </a:p>
           <a:p xmlns:a="http://schemas.openxmlformats.org/drawingml/2006/main">
@@ -6394,6 +6850,971 @@
           <a:p xmlns:a="http://schemas.openxmlformats.org/drawingml/2006/main">
             <a:r>
               <a:t>**차이 기준: 128MiB 이상**, 목표 4GiB의 약 3.125%와 기본 상태/queue budget 한 묶음 크기다. polling 오차/allocator reserve 차이보다 구조의 동시 상태 차이를 보려는 작성자 기준이다. 계산에서는 추가 process heap, 중복 message copy, cache 크기를 절반/기준/두 배로 바꿔 확인한다. 41의 해석 Context/frame/부분 상태, 42의 추가 service/접수/outbox, 44의 continuation/window/buffer, 45의 원문 cache/게시 index/coverage/backlog가 참여한다. 어느 안도 무조건 작다고 확정하지 않는다.</a:t>
+            </a:r>
+          </a:p>
+          <a:p xmlns:a="http://schemas.openxmlformats.org/drawingml/2006/main">
+            <a:r>
+              <a:t/>
+            </a:r>
+          </a:p>
+          <a:p xmlns:a="http://schemas.openxmlformats.org/drawingml/2006/main">
+            <a:r>
+              <a:t/>
+            </a:r>
+          </a:p>
+          <a:p xmlns:a="http://schemas.openxmlformats.org/drawingml/2006/main">
+            <a:r>
+              <a:t>공통 활동 상세 §8.0</a:t>
+            </a:r>
+          </a:p>
+          <a:p xmlns:a="http://schemas.openxmlformats.org/drawingml/2006/main">
+            <a:r>
+              <a:t>공통 PoC 환경과 A/B 비교 방법</a:t>
+            </a:r>
+          </a:p>
+          <a:p xmlns:a="http://schemas.openxmlformats.org/drawingml/2006/main">
+            <a:r>
+              <a:t/>
+            </a:r>
+          </a:p>
+          <a:p xmlns:a="http://schemas.openxmlformats.org/drawingml/2006/main">
+            <a:r>
+              <a:t>공통 입력/원천 사건/후보/모델 조건은 여섯 QA에 공유하고, 각 QA의 분모/시간/금액/변경/메모리 경계는 §3~7의 완료 정의를 따른다. 공통 전사/장치 replay를 실제 ASR 정확도나 물리 장치 응답시간 실측으로 해석하지 않는다.</a:t>
+            </a:r>
+          </a:p>
+          <a:p xmlns:a="http://schemas.openxmlformats.org/drawingml/2006/main">
+            <a:r>
+              <a:t/>
+            </a:r>
+          </a:p>
+          <a:p xmlns:a="http://schemas.openxmlformats.org/drawingml/2006/main">
+            <a:r>
+              <a:t>### 8.0 공통 활동 W100: 사용량과 관측 대응</a:t>
+            </a:r>
+          </a:p>
+          <a:p xmlns:a="http://schemas.openxmlformats.org/drawingml/2006/main">
+            <a:r>
+              <a:t/>
+            </a:r>
+          </a:p>
+          <a:p xmlns:a="http://schemas.openxmlformats.org/drawingml/2006/main">
+            <a:r>
+              <a:t>#### 8.0.1 사용량을 정의하는 이유와 범위</a:t>
+            </a:r>
+          </a:p>
+          <a:p xmlns:a="http://schemas.openxmlformats.org/drawingml/2006/main">
+            <a:r>
+              <a:t/>
+            </a:r>
+          </a:p>
+          <a:p xmlns:a="http://schemas.openxmlformats.org/drawingml/2006/main">
+            <a:r>
+              <a:t>**W100은 기존 18개 사례로 구성한 합성 표준 활동이다.** 사용자의 실제 일일 빈도 자료가 없는 PoC에서 A/B가 같은 기능과 부하를 처리하도록 평가용 사용량을 명시했다. 100은 사용자 입력 장면 수다. 신규 업무/조회뿐 아니라 정정/취소/확인/재연결이 들어간다. Agent가 먼저 질문/결과를 보내는 장면은 별도로 30건이다. S5-03은 Agent 결과로 시작하지만 재연결한 사용자의 명시적 조회 발화가 있으므로 사용량 원장에서는 사용자 장면 1건이다. S6의 계획된 답변은 그 장면 내부 후속 발화이며 장면을 추가하지 않는다.</a:t>
+            </a:r>
+          </a:p>
+          <a:p xmlns:a="http://schemas.openxmlformats.org/drawingml/2006/main">
+            <a:r>
+              <a:t/>
+            </a:r>
+          </a:p>
+          <a:p xmlns:a="http://schemas.openxmlformats.org/drawingml/2006/main">
+            <a:r>
+              <a:t>원천은 §3의 18개 초기 상황/입력/경쟁 사건/정답과 아래 공통 lifecycle tail이다. **QA별로 다른 업무나 외부 결과를 만들지 않는다.** 평가 관측 단위가 다르므로 모든 QA의 분모가 같을 필요는 없다. 정확성은 조건, 시간은 사건 경계, 비용은 활동 전체 청구, 메모리는 활동 전체 동시 할당을 읽는다. 변경 용이성은 여섯 구조 변경 과제이며 변경 뒤 같은 기능/활동 계약을 유지한다.</a:t>
+            </a:r>
+          </a:p>
+          <a:p xmlns:a="http://schemas.openxmlformats.org/drawingml/2006/main">
+            <a:r>
+              <a:t/>
+            </a:r>
+          </a:p>
+          <a:p xmlns:a="http://schemas.openxmlformats.org/drawingml/2006/main">
+            <a:r>
+              <a:t>[공통 활동 입력](./03-02-common-workload.json)은 이 절의 machine-readable 사용량/음성/호출 예산이고 [사건 목록](./03-02-workload-manifest.json)은 각 장면의 case/hash/CORE 여부/I/T 연결을 130행으로 생성한다. [활동 검산기](../../../../scripts/architecture/qa_common_workload.py)는 입력 목록을 컴파일할 뿐 후보/harness/API를 실행하지 않는다. 참조 계산과 두 발표자료도 같은 원본/manifest hash를 사용한다.</a:t>
+            </a:r>
+          </a:p>
+          <a:p xmlns:a="http://schemas.openxmlformats.org/drawingml/2006/main">
+            <a:r>
+              <a:t/>
+            </a:r>
+          </a:p>
+          <a:p xmlns:a="http://schemas.openxmlformats.org/drawingml/2006/main">
+            <a:r>
+              <a:t>#### 8.0.2 사례별 횟수와 음성 길이</a:t>
+            </a:r>
+          </a:p>
+          <a:p xmlns:a="http://schemas.openxmlformats.org/drawingml/2006/main">
+            <a:r>
+              <a:t/>
+            </a:r>
+          </a:p>
+          <a:p xmlns:a="http://schemas.openxmlformats.org/drawingml/2006/main">
+            <a:r>
+              <a:t>| 원본 사례 | W100 횟수 | 입력 장면 분류 | 최초 발화 초/회 | 지정 답변 초/회 | 출력 음성 예산 초/회 | 반응 관측 | 사이클 관측 |</a:t>
+            </a:r>
+          </a:p>
+          <a:p xmlns:a="http://schemas.openxmlformats.org/drawingml/2006/main">
+            <a:r>
+              <a:t>| --- | --- | --- | --- | --- | --- | --- | --- |</a:t>
+            </a:r>
+          </a:p>
+          <a:p xmlns:a="http://schemas.openxmlformats.org/drawingml/2006/main">
+            <a:r>
+              <a:t>| S1-01 | 8 | 사용자 | 2 | 0 | 3 | 없음 | T-01 |</a:t>
+            </a:r>
+          </a:p>
+          <a:p xmlns:a="http://schemas.openxmlformats.org/drawingml/2006/main">
+            <a:r>
+              <a:t>| S1-02 | 8 | 사용자 | 3 | 0 | 8 | 없음 | T-02 |</a:t>
+            </a:r>
+          </a:p>
+          <a:p xmlns:a="http://schemas.openxmlformats.org/drawingml/2006/main">
+            <a:r>
+              <a:t>| S1-03 | 8 | 사용자 | 3 | 0 | 4 | 없음 | 없음 |</a:t>
+            </a:r>
+          </a:p>
+          <a:p xmlns:a="http://schemas.openxmlformats.org/drawingml/2006/main">
+            <a:r>
+              <a:t>| S2-01 | 8 | 사용자 | 2 | 0 | 5 | 없음 | 없음 |</a:t>
+            </a:r>
+          </a:p>
+          <a:p xmlns:a="http://schemas.openxmlformats.org/drawingml/2006/main">
+            <a:r>
+              <a:t>| S2-02 | 8 | 사용자 | 3 | 0 | 18 | 없음 | T-03 |</a:t>
+            </a:r>
+          </a:p>
+          <a:p xmlns:a="http://schemas.openxmlformats.org/drawingml/2006/main">
+            <a:r>
+              <a:t>| S2-03 | 8 | 사용자 | 2 | 0 | 4 | 없음 | 없음 |</a:t>
+            </a:r>
+          </a:p>
+          <a:p xmlns:a="http://schemas.openxmlformats.org/drawingml/2006/main">
+            <a:r>
+              <a:t>| S3-01 | 5 | 사용자 | 3 | 0 | 6 | 없음 | 없음 |</a:t>
+            </a:r>
+          </a:p>
+          <a:p xmlns:a="http://schemas.openxmlformats.org/drawingml/2006/main">
+            <a:r>
+              <a:t>| S3-02 | 5 | 사용자 | 3 | 0 | 10 | 없음 | T-04 |</a:t>
+            </a:r>
+          </a:p>
+          <a:p xmlns:a="http://schemas.openxmlformats.org/drawingml/2006/main">
+            <a:r>
+              <a:t>| S3-03 | 5 | 사용자 | 3 | 0 | 6 | 없음 | 없음 |</a:t>
+            </a:r>
+          </a:p>
+          <a:p xmlns:a="http://schemas.openxmlformats.org/drawingml/2006/main">
+            <a:r>
+              <a:t>| S4-01 | 5 | 사용자 | 2 | 0 | 9 | I-02 | T-05 |</a:t>
+            </a:r>
+          </a:p>
+          <a:p xmlns:a="http://schemas.openxmlformats.org/drawingml/2006/main">
+            <a:r>
+              <a:t>| S4-02 | 5 | 사용자 | 2 | 0 | 8 | I-01 | 없음 |</a:t>
+            </a:r>
+          </a:p>
+          <a:p xmlns:a="http://schemas.openxmlformats.org/drawingml/2006/main">
+            <a:r>
+              <a:t>| S4-03 | 5 | 사용자 | 2 | 0 | 5 | I-03 | 없음 |</a:t>
+            </a:r>
+          </a:p>
+          <a:p xmlns:a="http://schemas.openxmlformats.org/drawingml/2006/main">
+            <a:r>
+              <a:t>| S5-01 | 15 | Agent | 0 | 0 | 5 | I-04 | 없음 |</a:t>
+            </a:r>
+          </a:p>
+          <a:p xmlns:a="http://schemas.openxmlformats.org/drawingml/2006/main">
+            <a:r>
+              <a:t>| S5-02 | 15 | Agent | 0 | 0 | 6 | I-05 | 없음 |</a:t>
+            </a:r>
+          </a:p>
+          <a:p xmlns:a="http://schemas.openxmlformats.org/drawingml/2006/main">
+            <a:r>
+              <a:t>| S5-03 | 7 | 사용자 | 2 | 0 | 4 | 없음 | 없음 |</a:t>
+            </a:r>
+          </a:p>
+          <a:p xmlns:a="http://schemas.openxmlformats.org/drawingml/2006/main">
+            <a:r>
+              <a:t>| S6-01 | 5 | 사용자 | 2 | 3 | 14 | 없음 | T-06 |</a:t>
+            </a:r>
+          </a:p>
+          <a:p xmlns:a="http://schemas.openxmlformats.org/drawingml/2006/main">
+            <a:r>
+              <a:t>| S6-02 | 5 | 사용자 | 1 | 3 | 14 | 없음 | 없음 |</a:t>
+            </a:r>
+          </a:p>
+          <a:p xmlns:a="http://schemas.openxmlformats.org/drawingml/2006/main">
+            <a:r>
+              <a:t>| S6-03 | 5 | 사용자 | 2 | 0 | 5 | I-06 | 없음 |</a:t>
+            </a:r>
+          </a:p>
+          <a:p xmlns:a="http://schemas.openxmlformats.org/drawingml/2006/main">
+            <a:r>
+              <a:t/>
+            </a:r>
+          </a:p>
+          <a:p xmlns:a="http://schemas.openxmlformats.org/drawingml/2006/main">
+            <a:r>
+              <a:t>사용자 장면 합 100, Agent 장면 합 30이다. 최초 입력의 replay 길이는 §3 사건 구간으로 정한 **fixture 조건**이고 합 234초다. S6-01/02 각 5회의 후속 답변 3초를 더해 계획된 입력은 **110발화/264초**다. 추가 확인은 §3 공통 답변 정책대로 공급하고 실제 청구를 더한다. S5-03의 2초 재연결 요청은 최초 발화 열에 이미 포함했다.</a:t>
+            </a:r>
+          </a:p>
+          <a:p xmlns:a="http://schemas.openxmlformats.org/drawingml/2006/main">
+            <a:r>
+              <a:t/>
+            </a:r>
+          </a:p>
+          <a:p xmlns:a="http://schemas.openxmlformats.org/drawingml/2006/main">
+            <a:r>
+              <a:t>출력 길이는 **작성자의 참조 예산**이며 모델 성능/자연 발화 길이 보장이 아니다. 위 표의 필수 사실 전달과 공통 tail을 합해 914초다. S2-02 18초는 과거의 실제 재생 설명 8초와 현재 접수/결과 10초, S4-02 8초는 중단 전 재생 4초와 새 설명 4초를 포함한다. S6-01/02 14초는 확인 질문과 허용 범위/결과 전달의 합이다. 나머지는 해당 C6 사실과 tail 전달의 총 길이 예산이다. 실제 모델 생성/재생/폐기 청구량을 예산값으로 덮어쓰지 않는다. Text 표시 길이와 음성 시간의 임의 token 환산도 하지 않는다.</a:t>
+            </a:r>
+          </a:p>
+          <a:p xmlns:a="http://schemas.openxmlformats.org/drawingml/2006/main">
+            <a:r>
+              <a:t/>
+            </a:r>
+          </a:p>
+          <a:p xmlns:a="http://schemas.openxmlformats.org/drawingml/2006/main">
+            <a:r>
+              <a:t>#### 8.0.3 다섯 block의 입력 순서와 관측 선택</a:t>
+            </a:r>
+          </a:p>
+          <a:p xmlns:a="http://schemas.openxmlformats.org/drawingml/2006/main">
+            <a:r>
+              <a:t/>
+            </a:r>
+          </a:p>
+          <a:p xmlns:a="http://schemas.openxmlformats.org/drawingml/2006/main">
+            <a:r>
+              <a:t>각 block은 **CORE 18장면 + REUSE 4장면 + BURST 4장면 = 26장면**이다. 다섯 block이 사용자 100/Agent 30의 130장면을 만든다. CORE는 S1-01부터 S6-03까지 위 표 순서로 각 한 번이다. 각 장면은 필수 checkpoint와 tail까지 진행한 뒤 다음 장면을 시작한다. 아래 REUSE는 같은 block에서 이미 허용된 원본 version/제공 권한을 확인한 뒤 재사용한다. 기존 현재 Task를 임의 정답으로 배치하지 않고 요청 ID/외부 실행 ID는 occurrence namespace로 구별한다.</a:t>
+            </a:r>
+          </a:p>
+          <a:p xmlns:a="http://schemas.openxmlformats.org/drawingml/2006/main">
+            <a:r>
+              <a:t/>
+            </a:r>
+          </a:p>
+          <a:p xmlns:a="http://schemas.openxmlformats.org/drawingml/2006/main">
+            <a:r>
+              <a:t>| block | REUSE 네 장면 순서 | BURST 네 장면 순서 |</a:t>
+            </a:r>
+          </a:p>
+          <a:p xmlns:a="http://schemas.openxmlformats.org/drawingml/2006/main">
+            <a:r>
+              <a:t>| --- | --- | --- |</a:t>
+            </a:r>
+          </a:p>
+          <a:p xmlns:a="http://schemas.openxmlformats.org/drawingml/2006/main">
+            <a:r>
+              <a:t>| B1 | S1-01, S1-02, S2-01, S2-02 | S5-01, S5-02, S5-01, S5-02 |</a:t>
+            </a:r>
+          </a:p>
+          <a:p xmlns:a="http://schemas.openxmlformats.org/drawingml/2006/main">
+            <a:r>
+              <a:t>| B2 | S1-01, S1-03, S2-01, S2-03 | 동일 |</a:t>
+            </a:r>
+          </a:p>
+          <a:p xmlns:a="http://schemas.openxmlformats.org/drawingml/2006/main">
+            <a:r>
+              <a:t>| B3 | S1-02, S1-03, S2-02, S2-03 | 동일 |</a:t>
+            </a:r>
+          </a:p>
+          <a:p xmlns:a="http://schemas.openxmlformats.org/drawingml/2006/main">
+            <a:r>
+              <a:t>| B4 | S1-01, S1-02, S2-01, S2-02 | 동일 |</a:t>
+            </a:r>
+          </a:p>
+          <a:p xmlns:a="http://schemas.openxmlformats.org/drawingml/2006/main">
+            <a:r>
+              <a:t>| B5 | S1-03, S2-03, S5-03, S5-03 | 동일 |</a:t>
+            </a:r>
+          </a:p>
+          <a:p xmlns:a="http://schemas.openxmlformats.org/drawingml/2006/main">
+            <a:r>
+              <a:t/>
+            </a:r>
+          </a:p>
+          <a:p xmlns:a="http://schemas.openxmlformats.org/drawingml/2006/main">
+            <a:r>
+              <a:t>BURST의 네 Agent 장면 최초 원천 사건을 상대 0/0.02/0.04/0.06초에 공급하고 각 장면 내부의 원본 후속 순서를 보존한다. 사용자 음성을 네 개 중첩시키는 시험은 아니다. 네 장면이 각각 사용하는 두 Task를 pool의 여덟 slot에 배치하고 T보호와 background 한 Task의 두 slot을 유지해 **활성 최대 10개**다. CORE/REUSE는 이 pool의 필요한 slot만 해당 초기 사실로 복원한다. 완료된 관련 작업은 active slot에서 빠져 이력으로 남는다. 이 합성 replay suite의 slot은 현재 제시하는 scoped scene의 owner이며 10은 그 scene에서 동시에 처리하는 Task 상한이다. 완료되지 않은 질문/취소 접수는 먼저 원본 checkpoint/5초 늦은 사건 관찰을 충족한 뒤 scope를 닫고 원래 대기 상태/receipt를 그대로 활동 이력에 보존한다. 전체 미완료 Task를 10개로 자른다거나 외부 대기를 성공 완료로 바꾸는 실제 운용 정책은 아니다. 다음 scene의 before-state 복원과 구분하고 scope 회수 비용/peak도 센다.</a:t>
+            </a:r>
+          </a:p>
+          <a:p xmlns:a="http://schemas.openxmlformats.org/drawingml/2006/main">
+            <a:r>
+              <a:t/>
+            </a:r>
+          </a:p>
+          <a:p xmlns:a="http://schemas.openxmlformats.org/drawingml/2006/main">
+            <a:r>
+              <a:t>block의 마지막 BURST checkpoint 이후 B01~B04, B05~B08, …, B17~B20의 background 원본을 각각 한 번 `v1→v2` 갱신한다. 각 원본은 초기 30개 source 중 하나이며 locator와 권한은 그대로, 내용의 수치 한 곳만 1 증가한다. 입력 목록 순서로 0.01초 간격 제공하고 같은 block의 maintenance tick 두 개를 직렬 제공한다. 총 **20개 background 변경/10개 tick**이다. §3의 S2-03 등 내부 X 갱신은 이 20개와 별개로 이미 장면에 포함되며 별도 호출을 중복 청구하지 않는다. B5 마지막 갱신 뒤 B20의 제공 동의를 철회해 원문/파생/Context 신규 소비를 차단한다. 후보의 실제 생산/재해석/철회 비용은 모두 남긴다.</a:t>
+            </a:r>
+          </a:p>
+          <a:p xmlns:a="http://schemas.openxmlformats.org/drawingml/2006/main">
+            <a:r>
+              <a:t/>
+            </a:r>
+          </a:p>
+          <a:p xmlns:a="http://schemas.openxmlformats.org/drawingml/2006/main">
+            <a:r>
+              <a:t>R1/R2/R3는 동일 초기 자료를 가진 **세 독립 활동**이다. 대표 정확성/시간 표본은 결과 전에 지정한 **R1 CORE만** 읽는다. 다섯 block의 18개가 90회/540개, I/T 여섯 개가 각각 30개다. REUSE/BURST와 R2/R3의 실패/필수 위반은 별도 보호 근거로 전부 보고하며 대표 정확성 분모에 임의 가산하거나 가장 좋은 run으로 교체하지 않는다. 비용은 세 활동 전체의 평균, 메모리는 세 활동 전체의 최대다. 실제 세 run 없이 같은 계산을 복제해 반복 측정이라고 부르지 않는다.</a:t>
+            </a:r>
+          </a:p>
+          <a:p xmlns:a="http://schemas.openxmlformats.org/drawingml/2006/main">
+            <a:r>
+              <a:t/>
+            </a:r>
+          </a:p>
+          <a:p xmlns:a="http://schemas.openxmlformats.org/drawingml/2006/main">
+            <a:r>
+              <a:t>#### 8.0.4 초기 데이터, 복원과 동시 부하</a:t>
+            </a:r>
+          </a:p>
+          <a:p xmlns:a="http://schemas.openxmlformats.org/drawingml/2006/main">
+            <a:r>
+              <a:t/>
+            </a:r>
+          </a:p>
+          <a:p xmlns:a="http://schemas.openxmlformats.org/drawingml/2006/main">
+            <a:r>
+              <a:t>각 활동은 원천 대화 2,000turn/완료 Task 200개/문서와 일정 등 source 30개(전체 합성 payload 20MiB)에서 시작한다. 30개 source slot은 B01~B20과 C01~C10이다. Bnn의 제목은 `W100 background source Bnn`, v1의 `value=100+nn`, v2는 `101+nn`이며 read/모델 제공을 허용한다. C slot에는 해당 사례의 원본 D/Cal/표/E1을 namespace 대응으로 제공한다. background 대화 H0001~H2000은 시간순으로 `배경 기록 {id}: B{((id-1)%20)+1}@v1의 값은 {100+((id-1)%20)+1}이다`와 실제 전달 receipt를 갖는다. 완료 Task HT001~HT200은 같은 순환 B source의 read-only 값 조회이며 ACCEPTED→COMPLETED→실제 전달 원천 사실을 갖는다. 현재 요청과 의미 관계를 선결합하지 않는다. UTF-8 원본/turn/Task payload 합을 20×1,024×1,024byte로 맞추도록 미사용 B 본문에 공백을 채운다. DB/index/runtime의 물리적 추가 overhead는 별도 메모리다. 활성 Task 10은 초기 Task를 무조건 10개 더 넣는 뜻이 아니라 공통 pool의 상한이며 BURST의 8개 관련 Task+2개 보호/background로 최대 10개를 제공한다. 실제 과거 원문과 실제 전달/수정/허용 이력을 제공하고 현재 요청의 정답/파생 관계는 넣지 않는다. namespace 대응표는 source/Task 식별을 위한 fixture map이며 모델의 지칭/Task 정답으로 주지 않는다. 각 사례가 읽을 수 있는 scope/사실은 §3 명세 그대로다. 무관한 background 자료는 모델 의미 입력에 무제한 섞지 않지만 전체 이력/DB/copy 메모리에는 포함한다.</a:t>
+            </a:r>
+          </a:p>
+          <a:p xmlns:a="http://schemas.openxmlformats.org/drawingml/2006/main">
+            <a:r>
+              <a:t/>
+            </a:r>
+          </a:p>
+          <a:p xmlns:a="http://schemas.openxmlformats.org/drawingml/2006/main">
+            <a:r>
+              <a:t>CORE 전에 해당 논리적 초기 owner 사실을 복원하고 필요한 W 준비를 실제 후보 경로로 처리한다. 복원은 input fixture일 뿐 후보가 처리해야 할 결과를 대신하지 않는다. 후보가 낸 상태/오류를 완료 snapshot으로 덮어쓰지 않고 checkpoint와 tail을 검사한 뒤에만 다음 fixture로 진행한다. 초기/복원/생산의 청구와 일시적 old/new snapshot 이중 할당을 모두 세며 **각 block 완료 이력은 활동 끝까지 남긴다.** 같은 source hash/revision/permission에 한정한 REUSE cache는 허용한다. 충돌 namespace의 cache나 현재성 불일치는 무효화한다.</a:t>
+            </a:r>
+          </a:p>
+          <a:p xmlns:a="http://schemas.openxmlformats.org/drawingml/2006/main">
+            <a:r>
+              <a:t/>
+            </a:r>
+          </a:p>
+          <a:p xmlns:a="http://schemas.openxmlformats.org/drawingml/2006/main">
+            <a:r>
+              <a:t>cloud call의 동시 상한은 4개이며 양안에 같은 queue/취소/timeout 계약을 적용한다. 호출 4개를 강제로 만들어 메모리를 늘리지 않는다. capture의 제공 원본/보존 창은 최대 15개 RGBA frame이며 scene 내부의 시각/포인터/허용 규칙은 §3과 같다. 동시 할당과 준비를 비교할 수 있도록 초기화부터 마지막 신규 입력 이후까지 원장을 연다. 마지막 철회 뒤 신규 입력을 멈추고 처리 가능한 VIA job/queue를 최대 30초에 drain한다. 30초는 대표 요청 처리 예산 10초의 세 배로 회수 여유를 둔 작성자 보호 한도다. 외부 업무/미응답 질문의 정당한 대기 상태는 보존한다. drain 완료 뒤 10초 idle probe에 새 maintenance를 넣지 않는다. 10초/50ms는 최소 200개 시간 sample로 단기 회수/잔류 증가를 확인하기 위한 관측 가정이며 장시간 누수의 부재를 증명하지 않는다. 전체 기능 checkpoint/tail 누락 또는 필수 위반이 있으면 작은 비용/메모리도 목표 달성이 아니다.</a:t>
+            </a:r>
+          </a:p>
+          <a:p xmlns:a="http://schemas.openxmlformats.org/drawingml/2006/main">
+            <a:r>
+              <a:t/>
+            </a:r>
+          </a:p>
+          <a:p xmlns:a="http://schemas.openxmlformats.org/drawingml/2006/main">
+            <a:r>
+              <a:t>#### 8.0.5 공통 후속 사건과 QA별 관측</a:t>
+            </a:r>
+          </a:p>
+          <a:p xmlns:a="http://schemas.openxmlformats.org/drawingml/2006/main">
+            <a:r>
+              <a:t/>
+            </a:r>
+          </a:p>
+          <a:p xmlns:a="http://schemas.openxmlformats.org/drawingml/2006/main">
+            <a:r>
+              <a:t>| 연결 | 같은 장면의 공통 종료/tail | 읽는 지표 |</a:t>
+            </a:r>
+          </a:p>
+          <a:p xmlns:a="http://schemas.openxmlformats.org/drawingml/2006/main">
+            <a:r>
+              <a:t>| --- | --- | --- |</a:t>
+            </a:r>
+          </a:p>
+          <a:p xmlns:a="http://schemas.openxmlformats.org/drawingml/2006/main">
+            <a:r>
+              <a:t>| S1-01 / T-01 | 원본 한정 조회: 직접 또는 외부 접수+0.2초 날짜 결과. 별도 8초 결과를 만들지 않음 | 정확성 C6과 cycle 최종 전달 |</a:t>
+            </a:r>
+          </a:p>
+          <a:p xmlns:a="http://schemas.openxmlformats.org/drawingml/2006/main">
+            <a:r>
+              <a:t>| S1-02 / T-02 | 원본 접수 receipt로 C5/C6 채점한 뒤 실제 작성 접수+8초에 ReportQ3@v1 결과 | 전체 cycle, 청구/할당 |</a:t>
+            </a:r>
+          </a:p>
+          <a:p xmlns:a="http://schemas.openxmlformats.org/drawingml/2006/main">
+            <a:r>
+              <a:t>| S2-02 / T-03 | 원본 준비 5초/접수 checkpoint 뒤 Proposal@v1 결과를 접수+8초에 반환 | cycle은 현재 발화부터, 자원은 과거 준비도 포함 |</a:t>
+            </a:r>
+          </a:p>
+          <a:p xmlns:a="http://schemas.openxmlformats.org/drawingml/2006/main">
+            <a:r>
+              <a:t>| S3-02 / T-04 | 현재 K현재 요약과 중복 처리 원본 유지, 실제 SEND 접수+8초 MailCurrent@v1:SENT | cycle은 현재 요약→전송→확인, 중복 effect 금지 |</a:t>
+            </a:r>
+          </a:p>
+          <a:p xmlns:a="http://schemas.openxmlformats.org/drawingml/2006/main">
+            <a:r>
+              <a:t>| S4-01 / I-02 / T-05 | 원본 정정 접수/메일 유지 checkpoint 이후 변경 접수+8초 ReportRevised@v2 결과 | 같은 정정의 첫 반응과 최종 전달을 각각 관측 |</a:t>
+            </a:r>
+          </a:p>
+          <a:p xmlns:a="http://schemas.openxmlformats.org/drawingml/2006/main">
+            <a:r>
+              <a:t>| S6-01 / T-06 | 원본 실제 확인 질문+1초에 3초 답변. 실제 유효 수정 접수+8초 ConfirmedRevision@v2 결과 | 사람 기다림/외부 업무만 제외한 cycle |</a:t>
+            </a:r>
+          </a:p>
+          <a:p xmlns:a="http://schemas.openxmlformats.org/drawingml/2006/main">
+            <a:r>
+              <a:t>| S2-03 | 원본 v1 지정 표 작성 접수 뒤 실제 접수+8초 결과(TablePast@v1) | 대표 T 없음, 비용/메모리와 기능 보호에는 포함 |</a:t>
+            </a:r>
+          </a:p>
+          <a:p xmlns:a="http://schemas.openxmlformats.org/drawingml/2006/main">
+            <a:r>
+              <a:t>| 나머지 11개 사례 | §3의 실제 조회/선호/제어/질문/결과/승인 범위/거부 checkpoint가 그 장면의 끝. 취소 접수는 완료 취소가 아니며 기다리는 질문을 임의 답변하지 않음 | C6와 지정 I, 전체 청구/할당 |</a:t>
+            </a:r>
+          </a:p>
+          <a:p xmlns:a="http://schemas.openxmlformats.org/drawingml/2006/main">
+            <a:r>
+              <a:t/>
+            </a:r>
+          </a:p>
+          <a:p xmlns:a="http://schemas.openxmlformats.org/drawingml/2006/main">
+            <a:r>
+              <a:t>위 tail은 모든 CORE/REUSE/BURST와 모든 run/QA에 공통이다. 최종 payload/source/version/허용과 실제 전달을 검사하며 접수 인사를 최종 결과로 세지 않는다. 정확성의 기존 108개 정답 명세는 해당 checkpoint에서 보존하고 tail 실패는 cycle/resource/필수 기능 보호에 기록한다. 각 관측은 `run/block/occurrence/case/source-vector/checkpoint/tail/I/T`를 동일 원장 key로 조인한다. QA-05 변경의 완료 검사도 이 기능/상태/권한 회귀와 W100의 사용량/동시성/보관 계약을 유지하는지 확인한다. 390장면 모두를 정확성 대표 분모로 키우지 않는다.</a:t>
+            </a:r>
+          </a:p>
+          <a:p xmlns:a="http://schemas.openxmlformats.org/drawingml/2006/main">
+            <a:r>
+              <a:t/>
+            </a:r>
+          </a:p>
+          <a:p xmlns:a="http://schemas.openxmlformats.org/drawingml/2006/main">
+            <a:r>
+              <a:t/>
+            </a:r>
+          </a:p>
+          <a:p xmlns:a="http://schemas.openxmlformats.org/drawingml/2006/main">
+            <a:r>
+              <a:t/>
+            </a:r>
+          </a:p>
+          <a:p xmlns:a="http://schemas.openxmlformats.org/drawingml/2006/main">
+            <a:r>
+              <a:t>등급은 원지표를 표시하는 작성자 규칙이며 QA 간 합산하지 않음. 측정 전에는 점수를 생성하지 않음.</a:t>
+            </a:r>
+          </a:p>
+        </p:txBody>
+      </p:sp>
+      <p:sp>
+        <p:nvSpPr>
+          <p:cNvPr id="4" name="Slide Number Placeholder 3"/>
+          <p:cNvSpPr>
+            <a:spLocks xmlns:a="http://schemas.openxmlformats.org/drawingml/2006/main" noGrp="1"/>
+          </p:cNvSpPr>
+          <p:nvPr>
+            <p:ph type="sldNum" idx="5"/>
+          </p:nvPr>
+        </p:nvSpPr>
+        <p:spPr/>
+        <p:txBody>
+          <a:bodyPr xmlns:a="http://schemas.openxmlformats.org/drawingml/2006/main"/>
+          <a:lstStyle xmlns:a="http://schemas.openxmlformats.org/drawingml/2006/main"/>
+          <a:p xmlns:a="http://schemas.openxmlformats.org/drawingml/2006/main"/>
+        </p:txBody>
+      </p:sp>
+    </p:spTree>
+  </p:cSld>
+  <p:clrMapOvr>
+    <a:masterClrMapping xmlns:a="http://schemas.openxmlformats.org/drawingml/2006/main"/>
+  </p:clrMapOvr>
+</p:notes>
+</file>
+
+<file path=ppt/notesSlides/notesSlide3.xml><?xml version="1.0" encoding="utf-8"?>
+<p:notes xmlns:p="http://schemas.openxmlformats.org/presentationml/2006/main">
+  <p:cSld>
+    <p:spTree>
+      <p:nvGrpSpPr>
+        <p:cNvPr id="1" name=""/>
+        <p:cNvGrpSpPr/>
+        <p:nvPr/>
+      </p:nvGrpSpPr>
+      <p:grpSpPr>
+        <a:xfrm xmlns:a="http://schemas.openxmlformats.org/drawingml/2006/main"/>
+      </p:grpSpPr>
+      <p:sp>
+        <p:nvSpPr>
+          <p:cNvPr id="2" name="Slide Image Placeholder 1"/>
+          <p:cNvSpPr>
+            <a:spLocks xmlns:a="http://schemas.openxmlformats.org/drawingml/2006/main" noGrp="1"/>
+          </p:cNvSpPr>
+          <p:nvPr>
+            <p:ph type="sldImg" idx="0"/>
+          </p:nvPr>
+        </p:nvSpPr>
+        <p:spPr/>
+      </p:sp>
+      <p:sp>
+        <p:nvSpPr>
+          <p:cNvPr id="3" name="Notes Placeholder 2"/>
+          <p:cNvSpPr>
+            <a:spLocks xmlns:a="http://schemas.openxmlformats.org/drawingml/2006/main" noGrp="1"/>
+          </p:cNvSpPr>
+          <p:nvPr>
+            <p:ph type="body" idx="1"/>
+          </p:nvPr>
+        </p:nvSpPr>
+        <p:spPr/>
+        <p:txBody>
+          <a:bodyPr xmlns:a="http://schemas.openxmlformats.org/drawingml/2006/main"/>
+          <a:lstStyle xmlns:a="http://schemas.openxmlformats.org/drawingml/2006/main"/>
+          <a:p xmlns:a="http://schemas.openxmlformats.org/drawingml/2006/main">
+            <a:r>
+              <a:t>원본: docs/architecture/12-decisions/decision-packages/03-02-quality-attribute-definitions.md</a:t>
+            </a:r>
+          </a:p>
+          <a:p xmlns:a="http://schemas.openxmlformats.org/drawingml/2006/main">
+            <a:r>
+              <a:t>계약: ASR-QA-v5</a:t>
+            </a:r>
+          </a:p>
+          <a:p xmlns:a="http://schemas.openxmlformats.org/drawingml/2006/main">
+            <a:r>
+              <a:t>공통 활동: W100 사용자 100/Agent 30장면, 5block, 3 독립 run</a:t>
+            </a:r>
+          </a:p>
+          <a:p xmlns:a="http://schemas.openxmlformats.org/drawingml/2006/main">
+            <a:r>
+              <a:t>활동 SHA-256: 911ce3ae13588c27b6902a5a0abb17714c4059a9a80bceaa890c1dfb3e26eb7f</a:t>
+            </a:r>
+          </a:p>
+          <a:p xmlns:a="http://schemas.openxmlformats.org/drawingml/2006/main">
+            <a:r>
+              <a:t>작성일: 2026-10-11</a:t>
+            </a:r>
+          </a:p>
+          <a:p xmlns:a="http://schemas.openxmlformats.org/drawingml/2006/main">
+            <a:r>
+              <a:t>원본 SHA-256: 0e304faddf43b212900ce12f712a1d5cad5bd3cf601bc77a94f3f267d5fa2933</a:t>
+            </a:r>
+          </a:p>
+          <a:p xmlns:a="http://schemas.openxmlformats.org/drawingml/2006/main">
+            <a:r>
+              <a:t>우선순위: ASR-QA-01부터 번호순. 목표는 작성자 PoC 예산이며 실제 제품/모델/Windows 성능 결과가 아님. 제공한 PNG 레퍼런스의 스타일만 적용하고 타 과제의 요구/수치는 가져오지 않음.</a:t>
+            </a:r>
+          </a:p>
+          <a:p xmlns:a="http://schemas.openxmlformats.org/drawingml/2006/main">
+            <a:r>
+              <a:t/>
+            </a:r>
+          </a:p>
+          <a:p xmlns:a="http://schemas.openxmlformats.org/drawingml/2006/main">
+            <a:r>
+              <a:t/>
+            </a:r>
+          </a:p>
+          <a:p xmlns:a="http://schemas.openxmlformats.org/drawingml/2006/main">
+            <a:r>
+              <a:t>공통 활동 상세 §8.0</a:t>
+            </a:r>
+          </a:p>
+          <a:p xmlns:a="http://schemas.openxmlformats.org/drawingml/2006/main">
+            <a:r>
+              <a:t>공통 PoC 환경과 A/B 비교 방법</a:t>
+            </a:r>
+          </a:p>
+          <a:p xmlns:a="http://schemas.openxmlformats.org/drawingml/2006/main">
+            <a:r>
+              <a:t/>
+            </a:r>
+          </a:p>
+          <a:p xmlns:a="http://schemas.openxmlformats.org/drawingml/2006/main">
+            <a:r>
+              <a:t>공통 입력/원천 사건/후보/모델 조건은 여섯 QA에 공유하고, 각 QA의 분모/시간/금액/변경/메모리 경계는 §3~7의 완료 정의를 따른다. 공통 전사/장치 replay를 실제 ASR 정확도나 물리 장치 응답시간 실측으로 해석하지 않는다.</a:t>
+            </a:r>
+          </a:p>
+          <a:p xmlns:a="http://schemas.openxmlformats.org/drawingml/2006/main">
+            <a:r>
+              <a:t/>
+            </a:r>
+          </a:p>
+          <a:p xmlns:a="http://schemas.openxmlformats.org/drawingml/2006/main">
+            <a:r>
+              <a:t>### 8.0 공통 활동 W100: 사용량과 관측 대응</a:t>
+            </a:r>
+          </a:p>
+          <a:p xmlns:a="http://schemas.openxmlformats.org/drawingml/2006/main">
+            <a:r>
+              <a:t/>
+            </a:r>
+          </a:p>
+          <a:p xmlns:a="http://schemas.openxmlformats.org/drawingml/2006/main">
+            <a:r>
+              <a:t>#### 8.0.1 사용량을 정의하는 이유와 범위</a:t>
+            </a:r>
+          </a:p>
+          <a:p xmlns:a="http://schemas.openxmlformats.org/drawingml/2006/main">
+            <a:r>
+              <a:t/>
+            </a:r>
+          </a:p>
+          <a:p xmlns:a="http://schemas.openxmlformats.org/drawingml/2006/main">
+            <a:r>
+              <a:t>**W100은 기존 18개 사례로 구성한 합성 표준 활동이다.** 사용자의 실제 일일 빈도 자료가 없는 PoC에서 A/B가 같은 기능과 부하를 처리하도록 평가용 사용량을 명시했다. 100은 사용자 입력 장면 수다. 신규 업무/조회뿐 아니라 정정/취소/확인/재연결이 들어간다. Agent가 먼저 질문/결과를 보내는 장면은 별도로 30건이다. S5-03은 Agent 결과로 시작하지만 재연결한 사용자의 명시적 조회 발화가 있으므로 사용량 원장에서는 사용자 장면 1건이다. S6의 계획된 답변은 그 장면 내부 후속 발화이며 장면을 추가하지 않는다.</a:t>
+            </a:r>
+          </a:p>
+          <a:p xmlns:a="http://schemas.openxmlformats.org/drawingml/2006/main">
+            <a:r>
+              <a:t/>
+            </a:r>
+          </a:p>
+          <a:p xmlns:a="http://schemas.openxmlformats.org/drawingml/2006/main">
+            <a:r>
+              <a:t>원천은 §3의 18개 초기 상황/입력/경쟁 사건/정답과 아래 공통 lifecycle tail이다. **QA별로 다른 업무나 외부 결과를 만들지 않는다.** 평가 관측 단위가 다르므로 모든 QA의 분모가 같을 필요는 없다. 정확성은 조건, 시간은 사건 경계, 비용은 활동 전체 청구, 메모리는 활동 전체 동시 할당을 읽는다. 변경 용이성은 여섯 구조 변경 과제이며 변경 뒤 같은 기능/활동 계약을 유지한다.</a:t>
+            </a:r>
+          </a:p>
+          <a:p xmlns:a="http://schemas.openxmlformats.org/drawingml/2006/main">
+            <a:r>
+              <a:t/>
+            </a:r>
+          </a:p>
+          <a:p xmlns:a="http://schemas.openxmlformats.org/drawingml/2006/main">
+            <a:r>
+              <a:t>[공통 활동 입력](./03-02-common-workload.json)은 이 절의 machine-readable 사용량/음성/호출 예산이고 [사건 목록](./03-02-workload-manifest.json)은 각 장면의 case/hash/CORE 여부/I/T 연결을 130행으로 생성한다. [활동 검산기](../../../../scripts/architecture/qa_common_workload.py)는 입력 목록을 컴파일할 뿐 후보/harness/API를 실행하지 않는다. 참조 계산과 두 발표자료도 같은 원본/manifest hash를 사용한다.</a:t>
+            </a:r>
+          </a:p>
+          <a:p xmlns:a="http://schemas.openxmlformats.org/drawingml/2006/main">
+            <a:r>
+              <a:t/>
+            </a:r>
+          </a:p>
+          <a:p xmlns:a="http://schemas.openxmlformats.org/drawingml/2006/main">
+            <a:r>
+              <a:t>#### 8.0.2 사례별 횟수와 음성 길이</a:t>
+            </a:r>
+          </a:p>
+          <a:p xmlns:a="http://schemas.openxmlformats.org/drawingml/2006/main">
+            <a:r>
+              <a:t/>
+            </a:r>
+          </a:p>
+          <a:p xmlns:a="http://schemas.openxmlformats.org/drawingml/2006/main">
+            <a:r>
+              <a:t>| 원본 사례 | W100 횟수 | 입력 장면 분류 | 최초 발화 초/회 | 지정 답변 초/회 | 출력 음성 예산 초/회 | 반응 관측 | 사이클 관측 |</a:t>
+            </a:r>
+          </a:p>
+          <a:p xmlns:a="http://schemas.openxmlformats.org/drawingml/2006/main">
+            <a:r>
+              <a:t>| --- | --- | --- | --- | --- | --- | --- | --- |</a:t>
+            </a:r>
+          </a:p>
+          <a:p xmlns:a="http://schemas.openxmlformats.org/drawingml/2006/main">
+            <a:r>
+              <a:t>| S1-01 | 8 | 사용자 | 2 | 0 | 3 | 없음 | T-01 |</a:t>
+            </a:r>
+          </a:p>
+          <a:p xmlns:a="http://schemas.openxmlformats.org/drawingml/2006/main">
+            <a:r>
+              <a:t>| S1-02 | 8 | 사용자 | 3 | 0 | 8 | 없음 | T-02 |</a:t>
+            </a:r>
+          </a:p>
+          <a:p xmlns:a="http://schemas.openxmlformats.org/drawingml/2006/main">
+            <a:r>
+              <a:t>| S1-03 | 8 | 사용자 | 3 | 0 | 4 | 없음 | 없음 |</a:t>
+            </a:r>
+          </a:p>
+          <a:p xmlns:a="http://schemas.openxmlformats.org/drawingml/2006/main">
+            <a:r>
+              <a:t>| S2-01 | 8 | 사용자 | 2 | 0 | 5 | 없음 | 없음 |</a:t>
+            </a:r>
+          </a:p>
+          <a:p xmlns:a="http://schemas.openxmlformats.org/drawingml/2006/main">
+            <a:r>
+              <a:t>| S2-02 | 8 | 사용자 | 3 | 0 | 18 | 없음 | T-03 |</a:t>
+            </a:r>
+          </a:p>
+          <a:p xmlns:a="http://schemas.openxmlformats.org/drawingml/2006/main">
+            <a:r>
+              <a:t>| S2-03 | 8 | 사용자 | 2 | 0 | 4 | 없음 | 없음 |</a:t>
+            </a:r>
+          </a:p>
+          <a:p xmlns:a="http://schemas.openxmlformats.org/drawingml/2006/main">
+            <a:r>
+              <a:t>| S3-01 | 5 | 사용자 | 3 | 0 | 6 | 없음 | 없음 |</a:t>
+            </a:r>
+          </a:p>
+          <a:p xmlns:a="http://schemas.openxmlformats.org/drawingml/2006/main">
+            <a:r>
+              <a:t>| S3-02 | 5 | 사용자 | 3 | 0 | 10 | 없음 | T-04 |</a:t>
+            </a:r>
+          </a:p>
+          <a:p xmlns:a="http://schemas.openxmlformats.org/drawingml/2006/main">
+            <a:r>
+              <a:t>| S3-03 | 5 | 사용자 | 3 | 0 | 6 | 없음 | 없음 |</a:t>
+            </a:r>
+          </a:p>
+          <a:p xmlns:a="http://schemas.openxmlformats.org/drawingml/2006/main">
+            <a:r>
+              <a:t>| S4-01 | 5 | 사용자 | 2 | 0 | 9 | I-02 | T-05 |</a:t>
+            </a:r>
+          </a:p>
+          <a:p xmlns:a="http://schemas.openxmlformats.org/drawingml/2006/main">
+            <a:r>
+              <a:t>| S4-02 | 5 | 사용자 | 2 | 0 | 8 | I-01 | 없음 |</a:t>
+            </a:r>
+          </a:p>
+          <a:p xmlns:a="http://schemas.openxmlformats.org/drawingml/2006/main">
+            <a:r>
+              <a:t>| S4-03 | 5 | 사용자 | 2 | 0 | 5 | I-03 | 없음 |</a:t>
+            </a:r>
+          </a:p>
+          <a:p xmlns:a="http://schemas.openxmlformats.org/drawingml/2006/main">
+            <a:r>
+              <a:t>| S5-01 | 15 | Agent | 0 | 0 | 5 | I-04 | 없음 |</a:t>
+            </a:r>
+          </a:p>
+          <a:p xmlns:a="http://schemas.openxmlformats.org/drawingml/2006/main">
+            <a:r>
+              <a:t>| S5-02 | 15 | Agent | 0 | 0 | 6 | I-05 | 없음 |</a:t>
+            </a:r>
+          </a:p>
+          <a:p xmlns:a="http://schemas.openxmlformats.org/drawingml/2006/main">
+            <a:r>
+              <a:t>| S5-03 | 7 | 사용자 | 2 | 0 | 4 | 없음 | 없음 |</a:t>
+            </a:r>
+          </a:p>
+          <a:p xmlns:a="http://schemas.openxmlformats.org/drawingml/2006/main">
+            <a:r>
+              <a:t>| S6-01 | 5 | 사용자 | 2 | 3 | 14 | 없음 | T-06 |</a:t>
+            </a:r>
+          </a:p>
+          <a:p xmlns:a="http://schemas.openxmlformats.org/drawingml/2006/main">
+            <a:r>
+              <a:t>| S6-02 | 5 | 사용자 | 1 | 3 | 14 | 없음 | 없음 |</a:t>
+            </a:r>
+          </a:p>
+          <a:p xmlns:a="http://schemas.openxmlformats.org/drawingml/2006/main">
+            <a:r>
+              <a:t>| S6-03 | 5 | 사용자 | 2 | 0 | 5 | I-06 | 없음 |</a:t>
+            </a:r>
+          </a:p>
+          <a:p xmlns:a="http://schemas.openxmlformats.org/drawingml/2006/main">
+            <a:r>
+              <a:t/>
+            </a:r>
+          </a:p>
+          <a:p xmlns:a="http://schemas.openxmlformats.org/drawingml/2006/main">
+            <a:r>
+              <a:t>사용자 장면 합 100, Agent 장면 합 30이다. 최초 입력의 replay 길이는 §3 사건 구간으로 정한 **fixture 조건**이고 합 234초다. S6-01/02 각 5회의 후속 답변 3초를 더해 계획된 입력은 **110발화/264초**다. 추가 확인은 §3 공통 답변 정책대로 공급하고 실제 청구를 더한다. S5-03의 2초 재연결 요청은 최초 발화 열에 이미 포함했다.</a:t>
+            </a:r>
+          </a:p>
+          <a:p xmlns:a="http://schemas.openxmlformats.org/drawingml/2006/main">
+            <a:r>
+              <a:t/>
+            </a:r>
+          </a:p>
+          <a:p xmlns:a="http://schemas.openxmlformats.org/drawingml/2006/main">
+            <a:r>
+              <a:t>출력 길이는 **작성자의 참조 예산**이며 모델 성능/자연 발화 길이 보장이 아니다. 위 표의 필수 사실 전달과 공통 tail을 합해 914초다. S2-02 18초는 과거의 실제 재생 설명 8초와 현재 접수/결과 10초, S4-02 8초는 중단 전 재생 4초와 새 설명 4초를 포함한다. S6-01/02 14초는 확인 질문과 허용 범위/결과 전달의 합이다. 나머지는 해당 C6 사실과 tail 전달의 총 길이 예산이다. 실제 모델 생성/재생/폐기 청구량을 예산값으로 덮어쓰지 않는다. Text 표시 길이와 음성 시간의 임의 token 환산도 하지 않는다.</a:t>
+            </a:r>
+          </a:p>
+          <a:p xmlns:a="http://schemas.openxmlformats.org/drawingml/2006/main">
+            <a:r>
+              <a:t/>
+            </a:r>
+          </a:p>
+          <a:p xmlns:a="http://schemas.openxmlformats.org/drawingml/2006/main">
+            <a:r>
+              <a:t>#### 8.0.3 다섯 block의 입력 순서와 관측 선택</a:t>
+            </a:r>
+          </a:p>
+          <a:p xmlns:a="http://schemas.openxmlformats.org/drawingml/2006/main">
+            <a:r>
+              <a:t/>
+            </a:r>
+          </a:p>
+          <a:p xmlns:a="http://schemas.openxmlformats.org/drawingml/2006/main">
+            <a:r>
+              <a:t>각 block은 **CORE 18장면 + REUSE 4장면 + BURST 4장면 = 26장면**이다. 다섯 block이 사용자 100/Agent 30의 130장면을 만든다. CORE는 S1-01부터 S6-03까지 위 표 순서로 각 한 번이다. 각 장면은 필수 checkpoint와 tail까지 진행한 뒤 다음 장면을 시작한다. 아래 REUSE는 같은 block에서 이미 허용된 원본 version/제공 권한을 확인한 뒤 재사용한다. 기존 현재 Task를 임의 정답으로 배치하지 않고 요청 ID/외부 실행 ID는 occurrence namespace로 구별한다.</a:t>
+            </a:r>
+          </a:p>
+          <a:p xmlns:a="http://schemas.openxmlformats.org/drawingml/2006/main">
+            <a:r>
+              <a:t/>
+            </a:r>
+          </a:p>
+          <a:p xmlns:a="http://schemas.openxmlformats.org/drawingml/2006/main">
+            <a:r>
+              <a:t>| block | REUSE 네 장면 순서 | BURST 네 장면 순서 |</a:t>
+            </a:r>
+          </a:p>
+          <a:p xmlns:a="http://schemas.openxmlformats.org/drawingml/2006/main">
+            <a:r>
+              <a:t>| --- | --- | --- |</a:t>
+            </a:r>
+          </a:p>
+          <a:p xmlns:a="http://schemas.openxmlformats.org/drawingml/2006/main">
+            <a:r>
+              <a:t>| B1 | S1-01, S1-02, S2-01, S2-02 | S5-01, S5-02, S5-01, S5-02 |</a:t>
+            </a:r>
+          </a:p>
+          <a:p xmlns:a="http://schemas.openxmlformats.org/drawingml/2006/main">
+            <a:r>
+              <a:t>| B2 | S1-01, S1-03, S2-01, S2-03 | 동일 |</a:t>
+            </a:r>
+          </a:p>
+          <a:p xmlns:a="http://schemas.openxmlformats.org/drawingml/2006/main">
+            <a:r>
+              <a:t>| B3 | S1-02, S1-03, S2-02, S2-03 | 동일 |</a:t>
+            </a:r>
+          </a:p>
+          <a:p xmlns:a="http://schemas.openxmlformats.org/drawingml/2006/main">
+            <a:r>
+              <a:t>| B4 | S1-01, S1-02, S2-01, S2-02 | 동일 |</a:t>
+            </a:r>
+          </a:p>
+          <a:p xmlns:a="http://schemas.openxmlformats.org/drawingml/2006/main">
+            <a:r>
+              <a:t>| B5 | S1-03, S2-03, S5-03, S5-03 | 동일 |</a:t>
+            </a:r>
+          </a:p>
+          <a:p xmlns:a="http://schemas.openxmlformats.org/drawingml/2006/main">
+            <a:r>
+              <a:t/>
+            </a:r>
+          </a:p>
+          <a:p xmlns:a="http://schemas.openxmlformats.org/drawingml/2006/main">
+            <a:r>
+              <a:t>BURST의 네 Agent 장면 최초 원천 사건을 상대 0/0.02/0.04/0.06초에 공급하고 각 장면 내부의 원본 후속 순서를 보존한다. 사용자 음성을 네 개 중첩시키는 시험은 아니다. 네 장면이 각각 사용하는 두 Task를 pool의 여덟 slot에 배치하고 T보호와 background 한 Task의 두 slot을 유지해 **활성 최대 10개**다. CORE/REUSE는 이 pool의 필요한 slot만 해당 초기 사실로 복원한다. 완료된 관련 작업은 active slot에서 빠져 이력으로 남는다. 이 합성 replay suite의 slot은 현재 제시하는 scoped scene의 owner이며 10은 그 scene에서 동시에 처리하는 Task 상한이다. 완료되지 않은 질문/취소 접수는 먼저 원본 checkpoint/5초 늦은 사건 관찰을 충족한 뒤 scope를 닫고 원래 대기 상태/receipt를 그대로 활동 이력에 보존한다. 전체 미완료 Task를 10개로 자른다거나 외부 대기를 성공 완료로 바꾸는 실제 운용 정책은 아니다. 다음 scene의 before-state 복원과 구분하고 scope 회수 비용/peak도 센다.</a:t>
+            </a:r>
+          </a:p>
+          <a:p xmlns:a="http://schemas.openxmlformats.org/drawingml/2006/main">
+            <a:r>
+              <a:t/>
+            </a:r>
+          </a:p>
+          <a:p xmlns:a="http://schemas.openxmlformats.org/drawingml/2006/main">
+            <a:r>
+              <a:t>block의 마지막 BURST checkpoint 이후 B01~B04, B05~B08, …, B17~B20의 background 원본을 각각 한 번 `v1→v2` 갱신한다. 각 원본은 초기 30개 source 중 하나이며 locator와 권한은 그대로, 내용의 수치 한 곳만 1 증가한다. 입력 목록 순서로 0.01초 간격 제공하고 같은 block의 maintenance tick 두 개를 직렬 제공한다. 총 **20개 background 변경/10개 tick**이다. §3의 S2-03 등 내부 X 갱신은 이 20개와 별개로 이미 장면에 포함되며 별도 호출을 중복 청구하지 않는다. B5 마지막 갱신 뒤 B20의 제공 동의를 철회해 원문/파생/Context 신규 소비를 차단한다. 후보의 실제 생산/재해석/철회 비용은 모두 남긴다.</a:t>
+            </a:r>
+          </a:p>
+          <a:p xmlns:a="http://schemas.openxmlformats.org/drawingml/2006/main">
+            <a:r>
+              <a:t/>
+            </a:r>
+          </a:p>
+          <a:p xmlns:a="http://schemas.openxmlformats.org/drawingml/2006/main">
+            <a:r>
+              <a:t>R1/R2/R3는 동일 초기 자료를 가진 **세 독립 활동**이다. 대표 정확성/시간 표본은 결과 전에 지정한 **R1 CORE만** 읽는다. 다섯 block의 18개가 90회/540개, I/T 여섯 개가 각각 30개다. REUSE/BURST와 R2/R3의 실패/필수 위반은 별도 보호 근거로 전부 보고하며 대표 정확성 분모에 임의 가산하거나 가장 좋은 run으로 교체하지 않는다. 비용은 세 활동 전체의 평균, 메모리는 세 활동 전체의 최대다. 실제 세 run 없이 같은 계산을 복제해 반복 측정이라고 부르지 않는다.</a:t>
+            </a:r>
+          </a:p>
+          <a:p xmlns:a="http://schemas.openxmlformats.org/drawingml/2006/main">
+            <a:r>
+              <a:t/>
+            </a:r>
+          </a:p>
+          <a:p xmlns:a="http://schemas.openxmlformats.org/drawingml/2006/main">
+            <a:r>
+              <a:t>#### 8.0.4 초기 데이터, 복원과 동시 부하</a:t>
+            </a:r>
+          </a:p>
+          <a:p xmlns:a="http://schemas.openxmlformats.org/drawingml/2006/main">
+            <a:r>
+              <a:t/>
+            </a:r>
+          </a:p>
+          <a:p xmlns:a="http://schemas.openxmlformats.org/drawingml/2006/main">
+            <a:r>
+              <a:t>각 활동은 원천 대화 2,000turn/완료 Task 200개/문서와 일정 등 source 30개(전체 합성 payload 20MiB)에서 시작한다. 30개 source slot은 B01~B20과 C01~C10이다. Bnn의 제목은 `W100 background source Bnn`, v1의 `value=100+nn`, v2는 `101+nn`이며 read/모델 제공을 허용한다. C slot에는 해당 사례의 원본 D/Cal/표/E1을 namespace 대응으로 제공한다. background 대화 H0001~H2000은 시간순으로 `배경 기록 {id}: B{((id-1)%20)+1}@v1의 값은 {100+((id-1)%20)+1}이다`와 실제 전달 receipt를 갖는다. 완료 Task HT001~HT200은 같은 순환 B source의 read-only 값 조회이며 ACCEPTED→COMPLETED→실제 전달 원천 사실을 갖는다. 현재 요청과 의미 관계를 선결합하지 않는다. UTF-8 원본/turn/Task payload 합을 20×1,024×1,024byte로 맞추도록 미사용 B 본문에 공백을 채운다. DB/index/runtime의 물리적 추가 overhead는 별도 메모리다. 활성 Task 10은 초기 Task를 무조건 10개 더 넣는 뜻이 아니라 공통 pool의 상한이며 BURST의 8개 관련 Task+2개 보호/background로 최대 10개를 제공한다. 실제 과거 원문과 실제 전달/수정/허용 이력을 제공하고 현재 요청의 정답/파생 관계는 넣지 않는다. namespace 대응표는 source/Task 식별을 위한 fixture map이며 모델의 지칭/Task 정답으로 주지 않는다. 각 사례가 읽을 수 있는 scope/사실은 §3 명세 그대로다. 무관한 background 자료는 모델 의미 입력에 무제한 섞지 않지만 전체 이력/DB/copy 메모리에는 포함한다.</a:t>
+            </a:r>
+          </a:p>
+          <a:p xmlns:a="http://schemas.openxmlformats.org/drawingml/2006/main">
+            <a:r>
+              <a:t/>
+            </a:r>
+          </a:p>
+          <a:p xmlns:a="http://schemas.openxmlformats.org/drawingml/2006/main">
+            <a:r>
+              <a:t>CORE 전에 해당 논리적 초기 owner 사실을 복원하고 필요한 W 준비를 실제 후보 경로로 처리한다. 복원은 input fixture일 뿐 후보가 처리해야 할 결과를 대신하지 않는다. 후보가 낸 상태/오류를 완료 snapshot으로 덮어쓰지 않고 checkpoint와 tail을 검사한 뒤에만 다음 fixture로 진행한다. 초기/복원/생산의 청구와 일시적 old/new snapshot 이중 할당을 모두 세며 **각 block 완료 이력은 활동 끝까지 남긴다.** 같은 source hash/revision/permission에 한정한 REUSE cache는 허용한다. 충돌 namespace의 cache나 현재성 불일치는 무효화한다.</a:t>
+            </a:r>
+          </a:p>
+          <a:p xmlns:a="http://schemas.openxmlformats.org/drawingml/2006/main">
+            <a:r>
+              <a:t/>
+            </a:r>
+          </a:p>
+          <a:p xmlns:a="http://schemas.openxmlformats.org/drawingml/2006/main">
+            <a:r>
+              <a:t>cloud call의 동시 상한은 4개이며 양안에 같은 queue/취소/timeout 계약을 적용한다. 호출 4개를 강제로 만들어 메모리를 늘리지 않는다. capture의 제공 원본/보존 창은 최대 15개 RGBA frame이며 scene 내부의 시각/포인터/허용 규칙은 §3과 같다. 동시 할당과 준비를 비교할 수 있도록 초기화부터 마지막 신규 입력 이후까지 원장을 연다. 마지막 철회 뒤 신규 입력을 멈추고 처리 가능한 VIA job/queue를 최대 30초에 drain한다. 30초는 대표 요청 처리 예산 10초의 세 배로 회수 여유를 둔 작성자 보호 한도다. 외부 업무/미응답 질문의 정당한 대기 상태는 보존한다. drain 완료 뒤 10초 idle probe에 새 maintenance를 넣지 않는다. 10초/50ms는 최소 200개 시간 sample로 단기 회수/잔류 증가를 확인하기 위한 관측 가정이며 장시간 누수의 부재를 증명하지 않는다. 전체 기능 checkpoint/tail 누락 또는 필수 위반이 있으면 작은 비용/메모리도 목표 달성이 아니다.</a:t>
+            </a:r>
+          </a:p>
+          <a:p xmlns:a="http://schemas.openxmlformats.org/drawingml/2006/main">
+            <a:r>
+              <a:t/>
+            </a:r>
+          </a:p>
+          <a:p xmlns:a="http://schemas.openxmlformats.org/drawingml/2006/main">
+            <a:r>
+              <a:t>#### 8.0.5 공통 후속 사건과 QA별 관측</a:t>
+            </a:r>
+          </a:p>
+          <a:p xmlns:a="http://schemas.openxmlformats.org/drawingml/2006/main">
+            <a:r>
+              <a:t/>
+            </a:r>
+          </a:p>
+          <a:p xmlns:a="http://schemas.openxmlformats.org/drawingml/2006/main">
+            <a:r>
+              <a:t>| 연결 | 같은 장면의 공통 종료/tail | 읽는 지표 |</a:t>
+            </a:r>
+          </a:p>
+          <a:p xmlns:a="http://schemas.openxmlformats.org/drawingml/2006/main">
+            <a:r>
+              <a:t>| --- | --- | --- |</a:t>
+            </a:r>
+          </a:p>
+          <a:p xmlns:a="http://schemas.openxmlformats.org/drawingml/2006/main">
+            <a:r>
+              <a:t>| S1-01 / T-01 | 원본 한정 조회: 직접 또는 외부 접수+0.2초 날짜 결과. 별도 8초 결과를 만들지 않음 | 정확성 C6과 cycle 최종 전달 |</a:t>
+            </a:r>
+          </a:p>
+          <a:p xmlns:a="http://schemas.openxmlformats.org/drawingml/2006/main">
+            <a:r>
+              <a:t>| S1-02 / T-02 | 원본 접수 receipt로 C5/C6 채점한 뒤 실제 작성 접수+8초에 ReportQ3@v1 결과 | 전체 cycle, 청구/할당 |</a:t>
+            </a:r>
+          </a:p>
+          <a:p xmlns:a="http://schemas.openxmlformats.org/drawingml/2006/main">
+            <a:r>
+              <a:t>| S2-02 / T-03 | 원본 준비 5초/접수 checkpoint 뒤 Proposal@v1 결과를 접수+8초에 반환 | cycle은 현재 발화부터, 자원은 과거 준비도 포함 |</a:t>
+            </a:r>
+          </a:p>
+          <a:p xmlns:a="http://schemas.openxmlformats.org/drawingml/2006/main">
+            <a:r>
+              <a:t>| S3-02 / T-04 | 현재 K현재 요약과 중복 처리 원본 유지, 실제 SEND 접수+8초 MailCurrent@v1:SENT | cycle은 현재 요약→전송→확인, 중복 effect 금지 |</a:t>
+            </a:r>
+          </a:p>
+          <a:p xmlns:a="http://schemas.openxmlformats.org/drawingml/2006/main">
+            <a:r>
+              <a:t>| S4-01 / I-02 / T-05 | 원본 정정 접수/메일 유지 checkpoint 이후 변경 접수+8초 ReportRevised@v2 결과 | 같은 정정의 첫 반응과 최종 전달을 각각 관측 |</a:t>
+            </a:r>
+          </a:p>
+          <a:p xmlns:a="http://schemas.openxmlformats.org/drawingml/2006/main">
+            <a:r>
+              <a:t>| S6-01 / T-06 | 원본 실제 확인 질문+1초에 3초 답변. 실제 유효 수정 접수+8초 ConfirmedRevision@v2 결과 | 사람 기다림/외부 업무만 제외한 cycle |</a:t>
+            </a:r>
+          </a:p>
+          <a:p xmlns:a="http://schemas.openxmlformats.org/drawingml/2006/main">
+            <a:r>
+              <a:t>| S2-03 | 원본 v1 지정 표 작성 접수 뒤 실제 접수+8초 결과(TablePast@v1) | 대표 T 없음, 비용/메모리와 기능 보호에는 포함 |</a:t>
+            </a:r>
+          </a:p>
+          <a:p xmlns:a="http://schemas.openxmlformats.org/drawingml/2006/main">
+            <a:r>
+              <a:t>| 나머지 11개 사례 | §3의 실제 조회/선호/제어/질문/결과/승인 범위/거부 checkpoint가 그 장면의 끝. 취소 접수는 완료 취소가 아니며 기다리는 질문을 임의 답변하지 않음 | C6와 지정 I, 전체 청구/할당 |</a:t>
+            </a:r>
+          </a:p>
+          <a:p xmlns:a="http://schemas.openxmlformats.org/drawingml/2006/main">
+            <a:r>
+              <a:t/>
+            </a:r>
+          </a:p>
+          <a:p xmlns:a="http://schemas.openxmlformats.org/drawingml/2006/main">
+            <a:r>
+              <a:t>위 tail은 모든 CORE/REUSE/BURST와 모든 run/QA에 공통이다. 최종 payload/source/version/허용과 실제 전달을 검사하며 접수 인사를 최종 결과로 세지 않는다. 정확성의 기존 108개 정답 명세는 해당 checkpoint에서 보존하고 tail 실패는 cycle/resource/필수 기능 보호에 기록한다. 각 관측은 `run/block/occurrence/case/source-vector/checkpoint/tail/I/T`를 동일 원장 key로 조인한다. QA-05 변경의 완료 검사도 이 기능/상태/권한 회귀와 W100의 사용량/동시성/보관 계약을 유지하는지 확인한다. 390장면 모두를 정확성 대표 분모로 키우지 않는다.</a:t>
+            </a:r>
+          </a:p>
+          <a:p xmlns:a="http://schemas.openxmlformats.org/drawingml/2006/main">
+            <a:r>
+              <a:t/>
             </a:r>
           </a:p>
           <a:p xmlns:a="http://schemas.openxmlformats.org/drawingml/2006/main">
@@ -6476,7 +7897,7 @@
   </p:cSld>
   <p:clrMap bg1="lt1" tx1="dk1" bg2="lt2" tx2="dk2" accent1="accent1" accent2="accent2" accent3="accent3" accent4="accent4" accent5="accent5" accent6="accent6" hlink="hlink" folHlink="folHlink"/>
   <p:sldLayoutIdLst>
-    <p:sldLayoutId xmlns:r="http://schemas.openxmlformats.org/officeDocument/2006/relationships" id="2147483649" r:id="R22216869b79849c3"/>
+    <p:sldLayoutId xmlns:r="http://schemas.openxmlformats.org/officeDocument/2006/relationships" id="2147483649" r:id="R8e44eca94cf745a9"/>
   </p:sldLayoutIdLst>
   <p:txStyles>
     <p:titleStyle>
@@ -7027,7 +8448,7 @@
           <p:cNvPr id="8" name="title">
             <a:extLst xmlns:a="http://schemas.openxmlformats.org/drawingml/2006/main">
               <a:ext uri="{FF2B5EF4-FFF2-40B4-BE49-F238E27FC236}">
-                <a16:creationId xmlns:a16="http://schemas.microsoft.com/office/drawing/2014/main" id="{B1234605-8C15-4B9A-BF86-633CEC2FCA0F}"/>
+                <a16:creationId xmlns:a16="http://schemas.microsoft.com/office/drawing/2014/main" id="{87718A9F-90F4-4569-8AA2-F1345D685A87}"/>
               </a:ext>
             </a:extLst>
           </p:cNvPr>
@@ -7084,7 +8505,7 @@
           <p:cNvPr id="2" name="header-rule">
             <a:extLst xmlns:a="http://schemas.openxmlformats.org/drawingml/2006/main">
               <a:ext uri="{FF2B5EF4-FFF2-40B4-BE49-F238E27FC236}">
-                <a16:creationId xmlns:a16="http://schemas.microsoft.com/office/drawing/2014/main" id="{560B46CF-1F50-4E02-9FC5-60249679B06E}"/>
+                <a16:creationId xmlns:a16="http://schemas.microsoft.com/office/drawing/2014/main" id="{7B33F023-6E16-4CAE-A73D-20C5D05E9F4C}"/>
               </a:ext>
             </a:extLst>
           </p:cNvPr>
@@ -7114,7 +8535,7 @@
           <p:cNvPr id="3" name="page">
             <a:extLst xmlns:a="http://schemas.openxmlformats.org/drawingml/2006/main">
               <a:ext uri="{FF2B5EF4-FFF2-40B4-BE49-F238E27FC236}">
-                <a16:creationId xmlns:a16="http://schemas.microsoft.com/office/drawing/2014/main" id="{2A93DB0B-52D1-4C90-90A9-B871569C505F}"/>
+                <a16:creationId xmlns:a16="http://schemas.microsoft.com/office/drawing/2014/main" id="{0EE7076F-69CE-446F-9E81-7369B905C08B}"/>
               </a:ext>
             </a:extLst>
           </p:cNvPr>
@@ -7161,7 +8582,7 @@
                 <a:ea typeface="Apple SD Gothic Neo"/>
                 <a:cs typeface="Apple SD Gothic Neo"/>
               </a:rPr>
-              <a:t>1 / 2</a:t>
+              <a:t>1 / 3</a:t>
             </a:r>
           </a:p>
         </p:txBody>
@@ -7171,7 +8592,7 @@
           <p:cNvPr id="4" name="headline">
             <a:extLst xmlns:a="http://schemas.openxmlformats.org/drawingml/2006/main">
               <a:ext uri="{FF2B5EF4-FFF2-40B4-BE49-F238E27FC236}">
-                <a16:creationId xmlns:a16="http://schemas.microsoft.com/office/drawing/2014/main" id="{37569F14-E14C-4EE4-9A49-F28F44D62D75}"/>
+                <a16:creationId xmlns:a16="http://schemas.microsoft.com/office/drawing/2014/main" id="{560E6851-3B46-4338-9666-842F7329206B}"/>
               </a:ext>
             </a:extLst>
           </p:cNvPr>
@@ -7228,7 +8649,7 @@
           <p:cNvPr id="5" name="scope">
             <a:extLst xmlns:a="http://schemas.openxmlformats.org/drawingml/2006/main">
               <a:ext uri="{FF2B5EF4-FFF2-40B4-BE49-F238E27FC236}">
-                <a16:creationId xmlns:a16="http://schemas.microsoft.com/office/drawing/2014/main" id="{15BBF275-DCD3-4AF2-846E-0D4A6F2A2370}"/>
+                <a16:creationId xmlns:a16="http://schemas.microsoft.com/office/drawing/2014/main" id="{84287D11-E665-4AE4-B8CC-3A37EFF5805E}"/>
               </a:ext>
             </a:extLst>
           </p:cNvPr>
@@ -7275,7 +8696,7 @@
                 <a:ea typeface="Apple SD Gothic Neo"/>
                 <a:cs typeface="Apple SD Gothic Neo"/>
               </a:rPr>
-              <a:t>QA 번호순으로 우선 선택하고 낮은 순위 약점은 tactic으로 보완</a:t>
+              <a:t>같은 W100: 사용자 100 + Agent 30장면. QA 번호순 우선 선택, 낮은 순위 약점은 tactic으로 보완</a:t>
             </a:r>
           </a:p>
         </p:txBody>
@@ -7986,7 +9407,7 @@
           <p:cNvPr id="7" name="footer">
             <a:extLst xmlns:a="http://schemas.openxmlformats.org/drawingml/2006/main">
               <a:ext uri="{FF2B5EF4-FFF2-40B4-BE49-F238E27FC236}">
-                <a16:creationId xmlns:a16="http://schemas.microsoft.com/office/drawing/2014/main" id="{FD7CDADC-841B-4CB8-853F-2C355122DABD}"/>
+                <a16:creationId xmlns:a16="http://schemas.microsoft.com/office/drawing/2014/main" id="{3203E885-611F-44B8-A6B9-5614A3A28326}"/>
               </a:ext>
             </a:extLst>
           </p:cNvPr>
@@ -8033,7 +9454,7 @@
                 <a:ea typeface="Apple SD Gothic Neo"/>
                 <a:cs typeface="Apple SD Gothic Neo"/>
               </a:rPr>
-              <a:t>공통 QA 계약 v4 / 작성자 PoC 평가안. 상세 정답/경계/실패/출처는 03-02와 발표자 노트</a:t>
+              <a:t>W100: 정확성 540개, 시간 각 30개 / 외부 업무와 사용자 답변 대기 제외 / 비용과 메모리는 같은 활동 3회</a:t>
             </a:r>
           </a:p>
         </p:txBody>
@@ -8041,7 +9462,7 @@
     </p:spTree>
     <p:extLst>
       <p:ext uri="{BB962C8B-B14F-4D97-AF65-F5344CB8AC3E}">
-        <p14:creationId xmlns:p14="http://schemas.microsoft.com/office/powerpoint/2010/main" val="920534288"/>
+        <p14:creationId xmlns:p14="http://schemas.microsoft.com/office/powerpoint/2010/main" val="92453822"/>
       </p:ext>
     </p:extLst>
   </p:cSld>
@@ -8072,7 +9493,7 @@
           <p:cNvPr id="8" name="title">
             <a:extLst xmlns:a="http://schemas.openxmlformats.org/drawingml/2006/main">
               <a:ext uri="{FF2B5EF4-FFF2-40B4-BE49-F238E27FC236}">
-                <a16:creationId xmlns:a16="http://schemas.microsoft.com/office/drawing/2014/main" id="{25947634-12E0-4974-9BE3-38205E8719A5}"/>
+                <a16:creationId xmlns:a16="http://schemas.microsoft.com/office/drawing/2014/main" id="{11026A18-0265-4CFB-86E3-6091599FB8F0}"/>
               </a:ext>
             </a:extLst>
           </p:cNvPr>
@@ -8129,7 +9550,7 @@
           <p:cNvPr id="2" name="header-rule">
             <a:extLst xmlns:a="http://schemas.openxmlformats.org/drawingml/2006/main">
               <a:ext uri="{FF2B5EF4-FFF2-40B4-BE49-F238E27FC236}">
-                <a16:creationId xmlns:a16="http://schemas.microsoft.com/office/drawing/2014/main" id="{D31B8CC4-7429-4B8B-92C2-187D9863D34A}"/>
+                <a16:creationId xmlns:a16="http://schemas.microsoft.com/office/drawing/2014/main" id="{4679207A-1AEE-422D-A5C3-ECC8E2AD051C}"/>
               </a:ext>
             </a:extLst>
           </p:cNvPr>
@@ -8159,7 +9580,7 @@
           <p:cNvPr id="3" name="page">
             <a:extLst xmlns:a="http://schemas.openxmlformats.org/drawingml/2006/main">
               <a:ext uri="{FF2B5EF4-FFF2-40B4-BE49-F238E27FC236}">
-                <a16:creationId xmlns:a16="http://schemas.microsoft.com/office/drawing/2014/main" id="{F007AC52-D809-4CA5-816A-B6DB5FCB4CC9}"/>
+                <a16:creationId xmlns:a16="http://schemas.microsoft.com/office/drawing/2014/main" id="{B5A95913-E448-4273-B2C7-CFDDACF19770}"/>
               </a:ext>
             </a:extLst>
           </p:cNvPr>
@@ -8206,7 +9627,7 @@
                 <a:ea typeface="Apple SD Gothic Neo"/>
                 <a:cs typeface="Apple SD Gothic Neo"/>
               </a:rPr>
-              <a:t>2 / 2</a:t>
+              <a:t>2 / 3</a:t>
             </a:r>
           </a:p>
         </p:txBody>
@@ -8216,7 +9637,7 @@
           <p:cNvPr id="4" name="headline">
             <a:extLst xmlns:a="http://schemas.openxmlformats.org/drawingml/2006/main">
               <a:ext uri="{FF2B5EF4-FFF2-40B4-BE49-F238E27FC236}">
-                <a16:creationId xmlns:a16="http://schemas.microsoft.com/office/drawing/2014/main" id="{649EEE11-0A0C-4340-90D8-AEB4EE10DBF8}"/>
+                <a16:creationId xmlns:a16="http://schemas.microsoft.com/office/drawing/2014/main" id="{A67FCAED-F684-472F-8BDC-ADD18F48ECC1}"/>
               </a:ext>
             </a:extLst>
           </p:cNvPr>
@@ -8273,7 +9694,7 @@
           <p:cNvPr id="5" name="scope">
             <a:extLst xmlns:a="http://schemas.openxmlformats.org/drawingml/2006/main">
               <a:ext uri="{FF2B5EF4-FFF2-40B4-BE49-F238E27FC236}">
-                <a16:creationId xmlns:a16="http://schemas.microsoft.com/office/drawing/2014/main" id="{9EE4D708-74D7-485F-B297-D5CBA2FF2037}"/>
+                <a16:creationId xmlns:a16="http://schemas.microsoft.com/office/drawing/2014/main" id="{8723EFE3-1762-4A8D-B0E5-9B01B9BA7445}"/>
               </a:ext>
             </a:extLst>
           </p:cNvPr>
@@ -8320,7 +9741,7 @@
                 <a:ea typeface="Apple SD Gothic Neo"/>
                 <a:cs typeface="Apple SD Gothic Neo"/>
               </a:rPr>
-              <a:t>QA 번호순으로 우선 선택하고 낮은 순위 약점은 tactic으로 보완</a:t>
+              <a:t>같은 W100: 사용자 100 + Agent 30장면. QA 번호순 우선 선택, 낮은 순위 약점은 tactic으로 보완</a:t>
             </a:r>
           </a:p>
         </p:txBody>
@@ -8606,7 +10027,7 @@
                           <a:ea typeface="Apple SD Gothic Neo"/>
                           <a:cs typeface="Apple SD Gothic Neo"/>
                         </a:rPr>
-                        <a:t>8시간 총 모델 비용 ≤ $1.50</a:t>
+                        <a:t>W100 1회 평균 모델 비용 ≤ $1.50</a:t>
                       </a:r>
                     </a:p>
                     <a:p>
@@ -8620,7 +10041,7 @@
                           <a:ea typeface="Apple SD Gothic Neo"/>
                           <a:cs typeface="Apple SD Gothic Neo"/>
                         </a:rPr>
-                        <a:t>측정: 동일 8시간 활동의 청구 사용량 × 공개 단가</a:t>
+                        <a:t>측정: 사용자 100 + Agent 30장면 전체 청구량 × 단가</a:t>
                       </a:r>
                     </a:p>
                     <a:p>
@@ -8634,7 +10055,7 @@
                           <a:ea typeface="Apple SD Gothic Neo"/>
                           <a:cs typeface="Apple SD Gothic Neo"/>
                         </a:rPr>
-                        <a:t>근거: 기본 $1.1325 + 추가 생산/재시도 여유 $0.3675</a:t>
+                        <a:t>근거: 기본 $1.0987 + 추가 생산/재시도 여유 $0.4013</a:t>
                       </a:r>
                     </a:p>
                   </a:txBody>
@@ -9000,7 +10421,7 @@
                           <a:ea typeface="Apple SD Gothic Neo"/>
                           <a:cs typeface="Apple SD Gothic Neo"/>
                         </a:rPr>
-                        <a:t>측정: 8시간/3session 중 가장 큰 동시 commit량</a:t>
+                        <a:t>측정: 같은 W100 3회 중 가장 큰 동시 commit량</a:t>
                       </a:r>
                     </a:p>
                     <a:p>
@@ -9059,7 +10480,7 @@
           <p:cNvPr id="7" name="footer">
             <a:extLst xmlns:a="http://schemas.openxmlformats.org/drawingml/2006/main">
               <a:ext uri="{FF2B5EF4-FFF2-40B4-BE49-F238E27FC236}">
-                <a16:creationId xmlns:a16="http://schemas.microsoft.com/office/drawing/2014/main" id="{5BB8D1EC-5C8D-460C-AB85-4D1E3DB4D30E}"/>
+                <a16:creationId xmlns:a16="http://schemas.microsoft.com/office/drawing/2014/main" id="{D31171A7-D605-4D82-AE61-71A5580875C9}"/>
               </a:ext>
             </a:extLst>
           </p:cNvPr>
@@ -9106,7 +10527,7 @@
                 <a:ea typeface="Apple SD Gothic Neo"/>
                 <a:cs typeface="Apple SD Gothic Neo"/>
               </a:rPr>
-              <a:t>공통 QA 계약 v4 / 작성자 PoC 평가안. 상세 정답/경계/실패/출처는 03-02와 발표자 노트</a:t>
+              <a:t>W100: 정확성 540개, 시간 각 30개 / 외부 업무와 사용자 답변 대기 제외 / 비용과 메모리는 같은 활동 3회</a:t>
             </a:r>
           </a:p>
         </p:txBody>
@@ -9114,7 +10535,1025 @@
     </p:spTree>
     <p:extLst>
       <p:ext uri="{BB962C8B-B14F-4D97-AF65-F5344CB8AC3E}">
-        <p14:creationId xmlns:p14="http://schemas.microsoft.com/office/powerpoint/2010/main" val="1417893180"/>
+        <p14:creationId xmlns:p14="http://schemas.microsoft.com/office/powerpoint/2010/main" val="371708280"/>
+      </p:ext>
+    </p:extLst>
+  </p:cSld>
+</p:sld>
+</file>
+
+<file path=ppt/slides/slide3.xml><?xml version="1.0" encoding="utf-8"?>
+<p:sld xmlns:p="http://schemas.openxmlformats.org/presentationml/2006/main">
+  <p:cSld>
+    <p:bg>
+      <p:bgPr>
+        <a:solidFill xmlns:a="http://schemas.openxmlformats.org/drawingml/2006/main">
+          <a:srgbClr val="FFFFFF"/>
+        </a:solidFill>
+      </p:bgPr>
+    </p:bg>
+    <p:spTree>
+      <p:nvGrpSpPr>
+        <p:cNvPr id="1" name=""/>
+        <p:cNvGrpSpPr/>
+        <p:nvPr/>
+      </p:nvGrpSpPr>
+      <p:grpSpPr>
+        <a:xfrm xmlns:a="http://schemas.openxmlformats.org/drawingml/2006/main"/>
+      </p:grpSpPr>
+      <p:sp>
+        <p:nvSpPr>
+          <p:cNvPr id="8" name="title">
+            <a:extLst xmlns:a="http://schemas.openxmlformats.org/drawingml/2006/main">
+              <a:ext uri="{FF2B5EF4-FFF2-40B4-BE49-F238E27FC236}">
+                <a16:creationId xmlns:a16="http://schemas.microsoft.com/office/drawing/2014/main" id="{14A549F0-5695-4FFE-BEE4-8220CA0EC9D3}"/>
+              </a:ext>
+            </a:extLst>
+          </p:cNvPr>
+          <p:cNvSpPr>
+            <a:spLocks xmlns:a="http://schemas.openxmlformats.org/drawingml/2006/main" noGrp="1"/>
+          </p:cNvSpPr>
+          <p:nvPr/>
+        </p:nvSpPr>
+        <p:spPr>
+          <a:xfrm xmlns:a="http://schemas.openxmlformats.org/drawingml/2006/main">
+            <a:off x="457200" y="247650"/>
+            <a:ext cx="15716250" cy="800100"/>
+          </a:xfrm>
+          <a:prstGeom xmlns:a="http://schemas.openxmlformats.org/drawingml/2006/main" prst="rect">
+            <a:avLst/>
+          </a:prstGeom>
+          <a:noFill xmlns:a="http://schemas.openxmlformats.org/drawingml/2006/main"/>
+          <a:ln xmlns:a="http://schemas.openxmlformats.org/drawingml/2006/main" w="0">
+            <a:noFill/>
+          </a:ln>
+        </p:spPr>
+        <p:txBody>
+          <a:bodyPr xmlns:a="http://schemas.openxmlformats.org/drawingml/2006/main" wrap="none" lIns="0" tIns="0" rIns="0" bIns="0">
+            <a:noAutofit/>
+          </a:bodyPr>
+          <a:lstStyle xmlns:a="http://schemas.openxmlformats.org/drawingml/2006/main"/>
+          <a:p xmlns:a="http://schemas.openxmlformats.org/drawingml/2006/main">
+            <a:pPr>
+              <a:defRPr sz="4425" b="1">
+                <a:solidFill>
+                  <a:srgbClr val="222A35"/>
+                </a:solidFill>
+                <a:latin typeface="Apple SD Gothic Neo"/>
+                <a:ea typeface="Apple SD Gothic Neo"/>
+                <a:cs typeface="Apple SD Gothic Neo"/>
+              </a:defRPr>
+            </a:pPr>
+            <a:r>
+              <a:rPr sz="4425" b="1">
+                <a:solidFill>
+                  <a:srgbClr val="222A35"/>
+                </a:solidFill>
+                <a:latin typeface="Apple SD Gothic Neo"/>
+                <a:ea typeface="Apple SD Gothic Neo"/>
+                <a:cs typeface="Apple SD Gothic Neo"/>
+              </a:rPr>
+              <a:t>공통 평가 활동</a:t>
+            </a:r>
+          </a:p>
+        </p:txBody>
+      </p:sp>
+      <p:sp>
+        <p:nvSpPr>
+          <p:cNvPr id="2" name="header-rule">
+            <a:extLst xmlns:a="http://schemas.openxmlformats.org/drawingml/2006/main">
+              <a:ext uri="{FF2B5EF4-FFF2-40B4-BE49-F238E27FC236}">
+                <a16:creationId xmlns:a16="http://schemas.microsoft.com/office/drawing/2014/main" id="{95CF3A28-878A-4AE5-9BF4-34712FA9397C}"/>
+              </a:ext>
+            </a:extLst>
+          </p:cNvPr>
+          <p:cNvSpPr>
+            <a:spLocks xmlns:a="http://schemas.openxmlformats.org/drawingml/2006/main" noGrp="1"/>
+          </p:cNvSpPr>
+          <p:nvPr/>
+        </p:nvSpPr>
+        <p:spPr>
+          <a:xfrm xmlns:a="http://schemas.openxmlformats.org/drawingml/2006/main">
+            <a:off x="457200" y="1066800"/>
+            <a:ext cx="17373600" cy="19050"/>
+          </a:xfrm>
+          <a:prstGeom xmlns:a="http://schemas.openxmlformats.org/drawingml/2006/main" prst="rect">
+            <a:avLst/>
+          </a:prstGeom>
+          <a:solidFill xmlns:a="http://schemas.openxmlformats.org/drawingml/2006/main">
+            <a:srgbClr val="9E9E9E"/>
+          </a:solidFill>
+          <a:ln xmlns:a="http://schemas.openxmlformats.org/drawingml/2006/main" w="0">
+            <a:noFill/>
+          </a:ln>
+        </p:spPr>
+      </p:sp>
+      <p:sp>
+        <p:nvSpPr>
+          <p:cNvPr id="3" name="page">
+            <a:extLst xmlns:a="http://schemas.openxmlformats.org/drawingml/2006/main">
+              <a:ext uri="{FF2B5EF4-FFF2-40B4-BE49-F238E27FC236}">
+                <a16:creationId xmlns:a16="http://schemas.microsoft.com/office/drawing/2014/main" id="{CDA858B6-036D-43A6-9E77-54C2F7A4ACF8}"/>
+              </a:ext>
+            </a:extLst>
+          </p:cNvPr>
+          <p:cNvSpPr>
+            <a:spLocks xmlns:a="http://schemas.openxmlformats.org/drawingml/2006/main" noGrp="1"/>
+          </p:cNvSpPr>
+          <p:nvPr/>
+        </p:nvSpPr>
+        <p:spPr>
+          <a:xfrm xmlns:a="http://schemas.openxmlformats.org/drawingml/2006/main">
+            <a:off x="16611600" y="504825"/>
+            <a:ext cx="1219200" cy="333375"/>
+          </a:xfrm>
+          <a:prstGeom xmlns:a="http://schemas.openxmlformats.org/drawingml/2006/main" prst="rect">
+            <a:avLst/>
+          </a:prstGeom>
+          <a:noFill xmlns:a="http://schemas.openxmlformats.org/drawingml/2006/main"/>
+          <a:ln xmlns:a="http://schemas.openxmlformats.org/drawingml/2006/main" w="0">
+            <a:noFill/>
+          </a:ln>
+        </p:spPr>
+        <p:txBody>
+          <a:bodyPr xmlns:a="http://schemas.openxmlformats.org/drawingml/2006/main" wrap="none" lIns="0" tIns="0" rIns="0" bIns="0">
+            <a:noAutofit/>
+          </a:bodyPr>
+          <a:lstStyle xmlns:a="http://schemas.openxmlformats.org/drawingml/2006/main"/>
+          <a:p xmlns:a="http://schemas.openxmlformats.org/drawingml/2006/main">
+            <a:pPr>
+              <a:defRPr sz="1875" b="0">
+                <a:solidFill>
+                  <a:srgbClr val="56606B"/>
+                </a:solidFill>
+                <a:latin typeface="Apple SD Gothic Neo"/>
+                <a:ea typeface="Apple SD Gothic Neo"/>
+                <a:cs typeface="Apple SD Gothic Neo"/>
+              </a:defRPr>
+            </a:pPr>
+            <a:r>
+              <a:rPr sz="1875" b="0">
+                <a:solidFill>
+                  <a:srgbClr val="56606B"/>
+                </a:solidFill>
+                <a:latin typeface="Apple SD Gothic Neo"/>
+                <a:ea typeface="Apple SD Gothic Neo"/>
+                <a:cs typeface="Apple SD Gothic Neo"/>
+              </a:rPr>
+              <a:t>3 / 3</a:t>
+            </a:r>
+          </a:p>
+        </p:txBody>
+      </p:sp>
+      <p:sp>
+        <p:nvSpPr>
+          <p:cNvPr id="4" name="headline">
+            <a:extLst xmlns:a="http://schemas.openxmlformats.org/drawingml/2006/main">
+              <a:ext uri="{FF2B5EF4-FFF2-40B4-BE49-F238E27FC236}">
+                <a16:creationId xmlns:a16="http://schemas.microsoft.com/office/drawing/2014/main" id="{EFF55D77-2BD4-42ED-B57F-EAC43746D369}"/>
+              </a:ext>
+            </a:extLst>
+          </p:cNvPr>
+          <p:cNvSpPr>
+            <a:spLocks xmlns:a="http://schemas.openxmlformats.org/drawingml/2006/main" noGrp="1"/>
+          </p:cNvSpPr>
+          <p:nvPr/>
+        </p:nvSpPr>
+        <p:spPr>
+          <a:xfrm xmlns:a="http://schemas.openxmlformats.org/drawingml/2006/main">
+            <a:off x="457200" y="1285875"/>
+            <a:ext cx="17373600" cy="485775"/>
+          </a:xfrm>
+          <a:prstGeom xmlns:a="http://schemas.openxmlformats.org/drawingml/2006/main" prst="rect">
+            <a:avLst/>
+          </a:prstGeom>
+          <a:noFill xmlns:a="http://schemas.openxmlformats.org/drawingml/2006/main"/>
+          <a:ln xmlns:a="http://schemas.openxmlformats.org/drawingml/2006/main" w="0">
+            <a:noFill/>
+          </a:ln>
+        </p:spPr>
+        <p:txBody>
+          <a:bodyPr xmlns:a="http://schemas.openxmlformats.org/drawingml/2006/main" wrap="none" lIns="0" tIns="0" rIns="0" bIns="0">
+            <a:noAutofit/>
+          </a:bodyPr>
+          <a:lstStyle xmlns:a="http://schemas.openxmlformats.org/drawingml/2006/main"/>
+          <a:p xmlns:a="http://schemas.openxmlformats.org/drawingml/2006/main">
+            <a:pPr>
+              <a:defRPr sz="3150" b="1">
+                <a:solidFill>
+                  <a:srgbClr val="4472C4"/>
+                </a:solidFill>
+                <a:latin typeface="Apple SD Gothic Neo"/>
+                <a:ea typeface="Apple SD Gothic Neo"/>
+                <a:cs typeface="Apple SD Gothic Neo"/>
+              </a:defRPr>
+            </a:pPr>
+            <a:r>
+              <a:rPr sz="3150" b="1">
+                <a:solidFill>
+                  <a:srgbClr val="4472C4"/>
+                </a:solidFill>
+                <a:latin typeface="Apple SD Gothic Neo"/>
+                <a:ea typeface="Apple SD Gothic Neo"/>
+                <a:cs typeface="Apple SD Gothic Neo"/>
+              </a:rPr>
+              <a:t>W100: 같은 요청과 후속 사건으로 여섯 QA 평가</a:t>
+            </a:r>
+          </a:p>
+        </p:txBody>
+      </p:sp>
+      <p:sp>
+        <p:nvSpPr>
+          <p:cNvPr id="5" name="scope">
+            <a:extLst xmlns:a="http://schemas.openxmlformats.org/drawingml/2006/main">
+              <a:ext uri="{FF2B5EF4-FFF2-40B4-BE49-F238E27FC236}">
+                <a16:creationId xmlns:a16="http://schemas.microsoft.com/office/drawing/2014/main" id="{4878716E-C69E-43C9-87D4-F33E7E195A5C}"/>
+              </a:ext>
+            </a:extLst>
+          </p:cNvPr>
+          <p:cNvSpPr>
+            <a:spLocks xmlns:a="http://schemas.openxmlformats.org/drawingml/2006/main" noGrp="1"/>
+          </p:cNvSpPr>
+          <p:nvPr/>
+        </p:nvSpPr>
+        <p:spPr>
+          <a:xfrm xmlns:a="http://schemas.openxmlformats.org/drawingml/2006/main">
+            <a:off x="457200" y="1819275"/>
+            <a:ext cx="17373600" cy="342900"/>
+          </a:xfrm>
+          <a:prstGeom xmlns:a="http://schemas.openxmlformats.org/drawingml/2006/main" prst="rect">
+            <a:avLst/>
+          </a:prstGeom>
+          <a:noFill xmlns:a="http://schemas.openxmlformats.org/drawingml/2006/main"/>
+          <a:ln xmlns:a="http://schemas.openxmlformats.org/drawingml/2006/main" w="0">
+            <a:noFill/>
+          </a:ln>
+        </p:spPr>
+        <p:txBody>
+          <a:bodyPr xmlns:a="http://schemas.openxmlformats.org/drawingml/2006/main" wrap="none" lIns="0" tIns="0" rIns="0" bIns="0">
+            <a:noAutofit/>
+          </a:bodyPr>
+          <a:lstStyle xmlns:a="http://schemas.openxmlformats.org/drawingml/2006/main"/>
+          <a:p xmlns:a="http://schemas.openxmlformats.org/drawingml/2006/main">
+            <a:pPr>
+              <a:defRPr sz="2175" b="0">
+                <a:solidFill>
+                  <a:srgbClr val="222A35"/>
+                </a:solidFill>
+                <a:latin typeface="Apple SD Gothic Neo"/>
+                <a:ea typeface="Apple SD Gothic Neo"/>
+                <a:cs typeface="Apple SD Gothic Neo"/>
+              </a:defRPr>
+            </a:pPr>
+            <a:r>
+              <a:rPr sz="2175" b="0">
+                <a:solidFill>
+                  <a:srgbClr val="222A35"/>
+                </a:solidFill>
+                <a:latin typeface="Apple SD Gothic Neo"/>
+                <a:ea typeface="Apple SD Gothic Neo"/>
+                <a:cs typeface="Apple SD Gothic Neo"/>
+              </a:rPr>
+              <a:t>기존 18개 사례를 재사용한 합성 PoC 부하. 실제 하루 사용량을 주장하는 수치는 아님</a:t>
+            </a:r>
+          </a:p>
+        </p:txBody>
+      </p:sp>
+      <p:graphicFrame>
+        <p:nvGraphicFramePr>
+          <p:cNvPr id="13" name=""/>
+          <p:cNvGraphicFramePr/>
+          <p:nvPr/>
+        </p:nvGraphicFramePr>
+        <p:xfrm>
+          <a:off xmlns:a="http://schemas.openxmlformats.org/drawingml/2006/main" x="457200" y="2286000"/>
+          <a:ext xmlns:a="http://schemas.openxmlformats.org/drawingml/2006/main" cx="17373600" cy="7486650"/>
+        </p:xfrm>
+        <a:graphic xmlns:a="http://schemas.openxmlformats.org/drawingml/2006/main">
+          <a:graphicData uri="http://schemas.openxmlformats.org/drawingml/2006/table">
+            <a:tbl>
+              <a:tblPr firstRow="0" bandRow="0"/>
+              <a:tblGrid>
+                <a:gridCol w="2667000"/>
+                <a:gridCol w="8001000"/>
+                <a:gridCol w="6705600"/>
+              </a:tblGrid>
+              <a:tr h="476250">
+                <a:tc>
+                  <a:txBody>
+                    <a:bodyPr/>
+                    <a:lstStyle/>
+                    <a:p>
+                      <a:pPr algn="l"/>
+                      <a:r>
+                        <a:rPr sz="2100" b="1">
+                          <a:solidFill>
+                            <a:srgbClr val="FFFFFF"/>
+                          </a:solidFill>
+                          <a:latin typeface="Apple SD Gothic Neo"/>
+                          <a:ea typeface="Apple SD Gothic Neo"/>
+                          <a:cs typeface="Apple SD Gothic Neo"/>
+                        </a:rPr>
+                        <a:t>활동 / 관측</a:t>
+                      </a:r>
+                    </a:p>
+                  </a:txBody>
+                  <a:tcPr marL="133350" marR="114300" marT="57150" marB="57150" anchor="ctr">
+                    <a:solidFill>
+                      <a:srgbClr val="4472C4"/>
+                    </a:solidFill>
+                  </a:tcPr>
+                </a:tc>
+                <a:tc>
+                  <a:txBody>
+                    <a:bodyPr/>
+                    <a:lstStyle/>
+                    <a:p>
+                      <a:pPr algn="l"/>
+                      <a:r>
+                        <a:rPr sz="2100" b="1">
+                          <a:solidFill>
+                            <a:srgbClr val="FFFFFF"/>
+                          </a:solidFill>
+                          <a:latin typeface="Apple SD Gothic Neo"/>
+                          <a:ea typeface="Apple SD Gothic Neo"/>
+                          <a:cs typeface="Apple SD Gothic Neo"/>
+                        </a:rPr>
+                        <a:t>고정 조건</a:t>
+                      </a:r>
+                    </a:p>
+                  </a:txBody>
+                  <a:tcPr marL="133350" marR="114300" marT="57150" marB="57150" anchor="ctr">
+                    <a:solidFill>
+                      <a:srgbClr val="4472C4"/>
+                    </a:solidFill>
+                  </a:tcPr>
+                </a:tc>
+                <a:tc>
+                  <a:txBody>
+                    <a:bodyPr/>
+                    <a:lstStyle/>
+                    <a:p>
+                      <a:pPr algn="l"/>
+                      <a:r>
+                        <a:rPr sz="2100" b="1">
+                          <a:solidFill>
+                            <a:srgbClr val="FFFFFF"/>
+                          </a:solidFill>
+                          <a:latin typeface="Apple SD Gothic Neo"/>
+                          <a:ea typeface="Apple SD Gothic Neo"/>
+                          <a:cs typeface="Apple SD Gothic Neo"/>
+                        </a:rPr>
+                        <a:t>QA에서 읽는 값</a:t>
+                      </a:r>
+                    </a:p>
+                  </a:txBody>
+                  <a:tcPr marL="133350" marR="114300" marT="57150" marB="57150" anchor="ctr">
+                    <a:solidFill>
+                      <a:srgbClr val="4472C4"/>
+                    </a:solidFill>
+                  </a:tcPr>
+                </a:tc>
+              </a:tr>
+              <a:tr h="1162050">
+                <a:tc>
+                  <a:txBody>
+                    <a:bodyPr/>
+                    <a:lstStyle/>
+                    <a:p>
+                      <a:pPr algn="l"/>
+                      <a:r>
+                        <a:rPr sz="2100" b="0">
+                          <a:solidFill>
+                            <a:srgbClr val="222A35"/>
+                          </a:solidFill>
+                          <a:latin typeface="Apple SD Gothic Neo"/>
+                          <a:ea typeface="Apple SD Gothic Neo"/>
+                          <a:cs typeface="Apple SD Gothic Neo"/>
+                        </a:rPr>
+                        <a:t>입력 장면</a:t>
+                      </a:r>
+                    </a:p>
+                  </a:txBody>
+                  <a:tcPr marL="133350" marR="114300" marT="57150" marB="57150" anchor="ctr">
+                    <a:solidFill>
+                      <a:srgbClr val="FFF6DE"/>
+                    </a:solidFill>
+                  </a:tcPr>
+                </a:tc>
+                <a:tc>
+                  <a:txBody>
+                    <a:bodyPr/>
+                    <a:lstStyle/>
+                    <a:p>
+                      <a:pPr algn="l"/>
+                      <a:r>
+                        <a:rPr sz="2100" b="0">
+                          <a:solidFill>
+                            <a:srgbClr val="222A35"/>
+                          </a:solidFill>
+                          <a:latin typeface="Apple SD Gothic Neo"/>
+                          <a:ea typeface="Apple SD Gothic Neo"/>
+                          <a:cs typeface="Apple SD Gothic Neo"/>
+                        </a:rPr>
+                        <a:t>사용자 100건 + Agent 발신 30건</a:t>
+                      </a:r>
+                    </a:p>
+                    <a:p>
+                      <a:pPr algn="l"/>
+                      <a:r>
+                        <a:rPr sz="2100" b="0">
+                          <a:solidFill>
+                            <a:srgbClr val="222A35"/>
+                          </a:solidFill>
+                          <a:latin typeface="Apple SD Gothic Neo"/>
+                          <a:ea typeface="Apple SD Gothic Neo"/>
+                          <a:cs typeface="Apple SD Gothic Neo"/>
+                        </a:rPr>
+                        <a:t>조회, 과거 재사용, 복합 요청, 정정, 질문과 결과</a:t>
+                      </a:r>
+                    </a:p>
+                  </a:txBody>
+                  <a:tcPr marL="133350" marR="114300" marT="57150" marB="57150" anchor="ctr">
+                    <a:solidFill>
+                      <a:srgbClr val="FFF6DE"/>
+                    </a:solidFill>
+                  </a:tcPr>
+                </a:tc>
+                <a:tc>
+                  <a:txBody>
+                    <a:bodyPr/>
+                    <a:lstStyle/>
+                    <a:p>
+                      <a:pPr algn="l"/>
+                      <a:r>
+                        <a:rPr sz="2100" b="0">
+                          <a:solidFill>
+                            <a:srgbClr val="222A35"/>
+                          </a:solidFill>
+                          <a:latin typeface="Apple SD Gothic Neo"/>
+                          <a:ea typeface="Apple SD Gothic Neo"/>
+                          <a:cs typeface="Apple SD Gothic Neo"/>
+                        </a:rPr>
+                        <a:t>18개 사례의 같은 입력 / 원본 / 허용 / 후속 사건</a:t>
+                      </a:r>
+                    </a:p>
+                  </a:txBody>
+                  <a:tcPr marL="133350" marR="114300" marT="57150" marB="57150" anchor="ctr">
+                    <a:solidFill>
+                      <a:srgbClr val="FFF6DE"/>
+                    </a:solidFill>
+                  </a:tcPr>
+                </a:tc>
+              </a:tr>
+              <a:tr h="1162050">
+                <a:tc>
+                  <a:txBody>
+                    <a:bodyPr/>
+                    <a:lstStyle/>
+                    <a:p>
+                      <a:pPr algn="l"/>
+                      <a:r>
+                        <a:rPr sz="2100" b="0">
+                          <a:solidFill>
+                            <a:srgbClr val="222A35"/>
+                          </a:solidFill>
+                          <a:latin typeface="Apple SD Gothic Neo"/>
+                          <a:ea typeface="Apple SD Gothic Neo"/>
+                          <a:cs typeface="Apple SD Gothic Neo"/>
+                        </a:rPr>
+                        <a:t>반복과 집중</a:t>
+                      </a:r>
+                    </a:p>
+                  </a:txBody>
+                  <a:tcPr marL="133350" marR="114300" marT="57150" marB="57150" anchor="ctr">
+                    <a:solidFill>
+                      <a:srgbClr val="FFF6DE"/>
+                    </a:solidFill>
+                  </a:tcPr>
+                </a:tc>
+                <a:tc>
+                  <a:txBody>
+                    <a:bodyPr/>
+                    <a:lstStyle/>
+                    <a:p>
+                      <a:pPr algn="l"/>
+                      <a:r>
+                        <a:rPr sz="2100" b="0">
+                          <a:solidFill>
+                            <a:srgbClr val="222A35"/>
+                          </a:solidFill>
+                          <a:latin typeface="Apple SD Gothic Neo"/>
+                          <a:ea typeface="Apple SD Gothic Neo"/>
+                          <a:cs typeface="Apple SD Gothic Neo"/>
+                        </a:rPr>
+                        <a:t>5block × (CORE 18 + REUSE 4 + BURST 4)</a:t>
+                      </a:r>
+                    </a:p>
+                    <a:p>
+                      <a:pPr algn="l"/>
+                      <a:r>
+                        <a:rPr sz="2100" b="0">
+                          <a:solidFill>
+                            <a:srgbClr val="222A35"/>
+                          </a:solidFill>
+                          <a:latin typeface="Apple SD Gothic Neo"/>
+                          <a:ea typeface="Apple SD Gothic Neo"/>
+                          <a:cs typeface="Apple SD Gothic Neo"/>
+                        </a:rPr>
+                        <a:t>Agent burst는 0 / 0.02 / 0.04 / 0.06초에 제공</a:t>
+                      </a:r>
+                    </a:p>
+                  </a:txBody>
+                  <a:tcPr marL="133350" marR="114300" marT="57150" marB="57150" anchor="ctr">
+                    <a:solidFill>
+                      <a:srgbClr val="FFF6DE"/>
+                    </a:solidFill>
+                  </a:tcPr>
+                </a:tc>
+                <a:tc>
+                  <a:txBody>
+                    <a:bodyPr/>
+                    <a:lstStyle/>
+                    <a:p>
+                      <a:pPr algn="l"/>
+                      <a:r>
+                        <a:rPr sz="2100" b="0">
+                          <a:solidFill>
+                            <a:srgbClr val="222A35"/>
+                          </a:solidFill>
+                          <a:latin typeface="Apple SD Gothic Neo"/>
+                          <a:ea typeface="Apple SD Gothic Neo"/>
+                          <a:cs typeface="Apple SD Gothic Neo"/>
+                        </a:rPr>
+                        <a:t>같은 원본 재사용 / 경쟁 / 추가 상태와 copy</a:t>
+                      </a:r>
+                    </a:p>
+                  </a:txBody>
+                  <a:tcPr marL="133350" marR="114300" marT="57150" marB="57150" anchor="ctr">
+                    <a:solidFill>
+                      <a:srgbClr val="FFF6DE"/>
+                    </a:solidFill>
+                  </a:tcPr>
+                </a:tc>
+              </a:tr>
+              <a:tr h="1162050">
+                <a:tc>
+                  <a:txBody>
+                    <a:bodyPr/>
+                    <a:lstStyle/>
+                    <a:p>
+                      <a:pPr algn="l"/>
+                      <a:r>
+                        <a:rPr sz="2100" b="0">
+                          <a:solidFill>
+                            <a:srgbClr val="222A35"/>
+                          </a:solidFill>
+                          <a:latin typeface="Apple SD Gothic Neo"/>
+                          <a:ea typeface="Apple SD Gothic Neo"/>
+                          <a:cs typeface="Apple SD Gothic Neo"/>
+                        </a:rPr>
+                        <a:t>초기 자료와 동시 부하</a:t>
+                      </a:r>
+                    </a:p>
+                  </a:txBody>
+                  <a:tcPr marL="133350" marR="114300" marT="57150" marB="57150" anchor="ctr">
+                    <a:solidFill>
+                      <a:srgbClr val="FFF6DE"/>
+                    </a:solidFill>
+                  </a:tcPr>
+                </a:tc>
+                <a:tc>
+                  <a:txBody>
+                    <a:bodyPr/>
+                    <a:lstStyle/>
+                    <a:p>
+                      <a:pPr algn="l"/>
+                      <a:r>
+                        <a:rPr sz="2100" b="0">
+                          <a:solidFill>
+                            <a:srgbClr val="222A35"/>
+                          </a:solidFill>
+                          <a:latin typeface="Apple SD Gothic Neo"/>
+                          <a:ea typeface="Apple SD Gothic Neo"/>
+                          <a:cs typeface="Apple SD Gothic Neo"/>
+                        </a:rPr>
+                        <a:t>과거 2,000turn / 완료 Task 200개 / 원본 30개</a:t>
+                      </a:r>
+                    </a:p>
+                    <a:p>
+                      <a:pPr algn="l"/>
+                      <a:r>
+                        <a:rPr sz="2100" b="0">
+                          <a:solidFill>
+                            <a:srgbClr val="222A35"/>
+                          </a:solidFill>
+                          <a:latin typeface="Apple SD Gothic Neo"/>
+                          <a:ea typeface="Apple SD Gothic Neo"/>
+                          <a:cs typeface="Apple SD Gothic Neo"/>
+                        </a:rPr>
+                        <a:t>활성 Task 최대 10개 / cloud call 최대 4개</a:t>
+                      </a:r>
+                    </a:p>
+                  </a:txBody>
+                  <a:tcPr marL="133350" marR="114300" marT="57150" marB="57150" anchor="ctr">
+                    <a:solidFill>
+                      <a:srgbClr val="FFF6DE"/>
+                    </a:solidFill>
+                  </a:tcPr>
+                </a:tc>
+                <a:tc>
+                  <a:txBody>
+                    <a:bodyPr/>
+                    <a:lstStyle/>
+                    <a:p>
+                      <a:pPr algn="l"/>
+                      <a:r>
+                        <a:rPr sz="2100" b="0">
+                          <a:solidFill>
+                            <a:srgbClr val="222A35"/>
+                          </a:solidFill>
+                          <a:latin typeface="Apple SD Gothic Neo"/>
+                          <a:ea typeface="Apple SD Gothic Neo"/>
+                          <a:cs typeface="Apple SD Gothic Neo"/>
+                        </a:rPr>
+                        <a:t>복원, 초기 생산, 준비 비용과 동시 할당도 포함</a:t>
+                      </a:r>
+                    </a:p>
+                  </a:txBody>
+                  <a:tcPr marL="133350" marR="114300" marT="57150" marB="57150" anchor="ctr">
+                    <a:solidFill>
+                      <a:srgbClr val="FFF6DE"/>
+                    </a:solidFill>
+                  </a:tcPr>
+                </a:tc>
+              </a:tr>
+              <a:tr h="1162050">
+                <a:tc>
+                  <a:txBody>
+                    <a:bodyPr/>
+                    <a:lstStyle/>
+                    <a:p>
+                      <a:pPr algn="l"/>
+                      <a:r>
+                        <a:rPr sz="2100" b="0">
+                          <a:solidFill>
+                            <a:srgbClr val="222A35"/>
+                          </a:solidFill>
+                          <a:latin typeface="Apple SD Gothic Neo"/>
+                          <a:ea typeface="Apple SD Gothic Neo"/>
+                          <a:cs typeface="Apple SD Gothic Neo"/>
+                        </a:rPr>
+                        <a:t>정확성과 시간</a:t>
+                      </a:r>
+                    </a:p>
+                  </a:txBody>
+                  <a:tcPr marL="133350" marR="114300" marT="57150" marB="57150" anchor="ctr">
+                    <a:solidFill>
+                      <a:srgbClr val="FFF6DE"/>
+                    </a:solidFill>
+                  </a:tcPr>
+                </a:tc>
+                <a:tc>
+                  <a:txBody>
+                    <a:bodyPr/>
+                    <a:lstStyle/>
+                    <a:p>
+                      <a:pPr algn="l"/>
+                      <a:r>
+                        <a:rPr sz="2100" b="0">
+                          <a:solidFill>
+                            <a:srgbClr val="222A35"/>
+                          </a:solidFill>
+                          <a:latin typeface="Apple SD Gothic Neo"/>
+                          <a:ea typeface="Apple SD Gothic Neo"/>
+                          <a:cs typeface="Apple SD Gothic Neo"/>
+                        </a:rPr>
+                        <a:t>R1 CORE의 18개 × 5회 = 90회</a:t>
+                      </a:r>
+                    </a:p>
+                    <a:p>
+                      <a:pPr algn="l"/>
+                      <a:r>
+                        <a:rPr sz="2100" b="0">
+                          <a:solidFill>
+                            <a:srgbClr val="222A35"/>
+                          </a:solidFill>
+                          <a:latin typeface="Apple SD Gothic Neo"/>
+                          <a:ea typeface="Apple SD Gothic Neo"/>
+                          <a:cs typeface="Apple SD Gothic Neo"/>
+                        </a:rPr>
+                        <a:t>같은 장면의 첫 유효 반응과 최종 결과 관측</a:t>
+                      </a:r>
+                    </a:p>
+                  </a:txBody>
+                  <a:tcPr marL="133350" marR="114300" marT="57150" marB="57150" anchor="ctr">
+                    <a:solidFill>
+                      <a:srgbClr val="FFF6DE"/>
+                    </a:solidFill>
+                  </a:tcPr>
+                </a:tc>
+                <a:tc>
+                  <a:txBody>
+                    <a:bodyPr/>
+                    <a:lstStyle/>
+                    <a:p>
+                      <a:pPr algn="l"/>
+                      <a:r>
+                        <a:rPr sz="2100" b="0">
+                          <a:solidFill>
+                            <a:srgbClr val="222A35"/>
+                          </a:solidFill>
+                          <a:latin typeface="Apple SD Gothic Neo"/>
+                          <a:ea typeface="Apple SD Gothic Neo"/>
+                          <a:cs typeface="Apple SD Gothic Neo"/>
+                        </a:rPr>
+                        <a:t>정확성 540조건 / I와 T 각각 30관측</a:t>
+                      </a:r>
+                    </a:p>
+                  </a:txBody>
+                  <a:tcPr marL="133350" marR="114300" marT="57150" marB="57150" anchor="ctr">
+                    <a:solidFill>
+                      <a:srgbClr val="FFF6DE"/>
+                    </a:solidFill>
+                  </a:tcPr>
+                </a:tc>
+              </a:tr>
+              <a:tr h="1352550">
+                <a:tc>
+                  <a:txBody>
+                    <a:bodyPr/>
+                    <a:lstStyle/>
+                    <a:p>
+                      <a:pPr algn="l"/>
+                      <a:r>
+                        <a:rPr sz="2100" b="0">
+                          <a:solidFill>
+                            <a:srgbClr val="222A35"/>
+                          </a:solidFill>
+                          <a:latin typeface="Apple SD Gothic Neo"/>
+                          <a:ea typeface="Apple SD Gothic Neo"/>
+                          <a:cs typeface="Apple SD Gothic Neo"/>
+                        </a:rPr>
+                        <a:t>비용과 메모리</a:t>
+                      </a:r>
+                    </a:p>
+                  </a:txBody>
+                  <a:tcPr marL="133350" marR="114300" marT="57150" marB="57150" anchor="ctr">
+                    <a:solidFill>
+                      <a:srgbClr val="FFF6DE"/>
+                    </a:solidFill>
+                  </a:tcPr>
+                </a:tc>
+                <a:tc>
+                  <a:txBody>
+                    <a:bodyPr/>
+                    <a:lstStyle/>
+                    <a:p>
+                      <a:pPr algn="l"/>
+                      <a:r>
+                        <a:rPr sz="2100" b="0">
+                          <a:solidFill>
+                            <a:srgbClr val="222A35"/>
+                          </a:solidFill>
+                          <a:latin typeface="Apple SD Gothic Neo"/>
+                          <a:ea typeface="Apple SD Gothic Neo"/>
+                          <a:cs typeface="Apple SD Gothic Neo"/>
+                        </a:rPr>
+                        <a:t>동일 W100을 3회 독립 수행</a:t>
+                      </a:r>
+                    </a:p>
+                    <a:p>
+                      <a:pPr algn="l"/>
+                      <a:r>
+                        <a:rPr sz="2100" b="0">
+                          <a:solidFill>
+                            <a:srgbClr val="222A35"/>
+                          </a:solidFill>
+                          <a:latin typeface="Apple SD Gothic Neo"/>
+                          <a:ea typeface="Apple SD Gothic Neo"/>
+                          <a:cs typeface="Apple SD Gothic Neo"/>
+                        </a:rPr>
+                        <a:t>입력 음성 264초 / 출력 참조 예산 914초</a:t>
+                      </a:r>
+                    </a:p>
+                  </a:txBody>
+                  <a:tcPr marL="133350" marR="114300" marT="57150" marB="57150" anchor="ctr">
+                    <a:solidFill>
+                      <a:srgbClr val="FFF6DE"/>
+                    </a:solidFill>
+                  </a:tcPr>
+                </a:tc>
+                <a:tc>
+                  <a:txBody>
+                    <a:bodyPr/>
+                    <a:lstStyle/>
+                    <a:p>
+                      <a:pPr algn="l"/>
+                      <a:r>
+                        <a:rPr sz="2100" b="0">
+                          <a:solidFill>
+                            <a:srgbClr val="222A35"/>
+                          </a:solidFill>
+                          <a:latin typeface="Apple SD Gothic Neo"/>
+                          <a:ea typeface="Apple SD Gothic Neo"/>
+                          <a:cs typeface="Apple SD Gothic Neo"/>
+                        </a:rPr>
+                        <a:t>비용: 활동 총액의 평균 ≤ $1.50</a:t>
+                      </a:r>
+                    </a:p>
+                    <a:p>
+                      <a:pPr algn="l"/>
+                      <a:r>
+                        <a:rPr sz="2100" b="0">
+                          <a:solidFill>
+                            <a:srgbClr val="222A35"/>
+                          </a:solidFill>
+                          <a:latin typeface="Apple SD Gothic Neo"/>
+                          <a:ea typeface="Apple SD Gothic Neo"/>
+                          <a:cs typeface="Apple SD Gothic Neo"/>
+                        </a:rPr>
+                        <a:t>메모리: 모든 활동의 최대 commit ≤ 4GiB</a:t>
+                      </a:r>
+                    </a:p>
+                  </a:txBody>
+                  <a:tcPr marL="133350" marR="114300" marT="57150" marB="57150" anchor="ctr">
+                    <a:solidFill>
+                      <a:srgbClr val="FFF6DE"/>
+                    </a:solidFill>
+                  </a:tcPr>
+                </a:tc>
+              </a:tr>
+              <a:tr h="1009650">
+                <a:tc>
+                  <a:txBody>
+                    <a:bodyPr/>
+                    <a:lstStyle/>
+                    <a:p>
+                      <a:pPr algn="l"/>
+                      <a:r>
+                        <a:rPr sz="2100" b="0">
+                          <a:solidFill>
+                            <a:srgbClr val="222A35"/>
+                          </a:solidFill>
+                          <a:latin typeface="Apple SD Gothic Neo"/>
+                          <a:ea typeface="Apple SD Gothic Neo"/>
+                          <a:cs typeface="Apple SD Gothic Neo"/>
+                        </a:rPr>
+                        <a:t>회수와 보호</a:t>
+                      </a:r>
+                    </a:p>
+                  </a:txBody>
+                  <a:tcPr marL="133350" marR="114300" marT="57150" marB="57150" anchor="ctr">
+                    <a:solidFill>
+                      <a:srgbClr val="FFF6DE"/>
+                    </a:solidFill>
+                  </a:tcPr>
+                </a:tc>
+                <a:tc>
+                  <a:txBody>
+                    <a:bodyPr/>
+                    <a:lstStyle/>
+                    <a:p>
+                      <a:pPr algn="l"/>
+                      <a:r>
+                        <a:rPr sz="2100" b="0">
+                          <a:solidFill>
+                            <a:srgbClr val="222A35"/>
+                          </a:solidFill>
+                          <a:latin typeface="Apple SD Gothic Neo"/>
+                          <a:ea typeface="Apple SD Gothic Neo"/>
+                          <a:cs typeface="Apple SD Gothic Neo"/>
+                        </a:rPr>
+                        <a:t>원본 갱신 20건 / maintenance 10회 / 마지막 철회</a:t>
+                      </a:r>
+                    </a:p>
+                    <a:p>
+                      <a:pPr algn="l"/>
+                      <a:r>
+                        <a:rPr sz="2100" b="0">
+                          <a:solidFill>
+                            <a:srgbClr val="222A35"/>
+                          </a:solidFill>
+                          <a:latin typeface="Apple SD Gothic Neo"/>
+                          <a:ea typeface="Apple SD Gothic Neo"/>
+                          <a:cs typeface="Apple SD Gothic Neo"/>
+                        </a:rPr>
+                        <a:t>신규 입력 종료 후 drain ≤30초, idle probe 10초</a:t>
+                      </a:r>
+                    </a:p>
+                  </a:txBody>
+                  <a:tcPr marL="133350" marR="114300" marT="57150" marB="57150" anchor="ctr">
+                    <a:solidFill>
+                      <a:srgbClr val="FFF6DE"/>
+                    </a:solidFill>
+                  </a:tcPr>
+                </a:tc>
+                <a:tc>
+                  <a:txBody>
+                    <a:bodyPr/>
+                    <a:lstStyle/>
+                    <a:p>
+                      <a:pPr algn="l"/>
+                      <a:r>
+                        <a:rPr sz="2100" b="0">
+                          <a:solidFill>
+                            <a:srgbClr val="222A35"/>
+                          </a:solidFill>
+                          <a:latin typeface="Apple SD Gothic Neo"/>
+                          <a:ea typeface="Apple SD Gothic Neo"/>
+                          <a:cs typeface="Apple SD Gothic Neo"/>
+                        </a:rPr>
+                        <a:t>완료/권한/중복 회귀 유지, 유휴 증가 ≤16MiB</a:t>
+                      </a:r>
+                    </a:p>
+                    <a:p>
+                      <a:pPr algn="l"/>
+                      <a:r>
+                        <a:rPr sz="2100" b="0">
+                          <a:solidFill>
+                            <a:srgbClr val="222A35"/>
+                          </a:solidFill>
+                          <a:latin typeface="Apple SD Gothic Neo"/>
+                          <a:ea typeface="Apple SD Gothic Neo"/>
+                          <a:cs typeface="Apple SD Gothic Neo"/>
+                        </a:rPr>
+                        <a:t>변경 QA는 별도 6과제에서 같은 기능 계약 유지</a:t>
+                      </a:r>
+                    </a:p>
+                  </a:txBody>
+                  <a:tcPr marL="133350" marR="114300" marT="57150" marB="57150" anchor="ctr">
+                    <a:solidFill>
+                      <a:srgbClr val="FFF6DE"/>
+                    </a:solidFill>
+                  </a:tcPr>
+                </a:tc>
+              </a:tr>
+            </a:tbl>
+          </a:graphicData>
+        </a:graphic>
+      </p:graphicFrame>
+      <p:sp>
+        <p:nvSpPr>
+          <p:cNvPr id="7" name="footer">
+            <a:extLst xmlns:a="http://schemas.openxmlformats.org/drawingml/2006/main">
+              <a:ext uri="{FF2B5EF4-FFF2-40B4-BE49-F238E27FC236}">
+                <a16:creationId xmlns:a16="http://schemas.microsoft.com/office/drawing/2014/main" id="{2314B6E2-0F18-4C6D-A3D5-90B03A865BAC}"/>
+              </a:ext>
+            </a:extLst>
+          </p:cNvPr>
+          <p:cNvSpPr>
+            <a:spLocks xmlns:a="http://schemas.openxmlformats.org/drawingml/2006/main" noGrp="1"/>
+          </p:cNvSpPr>
+          <p:nvPr/>
+        </p:nvSpPr>
+        <p:spPr>
+          <a:xfrm xmlns:a="http://schemas.openxmlformats.org/drawingml/2006/main">
+            <a:off x="457200" y="9906000"/>
+            <a:ext cx="17373600" cy="285750"/>
+          </a:xfrm>
+          <a:prstGeom xmlns:a="http://schemas.openxmlformats.org/drawingml/2006/main" prst="rect">
+            <a:avLst/>
+          </a:prstGeom>
+          <a:noFill xmlns:a="http://schemas.openxmlformats.org/drawingml/2006/main"/>
+          <a:ln xmlns:a="http://schemas.openxmlformats.org/drawingml/2006/main" w="0">
+            <a:noFill/>
+          </a:ln>
+        </p:spPr>
+        <p:txBody>
+          <a:bodyPr xmlns:a="http://schemas.openxmlformats.org/drawingml/2006/main" wrap="none" lIns="0" tIns="0" rIns="0" bIns="0">
+            <a:noAutofit/>
+          </a:bodyPr>
+          <a:lstStyle xmlns:a="http://schemas.openxmlformats.org/drawingml/2006/main"/>
+          <a:p xmlns:a="http://schemas.openxmlformats.org/drawingml/2006/main">
+            <a:pPr>
+              <a:defRPr sz="1650" b="0">
+                <a:solidFill>
+                  <a:srgbClr val="56606B"/>
+                </a:solidFill>
+                <a:latin typeface="Apple SD Gothic Neo"/>
+                <a:ea typeface="Apple SD Gothic Neo"/>
+                <a:cs typeface="Apple SD Gothic Neo"/>
+              </a:defRPr>
+            </a:pPr>
+            <a:r>
+              <a:rPr sz="1650" b="0">
+                <a:solidFill>
+                  <a:srgbClr val="56606B"/>
+                </a:solidFill>
+                <a:latin typeface="Apple SD Gothic Neo"/>
+                <a:ea typeface="Apple SD Gothic Neo"/>
+                <a:cs typeface="Apple SD Gothic Neo"/>
+              </a:rPr>
+              <a:t>03-02 §8.0에 사례별 횟수와 공통 사건 정의 / 비용은 USD/W100, 메모리는 MiB / 작성자 평가 예산</a:t>
+            </a:r>
+          </a:p>
+        </p:txBody>
+      </p:sp>
+    </p:spTree>
+    <p:extLst>
+      <p:ext uri="{BB962C8B-B14F-4D97-AF65-F5344CB8AC3E}">
+        <p14:creationId xmlns:p14="http://schemas.microsoft.com/office/powerpoint/2010/main" val="1312184762"/>
       </p:ext>
     </p:extLst>
   </p:cSld>

--- a/docs/presentations_files/quality-attributes/VIA-quality-attributes.pptx
+++ b/docs/presentations_files/quality-attributes/VIA-quality-attributes.pptx
@@ -2,18 +2,18 @@
 <file path=ppt/presentation.xml><?xml version="1.0" encoding="utf-8"?>
 <p:presentation xmlns:p="http://schemas.openxmlformats.org/presentationml/2006/main">
   <p:sldMasterIdLst>
-    <p:sldMasterId xmlns:r="http://schemas.openxmlformats.org/officeDocument/2006/relationships" id="2147483648" r:id="Rdb338020027a4cbf"/>
+    <p:sldMasterId xmlns:r="http://schemas.openxmlformats.org/officeDocument/2006/relationships" id="2147483648" r:id="R6ef4b54ff75845a4"/>
   </p:sldMasterIdLst>
   <p:notesMasterIdLst>
-    <p:notesMasterId xmlns:r="http://schemas.openxmlformats.org/officeDocument/2006/relationships" r:id="R3d69dfb7f3cb430e"/>
+    <p:notesMasterId xmlns:r="http://schemas.openxmlformats.org/officeDocument/2006/relationships" r:id="R2518308b863d468c"/>
   </p:notesMasterIdLst>
   <p:sldIdLst>
-    <p:sldId xmlns:r="http://schemas.openxmlformats.org/officeDocument/2006/relationships" id="256" r:id="Re9f0758f24a34aa5"/>
-    <p:sldId xmlns:r="http://schemas.openxmlformats.org/officeDocument/2006/relationships" id="257" r:id="R4bbea0536f414d85"/>
-    <p:sldId xmlns:r="http://schemas.openxmlformats.org/officeDocument/2006/relationships" id="258" r:id="R2111e12e2522440a"/>
-    <p:sldId xmlns:r="http://schemas.openxmlformats.org/officeDocument/2006/relationships" id="259" r:id="Rdf505f5260e64c61"/>
-    <p:sldId xmlns:r="http://schemas.openxmlformats.org/officeDocument/2006/relationships" id="260" r:id="R66a5380a92e645e9"/>
-    <p:sldId xmlns:r="http://schemas.openxmlformats.org/officeDocument/2006/relationships" id="261" r:id="R65c258277b3949c5"/>
+    <p:sldId xmlns:r="http://schemas.openxmlformats.org/officeDocument/2006/relationships" id="256" r:id="R8a278eb5dc3749bc"/>
+    <p:sldId xmlns:r="http://schemas.openxmlformats.org/officeDocument/2006/relationships" id="257" r:id="R6ba8debb836a48a4"/>
+    <p:sldId xmlns:r="http://schemas.openxmlformats.org/officeDocument/2006/relationships" id="258" r:id="R7e16c22dab894b56"/>
+    <p:sldId xmlns:r="http://schemas.openxmlformats.org/officeDocument/2006/relationships" id="259" r:id="Rdeef11fb06be41d9"/>
+    <p:sldId xmlns:r="http://schemas.openxmlformats.org/officeDocument/2006/relationships" id="260" r:id="Rb6196ba3407d4c3a"/>
+    <p:sldId xmlns:r="http://schemas.openxmlformats.org/officeDocument/2006/relationships" id="261" r:id="R3f65e2ee0369415c"/>
   </p:sldIdLst>
   <p:sldSz cx="18288000" cy="10287000"/>
   <p:notesSz cx="6858000" cy="9144000"/>
@@ -472,7 +472,7 @@
           </a:p>
           <a:p xmlns:a="http://schemas.openxmlformats.org/drawingml/2006/main">
             <a:r>
-              <a:t>원본 SHA-256: 199a8277dcefdd94f2cd470355c800923e9c2653b110e873dc3ae2bda5246895</a:t>
+              <a:t>원본 SHA-256: e89c163288eaeceeeea3e8a44ef56f903278aefd9c997db8756bcdd27170d1fa</a:t>
             </a:r>
           </a:p>
           <a:p xmlns:a="http://schemas.openxmlformats.org/drawingml/2006/main">
@@ -3172,7 +3172,7 @@
           </a:p>
           <a:p xmlns:a="http://schemas.openxmlformats.org/drawingml/2006/main">
             <a:r>
-              <a:t>Groq 공식 모델 단가/생성률: https://console.groq.com/docs/models</a:t>
+              <a:t>Google Gemini 3 Flash 공식 단가: https://ai.google.dev/gemini-api/docs/pricing#gemini-3-flash-preview</a:t>
             </a:r>
           </a:p>
           <a:p xmlns:a="http://schemas.openxmlformats.org/drawingml/2006/main">
@@ -3262,7 +3262,7 @@
           </a:p>
           <a:p xmlns:a="http://schemas.openxmlformats.org/drawingml/2006/main">
             <a:r>
-              <a:t>Nielsen의 0.1/1초는 참고 기준이며 평균과 95% 규칙은 작성자 예산이다. 예시 계산은 전사 0.10 + 첫 출력 0.30 + 100/450 생성 + 코드·읽기·확정 0.08 + 음성 0.25 = 0.9522초다. 450 token/s만 외부 참조이고 나머지는 가정이다. 의미 처리가 필요한 정정·질문·거부를 local stop로 대체하지 않는다.</a:t>
+              <a:t>Nielsen의 0.1/1초는 참고 기준이며 평균과 95% 규칙은 작성자 예산이다. Gemini 생성률 200 token/s를 비롯한 지연은 모두 작성자 가정이다. 전사 0.10 + 첫 출력 0.30 + 의미 출력 100/200 + 코드·읽기·확정 0.08 + 음성 0.25 = 1.23초로, 이 직렬 경로는 1초 예산을 넘는다. 유효한 반응에 필요한 의미 출력이 50 token인 경우에만 같은 가정에서 0.98초다. 따라서 필요한 의미를 유지한 짧은 출력, 입력 중 선행 처리 또는 병렬 경로가 목표를 충족하는지 실제 사례에서 확인해야 한다. 50 token은 전체 200 token 호출 예산을 일괄 축소하거나 placeholder를 정답으로 인정하는 규칙이 아니다. 의미 처리가 필요한 정정·질문·거부를 local stop로 대체하지 않는다.</a:t>
             </a:r>
           </a:p>
           <a:p xmlns:a="http://schemas.openxmlformats.org/drawingml/2006/main">
@@ -3462,7 +3462,7 @@
           </a:p>
           <a:p xmlns:a="http://schemas.openxmlformats.org/drawingml/2006/main">
             <a:r>
-              <a:t>Nielsen의 0.1/1초는 참고 기준이며 평균과 95% 규칙은 작성자 예산이다. 예시 계산은 전사 0.10 + 첫 출력 0.30 + 100/450 생성 + 코드·읽기·확정 0.08 + 음성 0.25 = 0.9522초다. 450 token/s만 외부 참조이고 나머지는 가정이다. 의미 처리가 필요한 정정·질문·거부를 local stop로 대체하지 않는다.</a:t>
+              <a:t>Nielsen의 0.1/1초는 참고 기준이며 평균과 95% 규칙은 작성자 예산이다. Gemini 생성률 200 token/s를 비롯한 지연은 모두 작성자 가정이다. 전사 0.10 + 첫 출력 0.30 + 의미 출력 100/200 + 코드·읽기·확정 0.08 + 음성 0.25 = 1.23초로, 이 직렬 경로는 1초 예산을 넘는다. 유효한 반응에 필요한 의미 출력이 50 token인 경우에만 같은 가정에서 0.98초다. 따라서 필요한 의미를 유지한 짧은 출력, 입력 중 선행 처리 또는 병렬 경로가 목표를 충족하는지 실제 사례에서 확인해야 한다. 50 token은 전체 200 token 호출 예산을 일괄 축소하거나 placeholder를 정답으로 인정하는 규칙이 아니다. 의미 처리가 필요한 정정·질문·거부를 local stop로 대체하지 않는다.</a:t>
             </a:r>
           </a:p>
           <a:p xmlns:a="http://schemas.openxmlformats.org/drawingml/2006/main">
@@ -6777,7 +6777,7 @@
           </a:p>
           <a:p xmlns:a="http://schemas.openxmlformats.org/drawingml/2006/main">
             <a:r>
-              <a:t>원본 SHA-256: 199a8277dcefdd94f2cd470355c800923e9c2653b110e873dc3ae2bda5246895</a:t>
+              <a:t>원본 SHA-256: e89c163288eaeceeeea3e8a44ef56f903278aefd9c997db8756bcdd27170d1fa</a:t>
             </a:r>
           </a:p>
           <a:p xmlns:a="http://schemas.openxmlformats.org/drawingml/2006/main">
@@ -6812,7 +6812,7 @@
           </a:p>
           <a:p xmlns:a="http://schemas.openxmlformats.org/drawingml/2006/main">
             <a:r>
-              <a:t>목표 근거: 동일 21사례의 의미 62호출/음성 입력 50초/출력 179초 예산에서 기본 $0.223167, 여유 $0.076833. 호출·출력은 작성자 가정이며 실제 사용량으로 대체 (§5)</a:t>
+              <a:t>목표 근거: 동일 21사례의 의미 62호출/음성 입력 50초/출력 179초 예산에서 기본 $0.173567, 여유 $0.126433. 호출·출력은 작성자 가정이며 실제 사용량으로 대체 (§5)</a:t>
             </a:r>
           </a:p>
           <a:p xmlns:a="http://schemas.openxmlformats.org/drawingml/2006/main">
@@ -6827,7 +6827,7 @@
           </a:p>
           <a:p xmlns:a="http://schemas.openxmlformats.org/drawingml/2006/main">
             <a:r>
-              <a:t>Groq 공식 모델 단가/생성률: https://console.groq.com/docs/models</a:t>
+              <a:t>Google Gemini 3 Flash 공식 단가: https://ai.google.dev/gemini-api/docs/pricing#gemini-3-flash-preview</a:t>
             </a:r>
           </a:p>
           <a:p xmlns:a="http://schemas.openxmlformats.org/drawingml/2006/main">
@@ -6932,7 +6932,7 @@
           </a:p>
           <a:p xmlns:a="http://schemas.openxmlformats.org/drawingml/2006/main">
             <a:r>
-              <a:t>| 의미62호출, 입력124,000/출력12,400 token | 0.148800 |</a:t>
+              <a:t>| 의미62호출, 입력124,000/출력12,400 token | 0.099200 |</a:t>
             </a:r>
           </a:p>
           <a:p xmlns:a="http://schemas.openxmlformats.org/drawingml/2006/main">
@@ -6947,12 +6947,12 @@
           </a:p>
           <a:p xmlns:a="http://schemas.openxmlformats.org/drawingml/2006/main">
             <a:r>
-              <a:t>| 기본 총액 | **0.223167** |</a:t>
-            </a:r>
-          </a:p>
-          <a:p xmlns:a="http://schemas.openxmlformats.org/drawingml/2006/main">
-            <a:r>
-              <a:t>| 초기/추가생산/재시도 여유 | **0.076833** |</a:t>
+              <a:t>| 기본 총액 | **0.173567** |</a:t>
+            </a:r>
+          </a:p>
+          <a:p xmlns:a="http://schemas.openxmlformats.org/drawingml/2006/main">
+            <a:r>
+              <a:t>| 초기/추가생산/재시도 여유 | **0.126433** |</a:t>
             </a:r>
           </a:p>
           <a:p xmlns:a="http://schemas.openxmlformats.org/drawingml/2006/main">
@@ -6967,7 +6967,7 @@
           </a:p>
           <a:p xmlns:a="http://schemas.openxmlformats.org/drawingml/2006/main">
             <a:r>
-              <a:t>W100의 $1.50를 새 묶음에 그대로 적용하지 않고 동일 P21 사용량에서 다시 계산했다. 기본 대비 약 34.43%의 추가 여유를 둔 작성자 평가 예산이며 상품 가격이나 모델 성능 보장이 아니다. Source 변경 4건이 모델 생산 4호출을 강제하지 않는다. 실제 backfill·추가 질문·재시도가 많으면 목표 미달을 그대로 보고한다.</a:t>
+              <a:t>W100의 $1.50를 새 묶음에 그대로 적용하지 않고 동일 P21 사용량에서 다시 계산했다. 기본 대비 약 72.84%의 추가 여유를 둔 작성자 평가 예산이며 상품 가격이나 모델 성능 보장이 아니다. Source 변경 4건이 모델 생산 4호출을 강제하지 않는다. 실제 backfill·추가 질문·재시도가 많으면 목표 미달을 그대로 보고한다.</a:t>
             </a:r>
           </a:p>
           <a:p xmlns:a="http://schemas.openxmlformats.org/drawingml/2006/main">
@@ -11002,7 +11002,7 @@
           </a:p>
           <a:p xmlns:a="http://schemas.openxmlformats.org/drawingml/2006/main">
             <a:r>
-              <a:t>원본 SHA-256: 199a8277dcefdd94f2cd470355c800923e9c2653b110e873dc3ae2bda5246895</a:t>
+              <a:t>원본 SHA-256: e89c163288eaeceeeea3e8a44ef56f903278aefd9c997db8756bcdd27170d1fa</a:t>
             </a:r>
           </a:p>
           <a:p xmlns:a="http://schemas.openxmlformats.org/drawingml/2006/main">
@@ -14262,7 +14262,7 @@
           </a:p>
           <a:p xmlns:a="http://schemas.openxmlformats.org/drawingml/2006/main">
             <a:r>
-              <a:t>원본 SHA-256: 199a8277dcefdd94f2cd470355c800923e9c2653b110e873dc3ae2bda5246895</a:t>
+              <a:t>원본 SHA-256: e89c163288eaeceeeea3e8a44ef56f903278aefd9c997db8756bcdd27170d1fa</a:t>
             </a:r>
           </a:p>
           <a:p xmlns:a="http://schemas.openxmlformats.org/drawingml/2006/main">
@@ -17522,7 +17522,7 @@
           </a:p>
           <a:p xmlns:a="http://schemas.openxmlformats.org/drawingml/2006/main">
             <a:r>
-              <a:t>원본 SHA-256: 199a8277dcefdd94f2cd470355c800923e9c2653b110e873dc3ae2bda5246895</a:t>
+              <a:t>원본 SHA-256: e89c163288eaeceeeea3e8a44ef56f903278aefd9c997db8756bcdd27170d1fa</a:t>
             </a:r>
           </a:p>
           <a:p xmlns:a="http://schemas.openxmlformats.org/drawingml/2006/main">
@@ -20782,7 +20782,7 @@
           </a:p>
           <a:p xmlns:a="http://schemas.openxmlformats.org/drawingml/2006/main">
             <a:r>
-              <a:t>원본 SHA-256: 199a8277dcefdd94f2cd470355c800923e9c2653b110e873dc3ae2bda5246895</a:t>
+              <a:t>원본 SHA-256: e89c163288eaeceeeea3e8a44ef56f903278aefd9c997db8756bcdd27170d1fa</a:t>
             </a:r>
           </a:p>
           <a:p xmlns:a="http://schemas.openxmlformats.org/drawingml/2006/main">
@@ -24015,7 +24015,7 @@
   </p:cSld>
   <p:clrMap bg1="lt1" tx1="dk1" bg2="lt2" tx2="dk2" accent1="accent1" accent2="accent2" accent3="accent3" accent4="accent4" accent5="accent5" accent6="accent6" hlink="hlink" folHlink="folHlink"/>
   <p:sldLayoutIdLst>
-    <p:sldLayoutId xmlns:r="http://schemas.openxmlformats.org/officeDocument/2006/relationships" id="2147483649" r:id="R736ddff16ac34c65"/>
+    <p:sldLayoutId xmlns:r="http://schemas.openxmlformats.org/officeDocument/2006/relationships" id="2147483649" r:id="R22f28c94f3ef4210"/>
   </p:sldLayoutIdLst>
   <p:txStyles>
     <p:titleStyle>
@@ -24566,7 +24566,7 @@
           <p:cNvPr id="8" name="title">
             <a:extLst xmlns:a="http://schemas.openxmlformats.org/drawingml/2006/main">
               <a:ext uri="{FF2B5EF4-FFF2-40B4-BE49-F238E27FC236}">
-                <a16:creationId xmlns:a16="http://schemas.microsoft.com/office/drawing/2014/main" id="{471E296E-CD6E-43A5-8411-762372434639}"/>
+                <a16:creationId xmlns:a16="http://schemas.microsoft.com/office/drawing/2014/main" id="{01A40800-1D08-4B9F-BFC4-59C00ED6CA1D}"/>
               </a:ext>
             </a:extLst>
           </p:cNvPr>
@@ -24623,7 +24623,7 @@
           <p:cNvPr id="2" name="header-rule">
             <a:extLst xmlns:a="http://schemas.openxmlformats.org/drawingml/2006/main">
               <a:ext uri="{FF2B5EF4-FFF2-40B4-BE49-F238E27FC236}">
-                <a16:creationId xmlns:a16="http://schemas.microsoft.com/office/drawing/2014/main" id="{DE8E2894-D1E0-43D7-9A0D-E246C2AB8762}"/>
+                <a16:creationId xmlns:a16="http://schemas.microsoft.com/office/drawing/2014/main" id="{2E10C026-1712-491B-B782-F7D4758E7D34}"/>
               </a:ext>
             </a:extLst>
           </p:cNvPr>
@@ -24653,7 +24653,7 @@
           <p:cNvPr id="3" name="page">
             <a:extLst xmlns:a="http://schemas.openxmlformats.org/drawingml/2006/main">
               <a:ext uri="{FF2B5EF4-FFF2-40B4-BE49-F238E27FC236}">
-                <a16:creationId xmlns:a16="http://schemas.microsoft.com/office/drawing/2014/main" id="{78D0E683-2586-4CDF-8F6B-E0E4581599DE}"/>
+                <a16:creationId xmlns:a16="http://schemas.microsoft.com/office/drawing/2014/main" id="{E3A4CF3D-D86C-4ADA-9B83-1B4AB8D9FD35}"/>
               </a:ext>
             </a:extLst>
           </p:cNvPr>
@@ -24710,7 +24710,7 @@
           <p:cNvPr id="4" name="headline">
             <a:extLst xmlns:a="http://schemas.openxmlformats.org/drawingml/2006/main">
               <a:ext uri="{FF2B5EF4-FFF2-40B4-BE49-F238E27FC236}">
-                <a16:creationId xmlns:a16="http://schemas.microsoft.com/office/drawing/2014/main" id="{D6EB663F-E77D-4EE2-8F58-2EC52D7EFCB9}"/>
+                <a16:creationId xmlns:a16="http://schemas.microsoft.com/office/drawing/2014/main" id="{292B725C-079B-4CCC-94AF-C428048EF712}"/>
               </a:ext>
             </a:extLst>
           </p:cNvPr>
@@ -24767,7 +24767,7 @@
           <p:cNvPr id="5" name="scope">
             <a:extLst xmlns:a="http://schemas.openxmlformats.org/drawingml/2006/main">
               <a:ext uri="{FF2B5EF4-FFF2-40B4-BE49-F238E27FC236}">
-                <a16:creationId xmlns:a16="http://schemas.microsoft.com/office/drawing/2014/main" id="{57088F58-8AA7-4D6F-9023-3A39E09AF080}"/>
+                <a16:creationId xmlns:a16="http://schemas.microsoft.com/office/drawing/2014/main" id="{D107C5B8-31A9-4D83-A7AF-42EA263BAE1A}"/>
               </a:ext>
             </a:extLst>
           </p:cNvPr>
@@ -25525,7 +25525,7 @@
           <p:cNvPr id="7" name="footer">
             <a:extLst xmlns:a="http://schemas.openxmlformats.org/drawingml/2006/main">
               <a:ext uri="{FF2B5EF4-FFF2-40B4-BE49-F238E27FC236}">
-                <a16:creationId xmlns:a16="http://schemas.microsoft.com/office/drawing/2014/main" id="{437D300C-64ED-4372-8396-21C076469DA4}"/>
+                <a16:creationId xmlns:a16="http://schemas.microsoft.com/office/drawing/2014/main" id="{9F9C085A-F731-43F0-B741-56F360529B06}"/>
               </a:ext>
             </a:extLst>
           </p:cNvPr>
@@ -25580,7 +25580,7 @@
     </p:spTree>
     <p:extLst>
       <p:ext uri="{BB962C8B-B14F-4D97-AF65-F5344CB8AC3E}">
-        <p14:creationId xmlns:p14="http://schemas.microsoft.com/office/powerpoint/2010/main" val="905329615"/>
+        <p14:creationId xmlns:p14="http://schemas.microsoft.com/office/powerpoint/2010/main" val="371557259"/>
       </p:ext>
     </p:extLst>
   </p:cSld>
@@ -25611,7 +25611,7 @@
           <p:cNvPr id="8" name="title">
             <a:extLst xmlns:a="http://schemas.openxmlformats.org/drawingml/2006/main">
               <a:ext uri="{FF2B5EF4-FFF2-40B4-BE49-F238E27FC236}">
-                <a16:creationId xmlns:a16="http://schemas.microsoft.com/office/drawing/2014/main" id="{774B63D5-BA39-431A-A829-3FFF8C4B42E4}"/>
+                <a16:creationId xmlns:a16="http://schemas.microsoft.com/office/drawing/2014/main" id="{A48A87DD-CB1C-4129-AF57-602CA23DEEA3}"/>
               </a:ext>
             </a:extLst>
           </p:cNvPr>
@@ -25668,7 +25668,7 @@
           <p:cNvPr id="2" name="header-rule">
             <a:extLst xmlns:a="http://schemas.openxmlformats.org/drawingml/2006/main">
               <a:ext uri="{FF2B5EF4-FFF2-40B4-BE49-F238E27FC236}">
-                <a16:creationId xmlns:a16="http://schemas.microsoft.com/office/drawing/2014/main" id="{2A53B135-BE27-4B35-92B0-90A1D51BC96C}"/>
+                <a16:creationId xmlns:a16="http://schemas.microsoft.com/office/drawing/2014/main" id="{729F2F94-1E00-4A1F-AEB6-890BBB38F6B5}"/>
               </a:ext>
             </a:extLst>
           </p:cNvPr>
@@ -25698,7 +25698,7 @@
           <p:cNvPr id="3" name="page">
             <a:extLst xmlns:a="http://schemas.openxmlformats.org/drawingml/2006/main">
               <a:ext uri="{FF2B5EF4-FFF2-40B4-BE49-F238E27FC236}">
-                <a16:creationId xmlns:a16="http://schemas.microsoft.com/office/drawing/2014/main" id="{ADDE07F8-8150-406F-8714-972E3B9430F7}"/>
+                <a16:creationId xmlns:a16="http://schemas.microsoft.com/office/drawing/2014/main" id="{3D1F658F-4357-4165-9148-2E47501471D1}"/>
               </a:ext>
             </a:extLst>
           </p:cNvPr>
@@ -25755,7 +25755,7 @@
           <p:cNvPr id="4" name="headline">
             <a:extLst xmlns:a="http://schemas.openxmlformats.org/drawingml/2006/main">
               <a:ext uri="{FF2B5EF4-FFF2-40B4-BE49-F238E27FC236}">
-                <a16:creationId xmlns:a16="http://schemas.microsoft.com/office/drawing/2014/main" id="{009DA816-E752-470B-91EB-B27CDC854775}"/>
+                <a16:creationId xmlns:a16="http://schemas.microsoft.com/office/drawing/2014/main" id="{2B1AFE9D-A262-4AFA-91D7-8BE8B47ED968}"/>
               </a:ext>
             </a:extLst>
           </p:cNvPr>
@@ -25812,7 +25812,7 @@
           <p:cNvPr id="5" name="scope">
             <a:extLst xmlns:a="http://schemas.openxmlformats.org/drawingml/2006/main">
               <a:ext uri="{FF2B5EF4-FFF2-40B4-BE49-F238E27FC236}">
-                <a16:creationId xmlns:a16="http://schemas.microsoft.com/office/drawing/2014/main" id="{A37AEB9F-0C62-4D83-98C9-F36F3EE912E9}"/>
+                <a16:creationId xmlns:a16="http://schemas.microsoft.com/office/drawing/2014/main" id="{E6C11848-0FDE-43CD-BA78-961F9AC117E3}"/>
               </a:ext>
             </a:extLst>
           </p:cNvPr>
@@ -26173,7 +26173,7 @@
                           <a:ea typeface="Apple SD Gothic Neo"/>
                           <a:cs typeface="Apple SD Gothic Neo"/>
                         </a:rPr>
-                        <a:t>근거: 기본 $0.223167 + 추가 생산/재시도 여유 $0.076833</a:t>
+                        <a:t>근거: 기본 $0.173567 + 추가 생산/재시도 여유 $0.126433</a:t>
                       </a:r>
                     </a:p>
                   </a:txBody>
@@ -26598,7 +26598,7 @@
           <p:cNvPr id="7" name="footer">
             <a:extLst xmlns:a="http://schemas.openxmlformats.org/drawingml/2006/main">
               <a:ext uri="{FF2B5EF4-FFF2-40B4-BE49-F238E27FC236}">
-                <a16:creationId xmlns:a16="http://schemas.microsoft.com/office/drawing/2014/main" id="{997202D6-E861-4529-9968-BBA7E09E45DB}"/>
+                <a16:creationId xmlns:a16="http://schemas.microsoft.com/office/drawing/2014/main" id="{8DA4B4D0-45E1-418A-AACD-8096F775A15B}"/>
               </a:ext>
             </a:extLst>
           </p:cNvPr>
@@ -26653,7 +26653,7 @@
     </p:spTree>
     <p:extLst>
       <p:ext uri="{BB962C8B-B14F-4D97-AF65-F5344CB8AC3E}">
-        <p14:creationId xmlns:p14="http://schemas.microsoft.com/office/powerpoint/2010/main" val="1857330174"/>
+        <p14:creationId xmlns:p14="http://schemas.microsoft.com/office/powerpoint/2010/main" val="1438102545"/>
       </p:ext>
     </p:extLst>
   </p:cSld>
@@ -26684,7 +26684,7 @@
           <p:cNvPr id="8" name="title">
             <a:extLst xmlns:a="http://schemas.openxmlformats.org/drawingml/2006/main">
               <a:ext uri="{FF2B5EF4-FFF2-40B4-BE49-F238E27FC236}">
-                <a16:creationId xmlns:a16="http://schemas.microsoft.com/office/drawing/2014/main" id="{234E718D-6A83-489E-A545-BB5D797C4575}"/>
+                <a16:creationId xmlns:a16="http://schemas.microsoft.com/office/drawing/2014/main" id="{ECFFFAB3-0863-44D6-AA74-D862C82BA11F}"/>
               </a:ext>
             </a:extLst>
           </p:cNvPr>
@@ -26741,7 +26741,7 @@
           <p:cNvPr id="2" name="header-rule">
             <a:extLst xmlns:a="http://schemas.openxmlformats.org/drawingml/2006/main">
               <a:ext uri="{FF2B5EF4-FFF2-40B4-BE49-F238E27FC236}">
-                <a16:creationId xmlns:a16="http://schemas.microsoft.com/office/drawing/2014/main" id="{11D047B2-717D-4575-B2E2-51D8A63A37F2}"/>
+                <a16:creationId xmlns:a16="http://schemas.microsoft.com/office/drawing/2014/main" id="{ED13E0D7-5F3B-4DB8-B56E-5E7BB7368F89}"/>
               </a:ext>
             </a:extLst>
           </p:cNvPr>
@@ -26771,7 +26771,7 @@
           <p:cNvPr id="3" name="page">
             <a:extLst xmlns:a="http://schemas.openxmlformats.org/drawingml/2006/main">
               <a:ext uri="{FF2B5EF4-FFF2-40B4-BE49-F238E27FC236}">
-                <a16:creationId xmlns:a16="http://schemas.microsoft.com/office/drawing/2014/main" id="{983462D7-77C7-4403-A210-C8DF65A46C71}"/>
+                <a16:creationId xmlns:a16="http://schemas.microsoft.com/office/drawing/2014/main" id="{04C168BF-42F8-45FC-9E95-7555D0EAB55E}"/>
               </a:ext>
             </a:extLst>
           </p:cNvPr>
@@ -26828,7 +26828,7 @@
           <p:cNvPr id="4" name="headline">
             <a:extLst xmlns:a="http://schemas.openxmlformats.org/drawingml/2006/main">
               <a:ext uri="{FF2B5EF4-FFF2-40B4-BE49-F238E27FC236}">
-                <a16:creationId xmlns:a16="http://schemas.microsoft.com/office/drawing/2014/main" id="{F8504D35-8965-443C-8DB1-0007A3AD8456}"/>
+                <a16:creationId xmlns:a16="http://schemas.microsoft.com/office/drawing/2014/main" id="{F0F77C51-5416-49BC-96B3-BFEF8B84F699}"/>
               </a:ext>
             </a:extLst>
           </p:cNvPr>
@@ -26885,7 +26885,7 @@
           <p:cNvPr id="5" name="scope">
             <a:extLst xmlns:a="http://schemas.openxmlformats.org/drawingml/2006/main">
               <a:ext uri="{FF2B5EF4-FFF2-40B4-BE49-F238E27FC236}">
-                <a16:creationId xmlns:a16="http://schemas.microsoft.com/office/drawing/2014/main" id="{B743042B-11DB-420E-B21C-957FD58E0118}"/>
+                <a16:creationId xmlns:a16="http://schemas.microsoft.com/office/drawing/2014/main" id="{FAD4B9ED-2445-4629-AC7C-85659DBE6264}"/>
               </a:ext>
             </a:extLst>
           </p:cNvPr>
@@ -27672,7 +27672,7 @@
           <p:cNvPr id="7" name="footer">
             <a:extLst xmlns:a="http://schemas.openxmlformats.org/drawingml/2006/main">
               <a:ext uri="{FF2B5EF4-FFF2-40B4-BE49-F238E27FC236}">
-                <a16:creationId xmlns:a16="http://schemas.microsoft.com/office/drawing/2014/main" id="{B06D0D60-3713-418E-A130-0C3747B4E804}"/>
+                <a16:creationId xmlns:a16="http://schemas.microsoft.com/office/drawing/2014/main" id="{921F85A3-C9BF-4172-943A-5D0429244656}"/>
               </a:ext>
             </a:extLst>
           </p:cNvPr>
@@ -27727,7 +27727,7 @@
     </p:spTree>
     <p:extLst>
       <p:ext uri="{BB962C8B-B14F-4D97-AF65-F5344CB8AC3E}">
-        <p14:creationId xmlns:p14="http://schemas.microsoft.com/office/powerpoint/2010/main" val="869638352"/>
+        <p14:creationId xmlns:p14="http://schemas.microsoft.com/office/powerpoint/2010/main" val="1267817231"/>
       </p:ext>
     </p:extLst>
   </p:cSld>
@@ -27758,7 +27758,7 @@
           <p:cNvPr id="8" name="title">
             <a:extLst xmlns:a="http://schemas.openxmlformats.org/drawingml/2006/main">
               <a:ext uri="{FF2B5EF4-FFF2-40B4-BE49-F238E27FC236}">
-                <a16:creationId xmlns:a16="http://schemas.microsoft.com/office/drawing/2014/main" id="{7F9700CD-7BA7-418D-8560-4E545AF66A8E}"/>
+                <a16:creationId xmlns:a16="http://schemas.microsoft.com/office/drawing/2014/main" id="{5C350B14-2BB9-461C-949A-68142AAE655E}"/>
               </a:ext>
             </a:extLst>
           </p:cNvPr>
@@ -27815,7 +27815,7 @@
           <p:cNvPr id="2" name="header-rule">
             <a:extLst xmlns:a="http://schemas.openxmlformats.org/drawingml/2006/main">
               <a:ext uri="{FF2B5EF4-FFF2-40B4-BE49-F238E27FC236}">
-                <a16:creationId xmlns:a16="http://schemas.microsoft.com/office/drawing/2014/main" id="{39BEDDE6-4E21-4825-8A70-7F1CBAE5B6A3}"/>
+                <a16:creationId xmlns:a16="http://schemas.microsoft.com/office/drawing/2014/main" id="{6789A051-A02F-4113-A99B-D26701672FB3}"/>
               </a:ext>
             </a:extLst>
           </p:cNvPr>
@@ -27845,7 +27845,7 @@
           <p:cNvPr id="3" name="page">
             <a:extLst xmlns:a="http://schemas.openxmlformats.org/drawingml/2006/main">
               <a:ext uri="{FF2B5EF4-FFF2-40B4-BE49-F238E27FC236}">
-                <a16:creationId xmlns:a16="http://schemas.microsoft.com/office/drawing/2014/main" id="{D09AE70C-6745-468B-A86A-F1EA05AD06C5}"/>
+                <a16:creationId xmlns:a16="http://schemas.microsoft.com/office/drawing/2014/main" id="{FE2A1DE0-D2CB-4454-9812-F4F5DE9E1874}"/>
               </a:ext>
             </a:extLst>
           </p:cNvPr>
@@ -27902,7 +27902,7 @@
           <p:cNvPr id="4" name="headline">
             <a:extLst xmlns:a="http://schemas.openxmlformats.org/drawingml/2006/main">
               <a:ext uri="{FF2B5EF4-FFF2-40B4-BE49-F238E27FC236}">
-                <a16:creationId xmlns:a16="http://schemas.microsoft.com/office/drawing/2014/main" id="{7D8693BC-0AE3-4186-A82A-4C801FC24EC4}"/>
+                <a16:creationId xmlns:a16="http://schemas.microsoft.com/office/drawing/2014/main" id="{8D4F0420-4617-4097-81E2-751518B6B232}"/>
               </a:ext>
             </a:extLst>
           </p:cNvPr>
@@ -27959,7 +27959,7 @@
           <p:cNvPr id="5" name="scope">
             <a:extLst xmlns:a="http://schemas.openxmlformats.org/drawingml/2006/main">
               <a:ext uri="{FF2B5EF4-FFF2-40B4-BE49-F238E27FC236}">
-                <a16:creationId xmlns:a16="http://schemas.microsoft.com/office/drawing/2014/main" id="{9C2EEF8B-9E9B-4C3E-8497-5221D5E1A6C7}"/>
+                <a16:creationId xmlns:a16="http://schemas.microsoft.com/office/drawing/2014/main" id="{E4B2D0BD-9530-4B94-8C86-50BEF00D3ADE}"/>
               </a:ext>
             </a:extLst>
           </p:cNvPr>
@@ -29253,7 +29253,7 @@
           <p:cNvPr id="7" name="footer">
             <a:extLst xmlns:a="http://schemas.openxmlformats.org/drawingml/2006/main">
               <a:ext uri="{FF2B5EF4-FFF2-40B4-BE49-F238E27FC236}">
-                <a16:creationId xmlns:a16="http://schemas.microsoft.com/office/drawing/2014/main" id="{56997F91-AD4A-439D-8F47-C12EBDF55D30}"/>
+                <a16:creationId xmlns:a16="http://schemas.microsoft.com/office/drawing/2014/main" id="{75629E1B-F08A-48C4-87DA-6FE6359B93B0}"/>
               </a:ext>
             </a:extLst>
           </p:cNvPr>
@@ -29308,7 +29308,7 @@
     </p:spTree>
     <p:extLst>
       <p:ext uri="{BB962C8B-B14F-4D97-AF65-F5344CB8AC3E}">
-        <p14:creationId xmlns:p14="http://schemas.microsoft.com/office/powerpoint/2010/main" val="1900876119"/>
+        <p14:creationId xmlns:p14="http://schemas.microsoft.com/office/powerpoint/2010/main" val="410058508"/>
       </p:ext>
     </p:extLst>
   </p:cSld>
@@ -29339,7 +29339,7 @@
           <p:cNvPr id="8" name="title">
             <a:extLst xmlns:a="http://schemas.openxmlformats.org/drawingml/2006/main">
               <a:ext uri="{FF2B5EF4-FFF2-40B4-BE49-F238E27FC236}">
-                <a16:creationId xmlns:a16="http://schemas.microsoft.com/office/drawing/2014/main" id="{C4E089AC-B2F5-45F9-9CA4-93645CB0C8D0}"/>
+                <a16:creationId xmlns:a16="http://schemas.microsoft.com/office/drawing/2014/main" id="{2A948F48-7D32-47E0-A16F-43CA0B5A6202}"/>
               </a:ext>
             </a:extLst>
           </p:cNvPr>
@@ -29396,7 +29396,7 @@
           <p:cNvPr id="2" name="header-rule">
             <a:extLst xmlns:a="http://schemas.openxmlformats.org/drawingml/2006/main">
               <a:ext uri="{FF2B5EF4-FFF2-40B4-BE49-F238E27FC236}">
-                <a16:creationId xmlns:a16="http://schemas.microsoft.com/office/drawing/2014/main" id="{389AD7F6-CCD5-458B-92D1-FE5F135ACFC1}"/>
+                <a16:creationId xmlns:a16="http://schemas.microsoft.com/office/drawing/2014/main" id="{0D74018C-F595-48B7-9626-6071EBCFBFE5}"/>
               </a:ext>
             </a:extLst>
           </p:cNvPr>
@@ -29426,7 +29426,7 @@
           <p:cNvPr id="3" name="page">
             <a:extLst xmlns:a="http://schemas.openxmlformats.org/drawingml/2006/main">
               <a:ext uri="{FF2B5EF4-FFF2-40B4-BE49-F238E27FC236}">
-                <a16:creationId xmlns:a16="http://schemas.microsoft.com/office/drawing/2014/main" id="{930D6139-2C5C-498F-8964-82C5CFC53E5F}"/>
+                <a16:creationId xmlns:a16="http://schemas.microsoft.com/office/drawing/2014/main" id="{FFC771F1-4BC7-4090-8C7A-767272D4B7A4}"/>
               </a:ext>
             </a:extLst>
           </p:cNvPr>
@@ -29483,7 +29483,7 @@
           <p:cNvPr id="4" name="headline">
             <a:extLst xmlns:a="http://schemas.openxmlformats.org/drawingml/2006/main">
               <a:ext uri="{FF2B5EF4-FFF2-40B4-BE49-F238E27FC236}">
-                <a16:creationId xmlns:a16="http://schemas.microsoft.com/office/drawing/2014/main" id="{CC55E19D-3CDD-4CB5-B312-5811BF336DCA}"/>
+                <a16:creationId xmlns:a16="http://schemas.microsoft.com/office/drawing/2014/main" id="{2F707774-A715-4BF2-89B2-28D965977A26}"/>
               </a:ext>
             </a:extLst>
           </p:cNvPr>
@@ -29540,7 +29540,7 @@
           <p:cNvPr id="5" name="scope">
             <a:extLst xmlns:a="http://schemas.openxmlformats.org/drawingml/2006/main">
               <a:ext uri="{FF2B5EF4-FFF2-40B4-BE49-F238E27FC236}">
-                <a16:creationId xmlns:a16="http://schemas.microsoft.com/office/drawing/2014/main" id="{E44F1FC2-59D0-43BD-BAEA-0608D5C22C94}"/>
+                <a16:creationId xmlns:a16="http://schemas.microsoft.com/office/drawing/2014/main" id="{9E774550-2D49-4107-B3DC-E7CFCE3E2EB4}"/>
               </a:ext>
             </a:extLst>
           </p:cNvPr>
@@ -30848,7 +30848,7 @@
           <p:cNvPr id="7" name="footer">
             <a:extLst xmlns:a="http://schemas.openxmlformats.org/drawingml/2006/main">
               <a:ext uri="{FF2B5EF4-FFF2-40B4-BE49-F238E27FC236}">
-                <a16:creationId xmlns:a16="http://schemas.microsoft.com/office/drawing/2014/main" id="{5672B6FB-56C6-4B68-926E-CC546731197C}"/>
+                <a16:creationId xmlns:a16="http://schemas.microsoft.com/office/drawing/2014/main" id="{42276120-A97B-4038-9546-9A4891053912}"/>
               </a:ext>
             </a:extLst>
           </p:cNvPr>
@@ -30903,7 +30903,7 @@
     </p:spTree>
     <p:extLst>
       <p:ext uri="{BB962C8B-B14F-4D97-AF65-F5344CB8AC3E}">
-        <p14:creationId xmlns:p14="http://schemas.microsoft.com/office/powerpoint/2010/main" val="1365331239"/>
+        <p14:creationId xmlns:p14="http://schemas.microsoft.com/office/powerpoint/2010/main" val="891173581"/>
       </p:ext>
     </p:extLst>
   </p:cSld>
@@ -30934,7 +30934,7 @@
           <p:cNvPr id="8" name="title">
             <a:extLst xmlns:a="http://schemas.openxmlformats.org/drawingml/2006/main">
               <a:ext uri="{FF2B5EF4-FFF2-40B4-BE49-F238E27FC236}">
-                <a16:creationId xmlns:a16="http://schemas.microsoft.com/office/drawing/2014/main" id="{2BC367AF-7FAF-456E-8824-0D7C30D196D2}"/>
+                <a16:creationId xmlns:a16="http://schemas.microsoft.com/office/drawing/2014/main" id="{A8F4C509-59F5-4885-B3D0-37536C2A65B9}"/>
               </a:ext>
             </a:extLst>
           </p:cNvPr>
@@ -30991,7 +30991,7 @@
           <p:cNvPr id="2" name="header-rule">
             <a:extLst xmlns:a="http://schemas.openxmlformats.org/drawingml/2006/main">
               <a:ext uri="{FF2B5EF4-FFF2-40B4-BE49-F238E27FC236}">
-                <a16:creationId xmlns:a16="http://schemas.microsoft.com/office/drawing/2014/main" id="{05749FAE-4B5F-4289-B548-F161FEDF32DA}"/>
+                <a16:creationId xmlns:a16="http://schemas.microsoft.com/office/drawing/2014/main" id="{5F01649B-686E-4B59-B054-7585573B8DF2}"/>
               </a:ext>
             </a:extLst>
           </p:cNvPr>
@@ -31021,7 +31021,7 @@
           <p:cNvPr id="3" name="page">
             <a:extLst xmlns:a="http://schemas.openxmlformats.org/drawingml/2006/main">
               <a:ext uri="{FF2B5EF4-FFF2-40B4-BE49-F238E27FC236}">
-                <a16:creationId xmlns:a16="http://schemas.microsoft.com/office/drawing/2014/main" id="{8D5506A6-B2AA-49C4-AA2A-8C1C74258838}"/>
+                <a16:creationId xmlns:a16="http://schemas.microsoft.com/office/drawing/2014/main" id="{777F954D-385C-4641-910F-25FF0E3BB2FF}"/>
               </a:ext>
             </a:extLst>
           </p:cNvPr>
@@ -31078,7 +31078,7 @@
           <p:cNvPr id="4" name="headline">
             <a:extLst xmlns:a="http://schemas.openxmlformats.org/drawingml/2006/main">
               <a:ext uri="{FF2B5EF4-FFF2-40B4-BE49-F238E27FC236}">
-                <a16:creationId xmlns:a16="http://schemas.microsoft.com/office/drawing/2014/main" id="{C0CE7EC8-27F6-4844-9076-578F11CA15A0}"/>
+                <a16:creationId xmlns:a16="http://schemas.microsoft.com/office/drawing/2014/main" id="{37CCE702-BA5D-4D12-A1D7-D8B4D1A15A5B}"/>
               </a:ext>
             </a:extLst>
           </p:cNvPr>
@@ -31135,7 +31135,7 @@
           <p:cNvPr id="5" name="scope">
             <a:extLst xmlns:a="http://schemas.openxmlformats.org/drawingml/2006/main">
               <a:ext uri="{FF2B5EF4-FFF2-40B4-BE49-F238E27FC236}">
-                <a16:creationId xmlns:a16="http://schemas.microsoft.com/office/drawing/2014/main" id="{29A3AE70-E774-4627-AC11-A9CD88F2EC89}"/>
+                <a16:creationId xmlns:a16="http://schemas.microsoft.com/office/drawing/2014/main" id="{F071CAE0-AB91-4CA2-8EC4-8B54F5B3F2B9}"/>
               </a:ext>
             </a:extLst>
           </p:cNvPr>
@@ -32471,7 +32471,7 @@
           <p:cNvPr id="7" name="footer">
             <a:extLst xmlns:a="http://schemas.openxmlformats.org/drawingml/2006/main">
               <a:ext uri="{FF2B5EF4-FFF2-40B4-BE49-F238E27FC236}">
-                <a16:creationId xmlns:a16="http://schemas.microsoft.com/office/drawing/2014/main" id="{B5AA1C72-7C64-47E9-B12B-9F0BB7853778}"/>
+                <a16:creationId xmlns:a16="http://schemas.microsoft.com/office/drawing/2014/main" id="{EA7DFB65-37C5-4BF8-8BAB-30090743ED19}"/>
               </a:ext>
             </a:extLst>
           </p:cNvPr>
@@ -32526,7 +32526,7 @@
     </p:spTree>
     <p:extLst>
       <p:ext uri="{BB962C8B-B14F-4D97-AF65-F5344CB8AC3E}">
-        <p14:creationId xmlns:p14="http://schemas.microsoft.com/office/powerpoint/2010/main" val="1813037975"/>
+        <p14:creationId xmlns:p14="http://schemas.microsoft.com/office/powerpoint/2010/main" val="1203299029"/>
       </p:ext>
     </p:extLst>
   </p:cSld>

--- a/docs/presentations_files/quality-attributes/VIA-quality-attributes.pptx
+++ b/docs/presentations_files/quality-attributes/VIA-quality-attributes.pptx
@@ -2,18 +2,18 @@
 <file path=ppt/presentation.xml><?xml version="1.0" encoding="utf-8"?>
 <p:presentation xmlns:p="http://schemas.openxmlformats.org/presentationml/2006/main">
   <p:sldMasterIdLst>
-    <p:sldMasterId xmlns:r="http://schemas.openxmlformats.org/officeDocument/2006/relationships" id="2147483648" r:id="R6ef4b54ff75845a4"/>
+    <p:sldMasterId xmlns:r="http://schemas.openxmlformats.org/officeDocument/2006/relationships" id="2147483648" r:id="Ra9cd6f0fea754559"/>
   </p:sldMasterIdLst>
   <p:notesMasterIdLst>
-    <p:notesMasterId xmlns:r="http://schemas.openxmlformats.org/officeDocument/2006/relationships" r:id="R2518308b863d468c"/>
+    <p:notesMasterId xmlns:r="http://schemas.openxmlformats.org/officeDocument/2006/relationships" r:id="R6fa42f2316834f57"/>
   </p:notesMasterIdLst>
   <p:sldIdLst>
-    <p:sldId xmlns:r="http://schemas.openxmlformats.org/officeDocument/2006/relationships" id="256" r:id="R8a278eb5dc3749bc"/>
-    <p:sldId xmlns:r="http://schemas.openxmlformats.org/officeDocument/2006/relationships" id="257" r:id="R6ba8debb836a48a4"/>
-    <p:sldId xmlns:r="http://schemas.openxmlformats.org/officeDocument/2006/relationships" id="258" r:id="R7e16c22dab894b56"/>
-    <p:sldId xmlns:r="http://schemas.openxmlformats.org/officeDocument/2006/relationships" id="259" r:id="Rdeef11fb06be41d9"/>
-    <p:sldId xmlns:r="http://schemas.openxmlformats.org/officeDocument/2006/relationships" id="260" r:id="Rb6196ba3407d4c3a"/>
-    <p:sldId xmlns:r="http://schemas.openxmlformats.org/officeDocument/2006/relationships" id="261" r:id="R3f65e2ee0369415c"/>
+    <p:sldId xmlns:r="http://schemas.openxmlformats.org/officeDocument/2006/relationships" id="256" r:id="Re839c732156946ed"/>
+    <p:sldId xmlns:r="http://schemas.openxmlformats.org/officeDocument/2006/relationships" id="257" r:id="R38aed98338724477"/>
+    <p:sldId xmlns:r="http://schemas.openxmlformats.org/officeDocument/2006/relationships" id="258" r:id="Rfc24fb18dd594eaf"/>
+    <p:sldId xmlns:r="http://schemas.openxmlformats.org/officeDocument/2006/relationships" id="259" r:id="R798a56557cec4056"/>
+    <p:sldId xmlns:r="http://schemas.openxmlformats.org/officeDocument/2006/relationships" id="260" r:id="Rcf7b14c0e739472f"/>
+    <p:sldId xmlns:r="http://schemas.openxmlformats.org/officeDocument/2006/relationships" id="261" r:id="Ra914104953f34808"/>
   </p:sldIdLst>
   <p:sldSz cx="18288000" cy="10287000"/>
   <p:notesSz cx="6858000" cy="9144000"/>
@@ -462,7 +462,7 @@
           </a:p>
           <a:p xmlns:a="http://schemas.openxmlformats.org/drawingml/2006/main">
             <a:r>
-              <a:t>활동 SHA-256: cd2e5e9ff24e67a1c31326c95acc0f67d0466e64cd997b9d6ff642d56362bda9</a:t>
+              <a:t>활동 SHA-256: 00fedd21cfe33a3c35990f84af0610bef6fb2f7e9473404d2f935222c3ad084c</a:t>
             </a:r>
           </a:p>
           <a:p xmlns:a="http://schemas.openxmlformats.org/drawingml/2006/main">
@@ -472,7 +472,7 @@
           </a:p>
           <a:p xmlns:a="http://schemas.openxmlformats.org/drawingml/2006/main">
             <a:r>
-              <a:t>원본 SHA-256: e89c163288eaeceeeea3e8a44ef56f903278aefd9c997db8756bcdd27170d1fa</a:t>
+              <a:t>원본 SHA-256: d25a503005403e71d5811d61f20d9c227479bfeb04808ba868ce06adc463e4f8</a:t>
             </a:r>
           </a:p>
           <a:p xmlns:a="http://schemas.openxmlformats.org/drawingml/2006/main">
@@ -6767,7 +6767,7 @@
           </a:p>
           <a:p xmlns:a="http://schemas.openxmlformats.org/drawingml/2006/main">
             <a:r>
-              <a:t>활동 SHA-256: cd2e5e9ff24e67a1c31326c95acc0f67d0466e64cd997b9d6ff642d56362bda9</a:t>
+              <a:t>활동 SHA-256: 00fedd21cfe33a3c35990f84af0610bef6fb2f7e9473404d2f935222c3ad084c</a:t>
             </a:r>
           </a:p>
           <a:p xmlns:a="http://schemas.openxmlformats.org/drawingml/2006/main">
@@ -6777,7 +6777,7 @@
           </a:p>
           <a:p xmlns:a="http://schemas.openxmlformats.org/drawingml/2006/main">
             <a:r>
-              <a:t>원본 SHA-256: e89c163288eaeceeeea3e8a44ef56f903278aefd9c997db8756bcdd27170d1fa</a:t>
+              <a:t>원본 SHA-256: d25a503005403e71d5811d61f20d9c227479bfeb04808ba868ce06adc463e4f8</a:t>
             </a:r>
           </a:p>
           <a:p xmlns:a="http://schemas.openxmlformats.org/drawingml/2006/main">
@@ -6807,12 +6807,12 @@
           </a:p>
           <a:p xmlns:a="http://schemas.openxmlformats.org/drawingml/2006/main">
             <a:r>
-              <a:t>목표: $0.30/P21 이하</a:t>
-            </a:r>
-          </a:p>
-          <a:p xmlns:a="http://schemas.openxmlformats.org/drawingml/2006/main">
-            <a:r>
-              <a:t>목표 근거: 동일 21사례의 의미 62호출/음성 입력 50초/출력 179초 예산에서 기본 $0.173567, 여유 $0.126433. 호출·출력은 작성자 가정이며 실제 사용량으로 대체 (§5)</a:t>
+              <a:t>목표: $0.50/P21 이하</a:t>
+            </a:r>
+          </a:p>
+          <a:p xmlns:a="http://schemas.openxmlformats.org/drawingml/2006/main">
+            <a:r>
+              <a:t>목표 근거: 동일 21사례의 의미 62호출/음성 입력 50초/출력 179초 예산에서 신규 audio·Text 포함 기본 $0.416320, 이력 audio/추가생산/재시도 여유 $0.083680. 호출·출력은 작성자 가정이며 실제 사용량으로 대체 (§5)</a:t>
             </a:r>
           </a:p>
           <a:p xmlns:a="http://schemas.openxmlformats.org/drawingml/2006/main">
@@ -6832,7 +6832,12 @@
           </a:p>
           <a:p xmlns:a="http://schemas.openxmlformats.org/drawingml/2006/main">
             <a:r>
-              <a:t>Google Live 공식 가격표: https://ai.google.dev/gemini-api/docs/pricing</a:t>
+              <a:t>OpenAI GPT Realtime 공식 단가: https://developers.openai.com/api/docs/models/gpt-realtime</a:t>
+            </a:r>
+          </a:p>
+          <a:p xmlns:a="http://schemas.openxmlformats.org/drawingml/2006/main">
+            <a:r>
+              <a:t>OpenAI Realtime 청구: https://developers.openai.com/api/docs/guides/voice-latency-cost</a:t>
             </a:r>
           </a:p>
           <a:p xmlns:a="http://schemas.openxmlformats.org/drawingml/2006/main">
@@ -6937,27 +6942,27 @@
           </a:p>
           <a:p xmlns:a="http://schemas.openxmlformats.org/drawingml/2006/main">
             <a:r>
-              <a:t>| 음성audio 입력50초/출력예산179초 | 0.057867 |</a:t>
-            </a:r>
-          </a:p>
-          <a:p xmlns:a="http://schemas.openxmlformats.org/drawingml/2006/main">
-            <a:r>
-              <a:t>| 음성Text/context 입력10,000/출력2,000 token | 0.016500 |</a:t>
-            </a:r>
-          </a:p>
-          <a:p xmlns:a="http://schemas.openxmlformats.org/drawingml/2006/main">
-            <a:r>
-              <a:t>| 기본 총액 | **0.173567** |</a:t>
-            </a:r>
-          </a:p>
-          <a:p xmlns:a="http://schemas.openxmlformats.org/drawingml/2006/main">
-            <a:r>
-              <a:t>| 초기/추가생산/재시도 여유 | **0.126433** |</a:t>
-            </a:r>
-          </a:p>
-          <a:p xmlns:a="http://schemas.openxmlformats.org/drawingml/2006/main">
-            <a:r>
-              <a:t>| 목표 | **0.30/P21** |</a:t>
+              <a:t>| GPT Realtime 신규 audio 입력50초/출력예산179초 | 0.245120 |</a:t>
+            </a:r>
+          </a:p>
+          <a:p xmlns:a="http://schemas.openxmlformats.org/drawingml/2006/main">
+            <a:r>
+              <a:t>| GPT Realtime 청구 Text/context 입력10,000/출력2,000 token | 0.072000 |</a:t>
+            </a:r>
+          </a:p>
+          <a:p xmlns:a="http://schemas.openxmlformats.org/drawingml/2006/main">
+            <a:r>
+              <a:t>| 신규 audio·청구 Text를 포함한 기본 소계 | **0.416320** |</a:t>
+            </a:r>
+          </a:p>
+          <a:p xmlns:a="http://schemas.openxmlformats.org/drawingml/2006/main">
+            <a:r>
+              <a:t>| 이력 audio 재입력/추가생산/재시도 여유 | **0.083680** |</a:t>
+            </a:r>
+          </a:p>
+          <a:p xmlns:a="http://schemas.openxmlformats.org/drawingml/2006/main">
+            <a:r>
+              <a:t>| 목표 | **0.50/P21** |</a:t>
             </a:r>
           </a:p>
           <a:p xmlns:a="http://schemas.openxmlformats.org/drawingml/2006/main">
@@ -6967,7 +6972,7 @@
           </a:p>
           <a:p xmlns:a="http://schemas.openxmlformats.org/drawingml/2006/main">
             <a:r>
-              <a:t>W100의 $1.50를 새 묶음에 그대로 적용하지 않고 동일 P21 사용량에서 다시 계산했다. 기본 대비 약 72.84%의 추가 여유를 둔 작성자 평가 예산이며 상품 가격이나 모델 성능 보장이 아니다. Source 변경 4건이 모델 생산 4호출을 강제하지 않는다. 실제 backfill·추가 질문·재시도가 많으면 목표 미달을 그대로 보고한다.</a:t>
+              <a:t>음성 기준을 GPT Realtime으로 바꾼 동일 P21에서 다시 계산했다. 기본 소계 대비 약 20.10%의 여유를 둔 $0.50/P21 작성자 평가 예산이며 상품 가격이나 모델 성능 보장이 아니다. 앞의 50/179초는 신규 audio 길이만이므로 이력 audio 재입력의 청구를 포함한 실제 총액이라고 주장하지 않는다. Text 10k/2k는 호출별 누적 청구량의 예산이다. 추가 audio 이력·초기/배경 생산·재시도는 여유에서 부담하며 실제 response usage로 모두 합산한다. 여유 전부를 할인 없는 audio 이력 입력에 쓰면 2,615 token($0.083680)이고 다른 추가 비용이 있으면 그만큼 줄어든다. 캐시 할인/음성 이력의 transcript 대체는 실제 확인된 사용량에만 적용한다. 목표를 맞추기 위해 대화를 매 사례 초기화하거나 VIA의 Task/근거 이력을 없애지 않는다. Source 변경 4건이 모델 생산 4호출을 강제하지 않는다. 실제 backfill·추가 질문·재시도가 많으면 목표 미달을 그대로 보고한다.</a:t>
             </a:r>
           </a:p>
           <a:p xmlns:a="http://schemas.openxmlformats.org/drawingml/2006/main">
@@ -6987,7 +6992,7 @@
           </a:p>
           <a:p xmlns:a="http://schemas.openxmlformats.org/drawingml/2006/main">
             <a:r>
-              <a:t>$0.03/P21 이상을 차이 기준(목표의 10%)으로 두고 다섯 활동의 값·범위·차이 방향과 가정 민감도를 공개한다. S2-04의 cache miss, S2-05의 최초 생산, 미사용 source 4건의 실제 생산, 입출력 길이를 따로 검토한다. A의 cache를 삭제하거나 B에 ready hit를 주입하지 않는다. 기능 미완료·필수 위반을 동반한 낮은 청구는 목표 충족이 아니다.</a:t>
+              <a:t>$0.03/P21 이상을 기존 실용 차이 기준으로 유지하고(개정 목표의 6%) 다섯 활동의 값·범위·차이 방향과 가정 민감도를 공개한다. S2-04의 cache miss, S2-05의 최초 생산, 미사용 source 4건의 실제 생산, 입출력 길이를 따로 검토한다. A의 cache를 삭제하거나 B에 ready hit를 주입하지 않는다. 기능 미완료·필수 위반을 동반한 낮은 청구는 목표 충족이 아니다.</a:t>
             </a:r>
           </a:p>
           <a:p xmlns:a="http://schemas.openxmlformats.org/drawingml/2006/main">
@@ -10992,7 +10997,7 @@
           </a:p>
           <a:p xmlns:a="http://schemas.openxmlformats.org/drawingml/2006/main">
             <a:r>
-              <a:t>활동 SHA-256: cd2e5e9ff24e67a1c31326c95acc0f67d0466e64cd997b9d6ff642d56362bda9</a:t>
+              <a:t>활동 SHA-256: 00fedd21cfe33a3c35990f84af0610bef6fb2f7e9473404d2f935222c3ad084c</a:t>
             </a:r>
           </a:p>
           <a:p xmlns:a="http://schemas.openxmlformats.org/drawingml/2006/main">
@@ -11002,7 +11007,7 @@
           </a:p>
           <a:p xmlns:a="http://schemas.openxmlformats.org/drawingml/2006/main">
             <a:r>
-              <a:t>원본 SHA-256: e89c163288eaeceeeea3e8a44ef56f903278aefd9c997db8756bcdd27170d1fa</a:t>
+              <a:t>원본 SHA-256: d25a503005403e71d5811d61f20d9c227479bfeb04808ba868ce06adc463e4f8</a:t>
             </a:r>
           </a:p>
           <a:p xmlns:a="http://schemas.openxmlformats.org/drawingml/2006/main">
@@ -14252,7 +14257,7 @@
           </a:p>
           <a:p xmlns:a="http://schemas.openxmlformats.org/drawingml/2006/main">
             <a:r>
-              <a:t>활동 SHA-256: cd2e5e9ff24e67a1c31326c95acc0f67d0466e64cd997b9d6ff642d56362bda9</a:t>
+              <a:t>활동 SHA-256: 00fedd21cfe33a3c35990f84af0610bef6fb2f7e9473404d2f935222c3ad084c</a:t>
             </a:r>
           </a:p>
           <a:p xmlns:a="http://schemas.openxmlformats.org/drawingml/2006/main">
@@ -14262,7 +14267,7 @@
           </a:p>
           <a:p xmlns:a="http://schemas.openxmlformats.org/drawingml/2006/main">
             <a:r>
-              <a:t>원본 SHA-256: e89c163288eaeceeeea3e8a44ef56f903278aefd9c997db8756bcdd27170d1fa</a:t>
+              <a:t>원본 SHA-256: d25a503005403e71d5811d61f20d9c227479bfeb04808ba868ce06adc463e4f8</a:t>
             </a:r>
           </a:p>
           <a:p xmlns:a="http://schemas.openxmlformats.org/drawingml/2006/main">
@@ -17512,7 +17517,7 @@
           </a:p>
           <a:p xmlns:a="http://schemas.openxmlformats.org/drawingml/2006/main">
             <a:r>
-              <a:t>활동 SHA-256: cd2e5e9ff24e67a1c31326c95acc0f67d0466e64cd997b9d6ff642d56362bda9</a:t>
+              <a:t>활동 SHA-256: 00fedd21cfe33a3c35990f84af0610bef6fb2f7e9473404d2f935222c3ad084c</a:t>
             </a:r>
           </a:p>
           <a:p xmlns:a="http://schemas.openxmlformats.org/drawingml/2006/main">
@@ -17522,7 +17527,7 @@
           </a:p>
           <a:p xmlns:a="http://schemas.openxmlformats.org/drawingml/2006/main">
             <a:r>
-              <a:t>원본 SHA-256: e89c163288eaeceeeea3e8a44ef56f903278aefd9c997db8756bcdd27170d1fa</a:t>
+              <a:t>원본 SHA-256: d25a503005403e71d5811d61f20d9c227479bfeb04808ba868ce06adc463e4f8</a:t>
             </a:r>
           </a:p>
           <a:p xmlns:a="http://schemas.openxmlformats.org/drawingml/2006/main">
@@ -20772,7 +20777,7 @@
           </a:p>
           <a:p xmlns:a="http://schemas.openxmlformats.org/drawingml/2006/main">
             <a:r>
-              <a:t>활동 SHA-256: cd2e5e9ff24e67a1c31326c95acc0f67d0466e64cd997b9d6ff642d56362bda9</a:t>
+              <a:t>활동 SHA-256: 00fedd21cfe33a3c35990f84af0610bef6fb2f7e9473404d2f935222c3ad084c</a:t>
             </a:r>
           </a:p>
           <a:p xmlns:a="http://schemas.openxmlformats.org/drawingml/2006/main">
@@ -20782,7 +20787,7 @@
           </a:p>
           <a:p xmlns:a="http://schemas.openxmlformats.org/drawingml/2006/main">
             <a:r>
-              <a:t>원본 SHA-256: e89c163288eaeceeeea3e8a44ef56f903278aefd9c997db8756bcdd27170d1fa</a:t>
+              <a:t>원본 SHA-256: d25a503005403e71d5811d61f20d9c227479bfeb04808ba868ce06adc463e4f8</a:t>
             </a:r>
           </a:p>
           <a:p xmlns:a="http://schemas.openxmlformats.org/drawingml/2006/main">
@@ -24015,7 +24020,7 @@
   </p:cSld>
   <p:clrMap bg1="lt1" tx1="dk1" bg2="lt2" tx2="dk2" accent1="accent1" accent2="accent2" accent3="accent3" accent4="accent4" accent5="accent5" accent6="accent6" hlink="hlink" folHlink="folHlink"/>
   <p:sldLayoutIdLst>
-    <p:sldLayoutId xmlns:r="http://schemas.openxmlformats.org/officeDocument/2006/relationships" id="2147483649" r:id="R22f28c94f3ef4210"/>
+    <p:sldLayoutId xmlns:r="http://schemas.openxmlformats.org/officeDocument/2006/relationships" id="2147483649" r:id="R41eb6e39a7f14eb4"/>
   </p:sldLayoutIdLst>
   <p:txStyles>
     <p:titleStyle>
@@ -24566,7 +24571,7 @@
           <p:cNvPr id="8" name="title">
             <a:extLst xmlns:a="http://schemas.openxmlformats.org/drawingml/2006/main">
               <a:ext uri="{FF2B5EF4-FFF2-40B4-BE49-F238E27FC236}">
-                <a16:creationId xmlns:a16="http://schemas.microsoft.com/office/drawing/2014/main" id="{01A40800-1D08-4B9F-BFC4-59C00ED6CA1D}"/>
+                <a16:creationId xmlns:a16="http://schemas.microsoft.com/office/drawing/2014/main" id="{7BED8959-5807-44DB-A739-92299D05645E}"/>
               </a:ext>
             </a:extLst>
           </p:cNvPr>
@@ -24623,7 +24628,7 @@
           <p:cNvPr id="2" name="header-rule">
             <a:extLst xmlns:a="http://schemas.openxmlformats.org/drawingml/2006/main">
               <a:ext uri="{FF2B5EF4-FFF2-40B4-BE49-F238E27FC236}">
-                <a16:creationId xmlns:a16="http://schemas.microsoft.com/office/drawing/2014/main" id="{2E10C026-1712-491B-B782-F7D4758E7D34}"/>
+                <a16:creationId xmlns:a16="http://schemas.microsoft.com/office/drawing/2014/main" id="{2E27125D-60F2-4630-83D1-AF12C515B7B1}"/>
               </a:ext>
             </a:extLst>
           </p:cNvPr>
@@ -24653,7 +24658,7 @@
           <p:cNvPr id="3" name="page">
             <a:extLst xmlns:a="http://schemas.openxmlformats.org/drawingml/2006/main">
               <a:ext uri="{FF2B5EF4-FFF2-40B4-BE49-F238E27FC236}">
-                <a16:creationId xmlns:a16="http://schemas.microsoft.com/office/drawing/2014/main" id="{E3A4CF3D-D86C-4ADA-9B83-1B4AB8D9FD35}"/>
+                <a16:creationId xmlns:a16="http://schemas.microsoft.com/office/drawing/2014/main" id="{3CC887C4-F6A3-4B42-A16A-8B7F1F05AB44}"/>
               </a:ext>
             </a:extLst>
           </p:cNvPr>
@@ -24710,7 +24715,7 @@
           <p:cNvPr id="4" name="headline">
             <a:extLst xmlns:a="http://schemas.openxmlformats.org/drawingml/2006/main">
               <a:ext uri="{FF2B5EF4-FFF2-40B4-BE49-F238E27FC236}">
-                <a16:creationId xmlns:a16="http://schemas.microsoft.com/office/drawing/2014/main" id="{292B725C-079B-4CCC-94AF-C428048EF712}"/>
+                <a16:creationId xmlns:a16="http://schemas.microsoft.com/office/drawing/2014/main" id="{E457B687-B381-462F-B87D-E6EC9526A3BB}"/>
               </a:ext>
             </a:extLst>
           </p:cNvPr>
@@ -24767,7 +24772,7 @@
           <p:cNvPr id="5" name="scope">
             <a:extLst xmlns:a="http://schemas.openxmlformats.org/drawingml/2006/main">
               <a:ext uri="{FF2B5EF4-FFF2-40B4-BE49-F238E27FC236}">
-                <a16:creationId xmlns:a16="http://schemas.microsoft.com/office/drawing/2014/main" id="{D107C5B8-31A9-4D83-A7AF-42EA263BAE1A}"/>
+                <a16:creationId xmlns:a16="http://schemas.microsoft.com/office/drawing/2014/main" id="{456CA4F3-A4AE-45E7-9963-3339E4795226}"/>
               </a:ext>
             </a:extLst>
           </p:cNvPr>
@@ -25525,7 +25530,7 @@
           <p:cNvPr id="7" name="footer">
             <a:extLst xmlns:a="http://schemas.openxmlformats.org/drawingml/2006/main">
               <a:ext uri="{FF2B5EF4-FFF2-40B4-BE49-F238E27FC236}">
-                <a16:creationId xmlns:a16="http://schemas.microsoft.com/office/drawing/2014/main" id="{9F9C085A-F731-43F0-B741-56F360529B06}"/>
+                <a16:creationId xmlns:a16="http://schemas.microsoft.com/office/drawing/2014/main" id="{F918AF23-6A68-4CC6-B968-B6A7AA533A21}"/>
               </a:ext>
             </a:extLst>
           </p:cNvPr>
@@ -25580,7 +25585,7 @@
     </p:spTree>
     <p:extLst>
       <p:ext uri="{BB962C8B-B14F-4D97-AF65-F5344CB8AC3E}">
-        <p14:creationId xmlns:p14="http://schemas.microsoft.com/office/powerpoint/2010/main" val="371557259"/>
+        <p14:creationId xmlns:p14="http://schemas.microsoft.com/office/powerpoint/2010/main" val="1504648296"/>
       </p:ext>
     </p:extLst>
   </p:cSld>
@@ -25611,7 +25616,7 @@
           <p:cNvPr id="8" name="title">
             <a:extLst xmlns:a="http://schemas.openxmlformats.org/drawingml/2006/main">
               <a:ext uri="{FF2B5EF4-FFF2-40B4-BE49-F238E27FC236}">
-                <a16:creationId xmlns:a16="http://schemas.microsoft.com/office/drawing/2014/main" id="{A48A87DD-CB1C-4129-AF57-602CA23DEEA3}"/>
+                <a16:creationId xmlns:a16="http://schemas.microsoft.com/office/drawing/2014/main" id="{FF0F27ED-1ED9-47F0-9C62-31491C94CDBB}"/>
               </a:ext>
             </a:extLst>
           </p:cNvPr>
@@ -25668,7 +25673,7 @@
           <p:cNvPr id="2" name="header-rule">
             <a:extLst xmlns:a="http://schemas.openxmlformats.org/drawingml/2006/main">
               <a:ext uri="{FF2B5EF4-FFF2-40B4-BE49-F238E27FC236}">
-                <a16:creationId xmlns:a16="http://schemas.microsoft.com/office/drawing/2014/main" id="{729F2F94-1E00-4A1F-AEB6-890BBB38F6B5}"/>
+                <a16:creationId xmlns:a16="http://schemas.microsoft.com/office/drawing/2014/main" id="{CC50DD73-EDB4-4DEC-BD76-7D49ABBADA7B}"/>
               </a:ext>
             </a:extLst>
           </p:cNvPr>
@@ -25698,7 +25703,7 @@
           <p:cNvPr id="3" name="page">
             <a:extLst xmlns:a="http://schemas.openxmlformats.org/drawingml/2006/main">
               <a:ext uri="{FF2B5EF4-FFF2-40B4-BE49-F238E27FC236}">
-                <a16:creationId xmlns:a16="http://schemas.microsoft.com/office/drawing/2014/main" id="{3D1F658F-4357-4165-9148-2E47501471D1}"/>
+                <a16:creationId xmlns:a16="http://schemas.microsoft.com/office/drawing/2014/main" id="{3F055C21-5283-40B7-9AB4-23F779DD8979}"/>
               </a:ext>
             </a:extLst>
           </p:cNvPr>
@@ -25755,7 +25760,7 @@
           <p:cNvPr id="4" name="headline">
             <a:extLst xmlns:a="http://schemas.openxmlformats.org/drawingml/2006/main">
               <a:ext uri="{FF2B5EF4-FFF2-40B4-BE49-F238E27FC236}">
-                <a16:creationId xmlns:a16="http://schemas.microsoft.com/office/drawing/2014/main" id="{2B1AFE9D-A262-4AFA-91D7-8BE8B47ED968}"/>
+                <a16:creationId xmlns:a16="http://schemas.microsoft.com/office/drawing/2014/main" id="{F82A499F-E210-47B5-8D9D-E99DA4C623C5}"/>
               </a:ext>
             </a:extLst>
           </p:cNvPr>
@@ -25812,7 +25817,7 @@
           <p:cNvPr id="5" name="scope">
             <a:extLst xmlns:a="http://schemas.openxmlformats.org/drawingml/2006/main">
               <a:ext uri="{FF2B5EF4-FFF2-40B4-BE49-F238E27FC236}">
-                <a16:creationId xmlns:a16="http://schemas.microsoft.com/office/drawing/2014/main" id="{E6C11848-0FDE-43CD-BA78-961F9AC117E3}"/>
+                <a16:creationId xmlns:a16="http://schemas.microsoft.com/office/drawing/2014/main" id="{16F27A96-B975-4D30-8520-93B0BAE53F69}"/>
               </a:ext>
             </a:extLst>
           </p:cNvPr>
@@ -26145,7 +26150,7 @@
                           <a:ea typeface="Apple SD Gothic Neo"/>
                           <a:cs typeface="Apple SD Gothic Neo"/>
                         </a:rPr>
-                        <a:t>P21 1묶음 평균 모델 비용 ≤ $0.30</a:t>
+                        <a:t>P21 1묶음 평균 모델 비용 ≤ $0.50</a:t>
                       </a:r>
                     </a:p>
                     <a:p>
@@ -26173,7 +26178,7 @@
                           <a:ea typeface="Apple SD Gothic Neo"/>
                           <a:cs typeface="Apple SD Gothic Neo"/>
                         </a:rPr>
-                        <a:t>근거: 기본 $0.173567 + 추가 생산/재시도 여유 $0.126433</a:t>
+                        <a:t>근거: 신규 audio·Text 기본 $0.416320 + 추가 여유 $0.083680</a:t>
                       </a:r>
                     </a:p>
                   </a:txBody>
@@ -26598,7 +26603,7 @@
           <p:cNvPr id="7" name="footer">
             <a:extLst xmlns:a="http://schemas.openxmlformats.org/drawingml/2006/main">
               <a:ext uri="{FF2B5EF4-FFF2-40B4-BE49-F238E27FC236}">
-                <a16:creationId xmlns:a16="http://schemas.microsoft.com/office/drawing/2014/main" id="{8DA4B4D0-45E1-418A-AACD-8096F775A15B}"/>
+                <a16:creationId xmlns:a16="http://schemas.microsoft.com/office/drawing/2014/main" id="{C4E82951-2C46-445E-BEA3-8E725A3B35EB}"/>
               </a:ext>
             </a:extLst>
           </p:cNvPr>
@@ -26653,7 +26658,7 @@
     </p:spTree>
     <p:extLst>
       <p:ext uri="{BB962C8B-B14F-4D97-AF65-F5344CB8AC3E}">
-        <p14:creationId xmlns:p14="http://schemas.microsoft.com/office/powerpoint/2010/main" val="1438102545"/>
+        <p14:creationId xmlns:p14="http://schemas.microsoft.com/office/powerpoint/2010/main" val="1776292606"/>
       </p:ext>
     </p:extLst>
   </p:cSld>
@@ -26684,7 +26689,7 @@
           <p:cNvPr id="8" name="title">
             <a:extLst xmlns:a="http://schemas.openxmlformats.org/drawingml/2006/main">
               <a:ext uri="{FF2B5EF4-FFF2-40B4-BE49-F238E27FC236}">
-                <a16:creationId xmlns:a16="http://schemas.microsoft.com/office/drawing/2014/main" id="{ECFFFAB3-0863-44D6-AA74-D862C82BA11F}"/>
+                <a16:creationId xmlns:a16="http://schemas.microsoft.com/office/drawing/2014/main" id="{3624CFB2-432A-4515-B3C8-6B1CB8E500B5}"/>
               </a:ext>
             </a:extLst>
           </p:cNvPr>
@@ -26741,7 +26746,7 @@
           <p:cNvPr id="2" name="header-rule">
             <a:extLst xmlns:a="http://schemas.openxmlformats.org/drawingml/2006/main">
               <a:ext uri="{FF2B5EF4-FFF2-40B4-BE49-F238E27FC236}">
-                <a16:creationId xmlns:a16="http://schemas.microsoft.com/office/drawing/2014/main" id="{ED13E0D7-5F3B-4DB8-B56E-5E7BB7368F89}"/>
+                <a16:creationId xmlns:a16="http://schemas.microsoft.com/office/drawing/2014/main" id="{3FEA3865-F08A-49E9-8CFB-E494A8604EEF}"/>
               </a:ext>
             </a:extLst>
           </p:cNvPr>
@@ -26771,7 +26776,7 @@
           <p:cNvPr id="3" name="page">
             <a:extLst xmlns:a="http://schemas.openxmlformats.org/drawingml/2006/main">
               <a:ext uri="{FF2B5EF4-FFF2-40B4-BE49-F238E27FC236}">
-                <a16:creationId xmlns:a16="http://schemas.microsoft.com/office/drawing/2014/main" id="{04C168BF-42F8-45FC-9E95-7555D0EAB55E}"/>
+                <a16:creationId xmlns:a16="http://schemas.microsoft.com/office/drawing/2014/main" id="{C8E3AE3D-8CFC-4C45-9FD1-05DA56DDDEA7}"/>
               </a:ext>
             </a:extLst>
           </p:cNvPr>
@@ -26828,7 +26833,7 @@
           <p:cNvPr id="4" name="headline">
             <a:extLst xmlns:a="http://schemas.openxmlformats.org/drawingml/2006/main">
               <a:ext uri="{FF2B5EF4-FFF2-40B4-BE49-F238E27FC236}">
-                <a16:creationId xmlns:a16="http://schemas.microsoft.com/office/drawing/2014/main" id="{F0F77C51-5416-49BC-96B3-BFEF8B84F699}"/>
+                <a16:creationId xmlns:a16="http://schemas.microsoft.com/office/drawing/2014/main" id="{BB5A805E-0C8E-42F9-8D63-EC2CFAE05EAD}"/>
               </a:ext>
             </a:extLst>
           </p:cNvPr>
@@ -26885,7 +26890,7 @@
           <p:cNvPr id="5" name="scope">
             <a:extLst xmlns:a="http://schemas.openxmlformats.org/drawingml/2006/main">
               <a:ext uri="{FF2B5EF4-FFF2-40B4-BE49-F238E27FC236}">
-                <a16:creationId xmlns:a16="http://schemas.microsoft.com/office/drawing/2014/main" id="{FAD4B9ED-2445-4629-AC7C-85659DBE6264}"/>
+                <a16:creationId xmlns:a16="http://schemas.microsoft.com/office/drawing/2014/main" id="{8F1C644A-C225-4FD6-8EB9-048C86355532}"/>
               </a:ext>
             </a:extLst>
           </p:cNvPr>
@@ -27428,7 +27433,7 @@
                           <a:ea typeface="Apple SD Gothic Neo"/>
                           <a:cs typeface="Apple SD Gothic Neo"/>
                         </a:rPr>
-                        <a:t>비용 ≤$0.30/P21 / commit ≤4GiB</a:t>
+                        <a:t>비용 ≤$0.50/P21 / commit ≤4GiB</a:t>
                       </a:r>
                     </a:p>
                     <a:p>
@@ -27672,7 +27677,7 @@
           <p:cNvPr id="7" name="footer">
             <a:extLst xmlns:a="http://schemas.openxmlformats.org/drawingml/2006/main">
               <a:ext uri="{FF2B5EF4-FFF2-40B4-BE49-F238E27FC236}">
-                <a16:creationId xmlns:a16="http://schemas.microsoft.com/office/drawing/2014/main" id="{921F85A3-C9BF-4172-943A-5D0429244656}"/>
+                <a16:creationId xmlns:a16="http://schemas.microsoft.com/office/drawing/2014/main" id="{4C361FAC-7CF2-4A80-ABF2-183B63C782ED}"/>
               </a:ext>
             </a:extLst>
           </p:cNvPr>
@@ -27727,7 +27732,7 @@
     </p:spTree>
     <p:extLst>
       <p:ext uri="{BB962C8B-B14F-4D97-AF65-F5344CB8AC3E}">
-        <p14:creationId xmlns:p14="http://schemas.microsoft.com/office/powerpoint/2010/main" val="1267817231"/>
+        <p14:creationId xmlns:p14="http://schemas.microsoft.com/office/powerpoint/2010/main" val="2048637843"/>
       </p:ext>
     </p:extLst>
   </p:cSld>
@@ -27758,7 +27763,7 @@
           <p:cNvPr id="8" name="title">
             <a:extLst xmlns:a="http://schemas.openxmlformats.org/drawingml/2006/main">
               <a:ext uri="{FF2B5EF4-FFF2-40B4-BE49-F238E27FC236}">
-                <a16:creationId xmlns:a16="http://schemas.microsoft.com/office/drawing/2014/main" id="{5C350B14-2BB9-461C-949A-68142AAE655E}"/>
+                <a16:creationId xmlns:a16="http://schemas.microsoft.com/office/drawing/2014/main" id="{4B662A00-F331-4EBC-AAC3-45CC9F41C165}"/>
               </a:ext>
             </a:extLst>
           </p:cNvPr>
@@ -27815,7 +27820,7 @@
           <p:cNvPr id="2" name="header-rule">
             <a:extLst xmlns:a="http://schemas.openxmlformats.org/drawingml/2006/main">
               <a:ext uri="{FF2B5EF4-FFF2-40B4-BE49-F238E27FC236}">
-                <a16:creationId xmlns:a16="http://schemas.microsoft.com/office/drawing/2014/main" id="{6789A051-A02F-4113-A99B-D26701672FB3}"/>
+                <a16:creationId xmlns:a16="http://schemas.microsoft.com/office/drawing/2014/main" id="{F70889D0-51B4-4E1D-8C7D-AA7442E4FD2C}"/>
               </a:ext>
             </a:extLst>
           </p:cNvPr>
@@ -27845,7 +27850,7 @@
           <p:cNvPr id="3" name="page">
             <a:extLst xmlns:a="http://schemas.openxmlformats.org/drawingml/2006/main">
               <a:ext uri="{FF2B5EF4-FFF2-40B4-BE49-F238E27FC236}">
-                <a16:creationId xmlns:a16="http://schemas.microsoft.com/office/drawing/2014/main" id="{FE2A1DE0-D2CB-4454-9812-F4F5DE9E1874}"/>
+                <a16:creationId xmlns:a16="http://schemas.microsoft.com/office/drawing/2014/main" id="{1424BA80-9AE5-449D-B0D0-7E839ED19BBA}"/>
               </a:ext>
             </a:extLst>
           </p:cNvPr>
@@ -27902,7 +27907,7 @@
           <p:cNvPr id="4" name="headline">
             <a:extLst xmlns:a="http://schemas.openxmlformats.org/drawingml/2006/main">
               <a:ext uri="{FF2B5EF4-FFF2-40B4-BE49-F238E27FC236}">
-                <a16:creationId xmlns:a16="http://schemas.microsoft.com/office/drawing/2014/main" id="{8D4F0420-4617-4097-81E2-751518B6B232}"/>
+                <a16:creationId xmlns:a16="http://schemas.microsoft.com/office/drawing/2014/main" id="{1272F382-65DD-422A-8786-4C5FB00A7754}"/>
               </a:ext>
             </a:extLst>
           </p:cNvPr>
@@ -27959,7 +27964,7 @@
           <p:cNvPr id="5" name="scope">
             <a:extLst xmlns:a="http://schemas.openxmlformats.org/drawingml/2006/main">
               <a:ext uri="{FF2B5EF4-FFF2-40B4-BE49-F238E27FC236}">
-                <a16:creationId xmlns:a16="http://schemas.microsoft.com/office/drawing/2014/main" id="{E4B2D0BD-9530-4B94-8C86-50BEF00D3ADE}"/>
+                <a16:creationId xmlns:a16="http://schemas.microsoft.com/office/drawing/2014/main" id="{3C56BD69-5C1B-4AC5-BEDC-41E366C30CFE}"/>
               </a:ext>
             </a:extLst>
           </p:cNvPr>
@@ -29253,7 +29258,7 @@
           <p:cNvPr id="7" name="footer">
             <a:extLst xmlns:a="http://schemas.openxmlformats.org/drawingml/2006/main">
               <a:ext uri="{FF2B5EF4-FFF2-40B4-BE49-F238E27FC236}">
-                <a16:creationId xmlns:a16="http://schemas.microsoft.com/office/drawing/2014/main" id="{75629E1B-F08A-48C4-87DA-6FE6359B93B0}"/>
+                <a16:creationId xmlns:a16="http://schemas.microsoft.com/office/drawing/2014/main" id="{8E924A3F-8653-467A-BE8C-188FF3BBDA03}"/>
               </a:ext>
             </a:extLst>
           </p:cNvPr>
@@ -29308,7 +29313,7 @@
     </p:spTree>
     <p:extLst>
       <p:ext uri="{BB962C8B-B14F-4D97-AF65-F5344CB8AC3E}">
-        <p14:creationId xmlns:p14="http://schemas.microsoft.com/office/powerpoint/2010/main" val="410058508"/>
+        <p14:creationId xmlns:p14="http://schemas.microsoft.com/office/powerpoint/2010/main" val="1035022172"/>
       </p:ext>
     </p:extLst>
   </p:cSld>
@@ -29339,7 +29344,7 @@
           <p:cNvPr id="8" name="title">
             <a:extLst xmlns:a="http://schemas.openxmlformats.org/drawingml/2006/main">
               <a:ext uri="{FF2B5EF4-FFF2-40B4-BE49-F238E27FC236}">
-                <a16:creationId xmlns:a16="http://schemas.microsoft.com/office/drawing/2014/main" id="{2A948F48-7D32-47E0-A16F-43CA0B5A6202}"/>
+                <a16:creationId xmlns:a16="http://schemas.microsoft.com/office/drawing/2014/main" id="{A45DC734-68E2-4E8C-9341-AB22F83CB480}"/>
               </a:ext>
             </a:extLst>
           </p:cNvPr>
@@ -29396,7 +29401,7 @@
           <p:cNvPr id="2" name="header-rule">
             <a:extLst xmlns:a="http://schemas.openxmlformats.org/drawingml/2006/main">
               <a:ext uri="{FF2B5EF4-FFF2-40B4-BE49-F238E27FC236}">
-                <a16:creationId xmlns:a16="http://schemas.microsoft.com/office/drawing/2014/main" id="{0D74018C-F595-48B7-9626-6071EBCFBFE5}"/>
+                <a16:creationId xmlns:a16="http://schemas.microsoft.com/office/drawing/2014/main" id="{99234F12-6E7E-465C-8DAF-F95D70EA65DA}"/>
               </a:ext>
             </a:extLst>
           </p:cNvPr>
@@ -29426,7 +29431,7 @@
           <p:cNvPr id="3" name="page">
             <a:extLst xmlns:a="http://schemas.openxmlformats.org/drawingml/2006/main">
               <a:ext uri="{FF2B5EF4-FFF2-40B4-BE49-F238E27FC236}">
-                <a16:creationId xmlns:a16="http://schemas.microsoft.com/office/drawing/2014/main" id="{FFC771F1-4BC7-4090-8C7A-767272D4B7A4}"/>
+                <a16:creationId xmlns:a16="http://schemas.microsoft.com/office/drawing/2014/main" id="{52EC775C-65B4-491B-A07B-D6D37D0BDEB1}"/>
               </a:ext>
             </a:extLst>
           </p:cNvPr>
@@ -29483,7 +29488,7 @@
           <p:cNvPr id="4" name="headline">
             <a:extLst xmlns:a="http://schemas.openxmlformats.org/drawingml/2006/main">
               <a:ext uri="{FF2B5EF4-FFF2-40B4-BE49-F238E27FC236}">
-                <a16:creationId xmlns:a16="http://schemas.microsoft.com/office/drawing/2014/main" id="{2F707774-A715-4BF2-89B2-28D965977A26}"/>
+                <a16:creationId xmlns:a16="http://schemas.microsoft.com/office/drawing/2014/main" id="{7C85A454-97F5-450E-9AFF-AB0AB53AB2C0}"/>
               </a:ext>
             </a:extLst>
           </p:cNvPr>
@@ -29540,7 +29545,7 @@
           <p:cNvPr id="5" name="scope">
             <a:extLst xmlns:a="http://schemas.openxmlformats.org/drawingml/2006/main">
               <a:ext uri="{FF2B5EF4-FFF2-40B4-BE49-F238E27FC236}">
-                <a16:creationId xmlns:a16="http://schemas.microsoft.com/office/drawing/2014/main" id="{9E774550-2D49-4107-B3DC-E7CFCE3E2EB4}"/>
+                <a16:creationId xmlns:a16="http://schemas.microsoft.com/office/drawing/2014/main" id="{8D4051D2-6029-4B21-9738-1A61D4217D2E}"/>
               </a:ext>
             </a:extLst>
           </p:cNvPr>
@@ -30848,7 +30853,7 @@
           <p:cNvPr id="7" name="footer">
             <a:extLst xmlns:a="http://schemas.openxmlformats.org/drawingml/2006/main">
               <a:ext uri="{FF2B5EF4-FFF2-40B4-BE49-F238E27FC236}">
-                <a16:creationId xmlns:a16="http://schemas.microsoft.com/office/drawing/2014/main" id="{42276120-A97B-4038-9546-9A4891053912}"/>
+                <a16:creationId xmlns:a16="http://schemas.microsoft.com/office/drawing/2014/main" id="{8B03BFE4-188A-4E07-AC4B-1D18DC0C1758}"/>
               </a:ext>
             </a:extLst>
           </p:cNvPr>
@@ -30903,7 +30908,7 @@
     </p:spTree>
     <p:extLst>
       <p:ext uri="{BB962C8B-B14F-4D97-AF65-F5344CB8AC3E}">
-        <p14:creationId xmlns:p14="http://schemas.microsoft.com/office/powerpoint/2010/main" val="891173581"/>
+        <p14:creationId xmlns:p14="http://schemas.microsoft.com/office/powerpoint/2010/main" val="259028113"/>
       </p:ext>
     </p:extLst>
   </p:cSld>
@@ -30934,7 +30939,7 @@
           <p:cNvPr id="8" name="title">
             <a:extLst xmlns:a="http://schemas.openxmlformats.org/drawingml/2006/main">
               <a:ext uri="{FF2B5EF4-FFF2-40B4-BE49-F238E27FC236}">
-                <a16:creationId xmlns:a16="http://schemas.microsoft.com/office/drawing/2014/main" id="{A8F4C509-59F5-4885-B3D0-37536C2A65B9}"/>
+                <a16:creationId xmlns:a16="http://schemas.microsoft.com/office/drawing/2014/main" id="{F7DAF67F-1175-4DBE-BB58-EA26F2912536}"/>
               </a:ext>
             </a:extLst>
           </p:cNvPr>
@@ -30991,7 +30996,7 @@
           <p:cNvPr id="2" name="header-rule">
             <a:extLst xmlns:a="http://schemas.openxmlformats.org/drawingml/2006/main">
               <a:ext uri="{FF2B5EF4-FFF2-40B4-BE49-F238E27FC236}">
-                <a16:creationId xmlns:a16="http://schemas.microsoft.com/office/drawing/2014/main" id="{5F01649B-686E-4B59-B054-7585573B8DF2}"/>
+                <a16:creationId xmlns:a16="http://schemas.microsoft.com/office/drawing/2014/main" id="{9470C8A2-8752-43AF-B6BF-C5C4E7A7C321}"/>
               </a:ext>
             </a:extLst>
           </p:cNvPr>
@@ -31021,7 +31026,7 @@
           <p:cNvPr id="3" name="page">
             <a:extLst xmlns:a="http://schemas.openxmlformats.org/drawingml/2006/main">
               <a:ext uri="{FF2B5EF4-FFF2-40B4-BE49-F238E27FC236}">
-                <a16:creationId xmlns:a16="http://schemas.microsoft.com/office/drawing/2014/main" id="{777F954D-385C-4641-910F-25FF0E3BB2FF}"/>
+                <a16:creationId xmlns:a16="http://schemas.microsoft.com/office/drawing/2014/main" id="{DD88009A-F035-4E63-876E-5603AB70211D}"/>
               </a:ext>
             </a:extLst>
           </p:cNvPr>
@@ -31078,7 +31083,7 @@
           <p:cNvPr id="4" name="headline">
             <a:extLst xmlns:a="http://schemas.openxmlformats.org/drawingml/2006/main">
               <a:ext uri="{FF2B5EF4-FFF2-40B4-BE49-F238E27FC236}">
-                <a16:creationId xmlns:a16="http://schemas.microsoft.com/office/drawing/2014/main" id="{37CCE702-BA5D-4D12-A1D7-D8B4D1A15A5B}"/>
+                <a16:creationId xmlns:a16="http://schemas.microsoft.com/office/drawing/2014/main" id="{4001907E-C726-4D4B-BE37-723239F49EC2}"/>
               </a:ext>
             </a:extLst>
           </p:cNvPr>
@@ -31135,7 +31140,7 @@
           <p:cNvPr id="5" name="scope">
             <a:extLst xmlns:a="http://schemas.openxmlformats.org/drawingml/2006/main">
               <a:ext uri="{FF2B5EF4-FFF2-40B4-BE49-F238E27FC236}">
-                <a16:creationId xmlns:a16="http://schemas.microsoft.com/office/drawing/2014/main" id="{F071CAE0-AB91-4CA2-8EC4-8B54F5B3F2B9}"/>
+                <a16:creationId xmlns:a16="http://schemas.microsoft.com/office/drawing/2014/main" id="{862A8418-1031-4A5F-9B96-0803056FA4FC}"/>
               </a:ext>
             </a:extLst>
           </p:cNvPr>
@@ -32471,7 +32476,7 @@
           <p:cNvPr id="7" name="footer">
             <a:extLst xmlns:a="http://schemas.openxmlformats.org/drawingml/2006/main">
               <a:ext uri="{FF2B5EF4-FFF2-40B4-BE49-F238E27FC236}">
-                <a16:creationId xmlns:a16="http://schemas.microsoft.com/office/drawing/2014/main" id="{EA7DFB65-37C5-4BF8-8BAB-30090743ED19}"/>
+                <a16:creationId xmlns:a16="http://schemas.microsoft.com/office/drawing/2014/main" id="{FE29488F-569C-4E6F-B2AC-49EF16C5A5C8}"/>
               </a:ext>
             </a:extLst>
           </p:cNvPr>
@@ -32526,7 +32531,7 @@
     </p:spTree>
     <p:extLst>
       <p:ext uri="{BB962C8B-B14F-4D97-AF65-F5344CB8AC3E}">
-        <p14:creationId xmlns:p14="http://schemas.microsoft.com/office/powerpoint/2010/main" val="1203299029"/>
+        <p14:creationId xmlns:p14="http://schemas.microsoft.com/office/powerpoint/2010/main" val="1280019452"/>
       </p:ext>
     </p:extLst>
   </p:cSld>

--- a/docs/presentations_files/quality-attributes/VIA-quality-attributes.pptx
+++ b/docs/presentations_files/quality-attributes/VIA-quality-attributes.pptx
@@ -2,18 +2,18 @@
 <file path=ppt/presentation.xml><?xml version="1.0" encoding="utf-8"?>
 <p:presentation xmlns:p="http://schemas.openxmlformats.org/presentationml/2006/main">
   <p:sldMasterIdLst>
-    <p:sldMasterId xmlns:r="http://schemas.openxmlformats.org/officeDocument/2006/relationships" id="2147483648" r:id="Ra9cd6f0fea754559"/>
+    <p:sldMasterId xmlns:r="http://schemas.openxmlformats.org/officeDocument/2006/relationships" id="2147483648" r:id="R53ceaff1e4044dbd"/>
   </p:sldMasterIdLst>
   <p:notesMasterIdLst>
-    <p:notesMasterId xmlns:r="http://schemas.openxmlformats.org/officeDocument/2006/relationships" r:id="R6fa42f2316834f57"/>
+    <p:notesMasterId xmlns:r="http://schemas.openxmlformats.org/officeDocument/2006/relationships" r:id="Rc8d9fd91bd21450d"/>
   </p:notesMasterIdLst>
   <p:sldIdLst>
-    <p:sldId xmlns:r="http://schemas.openxmlformats.org/officeDocument/2006/relationships" id="256" r:id="Re839c732156946ed"/>
-    <p:sldId xmlns:r="http://schemas.openxmlformats.org/officeDocument/2006/relationships" id="257" r:id="R38aed98338724477"/>
-    <p:sldId xmlns:r="http://schemas.openxmlformats.org/officeDocument/2006/relationships" id="258" r:id="Rfc24fb18dd594eaf"/>
-    <p:sldId xmlns:r="http://schemas.openxmlformats.org/officeDocument/2006/relationships" id="259" r:id="R798a56557cec4056"/>
-    <p:sldId xmlns:r="http://schemas.openxmlformats.org/officeDocument/2006/relationships" id="260" r:id="Rcf7b14c0e739472f"/>
-    <p:sldId xmlns:r="http://schemas.openxmlformats.org/officeDocument/2006/relationships" id="261" r:id="Ra914104953f34808"/>
+    <p:sldId xmlns:r="http://schemas.openxmlformats.org/officeDocument/2006/relationships" id="256" r:id="R9d55d59f1b68454c"/>
+    <p:sldId xmlns:r="http://schemas.openxmlformats.org/officeDocument/2006/relationships" id="257" r:id="Re57c441a3ad54f30"/>
+    <p:sldId xmlns:r="http://schemas.openxmlformats.org/officeDocument/2006/relationships" id="258" r:id="Rd86eb0d8c49c4839"/>
+    <p:sldId xmlns:r="http://schemas.openxmlformats.org/officeDocument/2006/relationships" id="259" r:id="Rb9e7d281b5b14be7"/>
+    <p:sldId xmlns:r="http://schemas.openxmlformats.org/officeDocument/2006/relationships" id="260" r:id="R376c63a001dd4cec"/>
+    <p:sldId xmlns:r="http://schemas.openxmlformats.org/officeDocument/2006/relationships" id="261" r:id="R97d7501078f5472f"/>
   </p:sldIdLst>
   <p:sldSz cx="18288000" cy="10287000"/>
   <p:notesSz cx="6858000" cy="9144000"/>
@@ -472,7 +472,7 @@
           </a:p>
           <a:p xmlns:a="http://schemas.openxmlformats.org/drawingml/2006/main">
             <a:r>
-              <a:t>원본 SHA-256: d25a503005403e71d5811d61f20d9c227479bfeb04808ba868ce06adc463e4f8</a:t>
+              <a:t>원본 SHA-256: 8520fa1bd1661f72bb87071ab03755964b0539565490994de845bbc086654cfd</a:t>
             </a:r>
           </a:p>
           <a:p xmlns:a="http://schemas.openxmlformats.org/drawingml/2006/main">
@@ -3172,7 +3172,7 @@
           </a:p>
           <a:p xmlns:a="http://schemas.openxmlformats.org/drawingml/2006/main">
             <a:r>
-              <a:t>Google Gemini 3 Flash 공식 단가: https://ai.google.dev/gemini-api/docs/pricing#gemini-3-flash-preview</a:t>
+              <a:t>Qwen 공식 H20 속도 benchmark: https://qwen.readthedocs.io/en/latest/getting_started/speed_benchmark.html</a:t>
             </a:r>
           </a:p>
           <a:p xmlns:a="http://schemas.openxmlformats.org/drawingml/2006/main">
@@ -3262,7 +3262,7 @@
           </a:p>
           <a:p xmlns:a="http://schemas.openxmlformats.org/drawingml/2006/main">
             <a:r>
-              <a:t>Nielsen의 0.1/1초는 참고 기준이며 평균과 95% 규칙은 작성자 예산이다. Gemini 생성률 200 token/s를 비롯한 지연은 모두 작성자 가정이다. 전사 0.10 + 첫 출력 0.30 + 의미 출력 100/200 + 코드·읽기·확정 0.08 + 음성 0.25 = 1.23초로, 이 직렬 경로는 1초 예산을 넘는다. 유효한 반응에 필요한 의미 출력이 50 token인 경우에만 같은 가정에서 0.98초다. 따라서 필요한 의미를 유지한 짧은 출력, 입력 중 선행 처리 또는 병렬 경로가 목표를 충족하는지 실제 사례에서 확인해야 한다. 50 token은 전체 200 token 호출 예산을 일괄 축소하거나 placeholder를 정답으로 인정하는 규칙이 아니다. 의미 처리가 필요한 정정·질문·거부를 local stop로 대체하지 않는다.</a:t>
+              <a:t>Nielsen의 0.1/1초는 참고 기준이며 평균과 95% 규칙은 작성자 예산이다. Qwen 생성률 130 token/s와 TTFT를 비롯한 지연은 §8.4.1.2의 PoC 작성자 가정이다. 전사 0.10 + 첫 출력 0.30 + 의미 출력 100/130 + 코드·읽기·확정 0.08 + 음성 0.25 ≈ 1.499초로, 이 직렬 경로는 1초 예산을 넘는다. 유효한 의미 출력이 50 token이어도 같은 가정에서 약 1.115초로 목표를 넘는다. 두 예시는 전체 반응 모집단의 평균이나 후보 측정값이 아니다. 따라서 필요한 의미를 유지한 짧은 출력, 입력 중 선행 처리 또는 병렬 경로가 목표를 충족하는지 실제 사례에서 확인해야 한다. 50 token은 전체 200 token 호출 예산을 일괄 축소하거나 placeholder를 정답으로 인정하는 규칙이 아니다. 의미 처리가 필요한 정정·질문·거부를 local stop로 대체하지 않는다.</a:t>
             </a:r>
           </a:p>
           <a:p xmlns:a="http://schemas.openxmlformats.org/drawingml/2006/main">
@@ -3462,7 +3462,7 @@
           </a:p>
           <a:p xmlns:a="http://schemas.openxmlformats.org/drawingml/2006/main">
             <a:r>
-              <a:t>Nielsen의 0.1/1초는 참고 기준이며 평균과 95% 규칙은 작성자 예산이다. Gemini 생성률 200 token/s를 비롯한 지연은 모두 작성자 가정이다. 전사 0.10 + 첫 출력 0.30 + 의미 출력 100/200 + 코드·읽기·확정 0.08 + 음성 0.25 = 1.23초로, 이 직렬 경로는 1초 예산을 넘는다. 유효한 반응에 필요한 의미 출력이 50 token인 경우에만 같은 가정에서 0.98초다. 따라서 필요한 의미를 유지한 짧은 출력, 입력 중 선행 처리 또는 병렬 경로가 목표를 충족하는지 실제 사례에서 확인해야 한다. 50 token은 전체 200 token 호출 예산을 일괄 축소하거나 placeholder를 정답으로 인정하는 규칙이 아니다. 의미 처리가 필요한 정정·질문·거부를 local stop로 대체하지 않는다.</a:t>
+              <a:t>Nielsen의 0.1/1초는 참고 기준이며 평균과 95% 규칙은 작성자 예산이다. Qwen 생성률 130 token/s와 TTFT를 비롯한 지연은 §8.4.1.2의 PoC 작성자 가정이다. 전사 0.10 + 첫 출력 0.30 + 의미 출력 100/130 + 코드·읽기·확정 0.08 + 음성 0.25 ≈ 1.499초로, 이 직렬 경로는 1초 예산을 넘는다. 유효한 의미 출력이 50 token이어도 같은 가정에서 약 1.115초로 목표를 넘는다. 두 예시는 전체 반응 모집단의 평균이나 후보 측정값이 아니다. 따라서 필요한 의미를 유지한 짧은 출력, 입력 중 선행 처리 또는 병렬 경로가 목표를 충족하는지 실제 사례에서 확인해야 한다. 50 token은 전체 200 token 호출 예산을 일괄 축소하거나 placeholder를 정답으로 인정하는 규칙이 아니다. 의미 처리가 필요한 정정·질문·거부를 local stop로 대체하지 않는다.</a:t>
             </a:r>
           </a:p>
           <a:p xmlns:a="http://schemas.openxmlformats.org/drawingml/2006/main">
@@ -6663,6 +6663,291 @@
           <a:p xmlns:a="http://schemas.openxmlformats.org/drawingml/2006/main">
             <a:r>
               <a:t>묶음당 21개 시나리오는 사용자 19개 + Agent 단독 2개다. 집중 장면 안에는 Agent 사건 4개가 추가로 들어 있다. Voice 입력 50초와 출력 예산 179초, 반응 27개와 사용자 cycle 19개를 정의했다. 다섯 묶음 전체는 105개 시나리오·630조건·135반응·95cycle이다. 사용자의 하루 빈도를 뜻하지 않는다.</a:t>
+            </a:r>
+          </a:p>
+          <a:p xmlns:a="http://schemas.openxmlformats.org/drawingml/2006/main">
+            <a:r>
+              <a:t/>
+            </a:r>
+          </a:p>
+          <a:p xmlns:a="http://schemas.openxmlformats.org/drawingml/2006/main">
+            <a:r>
+              <a:t/>
+            </a:r>
+          </a:p>
+          <a:p xmlns:a="http://schemas.openxmlformats.org/drawingml/2006/main">
+            <a:r>
+              <a:t>모델 reference 상세 §8.4</a:t>
+            </a:r>
+          </a:p>
+          <a:p xmlns:a="http://schemas.openxmlformats.org/drawingml/2006/main">
+            <a:r>
+              <a:t> 장치와 모델 계산 reference — 2026-10-11 확인</a:t>
+            </a:r>
+          </a:p>
+          <a:p xmlns:a="http://schemas.openxmlformats.org/drawingml/2006/main">
+            <a:r>
+              <a:t/>
+            </a:r>
+          </a:p>
+          <a:p xmlns:a="http://schemas.openxmlformats.org/drawingml/2006/main">
+            <a:r>
+              <a:t>이 reference는 현재 개발 중인 모델/클라우드 서비스의 실제 가격이나 성능을 뜻하지 않는다. 같은 A/B 계산에 쓸 외부 공개 기준이다. 값은 USD, 모델 단가는 1,000,000 token당 표준 유료 요금이며 free tier/할인으로 0원을 만들지 않는다.</a:t>
+            </a:r>
+          </a:p>
+          <a:p xmlns:a="http://schemas.openxmlformats.org/drawingml/2006/main">
+            <a:r>
+              <a:t/>
+            </a:r>
+          </a:p>
+          <a:p xmlns:a="http://schemas.openxmlformats.org/drawingml/2006/main">
+            <a:r>
+              <a:t>| 용도 | 선택 reference / 값 | 출처와 적용 범위 |</a:t>
+            </a:r>
+          </a:p>
+          <a:p xmlns:a="http://schemas.openxmlformats.org/drawingml/2006/main">
+            <a:r>
+              <a:t>| --- | --- | --- |</a:t>
+            </a:r>
+          </a:p>
+          <a:p xmlns:a="http://schemas.openxmlformats.org/drawingml/2006/main">
+            <a:r>
+              <a:t>| Windows PC | **Galaxy Book6 Ultra NP960UJH-XG3IN**, Windows 11 Home, Core Ultra 7 356H, RAM 32GB LPDDR5X, RTX 5070 Laptop GPU 8GB, SSD 1TB | [삼성 공식 SKU 사양](https://www.samsung.com/in/computers/galaxy-book/galaxy-book6-ultra-ultra-7-32gb-1tb-np960ujh-xg3in/). RAM과 VRAM을 같은 자원으로 합치지 않음. 모델은 클라우드이므로 GPU 가중치 적재를 로컬 비용에 가산하지 않음 |</a:t>
+            </a:r>
+          </a:p>
+          <a:p xmlns:a="http://schemas.openxmlformats.org/drawingml/2006/main">
+            <a:r>
+              <a:t>| 의미 LLM의 비용 | **Qwen3-30B-A3B-Instruct-2507**, `qwen3-30b-a3b-instruct-2507`: Alibaba Cloud Model Studio **Singapore / International** 입력 **$0.20**, 출력 **$0.80** / 1M token, non-thinking | [공식 API 모델/단가](https://docs.modelstudio.console.alibabacloud.com/en/model-studio/qwen3-30b-a3b-instruct-2507), [Qwen 공식 모델 카드](https://huggingface.co/Qwen/Qwen3-30B-A3B-Instruct-2507). 약30B 전체/3B 활성 MoE, Text-to-Text. 사용자 승인한 PoC 의미 모델 기준이며 최종 제품 모델/DP 승자 선정은 아님. 같은 provider/region/revision/mode를 양안에 적용 |</a:t>
+            </a:r>
+          </a:p>
+          <a:p xmlns:a="http://schemas.openxmlformats.org/drawingml/2006/main">
+            <a:r>
+              <a:t>| 의미 LLM의 생성 속도 | **작성자 decode 가정 130 token/s**, 민감도 **100 / 130 / 160 token/s**, 기준 TTFT **0.30초** | [Qwen 공식 H20 benchmark](https://qwen.readthedocs.io/en/latest/getting_started/speed_benchmark.html)의 원본 계열 유효 출력률 약122.53~137.11(BF16) 등을 참고한 수치 규모의 가정. Instruct-2507 API의 공개 decode rate/보장/실측이 아니며 공개표에서 TTFT와 decode를 분리 추출한 값도 아님. 가격은 Alibaba API, 속도 근거는 별도 H20 환경임을 §8.4.1.2에 명시 |</a:t>
+            </a:r>
+          </a:p>
+          <a:p xmlns:a="http://schemas.openxmlformats.org/drawingml/2006/main">
+            <a:r>
+              <a:t>| 음성 비용/비동기 대화 기준 | **OpenAI GPT Realtime**, `gpt-realtime` (`gpt-realtime-2025-08-28`): audio 입력 **$32**, 출력 **$64** / 1M token. Text 입력 **$4**, 출력 **$16** / 1M token. cached audio/Text 입력 **$0.40** / 1M token | [공식 모델/단가](https://developers.openai.com/api/docs/models/gpt-realtime), [Realtime 청구](https://developers.openai.com/api/docs/guides/voice-latency-cost), [비동기 함수 호출](https://developers.openai.com/blog/realtime-api). 사용자 입력 약10 audio token/s, assistant 생성 약20 audio token/s로 신규 audio는 **$0.0192/분 입력, $0.0768/분 출력**으로 환산. 특수 token·이력 재입력·Text·폐기 생성은 별도. 공식 페이지의 Deprecated 상태와 관계없이 사용자가 지정한 날짜별 PoC 비용/기능 reference를 고정하며 실서비스의 신규 채택을 뜻하지 않음 |</a:t>
+            </a:r>
+          </a:p>
+          <a:p xmlns:a="http://schemas.openxmlformats.org/drawingml/2006/main">
+            <a:r>
+              <a:t>| 시간 목표의 사용자 근거 | 즉각 제어 **0.1초**, 대화 흐름 **1초**, 주의 유지 **10초**의 상호작용 참조 | [Nielsen Norman Group 원문](https://www.nngroup.com/articles/website-response-times/). VIA의 평균/모집단/추가 지연 예산은 작성자가 선택하며 문헌이 VIA의 평균 목표를 직접 규정했다고 하지 않음 |</a:t>
+            </a:r>
+          </a:p>
+          <a:p xmlns:a="http://schemas.openxmlformats.org/drawingml/2006/main">
+            <a:r>
+              <a:t/>
+            </a:r>
+          </a:p>
+          <a:p xmlns:a="http://schemas.openxmlformats.org/drawingml/2006/main">
+            <a:r>
+              <a:t>음성 비용은 실제로 보내거나 청구되는 audio/context의 양을 사용한다. VAD가 앞단에 있다는 사실만으로 silence/context 재사용 청구가 0이라고 가정하지 않는다. Text prompt/context, 재시도, 취소 불가인 폐기 출력과 미사용 배경 생산도 포함한다. 같은 사용량을 token 요금과 분 요금으로 이중 계산하지 않는다. 모델 제공자가 사용량을 반환한 실측은 그 사용량을 우선하고, 공개 reference 계산은 음성 길이 기반의 근사임을 남긴다.</a:t>
+            </a:r>
+          </a:p>
+          <a:p xmlns:a="http://schemas.openxmlformats.org/drawingml/2006/main">
+            <a:r>
+              <a:t/>
+            </a:r>
+          </a:p>
+          <a:p xmlns:a="http://schemas.openxmlformats.org/drawingml/2006/main">
+            <a:r>
+              <a:t>검산 예시: 의미 호출의 입력 2,000 token/청구 출력 200 token은 `2,000×0.20/1M + 200×0.80/1M = $0.00056`, 작성자 decode 가정의 생성 부분은 `200/130 ≈ 1.538초`다. Instruct-2507은 non-thinking이며 출력200은 실제 답변/frame/tool 출력의 청구 예산이다. 원천/의미/도구 오류의 추가 질문·재시도·폐기 출력을 모두 포함하고 provider별 tokenizer의 실제 사용량을 우선한다. GPT Realtime 신규 audio 입력 1분/출력 1분은 `600×32/1M + 1,200×64/1M = $0.096`이며 Text와 이력 audio 재입력 청구는 별도다. 응답마다 이전 대화가 입력으로 재사용되므로 실제 `response.done`의 modality별 input/output/cached token을 호출 ID로 중복 제거해 합산한다. 초기 2,000turn을 음성 session에 전부 보내도록 강제하지 않으며 실제 보낸 이력·요약·instruction은 청구한다. 별도 input transcription을 켜면 해당 모델 청구도 더한다. 생성 부분 약1.538초를 첫 출력/입력 처리/통신/queue가 포함된 호출 완료 시간으로 쓰지 않는다. Qwen의 기본 예산에는 할인 없는 입력/출력 단가를 사용한다. 실제 cache 할인이나 별도 저장/도구 청구가 있으면 제공사가 확인한 사용량·단가로 원장에 반영하며 Gemini의 cache 단가를 Qwen에 적용하지 않는다.</a:t>
+            </a:r>
+          </a:p>
+          <a:p xmlns:a="http://schemas.openxmlformats.org/drawingml/2006/main">
+            <a:r>
+              <a:t/>
+            </a:r>
+          </a:p>
+          <a:p xmlns:a="http://schemas.openxmlformats.org/drawingml/2006/main">
+            <a:r>
+              <a:t/>
+            </a:r>
+          </a:p>
+          <a:p xmlns:a="http://schemas.openxmlformats.org/drawingml/2006/main">
+            <a:r>
+              <a:t>### 8.4.1 선택한 모델 역할과 입력 범위</a:t>
+            </a:r>
+          </a:p>
+          <a:p xmlns:a="http://schemas.openxmlformats.org/drawingml/2006/main">
+            <a:r>
+              <a:t/>
+            </a:r>
+          </a:p>
+          <a:p xmlns:a="http://schemas.openxmlformats.org/drawingml/2006/main">
+            <a:r>
+              <a:t>사용자는 **Qwen3-30B-A3B 계열 + GPT Realtime**을 이번 PoC의 모델 reference로 지정했다. 비용/API revision은 앞서 가격을 확인한 **Qwen3-30B-A3B-Instruct-2507**로 고정한다. 원본 `qwen3-30b-a3b`나 Thinking-2507/VL 모델과 혼용하지 않는다. 의미 해석·bounded read 판단·41B의 frame 생성에는 Qwen을, 실시간 음성 입출력/대화 지속에는 GPT Realtime을 사용한다. 외부 업무를 VIA에 맡긴 뒤에도 pending 함수 호출 중 대화를 계속한다. VIA가 외부 Agent의 실행/현재 Task/승인/질문/결과 연결의 권위를 유지하며 GPT Realtime의 tool pending을 실제 업무 완료로 해석하지 않는다. 양안은 같은 역할별 모델/설정/입출력 계약을 사용한다.</a:t>
+            </a:r>
+          </a:p>
+          <a:p xmlns:a="http://schemas.openxmlformats.org/drawingml/2006/main">
+            <a:r>
+              <a:t/>
+            </a:r>
+          </a:p>
+          <a:p xmlns:a="http://schemas.openxmlformats.org/drawingml/2006/main">
+            <a:r>
+              <a:t>Qwen은 Text-to-Text 모델이다. P21의 S2-01 등은 이미 원천 observation으로 표 내용/version·관측시각·포인터 이력을 제공하므로, 그 **원천 사실과 span을 공통 text 입력으로 직렬화**한다. 최종 A/B 지칭, Task 연결, revision 선택, 의존 관계 또는 채점 정답을 adapter가 미리 채우지 않는다. 조회하지 않은 원천 내용·권한 없는 내용도 자동으로 넣지 않는다. 소스 원문/구조 정보는 그대로 공급하고, 의미 결합은 각 방안이 생산한다. 원본 화면 frame은 시간/보관/메모리 원장에 유지한다. 이는 픽셀만으로 임의 앱 화면을 인식하는 완성 제품 평가가 아니라 정의된 PoC 원천 자료를 사용하는 범위다. 추가 vision/OCR 모델을 현재 예산에 숨겨 넣지 않는다. 실제 픽셀 인식이 필요해지면 공통 관측 adapter의 추가 모델·비용·지연·권한·손실을 동일하게 명시하고 계약을 개정한다.</a:t>
+            </a:r>
+          </a:p>
+          <a:p xmlns:a="http://schemas.openxmlformats.org/drawingml/2006/main">
+            <a:r>
+              <a:t/>
+            </a:r>
+          </a:p>
+          <a:p xmlns:a="http://schemas.openxmlformats.org/drawingml/2006/main">
+            <a:r>
+              <a:t>Qwen frame/tool 출력은 구문·허용 schema·ID/revision·현재성 검사를 거친다. 모델 이름만으로 JSON/함수 호출이 항상 맞거나 provider가 엄격한 schema decoding을 보장한다고 가정하지 않는다. 잘못된 출력의 재시도와 판단 유보는 같은 사례/실패/청구 원장에 포함한다. GPT Realtime의 structured output 미지원 때문에 음성 모델을 41B의 의미 frame 생산자로 대신 쓰지 않는다. 비용/기능 reference의 지정은 제품 모델 채택, Architecture 대안 선택이나 정확성 측정의 완료가 아니다.</a:t>
+            </a:r>
+          </a:p>
+          <a:p xmlns:a="http://schemas.openxmlformats.org/drawingml/2006/main">
+            <a:r>
+              <a:t/>
+            </a:r>
+          </a:p>
+          <a:p xmlns:a="http://schemas.openxmlformats.org/drawingml/2006/main">
+            <a:r>
+              <a:t>### 8.4.1.1 이전 Gemini 선택 이유와 변경 이력</a:t>
+            </a:r>
+          </a:p>
+          <a:p xmlns:a="http://schemas.openxmlformats.org/drawingml/2006/main">
+            <a:r>
+              <a:t/>
+            </a:r>
+          </a:p>
+          <a:p xmlns:a="http://schemas.openxmlformats.org/drawingml/2006/main">
+            <a:r>
+              <a:t>Gemini 3 Flash Preview의 공개 출시일은 **2025-12-17**이다([Google 출시 공지](https://blog.google/products-and-platforms/products/gemini/gemini-3-flash/)). 이전 선택은 공식 단가와 이미지 입력·함수 호출·structured output을 가진 reference의 편의에 따른 것이며 VIA 우월성이나 Qwen 30B와의 동등성 검증이 아니었다. 이후 정확한 Qwen API 단가를 확인했고 사용자가 Qwen/GPT 조합을 지정했으므로 **Gemini는 현행 의미/비용/속도 기준에서 제외**한다. 같은 124k/12.4k token 예산의 이전 Gemini 의미 비용 $0.09920과 현재 Qwen $0.03472의 차이 $0.06448는 단가 민감도이며 실제 호출/정확성/출력 동등성의 증거가 아니다. 기존 200 token/s와 Gemini cache 요금은 [변경 전 보존본](../../../archive/qa-semantic-reference-before-qwen-20261011/README.md)에 남겼다.</a:t>
+            </a:r>
+          </a:p>
+          <a:p xmlns:a="http://schemas.openxmlformats.org/drawingml/2006/main">
+            <a:r>
+              <a:t/>
+            </a:r>
+          </a:p>
+          <a:p xmlns:a="http://schemas.openxmlformats.org/drawingml/2006/main">
+            <a:r>
+              <a:t>### 8.4.1.2 Groq 밖의 속도 근거와 산식</a:t>
+            </a:r>
+          </a:p>
+          <a:p xmlns:a="http://schemas.openxmlformats.org/drawingml/2006/main">
+            <a:r>
+              <a:t/>
+            </a:r>
+          </a:p>
+          <a:p xmlns:a="http://schemas.openxmlformats.org/drawingml/2006/main">
+            <a:r>
+              <a:t>[Qwen 공식 속도 benchmark](https://qwen.readthedocs.io/en/latest/getting_started/speed_benchmark.html)는 **Qwen3-30B-A3B**를 NVIDIA **H20 96GB 1장**, SGLang **0.4.6.post1**, PyTorch **2.6.0+cu124**, batch **1**, 출력 **2,048 token**으로 평가했다. 입력1 token에서 BF16 **137.18**, FP8 **155.55 token/s**다. 입력6,144 token에서는 BF16 **490.10**, FP8 **551.34**다. 단, 공식 분자는 **입력+출력 token**, 분모는 전체 처리시간이다. 입력6,144의 490.10을 출력 생성률로 쓰지 않는다.</a:t>
+            </a:r>
+          </a:p>
+          <a:p xmlns:a="http://schemas.openxmlformats.org/drawingml/2006/main">
+            <a:r>
+              <a:t/>
+            </a:r>
+          </a:p>
+          <a:p xmlns:a="http://schemas.openxmlformats.org/drawingml/2006/main">
+            <a:r>
+              <a:t>BF16 입력1 조건의 전체 시간은 `2,049/137.18 ≈ 14.94초`, 입력6,144 조건은 `8,192/490.10 ≈ 16.72초`로 복원할 수 있다. 출력/전체시간으로 다시 표현하면 각각 **137.11**과 **122.53 output token/s**이며 이는 prefill까지 포함한 해당 길이의 유효 출력률이다. 이것을 TTFT와 분리된 decode rate로 두고 TTFT를 다시 더하면 입력 처리 시간이 이중 계상된다. 원본 Qwen3 benchmark를 Instruct-2507의 실측 또는 Alibaba Singapore API의 속도로 주장하지 않는다. 서버 측 H20 reference이므로 Windows 노트북의 속도/메모리에도 이전하지 않는다.</a:t>
+            </a:r>
+          </a:p>
+          <a:p xmlns:a="http://schemas.openxmlformats.org/drawingml/2006/main">
+            <a:r>
+              <a:t/>
+            </a:r>
+          </a:p>
+          <a:p xmlns:a="http://schemas.openxmlformats.org/drawingml/2006/main">
+            <a:r>
+              <a:t>따라서 공식 수치 기반의 계산은 **공개된 동일 길이/환경의 전체 처리시간**을 쓰거나, 별도로 검증된 decode rate와 TTFT를 분리해야 한다. 현재는 원본 계열 BF16 유효 출력률 약122.53~137.11과 FP8 입력1 약155.47을 수치 규모의 참고로 삼아 **130 token/s의 독립적인 PoC decode 가정**과 **100/130/160 민감도**를 정했다. 기준 TTFT0.30초, 빠른0.15초, 느린0.80초와 음성 시작0.10/0.25/0.60초도 별도 작성자 가정이다. 이들을 공개표에서 분리 측정한 TTFT/decode로 주장하지 않는다. 특히 2,048 출력의 유효 출력률을 2,000입력/200출력에 보장된 rate로 이전하지 않는다. API 배포의 TTFT/생성률이 있으면 두 가정을 실제 측정으로 함께 교체하고, 공개 benchmark 자체를 재현 계산할 때는 전체시간만 써서 prefill을 중복 계상하지 않는다. API 가격 reference와 별도 H20 속도 reference를 함께 사용하는 경우 비용/속도가 같은 서비스에서 측정됐다는 주장도 하지 않는다.</a:t>
+            </a:r>
+          </a:p>
+          <a:p xmlns:a="http://schemas.openxmlformats.org/drawingml/2006/main">
+            <a:r>
+              <a:t/>
+            </a:r>
+          </a:p>
+          <a:p xmlns:a="http://schemas.openxmlformats.org/drawingml/2006/main">
+            <a:r>
+              <a:t>기존의 **450+ token/s**는 [Groq의 `qwen/qwen3.8-27b` 모델 페이지](https://console.groq.com/docs/model/qwen/qwen3.8-27b)의 제공사 표시값이다. [GroqCloud는 전용 LPU 추론 인프라](https://groq.com/blog/the-groq-lpu-explained)를 사용한다. 이는 Qwen3-30B-A3B-Instruct-2507, NVIDIA GPU 또는 Windows PC의 숫자가 아니다. 해당 450 수치의 LPU 수/세대, precision, prompt/output 길이, 동시 요청 수와 상세 계측 경계는 페이지에 공개되어 있지 않으므로 가정으로 채우지 않는다. Groq은 현행 비용/속도 reference에서 제외하며 이 문단은 이전 근거의 의미를 설명하기 위한 provenance다.</a:t>
+            </a:r>
+          </a:p>
+          <a:p xmlns:a="http://schemas.openxmlformats.org/drawingml/2006/main">
+            <a:r>
+              <a:t/>
+            </a:r>
+          </a:p>
+          <a:p xmlns:a="http://schemas.openxmlformats.org/drawingml/2006/main">
+            <a:r>
+              <a:t>### 8.4.2 Gemini Live와 GPT Realtime의 기능 비교</a:t>
+            </a:r>
+          </a:p>
+          <a:p xmlns:a="http://schemas.openxmlformats.org/drawingml/2006/main">
+            <a:r>
+              <a:t/>
+            </a:r>
+          </a:p>
+          <a:p xmlns:a="http://schemas.openxmlformats.org/drawingml/2006/main">
+            <a:r>
+              <a:t>2026-10-11 확인한 공식 문서 기준으로 같은 실시간 음성 대화 역할을 제공하지만 API/실행 제약은 다르다. 아래 GPT는 사용자가 지칭한 `gpt-realtime` 모델 기준이며 다른 GPT Realtime 모델의 제한으로 확대하지 않는다. 현재 공식 모델 페이지는 해당 모델을 Deprecated로 표시하므로 실제 제품 적용 권고가 아니라 요청한 기능 비교 기준으로만 쓴다.</a:t>
+            </a:r>
+          </a:p>
+          <a:p xmlns:a="http://schemas.openxmlformats.org/drawingml/2006/main">
+            <a:r>
+              <a:t/>
+            </a:r>
+          </a:p>
+          <a:p xmlns:a="http://schemas.openxmlformats.org/drawingml/2006/main">
+            <a:r>
+              <a:t>| 비교 항목 | Gemini 3.1 Flash Live Preview | OpenAI gpt-realtime | VIA에 주는 의미 |</a:t>
+            </a:r>
+          </a:p>
+          <a:p xmlns:a="http://schemas.openxmlformats.org/drawingml/2006/main">
+            <a:r>
+              <a:t>| --- | --- | --- | --- |</a:t>
+            </a:r>
+          </a:p>
+          <a:p xmlns:a="http://schemas.openxmlformats.org/drawingml/2006/main">
+            <a:r>
+              <a:t>| 실시간 음성 입출력, 입력/출력 전사, 발화 중 끼어들기 | 지원 | 지원 | 양쪽 모두 음성 역할의 reference가 될 수 있다. 실제 한국어 품질·지연·중단 시간 동등성은 입증하지 않음 |</a:t>
+            </a:r>
+          </a:p>
+          <a:p xmlns:a="http://schemas.openxmlformats.org/drawingml/2006/main">
+            <a:r>
+              <a:t>| 화면/멀티모달 입력 | Text·이미지·audio·video 입력 | Text·이미지·audio 입력, video 미지원 | GPT에서는 화면 snapshot의 이미지 입력과 video stream 지원을 구별 |</a:t>
+            </a:r>
+          </a:p>
+          <a:p xmlns:a="http://schemas.openxmlformats.org/drawingml/2006/main">
+            <a:r>
+              <a:t>| 함수 호출 | 동기만 지원, tool response 전 응답 대기 | 비동기 tool 흐름 지원 | 긴 Agent 실행을 Gemini Live tool response로 끝날 때까지 기다리게 하지 않음 |</a:t>
+            </a:r>
+          </a:p>
+          <a:p xmlns:a="http://schemas.openxmlformats.org/drawingml/2006/main">
+            <a:r>
+              <a:t>| 직접 연결 | Live API WebSocket | WebRTC / WebSocket / SIP | provider adapter·세션 재연결·audio queue/취소 이벤트를 별도로 구현/계산 |</a:t>
+            </a:r>
+          </a:p>
+          <a:p xmlns:a="http://schemas.openxmlformats.org/drawingml/2006/main">
+            <a:r>
+              <a:t>| structured output | 미지원 | 미지원 | 함수 인자 JSON과 schema 제약 출력 보장을 구별, 의미 모델의 frame 검증은 별도 |</a:t>
+            </a:r>
+          </a:p>
+          <a:p xmlns:a="http://schemas.openxmlformats.org/drawingml/2006/main">
+            <a:r>
+              <a:t/>
+            </a:r>
+          </a:p>
+          <a:p xmlns:a="http://schemas.openxmlformats.org/drawingml/2006/main">
+            <a:r>
+              <a:t>근거: [Gemini Live 모델/제약](https://ai.google.dev/gemini-api/docs/models/gemini-3.1-flash-live-preview), [Live 도구의 동기 제한](https://ai.google.dev/gemini-api/docs/live-api/tools), [Live API 연결](https://ai.google.dev/gemini-api/docs/live-api), [Live VAD/중단](https://ai.google.dev/gemini-api/docs/live-api/capabilities), [OpenAI gpt-realtime](https://developers.openai.com/api/docs/models/gpt-realtime), [Realtime 대화/중단](https://developers.openai.com/api/docs/guides/realtime-conversations), [Realtime 도구](https://developers.openai.com/api/docs/guides/realtime-mcp), [GPT Realtime 비동기 함수 호출 설명](https://developers.openai.com/blog/realtime-api).</a:t>
+            </a:r>
+          </a:p>
+          <a:p xmlns:a="http://schemas.openxmlformats.org/drawingml/2006/main">
+            <a:r>
+              <a:t/>
+            </a:r>
+          </a:p>
+          <a:p xmlns:a="http://schemas.openxmlformats.org/drawingml/2006/main">
+            <a:r>
+              <a:t>VIA는 요청/Task의 권위를 갖고 음성 모델의 임시 session과 구별한다. 긴 업무는 로컬 VIA가 외부 Agent에 비동기로 위임하고, 음성 모델에는 유효한 접수·질문·결과를 제시할 입력을 따로 전달하는 방향으로 reference를 해석한다. 이것은 긴 Agent 결과를 Live 동기 함수 응답으로 기다리는 것과 다르다. 실제 provider의 forced response, cancel, 재연결, 출력 내용 준수와 local playback stop은 adapter/API 검증에서 확인해야 한다. 현재 GPT Realtime reference에서도 local playback stop·새 사용자 요청·동시에 도착한 Agent 질문/결과의 우선순위는 VIA가 관리하고, pending tool의 결과가 없는 동안 완료를 추측해 말하지 못하도록 실제 상태를 전달한다. 이전 Gemini 3.1 검토의 proactive audio/affective dialogue 미지원과 `turn_complete=true`의 활성 generation 중단은 기능 비교의 제한으로 보존한다. 모델 이름만으로 연속 입력/여러 Task 처리 계약이 충족됐다고 하지 않는다.</a:t>
             </a:r>
           </a:p>
           <a:p xmlns:a="http://schemas.openxmlformats.org/drawingml/2006/main">
@@ -6777,7 +7062,7 @@
           </a:p>
           <a:p xmlns:a="http://schemas.openxmlformats.org/drawingml/2006/main">
             <a:r>
-              <a:t>원본 SHA-256: d25a503005403e71d5811d61f20d9c227479bfeb04808ba868ce06adc463e4f8</a:t>
+              <a:t>원본 SHA-256: 8520fa1bd1661f72bb87071ab03755964b0539565490994de845bbc086654cfd</a:t>
             </a:r>
           </a:p>
           <a:p xmlns:a="http://schemas.openxmlformats.org/drawingml/2006/main">
@@ -6812,7 +7097,7 @@
           </a:p>
           <a:p xmlns:a="http://schemas.openxmlformats.org/drawingml/2006/main">
             <a:r>
-              <a:t>목표 근거: 동일 21사례의 의미 62호출/음성 입력 50초/출력 179초 예산에서 신규 audio·Text 포함 기본 $0.416320, 이력 audio/추가생산/재시도 여유 $0.083680. 호출·출력은 작성자 가정이며 실제 사용량으로 대체 (§5)</a:t>
+              <a:t>목표 근거: 동일 21사례의 의미 62호출/음성 입력 50초/출력 179초 예산에서 신규 audio·Text 포함 기본 $0.351840, 이력 audio/추가생산/재시도 여유 $0.148160. 호출·출력은 작성자 가정이며 실제 사용량으로 대체 (§5)</a:t>
             </a:r>
           </a:p>
           <a:p xmlns:a="http://schemas.openxmlformats.org/drawingml/2006/main">
@@ -6827,7 +7112,7 @@
           </a:p>
           <a:p xmlns:a="http://schemas.openxmlformats.org/drawingml/2006/main">
             <a:r>
-              <a:t>Google Gemini 3 Flash 공식 단가: https://ai.google.dev/gemini-api/docs/pricing#gemini-3-flash-preview</a:t>
+              <a:t>Alibaba Qwen Instruct-2507 공식 단가: https://docs.modelstudio.console.alibabacloud.com/en/model-studio/qwen3-30b-a3b-instruct-2507</a:t>
             </a:r>
           </a:p>
           <a:p xmlns:a="http://schemas.openxmlformats.org/drawingml/2006/main">
@@ -6937,7 +7222,7 @@
           </a:p>
           <a:p xmlns:a="http://schemas.openxmlformats.org/drawingml/2006/main">
             <a:r>
-              <a:t>| 의미62호출, 입력124,000/출력12,400 token | 0.099200 |</a:t>
+              <a:t>| 의미62호출, 입력124,000/출력12,400 token | 0.034720 |</a:t>
             </a:r>
           </a:p>
           <a:p xmlns:a="http://schemas.openxmlformats.org/drawingml/2006/main">
@@ -6952,12 +7237,12 @@
           </a:p>
           <a:p xmlns:a="http://schemas.openxmlformats.org/drawingml/2006/main">
             <a:r>
-              <a:t>| 신규 audio·청구 Text를 포함한 기본 소계 | **0.416320** |</a:t>
-            </a:r>
-          </a:p>
-          <a:p xmlns:a="http://schemas.openxmlformats.org/drawingml/2006/main">
-            <a:r>
-              <a:t>| 이력 audio 재입력/추가생산/재시도 여유 | **0.083680** |</a:t>
+              <a:t>| 신규 audio·청구 Text를 포함한 기본 소계 | **0.351840** |</a:t>
+            </a:r>
+          </a:p>
+          <a:p xmlns:a="http://schemas.openxmlformats.org/drawingml/2006/main">
+            <a:r>
+              <a:t>| 이력 audio 재입력/추가생산/재시도 여유 | **0.148160** |</a:t>
             </a:r>
           </a:p>
           <a:p xmlns:a="http://schemas.openxmlformats.org/drawingml/2006/main">
@@ -6972,7 +7257,7 @@
           </a:p>
           <a:p xmlns:a="http://schemas.openxmlformats.org/drawingml/2006/main">
             <a:r>
-              <a:t>음성 기준을 GPT Realtime으로 바꾼 동일 P21에서 다시 계산했다. 기본 소계 대비 약 20.10%의 여유를 둔 $0.50/P21 작성자 평가 예산이며 상품 가격이나 모델 성능 보장이 아니다. 앞의 50/179초는 신규 audio 길이만이므로 이력 audio 재입력의 청구를 포함한 실제 총액이라고 주장하지 않는다. Text 10k/2k는 호출별 누적 청구량의 예산이다. 추가 audio 이력·초기/배경 생산·재시도는 여유에서 부담하며 실제 response usage로 모두 합산한다. 여유 전부를 할인 없는 audio 이력 입력에 쓰면 2,615 token($0.083680)이고 다른 추가 비용이 있으면 그만큼 줄어든다. 캐시 할인/음성 이력의 transcript 대체는 실제 확인된 사용량에만 적용한다. 목표를 맞추기 위해 대화를 매 사례 초기화하거나 VIA의 Task/근거 이력을 없애지 않는다. Source 변경 4건이 모델 생산 4호출을 강제하지 않는다. 실제 backfill·추가 질문·재시도가 많으면 목표 미달을 그대로 보고한다.</a:t>
+              <a:t>의미 기준을 Qwen Instruct-2507, 음성 기준을 GPT Realtime으로 정한 동일 P21에서 다시 계산했다. $0.50 목표는 유지하고 의미 단가 감소분을 추가 처리 여유에 반영한다. 기본 소계 대비 약 42.11%의 여유를 둔 $0.50/P21 작성자 평가 예산이며 상품 가격이나 모델 성능 보장이 아니다. 앞의 50/179초는 신규 audio 길이만이므로 이력 audio 재입력의 청구를 포함한 실제 총액이라고 주장하지 않는다. Text 10k/2k는 호출별 누적 청구량의 예산이다. 추가 audio 이력·초기/배경 생산·재시도는 여유에서 부담하며 실제 response usage로 모두 합산한다. 여유 전부를 할인 없는 audio 이력 입력에 쓰면 4,630 token($0.148160)이고 다른 추가 비용이 있으면 그만큼 줄어든다. 캐시 할인/음성 이력의 transcript 대체는 실제 확인된 사용량에만 적용한다. 목표를 맞추기 위해 대화를 매 사례 초기화하거나 VIA의 Task/근거 이력을 없애지 않는다. Source 변경 4건이 모델 생산 4호출을 강제하지 않는다. 실제 backfill·추가 질문·재시도가 많으면 목표 미달을 그대로 보고한다.</a:t>
             </a:r>
           </a:p>
           <a:p xmlns:a="http://schemas.openxmlformats.org/drawingml/2006/main">
@@ -10893,6 +11178,291 @@
           <a:p xmlns:a="http://schemas.openxmlformats.org/drawingml/2006/main">
             <a:r>
               <a:t>묶음당 21개 시나리오는 사용자 19개 + Agent 단독 2개다. 집중 장면 안에는 Agent 사건 4개가 추가로 들어 있다. Voice 입력 50초와 출력 예산 179초, 반응 27개와 사용자 cycle 19개를 정의했다. 다섯 묶음 전체는 105개 시나리오·630조건·135반응·95cycle이다. 사용자의 하루 빈도를 뜻하지 않는다.</a:t>
+            </a:r>
+          </a:p>
+          <a:p xmlns:a="http://schemas.openxmlformats.org/drawingml/2006/main">
+            <a:r>
+              <a:t/>
+            </a:r>
+          </a:p>
+          <a:p xmlns:a="http://schemas.openxmlformats.org/drawingml/2006/main">
+            <a:r>
+              <a:t/>
+            </a:r>
+          </a:p>
+          <a:p xmlns:a="http://schemas.openxmlformats.org/drawingml/2006/main">
+            <a:r>
+              <a:t>모델 reference 상세 §8.4</a:t>
+            </a:r>
+          </a:p>
+          <a:p xmlns:a="http://schemas.openxmlformats.org/drawingml/2006/main">
+            <a:r>
+              <a:t> 장치와 모델 계산 reference — 2026-10-11 확인</a:t>
+            </a:r>
+          </a:p>
+          <a:p xmlns:a="http://schemas.openxmlformats.org/drawingml/2006/main">
+            <a:r>
+              <a:t/>
+            </a:r>
+          </a:p>
+          <a:p xmlns:a="http://schemas.openxmlformats.org/drawingml/2006/main">
+            <a:r>
+              <a:t>이 reference는 현재 개발 중인 모델/클라우드 서비스의 실제 가격이나 성능을 뜻하지 않는다. 같은 A/B 계산에 쓸 외부 공개 기준이다. 값은 USD, 모델 단가는 1,000,000 token당 표준 유료 요금이며 free tier/할인으로 0원을 만들지 않는다.</a:t>
+            </a:r>
+          </a:p>
+          <a:p xmlns:a="http://schemas.openxmlformats.org/drawingml/2006/main">
+            <a:r>
+              <a:t/>
+            </a:r>
+          </a:p>
+          <a:p xmlns:a="http://schemas.openxmlformats.org/drawingml/2006/main">
+            <a:r>
+              <a:t>| 용도 | 선택 reference / 값 | 출처와 적용 범위 |</a:t>
+            </a:r>
+          </a:p>
+          <a:p xmlns:a="http://schemas.openxmlformats.org/drawingml/2006/main">
+            <a:r>
+              <a:t>| --- | --- | --- |</a:t>
+            </a:r>
+          </a:p>
+          <a:p xmlns:a="http://schemas.openxmlformats.org/drawingml/2006/main">
+            <a:r>
+              <a:t>| Windows PC | **Galaxy Book6 Ultra NP960UJH-XG3IN**, Windows 11 Home, Core Ultra 7 356H, RAM 32GB LPDDR5X, RTX 5070 Laptop GPU 8GB, SSD 1TB | [삼성 공식 SKU 사양](https://www.samsung.com/in/computers/galaxy-book/galaxy-book6-ultra-ultra-7-32gb-1tb-np960ujh-xg3in/). RAM과 VRAM을 같은 자원으로 합치지 않음. 모델은 클라우드이므로 GPU 가중치 적재를 로컬 비용에 가산하지 않음 |</a:t>
+            </a:r>
+          </a:p>
+          <a:p xmlns:a="http://schemas.openxmlformats.org/drawingml/2006/main">
+            <a:r>
+              <a:t>| 의미 LLM의 비용 | **Qwen3-30B-A3B-Instruct-2507**, `qwen3-30b-a3b-instruct-2507`: Alibaba Cloud Model Studio **Singapore / International** 입력 **$0.20**, 출력 **$0.80** / 1M token, non-thinking | [공식 API 모델/단가](https://docs.modelstudio.console.alibabacloud.com/en/model-studio/qwen3-30b-a3b-instruct-2507), [Qwen 공식 모델 카드](https://huggingface.co/Qwen/Qwen3-30B-A3B-Instruct-2507). 약30B 전체/3B 활성 MoE, Text-to-Text. 사용자 승인한 PoC 의미 모델 기준이며 최종 제품 모델/DP 승자 선정은 아님. 같은 provider/region/revision/mode를 양안에 적용 |</a:t>
+            </a:r>
+          </a:p>
+          <a:p xmlns:a="http://schemas.openxmlformats.org/drawingml/2006/main">
+            <a:r>
+              <a:t>| 의미 LLM의 생성 속도 | **작성자 decode 가정 130 token/s**, 민감도 **100 / 130 / 160 token/s**, 기준 TTFT **0.30초** | [Qwen 공식 H20 benchmark](https://qwen.readthedocs.io/en/latest/getting_started/speed_benchmark.html)의 원본 계열 유효 출력률 약122.53~137.11(BF16) 등을 참고한 수치 규모의 가정. Instruct-2507 API의 공개 decode rate/보장/실측이 아니며 공개표에서 TTFT와 decode를 분리 추출한 값도 아님. 가격은 Alibaba API, 속도 근거는 별도 H20 환경임을 §8.4.1.2에 명시 |</a:t>
+            </a:r>
+          </a:p>
+          <a:p xmlns:a="http://schemas.openxmlformats.org/drawingml/2006/main">
+            <a:r>
+              <a:t>| 음성 비용/비동기 대화 기준 | **OpenAI GPT Realtime**, `gpt-realtime` (`gpt-realtime-2025-08-28`): audio 입력 **$32**, 출력 **$64** / 1M token. Text 입력 **$4**, 출력 **$16** / 1M token. cached audio/Text 입력 **$0.40** / 1M token | [공식 모델/단가](https://developers.openai.com/api/docs/models/gpt-realtime), [Realtime 청구](https://developers.openai.com/api/docs/guides/voice-latency-cost), [비동기 함수 호출](https://developers.openai.com/blog/realtime-api). 사용자 입력 약10 audio token/s, assistant 생성 약20 audio token/s로 신규 audio는 **$0.0192/분 입력, $0.0768/분 출력**으로 환산. 특수 token·이력 재입력·Text·폐기 생성은 별도. 공식 페이지의 Deprecated 상태와 관계없이 사용자가 지정한 날짜별 PoC 비용/기능 reference를 고정하며 실서비스의 신규 채택을 뜻하지 않음 |</a:t>
+            </a:r>
+          </a:p>
+          <a:p xmlns:a="http://schemas.openxmlformats.org/drawingml/2006/main">
+            <a:r>
+              <a:t>| 시간 목표의 사용자 근거 | 즉각 제어 **0.1초**, 대화 흐름 **1초**, 주의 유지 **10초**의 상호작용 참조 | [Nielsen Norman Group 원문](https://www.nngroup.com/articles/website-response-times/). VIA의 평균/모집단/추가 지연 예산은 작성자가 선택하며 문헌이 VIA의 평균 목표를 직접 규정했다고 하지 않음 |</a:t>
+            </a:r>
+          </a:p>
+          <a:p xmlns:a="http://schemas.openxmlformats.org/drawingml/2006/main">
+            <a:r>
+              <a:t/>
+            </a:r>
+          </a:p>
+          <a:p xmlns:a="http://schemas.openxmlformats.org/drawingml/2006/main">
+            <a:r>
+              <a:t>음성 비용은 실제로 보내거나 청구되는 audio/context의 양을 사용한다. VAD가 앞단에 있다는 사실만으로 silence/context 재사용 청구가 0이라고 가정하지 않는다. Text prompt/context, 재시도, 취소 불가인 폐기 출력과 미사용 배경 생산도 포함한다. 같은 사용량을 token 요금과 분 요금으로 이중 계산하지 않는다. 모델 제공자가 사용량을 반환한 실측은 그 사용량을 우선하고, 공개 reference 계산은 음성 길이 기반의 근사임을 남긴다.</a:t>
+            </a:r>
+          </a:p>
+          <a:p xmlns:a="http://schemas.openxmlformats.org/drawingml/2006/main">
+            <a:r>
+              <a:t/>
+            </a:r>
+          </a:p>
+          <a:p xmlns:a="http://schemas.openxmlformats.org/drawingml/2006/main">
+            <a:r>
+              <a:t>검산 예시: 의미 호출의 입력 2,000 token/청구 출력 200 token은 `2,000×0.20/1M + 200×0.80/1M = $0.00056`, 작성자 decode 가정의 생성 부분은 `200/130 ≈ 1.538초`다. Instruct-2507은 non-thinking이며 출력200은 실제 답변/frame/tool 출력의 청구 예산이다. 원천/의미/도구 오류의 추가 질문·재시도·폐기 출력을 모두 포함하고 provider별 tokenizer의 실제 사용량을 우선한다. GPT Realtime 신규 audio 입력 1분/출력 1분은 `600×32/1M + 1,200×64/1M = $0.096`이며 Text와 이력 audio 재입력 청구는 별도다. 응답마다 이전 대화가 입력으로 재사용되므로 실제 `response.done`의 modality별 input/output/cached token을 호출 ID로 중복 제거해 합산한다. 초기 2,000turn을 음성 session에 전부 보내도록 강제하지 않으며 실제 보낸 이력·요약·instruction은 청구한다. 별도 input transcription을 켜면 해당 모델 청구도 더한다. 생성 부분 약1.538초를 첫 출력/입력 처리/통신/queue가 포함된 호출 완료 시간으로 쓰지 않는다. Qwen의 기본 예산에는 할인 없는 입력/출력 단가를 사용한다. 실제 cache 할인이나 별도 저장/도구 청구가 있으면 제공사가 확인한 사용량·단가로 원장에 반영하며 Gemini의 cache 단가를 Qwen에 적용하지 않는다.</a:t>
+            </a:r>
+          </a:p>
+          <a:p xmlns:a="http://schemas.openxmlformats.org/drawingml/2006/main">
+            <a:r>
+              <a:t/>
+            </a:r>
+          </a:p>
+          <a:p xmlns:a="http://schemas.openxmlformats.org/drawingml/2006/main">
+            <a:r>
+              <a:t/>
+            </a:r>
+          </a:p>
+          <a:p xmlns:a="http://schemas.openxmlformats.org/drawingml/2006/main">
+            <a:r>
+              <a:t>### 8.4.1 선택한 모델 역할과 입력 범위</a:t>
+            </a:r>
+          </a:p>
+          <a:p xmlns:a="http://schemas.openxmlformats.org/drawingml/2006/main">
+            <a:r>
+              <a:t/>
+            </a:r>
+          </a:p>
+          <a:p xmlns:a="http://schemas.openxmlformats.org/drawingml/2006/main">
+            <a:r>
+              <a:t>사용자는 **Qwen3-30B-A3B 계열 + GPT Realtime**을 이번 PoC의 모델 reference로 지정했다. 비용/API revision은 앞서 가격을 확인한 **Qwen3-30B-A3B-Instruct-2507**로 고정한다. 원본 `qwen3-30b-a3b`나 Thinking-2507/VL 모델과 혼용하지 않는다. 의미 해석·bounded read 판단·41B의 frame 생성에는 Qwen을, 실시간 음성 입출력/대화 지속에는 GPT Realtime을 사용한다. 외부 업무를 VIA에 맡긴 뒤에도 pending 함수 호출 중 대화를 계속한다. VIA가 외부 Agent의 실행/현재 Task/승인/질문/결과 연결의 권위를 유지하며 GPT Realtime의 tool pending을 실제 업무 완료로 해석하지 않는다. 양안은 같은 역할별 모델/설정/입출력 계약을 사용한다.</a:t>
+            </a:r>
+          </a:p>
+          <a:p xmlns:a="http://schemas.openxmlformats.org/drawingml/2006/main">
+            <a:r>
+              <a:t/>
+            </a:r>
+          </a:p>
+          <a:p xmlns:a="http://schemas.openxmlformats.org/drawingml/2006/main">
+            <a:r>
+              <a:t>Qwen은 Text-to-Text 모델이다. P21의 S2-01 등은 이미 원천 observation으로 표 내용/version·관측시각·포인터 이력을 제공하므로, 그 **원천 사실과 span을 공통 text 입력으로 직렬화**한다. 최종 A/B 지칭, Task 연결, revision 선택, 의존 관계 또는 채점 정답을 adapter가 미리 채우지 않는다. 조회하지 않은 원천 내용·권한 없는 내용도 자동으로 넣지 않는다. 소스 원문/구조 정보는 그대로 공급하고, 의미 결합은 각 방안이 생산한다. 원본 화면 frame은 시간/보관/메모리 원장에 유지한다. 이는 픽셀만으로 임의 앱 화면을 인식하는 완성 제품 평가가 아니라 정의된 PoC 원천 자료를 사용하는 범위다. 추가 vision/OCR 모델을 현재 예산에 숨겨 넣지 않는다. 실제 픽셀 인식이 필요해지면 공통 관측 adapter의 추가 모델·비용·지연·권한·손실을 동일하게 명시하고 계약을 개정한다.</a:t>
+            </a:r>
+          </a:p>
+          <a:p xmlns:a="http://schemas.openxmlformats.org/drawingml/2006/main">
+            <a:r>
+              <a:t/>
+            </a:r>
+          </a:p>
+          <a:p xmlns:a="http://schemas.openxmlformats.org/drawingml/2006/main">
+            <a:r>
+              <a:t>Qwen frame/tool 출력은 구문·허용 schema·ID/revision·현재성 검사를 거친다. 모델 이름만으로 JSON/함수 호출이 항상 맞거나 provider가 엄격한 schema decoding을 보장한다고 가정하지 않는다. 잘못된 출력의 재시도와 판단 유보는 같은 사례/실패/청구 원장에 포함한다. GPT Realtime의 structured output 미지원 때문에 음성 모델을 41B의 의미 frame 생산자로 대신 쓰지 않는다. 비용/기능 reference의 지정은 제품 모델 채택, Architecture 대안 선택이나 정확성 측정의 완료가 아니다.</a:t>
+            </a:r>
+          </a:p>
+          <a:p xmlns:a="http://schemas.openxmlformats.org/drawingml/2006/main">
+            <a:r>
+              <a:t/>
+            </a:r>
+          </a:p>
+          <a:p xmlns:a="http://schemas.openxmlformats.org/drawingml/2006/main">
+            <a:r>
+              <a:t>### 8.4.1.1 이전 Gemini 선택 이유와 변경 이력</a:t>
+            </a:r>
+          </a:p>
+          <a:p xmlns:a="http://schemas.openxmlformats.org/drawingml/2006/main">
+            <a:r>
+              <a:t/>
+            </a:r>
+          </a:p>
+          <a:p xmlns:a="http://schemas.openxmlformats.org/drawingml/2006/main">
+            <a:r>
+              <a:t>Gemini 3 Flash Preview의 공개 출시일은 **2025-12-17**이다([Google 출시 공지](https://blog.google/products-and-platforms/products/gemini/gemini-3-flash/)). 이전 선택은 공식 단가와 이미지 입력·함수 호출·structured output을 가진 reference의 편의에 따른 것이며 VIA 우월성이나 Qwen 30B와의 동등성 검증이 아니었다. 이후 정확한 Qwen API 단가를 확인했고 사용자가 Qwen/GPT 조합을 지정했으므로 **Gemini는 현행 의미/비용/속도 기준에서 제외**한다. 같은 124k/12.4k token 예산의 이전 Gemini 의미 비용 $0.09920과 현재 Qwen $0.03472의 차이 $0.06448는 단가 민감도이며 실제 호출/정확성/출력 동등성의 증거가 아니다. 기존 200 token/s와 Gemini cache 요금은 [변경 전 보존본](../../../archive/qa-semantic-reference-before-qwen-20261011/README.md)에 남겼다.</a:t>
+            </a:r>
+          </a:p>
+          <a:p xmlns:a="http://schemas.openxmlformats.org/drawingml/2006/main">
+            <a:r>
+              <a:t/>
+            </a:r>
+          </a:p>
+          <a:p xmlns:a="http://schemas.openxmlformats.org/drawingml/2006/main">
+            <a:r>
+              <a:t>### 8.4.1.2 Groq 밖의 속도 근거와 산식</a:t>
+            </a:r>
+          </a:p>
+          <a:p xmlns:a="http://schemas.openxmlformats.org/drawingml/2006/main">
+            <a:r>
+              <a:t/>
+            </a:r>
+          </a:p>
+          <a:p xmlns:a="http://schemas.openxmlformats.org/drawingml/2006/main">
+            <a:r>
+              <a:t>[Qwen 공식 속도 benchmark](https://qwen.readthedocs.io/en/latest/getting_started/speed_benchmark.html)는 **Qwen3-30B-A3B**를 NVIDIA **H20 96GB 1장**, SGLang **0.4.6.post1**, PyTorch **2.6.0+cu124**, batch **1**, 출력 **2,048 token**으로 평가했다. 입력1 token에서 BF16 **137.18**, FP8 **155.55 token/s**다. 입력6,144 token에서는 BF16 **490.10**, FP8 **551.34**다. 단, 공식 분자는 **입력+출력 token**, 분모는 전체 처리시간이다. 입력6,144의 490.10을 출력 생성률로 쓰지 않는다.</a:t>
+            </a:r>
+          </a:p>
+          <a:p xmlns:a="http://schemas.openxmlformats.org/drawingml/2006/main">
+            <a:r>
+              <a:t/>
+            </a:r>
+          </a:p>
+          <a:p xmlns:a="http://schemas.openxmlformats.org/drawingml/2006/main">
+            <a:r>
+              <a:t>BF16 입력1 조건의 전체 시간은 `2,049/137.18 ≈ 14.94초`, 입력6,144 조건은 `8,192/490.10 ≈ 16.72초`로 복원할 수 있다. 출력/전체시간으로 다시 표현하면 각각 **137.11**과 **122.53 output token/s**이며 이는 prefill까지 포함한 해당 길이의 유효 출력률이다. 이것을 TTFT와 분리된 decode rate로 두고 TTFT를 다시 더하면 입력 처리 시간이 이중 계상된다. 원본 Qwen3 benchmark를 Instruct-2507의 실측 또는 Alibaba Singapore API의 속도로 주장하지 않는다. 서버 측 H20 reference이므로 Windows 노트북의 속도/메모리에도 이전하지 않는다.</a:t>
+            </a:r>
+          </a:p>
+          <a:p xmlns:a="http://schemas.openxmlformats.org/drawingml/2006/main">
+            <a:r>
+              <a:t/>
+            </a:r>
+          </a:p>
+          <a:p xmlns:a="http://schemas.openxmlformats.org/drawingml/2006/main">
+            <a:r>
+              <a:t>따라서 공식 수치 기반의 계산은 **공개된 동일 길이/환경의 전체 처리시간**을 쓰거나, 별도로 검증된 decode rate와 TTFT를 분리해야 한다. 현재는 원본 계열 BF16 유효 출력률 약122.53~137.11과 FP8 입력1 약155.47을 수치 규모의 참고로 삼아 **130 token/s의 독립적인 PoC decode 가정**과 **100/130/160 민감도**를 정했다. 기준 TTFT0.30초, 빠른0.15초, 느린0.80초와 음성 시작0.10/0.25/0.60초도 별도 작성자 가정이다. 이들을 공개표에서 분리 측정한 TTFT/decode로 주장하지 않는다. 특히 2,048 출력의 유효 출력률을 2,000입력/200출력에 보장된 rate로 이전하지 않는다. API 배포의 TTFT/생성률이 있으면 두 가정을 실제 측정으로 함께 교체하고, 공개 benchmark 자체를 재현 계산할 때는 전체시간만 써서 prefill을 중복 계상하지 않는다. API 가격 reference와 별도 H20 속도 reference를 함께 사용하는 경우 비용/속도가 같은 서비스에서 측정됐다는 주장도 하지 않는다.</a:t>
+            </a:r>
+          </a:p>
+          <a:p xmlns:a="http://schemas.openxmlformats.org/drawingml/2006/main">
+            <a:r>
+              <a:t/>
+            </a:r>
+          </a:p>
+          <a:p xmlns:a="http://schemas.openxmlformats.org/drawingml/2006/main">
+            <a:r>
+              <a:t>기존의 **450+ token/s**는 [Groq의 `qwen/qwen3.8-27b` 모델 페이지](https://console.groq.com/docs/model/qwen/qwen3.8-27b)의 제공사 표시값이다. [GroqCloud는 전용 LPU 추론 인프라](https://groq.com/blog/the-groq-lpu-explained)를 사용한다. 이는 Qwen3-30B-A3B-Instruct-2507, NVIDIA GPU 또는 Windows PC의 숫자가 아니다. 해당 450 수치의 LPU 수/세대, precision, prompt/output 길이, 동시 요청 수와 상세 계측 경계는 페이지에 공개되어 있지 않으므로 가정으로 채우지 않는다. Groq은 현행 비용/속도 reference에서 제외하며 이 문단은 이전 근거의 의미를 설명하기 위한 provenance다.</a:t>
+            </a:r>
+          </a:p>
+          <a:p xmlns:a="http://schemas.openxmlformats.org/drawingml/2006/main">
+            <a:r>
+              <a:t/>
+            </a:r>
+          </a:p>
+          <a:p xmlns:a="http://schemas.openxmlformats.org/drawingml/2006/main">
+            <a:r>
+              <a:t>### 8.4.2 Gemini Live와 GPT Realtime의 기능 비교</a:t>
+            </a:r>
+          </a:p>
+          <a:p xmlns:a="http://schemas.openxmlformats.org/drawingml/2006/main">
+            <a:r>
+              <a:t/>
+            </a:r>
+          </a:p>
+          <a:p xmlns:a="http://schemas.openxmlformats.org/drawingml/2006/main">
+            <a:r>
+              <a:t>2026-10-11 확인한 공식 문서 기준으로 같은 실시간 음성 대화 역할을 제공하지만 API/실행 제약은 다르다. 아래 GPT는 사용자가 지칭한 `gpt-realtime` 모델 기준이며 다른 GPT Realtime 모델의 제한으로 확대하지 않는다. 현재 공식 모델 페이지는 해당 모델을 Deprecated로 표시하므로 실제 제품 적용 권고가 아니라 요청한 기능 비교 기준으로만 쓴다.</a:t>
+            </a:r>
+          </a:p>
+          <a:p xmlns:a="http://schemas.openxmlformats.org/drawingml/2006/main">
+            <a:r>
+              <a:t/>
+            </a:r>
+          </a:p>
+          <a:p xmlns:a="http://schemas.openxmlformats.org/drawingml/2006/main">
+            <a:r>
+              <a:t>| 비교 항목 | Gemini 3.1 Flash Live Preview | OpenAI gpt-realtime | VIA에 주는 의미 |</a:t>
+            </a:r>
+          </a:p>
+          <a:p xmlns:a="http://schemas.openxmlformats.org/drawingml/2006/main">
+            <a:r>
+              <a:t>| --- | --- | --- | --- |</a:t>
+            </a:r>
+          </a:p>
+          <a:p xmlns:a="http://schemas.openxmlformats.org/drawingml/2006/main">
+            <a:r>
+              <a:t>| 실시간 음성 입출력, 입력/출력 전사, 발화 중 끼어들기 | 지원 | 지원 | 양쪽 모두 음성 역할의 reference가 될 수 있다. 실제 한국어 품질·지연·중단 시간 동등성은 입증하지 않음 |</a:t>
+            </a:r>
+          </a:p>
+          <a:p xmlns:a="http://schemas.openxmlformats.org/drawingml/2006/main">
+            <a:r>
+              <a:t>| 화면/멀티모달 입력 | Text·이미지·audio·video 입력 | Text·이미지·audio 입력, video 미지원 | GPT에서는 화면 snapshot의 이미지 입력과 video stream 지원을 구별 |</a:t>
+            </a:r>
+          </a:p>
+          <a:p xmlns:a="http://schemas.openxmlformats.org/drawingml/2006/main">
+            <a:r>
+              <a:t>| 함수 호출 | 동기만 지원, tool response 전 응답 대기 | 비동기 tool 흐름 지원 | 긴 Agent 실행을 Gemini Live tool response로 끝날 때까지 기다리게 하지 않음 |</a:t>
+            </a:r>
+          </a:p>
+          <a:p xmlns:a="http://schemas.openxmlformats.org/drawingml/2006/main">
+            <a:r>
+              <a:t>| 직접 연결 | Live API WebSocket | WebRTC / WebSocket / SIP | provider adapter·세션 재연결·audio queue/취소 이벤트를 별도로 구현/계산 |</a:t>
+            </a:r>
+          </a:p>
+          <a:p xmlns:a="http://schemas.openxmlformats.org/drawingml/2006/main">
+            <a:r>
+              <a:t>| structured output | 미지원 | 미지원 | 함수 인자 JSON과 schema 제약 출력 보장을 구별, 의미 모델의 frame 검증은 별도 |</a:t>
+            </a:r>
+          </a:p>
+          <a:p xmlns:a="http://schemas.openxmlformats.org/drawingml/2006/main">
+            <a:r>
+              <a:t/>
+            </a:r>
+          </a:p>
+          <a:p xmlns:a="http://schemas.openxmlformats.org/drawingml/2006/main">
+            <a:r>
+              <a:t>근거: [Gemini Live 모델/제약](https://ai.google.dev/gemini-api/docs/models/gemini-3.1-flash-live-preview), [Live 도구의 동기 제한](https://ai.google.dev/gemini-api/docs/live-api/tools), [Live API 연결](https://ai.google.dev/gemini-api/docs/live-api), [Live VAD/중단](https://ai.google.dev/gemini-api/docs/live-api/capabilities), [OpenAI gpt-realtime](https://developers.openai.com/api/docs/models/gpt-realtime), [Realtime 대화/중단](https://developers.openai.com/api/docs/guides/realtime-conversations), [Realtime 도구](https://developers.openai.com/api/docs/guides/realtime-mcp), [GPT Realtime 비동기 함수 호출 설명](https://developers.openai.com/blog/realtime-api).</a:t>
+            </a:r>
+          </a:p>
+          <a:p xmlns:a="http://schemas.openxmlformats.org/drawingml/2006/main">
+            <a:r>
+              <a:t/>
+            </a:r>
+          </a:p>
+          <a:p xmlns:a="http://schemas.openxmlformats.org/drawingml/2006/main">
+            <a:r>
+              <a:t>VIA는 요청/Task의 권위를 갖고 음성 모델의 임시 session과 구별한다. 긴 업무는 로컬 VIA가 외부 Agent에 비동기로 위임하고, 음성 모델에는 유효한 접수·질문·결과를 제시할 입력을 따로 전달하는 방향으로 reference를 해석한다. 이것은 긴 Agent 결과를 Live 동기 함수 응답으로 기다리는 것과 다르다. 실제 provider의 forced response, cancel, 재연결, 출력 내용 준수와 local playback stop은 adapter/API 검증에서 확인해야 한다. 현재 GPT Realtime reference에서도 local playback stop·새 사용자 요청·동시에 도착한 Agent 질문/결과의 우선순위는 VIA가 관리하고, pending tool의 결과가 없는 동안 완료를 추측해 말하지 못하도록 실제 상태를 전달한다. 이전 Gemini 3.1 검토의 proactive audio/affective dialogue 미지원과 `turn_complete=true`의 활성 generation 중단은 기능 비교의 제한으로 보존한다. 모델 이름만으로 연속 입력/여러 Task 처리 계약이 충족됐다고 하지 않는다.</a:t>
             </a:r>
           </a:p>
           <a:p xmlns:a="http://schemas.openxmlformats.org/drawingml/2006/main">
@@ -11007,7 +11577,7 @@
           </a:p>
           <a:p xmlns:a="http://schemas.openxmlformats.org/drawingml/2006/main">
             <a:r>
-              <a:t>원본 SHA-256: d25a503005403e71d5811d61f20d9c227479bfeb04808ba868ce06adc463e4f8</a:t>
+              <a:t>원본 SHA-256: 8520fa1bd1661f72bb87071ab03755964b0539565490994de845bbc086654cfd</a:t>
             </a:r>
           </a:p>
           <a:p xmlns:a="http://schemas.openxmlformats.org/drawingml/2006/main">
@@ -14153,6 +14723,291 @@
           <a:p xmlns:a="http://schemas.openxmlformats.org/drawingml/2006/main">
             <a:r>
               <a:t>묶음당 21개 시나리오는 사용자 19개 + Agent 단독 2개다. 집중 장면 안에는 Agent 사건 4개가 추가로 들어 있다. Voice 입력 50초와 출력 예산 179초, 반응 27개와 사용자 cycle 19개를 정의했다. 다섯 묶음 전체는 105개 시나리오·630조건·135반응·95cycle이다. 사용자의 하루 빈도를 뜻하지 않는다.</a:t>
+            </a:r>
+          </a:p>
+          <a:p xmlns:a="http://schemas.openxmlformats.org/drawingml/2006/main">
+            <a:r>
+              <a:t/>
+            </a:r>
+          </a:p>
+          <a:p xmlns:a="http://schemas.openxmlformats.org/drawingml/2006/main">
+            <a:r>
+              <a:t/>
+            </a:r>
+          </a:p>
+          <a:p xmlns:a="http://schemas.openxmlformats.org/drawingml/2006/main">
+            <a:r>
+              <a:t>모델 reference 상세 §8.4</a:t>
+            </a:r>
+          </a:p>
+          <a:p xmlns:a="http://schemas.openxmlformats.org/drawingml/2006/main">
+            <a:r>
+              <a:t> 장치와 모델 계산 reference — 2026-10-11 확인</a:t>
+            </a:r>
+          </a:p>
+          <a:p xmlns:a="http://schemas.openxmlformats.org/drawingml/2006/main">
+            <a:r>
+              <a:t/>
+            </a:r>
+          </a:p>
+          <a:p xmlns:a="http://schemas.openxmlformats.org/drawingml/2006/main">
+            <a:r>
+              <a:t>이 reference는 현재 개발 중인 모델/클라우드 서비스의 실제 가격이나 성능을 뜻하지 않는다. 같은 A/B 계산에 쓸 외부 공개 기준이다. 값은 USD, 모델 단가는 1,000,000 token당 표준 유료 요금이며 free tier/할인으로 0원을 만들지 않는다.</a:t>
+            </a:r>
+          </a:p>
+          <a:p xmlns:a="http://schemas.openxmlformats.org/drawingml/2006/main">
+            <a:r>
+              <a:t/>
+            </a:r>
+          </a:p>
+          <a:p xmlns:a="http://schemas.openxmlformats.org/drawingml/2006/main">
+            <a:r>
+              <a:t>| 용도 | 선택 reference / 값 | 출처와 적용 범위 |</a:t>
+            </a:r>
+          </a:p>
+          <a:p xmlns:a="http://schemas.openxmlformats.org/drawingml/2006/main">
+            <a:r>
+              <a:t>| --- | --- | --- |</a:t>
+            </a:r>
+          </a:p>
+          <a:p xmlns:a="http://schemas.openxmlformats.org/drawingml/2006/main">
+            <a:r>
+              <a:t>| Windows PC | **Galaxy Book6 Ultra NP960UJH-XG3IN**, Windows 11 Home, Core Ultra 7 356H, RAM 32GB LPDDR5X, RTX 5070 Laptop GPU 8GB, SSD 1TB | [삼성 공식 SKU 사양](https://www.samsung.com/in/computers/galaxy-book/galaxy-book6-ultra-ultra-7-32gb-1tb-np960ujh-xg3in/). RAM과 VRAM을 같은 자원으로 합치지 않음. 모델은 클라우드이므로 GPU 가중치 적재를 로컬 비용에 가산하지 않음 |</a:t>
+            </a:r>
+          </a:p>
+          <a:p xmlns:a="http://schemas.openxmlformats.org/drawingml/2006/main">
+            <a:r>
+              <a:t>| 의미 LLM의 비용 | **Qwen3-30B-A3B-Instruct-2507**, `qwen3-30b-a3b-instruct-2507`: Alibaba Cloud Model Studio **Singapore / International** 입력 **$0.20**, 출력 **$0.80** / 1M token, non-thinking | [공식 API 모델/단가](https://docs.modelstudio.console.alibabacloud.com/en/model-studio/qwen3-30b-a3b-instruct-2507), [Qwen 공식 모델 카드](https://huggingface.co/Qwen/Qwen3-30B-A3B-Instruct-2507). 약30B 전체/3B 활성 MoE, Text-to-Text. 사용자 승인한 PoC 의미 모델 기준이며 최종 제품 모델/DP 승자 선정은 아님. 같은 provider/region/revision/mode를 양안에 적용 |</a:t>
+            </a:r>
+          </a:p>
+          <a:p xmlns:a="http://schemas.openxmlformats.org/drawingml/2006/main">
+            <a:r>
+              <a:t>| 의미 LLM의 생성 속도 | **작성자 decode 가정 130 token/s**, 민감도 **100 / 130 / 160 token/s**, 기준 TTFT **0.30초** | [Qwen 공식 H20 benchmark](https://qwen.readthedocs.io/en/latest/getting_started/speed_benchmark.html)의 원본 계열 유효 출력률 약122.53~137.11(BF16) 등을 참고한 수치 규모의 가정. Instruct-2507 API의 공개 decode rate/보장/실측이 아니며 공개표에서 TTFT와 decode를 분리 추출한 값도 아님. 가격은 Alibaba API, 속도 근거는 별도 H20 환경임을 §8.4.1.2에 명시 |</a:t>
+            </a:r>
+          </a:p>
+          <a:p xmlns:a="http://schemas.openxmlformats.org/drawingml/2006/main">
+            <a:r>
+              <a:t>| 음성 비용/비동기 대화 기준 | **OpenAI GPT Realtime**, `gpt-realtime` (`gpt-realtime-2025-08-28`): audio 입력 **$32**, 출력 **$64** / 1M token. Text 입력 **$4**, 출력 **$16** / 1M token. cached audio/Text 입력 **$0.40** / 1M token | [공식 모델/단가](https://developers.openai.com/api/docs/models/gpt-realtime), [Realtime 청구](https://developers.openai.com/api/docs/guides/voice-latency-cost), [비동기 함수 호출](https://developers.openai.com/blog/realtime-api). 사용자 입력 약10 audio token/s, assistant 생성 약20 audio token/s로 신규 audio는 **$0.0192/분 입력, $0.0768/분 출력**으로 환산. 특수 token·이력 재입력·Text·폐기 생성은 별도. 공식 페이지의 Deprecated 상태와 관계없이 사용자가 지정한 날짜별 PoC 비용/기능 reference를 고정하며 실서비스의 신규 채택을 뜻하지 않음 |</a:t>
+            </a:r>
+          </a:p>
+          <a:p xmlns:a="http://schemas.openxmlformats.org/drawingml/2006/main">
+            <a:r>
+              <a:t>| 시간 목표의 사용자 근거 | 즉각 제어 **0.1초**, 대화 흐름 **1초**, 주의 유지 **10초**의 상호작용 참조 | [Nielsen Norman Group 원문](https://www.nngroup.com/articles/website-response-times/). VIA의 평균/모집단/추가 지연 예산은 작성자가 선택하며 문헌이 VIA의 평균 목표를 직접 규정했다고 하지 않음 |</a:t>
+            </a:r>
+          </a:p>
+          <a:p xmlns:a="http://schemas.openxmlformats.org/drawingml/2006/main">
+            <a:r>
+              <a:t/>
+            </a:r>
+          </a:p>
+          <a:p xmlns:a="http://schemas.openxmlformats.org/drawingml/2006/main">
+            <a:r>
+              <a:t>음성 비용은 실제로 보내거나 청구되는 audio/context의 양을 사용한다. VAD가 앞단에 있다는 사실만으로 silence/context 재사용 청구가 0이라고 가정하지 않는다. Text prompt/context, 재시도, 취소 불가인 폐기 출력과 미사용 배경 생산도 포함한다. 같은 사용량을 token 요금과 분 요금으로 이중 계산하지 않는다. 모델 제공자가 사용량을 반환한 실측은 그 사용량을 우선하고, 공개 reference 계산은 음성 길이 기반의 근사임을 남긴다.</a:t>
+            </a:r>
+          </a:p>
+          <a:p xmlns:a="http://schemas.openxmlformats.org/drawingml/2006/main">
+            <a:r>
+              <a:t/>
+            </a:r>
+          </a:p>
+          <a:p xmlns:a="http://schemas.openxmlformats.org/drawingml/2006/main">
+            <a:r>
+              <a:t>검산 예시: 의미 호출의 입력 2,000 token/청구 출력 200 token은 `2,000×0.20/1M + 200×0.80/1M = $0.00056`, 작성자 decode 가정의 생성 부분은 `200/130 ≈ 1.538초`다. Instruct-2507은 non-thinking이며 출력200은 실제 답변/frame/tool 출력의 청구 예산이다. 원천/의미/도구 오류의 추가 질문·재시도·폐기 출력을 모두 포함하고 provider별 tokenizer의 실제 사용량을 우선한다. GPT Realtime 신규 audio 입력 1분/출력 1분은 `600×32/1M + 1,200×64/1M = $0.096`이며 Text와 이력 audio 재입력 청구는 별도다. 응답마다 이전 대화가 입력으로 재사용되므로 실제 `response.done`의 modality별 input/output/cached token을 호출 ID로 중복 제거해 합산한다. 초기 2,000turn을 음성 session에 전부 보내도록 강제하지 않으며 실제 보낸 이력·요약·instruction은 청구한다. 별도 input transcription을 켜면 해당 모델 청구도 더한다. 생성 부분 약1.538초를 첫 출력/입력 처리/통신/queue가 포함된 호출 완료 시간으로 쓰지 않는다. Qwen의 기본 예산에는 할인 없는 입력/출력 단가를 사용한다. 실제 cache 할인이나 별도 저장/도구 청구가 있으면 제공사가 확인한 사용량·단가로 원장에 반영하며 Gemini의 cache 단가를 Qwen에 적용하지 않는다.</a:t>
+            </a:r>
+          </a:p>
+          <a:p xmlns:a="http://schemas.openxmlformats.org/drawingml/2006/main">
+            <a:r>
+              <a:t/>
+            </a:r>
+          </a:p>
+          <a:p xmlns:a="http://schemas.openxmlformats.org/drawingml/2006/main">
+            <a:r>
+              <a:t/>
+            </a:r>
+          </a:p>
+          <a:p xmlns:a="http://schemas.openxmlformats.org/drawingml/2006/main">
+            <a:r>
+              <a:t>### 8.4.1 선택한 모델 역할과 입력 범위</a:t>
+            </a:r>
+          </a:p>
+          <a:p xmlns:a="http://schemas.openxmlformats.org/drawingml/2006/main">
+            <a:r>
+              <a:t/>
+            </a:r>
+          </a:p>
+          <a:p xmlns:a="http://schemas.openxmlformats.org/drawingml/2006/main">
+            <a:r>
+              <a:t>사용자는 **Qwen3-30B-A3B 계열 + GPT Realtime**을 이번 PoC의 모델 reference로 지정했다. 비용/API revision은 앞서 가격을 확인한 **Qwen3-30B-A3B-Instruct-2507**로 고정한다. 원본 `qwen3-30b-a3b`나 Thinking-2507/VL 모델과 혼용하지 않는다. 의미 해석·bounded read 판단·41B의 frame 생성에는 Qwen을, 실시간 음성 입출력/대화 지속에는 GPT Realtime을 사용한다. 외부 업무를 VIA에 맡긴 뒤에도 pending 함수 호출 중 대화를 계속한다. VIA가 외부 Agent의 실행/현재 Task/승인/질문/결과 연결의 권위를 유지하며 GPT Realtime의 tool pending을 실제 업무 완료로 해석하지 않는다. 양안은 같은 역할별 모델/설정/입출력 계약을 사용한다.</a:t>
+            </a:r>
+          </a:p>
+          <a:p xmlns:a="http://schemas.openxmlformats.org/drawingml/2006/main">
+            <a:r>
+              <a:t/>
+            </a:r>
+          </a:p>
+          <a:p xmlns:a="http://schemas.openxmlformats.org/drawingml/2006/main">
+            <a:r>
+              <a:t>Qwen은 Text-to-Text 모델이다. P21의 S2-01 등은 이미 원천 observation으로 표 내용/version·관측시각·포인터 이력을 제공하므로, 그 **원천 사실과 span을 공통 text 입력으로 직렬화**한다. 최종 A/B 지칭, Task 연결, revision 선택, 의존 관계 또는 채점 정답을 adapter가 미리 채우지 않는다. 조회하지 않은 원천 내용·권한 없는 내용도 자동으로 넣지 않는다. 소스 원문/구조 정보는 그대로 공급하고, 의미 결합은 각 방안이 생산한다. 원본 화면 frame은 시간/보관/메모리 원장에 유지한다. 이는 픽셀만으로 임의 앱 화면을 인식하는 완성 제품 평가가 아니라 정의된 PoC 원천 자료를 사용하는 범위다. 추가 vision/OCR 모델을 현재 예산에 숨겨 넣지 않는다. 실제 픽셀 인식이 필요해지면 공통 관측 adapter의 추가 모델·비용·지연·권한·손실을 동일하게 명시하고 계약을 개정한다.</a:t>
+            </a:r>
+          </a:p>
+          <a:p xmlns:a="http://schemas.openxmlformats.org/drawingml/2006/main">
+            <a:r>
+              <a:t/>
+            </a:r>
+          </a:p>
+          <a:p xmlns:a="http://schemas.openxmlformats.org/drawingml/2006/main">
+            <a:r>
+              <a:t>Qwen frame/tool 출력은 구문·허용 schema·ID/revision·현재성 검사를 거친다. 모델 이름만으로 JSON/함수 호출이 항상 맞거나 provider가 엄격한 schema decoding을 보장한다고 가정하지 않는다. 잘못된 출력의 재시도와 판단 유보는 같은 사례/실패/청구 원장에 포함한다. GPT Realtime의 structured output 미지원 때문에 음성 모델을 41B의 의미 frame 생산자로 대신 쓰지 않는다. 비용/기능 reference의 지정은 제품 모델 채택, Architecture 대안 선택이나 정확성 측정의 완료가 아니다.</a:t>
+            </a:r>
+          </a:p>
+          <a:p xmlns:a="http://schemas.openxmlformats.org/drawingml/2006/main">
+            <a:r>
+              <a:t/>
+            </a:r>
+          </a:p>
+          <a:p xmlns:a="http://schemas.openxmlformats.org/drawingml/2006/main">
+            <a:r>
+              <a:t>### 8.4.1.1 이전 Gemini 선택 이유와 변경 이력</a:t>
+            </a:r>
+          </a:p>
+          <a:p xmlns:a="http://schemas.openxmlformats.org/drawingml/2006/main">
+            <a:r>
+              <a:t/>
+            </a:r>
+          </a:p>
+          <a:p xmlns:a="http://schemas.openxmlformats.org/drawingml/2006/main">
+            <a:r>
+              <a:t>Gemini 3 Flash Preview의 공개 출시일은 **2025-12-17**이다([Google 출시 공지](https://blog.google/products-and-platforms/products/gemini/gemini-3-flash/)). 이전 선택은 공식 단가와 이미지 입력·함수 호출·structured output을 가진 reference의 편의에 따른 것이며 VIA 우월성이나 Qwen 30B와의 동등성 검증이 아니었다. 이후 정확한 Qwen API 단가를 확인했고 사용자가 Qwen/GPT 조합을 지정했으므로 **Gemini는 현행 의미/비용/속도 기준에서 제외**한다. 같은 124k/12.4k token 예산의 이전 Gemini 의미 비용 $0.09920과 현재 Qwen $0.03472의 차이 $0.06448는 단가 민감도이며 실제 호출/정확성/출력 동등성의 증거가 아니다. 기존 200 token/s와 Gemini cache 요금은 [변경 전 보존본](../../../archive/qa-semantic-reference-before-qwen-20261011/README.md)에 남겼다.</a:t>
+            </a:r>
+          </a:p>
+          <a:p xmlns:a="http://schemas.openxmlformats.org/drawingml/2006/main">
+            <a:r>
+              <a:t/>
+            </a:r>
+          </a:p>
+          <a:p xmlns:a="http://schemas.openxmlformats.org/drawingml/2006/main">
+            <a:r>
+              <a:t>### 8.4.1.2 Groq 밖의 속도 근거와 산식</a:t>
+            </a:r>
+          </a:p>
+          <a:p xmlns:a="http://schemas.openxmlformats.org/drawingml/2006/main">
+            <a:r>
+              <a:t/>
+            </a:r>
+          </a:p>
+          <a:p xmlns:a="http://schemas.openxmlformats.org/drawingml/2006/main">
+            <a:r>
+              <a:t>[Qwen 공식 속도 benchmark](https://qwen.readthedocs.io/en/latest/getting_started/speed_benchmark.html)는 **Qwen3-30B-A3B**를 NVIDIA **H20 96GB 1장**, SGLang **0.4.6.post1**, PyTorch **2.6.0+cu124**, batch **1**, 출력 **2,048 token**으로 평가했다. 입력1 token에서 BF16 **137.18**, FP8 **155.55 token/s**다. 입력6,144 token에서는 BF16 **490.10**, FP8 **551.34**다. 단, 공식 분자는 **입력+출력 token**, 분모는 전체 처리시간이다. 입력6,144의 490.10을 출력 생성률로 쓰지 않는다.</a:t>
+            </a:r>
+          </a:p>
+          <a:p xmlns:a="http://schemas.openxmlformats.org/drawingml/2006/main">
+            <a:r>
+              <a:t/>
+            </a:r>
+          </a:p>
+          <a:p xmlns:a="http://schemas.openxmlformats.org/drawingml/2006/main">
+            <a:r>
+              <a:t>BF16 입력1 조건의 전체 시간은 `2,049/137.18 ≈ 14.94초`, 입력6,144 조건은 `8,192/490.10 ≈ 16.72초`로 복원할 수 있다. 출력/전체시간으로 다시 표현하면 각각 **137.11**과 **122.53 output token/s**이며 이는 prefill까지 포함한 해당 길이의 유효 출력률이다. 이것을 TTFT와 분리된 decode rate로 두고 TTFT를 다시 더하면 입력 처리 시간이 이중 계상된다. 원본 Qwen3 benchmark를 Instruct-2507의 실측 또는 Alibaba Singapore API의 속도로 주장하지 않는다. 서버 측 H20 reference이므로 Windows 노트북의 속도/메모리에도 이전하지 않는다.</a:t>
+            </a:r>
+          </a:p>
+          <a:p xmlns:a="http://schemas.openxmlformats.org/drawingml/2006/main">
+            <a:r>
+              <a:t/>
+            </a:r>
+          </a:p>
+          <a:p xmlns:a="http://schemas.openxmlformats.org/drawingml/2006/main">
+            <a:r>
+              <a:t>따라서 공식 수치 기반의 계산은 **공개된 동일 길이/환경의 전체 처리시간**을 쓰거나, 별도로 검증된 decode rate와 TTFT를 분리해야 한다. 현재는 원본 계열 BF16 유효 출력률 약122.53~137.11과 FP8 입력1 약155.47을 수치 규모의 참고로 삼아 **130 token/s의 독립적인 PoC decode 가정**과 **100/130/160 민감도**를 정했다. 기준 TTFT0.30초, 빠른0.15초, 느린0.80초와 음성 시작0.10/0.25/0.60초도 별도 작성자 가정이다. 이들을 공개표에서 분리 측정한 TTFT/decode로 주장하지 않는다. 특히 2,048 출력의 유효 출력률을 2,000입력/200출력에 보장된 rate로 이전하지 않는다. API 배포의 TTFT/생성률이 있으면 두 가정을 실제 측정으로 함께 교체하고, 공개 benchmark 자체를 재현 계산할 때는 전체시간만 써서 prefill을 중복 계상하지 않는다. API 가격 reference와 별도 H20 속도 reference를 함께 사용하는 경우 비용/속도가 같은 서비스에서 측정됐다는 주장도 하지 않는다.</a:t>
+            </a:r>
+          </a:p>
+          <a:p xmlns:a="http://schemas.openxmlformats.org/drawingml/2006/main">
+            <a:r>
+              <a:t/>
+            </a:r>
+          </a:p>
+          <a:p xmlns:a="http://schemas.openxmlformats.org/drawingml/2006/main">
+            <a:r>
+              <a:t>기존의 **450+ token/s**는 [Groq의 `qwen/qwen3.8-27b` 모델 페이지](https://console.groq.com/docs/model/qwen/qwen3.8-27b)의 제공사 표시값이다. [GroqCloud는 전용 LPU 추론 인프라](https://groq.com/blog/the-groq-lpu-explained)를 사용한다. 이는 Qwen3-30B-A3B-Instruct-2507, NVIDIA GPU 또는 Windows PC의 숫자가 아니다. 해당 450 수치의 LPU 수/세대, precision, prompt/output 길이, 동시 요청 수와 상세 계측 경계는 페이지에 공개되어 있지 않으므로 가정으로 채우지 않는다. Groq은 현행 비용/속도 reference에서 제외하며 이 문단은 이전 근거의 의미를 설명하기 위한 provenance다.</a:t>
+            </a:r>
+          </a:p>
+          <a:p xmlns:a="http://schemas.openxmlformats.org/drawingml/2006/main">
+            <a:r>
+              <a:t/>
+            </a:r>
+          </a:p>
+          <a:p xmlns:a="http://schemas.openxmlformats.org/drawingml/2006/main">
+            <a:r>
+              <a:t>### 8.4.2 Gemini Live와 GPT Realtime의 기능 비교</a:t>
+            </a:r>
+          </a:p>
+          <a:p xmlns:a="http://schemas.openxmlformats.org/drawingml/2006/main">
+            <a:r>
+              <a:t/>
+            </a:r>
+          </a:p>
+          <a:p xmlns:a="http://schemas.openxmlformats.org/drawingml/2006/main">
+            <a:r>
+              <a:t>2026-10-11 확인한 공식 문서 기준으로 같은 실시간 음성 대화 역할을 제공하지만 API/실행 제약은 다르다. 아래 GPT는 사용자가 지칭한 `gpt-realtime` 모델 기준이며 다른 GPT Realtime 모델의 제한으로 확대하지 않는다. 현재 공식 모델 페이지는 해당 모델을 Deprecated로 표시하므로 실제 제품 적용 권고가 아니라 요청한 기능 비교 기준으로만 쓴다.</a:t>
+            </a:r>
+          </a:p>
+          <a:p xmlns:a="http://schemas.openxmlformats.org/drawingml/2006/main">
+            <a:r>
+              <a:t/>
+            </a:r>
+          </a:p>
+          <a:p xmlns:a="http://schemas.openxmlformats.org/drawingml/2006/main">
+            <a:r>
+              <a:t>| 비교 항목 | Gemini 3.1 Flash Live Preview | OpenAI gpt-realtime | VIA에 주는 의미 |</a:t>
+            </a:r>
+          </a:p>
+          <a:p xmlns:a="http://schemas.openxmlformats.org/drawingml/2006/main">
+            <a:r>
+              <a:t>| --- | --- | --- | --- |</a:t>
+            </a:r>
+          </a:p>
+          <a:p xmlns:a="http://schemas.openxmlformats.org/drawingml/2006/main">
+            <a:r>
+              <a:t>| 실시간 음성 입출력, 입력/출력 전사, 발화 중 끼어들기 | 지원 | 지원 | 양쪽 모두 음성 역할의 reference가 될 수 있다. 실제 한국어 품질·지연·중단 시간 동등성은 입증하지 않음 |</a:t>
+            </a:r>
+          </a:p>
+          <a:p xmlns:a="http://schemas.openxmlformats.org/drawingml/2006/main">
+            <a:r>
+              <a:t>| 화면/멀티모달 입력 | Text·이미지·audio·video 입력 | Text·이미지·audio 입력, video 미지원 | GPT에서는 화면 snapshot의 이미지 입력과 video stream 지원을 구별 |</a:t>
+            </a:r>
+          </a:p>
+          <a:p xmlns:a="http://schemas.openxmlformats.org/drawingml/2006/main">
+            <a:r>
+              <a:t>| 함수 호출 | 동기만 지원, tool response 전 응답 대기 | 비동기 tool 흐름 지원 | 긴 Agent 실행을 Gemini Live tool response로 끝날 때까지 기다리게 하지 않음 |</a:t>
+            </a:r>
+          </a:p>
+          <a:p xmlns:a="http://schemas.openxmlformats.org/drawingml/2006/main">
+            <a:r>
+              <a:t>| 직접 연결 | Live API WebSocket | WebRTC / WebSocket / SIP | provider adapter·세션 재연결·audio queue/취소 이벤트를 별도로 구현/계산 |</a:t>
+            </a:r>
+          </a:p>
+          <a:p xmlns:a="http://schemas.openxmlformats.org/drawingml/2006/main">
+            <a:r>
+              <a:t>| structured output | 미지원 | 미지원 | 함수 인자 JSON과 schema 제약 출력 보장을 구별, 의미 모델의 frame 검증은 별도 |</a:t>
+            </a:r>
+          </a:p>
+          <a:p xmlns:a="http://schemas.openxmlformats.org/drawingml/2006/main">
+            <a:r>
+              <a:t/>
+            </a:r>
+          </a:p>
+          <a:p xmlns:a="http://schemas.openxmlformats.org/drawingml/2006/main">
+            <a:r>
+              <a:t>근거: [Gemini Live 모델/제약](https://ai.google.dev/gemini-api/docs/models/gemini-3.1-flash-live-preview), [Live 도구의 동기 제한](https://ai.google.dev/gemini-api/docs/live-api/tools), [Live API 연결](https://ai.google.dev/gemini-api/docs/live-api), [Live VAD/중단](https://ai.google.dev/gemini-api/docs/live-api/capabilities), [OpenAI gpt-realtime](https://developers.openai.com/api/docs/models/gpt-realtime), [Realtime 대화/중단](https://developers.openai.com/api/docs/guides/realtime-conversations), [Realtime 도구](https://developers.openai.com/api/docs/guides/realtime-mcp), [GPT Realtime 비동기 함수 호출 설명](https://developers.openai.com/blog/realtime-api).</a:t>
+            </a:r>
+          </a:p>
+          <a:p xmlns:a="http://schemas.openxmlformats.org/drawingml/2006/main">
+            <a:r>
+              <a:t/>
+            </a:r>
+          </a:p>
+          <a:p xmlns:a="http://schemas.openxmlformats.org/drawingml/2006/main">
+            <a:r>
+              <a:t>VIA는 요청/Task의 권위를 갖고 음성 모델의 임시 session과 구별한다. 긴 업무는 로컬 VIA가 외부 Agent에 비동기로 위임하고, 음성 모델에는 유효한 접수·질문·결과를 제시할 입력을 따로 전달하는 방향으로 reference를 해석한다. 이것은 긴 Agent 결과를 Live 동기 함수 응답으로 기다리는 것과 다르다. 실제 provider의 forced response, cancel, 재연결, 출력 내용 준수와 local playback stop은 adapter/API 검증에서 확인해야 한다. 현재 GPT Realtime reference에서도 local playback stop·새 사용자 요청·동시에 도착한 Agent 질문/결과의 우선순위는 VIA가 관리하고, pending tool의 결과가 없는 동안 완료를 추측해 말하지 못하도록 실제 상태를 전달한다. 이전 Gemini 3.1 검토의 proactive audio/affective dialogue 미지원과 `turn_complete=true`의 활성 generation 중단은 기능 비교의 제한으로 보존한다. 모델 이름만으로 연속 입력/여러 Task 처리 계약이 충족됐다고 하지 않는다.</a:t>
             </a:r>
           </a:p>
           <a:p xmlns:a="http://schemas.openxmlformats.org/drawingml/2006/main">
@@ -14267,7 +15122,7 @@
           </a:p>
           <a:p xmlns:a="http://schemas.openxmlformats.org/drawingml/2006/main">
             <a:r>
-              <a:t>원본 SHA-256: d25a503005403e71d5811d61f20d9c227479bfeb04808ba868ce06adc463e4f8</a:t>
+              <a:t>원본 SHA-256: 8520fa1bd1661f72bb87071ab03755964b0539565490994de845bbc086654cfd</a:t>
             </a:r>
           </a:p>
           <a:p xmlns:a="http://schemas.openxmlformats.org/drawingml/2006/main">
@@ -17413,6 +18268,291 @@
           <a:p xmlns:a="http://schemas.openxmlformats.org/drawingml/2006/main">
             <a:r>
               <a:t>묶음당 21개 시나리오는 사용자 19개 + Agent 단독 2개다. 집중 장면 안에는 Agent 사건 4개가 추가로 들어 있다. Voice 입력 50초와 출력 예산 179초, 반응 27개와 사용자 cycle 19개를 정의했다. 다섯 묶음 전체는 105개 시나리오·630조건·135반응·95cycle이다. 사용자의 하루 빈도를 뜻하지 않는다.</a:t>
+            </a:r>
+          </a:p>
+          <a:p xmlns:a="http://schemas.openxmlformats.org/drawingml/2006/main">
+            <a:r>
+              <a:t/>
+            </a:r>
+          </a:p>
+          <a:p xmlns:a="http://schemas.openxmlformats.org/drawingml/2006/main">
+            <a:r>
+              <a:t/>
+            </a:r>
+          </a:p>
+          <a:p xmlns:a="http://schemas.openxmlformats.org/drawingml/2006/main">
+            <a:r>
+              <a:t>모델 reference 상세 §8.4</a:t>
+            </a:r>
+          </a:p>
+          <a:p xmlns:a="http://schemas.openxmlformats.org/drawingml/2006/main">
+            <a:r>
+              <a:t> 장치와 모델 계산 reference — 2026-10-11 확인</a:t>
+            </a:r>
+          </a:p>
+          <a:p xmlns:a="http://schemas.openxmlformats.org/drawingml/2006/main">
+            <a:r>
+              <a:t/>
+            </a:r>
+          </a:p>
+          <a:p xmlns:a="http://schemas.openxmlformats.org/drawingml/2006/main">
+            <a:r>
+              <a:t>이 reference는 현재 개발 중인 모델/클라우드 서비스의 실제 가격이나 성능을 뜻하지 않는다. 같은 A/B 계산에 쓸 외부 공개 기준이다. 값은 USD, 모델 단가는 1,000,000 token당 표준 유료 요금이며 free tier/할인으로 0원을 만들지 않는다.</a:t>
+            </a:r>
+          </a:p>
+          <a:p xmlns:a="http://schemas.openxmlformats.org/drawingml/2006/main">
+            <a:r>
+              <a:t/>
+            </a:r>
+          </a:p>
+          <a:p xmlns:a="http://schemas.openxmlformats.org/drawingml/2006/main">
+            <a:r>
+              <a:t>| 용도 | 선택 reference / 값 | 출처와 적용 범위 |</a:t>
+            </a:r>
+          </a:p>
+          <a:p xmlns:a="http://schemas.openxmlformats.org/drawingml/2006/main">
+            <a:r>
+              <a:t>| --- | --- | --- |</a:t>
+            </a:r>
+          </a:p>
+          <a:p xmlns:a="http://schemas.openxmlformats.org/drawingml/2006/main">
+            <a:r>
+              <a:t>| Windows PC | **Galaxy Book6 Ultra NP960UJH-XG3IN**, Windows 11 Home, Core Ultra 7 356H, RAM 32GB LPDDR5X, RTX 5070 Laptop GPU 8GB, SSD 1TB | [삼성 공식 SKU 사양](https://www.samsung.com/in/computers/galaxy-book/galaxy-book6-ultra-ultra-7-32gb-1tb-np960ujh-xg3in/). RAM과 VRAM을 같은 자원으로 합치지 않음. 모델은 클라우드이므로 GPU 가중치 적재를 로컬 비용에 가산하지 않음 |</a:t>
+            </a:r>
+          </a:p>
+          <a:p xmlns:a="http://schemas.openxmlformats.org/drawingml/2006/main">
+            <a:r>
+              <a:t>| 의미 LLM의 비용 | **Qwen3-30B-A3B-Instruct-2507**, `qwen3-30b-a3b-instruct-2507`: Alibaba Cloud Model Studio **Singapore / International** 입력 **$0.20**, 출력 **$0.80** / 1M token, non-thinking | [공식 API 모델/단가](https://docs.modelstudio.console.alibabacloud.com/en/model-studio/qwen3-30b-a3b-instruct-2507), [Qwen 공식 모델 카드](https://huggingface.co/Qwen/Qwen3-30B-A3B-Instruct-2507). 약30B 전체/3B 활성 MoE, Text-to-Text. 사용자 승인한 PoC 의미 모델 기준이며 최종 제품 모델/DP 승자 선정은 아님. 같은 provider/region/revision/mode를 양안에 적용 |</a:t>
+            </a:r>
+          </a:p>
+          <a:p xmlns:a="http://schemas.openxmlformats.org/drawingml/2006/main">
+            <a:r>
+              <a:t>| 의미 LLM의 생성 속도 | **작성자 decode 가정 130 token/s**, 민감도 **100 / 130 / 160 token/s**, 기준 TTFT **0.30초** | [Qwen 공식 H20 benchmark](https://qwen.readthedocs.io/en/latest/getting_started/speed_benchmark.html)의 원본 계열 유효 출력률 약122.53~137.11(BF16) 등을 참고한 수치 규모의 가정. Instruct-2507 API의 공개 decode rate/보장/실측이 아니며 공개표에서 TTFT와 decode를 분리 추출한 값도 아님. 가격은 Alibaba API, 속도 근거는 별도 H20 환경임을 §8.4.1.2에 명시 |</a:t>
+            </a:r>
+          </a:p>
+          <a:p xmlns:a="http://schemas.openxmlformats.org/drawingml/2006/main">
+            <a:r>
+              <a:t>| 음성 비용/비동기 대화 기준 | **OpenAI GPT Realtime**, `gpt-realtime` (`gpt-realtime-2025-08-28`): audio 입력 **$32**, 출력 **$64** / 1M token. Text 입력 **$4**, 출력 **$16** / 1M token. cached audio/Text 입력 **$0.40** / 1M token | [공식 모델/단가](https://developers.openai.com/api/docs/models/gpt-realtime), [Realtime 청구](https://developers.openai.com/api/docs/guides/voice-latency-cost), [비동기 함수 호출](https://developers.openai.com/blog/realtime-api). 사용자 입력 약10 audio token/s, assistant 생성 약20 audio token/s로 신규 audio는 **$0.0192/분 입력, $0.0768/분 출력**으로 환산. 특수 token·이력 재입력·Text·폐기 생성은 별도. 공식 페이지의 Deprecated 상태와 관계없이 사용자가 지정한 날짜별 PoC 비용/기능 reference를 고정하며 실서비스의 신규 채택을 뜻하지 않음 |</a:t>
+            </a:r>
+          </a:p>
+          <a:p xmlns:a="http://schemas.openxmlformats.org/drawingml/2006/main">
+            <a:r>
+              <a:t>| 시간 목표의 사용자 근거 | 즉각 제어 **0.1초**, 대화 흐름 **1초**, 주의 유지 **10초**의 상호작용 참조 | [Nielsen Norman Group 원문](https://www.nngroup.com/articles/website-response-times/). VIA의 평균/모집단/추가 지연 예산은 작성자가 선택하며 문헌이 VIA의 평균 목표를 직접 규정했다고 하지 않음 |</a:t>
+            </a:r>
+          </a:p>
+          <a:p xmlns:a="http://schemas.openxmlformats.org/drawingml/2006/main">
+            <a:r>
+              <a:t/>
+            </a:r>
+          </a:p>
+          <a:p xmlns:a="http://schemas.openxmlformats.org/drawingml/2006/main">
+            <a:r>
+              <a:t>음성 비용은 실제로 보내거나 청구되는 audio/context의 양을 사용한다. VAD가 앞단에 있다는 사실만으로 silence/context 재사용 청구가 0이라고 가정하지 않는다. Text prompt/context, 재시도, 취소 불가인 폐기 출력과 미사용 배경 생산도 포함한다. 같은 사용량을 token 요금과 분 요금으로 이중 계산하지 않는다. 모델 제공자가 사용량을 반환한 실측은 그 사용량을 우선하고, 공개 reference 계산은 음성 길이 기반의 근사임을 남긴다.</a:t>
+            </a:r>
+          </a:p>
+          <a:p xmlns:a="http://schemas.openxmlformats.org/drawingml/2006/main">
+            <a:r>
+              <a:t/>
+            </a:r>
+          </a:p>
+          <a:p xmlns:a="http://schemas.openxmlformats.org/drawingml/2006/main">
+            <a:r>
+              <a:t>검산 예시: 의미 호출의 입력 2,000 token/청구 출력 200 token은 `2,000×0.20/1M + 200×0.80/1M = $0.00056`, 작성자 decode 가정의 생성 부분은 `200/130 ≈ 1.538초`다. Instruct-2507은 non-thinking이며 출력200은 실제 답변/frame/tool 출력의 청구 예산이다. 원천/의미/도구 오류의 추가 질문·재시도·폐기 출력을 모두 포함하고 provider별 tokenizer의 실제 사용량을 우선한다. GPT Realtime 신규 audio 입력 1분/출력 1분은 `600×32/1M + 1,200×64/1M = $0.096`이며 Text와 이력 audio 재입력 청구는 별도다. 응답마다 이전 대화가 입력으로 재사용되므로 실제 `response.done`의 modality별 input/output/cached token을 호출 ID로 중복 제거해 합산한다. 초기 2,000turn을 음성 session에 전부 보내도록 강제하지 않으며 실제 보낸 이력·요약·instruction은 청구한다. 별도 input transcription을 켜면 해당 모델 청구도 더한다. 생성 부분 약1.538초를 첫 출력/입력 처리/통신/queue가 포함된 호출 완료 시간으로 쓰지 않는다. Qwen의 기본 예산에는 할인 없는 입력/출력 단가를 사용한다. 실제 cache 할인이나 별도 저장/도구 청구가 있으면 제공사가 확인한 사용량·단가로 원장에 반영하며 Gemini의 cache 단가를 Qwen에 적용하지 않는다.</a:t>
+            </a:r>
+          </a:p>
+          <a:p xmlns:a="http://schemas.openxmlformats.org/drawingml/2006/main">
+            <a:r>
+              <a:t/>
+            </a:r>
+          </a:p>
+          <a:p xmlns:a="http://schemas.openxmlformats.org/drawingml/2006/main">
+            <a:r>
+              <a:t/>
+            </a:r>
+          </a:p>
+          <a:p xmlns:a="http://schemas.openxmlformats.org/drawingml/2006/main">
+            <a:r>
+              <a:t>### 8.4.1 선택한 모델 역할과 입력 범위</a:t>
+            </a:r>
+          </a:p>
+          <a:p xmlns:a="http://schemas.openxmlformats.org/drawingml/2006/main">
+            <a:r>
+              <a:t/>
+            </a:r>
+          </a:p>
+          <a:p xmlns:a="http://schemas.openxmlformats.org/drawingml/2006/main">
+            <a:r>
+              <a:t>사용자는 **Qwen3-30B-A3B 계열 + GPT Realtime**을 이번 PoC의 모델 reference로 지정했다. 비용/API revision은 앞서 가격을 확인한 **Qwen3-30B-A3B-Instruct-2507**로 고정한다. 원본 `qwen3-30b-a3b`나 Thinking-2507/VL 모델과 혼용하지 않는다. 의미 해석·bounded read 판단·41B의 frame 생성에는 Qwen을, 실시간 음성 입출력/대화 지속에는 GPT Realtime을 사용한다. 외부 업무를 VIA에 맡긴 뒤에도 pending 함수 호출 중 대화를 계속한다. VIA가 외부 Agent의 실행/현재 Task/승인/질문/결과 연결의 권위를 유지하며 GPT Realtime의 tool pending을 실제 업무 완료로 해석하지 않는다. 양안은 같은 역할별 모델/설정/입출력 계약을 사용한다.</a:t>
+            </a:r>
+          </a:p>
+          <a:p xmlns:a="http://schemas.openxmlformats.org/drawingml/2006/main">
+            <a:r>
+              <a:t/>
+            </a:r>
+          </a:p>
+          <a:p xmlns:a="http://schemas.openxmlformats.org/drawingml/2006/main">
+            <a:r>
+              <a:t>Qwen은 Text-to-Text 모델이다. P21의 S2-01 등은 이미 원천 observation으로 표 내용/version·관측시각·포인터 이력을 제공하므로, 그 **원천 사실과 span을 공통 text 입력으로 직렬화**한다. 최종 A/B 지칭, Task 연결, revision 선택, 의존 관계 또는 채점 정답을 adapter가 미리 채우지 않는다. 조회하지 않은 원천 내용·권한 없는 내용도 자동으로 넣지 않는다. 소스 원문/구조 정보는 그대로 공급하고, 의미 결합은 각 방안이 생산한다. 원본 화면 frame은 시간/보관/메모리 원장에 유지한다. 이는 픽셀만으로 임의 앱 화면을 인식하는 완성 제품 평가가 아니라 정의된 PoC 원천 자료를 사용하는 범위다. 추가 vision/OCR 모델을 현재 예산에 숨겨 넣지 않는다. 실제 픽셀 인식이 필요해지면 공통 관측 adapter의 추가 모델·비용·지연·권한·손실을 동일하게 명시하고 계약을 개정한다.</a:t>
+            </a:r>
+          </a:p>
+          <a:p xmlns:a="http://schemas.openxmlformats.org/drawingml/2006/main">
+            <a:r>
+              <a:t/>
+            </a:r>
+          </a:p>
+          <a:p xmlns:a="http://schemas.openxmlformats.org/drawingml/2006/main">
+            <a:r>
+              <a:t>Qwen frame/tool 출력은 구문·허용 schema·ID/revision·현재성 검사를 거친다. 모델 이름만으로 JSON/함수 호출이 항상 맞거나 provider가 엄격한 schema decoding을 보장한다고 가정하지 않는다. 잘못된 출력의 재시도와 판단 유보는 같은 사례/실패/청구 원장에 포함한다. GPT Realtime의 structured output 미지원 때문에 음성 모델을 41B의 의미 frame 생산자로 대신 쓰지 않는다. 비용/기능 reference의 지정은 제품 모델 채택, Architecture 대안 선택이나 정확성 측정의 완료가 아니다.</a:t>
+            </a:r>
+          </a:p>
+          <a:p xmlns:a="http://schemas.openxmlformats.org/drawingml/2006/main">
+            <a:r>
+              <a:t/>
+            </a:r>
+          </a:p>
+          <a:p xmlns:a="http://schemas.openxmlformats.org/drawingml/2006/main">
+            <a:r>
+              <a:t>### 8.4.1.1 이전 Gemini 선택 이유와 변경 이력</a:t>
+            </a:r>
+          </a:p>
+          <a:p xmlns:a="http://schemas.openxmlformats.org/drawingml/2006/main">
+            <a:r>
+              <a:t/>
+            </a:r>
+          </a:p>
+          <a:p xmlns:a="http://schemas.openxmlformats.org/drawingml/2006/main">
+            <a:r>
+              <a:t>Gemini 3 Flash Preview의 공개 출시일은 **2025-12-17**이다([Google 출시 공지](https://blog.google/products-and-platforms/products/gemini/gemini-3-flash/)). 이전 선택은 공식 단가와 이미지 입력·함수 호출·structured output을 가진 reference의 편의에 따른 것이며 VIA 우월성이나 Qwen 30B와의 동등성 검증이 아니었다. 이후 정확한 Qwen API 단가를 확인했고 사용자가 Qwen/GPT 조합을 지정했으므로 **Gemini는 현행 의미/비용/속도 기준에서 제외**한다. 같은 124k/12.4k token 예산의 이전 Gemini 의미 비용 $0.09920과 현재 Qwen $0.03472의 차이 $0.06448는 단가 민감도이며 실제 호출/정확성/출력 동등성의 증거가 아니다. 기존 200 token/s와 Gemini cache 요금은 [변경 전 보존본](../../../archive/qa-semantic-reference-before-qwen-20261011/README.md)에 남겼다.</a:t>
+            </a:r>
+          </a:p>
+          <a:p xmlns:a="http://schemas.openxmlformats.org/drawingml/2006/main">
+            <a:r>
+              <a:t/>
+            </a:r>
+          </a:p>
+          <a:p xmlns:a="http://schemas.openxmlformats.org/drawingml/2006/main">
+            <a:r>
+              <a:t>### 8.4.1.2 Groq 밖의 속도 근거와 산식</a:t>
+            </a:r>
+          </a:p>
+          <a:p xmlns:a="http://schemas.openxmlformats.org/drawingml/2006/main">
+            <a:r>
+              <a:t/>
+            </a:r>
+          </a:p>
+          <a:p xmlns:a="http://schemas.openxmlformats.org/drawingml/2006/main">
+            <a:r>
+              <a:t>[Qwen 공식 속도 benchmark](https://qwen.readthedocs.io/en/latest/getting_started/speed_benchmark.html)는 **Qwen3-30B-A3B**를 NVIDIA **H20 96GB 1장**, SGLang **0.4.6.post1**, PyTorch **2.6.0+cu124**, batch **1**, 출력 **2,048 token**으로 평가했다. 입력1 token에서 BF16 **137.18**, FP8 **155.55 token/s**다. 입력6,144 token에서는 BF16 **490.10**, FP8 **551.34**다. 단, 공식 분자는 **입력+출력 token**, 분모는 전체 처리시간이다. 입력6,144의 490.10을 출력 생성률로 쓰지 않는다.</a:t>
+            </a:r>
+          </a:p>
+          <a:p xmlns:a="http://schemas.openxmlformats.org/drawingml/2006/main">
+            <a:r>
+              <a:t/>
+            </a:r>
+          </a:p>
+          <a:p xmlns:a="http://schemas.openxmlformats.org/drawingml/2006/main">
+            <a:r>
+              <a:t>BF16 입력1 조건의 전체 시간은 `2,049/137.18 ≈ 14.94초`, 입력6,144 조건은 `8,192/490.10 ≈ 16.72초`로 복원할 수 있다. 출력/전체시간으로 다시 표현하면 각각 **137.11**과 **122.53 output token/s**이며 이는 prefill까지 포함한 해당 길이의 유효 출력률이다. 이것을 TTFT와 분리된 decode rate로 두고 TTFT를 다시 더하면 입력 처리 시간이 이중 계상된다. 원본 Qwen3 benchmark를 Instruct-2507의 실측 또는 Alibaba Singapore API의 속도로 주장하지 않는다. 서버 측 H20 reference이므로 Windows 노트북의 속도/메모리에도 이전하지 않는다.</a:t>
+            </a:r>
+          </a:p>
+          <a:p xmlns:a="http://schemas.openxmlformats.org/drawingml/2006/main">
+            <a:r>
+              <a:t/>
+            </a:r>
+          </a:p>
+          <a:p xmlns:a="http://schemas.openxmlformats.org/drawingml/2006/main">
+            <a:r>
+              <a:t>따라서 공식 수치 기반의 계산은 **공개된 동일 길이/환경의 전체 처리시간**을 쓰거나, 별도로 검증된 decode rate와 TTFT를 분리해야 한다. 현재는 원본 계열 BF16 유효 출력률 약122.53~137.11과 FP8 입력1 약155.47을 수치 규모의 참고로 삼아 **130 token/s의 독립적인 PoC decode 가정**과 **100/130/160 민감도**를 정했다. 기준 TTFT0.30초, 빠른0.15초, 느린0.80초와 음성 시작0.10/0.25/0.60초도 별도 작성자 가정이다. 이들을 공개표에서 분리 측정한 TTFT/decode로 주장하지 않는다. 특히 2,048 출력의 유효 출력률을 2,000입력/200출력에 보장된 rate로 이전하지 않는다. API 배포의 TTFT/생성률이 있으면 두 가정을 실제 측정으로 함께 교체하고, 공개 benchmark 자체를 재현 계산할 때는 전체시간만 써서 prefill을 중복 계상하지 않는다. API 가격 reference와 별도 H20 속도 reference를 함께 사용하는 경우 비용/속도가 같은 서비스에서 측정됐다는 주장도 하지 않는다.</a:t>
+            </a:r>
+          </a:p>
+          <a:p xmlns:a="http://schemas.openxmlformats.org/drawingml/2006/main">
+            <a:r>
+              <a:t/>
+            </a:r>
+          </a:p>
+          <a:p xmlns:a="http://schemas.openxmlformats.org/drawingml/2006/main">
+            <a:r>
+              <a:t>기존의 **450+ token/s**는 [Groq의 `qwen/qwen3.8-27b` 모델 페이지](https://console.groq.com/docs/model/qwen/qwen3.8-27b)의 제공사 표시값이다. [GroqCloud는 전용 LPU 추론 인프라](https://groq.com/blog/the-groq-lpu-explained)를 사용한다. 이는 Qwen3-30B-A3B-Instruct-2507, NVIDIA GPU 또는 Windows PC의 숫자가 아니다. 해당 450 수치의 LPU 수/세대, precision, prompt/output 길이, 동시 요청 수와 상세 계측 경계는 페이지에 공개되어 있지 않으므로 가정으로 채우지 않는다. Groq은 현행 비용/속도 reference에서 제외하며 이 문단은 이전 근거의 의미를 설명하기 위한 provenance다.</a:t>
+            </a:r>
+          </a:p>
+          <a:p xmlns:a="http://schemas.openxmlformats.org/drawingml/2006/main">
+            <a:r>
+              <a:t/>
+            </a:r>
+          </a:p>
+          <a:p xmlns:a="http://schemas.openxmlformats.org/drawingml/2006/main">
+            <a:r>
+              <a:t>### 8.4.2 Gemini Live와 GPT Realtime의 기능 비교</a:t>
+            </a:r>
+          </a:p>
+          <a:p xmlns:a="http://schemas.openxmlformats.org/drawingml/2006/main">
+            <a:r>
+              <a:t/>
+            </a:r>
+          </a:p>
+          <a:p xmlns:a="http://schemas.openxmlformats.org/drawingml/2006/main">
+            <a:r>
+              <a:t>2026-10-11 확인한 공식 문서 기준으로 같은 실시간 음성 대화 역할을 제공하지만 API/실행 제약은 다르다. 아래 GPT는 사용자가 지칭한 `gpt-realtime` 모델 기준이며 다른 GPT Realtime 모델의 제한으로 확대하지 않는다. 현재 공식 모델 페이지는 해당 모델을 Deprecated로 표시하므로 실제 제품 적용 권고가 아니라 요청한 기능 비교 기준으로만 쓴다.</a:t>
+            </a:r>
+          </a:p>
+          <a:p xmlns:a="http://schemas.openxmlformats.org/drawingml/2006/main">
+            <a:r>
+              <a:t/>
+            </a:r>
+          </a:p>
+          <a:p xmlns:a="http://schemas.openxmlformats.org/drawingml/2006/main">
+            <a:r>
+              <a:t>| 비교 항목 | Gemini 3.1 Flash Live Preview | OpenAI gpt-realtime | VIA에 주는 의미 |</a:t>
+            </a:r>
+          </a:p>
+          <a:p xmlns:a="http://schemas.openxmlformats.org/drawingml/2006/main">
+            <a:r>
+              <a:t>| --- | --- | --- | --- |</a:t>
+            </a:r>
+          </a:p>
+          <a:p xmlns:a="http://schemas.openxmlformats.org/drawingml/2006/main">
+            <a:r>
+              <a:t>| 실시간 음성 입출력, 입력/출력 전사, 발화 중 끼어들기 | 지원 | 지원 | 양쪽 모두 음성 역할의 reference가 될 수 있다. 실제 한국어 품질·지연·중단 시간 동등성은 입증하지 않음 |</a:t>
+            </a:r>
+          </a:p>
+          <a:p xmlns:a="http://schemas.openxmlformats.org/drawingml/2006/main">
+            <a:r>
+              <a:t>| 화면/멀티모달 입력 | Text·이미지·audio·video 입력 | Text·이미지·audio 입력, video 미지원 | GPT에서는 화면 snapshot의 이미지 입력과 video stream 지원을 구별 |</a:t>
+            </a:r>
+          </a:p>
+          <a:p xmlns:a="http://schemas.openxmlformats.org/drawingml/2006/main">
+            <a:r>
+              <a:t>| 함수 호출 | 동기만 지원, tool response 전 응답 대기 | 비동기 tool 흐름 지원 | 긴 Agent 실행을 Gemini Live tool response로 끝날 때까지 기다리게 하지 않음 |</a:t>
+            </a:r>
+          </a:p>
+          <a:p xmlns:a="http://schemas.openxmlformats.org/drawingml/2006/main">
+            <a:r>
+              <a:t>| 직접 연결 | Live API WebSocket | WebRTC / WebSocket / SIP | provider adapter·세션 재연결·audio queue/취소 이벤트를 별도로 구현/계산 |</a:t>
+            </a:r>
+          </a:p>
+          <a:p xmlns:a="http://schemas.openxmlformats.org/drawingml/2006/main">
+            <a:r>
+              <a:t>| structured output | 미지원 | 미지원 | 함수 인자 JSON과 schema 제약 출력 보장을 구별, 의미 모델의 frame 검증은 별도 |</a:t>
+            </a:r>
+          </a:p>
+          <a:p xmlns:a="http://schemas.openxmlformats.org/drawingml/2006/main">
+            <a:r>
+              <a:t/>
+            </a:r>
+          </a:p>
+          <a:p xmlns:a="http://schemas.openxmlformats.org/drawingml/2006/main">
+            <a:r>
+              <a:t>근거: [Gemini Live 모델/제약](https://ai.google.dev/gemini-api/docs/models/gemini-3.1-flash-live-preview), [Live 도구의 동기 제한](https://ai.google.dev/gemini-api/docs/live-api/tools), [Live API 연결](https://ai.google.dev/gemini-api/docs/live-api), [Live VAD/중단](https://ai.google.dev/gemini-api/docs/live-api/capabilities), [OpenAI gpt-realtime](https://developers.openai.com/api/docs/models/gpt-realtime), [Realtime 대화/중단](https://developers.openai.com/api/docs/guides/realtime-conversations), [Realtime 도구](https://developers.openai.com/api/docs/guides/realtime-mcp), [GPT Realtime 비동기 함수 호출 설명](https://developers.openai.com/blog/realtime-api).</a:t>
+            </a:r>
+          </a:p>
+          <a:p xmlns:a="http://schemas.openxmlformats.org/drawingml/2006/main">
+            <a:r>
+              <a:t/>
+            </a:r>
+          </a:p>
+          <a:p xmlns:a="http://schemas.openxmlformats.org/drawingml/2006/main">
+            <a:r>
+              <a:t>VIA는 요청/Task의 권위를 갖고 음성 모델의 임시 session과 구별한다. 긴 업무는 로컬 VIA가 외부 Agent에 비동기로 위임하고, 음성 모델에는 유효한 접수·질문·결과를 제시할 입력을 따로 전달하는 방향으로 reference를 해석한다. 이것은 긴 Agent 결과를 Live 동기 함수 응답으로 기다리는 것과 다르다. 실제 provider의 forced response, cancel, 재연결, 출력 내용 준수와 local playback stop은 adapter/API 검증에서 확인해야 한다. 현재 GPT Realtime reference에서도 local playback stop·새 사용자 요청·동시에 도착한 Agent 질문/결과의 우선순위는 VIA가 관리하고, pending tool의 결과가 없는 동안 완료를 추측해 말하지 못하도록 실제 상태를 전달한다. 이전 Gemini 3.1 검토의 proactive audio/affective dialogue 미지원과 `turn_complete=true`의 활성 generation 중단은 기능 비교의 제한으로 보존한다. 모델 이름만으로 연속 입력/여러 Task 처리 계약이 충족됐다고 하지 않는다.</a:t>
             </a:r>
           </a:p>
           <a:p xmlns:a="http://schemas.openxmlformats.org/drawingml/2006/main">
@@ -17527,7 +18667,7 @@
           </a:p>
           <a:p xmlns:a="http://schemas.openxmlformats.org/drawingml/2006/main">
             <a:r>
-              <a:t>원본 SHA-256: d25a503005403e71d5811d61f20d9c227479bfeb04808ba868ce06adc463e4f8</a:t>
+              <a:t>원본 SHA-256: 8520fa1bd1661f72bb87071ab03755964b0539565490994de845bbc086654cfd</a:t>
             </a:r>
           </a:p>
           <a:p xmlns:a="http://schemas.openxmlformats.org/drawingml/2006/main">
@@ -20673,6 +21813,291 @@
           <a:p xmlns:a="http://schemas.openxmlformats.org/drawingml/2006/main">
             <a:r>
               <a:t>묶음당 21개 시나리오는 사용자 19개 + Agent 단독 2개다. 집중 장면 안에는 Agent 사건 4개가 추가로 들어 있다. Voice 입력 50초와 출력 예산 179초, 반응 27개와 사용자 cycle 19개를 정의했다. 다섯 묶음 전체는 105개 시나리오·630조건·135반응·95cycle이다. 사용자의 하루 빈도를 뜻하지 않는다.</a:t>
+            </a:r>
+          </a:p>
+          <a:p xmlns:a="http://schemas.openxmlformats.org/drawingml/2006/main">
+            <a:r>
+              <a:t/>
+            </a:r>
+          </a:p>
+          <a:p xmlns:a="http://schemas.openxmlformats.org/drawingml/2006/main">
+            <a:r>
+              <a:t/>
+            </a:r>
+          </a:p>
+          <a:p xmlns:a="http://schemas.openxmlformats.org/drawingml/2006/main">
+            <a:r>
+              <a:t>모델 reference 상세 §8.4</a:t>
+            </a:r>
+          </a:p>
+          <a:p xmlns:a="http://schemas.openxmlformats.org/drawingml/2006/main">
+            <a:r>
+              <a:t> 장치와 모델 계산 reference — 2026-10-11 확인</a:t>
+            </a:r>
+          </a:p>
+          <a:p xmlns:a="http://schemas.openxmlformats.org/drawingml/2006/main">
+            <a:r>
+              <a:t/>
+            </a:r>
+          </a:p>
+          <a:p xmlns:a="http://schemas.openxmlformats.org/drawingml/2006/main">
+            <a:r>
+              <a:t>이 reference는 현재 개발 중인 모델/클라우드 서비스의 실제 가격이나 성능을 뜻하지 않는다. 같은 A/B 계산에 쓸 외부 공개 기준이다. 값은 USD, 모델 단가는 1,000,000 token당 표준 유료 요금이며 free tier/할인으로 0원을 만들지 않는다.</a:t>
+            </a:r>
+          </a:p>
+          <a:p xmlns:a="http://schemas.openxmlformats.org/drawingml/2006/main">
+            <a:r>
+              <a:t/>
+            </a:r>
+          </a:p>
+          <a:p xmlns:a="http://schemas.openxmlformats.org/drawingml/2006/main">
+            <a:r>
+              <a:t>| 용도 | 선택 reference / 값 | 출처와 적용 범위 |</a:t>
+            </a:r>
+          </a:p>
+          <a:p xmlns:a="http://schemas.openxmlformats.org/drawingml/2006/main">
+            <a:r>
+              <a:t>| --- | --- | --- |</a:t>
+            </a:r>
+          </a:p>
+          <a:p xmlns:a="http://schemas.openxmlformats.org/drawingml/2006/main">
+            <a:r>
+              <a:t>| Windows PC | **Galaxy Book6 Ultra NP960UJH-XG3IN**, Windows 11 Home, Core Ultra 7 356H, RAM 32GB LPDDR5X, RTX 5070 Laptop GPU 8GB, SSD 1TB | [삼성 공식 SKU 사양](https://www.samsung.com/in/computers/galaxy-book/galaxy-book6-ultra-ultra-7-32gb-1tb-np960ujh-xg3in/). RAM과 VRAM을 같은 자원으로 합치지 않음. 모델은 클라우드이므로 GPU 가중치 적재를 로컬 비용에 가산하지 않음 |</a:t>
+            </a:r>
+          </a:p>
+          <a:p xmlns:a="http://schemas.openxmlformats.org/drawingml/2006/main">
+            <a:r>
+              <a:t>| 의미 LLM의 비용 | **Qwen3-30B-A3B-Instruct-2507**, `qwen3-30b-a3b-instruct-2507`: Alibaba Cloud Model Studio **Singapore / International** 입력 **$0.20**, 출력 **$0.80** / 1M token, non-thinking | [공식 API 모델/단가](https://docs.modelstudio.console.alibabacloud.com/en/model-studio/qwen3-30b-a3b-instruct-2507), [Qwen 공식 모델 카드](https://huggingface.co/Qwen/Qwen3-30B-A3B-Instruct-2507). 약30B 전체/3B 활성 MoE, Text-to-Text. 사용자 승인한 PoC 의미 모델 기준이며 최종 제품 모델/DP 승자 선정은 아님. 같은 provider/region/revision/mode를 양안에 적용 |</a:t>
+            </a:r>
+          </a:p>
+          <a:p xmlns:a="http://schemas.openxmlformats.org/drawingml/2006/main">
+            <a:r>
+              <a:t>| 의미 LLM의 생성 속도 | **작성자 decode 가정 130 token/s**, 민감도 **100 / 130 / 160 token/s**, 기준 TTFT **0.30초** | [Qwen 공식 H20 benchmark](https://qwen.readthedocs.io/en/latest/getting_started/speed_benchmark.html)의 원본 계열 유효 출력률 약122.53~137.11(BF16) 등을 참고한 수치 규모의 가정. Instruct-2507 API의 공개 decode rate/보장/실측이 아니며 공개표에서 TTFT와 decode를 분리 추출한 값도 아님. 가격은 Alibaba API, 속도 근거는 별도 H20 환경임을 §8.4.1.2에 명시 |</a:t>
+            </a:r>
+          </a:p>
+          <a:p xmlns:a="http://schemas.openxmlformats.org/drawingml/2006/main">
+            <a:r>
+              <a:t>| 음성 비용/비동기 대화 기준 | **OpenAI GPT Realtime**, `gpt-realtime` (`gpt-realtime-2025-08-28`): audio 입력 **$32**, 출력 **$64** / 1M token. Text 입력 **$4**, 출력 **$16** / 1M token. cached audio/Text 입력 **$0.40** / 1M token | [공식 모델/단가](https://developers.openai.com/api/docs/models/gpt-realtime), [Realtime 청구](https://developers.openai.com/api/docs/guides/voice-latency-cost), [비동기 함수 호출](https://developers.openai.com/blog/realtime-api). 사용자 입력 약10 audio token/s, assistant 생성 약20 audio token/s로 신규 audio는 **$0.0192/분 입력, $0.0768/분 출력**으로 환산. 특수 token·이력 재입력·Text·폐기 생성은 별도. 공식 페이지의 Deprecated 상태와 관계없이 사용자가 지정한 날짜별 PoC 비용/기능 reference를 고정하며 실서비스의 신규 채택을 뜻하지 않음 |</a:t>
+            </a:r>
+          </a:p>
+          <a:p xmlns:a="http://schemas.openxmlformats.org/drawingml/2006/main">
+            <a:r>
+              <a:t>| 시간 목표의 사용자 근거 | 즉각 제어 **0.1초**, 대화 흐름 **1초**, 주의 유지 **10초**의 상호작용 참조 | [Nielsen Norman Group 원문](https://www.nngroup.com/articles/website-response-times/). VIA의 평균/모집단/추가 지연 예산은 작성자가 선택하며 문헌이 VIA의 평균 목표를 직접 규정했다고 하지 않음 |</a:t>
+            </a:r>
+          </a:p>
+          <a:p xmlns:a="http://schemas.openxmlformats.org/drawingml/2006/main">
+            <a:r>
+              <a:t/>
+            </a:r>
+          </a:p>
+          <a:p xmlns:a="http://schemas.openxmlformats.org/drawingml/2006/main">
+            <a:r>
+              <a:t>음성 비용은 실제로 보내거나 청구되는 audio/context의 양을 사용한다. VAD가 앞단에 있다는 사실만으로 silence/context 재사용 청구가 0이라고 가정하지 않는다. Text prompt/context, 재시도, 취소 불가인 폐기 출력과 미사용 배경 생산도 포함한다. 같은 사용량을 token 요금과 분 요금으로 이중 계산하지 않는다. 모델 제공자가 사용량을 반환한 실측은 그 사용량을 우선하고, 공개 reference 계산은 음성 길이 기반의 근사임을 남긴다.</a:t>
+            </a:r>
+          </a:p>
+          <a:p xmlns:a="http://schemas.openxmlformats.org/drawingml/2006/main">
+            <a:r>
+              <a:t/>
+            </a:r>
+          </a:p>
+          <a:p xmlns:a="http://schemas.openxmlformats.org/drawingml/2006/main">
+            <a:r>
+              <a:t>검산 예시: 의미 호출의 입력 2,000 token/청구 출력 200 token은 `2,000×0.20/1M + 200×0.80/1M = $0.00056`, 작성자 decode 가정의 생성 부분은 `200/130 ≈ 1.538초`다. Instruct-2507은 non-thinking이며 출력200은 실제 답변/frame/tool 출력의 청구 예산이다. 원천/의미/도구 오류의 추가 질문·재시도·폐기 출력을 모두 포함하고 provider별 tokenizer의 실제 사용량을 우선한다. GPT Realtime 신규 audio 입력 1분/출력 1분은 `600×32/1M + 1,200×64/1M = $0.096`이며 Text와 이력 audio 재입력 청구는 별도다. 응답마다 이전 대화가 입력으로 재사용되므로 실제 `response.done`의 modality별 input/output/cached token을 호출 ID로 중복 제거해 합산한다. 초기 2,000turn을 음성 session에 전부 보내도록 강제하지 않으며 실제 보낸 이력·요약·instruction은 청구한다. 별도 input transcription을 켜면 해당 모델 청구도 더한다. 생성 부분 약1.538초를 첫 출력/입력 처리/통신/queue가 포함된 호출 완료 시간으로 쓰지 않는다. Qwen의 기본 예산에는 할인 없는 입력/출력 단가를 사용한다. 실제 cache 할인이나 별도 저장/도구 청구가 있으면 제공사가 확인한 사용량·단가로 원장에 반영하며 Gemini의 cache 단가를 Qwen에 적용하지 않는다.</a:t>
+            </a:r>
+          </a:p>
+          <a:p xmlns:a="http://schemas.openxmlformats.org/drawingml/2006/main">
+            <a:r>
+              <a:t/>
+            </a:r>
+          </a:p>
+          <a:p xmlns:a="http://schemas.openxmlformats.org/drawingml/2006/main">
+            <a:r>
+              <a:t/>
+            </a:r>
+          </a:p>
+          <a:p xmlns:a="http://schemas.openxmlformats.org/drawingml/2006/main">
+            <a:r>
+              <a:t>### 8.4.1 선택한 모델 역할과 입력 범위</a:t>
+            </a:r>
+          </a:p>
+          <a:p xmlns:a="http://schemas.openxmlformats.org/drawingml/2006/main">
+            <a:r>
+              <a:t/>
+            </a:r>
+          </a:p>
+          <a:p xmlns:a="http://schemas.openxmlformats.org/drawingml/2006/main">
+            <a:r>
+              <a:t>사용자는 **Qwen3-30B-A3B 계열 + GPT Realtime**을 이번 PoC의 모델 reference로 지정했다. 비용/API revision은 앞서 가격을 확인한 **Qwen3-30B-A3B-Instruct-2507**로 고정한다. 원본 `qwen3-30b-a3b`나 Thinking-2507/VL 모델과 혼용하지 않는다. 의미 해석·bounded read 판단·41B의 frame 생성에는 Qwen을, 실시간 음성 입출력/대화 지속에는 GPT Realtime을 사용한다. 외부 업무를 VIA에 맡긴 뒤에도 pending 함수 호출 중 대화를 계속한다. VIA가 외부 Agent의 실행/현재 Task/승인/질문/결과 연결의 권위를 유지하며 GPT Realtime의 tool pending을 실제 업무 완료로 해석하지 않는다. 양안은 같은 역할별 모델/설정/입출력 계약을 사용한다.</a:t>
+            </a:r>
+          </a:p>
+          <a:p xmlns:a="http://schemas.openxmlformats.org/drawingml/2006/main">
+            <a:r>
+              <a:t/>
+            </a:r>
+          </a:p>
+          <a:p xmlns:a="http://schemas.openxmlformats.org/drawingml/2006/main">
+            <a:r>
+              <a:t>Qwen은 Text-to-Text 모델이다. P21의 S2-01 등은 이미 원천 observation으로 표 내용/version·관측시각·포인터 이력을 제공하므로, 그 **원천 사실과 span을 공통 text 입력으로 직렬화**한다. 최종 A/B 지칭, Task 연결, revision 선택, 의존 관계 또는 채점 정답을 adapter가 미리 채우지 않는다. 조회하지 않은 원천 내용·권한 없는 내용도 자동으로 넣지 않는다. 소스 원문/구조 정보는 그대로 공급하고, 의미 결합은 각 방안이 생산한다. 원본 화면 frame은 시간/보관/메모리 원장에 유지한다. 이는 픽셀만으로 임의 앱 화면을 인식하는 완성 제품 평가가 아니라 정의된 PoC 원천 자료를 사용하는 범위다. 추가 vision/OCR 모델을 현재 예산에 숨겨 넣지 않는다. 실제 픽셀 인식이 필요해지면 공통 관측 adapter의 추가 모델·비용·지연·권한·손실을 동일하게 명시하고 계약을 개정한다.</a:t>
+            </a:r>
+          </a:p>
+          <a:p xmlns:a="http://schemas.openxmlformats.org/drawingml/2006/main">
+            <a:r>
+              <a:t/>
+            </a:r>
+          </a:p>
+          <a:p xmlns:a="http://schemas.openxmlformats.org/drawingml/2006/main">
+            <a:r>
+              <a:t>Qwen frame/tool 출력은 구문·허용 schema·ID/revision·현재성 검사를 거친다. 모델 이름만으로 JSON/함수 호출이 항상 맞거나 provider가 엄격한 schema decoding을 보장한다고 가정하지 않는다. 잘못된 출력의 재시도와 판단 유보는 같은 사례/실패/청구 원장에 포함한다. GPT Realtime의 structured output 미지원 때문에 음성 모델을 41B의 의미 frame 생산자로 대신 쓰지 않는다. 비용/기능 reference의 지정은 제품 모델 채택, Architecture 대안 선택이나 정확성 측정의 완료가 아니다.</a:t>
+            </a:r>
+          </a:p>
+          <a:p xmlns:a="http://schemas.openxmlformats.org/drawingml/2006/main">
+            <a:r>
+              <a:t/>
+            </a:r>
+          </a:p>
+          <a:p xmlns:a="http://schemas.openxmlformats.org/drawingml/2006/main">
+            <a:r>
+              <a:t>### 8.4.1.1 이전 Gemini 선택 이유와 변경 이력</a:t>
+            </a:r>
+          </a:p>
+          <a:p xmlns:a="http://schemas.openxmlformats.org/drawingml/2006/main">
+            <a:r>
+              <a:t/>
+            </a:r>
+          </a:p>
+          <a:p xmlns:a="http://schemas.openxmlformats.org/drawingml/2006/main">
+            <a:r>
+              <a:t>Gemini 3 Flash Preview의 공개 출시일은 **2025-12-17**이다([Google 출시 공지](https://blog.google/products-and-platforms/products/gemini/gemini-3-flash/)). 이전 선택은 공식 단가와 이미지 입력·함수 호출·structured output을 가진 reference의 편의에 따른 것이며 VIA 우월성이나 Qwen 30B와의 동등성 검증이 아니었다. 이후 정확한 Qwen API 단가를 확인했고 사용자가 Qwen/GPT 조합을 지정했으므로 **Gemini는 현행 의미/비용/속도 기준에서 제외**한다. 같은 124k/12.4k token 예산의 이전 Gemini 의미 비용 $0.09920과 현재 Qwen $0.03472의 차이 $0.06448는 단가 민감도이며 실제 호출/정확성/출력 동등성의 증거가 아니다. 기존 200 token/s와 Gemini cache 요금은 [변경 전 보존본](../../../archive/qa-semantic-reference-before-qwen-20261011/README.md)에 남겼다.</a:t>
+            </a:r>
+          </a:p>
+          <a:p xmlns:a="http://schemas.openxmlformats.org/drawingml/2006/main">
+            <a:r>
+              <a:t/>
+            </a:r>
+          </a:p>
+          <a:p xmlns:a="http://schemas.openxmlformats.org/drawingml/2006/main">
+            <a:r>
+              <a:t>### 8.4.1.2 Groq 밖의 속도 근거와 산식</a:t>
+            </a:r>
+          </a:p>
+          <a:p xmlns:a="http://schemas.openxmlformats.org/drawingml/2006/main">
+            <a:r>
+              <a:t/>
+            </a:r>
+          </a:p>
+          <a:p xmlns:a="http://schemas.openxmlformats.org/drawingml/2006/main">
+            <a:r>
+              <a:t>[Qwen 공식 속도 benchmark](https://qwen.readthedocs.io/en/latest/getting_started/speed_benchmark.html)는 **Qwen3-30B-A3B**를 NVIDIA **H20 96GB 1장**, SGLang **0.4.6.post1**, PyTorch **2.6.0+cu124**, batch **1**, 출력 **2,048 token**으로 평가했다. 입력1 token에서 BF16 **137.18**, FP8 **155.55 token/s**다. 입력6,144 token에서는 BF16 **490.10**, FP8 **551.34**다. 단, 공식 분자는 **입력+출력 token**, 분모는 전체 처리시간이다. 입력6,144의 490.10을 출력 생성률로 쓰지 않는다.</a:t>
+            </a:r>
+          </a:p>
+          <a:p xmlns:a="http://schemas.openxmlformats.org/drawingml/2006/main">
+            <a:r>
+              <a:t/>
+            </a:r>
+          </a:p>
+          <a:p xmlns:a="http://schemas.openxmlformats.org/drawingml/2006/main">
+            <a:r>
+              <a:t>BF16 입력1 조건의 전체 시간은 `2,049/137.18 ≈ 14.94초`, 입력6,144 조건은 `8,192/490.10 ≈ 16.72초`로 복원할 수 있다. 출력/전체시간으로 다시 표현하면 각각 **137.11**과 **122.53 output token/s**이며 이는 prefill까지 포함한 해당 길이의 유효 출력률이다. 이것을 TTFT와 분리된 decode rate로 두고 TTFT를 다시 더하면 입력 처리 시간이 이중 계상된다. 원본 Qwen3 benchmark를 Instruct-2507의 실측 또는 Alibaba Singapore API의 속도로 주장하지 않는다. 서버 측 H20 reference이므로 Windows 노트북의 속도/메모리에도 이전하지 않는다.</a:t>
+            </a:r>
+          </a:p>
+          <a:p xmlns:a="http://schemas.openxmlformats.org/drawingml/2006/main">
+            <a:r>
+              <a:t/>
+            </a:r>
+          </a:p>
+          <a:p xmlns:a="http://schemas.openxmlformats.org/drawingml/2006/main">
+            <a:r>
+              <a:t>따라서 공식 수치 기반의 계산은 **공개된 동일 길이/환경의 전체 처리시간**을 쓰거나, 별도로 검증된 decode rate와 TTFT를 분리해야 한다. 현재는 원본 계열 BF16 유효 출력률 약122.53~137.11과 FP8 입력1 약155.47을 수치 규모의 참고로 삼아 **130 token/s의 독립적인 PoC decode 가정**과 **100/130/160 민감도**를 정했다. 기준 TTFT0.30초, 빠른0.15초, 느린0.80초와 음성 시작0.10/0.25/0.60초도 별도 작성자 가정이다. 이들을 공개표에서 분리 측정한 TTFT/decode로 주장하지 않는다. 특히 2,048 출력의 유효 출력률을 2,000입력/200출력에 보장된 rate로 이전하지 않는다. API 배포의 TTFT/생성률이 있으면 두 가정을 실제 측정으로 함께 교체하고, 공개 benchmark 자체를 재현 계산할 때는 전체시간만 써서 prefill을 중복 계상하지 않는다. API 가격 reference와 별도 H20 속도 reference를 함께 사용하는 경우 비용/속도가 같은 서비스에서 측정됐다는 주장도 하지 않는다.</a:t>
+            </a:r>
+          </a:p>
+          <a:p xmlns:a="http://schemas.openxmlformats.org/drawingml/2006/main">
+            <a:r>
+              <a:t/>
+            </a:r>
+          </a:p>
+          <a:p xmlns:a="http://schemas.openxmlformats.org/drawingml/2006/main">
+            <a:r>
+              <a:t>기존의 **450+ token/s**는 [Groq의 `qwen/qwen3.8-27b` 모델 페이지](https://console.groq.com/docs/model/qwen/qwen3.8-27b)의 제공사 표시값이다. [GroqCloud는 전용 LPU 추론 인프라](https://groq.com/blog/the-groq-lpu-explained)를 사용한다. 이는 Qwen3-30B-A3B-Instruct-2507, NVIDIA GPU 또는 Windows PC의 숫자가 아니다. 해당 450 수치의 LPU 수/세대, precision, prompt/output 길이, 동시 요청 수와 상세 계측 경계는 페이지에 공개되어 있지 않으므로 가정으로 채우지 않는다. Groq은 현행 비용/속도 reference에서 제외하며 이 문단은 이전 근거의 의미를 설명하기 위한 provenance다.</a:t>
+            </a:r>
+          </a:p>
+          <a:p xmlns:a="http://schemas.openxmlformats.org/drawingml/2006/main">
+            <a:r>
+              <a:t/>
+            </a:r>
+          </a:p>
+          <a:p xmlns:a="http://schemas.openxmlformats.org/drawingml/2006/main">
+            <a:r>
+              <a:t>### 8.4.2 Gemini Live와 GPT Realtime의 기능 비교</a:t>
+            </a:r>
+          </a:p>
+          <a:p xmlns:a="http://schemas.openxmlformats.org/drawingml/2006/main">
+            <a:r>
+              <a:t/>
+            </a:r>
+          </a:p>
+          <a:p xmlns:a="http://schemas.openxmlformats.org/drawingml/2006/main">
+            <a:r>
+              <a:t>2026-10-11 확인한 공식 문서 기준으로 같은 실시간 음성 대화 역할을 제공하지만 API/실행 제약은 다르다. 아래 GPT는 사용자가 지칭한 `gpt-realtime` 모델 기준이며 다른 GPT Realtime 모델의 제한으로 확대하지 않는다. 현재 공식 모델 페이지는 해당 모델을 Deprecated로 표시하므로 실제 제품 적용 권고가 아니라 요청한 기능 비교 기준으로만 쓴다.</a:t>
+            </a:r>
+          </a:p>
+          <a:p xmlns:a="http://schemas.openxmlformats.org/drawingml/2006/main">
+            <a:r>
+              <a:t/>
+            </a:r>
+          </a:p>
+          <a:p xmlns:a="http://schemas.openxmlformats.org/drawingml/2006/main">
+            <a:r>
+              <a:t>| 비교 항목 | Gemini 3.1 Flash Live Preview | OpenAI gpt-realtime | VIA에 주는 의미 |</a:t>
+            </a:r>
+          </a:p>
+          <a:p xmlns:a="http://schemas.openxmlformats.org/drawingml/2006/main">
+            <a:r>
+              <a:t>| --- | --- | --- | --- |</a:t>
+            </a:r>
+          </a:p>
+          <a:p xmlns:a="http://schemas.openxmlformats.org/drawingml/2006/main">
+            <a:r>
+              <a:t>| 실시간 음성 입출력, 입력/출력 전사, 발화 중 끼어들기 | 지원 | 지원 | 양쪽 모두 음성 역할의 reference가 될 수 있다. 실제 한국어 품질·지연·중단 시간 동등성은 입증하지 않음 |</a:t>
+            </a:r>
+          </a:p>
+          <a:p xmlns:a="http://schemas.openxmlformats.org/drawingml/2006/main">
+            <a:r>
+              <a:t>| 화면/멀티모달 입력 | Text·이미지·audio·video 입력 | Text·이미지·audio 입력, video 미지원 | GPT에서는 화면 snapshot의 이미지 입력과 video stream 지원을 구별 |</a:t>
+            </a:r>
+          </a:p>
+          <a:p xmlns:a="http://schemas.openxmlformats.org/drawingml/2006/main">
+            <a:r>
+              <a:t>| 함수 호출 | 동기만 지원, tool response 전 응답 대기 | 비동기 tool 흐름 지원 | 긴 Agent 실행을 Gemini Live tool response로 끝날 때까지 기다리게 하지 않음 |</a:t>
+            </a:r>
+          </a:p>
+          <a:p xmlns:a="http://schemas.openxmlformats.org/drawingml/2006/main">
+            <a:r>
+              <a:t>| 직접 연결 | Live API WebSocket | WebRTC / WebSocket / SIP | provider adapter·세션 재연결·audio queue/취소 이벤트를 별도로 구현/계산 |</a:t>
+            </a:r>
+          </a:p>
+          <a:p xmlns:a="http://schemas.openxmlformats.org/drawingml/2006/main">
+            <a:r>
+              <a:t>| structured output | 미지원 | 미지원 | 함수 인자 JSON과 schema 제약 출력 보장을 구별, 의미 모델의 frame 검증은 별도 |</a:t>
+            </a:r>
+          </a:p>
+          <a:p xmlns:a="http://schemas.openxmlformats.org/drawingml/2006/main">
+            <a:r>
+              <a:t/>
+            </a:r>
+          </a:p>
+          <a:p xmlns:a="http://schemas.openxmlformats.org/drawingml/2006/main">
+            <a:r>
+              <a:t>근거: [Gemini Live 모델/제약](https://ai.google.dev/gemini-api/docs/models/gemini-3.1-flash-live-preview), [Live 도구의 동기 제한](https://ai.google.dev/gemini-api/docs/live-api/tools), [Live API 연결](https://ai.google.dev/gemini-api/docs/live-api), [Live VAD/중단](https://ai.google.dev/gemini-api/docs/live-api/capabilities), [OpenAI gpt-realtime](https://developers.openai.com/api/docs/models/gpt-realtime), [Realtime 대화/중단](https://developers.openai.com/api/docs/guides/realtime-conversations), [Realtime 도구](https://developers.openai.com/api/docs/guides/realtime-mcp), [GPT Realtime 비동기 함수 호출 설명](https://developers.openai.com/blog/realtime-api).</a:t>
+            </a:r>
+          </a:p>
+          <a:p xmlns:a="http://schemas.openxmlformats.org/drawingml/2006/main">
+            <a:r>
+              <a:t/>
+            </a:r>
+          </a:p>
+          <a:p xmlns:a="http://schemas.openxmlformats.org/drawingml/2006/main">
+            <a:r>
+              <a:t>VIA는 요청/Task의 권위를 갖고 음성 모델의 임시 session과 구별한다. 긴 업무는 로컬 VIA가 외부 Agent에 비동기로 위임하고, 음성 모델에는 유효한 접수·질문·결과를 제시할 입력을 따로 전달하는 방향으로 reference를 해석한다. 이것은 긴 Agent 결과를 Live 동기 함수 응답으로 기다리는 것과 다르다. 실제 provider의 forced response, cancel, 재연결, 출력 내용 준수와 local playback stop은 adapter/API 검증에서 확인해야 한다. 현재 GPT Realtime reference에서도 local playback stop·새 사용자 요청·동시에 도착한 Agent 질문/결과의 우선순위는 VIA가 관리하고, pending tool의 결과가 없는 동안 완료를 추측해 말하지 못하도록 실제 상태를 전달한다. 이전 Gemini 3.1 검토의 proactive audio/affective dialogue 미지원과 `turn_complete=true`의 활성 generation 중단은 기능 비교의 제한으로 보존한다. 모델 이름만으로 연속 입력/여러 Task 처리 계약이 충족됐다고 하지 않는다.</a:t>
             </a:r>
           </a:p>
           <a:p xmlns:a="http://schemas.openxmlformats.org/drawingml/2006/main">
@@ -20787,7 +22212,7 @@
           </a:p>
           <a:p xmlns:a="http://schemas.openxmlformats.org/drawingml/2006/main">
             <a:r>
-              <a:t>원본 SHA-256: d25a503005403e71d5811d61f20d9c227479bfeb04808ba868ce06adc463e4f8</a:t>
+              <a:t>원본 SHA-256: 8520fa1bd1661f72bb87071ab03755964b0539565490994de845bbc086654cfd</a:t>
             </a:r>
           </a:p>
           <a:p xmlns:a="http://schemas.openxmlformats.org/drawingml/2006/main">
@@ -23933,6 +25358,291 @@
           <a:p xmlns:a="http://schemas.openxmlformats.org/drawingml/2006/main">
             <a:r>
               <a:t>묶음당 21개 시나리오는 사용자 19개 + Agent 단독 2개다. 집중 장면 안에는 Agent 사건 4개가 추가로 들어 있다. Voice 입력 50초와 출력 예산 179초, 반응 27개와 사용자 cycle 19개를 정의했다. 다섯 묶음 전체는 105개 시나리오·630조건·135반응·95cycle이다. 사용자의 하루 빈도를 뜻하지 않는다.</a:t>
+            </a:r>
+          </a:p>
+          <a:p xmlns:a="http://schemas.openxmlformats.org/drawingml/2006/main">
+            <a:r>
+              <a:t/>
+            </a:r>
+          </a:p>
+          <a:p xmlns:a="http://schemas.openxmlformats.org/drawingml/2006/main">
+            <a:r>
+              <a:t/>
+            </a:r>
+          </a:p>
+          <a:p xmlns:a="http://schemas.openxmlformats.org/drawingml/2006/main">
+            <a:r>
+              <a:t>모델 reference 상세 §8.4</a:t>
+            </a:r>
+          </a:p>
+          <a:p xmlns:a="http://schemas.openxmlformats.org/drawingml/2006/main">
+            <a:r>
+              <a:t> 장치와 모델 계산 reference — 2026-10-11 확인</a:t>
+            </a:r>
+          </a:p>
+          <a:p xmlns:a="http://schemas.openxmlformats.org/drawingml/2006/main">
+            <a:r>
+              <a:t/>
+            </a:r>
+          </a:p>
+          <a:p xmlns:a="http://schemas.openxmlformats.org/drawingml/2006/main">
+            <a:r>
+              <a:t>이 reference는 현재 개발 중인 모델/클라우드 서비스의 실제 가격이나 성능을 뜻하지 않는다. 같은 A/B 계산에 쓸 외부 공개 기준이다. 값은 USD, 모델 단가는 1,000,000 token당 표준 유료 요금이며 free tier/할인으로 0원을 만들지 않는다.</a:t>
+            </a:r>
+          </a:p>
+          <a:p xmlns:a="http://schemas.openxmlformats.org/drawingml/2006/main">
+            <a:r>
+              <a:t/>
+            </a:r>
+          </a:p>
+          <a:p xmlns:a="http://schemas.openxmlformats.org/drawingml/2006/main">
+            <a:r>
+              <a:t>| 용도 | 선택 reference / 값 | 출처와 적용 범위 |</a:t>
+            </a:r>
+          </a:p>
+          <a:p xmlns:a="http://schemas.openxmlformats.org/drawingml/2006/main">
+            <a:r>
+              <a:t>| --- | --- | --- |</a:t>
+            </a:r>
+          </a:p>
+          <a:p xmlns:a="http://schemas.openxmlformats.org/drawingml/2006/main">
+            <a:r>
+              <a:t>| Windows PC | **Galaxy Book6 Ultra NP960UJH-XG3IN**, Windows 11 Home, Core Ultra 7 356H, RAM 32GB LPDDR5X, RTX 5070 Laptop GPU 8GB, SSD 1TB | [삼성 공식 SKU 사양](https://www.samsung.com/in/computers/galaxy-book/galaxy-book6-ultra-ultra-7-32gb-1tb-np960ujh-xg3in/). RAM과 VRAM을 같은 자원으로 합치지 않음. 모델은 클라우드이므로 GPU 가중치 적재를 로컬 비용에 가산하지 않음 |</a:t>
+            </a:r>
+          </a:p>
+          <a:p xmlns:a="http://schemas.openxmlformats.org/drawingml/2006/main">
+            <a:r>
+              <a:t>| 의미 LLM의 비용 | **Qwen3-30B-A3B-Instruct-2507**, `qwen3-30b-a3b-instruct-2507`: Alibaba Cloud Model Studio **Singapore / International** 입력 **$0.20**, 출력 **$0.80** / 1M token, non-thinking | [공식 API 모델/단가](https://docs.modelstudio.console.alibabacloud.com/en/model-studio/qwen3-30b-a3b-instruct-2507), [Qwen 공식 모델 카드](https://huggingface.co/Qwen/Qwen3-30B-A3B-Instruct-2507). 약30B 전체/3B 활성 MoE, Text-to-Text. 사용자 승인한 PoC 의미 모델 기준이며 최종 제품 모델/DP 승자 선정은 아님. 같은 provider/region/revision/mode를 양안에 적용 |</a:t>
+            </a:r>
+          </a:p>
+          <a:p xmlns:a="http://schemas.openxmlformats.org/drawingml/2006/main">
+            <a:r>
+              <a:t>| 의미 LLM의 생성 속도 | **작성자 decode 가정 130 token/s**, 민감도 **100 / 130 / 160 token/s**, 기준 TTFT **0.30초** | [Qwen 공식 H20 benchmark](https://qwen.readthedocs.io/en/latest/getting_started/speed_benchmark.html)의 원본 계열 유효 출력률 약122.53~137.11(BF16) 등을 참고한 수치 규모의 가정. Instruct-2507 API의 공개 decode rate/보장/실측이 아니며 공개표에서 TTFT와 decode를 분리 추출한 값도 아님. 가격은 Alibaba API, 속도 근거는 별도 H20 환경임을 §8.4.1.2에 명시 |</a:t>
+            </a:r>
+          </a:p>
+          <a:p xmlns:a="http://schemas.openxmlformats.org/drawingml/2006/main">
+            <a:r>
+              <a:t>| 음성 비용/비동기 대화 기준 | **OpenAI GPT Realtime**, `gpt-realtime` (`gpt-realtime-2025-08-28`): audio 입력 **$32**, 출력 **$64** / 1M token. Text 입력 **$4**, 출력 **$16** / 1M token. cached audio/Text 입력 **$0.40** / 1M token | [공식 모델/단가](https://developers.openai.com/api/docs/models/gpt-realtime), [Realtime 청구](https://developers.openai.com/api/docs/guides/voice-latency-cost), [비동기 함수 호출](https://developers.openai.com/blog/realtime-api). 사용자 입력 약10 audio token/s, assistant 생성 약20 audio token/s로 신규 audio는 **$0.0192/분 입력, $0.0768/분 출력**으로 환산. 특수 token·이력 재입력·Text·폐기 생성은 별도. 공식 페이지의 Deprecated 상태와 관계없이 사용자가 지정한 날짜별 PoC 비용/기능 reference를 고정하며 실서비스의 신규 채택을 뜻하지 않음 |</a:t>
+            </a:r>
+          </a:p>
+          <a:p xmlns:a="http://schemas.openxmlformats.org/drawingml/2006/main">
+            <a:r>
+              <a:t>| 시간 목표의 사용자 근거 | 즉각 제어 **0.1초**, 대화 흐름 **1초**, 주의 유지 **10초**의 상호작용 참조 | [Nielsen Norman Group 원문](https://www.nngroup.com/articles/website-response-times/). VIA의 평균/모집단/추가 지연 예산은 작성자가 선택하며 문헌이 VIA의 평균 목표를 직접 규정했다고 하지 않음 |</a:t>
+            </a:r>
+          </a:p>
+          <a:p xmlns:a="http://schemas.openxmlformats.org/drawingml/2006/main">
+            <a:r>
+              <a:t/>
+            </a:r>
+          </a:p>
+          <a:p xmlns:a="http://schemas.openxmlformats.org/drawingml/2006/main">
+            <a:r>
+              <a:t>음성 비용은 실제로 보내거나 청구되는 audio/context의 양을 사용한다. VAD가 앞단에 있다는 사실만으로 silence/context 재사용 청구가 0이라고 가정하지 않는다. Text prompt/context, 재시도, 취소 불가인 폐기 출력과 미사용 배경 생산도 포함한다. 같은 사용량을 token 요금과 분 요금으로 이중 계산하지 않는다. 모델 제공자가 사용량을 반환한 실측은 그 사용량을 우선하고, 공개 reference 계산은 음성 길이 기반의 근사임을 남긴다.</a:t>
+            </a:r>
+          </a:p>
+          <a:p xmlns:a="http://schemas.openxmlformats.org/drawingml/2006/main">
+            <a:r>
+              <a:t/>
+            </a:r>
+          </a:p>
+          <a:p xmlns:a="http://schemas.openxmlformats.org/drawingml/2006/main">
+            <a:r>
+              <a:t>검산 예시: 의미 호출의 입력 2,000 token/청구 출력 200 token은 `2,000×0.20/1M + 200×0.80/1M = $0.00056`, 작성자 decode 가정의 생성 부분은 `200/130 ≈ 1.538초`다. Instruct-2507은 non-thinking이며 출력200은 실제 답변/frame/tool 출력의 청구 예산이다. 원천/의미/도구 오류의 추가 질문·재시도·폐기 출력을 모두 포함하고 provider별 tokenizer의 실제 사용량을 우선한다. GPT Realtime 신규 audio 입력 1분/출력 1분은 `600×32/1M + 1,200×64/1M = $0.096`이며 Text와 이력 audio 재입력 청구는 별도다. 응답마다 이전 대화가 입력으로 재사용되므로 실제 `response.done`의 modality별 input/output/cached token을 호출 ID로 중복 제거해 합산한다. 초기 2,000turn을 음성 session에 전부 보내도록 강제하지 않으며 실제 보낸 이력·요약·instruction은 청구한다. 별도 input transcription을 켜면 해당 모델 청구도 더한다. 생성 부분 약1.538초를 첫 출력/입력 처리/통신/queue가 포함된 호출 완료 시간으로 쓰지 않는다. Qwen의 기본 예산에는 할인 없는 입력/출력 단가를 사용한다. 실제 cache 할인이나 별도 저장/도구 청구가 있으면 제공사가 확인한 사용량·단가로 원장에 반영하며 Gemini의 cache 단가를 Qwen에 적용하지 않는다.</a:t>
+            </a:r>
+          </a:p>
+          <a:p xmlns:a="http://schemas.openxmlformats.org/drawingml/2006/main">
+            <a:r>
+              <a:t/>
+            </a:r>
+          </a:p>
+          <a:p xmlns:a="http://schemas.openxmlformats.org/drawingml/2006/main">
+            <a:r>
+              <a:t/>
+            </a:r>
+          </a:p>
+          <a:p xmlns:a="http://schemas.openxmlformats.org/drawingml/2006/main">
+            <a:r>
+              <a:t>### 8.4.1 선택한 모델 역할과 입력 범위</a:t>
+            </a:r>
+          </a:p>
+          <a:p xmlns:a="http://schemas.openxmlformats.org/drawingml/2006/main">
+            <a:r>
+              <a:t/>
+            </a:r>
+          </a:p>
+          <a:p xmlns:a="http://schemas.openxmlformats.org/drawingml/2006/main">
+            <a:r>
+              <a:t>사용자는 **Qwen3-30B-A3B 계열 + GPT Realtime**을 이번 PoC의 모델 reference로 지정했다. 비용/API revision은 앞서 가격을 확인한 **Qwen3-30B-A3B-Instruct-2507**로 고정한다. 원본 `qwen3-30b-a3b`나 Thinking-2507/VL 모델과 혼용하지 않는다. 의미 해석·bounded read 판단·41B의 frame 생성에는 Qwen을, 실시간 음성 입출력/대화 지속에는 GPT Realtime을 사용한다. 외부 업무를 VIA에 맡긴 뒤에도 pending 함수 호출 중 대화를 계속한다. VIA가 외부 Agent의 실행/현재 Task/승인/질문/결과 연결의 권위를 유지하며 GPT Realtime의 tool pending을 실제 업무 완료로 해석하지 않는다. 양안은 같은 역할별 모델/설정/입출력 계약을 사용한다.</a:t>
+            </a:r>
+          </a:p>
+          <a:p xmlns:a="http://schemas.openxmlformats.org/drawingml/2006/main">
+            <a:r>
+              <a:t/>
+            </a:r>
+          </a:p>
+          <a:p xmlns:a="http://schemas.openxmlformats.org/drawingml/2006/main">
+            <a:r>
+              <a:t>Qwen은 Text-to-Text 모델이다. P21의 S2-01 등은 이미 원천 observation으로 표 내용/version·관측시각·포인터 이력을 제공하므로, 그 **원천 사실과 span을 공통 text 입력으로 직렬화**한다. 최종 A/B 지칭, Task 연결, revision 선택, 의존 관계 또는 채점 정답을 adapter가 미리 채우지 않는다. 조회하지 않은 원천 내용·권한 없는 내용도 자동으로 넣지 않는다. 소스 원문/구조 정보는 그대로 공급하고, 의미 결합은 각 방안이 생산한다. 원본 화면 frame은 시간/보관/메모리 원장에 유지한다. 이는 픽셀만으로 임의 앱 화면을 인식하는 완성 제품 평가가 아니라 정의된 PoC 원천 자료를 사용하는 범위다. 추가 vision/OCR 모델을 현재 예산에 숨겨 넣지 않는다. 실제 픽셀 인식이 필요해지면 공통 관측 adapter의 추가 모델·비용·지연·권한·손실을 동일하게 명시하고 계약을 개정한다.</a:t>
+            </a:r>
+          </a:p>
+          <a:p xmlns:a="http://schemas.openxmlformats.org/drawingml/2006/main">
+            <a:r>
+              <a:t/>
+            </a:r>
+          </a:p>
+          <a:p xmlns:a="http://schemas.openxmlformats.org/drawingml/2006/main">
+            <a:r>
+              <a:t>Qwen frame/tool 출력은 구문·허용 schema·ID/revision·현재성 검사를 거친다. 모델 이름만으로 JSON/함수 호출이 항상 맞거나 provider가 엄격한 schema decoding을 보장한다고 가정하지 않는다. 잘못된 출력의 재시도와 판단 유보는 같은 사례/실패/청구 원장에 포함한다. GPT Realtime의 structured output 미지원 때문에 음성 모델을 41B의 의미 frame 생산자로 대신 쓰지 않는다. 비용/기능 reference의 지정은 제품 모델 채택, Architecture 대안 선택이나 정확성 측정의 완료가 아니다.</a:t>
+            </a:r>
+          </a:p>
+          <a:p xmlns:a="http://schemas.openxmlformats.org/drawingml/2006/main">
+            <a:r>
+              <a:t/>
+            </a:r>
+          </a:p>
+          <a:p xmlns:a="http://schemas.openxmlformats.org/drawingml/2006/main">
+            <a:r>
+              <a:t>### 8.4.1.1 이전 Gemini 선택 이유와 변경 이력</a:t>
+            </a:r>
+          </a:p>
+          <a:p xmlns:a="http://schemas.openxmlformats.org/drawingml/2006/main">
+            <a:r>
+              <a:t/>
+            </a:r>
+          </a:p>
+          <a:p xmlns:a="http://schemas.openxmlformats.org/drawingml/2006/main">
+            <a:r>
+              <a:t>Gemini 3 Flash Preview의 공개 출시일은 **2025-12-17**이다([Google 출시 공지](https://blog.google/products-and-platforms/products/gemini/gemini-3-flash/)). 이전 선택은 공식 단가와 이미지 입력·함수 호출·structured output을 가진 reference의 편의에 따른 것이며 VIA 우월성이나 Qwen 30B와의 동등성 검증이 아니었다. 이후 정확한 Qwen API 단가를 확인했고 사용자가 Qwen/GPT 조합을 지정했으므로 **Gemini는 현행 의미/비용/속도 기준에서 제외**한다. 같은 124k/12.4k token 예산의 이전 Gemini 의미 비용 $0.09920과 현재 Qwen $0.03472의 차이 $0.06448는 단가 민감도이며 실제 호출/정확성/출력 동등성의 증거가 아니다. 기존 200 token/s와 Gemini cache 요금은 [변경 전 보존본](../../../archive/qa-semantic-reference-before-qwen-20261011/README.md)에 남겼다.</a:t>
+            </a:r>
+          </a:p>
+          <a:p xmlns:a="http://schemas.openxmlformats.org/drawingml/2006/main">
+            <a:r>
+              <a:t/>
+            </a:r>
+          </a:p>
+          <a:p xmlns:a="http://schemas.openxmlformats.org/drawingml/2006/main">
+            <a:r>
+              <a:t>### 8.4.1.2 Groq 밖의 속도 근거와 산식</a:t>
+            </a:r>
+          </a:p>
+          <a:p xmlns:a="http://schemas.openxmlformats.org/drawingml/2006/main">
+            <a:r>
+              <a:t/>
+            </a:r>
+          </a:p>
+          <a:p xmlns:a="http://schemas.openxmlformats.org/drawingml/2006/main">
+            <a:r>
+              <a:t>[Qwen 공식 속도 benchmark](https://qwen.readthedocs.io/en/latest/getting_started/speed_benchmark.html)는 **Qwen3-30B-A3B**를 NVIDIA **H20 96GB 1장**, SGLang **0.4.6.post1**, PyTorch **2.6.0+cu124**, batch **1**, 출력 **2,048 token**으로 평가했다. 입력1 token에서 BF16 **137.18**, FP8 **155.55 token/s**다. 입력6,144 token에서는 BF16 **490.10**, FP8 **551.34**다. 단, 공식 분자는 **입력+출력 token**, 분모는 전체 처리시간이다. 입력6,144의 490.10을 출력 생성률로 쓰지 않는다.</a:t>
+            </a:r>
+          </a:p>
+          <a:p xmlns:a="http://schemas.openxmlformats.org/drawingml/2006/main">
+            <a:r>
+              <a:t/>
+            </a:r>
+          </a:p>
+          <a:p xmlns:a="http://schemas.openxmlformats.org/drawingml/2006/main">
+            <a:r>
+              <a:t>BF16 입력1 조건의 전체 시간은 `2,049/137.18 ≈ 14.94초`, 입력6,144 조건은 `8,192/490.10 ≈ 16.72초`로 복원할 수 있다. 출력/전체시간으로 다시 표현하면 각각 **137.11**과 **122.53 output token/s**이며 이는 prefill까지 포함한 해당 길이의 유효 출력률이다. 이것을 TTFT와 분리된 decode rate로 두고 TTFT를 다시 더하면 입력 처리 시간이 이중 계상된다. 원본 Qwen3 benchmark를 Instruct-2507의 실측 또는 Alibaba Singapore API의 속도로 주장하지 않는다. 서버 측 H20 reference이므로 Windows 노트북의 속도/메모리에도 이전하지 않는다.</a:t>
+            </a:r>
+          </a:p>
+          <a:p xmlns:a="http://schemas.openxmlformats.org/drawingml/2006/main">
+            <a:r>
+              <a:t/>
+            </a:r>
+          </a:p>
+          <a:p xmlns:a="http://schemas.openxmlformats.org/drawingml/2006/main">
+            <a:r>
+              <a:t>따라서 공식 수치 기반의 계산은 **공개된 동일 길이/환경의 전체 처리시간**을 쓰거나, 별도로 검증된 decode rate와 TTFT를 분리해야 한다. 현재는 원본 계열 BF16 유효 출력률 약122.53~137.11과 FP8 입력1 약155.47을 수치 규모의 참고로 삼아 **130 token/s의 독립적인 PoC decode 가정**과 **100/130/160 민감도**를 정했다. 기준 TTFT0.30초, 빠른0.15초, 느린0.80초와 음성 시작0.10/0.25/0.60초도 별도 작성자 가정이다. 이들을 공개표에서 분리 측정한 TTFT/decode로 주장하지 않는다. 특히 2,048 출력의 유효 출력률을 2,000입력/200출력에 보장된 rate로 이전하지 않는다. API 배포의 TTFT/생성률이 있으면 두 가정을 실제 측정으로 함께 교체하고, 공개 benchmark 자체를 재현 계산할 때는 전체시간만 써서 prefill을 중복 계상하지 않는다. API 가격 reference와 별도 H20 속도 reference를 함께 사용하는 경우 비용/속도가 같은 서비스에서 측정됐다는 주장도 하지 않는다.</a:t>
+            </a:r>
+          </a:p>
+          <a:p xmlns:a="http://schemas.openxmlformats.org/drawingml/2006/main">
+            <a:r>
+              <a:t/>
+            </a:r>
+          </a:p>
+          <a:p xmlns:a="http://schemas.openxmlformats.org/drawingml/2006/main">
+            <a:r>
+              <a:t>기존의 **450+ token/s**는 [Groq의 `qwen/qwen3.8-27b` 모델 페이지](https://console.groq.com/docs/model/qwen/qwen3.8-27b)의 제공사 표시값이다. [GroqCloud는 전용 LPU 추론 인프라](https://groq.com/blog/the-groq-lpu-explained)를 사용한다. 이는 Qwen3-30B-A3B-Instruct-2507, NVIDIA GPU 또는 Windows PC의 숫자가 아니다. 해당 450 수치의 LPU 수/세대, precision, prompt/output 길이, 동시 요청 수와 상세 계측 경계는 페이지에 공개되어 있지 않으므로 가정으로 채우지 않는다. Groq은 현행 비용/속도 reference에서 제외하며 이 문단은 이전 근거의 의미를 설명하기 위한 provenance다.</a:t>
+            </a:r>
+          </a:p>
+          <a:p xmlns:a="http://schemas.openxmlformats.org/drawingml/2006/main">
+            <a:r>
+              <a:t/>
+            </a:r>
+          </a:p>
+          <a:p xmlns:a="http://schemas.openxmlformats.org/drawingml/2006/main">
+            <a:r>
+              <a:t>### 8.4.2 Gemini Live와 GPT Realtime의 기능 비교</a:t>
+            </a:r>
+          </a:p>
+          <a:p xmlns:a="http://schemas.openxmlformats.org/drawingml/2006/main">
+            <a:r>
+              <a:t/>
+            </a:r>
+          </a:p>
+          <a:p xmlns:a="http://schemas.openxmlformats.org/drawingml/2006/main">
+            <a:r>
+              <a:t>2026-10-11 확인한 공식 문서 기준으로 같은 실시간 음성 대화 역할을 제공하지만 API/실행 제약은 다르다. 아래 GPT는 사용자가 지칭한 `gpt-realtime` 모델 기준이며 다른 GPT Realtime 모델의 제한으로 확대하지 않는다. 현재 공식 모델 페이지는 해당 모델을 Deprecated로 표시하므로 실제 제품 적용 권고가 아니라 요청한 기능 비교 기준으로만 쓴다.</a:t>
+            </a:r>
+          </a:p>
+          <a:p xmlns:a="http://schemas.openxmlformats.org/drawingml/2006/main">
+            <a:r>
+              <a:t/>
+            </a:r>
+          </a:p>
+          <a:p xmlns:a="http://schemas.openxmlformats.org/drawingml/2006/main">
+            <a:r>
+              <a:t>| 비교 항목 | Gemini 3.1 Flash Live Preview | OpenAI gpt-realtime | VIA에 주는 의미 |</a:t>
+            </a:r>
+          </a:p>
+          <a:p xmlns:a="http://schemas.openxmlformats.org/drawingml/2006/main">
+            <a:r>
+              <a:t>| --- | --- | --- | --- |</a:t>
+            </a:r>
+          </a:p>
+          <a:p xmlns:a="http://schemas.openxmlformats.org/drawingml/2006/main">
+            <a:r>
+              <a:t>| 실시간 음성 입출력, 입력/출력 전사, 발화 중 끼어들기 | 지원 | 지원 | 양쪽 모두 음성 역할의 reference가 될 수 있다. 실제 한국어 품질·지연·중단 시간 동등성은 입증하지 않음 |</a:t>
+            </a:r>
+          </a:p>
+          <a:p xmlns:a="http://schemas.openxmlformats.org/drawingml/2006/main">
+            <a:r>
+              <a:t>| 화면/멀티모달 입력 | Text·이미지·audio·video 입력 | Text·이미지·audio 입력, video 미지원 | GPT에서는 화면 snapshot의 이미지 입력과 video stream 지원을 구별 |</a:t>
+            </a:r>
+          </a:p>
+          <a:p xmlns:a="http://schemas.openxmlformats.org/drawingml/2006/main">
+            <a:r>
+              <a:t>| 함수 호출 | 동기만 지원, tool response 전 응답 대기 | 비동기 tool 흐름 지원 | 긴 Agent 실행을 Gemini Live tool response로 끝날 때까지 기다리게 하지 않음 |</a:t>
+            </a:r>
+          </a:p>
+          <a:p xmlns:a="http://schemas.openxmlformats.org/drawingml/2006/main">
+            <a:r>
+              <a:t>| 직접 연결 | Live API WebSocket | WebRTC / WebSocket / SIP | provider adapter·세션 재연결·audio queue/취소 이벤트를 별도로 구현/계산 |</a:t>
+            </a:r>
+          </a:p>
+          <a:p xmlns:a="http://schemas.openxmlformats.org/drawingml/2006/main">
+            <a:r>
+              <a:t>| structured output | 미지원 | 미지원 | 함수 인자 JSON과 schema 제약 출력 보장을 구별, 의미 모델의 frame 검증은 별도 |</a:t>
+            </a:r>
+          </a:p>
+          <a:p xmlns:a="http://schemas.openxmlformats.org/drawingml/2006/main">
+            <a:r>
+              <a:t/>
+            </a:r>
+          </a:p>
+          <a:p xmlns:a="http://schemas.openxmlformats.org/drawingml/2006/main">
+            <a:r>
+              <a:t>근거: [Gemini Live 모델/제약](https://ai.google.dev/gemini-api/docs/models/gemini-3.1-flash-live-preview), [Live 도구의 동기 제한](https://ai.google.dev/gemini-api/docs/live-api/tools), [Live API 연결](https://ai.google.dev/gemini-api/docs/live-api), [Live VAD/중단](https://ai.google.dev/gemini-api/docs/live-api/capabilities), [OpenAI gpt-realtime](https://developers.openai.com/api/docs/models/gpt-realtime), [Realtime 대화/중단](https://developers.openai.com/api/docs/guides/realtime-conversations), [Realtime 도구](https://developers.openai.com/api/docs/guides/realtime-mcp), [GPT Realtime 비동기 함수 호출 설명](https://developers.openai.com/blog/realtime-api).</a:t>
+            </a:r>
+          </a:p>
+          <a:p xmlns:a="http://schemas.openxmlformats.org/drawingml/2006/main">
+            <a:r>
+              <a:t/>
+            </a:r>
+          </a:p>
+          <a:p xmlns:a="http://schemas.openxmlformats.org/drawingml/2006/main">
+            <a:r>
+              <a:t>VIA는 요청/Task의 권위를 갖고 음성 모델의 임시 session과 구별한다. 긴 업무는 로컬 VIA가 외부 Agent에 비동기로 위임하고, 음성 모델에는 유효한 접수·질문·결과를 제시할 입력을 따로 전달하는 방향으로 reference를 해석한다. 이것은 긴 Agent 결과를 Live 동기 함수 응답으로 기다리는 것과 다르다. 실제 provider의 forced response, cancel, 재연결, 출력 내용 준수와 local playback stop은 adapter/API 검증에서 확인해야 한다. 현재 GPT Realtime reference에서도 local playback stop·새 사용자 요청·동시에 도착한 Agent 질문/결과의 우선순위는 VIA가 관리하고, pending tool의 결과가 없는 동안 완료를 추측해 말하지 못하도록 실제 상태를 전달한다. 이전 Gemini 3.1 검토의 proactive audio/affective dialogue 미지원과 `turn_complete=true`의 활성 generation 중단은 기능 비교의 제한으로 보존한다. 모델 이름만으로 연속 입력/여러 Task 처리 계약이 충족됐다고 하지 않는다.</a:t>
             </a:r>
           </a:p>
           <a:p xmlns:a="http://schemas.openxmlformats.org/drawingml/2006/main">
@@ -24020,7 +25730,7 @@
   </p:cSld>
   <p:clrMap bg1="lt1" tx1="dk1" bg2="lt2" tx2="dk2" accent1="accent1" accent2="accent2" accent3="accent3" accent4="accent4" accent5="accent5" accent6="accent6" hlink="hlink" folHlink="folHlink"/>
   <p:sldLayoutIdLst>
-    <p:sldLayoutId xmlns:r="http://schemas.openxmlformats.org/officeDocument/2006/relationships" id="2147483649" r:id="R41eb6e39a7f14eb4"/>
+    <p:sldLayoutId xmlns:r="http://schemas.openxmlformats.org/officeDocument/2006/relationships" id="2147483649" r:id="R64b8399e10b24cde"/>
   </p:sldLayoutIdLst>
   <p:txStyles>
     <p:titleStyle>
@@ -24571,7 +26281,7 @@
           <p:cNvPr id="8" name="title">
             <a:extLst xmlns:a="http://schemas.openxmlformats.org/drawingml/2006/main">
               <a:ext uri="{FF2B5EF4-FFF2-40B4-BE49-F238E27FC236}">
-                <a16:creationId xmlns:a16="http://schemas.microsoft.com/office/drawing/2014/main" id="{7BED8959-5807-44DB-A739-92299D05645E}"/>
+                <a16:creationId xmlns:a16="http://schemas.microsoft.com/office/drawing/2014/main" id="{A908AAFE-7C2F-43D3-8C3E-6DB458AFA1FE}"/>
               </a:ext>
             </a:extLst>
           </p:cNvPr>
@@ -24628,7 +26338,7 @@
           <p:cNvPr id="2" name="header-rule">
             <a:extLst xmlns:a="http://schemas.openxmlformats.org/drawingml/2006/main">
               <a:ext uri="{FF2B5EF4-FFF2-40B4-BE49-F238E27FC236}">
-                <a16:creationId xmlns:a16="http://schemas.microsoft.com/office/drawing/2014/main" id="{2E27125D-60F2-4630-83D1-AF12C515B7B1}"/>
+                <a16:creationId xmlns:a16="http://schemas.microsoft.com/office/drawing/2014/main" id="{F7122FBF-146D-4BD9-8B55-330C11E3260F}"/>
               </a:ext>
             </a:extLst>
           </p:cNvPr>
@@ -24658,7 +26368,7 @@
           <p:cNvPr id="3" name="page">
             <a:extLst xmlns:a="http://schemas.openxmlformats.org/drawingml/2006/main">
               <a:ext uri="{FF2B5EF4-FFF2-40B4-BE49-F238E27FC236}">
-                <a16:creationId xmlns:a16="http://schemas.microsoft.com/office/drawing/2014/main" id="{3CC887C4-F6A3-4B42-A16A-8B7F1F05AB44}"/>
+                <a16:creationId xmlns:a16="http://schemas.microsoft.com/office/drawing/2014/main" id="{08556E0D-4101-483C-BFF2-735D7DDE932D}"/>
               </a:ext>
             </a:extLst>
           </p:cNvPr>
@@ -24715,7 +26425,7 @@
           <p:cNvPr id="4" name="headline">
             <a:extLst xmlns:a="http://schemas.openxmlformats.org/drawingml/2006/main">
               <a:ext uri="{FF2B5EF4-FFF2-40B4-BE49-F238E27FC236}">
-                <a16:creationId xmlns:a16="http://schemas.microsoft.com/office/drawing/2014/main" id="{E457B687-B381-462F-B87D-E6EC9526A3BB}"/>
+                <a16:creationId xmlns:a16="http://schemas.microsoft.com/office/drawing/2014/main" id="{C01472E1-663C-4793-BB19-6CF22FDF7482}"/>
               </a:ext>
             </a:extLst>
           </p:cNvPr>
@@ -24772,7 +26482,7 @@
           <p:cNvPr id="5" name="scope">
             <a:extLst xmlns:a="http://schemas.openxmlformats.org/drawingml/2006/main">
               <a:ext uri="{FF2B5EF4-FFF2-40B4-BE49-F238E27FC236}">
-                <a16:creationId xmlns:a16="http://schemas.microsoft.com/office/drawing/2014/main" id="{456CA4F3-A4AE-45E7-9963-3339E4795226}"/>
+                <a16:creationId xmlns:a16="http://schemas.microsoft.com/office/drawing/2014/main" id="{FE797CD4-627B-49E8-AA87-DD8C820DCAE7}"/>
               </a:ext>
             </a:extLst>
           </p:cNvPr>
@@ -25530,7 +27240,7 @@
           <p:cNvPr id="7" name="footer">
             <a:extLst xmlns:a="http://schemas.openxmlformats.org/drawingml/2006/main">
               <a:ext uri="{FF2B5EF4-FFF2-40B4-BE49-F238E27FC236}">
-                <a16:creationId xmlns:a16="http://schemas.microsoft.com/office/drawing/2014/main" id="{F918AF23-6A68-4CC6-B968-B6A7AA533A21}"/>
+                <a16:creationId xmlns:a16="http://schemas.microsoft.com/office/drawing/2014/main" id="{B06FF142-6B3F-4EAE-BF99-718776B5C9A7}"/>
               </a:ext>
             </a:extLst>
           </p:cNvPr>
@@ -25585,7 +27295,7 @@
     </p:spTree>
     <p:extLst>
       <p:ext uri="{BB962C8B-B14F-4D97-AF65-F5344CB8AC3E}">
-        <p14:creationId xmlns:p14="http://schemas.microsoft.com/office/powerpoint/2010/main" val="1504648296"/>
+        <p14:creationId xmlns:p14="http://schemas.microsoft.com/office/powerpoint/2010/main" val="488972711"/>
       </p:ext>
     </p:extLst>
   </p:cSld>
@@ -25616,7 +27326,7 @@
           <p:cNvPr id="8" name="title">
             <a:extLst xmlns:a="http://schemas.openxmlformats.org/drawingml/2006/main">
               <a:ext uri="{FF2B5EF4-FFF2-40B4-BE49-F238E27FC236}">
-                <a16:creationId xmlns:a16="http://schemas.microsoft.com/office/drawing/2014/main" id="{FF0F27ED-1ED9-47F0-9C62-31491C94CDBB}"/>
+                <a16:creationId xmlns:a16="http://schemas.microsoft.com/office/drawing/2014/main" id="{0ED29E3E-C849-478D-977B-B576CAF19E33}"/>
               </a:ext>
             </a:extLst>
           </p:cNvPr>
@@ -25673,7 +27383,7 @@
           <p:cNvPr id="2" name="header-rule">
             <a:extLst xmlns:a="http://schemas.openxmlformats.org/drawingml/2006/main">
               <a:ext uri="{FF2B5EF4-FFF2-40B4-BE49-F238E27FC236}">
-                <a16:creationId xmlns:a16="http://schemas.microsoft.com/office/drawing/2014/main" id="{CC50DD73-EDB4-4DEC-BD76-7D49ABBADA7B}"/>
+                <a16:creationId xmlns:a16="http://schemas.microsoft.com/office/drawing/2014/main" id="{ECAA7F52-8C18-4933-9957-878E2FA304DB}"/>
               </a:ext>
             </a:extLst>
           </p:cNvPr>
@@ -25703,7 +27413,7 @@
           <p:cNvPr id="3" name="page">
             <a:extLst xmlns:a="http://schemas.openxmlformats.org/drawingml/2006/main">
               <a:ext uri="{FF2B5EF4-FFF2-40B4-BE49-F238E27FC236}">
-                <a16:creationId xmlns:a16="http://schemas.microsoft.com/office/drawing/2014/main" id="{3F055C21-5283-40B7-9AB4-23F779DD8979}"/>
+                <a16:creationId xmlns:a16="http://schemas.microsoft.com/office/drawing/2014/main" id="{6FDB02AE-015E-4FDD-9C0E-FB1C18395502}"/>
               </a:ext>
             </a:extLst>
           </p:cNvPr>
@@ -25760,7 +27470,7 @@
           <p:cNvPr id="4" name="headline">
             <a:extLst xmlns:a="http://schemas.openxmlformats.org/drawingml/2006/main">
               <a:ext uri="{FF2B5EF4-FFF2-40B4-BE49-F238E27FC236}">
-                <a16:creationId xmlns:a16="http://schemas.microsoft.com/office/drawing/2014/main" id="{F82A499F-E210-47B5-8D9D-E99DA4C623C5}"/>
+                <a16:creationId xmlns:a16="http://schemas.microsoft.com/office/drawing/2014/main" id="{4E41AB00-DA25-4E87-BB54-062B2A742766}"/>
               </a:ext>
             </a:extLst>
           </p:cNvPr>
@@ -25817,7 +27527,7 @@
           <p:cNvPr id="5" name="scope">
             <a:extLst xmlns:a="http://schemas.openxmlformats.org/drawingml/2006/main">
               <a:ext uri="{FF2B5EF4-FFF2-40B4-BE49-F238E27FC236}">
-                <a16:creationId xmlns:a16="http://schemas.microsoft.com/office/drawing/2014/main" id="{16F27A96-B975-4D30-8520-93B0BAE53F69}"/>
+                <a16:creationId xmlns:a16="http://schemas.microsoft.com/office/drawing/2014/main" id="{5CAFAA28-BB8E-4223-95BB-19E7E9801014}"/>
               </a:ext>
             </a:extLst>
           </p:cNvPr>
@@ -26178,7 +27888,7 @@
                           <a:ea typeface="Apple SD Gothic Neo"/>
                           <a:cs typeface="Apple SD Gothic Neo"/>
                         </a:rPr>
-                        <a:t>근거: 신규 audio·Text 기본 $0.416320 + 추가 여유 $0.083680</a:t>
+                        <a:t>근거: 신규 audio·Text 기본 $0.351840 + 추가 여유 $0.148160</a:t>
                       </a:r>
                     </a:p>
                   </a:txBody>
@@ -26603,7 +28313,7 @@
           <p:cNvPr id="7" name="footer">
             <a:extLst xmlns:a="http://schemas.openxmlformats.org/drawingml/2006/main">
               <a:ext uri="{FF2B5EF4-FFF2-40B4-BE49-F238E27FC236}">
-                <a16:creationId xmlns:a16="http://schemas.microsoft.com/office/drawing/2014/main" id="{C4E82951-2C46-445E-BEA3-8E725A3B35EB}"/>
+                <a16:creationId xmlns:a16="http://schemas.microsoft.com/office/drawing/2014/main" id="{98CF56F0-633A-4E31-831E-3110F40F4424}"/>
               </a:ext>
             </a:extLst>
           </p:cNvPr>
@@ -26658,7 +28368,7 @@
     </p:spTree>
     <p:extLst>
       <p:ext uri="{BB962C8B-B14F-4D97-AF65-F5344CB8AC3E}">
-        <p14:creationId xmlns:p14="http://schemas.microsoft.com/office/powerpoint/2010/main" val="1776292606"/>
+        <p14:creationId xmlns:p14="http://schemas.microsoft.com/office/powerpoint/2010/main" val="340219924"/>
       </p:ext>
     </p:extLst>
   </p:cSld>
@@ -26689,7 +28399,7 @@
           <p:cNvPr id="8" name="title">
             <a:extLst xmlns:a="http://schemas.openxmlformats.org/drawingml/2006/main">
               <a:ext uri="{FF2B5EF4-FFF2-40B4-BE49-F238E27FC236}">
-                <a16:creationId xmlns:a16="http://schemas.microsoft.com/office/drawing/2014/main" id="{3624CFB2-432A-4515-B3C8-6B1CB8E500B5}"/>
+                <a16:creationId xmlns:a16="http://schemas.microsoft.com/office/drawing/2014/main" id="{E4AF6C37-55F4-4125-B57D-B26BE97A4310}"/>
               </a:ext>
             </a:extLst>
           </p:cNvPr>
@@ -26746,7 +28456,7 @@
           <p:cNvPr id="2" name="header-rule">
             <a:extLst xmlns:a="http://schemas.openxmlformats.org/drawingml/2006/main">
               <a:ext uri="{FF2B5EF4-FFF2-40B4-BE49-F238E27FC236}">
-                <a16:creationId xmlns:a16="http://schemas.microsoft.com/office/drawing/2014/main" id="{3FEA3865-F08A-49E9-8CFB-E494A8604EEF}"/>
+                <a16:creationId xmlns:a16="http://schemas.microsoft.com/office/drawing/2014/main" id="{AD6B1A54-43BB-4ACA-B8B2-64CA582334D5}"/>
               </a:ext>
             </a:extLst>
           </p:cNvPr>
@@ -26776,7 +28486,7 @@
           <p:cNvPr id="3" name="page">
             <a:extLst xmlns:a="http://schemas.openxmlformats.org/drawingml/2006/main">
               <a:ext uri="{FF2B5EF4-FFF2-40B4-BE49-F238E27FC236}">
-                <a16:creationId xmlns:a16="http://schemas.microsoft.com/office/drawing/2014/main" id="{C8E3AE3D-8CFC-4C45-9FD1-05DA56DDDEA7}"/>
+                <a16:creationId xmlns:a16="http://schemas.microsoft.com/office/drawing/2014/main" id="{30A708DD-AA56-4039-BF17-F6921BBF02A7}"/>
               </a:ext>
             </a:extLst>
           </p:cNvPr>
@@ -26833,7 +28543,7 @@
           <p:cNvPr id="4" name="headline">
             <a:extLst xmlns:a="http://schemas.openxmlformats.org/drawingml/2006/main">
               <a:ext uri="{FF2B5EF4-FFF2-40B4-BE49-F238E27FC236}">
-                <a16:creationId xmlns:a16="http://schemas.microsoft.com/office/drawing/2014/main" id="{BB5A805E-0C8E-42F9-8D63-EC2CFAE05EAD}"/>
+                <a16:creationId xmlns:a16="http://schemas.microsoft.com/office/drawing/2014/main" id="{8D8A6E69-CD7B-4FC1-9301-73B29C8C61FB}"/>
               </a:ext>
             </a:extLst>
           </p:cNvPr>
@@ -26890,7 +28600,7 @@
           <p:cNvPr id="5" name="scope">
             <a:extLst xmlns:a="http://schemas.openxmlformats.org/drawingml/2006/main">
               <a:ext uri="{FF2B5EF4-FFF2-40B4-BE49-F238E27FC236}">
-                <a16:creationId xmlns:a16="http://schemas.microsoft.com/office/drawing/2014/main" id="{8F1C644A-C225-4FD6-8EB9-048C86355532}"/>
+                <a16:creationId xmlns:a16="http://schemas.microsoft.com/office/drawing/2014/main" id="{1E7F64F9-28E8-4B51-979F-B0F3D78526EB}"/>
               </a:ext>
             </a:extLst>
           </p:cNvPr>
@@ -27677,7 +29387,7 @@
           <p:cNvPr id="7" name="footer">
             <a:extLst xmlns:a="http://schemas.openxmlformats.org/drawingml/2006/main">
               <a:ext uri="{FF2B5EF4-FFF2-40B4-BE49-F238E27FC236}">
-                <a16:creationId xmlns:a16="http://schemas.microsoft.com/office/drawing/2014/main" id="{4C361FAC-7CF2-4A80-ABF2-183B63C782ED}"/>
+                <a16:creationId xmlns:a16="http://schemas.microsoft.com/office/drawing/2014/main" id="{C343046D-2124-40AF-A097-FED64EE9E19E}"/>
               </a:ext>
             </a:extLst>
           </p:cNvPr>
@@ -27732,7 +29442,7 @@
     </p:spTree>
     <p:extLst>
       <p:ext uri="{BB962C8B-B14F-4D97-AF65-F5344CB8AC3E}">
-        <p14:creationId xmlns:p14="http://schemas.microsoft.com/office/powerpoint/2010/main" val="2048637843"/>
+        <p14:creationId xmlns:p14="http://schemas.microsoft.com/office/powerpoint/2010/main" val="186910980"/>
       </p:ext>
     </p:extLst>
   </p:cSld>
@@ -27763,7 +29473,7 @@
           <p:cNvPr id="8" name="title">
             <a:extLst xmlns:a="http://schemas.openxmlformats.org/drawingml/2006/main">
               <a:ext uri="{FF2B5EF4-FFF2-40B4-BE49-F238E27FC236}">
-                <a16:creationId xmlns:a16="http://schemas.microsoft.com/office/drawing/2014/main" id="{4B662A00-F331-4EBC-AAC3-45CC9F41C165}"/>
+                <a16:creationId xmlns:a16="http://schemas.microsoft.com/office/drawing/2014/main" id="{FFAE454F-A0D8-4F1F-9FFA-2D265442A2C3}"/>
               </a:ext>
             </a:extLst>
           </p:cNvPr>
@@ -27820,7 +29530,7 @@
           <p:cNvPr id="2" name="header-rule">
             <a:extLst xmlns:a="http://schemas.openxmlformats.org/drawingml/2006/main">
               <a:ext uri="{FF2B5EF4-FFF2-40B4-BE49-F238E27FC236}">
-                <a16:creationId xmlns:a16="http://schemas.microsoft.com/office/drawing/2014/main" id="{F70889D0-51B4-4E1D-8C7D-AA7442E4FD2C}"/>
+                <a16:creationId xmlns:a16="http://schemas.microsoft.com/office/drawing/2014/main" id="{F7EEED32-D36F-411F-A0BE-EC86DA937C69}"/>
               </a:ext>
             </a:extLst>
           </p:cNvPr>
@@ -27850,7 +29560,7 @@
           <p:cNvPr id="3" name="page">
             <a:extLst xmlns:a="http://schemas.openxmlformats.org/drawingml/2006/main">
               <a:ext uri="{FF2B5EF4-FFF2-40B4-BE49-F238E27FC236}">
-                <a16:creationId xmlns:a16="http://schemas.microsoft.com/office/drawing/2014/main" id="{1424BA80-9AE5-449D-B0D0-7E839ED19BBA}"/>
+                <a16:creationId xmlns:a16="http://schemas.microsoft.com/office/drawing/2014/main" id="{7105EEB2-7B88-43A6-A6DA-4B1FA72429B6}"/>
               </a:ext>
             </a:extLst>
           </p:cNvPr>
@@ -27907,7 +29617,7 @@
           <p:cNvPr id="4" name="headline">
             <a:extLst xmlns:a="http://schemas.openxmlformats.org/drawingml/2006/main">
               <a:ext uri="{FF2B5EF4-FFF2-40B4-BE49-F238E27FC236}">
-                <a16:creationId xmlns:a16="http://schemas.microsoft.com/office/drawing/2014/main" id="{1272F382-65DD-422A-8786-4C5FB00A7754}"/>
+                <a16:creationId xmlns:a16="http://schemas.microsoft.com/office/drawing/2014/main" id="{3AB1065A-D4A6-4A6E-9280-73A7A06B2599}"/>
               </a:ext>
             </a:extLst>
           </p:cNvPr>
@@ -27964,7 +29674,7 @@
           <p:cNvPr id="5" name="scope">
             <a:extLst xmlns:a="http://schemas.openxmlformats.org/drawingml/2006/main">
               <a:ext uri="{FF2B5EF4-FFF2-40B4-BE49-F238E27FC236}">
-                <a16:creationId xmlns:a16="http://schemas.microsoft.com/office/drawing/2014/main" id="{3C56BD69-5C1B-4AC5-BEDC-41E366C30CFE}"/>
+                <a16:creationId xmlns:a16="http://schemas.microsoft.com/office/drawing/2014/main" id="{94FFDB6A-3467-4A8A-AB92-00B55456FD74}"/>
               </a:ext>
             </a:extLst>
           </p:cNvPr>
@@ -29258,7 +30968,7 @@
           <p:cNvPr id="7" name="footer">
             <a:extLst xmlns:a="http://schemas.openxmlformats.org/drawingml/2006/main">
               <a:ext uri="{FF2B5EF4-FFF2-40B4-BE49-F238E27FC236}">
-                <a16:creationId xmlns:a16="http://schemas.microsoft.com/office/drawing/2014/main" id="{8E924A3F-8653-467A-BE8C-188FF3BBDA03}"/>
+                <a16:creationId xmlns:a16="http://schemas.microsoft.com/office/drawing/2014/main" id="{8813CE86-DDCD-4F86-8F07-C3B495496A5B}"/>
               </a:ext>
             </a:extLst>
           </p:cNvPr>
@@ -29313,7 +31023,7 @@
     </p:spTree>
     <p:extLst>
       <p:ext uri="{BB962C8B-B14F-4D97-AF65-F5344CB8AC3E}">
-        <p14:creationId xmlns:p14="http://schemas.microsoft.com/office/powerpoint/2010/main" val="1035022172"/>
+        <p14:creationId xmlns:p14="http://schemas.microsoft.com/office/powerpoint/2010/main" val="581484155"/>
       </p:ext>
     </p:extLst>
   </p:cSld>
@@ -29344,7 +31054,7 @@
           <p:cNvPr id="8" name="title">
             <a:extLst xmlns:a="http://schemas.openxmlformats.org/drawingml/2006/main">
               <a:ext uri="{FF2B5EF4-FFF2-40B4-BE49-F238E27FC236}">
-                <a16:creationId xmlns:a16="http://schemas.microsoft.com/office/drawing/2014/main" id="{A45DC734-68E2-4E8C-9341-AB22F83CB480}"/>
+                <a16:creationId xmlns:a16="http://schemas.microsoft.com/office/drawing/2014/main" id="{CD7BBC25-D59C-4BB5-B38D-8C324187E295}"/>
               </a:ext>
             </a:extLst>
           </p:cNvPr>
@@ -29401,7 +31111,7 @@
           <p:cNvPr id="2" name="header-rule">
             <a:extLst xmlns:a="http://schemas.openxmlformats.org/drawingml/2006/main">
               <a:ext uri="{FF2B5EF4-FFF2-40B4-BE49-F238E27FC236}">
-                <a16:creationId xmlns:a16="http://schemas.microsoft.com/office/drawing/2014/main" id="{99234F12-6E7E-465C-8DAF-F95D70EA65DA}"/>
+                <a16:creationId xmlns:a16="http://schemas.microsoft.com/office/drawing/2014/main" id="{E0C23B20-8093-49BB-84F4-FCBC29147B62}"/>
               </a:ext>
             </a:extLst>
           </p:cNvPr>
@@ -29431,7 +31141,7 @@
           <p:cNvPr id="3" name="page">
             <a:extLst xmlns:a="http://schemas.openxmlformats.org/drawingml/2006/main">
               <a:ext uri="{FF2B5EF4-FFF2-40B4-BE49-F238E27FC236}">
-                <a16:creationId xmlns:a16="http://schemas.microsoft.com/office/drawing/2014/main" id="{52EC775C-65B4-491B-A07B-D6D37D0BDEB1}"/>
+                <a16:creationId xmlns:a16="http://schemas.microsoft.com/office/drawing/2014/main" id="{40D72A60-B8E5-4E32-9729-CEE3F5BF9CDC}"/>
               </a:ext>
             </a:extLst>
           </p:cNvPr>
@@ -29488,7 +31198,7 @@
           <p:cNvPr id="4" name="headline">
             <a:extLst xmlns:a="http://schemas.openxmlformats.org/drawingml/2006/main">
               <a:ext uri="{FF2B5EF4-FFF2-40B4-BE49-F238E27FC236}">
-                <a16:creationId xmlns:a16="http://schemas.microsoft.com/office/drawing/2014/main" id="{7C85A454-97F5-450E-9AFF-AB0AB53AB2C0}"/>
+                <a16:creationId xmlns:a16="http://schemas.microsoft.com/office/drawing/2014/main" id="{9A108BD5-1ADC-4363-A92E-AC074757EF26}"/>
               </a:ext>
             </a:extLst>
           </p:cNvPr>
@@ -29545,7 +31255,7 @@
           <p:cNvPr id="5" name="scope">
             <a:extLst xmlns:a="http://schemas.openxmlformats.org/drawingml/2006/main">
               <a:ext uri="{FF2B5EF4-FFF2-40B4-BE49-F238E27FC236}">
-                <a16:creationId xmlns:a16="http://schemas.microsoft.com/office/drawing/2014/main" id="{8D4051D2-6029-4B21-9738-1A61D4217D2E}"/>
+                <a16:creationId xmlns:a16="http://schemas.microsoft.com/office/drawing/2014/main" id="{7840AC70-A82C-4F70-9E2D-6F3327653A21}"/>
               </a:ext>
             </a:extLst>
           </p:cNvPr>
@@ -30853,7 +32563,7 @@
           <p:cNvPr id="7" name="footer">
             <a:extLst xmlns:a="http://schemas.openxmlformats.org/drawingml/2006/main">
               <a:ext uri="{FF2B5EF4-FFF2-40B4-BE49-F238E27FC236}">
-                <a16:creationId xmlns:a16="http://schemas.microsoft.com/office/drawing/2014/main" id="{8B03BFE4-188A-4E07-AC4B-1D18DC0C1758}"/>
+                <a16:creationId xmlns:a16="http://schemas.microsoft.com/office/drawing/2014/main" id="{C70506EF-28B3-4EDA-8451-4912DE8792C7}"/>
               </a:ext>
             </a:extLst>
           </p:cNvPr>
@@ -30908,7 +32618,7 @@
     </p:spTree>
     <p:extLst>
       <p:ext uri="{BB962C8B-B14F-4D97-AF65-F5344CB8AC3E}">
-        <p14:creationId xmlns:p14="http://schemas.microsoft.com/office/powerpoint/2010/main" val="259028113"/>
+        <p14:creationId xmlns:p14="http://schemas.microsoft.com/office/powerpoint/2010/main" val="1192029404"/>
       </p:ext>
     </p:extLst>
   </p:cSld>
@@ -30939,7 +32649,7 @@
           <p:cNvPr id="8" name="title">
             <a:extLst xmlns:a="http://schemas.openxmlformats.org/drawingml/2006/main">
               <a:ext uri="{FF2B5EF4-FFF2-40B4-BE49-F238E27FC236}">
-                <a16:creationId xmlns:a16="http://schemas.microsoft.com/office/drawing/2014/main" id="{F7DAF67F-1175-4DBE-BB58-EA26F2912536}"/>
+                <a16:creationId xmlns:a16="http://schemas.microsoft.com/office/drawing/2014/main" id="{648C7643-4B6D-4D7A-A1E4-6871FDDD2DB4}"/>
               </a:ext>
             </a:extLst>
           </p:cNvPr>
@@ -30996,7 +32706,7 @@
           <p:cNvPr id="2" name="header-rule">
             <a:extLst xmlns:a="http://schemas.openxmlformats.org/drawingml/2006/main">
               <a:ext uri="{FF2B5EF4-FFF2-40B4-BE49-F238E27FC236}">
-                <a16:creationId xmlns:a16="http://schemas.microsoft.com/office/drawing/2014/main" id="{9470C8A2-8752-43AF-B6BF-C5C4E7A7C321}"/>
+                <a16:creationId xmlns:a16="http://schemas.microsoft.com/office/drawing/2014/main" id="{91D117A6-5F1F-464F-9126-E171A076D329}"/>
               </a:ext>
             </a:extLst>
           </p:cNvPr>
@@ -31026,7 +32736,7 @@
           <p:cNvPr id="3" name="page">
             <a:extLst xmlns:a="http://schemas.openxmlformats.org/drawingml/2006/main">
               <a:ext uri="{FF2B5EF4-FFF2-40B4-BE49-F238E27FC236}">
-                <a16:creationId xmlns:a16="http://schemas.microsoft.com/office/drawing/2014/main" id="{DD88009A-F035-4E63-876E-5603AB70211D}"/>
+                <a16:creationId xmlns:a16="http://schemas.microsoft.com/office/drawing/2014/main" id="{03F8EB59-B5A2-48EB-AD8F-C808CE5DC7CD}"/>
               </a:ext>
             </a:extLst>
           </p:cNvPr>
@@ -31083,7 +32793,7 @@
           <p:cNvPr id="4" name="headline">
             <a:extLst xmlns:a="http://schemas.openxmlformats.org/drawingml/2006/main">
               <a:ext uri="{FF2B5EF4-FFF2-40B4-BE49-F238E27FC236}">
-                <a16:creationId xmlns:a16="http://schemas.microsoft.com/office/drawing/2014/main" id="{4001907E-C726-4D4B-BE37-723239F49EC2}"/>
+                <a16:creationId xmlns:a16="http://schemas.microsoft.com/office/drawing/2014/main" id="{96E0266A-C121-4480-8359-91E1C3F7C13E}"/>
               </a:ext>
             </a:extLst>
           </p:cNvPr>
@@ -31140,7 +32850,7 @@
           <p:cNvPr id="5" name="scope">
             <a:extLst xmlns:a="http://schemas.openxmlformats.org/drawingml/2006/main">
               <a:ext uri="{FF2B5EF4-FFF2-40B4-BE49-F238E27FC236}">
-                <a16:creationId xmlns:a16="http://schemas.microsoft.com/office/drawing/2014/main" id="{862A8418-1031-4A5F-9B96-0803056FA4FC}"/>
+                <a16:creationId xmlns:a16="http://schemas.microsoft.com/office/drawing/2014/main" id="{E6596D5D-7F93-4978-85C1-3CF288E8EFEE}"/>
               </a:ext>
             </a:extLst>
           </p:cNvPr>
@@ -32476,7 +34186,7 @@
           <p:cNvPr id="7" name="footer">
             <a:extLst xmlns:a="http://schemas.openxmlformats.org/drawingml/2006/main">
               <a:ext uri="{FF2B5EF4-FFF2-40B4-BE49-F238E27FC236}">
-                <a16:creationId xmlns:a16="http://schemas.microsoft.com/office/drawing/2014/main" id="{FE29488F-569C-4E6F-B2AC-49EF16C5A5C8}"/>
+                <a16:creationId xmlns:a16="http://schemas.microsoft.com/office/drawing/2014/main" id="{AD714D4A-9B3E-4E05-B30F-7C4FE95D1138}"/>
               </a:ext>
             </a:extLst>
           </p:cNvPr>
@@ -32531,7 +34241,7 @@
     </p:spTree>
     <p:extLst>
       <p:ext uri="{BB962C8B-B14F-4D97-AF65-F5344CB8AC3E}">
-        <p14:creationId xmlns:p14="http://schemas.microsoft.com/office/powerpoint/2010/main" val="1280019452"/>
+        <p14:creationId xmlns:p14="http://schemas.microsoft.com/office/powerpoint/2010/main" val="1815268114"/>
       </p:ext>
     </p:extLst>
   </p:cSld>

--- a/docs/presentations_files/quality-attributes/VIA-quality-attributes.pptx
+++ b/docs/presentations_files/quality-attributes/VIA-quality-attributes.pptx
@@ -2,18 +2,18 @@
 <file path=ppt/presentation.xml><?xml version="1.0" encoding="utf-8"?>
 <p:presentation xmlns:p="http://schemas.openxmlformats.org/presentationml/2006/main">
   <p:sldMasterIdLst>
-    <p:sldMasterId xmlns:r="http://schemas.openxmlformats.org/officeDocument/2006/relationships" id="2147483648" r:id="R53ceaff1e4044dbd"/>
+    <p:sldMasterId xmlns:r="http://schemas.openxmlformats.org/officeDocument/2006/relationships" id="2147483648" r:id="R05d797dcd8b14fce"/>
   </p:sldMasterIdLst>
   <p:notesMasterIdLst>
-    <p:notesMasterId xmlns:r="http://schemas.openxmlformats.org/officeDocument/2006/relationships" r:id="Rc8d9fd91bd21450d"/>
+    <p:notesMasterId xmlns:r="http://schemas.openxmlformats.org/officeDocument/2006/relationships" r:id="Ra0ff6e54365b4e75"/>
   </p:notesMasterIdLst>
   <p:sldIdLst>
-    <p:sldId xmlns:r="http://schemas.openxmlformats.org/officeDocument/2006/relationships" id="256" r:id="R9d55d59f1b68454c"/>
-    <p:sldId xmlns:r="http://schemas.openxmlformats.org/officeDocument/2006/relationships" id="257" r:id="Re57c441a3ad54f30"/>
-    <p:sldId xmlns:r="http://schemas.openxmlformats.org/officeDocument/2006/relationships" id="258" r:id="Rd86eb0d8c49c4839"/>
-    <p:sldId xmlns:r="http://schemas.openxmlformats.org/officeDocument/2006/relationships" id="259" r:id="Rb9e7d281b5b14be7"/>
-    <p:sldId xmlns:r="http://schemas.openxmlformats.org/officeDocument/2006/relationships" id="260" r:id="R376c63a001dd4cec"/>
-    <p:sldId xmlns:r="http://schemas.openxmlformats.org/officeDocument/2006/relationships" id="261" r:id="R97d7501078f5472f"/>
+    <p:sldId xmlns:r="http://schemas.openxmlformats.org/officeDocument/2006/relationships" id="256" r:id="R6ef3ff7264c84502"/>
+    <p:sldId xmlns:r="http://schemas.openxmlformats.org/officeDocument/2006/relationships" id="257" r:id="R0637f7576ad44b77"/>
+    <p:sldId xmlns:r="http://schemas.openxmlformats.org/officeDocument/2006/relationships" id="258" r:id="R0902137ec24c45d0"/>
+    <p:sldId xmlns:r="http://schemas.openxmlformats.org/officeDocument/2006/relationships" id="259" r:id="R33d80dc1c5d24aeb"/>
+    <p:sldId xmlns:r="http://schemas.openxmlformats.org/officeDocument/2006/relationships" id="260" r:id="Rd8d43928fd854883"/>
+    <p:sldId xmlns:r="http://schemas.openxmlformats.org/officeDocument/2006/relationships" id="261" r:id="R123a62bae8624956"/>
   </p:sldIdLst>
   <p:sldSz cx="18288000" cy="10287000"/>
   <p:notesSz cx="6858000" cy="9144000"/>
@@ -462,7 +462,7 @@
           </a:p>
           <a:p xmlns:a="http://schemas.openxmlformats.org/drawingml/2006/main">
             <a:r>
-              <a:t>활동 SHA-256: 00fedd21cfe33a3c35990f84af0610bef6fb2f7e9473404d2f935222c3ad084c</a:t>
+              <a:t>활동 SHA-256: 53f2b332fa7a1a197855765d7755465a096b9cecb8426068ae366e9cd9413102</a:t>
             </a:r>
           </a:p>
           <a:p xmlns:a="http://schemas.openxmlformats.org/drawingml/2006/main">
@@ -472,7 +472,7 @@
           </a:p>
           <a:p xmlns:a="http://schemas.openxmlformats.org/drawingml/2006/main">
             <a:r>
-              <a:t>원본 SHA-256: 8520fa1bd1661f72bb87071ab03755964b0539565490994de845bbc086654cfd</a:t>
+              <a:t>원본 SHA-256: ab76bfc813e1f5c8bb72894a705cfcc9495f7f92e021d566dfcbf8224d8d7d65</a:t>
             </a:r>
           </a:p>
           <a:p xmlns:a="http://schemas.openxmlformats.org/drawingml/2006/main">
@@ -3157,7 +3157,7 @@
           </a:p>
           <a:p xmlns:a="http://schemas.openxmlformats.org/drawingml/2006/main">
             <a:r>
-              <a:t>보호 조건: 일반 ≥110/115 ≤2초; 집중 30/30 ≤5초; stop ≤0.1초</a:t>
+              <a:t>보호 조건: 일반 ≥100/105 ≤2초; 집중 30/30 ≤5초; stop ≤0.1초</a:t>
             </a:r>
           </a:p>
           <a:p xmlns:a="http://schemas.openxmlformats.org/drawingml/2006/main">
@@ -3252,7 +3252,7 @@
           </a:p>
           <a:p xmlns:a="http://schemas.openxmlformats.org/drawingml/2006/main">
             <a:r>
-              <a:t>목표는 평균 1초 이하, 일반 반응(S5-04 제외) 115개 중 110개 이상이 2초 이내, 집중 도착 S5-04의 30개 반응은 모두 5초 이내, 미전달 0건이다. S4-02/S5-04의 local stop 총 10개 관측은 모두 0.1초 이내여야 한다. 집중 장면은 같은 소리를 겹쳐 재생하지 않고 짧은 업무별 핵심 안내와 상세 Text를 사용하며, 순차 전달의 차례 비용을 포함한다. 5초 보호 한도는 여러 사건을 전달할 여유를 둔 작성자 예산이며 평균 1초 목표를 완화하지 않는다.</a:t>
+              <a:t>목표는 평균 1초 이하, 일반 반응(S5-04 제외) 105개 중 100개 이상이 2초 이내, 집중 도착 S5-04의 30개 반응은 모두 5초 이내, 미전달 0건이다. S4-02/S5-04의 local stop 총 10개 관측은 모두 0.1초 이내여야 한다. 집중 장면은 같은 소리를 겹쳐 재생하지 않고 짧은 업무별 핵심 안내와 상세 Text를 사용하며, 순차 전달의 차례 비용을 포함한다. 5초 보호 한도는 여러 사건을 전달할 여유를 둔 작성자 예산이며 평균 1초 목표를 완화하지 않는다.</a:t>
             </a:r>
           </a:p>
           <a:p xmlns:a="http://schemas.openxmlformats.org/drawingml/2006/main">
@@ -3452,7 +3452,7 @@
           </a:p>
           <a:p xmlns:a="http://schemas.openxmlformats.org/drawingml/2006/main">
             <a:r>
-              <a:t>목표는 평균 1초 이하, 일반 반응(S5-04 제외) 115개 중 110개 이상이 2초 이내, 집중 도착 S5-04의 30개 반응은 모두 5초 이내, 미전달 0건이다. S4-02/S5-04의 local stop 총 10개 관측은 모두 0.1초 이내여야 한다. 집중 장면은 같은 소리를 겹쳐 재생하지 않고 짧은 업무별 핵심 안내와 상세 Text를 사용하며, 순차 전달의 차례 비용을 포함한다. 5초 보호 한도는 여러 사건을 전달할 여유를 둔 작성자 예산이며 평균 1초 목표를 완화하지 않는다.</a:t>
+              <a:t>목표는 평균 1초 이하, 일반 반응(S5-04 제외) 105개 중 100개 이상이 2초 이내, 집중 도착 S5-04의 30개 반응은 모두 5초 이내, 미전달 0건이다. S4-02/S5-04의 local stop 총 10개 관측은 모두 0.1초 이내여야 한다. 집중 장면은 같은 소리를 겹쳐 재생하지 않고 짧은 업무별 핵심 안내와 상세 Text를 사용하며, 순차 전달의 차례 비용을 포함한다. 5초 보호 한도는 여러 사건을 전달할 여유를 둔 작성자 예산이며 평균 1초 목표를 완화하지 않는다.</a:t>
             </a:r>
           </a:p>
           <a:p xmlns:a="http://schemas.openxmlformats.org/drawingml/2006/main">
@@ -7052,7 +7052,7 @@
           </a:p>
           <a:p xmlns:a="http://schemas.openxmlformats.org/drawingml/2006/main">
             <a:r>
-              <a:t>활동 SHA-256: 00fedd21cfe33a3c35990f84af0610bef6fb2f7e9473404d2f935222c3ad084c</a:t>
+              <a:t>활동 SHA-256: 53f2b332fa7a1a197855765d7755465a096b9cecb8426068ae366e9cd9413102</a:t>
             </a:r>
           </a:p>
           <a:p xmlns:a="http://schemas.openxmlformats.org/drawingml/2006/main">
@@ -7062,7 +7062,7 @@
           </a:p>
           <a:p xmlns:a="http://schemas.openxmlformats.org/drawingml/2006/main">
             <a:r>
-              <a:t>원본 SHA-256: 8520fa1bd1661f72bb87071ab03755964b0539565490994de845bbc086654cfd</a:t>
+              <a:t>원본 SHA-256: ab76bfc813e1f5c8bb72894a705cfcc9495f7f92e021d566dfcbf8224d8d7d65</a:t>
             </a:r>
           </a:p>
           <a:p xmlns:a="http://schemas.openxmlformats.org/drawingml/2006/main">
@@ -11567,7 +11567,7 @@
           </a:p>
           <a:p xmlns:a="http://schemas.openxmlformats.org/drawingml/2006/main">
             <a:r>
-              <a:t>활동 SHA-256: 00fedd21cfe33a3c35990f84af0610bef6fb2f7e9473404d2f935222c3ad084c</a:t>
+              <a:t>활동 SHA-256: 53f2b332fa7a1a197855765d7755465a096b9cecb8426068ae366e9cd9413102</a:t>
             </a:r>
           </a:p>
           <a:p xmlns:a="http://schemas.openxmlformats.org/drawingml/2006/main">
@@ -11577,7 +11577,7 @@
           </a:p>
           <a:p xmlns:a="http://schemas.openxmlformats.org/drawingml/2006/main">
             <a:r>
-              <a:t>원본 SHA-256: 8520fa1bd1661f72bb87071ab03755964b0539565490994de845bbc086654cfd</a:t>
+              <a:t>원본 SHA-256: ab76bfc813e1f5c8bb72894a705cfcc9495f7f92e021d566dfcbf8224d8d7d65</a:t>
             </a:r>
           </a:p>
           <a:p xmlns:a="http://schemas.openxmlformats.org/drawingml/2006/main">
@@ -15112,7 +15112,7 @@
           </a:p>
           <a:p xmlns:a="http://schemas.openxmlformats.org/drawingml/2006/main">
             <a:r>
-              <a:t>활동 SHA-256: 00fedd21cfe33a3c35990f84af0610bef6fb2f7e9473404d2f935222c3ad084c</a:t>
+              <a:t>활동 SHA-256: 53f2b332fa7a1a197855765d7755465a096b9cecb8426068ae366e9cd9413102</a:t>
             </a:r>
           </a:p>
           <a:p xmlns:a="http://schemas.openxmlformats.org/drawingml/2006/main">
@@ -15122,7 +15122,7 @@
           </a:p>
           <a:p xmlns:a="http://schemas.openxmlformats.org/drawingml/2006/main">
             <a:r>
-              <a:t>원본 SHA-256: 8520fa1bd1661f72bb87071ab03755964b0539565490994de845bbc086654cfd</a:t>
+              <a:t>원본 SHA-256: ab76bfc813e1f5c8bb72894a705cfcc9495f7f92e021d566dfcbf8224d8d7d65</a:t>
             </a:r>
           </a:p>
           <a:p xmlns:a="http://schemas.openxmlformats.org/drawingml/2006/main">
@@ -18657,7 +18657,7 @@
           </a:p>
           <a:p xmlns:a="http://schemas.openxmlformats.org/drawingml/2006/main">
             <a:r>
-              <a:t>활동 SHA-256: 00fedd21cfe33a3c35990f84af0610bef6fb2f7e9473404d2f935222c3ad084c</a:t>
+              <a:t>활동 SHA-256: 53f2b332fa7a1a197855765d7755465a096b9cecb8426068ae366e9cd9413102</a:t>
             </a:r>
           </a:p>
           <a:p xmlns:a="http://schemas.openxmlformats.org/drawingml/2006/main">
@@ -18667,7 +18667,7 @@
           </a:p>
           <a:p xmlns:a="http://schemas.openxmlformats.org/drawingml/2006/main">
             <a:r>
-              <a:t>원본 SHA-256: 8520fa1bd1661f72bb87071ab03755964b0539565490994de845bbc086654cfd</a:t>
+              <a:t>원본 SHA-256: ab76bfc813e1f5c8bb72894a705cfcc9495f7f92e021d566dfcbf8224d8d7d65</a:t>
             </a:r>
           </a:p>
           <a:p xmlns:a="http://schemas.openxmlformats.org/drawingml/2006/main">
@@ -22202,7 +22202,7 @@
           </a:p>
           <a:p xmlns:a="http://schemas.openxmlformats.org/drawingml/2006/main">
             <a:r>
-              <a:t>활동 SHA-256: 00fedd21cfe33a3c35990f84af0610bef6fb2f7e9473404d2f935222c3ad084c</a:t>
+              <a:t>활동 SHA-256: 53f2b332fa7a1a197855765d7755465a096b9cecb8426068ae366e9cd9413102</a:t>
             </a:r>
           </a:p>
           <a:p xmlns:a="http://schemas.openxmlformats.org/drawingml/2006/main">
@@ -22212,7 +22212,7 @@
           </a:p>
           <a:p xmlns:a="http://schemas.openxmlformats.org/drawingml/2006/main">
             <a:r>
-              <a:t>원본 SHA-256: 8520fa1bd1661f72bb87071ab03755964b0539565490994de845bbc086654cfd</a:t>
+              <a:t>원본 SHA-256: ab76bfc813e1f5c8bb72894a705cfcc9495f7f92e021d566dfcbf8224d8d7d65</a:t>
             </a:r>
           </a:p>
           <a:p xmlns:a="http://schemas.openxmlformats.org/drawingml/2006/main">
@@ -25730,7 +25730,7 @@
   </p:cSld>
   <p:clrMap bg1="lt1" tx1="dk1" bg2="lt2" tx2="dk2" accent1="accent1" accent2="accent2" accent3="accent3" accent4="accent4" accent5="accent5" accent6="accent6" hlink="hlink" folHlink="folHlink"/>
   <p:sldLayoutIdLst>
-    <p:sldLayoutId xmlns:r="http://schemas.openxmlformats.org/officeDocument/2006/relationships" id="2147483649" r:id="R64b8399e10b24cde"/>
+    <p:sldLayoutId xmlns:r="http://schemas.openxmlformats.org/officeDocument/2006/relationships" id="2147483649" r:id="R20d68b1743b848c6"/>
   </p:sldLayoutIdLst>
   <p:txStyles>
     <p:titleStyle>
@@ -26281,7 +26281,7 @@
           <p:cNvPr id="8" name="title">
             <a:extLst xmlns:a="http://schemas.openxmlformats.org/drawingml/2006/main">
               <a:ext uri="{FF2B5EF4-FFF2-40B4-BE49-F238E27FC236}">
-                <a16:creationId xmlns:a16="http://schemas.microsoft.com/office/drawing/2014/main" id="{A908AAFE-7C2F-43D3-8C3E-6DB458AFA1FE}"/>
+                <a16:creationId xmlns:a16="http://schemas.microsoft.com/office/drawing/2014/main" id="{D47C90FA-CC78-4FE4-BB65-C5695A80957C}"/>
               </a:ext>
             </a:extLst>
           </p:cNvPr>
@@ -26338,7 +26338,7 @@
           <p:cNvPr id="2" name="header-rule">
             <a:extLst xmlns:a="http://schemas.openxmlformats.org/drawingml/2006/main">
               <a:ext uri="{FF2B5EF4-FFF2-40B4-BE49-F238E27FC236}">
-                <a16:creationId xmlns:a16="http://schemas.microsoft.com/office/drawing/2014/main" id="{F7122FBF-146D-4BD9-8B55-330C11E3260F}"/>
+                <a16:creationId xmlns:a16="http://schemas.microsoft.com/office/drawing/2014/main" id="{1AE99F0D-1516-4243-8AA2-E5731C72807E}"/>
               </a:ext>
             </a:extLst>
           </p:cNvPr>
@@ -26368,7 +26368,7 @@
           <p:cNvPr id="3" name="page">
             <a:extLst xmlns:a="http://schemas.openxmlformats.org/drawingml/2006/main">
               <a:ext uri="{FF2B5EF4-FFF2-40B4-BE49-F238E27FC236}">
-                <a16:creationId xmlns:a16="http://schemas.microsoft.com/office/drawing/2014/main" id="{08556E0D-4101-483C-BFF2-735D7DDE932D}"/>
+                <a16:creationId xmlns:a16="http://schemas.microsoft.com/office/drawing/2014/main" id="{F4DB649A-571F-4189-B090-07C989DEC292}"/>
               </a:ext>
             </a:extLst>
           </p:cNvPr>
@@ -26425,7 +26425,7 @@
           <p:cNvPr id="4" name="headline">
             <a:extLst xmlns:a="http://schemas.openxmlformats.org/drawingml/2006/main">
               <a:ext uri="{FF2B5EF4-FFF2-40B4-BE49-F238E27FC236}">
-                <a16:creationId xmlns:a16="http://schemas.microsoft.com/office/drawing/2014/main" id="{C01472E1-663C-4793-BB19-6CF22FDF7482}"/>
+                <a16:creationId xmlns:a16="http://schemas.microsoft.com/office/drawing/2014/main" id="{08F1D3F3-1A1B-4338-87BE-7C207667BD52}"/>
               </a:ext>
             </a:extLst>
           </p:cNvPr>
@@ -26482,7 +26482,7 @@
           <p:cNvPr id="5" name="scope">
             <a:extLst xmlns:a="http://schemas.openxmlformats.org/drawingml/2006/main">
               <a:ext uri="{FF2B5EF4-FFF2-40B4-BE49-F238E27FC236}">
-                <a16:creationId xmlns:a16="http://schemas.microsoft.com/office/drawing/2014/main" id="{FE797CD4-627B-49E8-AA87-DD8C820DCAE7}"/>
+                <a16:creationId xmlns:a16="http://schemas.microsoft.com/office/drawing/2014/main" id="{064941F4-6E33-466E-95E4-0C2FC73BDA93}"/>
               </a:ext>
             </a:extLst>
           </p:cNvPr>
@@ -27240,7 +27240,7 @@
           <p:cNvPr id="7" name="footer">
             <a:extLst xmlns:a="http://schemas.openxmlformats.org/drawingml/2006/main">
               <a:ext uri="{FF2B5EF4-FFF2-40B4-BE49-F238E27FC236}">
-                <a16:creationId xmlns:a16="http://schemas.microsoft.com/office/drawing/2014/main" id="{B06FF142-6B3F-4EAE-BF99-718776B5C9A7}"/>
+                <a16:creationId xmlns:a16="http://schemas.microsoft.com/office/drawing/2014/main" id="{CF41FBD7-DE2E-4A7B-B884-B8962A1AE515}"/>
               </a:ext>
             </a:extLst>
           </p:cNvPr>
@@ -27295,7 +27295,7 @@
     </p:spTree>
     <p:extLst>
       <p:ext uri="{BB962C8B-B14F-4D97-AF65-F5344CB8AC3E}">
-        <p14:creationId xmlns:p14="http://schemas.microsoft.com/office/powerpoint/2010/main" val="488972711"/>
+        <p14:creationId xmlns:p14="http://schemas.microsoft.com/office/powerpoint/2010/main" val="1354158922"/>
       </p:ext>
     </p:extLst>
   </p:cSld>
@@ -27326,7 +27326,7 @@
           <p:cNvPr id="8" name="title">
             <a:extLst xmlns:a="http://schemas.openxmlformats.org/drawingml/2006/main">
               <a:ext uri="{FF2B5EF4-FFF2-40B4-BE49-F238E27FC236}">
-                <a16:creationId xmlns:a16="http://schemas.microsoft.com/office/drawing/2014/main" id="{0ED29E3E-C849-478D-977B-B576CAF19E33}"/>
+                <a16:creationId xmlns:a16="http://schemas.microsoft.com/office/drawing/2014/main" id="{A7C103DE-C20F-43E0-AFE4-8567DC06D3B9}"/>
               </a:ext>
             </a:extLst>
           </p:cNvPr>
@@ -27383,7 +27383,7 @@
           <p:cNvPr id="2" name="header-rule">
             <a:extLst xmlns:a="http://schemas.openxmlformats.org/drawingml/2006/main">
               <a:ext uri="{FF2B5EF4-FFF2-40B4-BE49-F238E27FC236}">
-                <a16:creationId xmlns:a16="http://schemas.microsoft.com/office/drawing/2014/main" id="{ECAA7F52-8C18-4933-9957-878E2FA304DB}"/>
+                <a16:creationId xmlns:a16="http://schemas.microsoft.com/office/drawing/2014/main" id="{3B5E52BE-6306-46D5-8F90-0A9C27BA5EBD}"/>
               </a:ext>
             </a:extLst>
           </p:cNvPr>
@@ -27413,7 +27413,7 @@
           <p:cNvPr id="3" name="page">
             <a:extLst xmlns:a="http://schemas.openxmlformats.org/drawingml/2006/main">
               <a:ext uri="{FF2B5EF4-FFF2-40B4-BE49-F238E27FC236}">
-                <a16:creationId xmlns:a16="http://schemas.microsoft.com/office/drawing/2014/main" id="{6FDB02AE-015E-4FDD-9C0E-FB1C18395502}"/>
+                <a16:creationId xmlns:a16="http://schemas.microsoft.com/office/drawing/2014/main" id="{A100A0F0-E488-48F8-A363-788164D86B29}"/>
               </a:ext>
             </a:extLst>
           </p:cNvPr>
@@ -27470,7 +27470,7 @@
           <p:cNvPr id="4" name="headline">
             <a:extLst xmlns:a="http://schemas.openxmlformats.org/drawingml/2006/main">
               <a:ext uri="{FF2B5EF4-FFF2-40B4-BE49-F238E27FC236}">
-                <a16:creationId xmlns:a16="http://schemas.microsoft.com/office/drawing/2014/main" id="{4E41AB00-DA25-4E87-BB54-062B2A742766}"/>
+                <a16:creationId xmlns:a16="http://schemas.microsoft.com/office/drawing/2014/main" id="{5FCFC1A5-4B22-4A58-A4BA-F5FC31B34612}"/>
               </a:ext>
             </a:extLst>
           </p:cNvPr>
@@ -27527,7 +27527,7 @@
           <p:cNvPr id="5" name="scope">
             <a:extLst xmlns:a="http://schemas.openxmlformats.org/drawingml/2006/main">
               <a:ext uri="{FF2B5EF4-FFF2-40B4-BE49-F238E27FC236}">
-                <a16:creationId xmlns:a16="http://schemas.microsoft.com/office/drawing/2014/main" id="{5CAFAA28-BB8E-4223-95BB-19E7E9801014}"/>
+                <a16:creationId xmlns:a16="http://schemas.microsoft.com/office/drawing/2014/main" id="{43F222AB-BDF3-43BE-B5EA-191BCB45DCB2}"/>
               </a:ext>
             </a:extLst>
           </p:cNvPr>
@@ -28313,7 +28313,7 @@
           <p:cNvPr id="7" name="footer">
             <a:extLst xmlns:a="http://schemas.openxmlformats.org/drawingml/2006/main">
               <a:ext uri="{FF2B5EF4-FFF2-40B4-BE49-F238E27FC236}">
-                <a16:creationId xmlns:a16="http://schemas.microsoft.com/office/drawing/2014/main" id="{98CF56F0-633A-4E31-831E-3110F40F4424}"/>
+                <a16:creationId xmlns:a16="http://schemas.microsoft.com/office/drawing/2014/main" id="{69BC8A58-5AA0-4B2D-847A-805E0A30BBBB}"/>
               </a:ext>
             </a:extLst>
           </p:cNvPr>
@@ -28368,7 +28368,7 @@
     </p:spTree>
     <p:extLst>
       <p:ext uri="{BB962C8B-B14F-4D97-AF65-F5344CB8AC3E}">
-        <p14:creationId xmlns:p14="http://schemas.microsoft.com/office/powerpoint/2010/main" val="340219924"/>
+        <p14:creationId xmlns:p14="http://schemas.microsoft.com/office/powerpoint/2010/main" val="1472402474"/>
       </p:ext>
     </p:extLst>
   </p:cSld>
@@ -28399,7 +28399,7 @@
           <p:cNvPr id="8" name="title">
             <a:extLst xmlns:a="http://schemas.openxmlformats.org/drawingml/2006/main">
               <a:ext uri="{FF2B5EF4-FFF2-40B4-BE49-F238E27FC236}">
-                <a16:creationId xmlns:a16="http://schemas.microsoft.com/office/drawing/2014/main" id="{E4AF6C37-55F4-4125-B57D-B26BE97A4310}"/>
+                <a16:creationId xmlns:a16="http://schemas.microsoft.com/office/drawing/2014/main" id="{59BF6C8A-36F1-448D-9E16-98D569923FA7}"/>
               </a:ext>
             </a:extLst>
           </p:cNvPr>
@@ -28456,7 +28456,7 @@
           <p:cNvPr id="2" name="header-rule">
             <a:extLst xmlns:a="http://schemas.openxmlformats.org/drawingml/2006/main">
               <a:ext uri="{FF2B5EF4-FFF2-40B4-BE49-F238E27FC236}">
-                <a16:creationId xmlns:a16="http://schemas.microsoft.com/office/drawing/2014/main" id="{AD6B1A54-43BB-4ACA-B8B2-64CA582334D5}"/>
+                <a16:creationId xmlns:a16="http://schemas.microsoft.com/office/drawing/2014/main" id="{1D162C15-51BB-482C-8E83-01F46E021371}"/>
               </a:ext>
             </a:extLst>
           </p:cNvPr>
@@ -28486,7 +28486,7 @@
           <p:cNvPr id="3" name="page">
             <a:extLst xmlns:a="http://schemas.openxmlformats.org/drawingml/2006/main">
               <a:ext uri="{FF2B5EF4-FFF2-40B4-BE49-F238E27FC236}">
-                <a16:creationId xmlns:a16="http://schemas.microsoft.com/office/drawing/2014/main" id="{30A708DD-AA56-4039-BF17-F6921BBF02A7}"/>
+                <a16:creationId xmlns:a16="http://schemas.microsoft.com/office/drawing/2014/main" id="{725B0E3C-3659-4308-9767-B6A2E3CC0F66}"/>
               </a:ext>
             </a:extLst>
           </p:cNvPr>
@@ -28543,7 +28543,7 @@
           <p:cNvPr id="4" name="headline">
             <a:extLst xmlns:a="http://schemas.openxmlformats.org/drawingml/2006/main">
               <a:ext uri="{FF2B5EF4-FFF2-40B4-BE49-F238E27FC236}">
-                <a16:creationId xmlns:a16="http://schemas.microsoft.com/office/drawing/2014/main" id="{8D8A6E69-CD7B-4FC1-9301-73B29C8C61FB}"/>
+                <a16:creationId xmlns:a16="http://schemas.microsoft.com/office/drawing/2014/main" id="{715F801B-A56C-4EF6-8168-D77794205A93}"/>
               </a:ext>
             </a:extLst>
           </p:cNvPr>
@@ -28600,7 +28600,7 @@
           <p:cNvPr id="5" name="scope">
             <a:extLst xmlns:a="http://schemas.openxmlformats.org/drawingml/2006/main">
               <a:ext uri="{FF2B5EF4-FFF2-40B4-BE49-F238E27FC236}">
-                <a16:creationId xmlns:a16="http://schemas.microsoft.com/office/drawing/2014/main" id="{1E7F64F9-28E8-4B51-979F-B0F3D78526EB}"/>
+                <a16:creationId xmlns:a16="http://schemas.microsoft.com/office/drawing/2014/main" id="{7B1BEB6F-27EB-4E38-8BAA-4D03DD34B145}"/>
               </a:ext>
             </a:extLst>
           </p:cNvPr>
@@ -29353,7 +29353,7 @@
                           <a:ea typeface="Apple SD Gothic Neo"/>
                           <a:cs typeface="Apple SD Gothic Neo"/>
                         </a:rPr>
-                        <a:t>일반 ≥110/115 ≤2초 / 집중 30/30 ≤5초</a:t>
+                        <a:t>일반 ≥100/105 ≤2초 / 집중 30/30 ≤5초</a:t>
                       </a:r>
                     </a:p>
                     <a:p>
@@ -29387,7 +29387,7 @@
           <p:cNvPr id="7" name="footer">
             <a:extLst xmlns:a="http://schemas.openxmlformats.org/drawingml/2006/main">
               <a:ext uri="{FF2B5EF4-FFF2-40B4-BE49-F238E27FC236}">
-                <a16:creationId xmlns:a16="http://schemas.microsoft.com/office/drawing/2014/main" id="{C343046D-2124-40AF-A097-FED64EE9E19E}"/>
+                <a16:creationId xmlns:a16="http://schemas.microsoft.com/office/drawing/2014/main" id="{39BA2169-894D-41BA-AEB7-90A442B854A3}"/>
               </a:ext>
             </a:extLst>
           </p:cNvPr>
@@ -29442,7 +29442,7 @@
     </p:spTree>
     <p:extLst>
       <p:ext uri="{BB962C8B-B14F-4D97-AF65-F5344CB8AC3E}">
-        <p14:creationId xmlns:p14="http://schemas.microsoft.com/office/powerpoint/2010/main" val="186910980"/>
+        <p14:creationId xmlns:p14="http://schemas.microsoft.com/office/powerpoint/2010/main" val="69634054"/>
       </p:ext>
     </p:extLst>
   </p:cSld>
@@ -29473,7 +29473,7 @@
           <p:cNvPr id="8" name="title">
             <a:extLst xmlns:a="http://schemas.openxmlformats.org/drawingml/2006/main">
               <a:ext uri="{FF2B5EF4-FFF2-40B4-BE49-F238E27FC236}">
-                <a16:creationId xmlns:a16="http://schemas.microsoft.com/office/drawing/2014/main" id="{FFAE454F-A0D8-4F1F-9FFA-2D265442A2C3}"/>
+                <a16:creationId xmlns:a16="http://schemas.microsoft.com/office/drawing/2014/main" id="{7CA25E5A-8AF1-4A85-BFAE-128D0EAED6B6}"/>
               </a:ext>
             </a:extLst>
           </p:cNvPr>
@@ -29530,7 +29530,7 @@
           <p:cNvPr id="2" name="header-rule">
             <a:extLst xmlns:a="http://schemas.openxmlformats.org/drawingml/2006/main">
               <a:ext uri="{FF2B5EF4-FFF2-40B4-BE49-F238E27FC236}">
-                <a16:creationId xmlns:a16="http://schemas.microsoft.com/office/drawing/2014/main" id="{F7EEED32-D36F-411F-A0BE-EC86DA937C69}"/>
+                <a16:creationId xmlns:a16="http://schemas.microsoft.com/office/drawing/2014/main" id="{D8B2BF30-10F8-4666-A991-DD69AEFAA043}"/>
               </a:ext>
             </a:extLst>
           </p:cNvPr>
@@ -29560,7 +29560,7 @@
           <p:cNvPr id="3" name="page">
             <a:extLst xmlns:a="http://schemas.openxmlformats.org/drawingml/2006/main">
               <a:ext uri="{FF2B5EF4-FFF2-40B4-BE49-F238E27FC236}">
-                <a16:creationId xmlns:a16="http://schemas.microsoft.com/office/drawing/2014/main" id="{7105EEB2-7B88-43A6-A6DA-4B1FA72429B6}"/>
+                <a16:creationId xmlns:a16="http://schemas.microsoft.com/office/drawing/2014/main" id="{5DD6C4A9-68D5-4069-BFD1-361F01365872}"/>
               </a:ext>
             </a:extLst>
           </p:cNvPr>
@@ -29617,7 +29617,7 @@
           <p:cNvPr id="4" name="headline">
             <a:extLst xmlns:a="http://schemas.openxmlformats.org/drawingml/2006/main">
               <a:ext uri="{FF2B5EF4-FFF2-40B4-BE49-F238E27FC236}">
-                <a16:creationId xmlns:a16="http://schemas.microsoft.com/office/drawing/2014/main" id="{3AB1065A-D4A6-4A6E-9280-73A7A06B2599}"/>
+                <a16:creationId xmlns:a16="http://schemas.microsoft.com/office/drawing/2014/main" id="{6B5013C6-3440-4E93-BEE4-A554673FA597}"/>
               </a:ext>
             </a:extLst>
           </p:cNvPr>
@@ -29674,7 +29674,7 @@
           <p:cNvPr id="5" name="scope">
             <a:extLst xmlns:a="http://schemas.openxmlformats.org/drawingml/2006/main">
               <a:ext uri="{FF2B5EF4-FFF2-40B4-BE49-F238E27FC236}">
-                <a16:creationId xmlns:a16="http://schemas.microsoft.com/office/drawing/2014/main" id="{94FFDB6A-3467-4A8A-AB92-00B55456FD74}"/>
+                <a16:creationId xmlns:a16="http://schemas.microsoft.com/office/drawing/2014/main" id="{1BA199DD-AF3B-4188-AA0B-0A5549459B40}"/>
               </a:ext>
             </a:extLst>
           </p:cNvPr>
@@ -30968,7 +30968,7 @@
           <p:cNvPr id="7" name="footer">
             <a:extLst xmlns:a="http://schemas.openxmlformats.org/drawingml/2006/main">
               <a:ext uri="{FF2B5EF4-FFF2-40B4-BE49-F238E27FC236}">
-                <a16:creationId xmlns:a16="http://schemas.microsoft.com/office/drawing/2014/main" id="{8813CE86-DDCD-4F86-8F07-C3B495496A5B}"/>
+                <a16:creationId xmlns:a16="http://schemas.microsoft.com/office/drawing/2014/main" id="{A6B92724-953C-4F37-94B1-B29C9617062A}"/>
               </a:ext>
             </a:extLst>
           </p:cNvPr>
@@ -31023,7 +31023,7 @@
     </p:spTree>
     <p:extLst>
       <p:ext uri="{BB962C8B-B14F-4D97-AF65-F5344CB8AC3E}">
-        <p14:creationId xmlns:p14="http://schemas.microsoft.com/office/powerpoint/2010/main" val="581484155"/>
+        <p14:creationId xmlns:p14="http://schemas.microsoft.com/office/powerpoint/2010/main" val="824767429"/>
       </p:ext>
     </p:extLst>
   </p:cSld>
@@ -31054,7 +31054,7 @@
           <p:cNvPr id="8" name="title">
             <a:extLst xmlns:a="http://schemas.openxmlformats.org/drawingml/2006/main">
               <a:ext uri="{FF2B5EF4-FFF2-40B4-BE49-F238E27FC236}">
-                <a16:creationId xmlns:a16="http://schemas.microsoft.com/office/drawing/2014/main" id="{CD7BBC25-D59C-4BB5-B38D-8C324187E295}"/>
+                <a16:creationId xmlns:a16="http://schemas.microsoft.com/office/drawing/2014/main" id="{C3F8AE79-2A44-428B-9C43-C56254567502}"/>
               </a:ext>
             </a:extLst>
           </p:cNvPr>
@@ -31111,7 +31111,7 @@
           <p:cNvPr id="2" name="header-rule">
             <a:extLst xmlns:a="http://schemas.openxmlformats.org/drawingml/2006/main">
               <a:ext uri="{FF2B5EF4-FFF2-40B4-BE49-F238E27FC236}">
-                <a16:creationId xmlns:a16="http://schemas.microsoft.com/office/drawing/2014/main" id="{E0C23B20-8093-49BB-84F4-FCBC29147B62}"/>
+                <a16:creationId xmlns:a16="http://schemas.microsoft.com/office/drawing/2014/main" id="{83645662-0D03-4338-9BD3-D926F34AFFE6}"/>
               </a:ext>
             </a:extLst>
           </p:cNvPr>
@@ -31141,7 +31141,7 @@
           <p:cNvPr id="3" name="page">
             <a:extLst xmlns:a="http://schemas.openxmlformats.org/drawingml/2006/main">
               <a:ext uri="{FF2B5EF4-FFF2-40B4-BE49-F238E27FC236}">
-                <a16:creationId xmlns:a16="http://schemas.microsoft.com/office/drawing/2014/main" id="{40D72A60-B8E5-4E32-9729-CEE3F5BF9CDC}"/>
+                <a16:creationId xmlns:a16="http://schemas.microsoft.com/office/drawing/2014/main" id="{8EF74869-695E-40BF-8AE2-F2DAB4DE3D72}"/>
               </a:ext>
             </a:extLst>
           </p:cNvPr>
@@ -31198,7 +31198,7 @@
           <p:cNvPr id="4" name="headline">
             <a:extLst xmlns:a="http://schemas.openxmlformats.org/drawingml/2006/main">
               <a:ext uri="{FF2B5EF4-FFF2-40B4-BE49-F238E27FC236}">
-                <a16:creationId xmlns:a16="http://schemas.microsoft.com/office/drawing/2014/main" id="{9A108BD5-1ADC-4363-A92E-AC074757EF26}"/>
+                <a16:creationId xmlns:a16="http://schemas.microsoft.com/office/drawing/2014/main" id="{772EAC89-9866-45D3-9B68-B1616A6F3F4C}"/>
               </a:ext>
             </a:extLst>
           </p:cNvPr>
@@ -31255,7 +31255,7 @@
           <p:cNvPr id="5" name="scope">
             <a:extLst xmlns:a="http://schemas.openxmlformats.org/drawingml/2006/main">
               <a:ext uri="{FF2B5EF4-FFF2-40B4-BE49-F238E27FC236}">
-                <a16:creationId xmlns:a16="http://schemas.microsoft.com/office/drawing/2014/main" id="{7840AC70-A82C-4F70-9E2D-6F3327653A21}"/>
+                <a16:creationId xmlns:a16="http://schemas.microsoft.com/office/drawing/2014/main" id="{6D24104C-4BAD-4D68-BA51-2D7766489DF9}"/>
               </a:ext>
             </a:extLst>
           </p:cNvPr>
@@ -32563,7 +32563,7 @@
           <p:cNvPr id="7" name="footer">
             <a:extLst xmlns:a="http://schemas.openxmlformats.org/drawingml/2006/main">
               <a:ext uri="{FF2B5EF4-FFF2-40B4-BE49-F238E27FC236}">
-                <a16:creationId xmlns:a16="http://schemas.microsoft.com/office/drawing/2014/main" id="{C70506EF-28B3-4EDA-8451-4912DE8792C7}"/>
+                <a16:creationId xmlns:a16="http://schemas.microsoft.com/office/drawing/2014/main" id="{519DFFFF-4FC5-46B4-9804-E4C74916C347}"/>
               </a:ext>
             </a:extLst>
           </p:cNvPr>
@@ -32618,7 +32618,7 @@
     </p:spTree>
     <p:extLst>
       <p:ext uri="{BB962C8B-B14F-4D97-AF65-F5344CB8AC3E}">
-        <p14:creationId xmlns:p14="http://schemas.microsoft.com/office/powerpoint/2010/main" val="1192029404"/>
+        <p14:creationId xmlns:p14="http://schemas.microsoft.com/office/powerpoint/2010/main" val="1281329138"/>
       </p:ext>
     </p:extLst>
   </p:cSld>
@@ -32649,7 +32649,7 @@
           <p:cNvPr id="8" name="title">
             <a:extLst xmlns:a="http://schemas.openxmlformats.org/drawingml/2006/main">
               <a:ext uri="{FF2B5EF4-FFF2-40B4-BE49-F238E27FC236}">
-                <a16:creationId xmlns:a16="http://schemas.microsoft.com/office/drawing/2014/main" id="{648C7643-4B6D-4D7A-A1E4-6871FDDD2DB4}"/>
+                <a16:creationId xmlns:a16="http://schemas.microsoft.com/office/drawing/2014/main" id="{761AAF9F-987B-4066-AD76-7B41C8869977}"/>
               </a:ext>
             </a:extLst>
           </p:cNvPr>
@@ -32706,7 +32706,7 @@
           <p:cNvPr id="2" name="header-rule">
             <a:extLst xmlns:a="http://schemas.openxmlformats.org/drawingml/2006/main">
               <a:ext uri="{FF2B5EF4-FFF2-40B4-BE49-F238E27FC236}">
-                <a16:creationId xmlns:a16="http://schemas.microsoft.com/office/drawing/2014/main" id="{91D117A6-5F1F-464F-9126-E171A076D329}"/>
+                <a16:creationId xmlns:a16="http://schemas.microsoft.com/office/drawing/2014/main" id="{B08C06BE-DC12-4369-B694-4C12A1C9C4F8}"/>
               </a:ext>
             </a:extLst>
           </p:cNvPr>
@@ -32736,7 +32736,7 @@
           <p:cNvPr id="3" name="page">
             <a:extLst xmlns:a="http://schemas.openxmlformats.org/drawingml/2006/main">
               <a:ext uri="{FF2B5EF4-FFF2-40B4-BE49-F238E27FC236}">
-                <a16:creationId xmlns:a16="http://schemas.microsoft.com/office/drawing/2014/main" id="{03F8EB59-B5A2-48EB-AD8F-C808CE5DC7CD}"/>
+                <a16:creationId xmlns:a16="http://schemas.microsoft.com/office/drawing/2014/main" id="{EBFEC782-46B0-40E3-82F7-0BF23FA44705}"/>
               </a:ext>
             </a:extLst>
           </p:cNvPr>
@@ -32793,7 +32793,7 @@
           <p:cNvPr id="4" name="headline">
             <a:extLst xmlns:a="http://schemas.openxmlformats.org/drawingml/2006/main">
               <a:ext uri="{FF2B5EF4-FFF2-40B4-BE49-F238E27FC236}">
-                <a16:creationId xmlns:a16="http://schemas.microsoft.com/office/drawing/2014/main" id="{96E0266A-C121-4480-8359-91E1C3F7C13E}"/>
+                <a16:creationId xmlns:a16="http://schemas.microsoft.com/office/drawing/2014/main" id="{1CF8123F-5FA8-4B92-8A5C-1CB2DFED53DC}"/>
               </a:ext>
             </a:extLst>
           </p:cNvPr>
@@ -32850,7 +32850,7 @@
           <p:cNvPr id="5" name="scope">
             <a:extLst xmlns:a="http://schemas.openxmlformats.org/drawingml/2006/main">
               <a:ext uri="{FF2B5EF4-FFF2-40B4-BE49-F238E27FC236}">
-                <a16:creationId xmlns:a16="http://schemas.microsoft.com/office/drawing/2014/main" id="{E6596D5D-7F93-4978-85C1-3CF288E8EFEE}"/>
+                <a16:creationId xmlns:a16="http://schemas.microsoft.com/office/drawing/2014/main" id="{D4BD1A16-64DC-4C7E-B119-4D44B42C895D}"/>
               </a:ext>
             </a:extLst>
           </p:cNvPr>
@@ -34186,7 +34186,7 @@
           <p:cNvPr id="7" name="footer">
             <a:extLst xmlns:a="http://schemas.openxmlformats.org/drawingml/2006/main">
               <a:ext uri="{FF2B5EF4-FFF2-40B4-BE49-F238E27FC236}">
-                <a16:creationId xmlns:a16="http://schemas.microsoft.com/office/drawing/2014/main" id="{AD714D4A-9B3E-4E05-B30F-7C4FE95D1138}"/>
+                <a16:creationId xmlns:a16="http://schemas.microsoft.com/office/drawing/2014/main" id="{EBA1B850-67B8-452E-9A4A-32B3B7F45FF3}"/>
               </a:ext>
             </a:extLst>
           </p:cNvPr>
@@ -34241,7 +34241,7 @@
     </p:spTree>
     <p:extLst>
       <p:ext uri="{BB962C8B-B14F-4D97-AF65-F5344CB8AC3E}">
-        <p14:creationId xmlns:p14="http://schemas.microsoft.com/office/powerpoint/2010/main" val="1815268114"/>
+        <p14:creationId xmlns:p14="http://schemas.microsoft.com/office/powerpoint/2010/main" val="1816452385"/>
       </p:ext>
     </p:extLst>
   </p:cSld>
